--- a/slides/2026-10-02_研究進捗報告_claude.pptx
+++ b/slides/2026-10-02_研究進捗報告_claude.pptx
@@ -15,6 +15,9 @@
     <p:sldId id="260" r:id="rId6"/>
     <p:sldId id="261" r:id="rId7"/>
     <p:sldId id="262" r:id="rId8"/>
+    <p:sldId id="291" r:id="rId44"/>
+    <p:sldId id="292" r:id="rId45"/>
+    <p:sldId id="293" r:id="rId46"/>
     <p:sldId id="263" r:id="rId9"/>
     <p:sldId id="264" r:id="rId10"/>
     <p:sldId id="265" r:id="rId11"/>
@@ -160,6 +163,73 @@
 </p:presentation>
 </file>
 
+<file path=ppt/revisionInfo.xml><?xml version="1.0" encoding="utf-8"?>
+<p1510:revInfo xmlns:a="http://schemas.openxmlformats.org/drawingml/2006/main" xmlns:r="http://schemas.openxmlformats.org/officeDocument/2006/relationships" xmlns:p1510="http://schemas.microsoft.com/office/powerpoint/2015/10/main">
+  <p1510:revLst>
+    <p1510:client id="{0C18A6C4-2C47-4DAD-A1DF-DD0206B853E7}" v="2" dt="2026-10-02T01:15:06.370"/>
+  </p1510:revLst>
+</p1510:revInfo>
+</file>
+
+<file path=ppt/changesInfos/changesInfo1.xml><?xml version="1.0" encoding="utf-8"?>
+<pc:chgInfo xmlns:a="http://schemas.openxmlformats.org/drawingml/2006/main" xmlns:r="http://schemas.openxmlformats.org/officeDocument/2006/relationships" xmlns:ac="http://schemas.microsoft.com/office/drawing/2013/main/command" xmlns:pc="http://schemas.microsoft.com/office/powerpoint/2013/main/command">
+  <pc:docChgLst>
+    <pc:chgData name="202304239" userId="ab1adf7a-b8eb-4038-b404-de23e20d8a3a" providerId="ADAL" clId="{6C0E59ED-D716-49AF-B2FA-B94E7B8E5A8C}"/>
+    <pc:docChg chg="modSld">
+      <pc:chgData name="202304239" userId="ab1adf7a-b8eb-4038-b404-de23e20d8a3a" providerId="ADAL" clId="{6C0E59ED-D716-49AF-B2FA-B94E7B8E5A8C}" dt="2026-10-02T01:41:32.636" v="29" actId="20577"/>
+      <pc:docMkLst>
+        <pc:docMk/>
+      </pc:docMkLst>
+      <pc:sldChg chg="modSp mod">
+        <pc:chgData name="202304239" userId="ab1adf7a-b8eb-4038-b404-de23e20d8a3a" providerId="ADAL" clId="{6C0E59ED-D716-49AF-B2FA-B94E7B8E5A8C}" dt="2026-10-02T01:41:32.636" v="29" actId="20577"/>
+        <pc:sldMkLst>
+          <pc:docMk/>
+          <pc:sldMk cId="0" sldId="257"/>
+        </pc:sldMkLst>
+        <pc:spChg chg="mod">
+          <ac:chgData name="202304239" userId="ab1adf7a-b8eb-4038-b404-de23e20d8a3a" providerId="ADAL" clId="{6C0E59ED-D716-49AF-B2FA-B94E7B8E5A8C}" dt="2026-10-02T01:41:32.636" v="29" actId="20577"/>
+          <ac:spMkLst>
+            <pc:docMk/>
+            <pc:sldMk cId="0" sldId="257"/>
+            <ac:spMk id="3" creationId="{00000000-0000-0000-0000-000000000000}"/>
+          </ac:spMkLst>
+        </pc:spChg>
+      </pc:sldChg>
+      <pc:sldChg chg="modSp mod">
+        <pc:chgData name="202304239" userId="ab1adf7a-b8eb-4038-b404-de23e20d8a3a" providerId="ADAL" clId="{6C0E59ED-D716-49AF-B2FA-B94E7B8E5A8C}" dt="2026-10-02T01:15:41.310" v="14" actId="1076"/>
+        <pc:sldMkLst>
+          <pc:docMk/>
+          <pc:sldMk cId="0" sldId="258"/>
+        </pc:sldMkLst>
+        <pc:spChg chg="mod">
+          <ac:chgData name="202304239" userId="ab1adf7a-b8eb-4038-b404-de23e20d8a3a" providerId="ADAL" clId="{6C0E59ED-D716-49AF-B2FA-B94E7B8E5A8C}" dt="2026-10-02T01:15:41.310" v="14" actId="1076"/>
+          <ac:spMkLst>
+            <pc:docMk/>
+            <pc:sldMk cId="0" sldId="258"/>
+            <ac:spMk id="7" creationId="{0C0F810D-B137-252F-B137-69AD8335E4B7}"/>
+          </ac:spMkLst>
+        </pc:spChg>
+      </pc:sldChg>
+      <pc:sldChg chg="modSp">
+        <pc:chgData name="202304239" userId="ab1adf7a-b8eb-4038-b404-de23e20d8a3a" providerId="ADAL" clId="{6C0E59ED-D716-49AF-B2FA-B94E7B8E5A8C}" dt="2026-10-02T01:13:59.581" v="0"/>
+        <pc:sldMkLst>
+          <pc:docMk/>
+          <pc:sldMk cId="0" sldId="259"/>
+        </pc:sldMkLst>
+        <pc:spChg chg="mod">
+          <ac:chgData name="202304239" userId="ab1adf7a-b8eb-4038-b404-de23e20d8a3a" providerId="ADAL" clId="{6C0E59ED-D716-49AF-B2FA-B94E7B8E5A8C}" dt="2026-10-02T01:13:59.581" v="0"/>
+          <ac:spMkLst>
+            <pc:docMk/>
+            <pc:sldMk cId="0" sldId="259"/>
+            <ac:spMk id="3" creationId="{00000000-0000-0000-0000-000000000000}"/>
+          </ac:spMkLst>
+        </pc:spChg>
+      </pc:sldChg>
+    </pc:docChg>
+  </pc:docChgLst>
+</pc:chgInfo>
+</file>
+
 <file path=ppt/notesMasters/notesMaster1.xml><?xml version="1.0" encoding="utf-8"?>
 <p:notesMaster xmlns:a="http://schemas.openxmlformats.org/drawingml/2006/main" xmlns:r="http://schemas.openxmlformats.org/officeDocument/2006/relationships" xmlns:p="http://schemas.openxmlformats.org/presentationml/2006/main">
   <p:cSld>
@@ -809,7 +879,7 @@
           <a:lstStyle/>
           <a:p>
             <a:r>
-              <a:t>何も無い空 23 か所は 10/2 に今のコードで計算し直した (値は 7 月と同じ 1.264)。ばらつき = 0 からのずれの 2 乗平均の平方根。光子が十分あるビン 2–10 (2.6–169 GeV) の 207 個から計算。</a:t>
+              <a:t>ばらつき = 0 からのずれの 2 乗平均の平方根。光子が十分あるビン 2–10 (2.6–169 GeV) の 207 個から計算。</a:t>
             </a:r>
           </a:p>
           <a:p>
@@ -1299,11 +1369,6 @@
           </a:p>
           <a:p>
             <a:r>
-              <a:t>10/2 に今のコード (天の川の v20r と同じ版) で 79 か所すべてを計算し直した結果 (cloud_reports/2026-10-02_v20r_targets/)。7 月の結果との差は中央値 0.0002σ、最大 0.64σ。</a:t>
-            </a:r>
-          </a:p>
-          <a:p>
-            <a:r>
               <a:t>図は slides/figs/plot_dwarf_results.py で作った。</a:t>
             </a:r>
           </a:p>
@@ -1389,11 +1454,6 @@
           </a:p>
           <a:p>
             <a:r>
-              <a:t>天の川のハローの明るさは v20r (10/1 再計算) の値、各天体の有意度は 10/2 の再計算。v20 の値を使っても 1.73 と 0.39 は変わらない。</a:t>
-            </a:r>
-          </a:p>
-          <a:p>
-            <a:r>
               <a:t>注意: 9/28 の計算は SMC・LMC を誤って含めていた (予測 2.69σ のうち 2.06σ が SMC 1 天体)。</a:t>
             </a:r>
           </a:p>
@@ -2780,6 +2840,266 @@
           </p:cNvSpPr>
           <p:nvPr>
             <p:ph type="sldNum" sz="quarter" idx="5"/>
+          </p:nvPr>
+        </p:nvSpPr>
+        <p:spPr/>
+      </p:sp>
+    </p:spTree>
+  </p:cSld>
+  <p:clrMapOvr>
+    <a:masterClrMapping/>
+  </p:clrMapOvr>
+</p:notes>
+</file>
+
+<file path=ppt/notesSlides/notesSlide35.xml><?xml version="1.0" encoding="utf-8"?>
+<p:notes xmlns:a="http://schemas.openxmlformats.org/drawingml/2006/main" xmlns:p="http://schemas.openxmlformats.org/presentationml/2006/main" xmlns:r="http://schemas.openxmlformats.org/officeDocument/2006/relationships">
+  <p:cSld>
+    <p:spTree>
+      <p:nvGrpSpPr>
+        <p:cNvPr id="1" name=""/>
+        <p:cNvGrpSpPr/>
+        <p:nvPr/>
+      </p:nvGrpSpPr>
+      <p:grpSpPr>
+        <a:xfrm>
+          <a:off x="0" y="0"/>
+          <a:ext cx="0" cy="0"/>
+          <a:chOff x="0" y="0"/>
+          <a:chExt cx="0" cy="0"/>
+        </a:xfrm>
+      </p:grpSpPr>
+      <p:sp>
+        <p:nvSpPr>
+          <p:cNvPr id="2" name="Slide Image Placeholder 1"/>
+          <p:cNvSpPr>
+            <a:spLocks noGrp="1"/>
+          </p:cNvSpPr>
+          <p:nvPr>
+            <p:ph type="sldImg" idx="2"/>
+          </p:nvPr>
+        </p:nvSpPr>
+        <p:spPr/>
+      </p:sp>
+      <p:sp>
+        <p:nvSpPr>
+          <p:cNvPr id="3" name="Notes Placeholder 2"/>
+          <p:cNvSpPr>
+            <a:spLocks noGrp="1"/>
+          </p:cNvSpPr>
+          <p:nvPr>
+            <p:ph type="body" idx="3" sz="quarter"/>
+          </p:nvPr>
+        </p:nvSpPr>
+        <p:spPr/>
+        <p:txBody>
+          <a:bodyPr/>
+          <a:lstStyle/>
+          <a:p>
+            <a:r>
+              <a:t>ベイズの定理: 「データを見る前の考え (事前分布)」を「データの当てはまり (尤度)」で更新すると「データを見た後の考え (事後分布)」になる。</a:t>
+            </a:r>
+          </a:p>
+          <a:p>
+            <a:r>
+              <a:t>事前分布は一様: 倍率の符号の制約 (ハローとバブル負以外は 0 以上) と、|f| ≤ 10⁶ の広い制限だけ。だから事後分布の形は尤度の形とほぼ同じ。</a:t>
+            </a:r>
+          </a:p>
+          <a:p>
+            <a:r>
+              <a:t>P(D) (証拠) は全部の θ について足し合わせた値で、計算がとても大変。でも MCMC では「2 つの点の比」しか使わないので、割り算で消えて計算しなくてよい。</a:t>
+            </a:r>
+          </a:p>
+          <a:p>
+            <a:r>
+              <a:t>たとえ: 9 次元の山の地形図を全部描くのは無理なので、山の上を歩き回って「よく通った場所 = 高い場所」を記録する。</a:t>
+            </a:r>
+          </a:p>
+        </p:txBody>
+      </p:sp>
+      <p:sp>
+        <p:nvSpPr>
+          <p:cNvPr id="4" name="Slide Number Placeholder 3"/>
+          <p:cNvSpPr>
+            <a:spLocks noGrp="1"/>
+          </p:cNvSpPr>
+          <p:nvPr>
+            <p:ph type="sldNum" idx="5" sz="quarter"/>
+          </p:nvPr>
+        </p:nvSpPr>
+        <p:spPr/>
+      </p:sp>
+    </p:spTree>
+  </p:cSld>
+  <p:clrMapOvr>
+    <a:masterClrMapping/>
+  </p:clrMapOvr>
+</p:notes>
+</file>
+
+<file path=ppt/notesSlides/notesSlide36.xml><?xml version="1.0" encoding="utf-8"?>
+<p:notes xmlns:a="http://schemas.openxmlformats.org/drawingml/2006/main" xmlns:p="http://schemas.openxmlformats.org/presentationml/2006/main" xmlns:r="http://schemas.openxmlformats.org/officeDocument/2006/relationships">
+  <p:cSld>
+    <p:spTree>
+      <p:nvGrpSpPr>
+        <p:cNvPr id="1" name=""/>
+        <p:cNvGrpSpPr/>
+        <p:nvPr/>
+      </p:nvGrpSpPr>
+      <p:grpSpPr>
+        <a:xfrm>
+          <a:off x="0" y="0"/>
+          <a:ext cx="0" cy="0"/>
+          <a:chOff x="0" y="0"/>
+          <a:chExt cx="0" cy="0"/>
+        </a:xfrm>
+      </p:grpSpPr>
+      <p:sp>
+        <p:nvSpPr>
+          <p:cNvPr id="2" name="Slide Image Placeholder 1"/>
+          <p:cNvSpPr>
+            <a:spLocks noGrp="1"/>
+          </p:cNvSpPr>
+          <p:nvPr>
+            <p:ph type="sldImg" idx="2"/>
+          </p:nvPr>
+        </p:nvSpPr>
+        <p:spPr/>
+      </p:sp>
+      <p:sp>
+        <p:nvSpPr>
+          <p:cNvPr id="3" name="Notes Placeholder 2"/>
+          <p:cNvSpPr>
+            <a:spLocks noGrp="1"/>
+          </p:cNvSpPr>
+          <p:nvPr>
+            <p:ph type="body" idx="3" sz="quarter"/>
+          </p:nvPr>
+        </p:nvSpPr>
+        <p:spPr/>
+        <p:txBody>
+          <a:bodyPr/>
+          <a:lstStyle/>
+          <a:p>
+            <a:r>
+              <a:t>③ がポイント: 上り坂 (もっともらしさが上がる) には必ず進み、下り坂にも r の確率で進む。いつも上るだけだと山頂 (最尤推定) で止まってしまい、誤差が分からない。</a:t>
+            </a:r>
+          </a:p>
+          <a:p>
+            <a:r>
+              <a:t>このルールで歩くと、長い目で見て「各点にいる時間の割合」が事後分布 P(θ | D) に比例するようになる (詳細つり合い)。</a:t>
+            </a:r>
+          </a:p>
+          <a:p>
+            <a:r>
+              <a:t>図は説明用のおもちゃの例 (実データではない): 1 つの倍率 f の事後分布を平均 1.48・幅 0.075 の山と仮定して 3000 歩。わざと山から離れた 1.2 から出発させたので、最初の 200 歩は山にたどり着くまでの途中 → 捨てる (バーンイン)。残りのヒストグラムが本当の分布 (点線) と重なる。</a:t>
+            </a:r>
+          </a:p>
+          <a:p>
+            <a:r>
+              <a:t>図は slides/figs/plot_mcmc_toy.py で作った。</a:t>
+            </a:r>
+          </a:p>
+        </p:txBody>
+      </p:sp>
+      <p:sp>
+        <p:nvSpPr>
+          <p:cNvPr id="4" name="Slide Number Placeholder 3"/>
+          <p:cNvSpPr>
+            <a:spLocks noGrp="1"/>
+          </p:cNvSpPr>
+          <p:nvPr>
+            <p:ph type="sldNum" idx="5" sz="quarter"/>
+          </p:nvPr>
+        </p:nvSpPr>
+        <p:spPr/>
+      </p:sp>
+    </p:spTree>
+  </p:cSld>
+  <p:clrMapOvr>
+    <a:masterClrMapping/>
+  </p:clrMapOvr>
+</p:notes>
+</file>
+
+<file path=ppt/notesSlides/notesSlide37.xml><?xml version="1.0" encoding="utf-8"?>
+<p:notes xmlns:a="http://schemas.openxmlformats.org/drawingml/2006/main" xmlns:p="http://schemas.openxmlformats.org/presentationml/2006/main" xmlns:r="http://schemas.openxmlformats.org/officeDocument/2006/relationships">
+  <p:cSld>
+    <p:spTree>
+      <p:nvGrpSpPr>
+        <p:cNvPr id="1" name=""/>
+        <p:cNvGrpSpPr/>
+        <p:nvPr/>
+      </p:nvGrpSpPr>
+      <p:grpSpPr>
+        <a:xfrm>
+          <a:off x="0" y="0"/>
+          <a:ext cx="0" cy="0"/>
+          <a:chOff x="0" y="0"/>
+          <a:chExt cx="0" cy="0"/>
+        </a:xfrm>
+      </p:grpSpPr>
+      <p:sp>
+        <p:nvSpPr>
+          <p:cNvPr id="2" name="Slide Image Placeholder 1"/>
+          <p:cNvSpPr>
+            <a:spLocks noGrp="1"/>
+          </p:cNvSpPr>
+          <p:nvPr>
+            <p:ph type="sldImg" idx="2"/>
+          </p:nvPr>
+        </p:nvSpPr>
+        <p:spPr/>
+      </p:sp>
+      <p:sp>
+        <p:nvSpPr>
+          <p:cNvPr id="3" name="Notes Placeholder 2"/>
+          <p:cNvSpPr>
+            <a:spLocks noGrp="1"/>
+          </p:cNvSpPr>
+          <p:nvPr>
+            <p:ph type="body" idx="3" sz="quarter"/>
+          </p:nvPr>
+        </p:nvSpPr>
+        <p:spPr/>
+        <p:txBody>
+          <a:bodyPr/>
+          <a:lstStyle/>
+          <a:p>
+            <a:r>
+              <a:t>ストレッチ移動 (Goodman &amp; Weare 2010): 自分 X_k と、他の歩行者 X_j を結ぶ直線の上で、Z 倍だけ伸ばしたり縮めたりした点を候補にする。他の歩行者の散らばり方を使うので、細長い山 (パラメータ同士が強く相関している、例えばガスと ICS の縮退) でも効率よく歩ける。</a:t>
+            </a:r>
+          </a:p>
+          <a:p>
+            <a:r>
+              <a:t>Z⁸ の 8 は「パラメータの数 9 − 1」。直線上で伸び縮みさせた分の補正。Z の範囲 1/2〜2 は emcee の既定値 (a = 2)。</a:t>
+            </a:r>
+          </a:p>
+          <a:p>
+            <a:r>
+              <a:t>68% 区間 = 記録したサンプルの下から 16% と 84% の値。</a:t>
+            </a:r>
+          </a:p>
+          <a:p>
+            <a:r>
+              <a:t>自己相関時間 τ: 何歩離れたら前の位置を「忘れる」か。50τ 以上は emcee の推奨。足りない場合は最大 6000 歩まで自動で延ばしたが、それでも届かないビンが多い。</a:t>
+            </a:r>
+          </a:p>
+          <a:p>
+            <a:r>
+              <a:t>数字は results/mcmc_allbins_gasICS_v20r_rerun/mcmc_bin06.json から。</a:t>
+            </a:r>
+          </a:p>
+        </p:txBody>
+      </p:sp>
+      <p:sp>
+        <p:nvSpPr>
+          <p:cNvPr id="4" name="Slide Number Placeholder 3"/>
+          <p:cNvSpPr>
+            <a:spLocks noGrp="1"/>
+          </p:cNvSpPr>
+          <p:nvPr>
+            <p:ph type="sldNum" idx="5" sz="quarter"/>
           </p:nvPr>
         </p:nvSpPr>
         <p:spPr/>
@@ -7900,16 +8220,12 @@
           </a:p>
           <a:p>
             <a:r>
-              <a:rPr sz="2400" b="1"/>
-              <a:t>研究</a:t>
-            </a:r>
-            <a:r>
               <a:rPr lang="ja-JP" altLang="en-US" sz="2400" b="1"/>
               <a:t>卒業</a:t>
             </a:r>
             <a:r>
               <a:rPr sz="2400" b="1"/>
-              <a:t>：これを自分で再現し、本物かどうか確かめる</a:t>
+              <a:t>研究：これを自分で再現し、本物かどうか確かめる</a:t>
             </a:r>
             <a:endParaRPr lang="en-US" sz="2400" b="1"/>
           </a:p>
@@ -9569,8 +9885,8 @@
         </p:nvSpPr>
         <p:spPr>
           <a:xfrm>
-            <a:off x="9995606" y="4690094"/>
-            <a:ext cx="1753564" cy="707886"/>
+            <a:off x="9496448" y="4625926"/>
+            <a:ext cx="2630772" cy="954107"/>
           </a:xfrm>
           <a:prstGeom prst="rect">
             <a:avLst/>
@@ -9584,13 +9900,24 @@
           <a:lstStyle/>
           <a:p>
             <a:r>
-              <a:rPr lang="ja-JP" altLang="en-US" sz="4000"/>
+              <a:rPr lang="ja-JP" altLang="en-US" sz="2800"/>
               <a:t>６</a:t>
             </a:r>
             <a:r>
-              <a:rPr lang="en-US" altLang="ja-JP" sz="4000"/>
+              <a:rPr lang="en-US" altLang="ja-JP" sz="2800"/>
               <a:t>bin</a:t>
             </a:r>
+            <a:r>
+              <a:rPr lang="en-US" sz="2800"/>
+              <a:t> </a:t>
+            </a:r>
+          </a:p>
+          <a:p>
+            <a:r>
+              <a:rPr lang="en-US" sz="2800"/>
+              <a:t>（20.8 GeV）</a:t>
+            </a:r>
+            <a:endParaRPr lang="en-US" altLang="ja-JP" sz="2800"/>
           </a:p>
         </p:txBody>
       </p:sp>
@@ -10285,6 +10612,501 @@
 </p:sld>
 </file>
 
+<file path=ppt/slides/slide36.xml><?xml version="1.0" encoding="utf-8"?>
+<p:sld xmlns:a="http://schemas.openxmlformats.org/drawingml/2006/main" xmlns:p="http://schemas.openxmlformats.org/presentationml/2006/main" xmlns:r="http://schemas.openxmlformats.org/officeDocument/2006/relationships">
+  <p:cSld>
+    <p:spTree>
+      <p:nvGrpSpPr>
+        <p:cNvPr id="1" name=""/>
+        <p:cNvGrpSpPr/>
+        <p:nvPr/>
+      </p:nvGrpSpPr>
+      <p:grpSpPr/>
+      <p:sp>
+        <p:nvSpPr>
+          <p:cNvPr id="2" name="Title 1"/>
+          <p:cNvSpPr>
+            <a:spLocks noGrp="1"/>
+          </p:cNvSpPr>
+          <p:nvPr>
+            <p:ph type="title"/>
+          </p:nvPr>
+        </p:nvSpPr>
+        <p:spPr/>
+        <p:txBody>
+          <a:bodyPr/>
+          <a:lstStyle/>
+          <a:p>
+            <a:r>
+              <a:rPr sz="3400"/>
+              <a:t>MCMC の中身①：何を求めているか</a:t>
+            </a:r>
+          </a:p>
+        </p:txBody>
+      </p:sp>
+      <p:sp>
+        <p:nvSpPr>
+          <p:cNvPr id="3" name="Content Placeholder 2"/>
+          <p:cNvSpPr>
+            <a:spLocks noGrp="1"/>
+          </p:cNvSpPr>
+          <p:nvPr>
+            <p:ph idx="1"/>
+          </p:nvPr>
+        </p:nvSpPr>
+        <p:spPr>
+          <a:xfrm>
+            <a:off x="841248" y="1463040"/>
+            <a:ext cx="10515600" cy="4114800"/>
+          </a:xfrm>
+        </p:spPr>
+        <p:txBody>
+          <a:bodyPr/>
+          <a:lstStyle/>
+          <a:p>
+            <a:pPr/>
+            <a:r>
+              <a:rPr sz="2200"/>
+              <a:t>知りたいもの：データ D を見たあと、倍率 θ = (f₁, …, f₉) がどの値をとりうるか</a:t>
+            </a:r>
+          </a:p>
+          <a:p>
+            <a:pPr/>
+            <a:r>
+              <a:rPr sz="2200"/>
+              <a:t>ベイズの定理：P(θ | D) = L(D | θ) π(θ) / P(D)</a:t>
+            </a:r>
+          </a:p>
+          <a:p>
+            <a:pPr lvl="1"/>
+            <a:r>
+              <a:rPr sz="1800"/>
+              <a:t>P(θ | D)：事後分布（データを見た後の、θ のもっともらしさ）</a:t>
+            </a:r>
+          </a:p>
+          <a:p>
+            <a:pPr lvl="1"/>
+            <a:r>
+              <a:rPr sz="1800"/>
+              <a:t>L(D | θ)：尤度（手法② の L）　π(θ)：事前分布（今回は一様）</a:t>
+            </a:r>
+          </a:p>
+          <a:p>
+            <a:pPr lvl="1"/>
+            <a:r>
+              <a:rPr sz="1800"/>
+              <a:t>P(D)：θ によらない定数 → 計算しなくてよい</a:t>
+            </a:r>
+          </a:p>
+          <a:p>
+            <a:pPr/>
+            <a:r>
+              <a:rPr sz="2200"/>
+              <a:t>つまり P(θ | D) ∝ L(D | θ) × π(θ)</a:t>
+            </a:r>
+          </a:p>
+          <a:p>
+            <a:pPr/>
+            <a:r>
+              <a:rPr sz="2200"/>
+              <a:t>ただし θ は 9 次元。1 次元を 100 点に区切っても 100⁹ = 10¹⁸ 通り → 全部は計算できない</a:t>
+            </a:r>
+          </a:p>
+          <a:p>
+            <a:pPr/>
+            <a:r>
+              <a:rPr sz="2200"/>
+              <a:t>→ 事後分布から「サンプルを取り出す」方法が MCMC</a:t>
+            </a:r>
+          </a:p>
+        </p:txBody>
+      </p:sp>
+      <p:sp>
+        <p:nvSpPr>
+          <p:cNvPr id="8" name="TextBox 7">
+            <a:extLst>
+              <a:ext uri="{FF2B5EF4-FFF2-40B4-BE49-F238E27FC236}">
+                <a16:creationId xmlns:a16="http://schemas.microsoft.com/office/drawing/2014/main" id="{F85CD606-E3CE-F314-B3EE-F3D7028115CB}"/>
+              </a:ext>
+            </a:extLst>
+          </p:cNvPr>
+          <p:cNvSpPr txBox="1"/>
+          <p:nvPr/>
+        </p:nvSpPr>
+        <p:spPr>
+          <a:xfrm>
+            <a:off x="5837182" y="5663239"/>
+            <a:ext cx="6093372" cy="923330"/>
+          </a:xfrm>
+          <a:prstGeom prst="rect">
+            <a:avLst/>
+          </a:prstGeom>
+          <a:noFill/>
+        </p:spPr>
+        <p:txBody>
+          <a:bodyPr wrap="square">
+            <a:spAutoFit/>
+          </a:bodyPr>
+          <a:lstStyle/>
+          <a:p>
+            <a:r>
+              <a:rPr lang="en-US" sz="1400" b="1"/>
+              <a:t>Reference:</a:t>
+            </a:r>
+            <a:r>
+              <a:rPr lang="en-US" sz="1400"/>
+              <a:t> D. Foreman-Mackey et al. (2013), PASP 125, 306</a:t>
+            </a:r>
+            <a:endParaRPr lang="en-US"/>
+          </a:p>
+        </p:txBody>
+      </p:sp>
+    </p:spTree>
+  </p:cSld>
+  <p:clrMapOvr>
+    <a:masterClrMapping/>
+  </p:clrMapOvr>
+</p:sld>
+</file>
+
+<file path=ppt/slides/slide37.xml><?xml version="1.0" encoding="utf-8"?>
+<p:sld xmlns:a="http://schemas.openxmlformats.org/drawingml/2006/main" xmlns:p="http://schemas.openxmlformats.org/presentationml/2006/main" xmlns:r="http://schemas.openxmlformats.org/officeDocument/2006/relationships">
+  <p:cSld>
+    <p:spTree>
+      <p:nvGrpSpPr>
+        <p:cNvPr id="1" name=""/>
+        <p:cNvGrpSpPr/>
+        <p:nvPr/>
+      </p:nvGrpSpPr>
+      <p:grpSpPr/>
+      <p:sp>
+        <p:nvSpPr>
+          <p:cNvPr id="2" name="Title 1"/>
+          <p:cNvSpPr>
+            <a:spLocks noGrp="1"/>
+          </p:cNvSpPr>
+          <p:nvPr>
+            <p:ph type="title"/>
+          </p:nvPr>
+        </p:nvSpPr>
+        <p:spPr/>
+        <p:txBody>
+          <a:bodyPr/>
+          <a:lstStyle/>
+          <a:p>
+            <a:r>
+              <a:rPr sz="3400"/>
+              <a:t>MCMC の中身②：歩き方（メトロポリス法）</a:t>
+            </a:r>
+          </a:p>
+        </p:txBody>
+      </p:sp>
+      <p:sp>
+        <p:nvSpPr>
+          <p:cNvPr id="3" name="Content Placeholder 2"/>
+          <p:cNvSpPr>
+            <a:spLocks noGrp="1"/>
+          </p:cNvSpPr>
+          <p:nvPr>
+            <p:ph idx="1"/>
+          </p:nvPr>
+        </p:nvSpPr>
+        <p:spPr>
+          <a:xfrm>
+            <a:off x="841248" y="1463040"/>
+            <a:ext cx="5394960" cy="4114800"/>
+          </a:xfrm>
+        </p:spPr>
+        <p:txBody>
+          <a:bodyPr/>
+          <a:lstStyle/>
+          <a:p>
+            <a:pPr/>
+            <a:r>
+              <a:rPr sz="2000"/>
+              <a:t>① 今の点 θ から、少しずらした候補 θ′ を作る</a:t>
+            </a:r>
+          </a:p>
+          <a:p>
+            <a:pPr/>
+            <a:r>
+              <a:rPr sz="2000"/>
+              <a:t>② 比 r = P(θ′ | D) / P(θ | D) を計算</a:t>
+            </a:r>
+          </a:p>
+          <a:p>
+            <a:pPr lvl="1"/>
+            <a:r>
+              <a:rPr sz="1600"/>
+              <a:t>P(D) は分母分子で消える</a:t>
+            </a:r>
+          </a:p>
+          <a:p>
+            <a:pPr/>
+            <a:r>
+              <a:rPr sz="2000"/>
+              <a:t>③ r ≥ 1 なら移る。r &lt; 1 なら確率 r で移る</a:t>
+            </a:r>
+          </a:p>
+          <a:p>
+            <a:pPr lvl="1"/>
+            <a:r>
+              <a:rPr sz="1600"/>
+              <a:t>移らなければ、同じ点をもう一度記録</a:t>
+            </a:r>
+          </a:p>
+          <a:p>
+            <a:pPr/>
+            <a:r>
+              <a:rPr sz="2000"/>
+              <a:t>④ ①〜③ を何千回もくり返す</a:t>
+            </a:r>
+          </a:p>
+          <a:p>
+            <a:pPr/>
+            <a:r>
+              <a:rPr sz="2000"/>
+              <a:t>歩いた跡のヒストグラム = 事後分布</a:t>
+            </a:r>
+          </a:p>
+          <a:p>
+            <a:pPr lvl="1"/>
+            <a:r>
+              <a:rPr sz="1600"/>
+              <a:t>下がる方向にも確率的に進むので、山の広がり（誤差）まで分かる</a:t>
+            </a:r>
+          </a:p>
+        </p:txBody>
+      </p:sp>
+      <p:sp>
+        <p:nvSpPr>
+          <p:cNvPr id="8" name="TextBox 7">
+            <a:extLst>
+              <a:ext uri="{FF2B5EF4-FFF2-40B4-BE49-F238E27FC236}">
+                <a16:creationId xmlns:a16="http://schemas.microsoft.com/office/drawing/2014/main" id="{F85CD606-E3CE-F314-B3EE-F3D7028115CB}"/>
+              </a:ext>
+            </a:extLst>
+          </p:cNvPr>
+          <p:cNvSpPr txBox="1"/>
+          <p:nvPr/>
+        </p:nvSpPr>
+        <p:spPr>
+          <a:xfrm>
+            <a:off x="5837182" y="5663239"/>
+            <a:ext cx="6093372" cy="923330"/>
+          </a:xfrm>
+          <a:prstGeom prst="rect">
+            <a:avLst/>
+          </a:prstGeom>
+          <a:noFill/>
+        </p:spPr>
+        <p:txBody>
+          <a:bodyPr wrap="square">
+            <a:spAutoFit/>
+          </a:bodyPr>
+          <a:lstStyle/>
+          <a:p>
+            <a:r>
+              <a:rPr lang="en-US" sz="1400" b="1"/>
+              <a:t>Reference:</a:t>
+            </a:r>
+            <a:r>
+              <a:rPr lang="en-US" sz="1400"/>
+              <a:t> N. Metropolis et al. (1953), J. Chem. Phys. 21, 1087</a:t>
+            </a:r>
+            <a:endParaRPr lang="en-US"/>
+          </a:p>
+        </p:txBody>
+      </p:sp>
+      <p:pic>
+        <p:nvPicPr>
+          <p:cNvPr id="9" name="Picture 8" descr="fig_mcmc_toy.png"/>
+          <p:cNvPicPr>
+            <a:picLocks noChangeAspect="1"/>
+          </p:cNvPicPr>
+          <p:nvPr/>
+        </p:nvPicPr>
+        <p:blipFill>
+          <a:blip r:embed="rId3"/>
+          <a:stretch>
+            <a:fillRect/>
+          </a:stretch>
+        </p:blipFill>
+        <p:spPr>
+          <a:xfrm>
+            <a:off x="6309360" y="1828800"/>
+            <a:ext cx="5669280" cy="2267712"/>
+          </a:xfrm>
+          <a:prstGeom prst="rect">
+            <a:avLst/>
+          </a:prstGeom>
+        </p:spPr>
+      </p:pic>
+    </p:spTree>
+  </p:cSld>
+  <p:clrMapOvr>
+    <a:masterClrMapping/>
+  </p:clrMapOvr>
+</p:sld>
+</file>
+
+<file path=ppt/slides/slide38.xml><?xml version="1.0" encoding="utf-8"?>
+<p:sld xmlns:a="http://schemas.openxmlformats.org/drawingml/2006/main" xmlns:p="http://schemas.openxmlformats.org/presentationml/2006/main" xmlns:r="http://schemas.openxmlformats.org/officeDocument/2006/relationships">
+  <p:cSld>
+    <p:spTree>
+      <p:nvGrpSpPr>
+        <p:cNvPr id="1" name=""/>
+        <p:cNvGrpSpPr/>
+        <p:nvPr/>
+      </p:nvGrpSpPr>
+      <p:grpSpPr/>
+      <p:sp>
+        <p:nvSpPr>
+          <p:cNvPr id="2" name="Title 1"/>
+          <p:cNvSpPr>
+            <a:spLocks noGrp="1"/>
+          </p:cNvSpPr>
+          <p:nvPr>
+            <p:ph type="title"/>
+          </p:nvPr>
+        </p:nvSpPr>
+        <p:spPr/>
+        <p:txBody>
+          <a:bodyPr/>
+          <a:lstStyle/>
+          <a:p>
+            <a:r>
+              <a:rPr sz="3400"/>
+              <a:t>MCMC の中身③：今回の設定（emcee）</a:t>
+            </a:r>
+          </a:p>
+        </p:txBody>
+      </p:sp>
+      <p:sp>
+        <p:nvSpPr>
+          <p:cNvPr id="3" name="Content Placeholder 2"/>
+          <p:cNvSpPr>
+            <a:spLocks noGrp="1"/>
+          </p:cNvSpPr>
+          <p:nvPr>
+            <p:ph idx="1"/>
+          </p:nvPr>
+        </p:nvSpPr>
+        <p:spPr>
+          <a:xfrm>
+            <a:off x="841248" y="1463040"/>
+            <a:ext cx="10515600" cy="4114800"/>
+          </a:xfrm>
+        </p:spPr>
+        <p:txBody>
+          <a:bodyPr/>
+          <a:lstStyle/>
+          <a:p>
+            <a:pPr/>
+            <a:r>
+              <a:rPr sz="2000"/>
+              <a:t>32 人の歩行者が同時に歩く。次の一歩は、他の歩行者の位置を使って決める</a:t>
+            </a:r>
+          </a:p>
+          <a:p>
+            <a:pPr lvl="1"/>
+            <a:r>
+              <a:rPr sz="1600"/>
+              <a:t>候補：Y = X_j + Z (X_k − X_j)（X_k：自分、X_j：ランダムに選んだ他の歩行者）</a:t>
+            </a:r>
+          </a:p>
+          <a:p>
+            <a:pPr lvl="1"/>
+            <a:r>
+              <a:rPr sz="1600"/>
+              <a:t>Z は 1/2〜2 の乱数（確率 ∝ 1/√Z）、移る確率 = min(1, Z⁸ P(Y | D) / P(X_k | D))</a:t>
+            </a:r>
+          </a:p>
+          <a:p>
+            <a:pPr/>
+            <a:r>
+              <a:rPr sz="2000"/>
+              <a:t>出発点：最尤推定の点のすぐ近く。最初の 400 歩は捨て、5 歩ごとに記録</a:t>
+            </a:r>
+          </a:p>
+          <a:p>
+            <a:pPr/>
+            <a:r>
+              <a:rPr sz="2000"/>
+              <a:t>結果の例（20.8 GeV）：ハローの倍率 f_halo = 1.48（68% 区間 1.40–1.55）</a:t>
+            </a:r>
+          </a:p>
+          <a:p>
+            <a:pPr/>
+            <a:r>
+              <a:rPr sz="2000"/>
+              <a:t>注意：推奨の長さ（自己相関時間 τ の 50 倍）に届かないビンが多い</a:t>
+            </a:r>
+          </a:p>
+          <a:p>
+            <a:pPr lvl="1"/>
+            <a:r>
+              <a:rPr sz="1600"/>
+              <a:t>20.8 GeV で τ ≈ 127 歩、記録した長さ 5600 歩 &lt; 50τ。13 ビン中 2 ビンだけ到達</a:t>
+            </a:r>
+          </a:p>
+          <a:p>
+            <a:pPr lvl="1"/>
+            <a:r>
+              <a:rPr sz="1600"/>
+              <a:t>→ 誤差棒は目安。有意度 σ は Δln L から出すので影響しない</a:t>
+            </a:r>
+          </a:p>
+        </p:txBody>
+      </p:sp>
+      <p:sp>
+        <p:nvSpPr>
+          <p:cNvPr id="8" name="TextBox 7">
+            <a:extLst>
+              <a:ext uri="{FF2B5EF4-FFF2-40B4-BE49-F238E27FC236}">
+                <a16:creationId xmlns:a16="http://schemas.microsoft.com/office/drawing/2014/main" id="{F85CD606-E3CE-F314-B3EE-F3D7028115CB}"/>
+              </a:ext>
+            </a:extLst>
+          </p:cNvPr>
+          <p:cNvSpPr txBox="1"/>
+          <p:nvPr/>
+        </p:nvSpPr>
+        <p:spPr>
+          <a:xfrm>
+            <a:off x="5837182" y="5663239"/>
+            <a:ext cx="6093372" cy="923330"/>
+          </a:xfrm>
+          <a:prstGeom prst="rect">
+            <a:avLst/>
+          </a:prstGeom>
+          <a:noFill/>
+        </p:spPr>
+        <p:txBody>
+          <a:bodyPr wrap="square">
+            <a:spAutoFit/>
+          </a:bodyPr>
+          <a:lstStyle/>
+          <a:p>
+            <a:r>
+              <a:rPr lang="en-US" sz="1400" b="1"/>
+              <a:t>Reference:</a:t>
+            </a:r>
+            <a:r>
+              <a:rPr lang="en-US" sz="1400"/>
+              <a:t> J. Goodman &amp; J. Weare (2010), Comm. App. Math. Comp. Sci. 5, 65</a:t>
+            </a:r>
+            <a:endParaRPr lang="en-US"/>
+          </a:p>
+        </p:txBody>
+      </p:sp>
+    </p:spTree>
+  </p:cSld>
+  <p:clrMapOvr>
+    <a:masterClrMapping/>
+  </p:clrMapOvr>
+</p:sld>
+</file>
+
 <file path=ppt/slides/slide4.xml><?xml version="1.0" encoding="utf-8"?>
 <p:sld xmlns:a="http://schemas.openxmlformats.org/drawingml/2006/main" xmlns:r="http://schemas.openxmlformats.org/officeDocument/2006/relationships" xmlns:p="http://schemas.openxmlformats.org/presentationml/2006/main">
   <p:cSld>
@@ -10402,7 +11224,23 @@
             </a:r>
             <a:r>
               <a:rPr lang="en-US" sz="2000"/>
-              <a:t>、ICS、</a:t>
+              <a:t>、ICS</a:t>
+            </a:r>
+            <a:r>
+              <a:rPr lang="en-US" sz="1800"/>
+              <a:t> (</a:t>
+            </a:r>
+            <a:r>
+              <a:rPr lang="en-US" sz="2000"/>
+              <a:t>GALPROP)</a:t>
+            </a:r>
+            <a:r>
+              <a:rPr lang="en-US" sz="1800"/>
+              <a:t>、 </a:t>
+            </a:r>
+            <a:r>
+              <a:rPr lang="en-US" sz="2000"/>
+              <a:t>、</a:t>
             </a:r>
             <a:r>
               <a:rPr lang="ja-JP" altLang="en-US" sz="2000"/>

--- a/slides/2026-10-02_研究進捗報告_claude.pptx
+++ b/slides/2026-10-02_研究進捗報告_claude.pptx
@@ -18,6 +18,7 @@
     <p:sldId id="291" r:id="rId44"/>
     <p:sldId id="292" r:id="rId45"/>
     <p:sldId id="293" r:id="rId46"/>
+    <p:sldId id="294" r:id="rId47"/>
     <p:sldId id="263" r:id="rId9"/>
     <p:sldId id="264" r:id="rId10"/>
     <p:sldId id="265" r:id="rId11"/>
@@ -3112,6 +3113,91 @@
 </p:notes>
 </file>
 
+<file path=ppt/notesSlides/notesSlide38.xml><?xml version="1.0" encoding="utf-8"?>
+<p:notes xmlns:a="http://schemas.openxmlformats.org/drawingml/2006/main" xmlns:p="http://schemas.openxmlformats.org/presentationml/2006/main" xmlns:r="http://schemas.openxmlformats.org/officeDocument/2006/relationships">
+  <p:cSld>
+    <p:spTree>
+      <p:nvGrpSpPr>
+        <p:cNvPr id="1" name=""/>
+        <p:cNvGrpSpPr/>
+        <p:nvPr/>
+      </p:nvGrpSpPr>
+      <p:grpSpPr>
+        <a:xfrm>
+          <a:off x="0" y="0"/>
+          <a:ext cx="0" cy="0"/>
+          <a:chOff x="0" y="0"/>
+          <a:chExt cx="0" cy="0"/>
+        </a:xfrm>
+      </p:grpSpPr>
+      <p:sp>
+        <p:nvSpPr>
+          <p:cNvPr id="2" name="Slide Image Placeholder 1"/>
+          <p:cNvSpPr>
+            <a:spLocks noGrp="1"/>
+          </p:cNvSpPr>
+          <p:nvPr>
+            <p:ph type="sldImg" idx="2"/>
+          </p:nvPr>
+        </p:nvSpPr>
+        <p:spPr/>
+      </p:sp>
+      <p:sp>
+        <p:nvSpPr>
+          <p:cNvPr id="3" name="Notes Placeholder 2"/>
+          <p:cNvSpPr>
+            <a:spLocks noGrp="1"/>
+          </p:cNvSpPr>
+          <p:nvPr>
+            <p:ph type="body" idx="3" sz="quarter"/>
+          </p:nvPr>
+        </p:nvSpPr>
+        <p:spPr/>
+        <p:txBody>
+          <a:bodyPr/>
+          <a:lstStyle/>
+          <a:p>
+            <a:r>
+              <a:t>Totani §2.2: "the best-fit values and statistical errors of the fitting parameters f_l are obtained by maximizing the likelihood function using the MCMC method"。</a:t>
+            </a:r>
+          </a:p>
+          <a:p>
+            <a:r>
+              <a:t>勾配法を使う理由: MCMC はランダムに歩くので、ちょうど頂上の点を踏むとは限らない。坂を登る方法のほうが頂上を正確に求められる。実際、勾配法のほうが ln L がわずかに高かった (ハローありで +0.20)。</a:t>
+            </a:r>
+          </a:p>
+          <a:p>
+            <a:r>
+              <a:t>比較はクラウドの計算機 (x86_64) で、同じ型紙・同じ 10° セル尤度・同じ制約。Totani の初期値 (点源・GALPROP = 1、等方 = E²dN/dE 1e-4、他 = 0) から emcee 32 歩行者 × 6000 歩。本人 PC の 19.00σ との差は計算機の違いによるもので、比較は同じ環境どうし。</a:t>
+            </a:r>
+          </a:p>
+          <a:p>
+            <a:r>
+              <a:t>記録: cloud_reports/2026-10-02_totani_style_mcmc_check.md</a:t>
+            </a:r>
+          </a:p>
+        </p:txBody>
+      </p:sp>
+      <p:sp>
+        <p:nvSpPr>
+          <p:cNvPr id="4" name="Slide Number Placeholder 3"/>
+          <p:cNvSpPr>
+            <a:spLocks noGrp="1"/>
+          </p:cNvSpPr>
+          <p:nvPr>
+            <p:ph type="sldNum" idx="5" sz="quarter"/>
+          </p:nvPr>
+        </p:nvSpPr>
+        <p:spPr/>
+      </p:sp>
+    </p:spTree>
+  </p:cSld>
+  <p:clrMapOvr>
+    <a:masterClrMapping/>
+  </p:clrMapOvr>
+</p:notes>
+</file>
+
 <file path=ppt/notesSlides/notesSlide4.xml><?xml version="1.0" encoding="utf-8"?>
 <p:notes xmlns:a="http://schemas.openxmlformats.org/drawingml/2006/main" xmlns:r="http://schemas.openxmlformats.org/officeDocument/2006/relationships" xmlns:p="http://schemas.openxmlformats.org/presentationml/2006/main">
   <p:cSld>
@@ -3168,6 +3254,11 @@
           <a:p>
             <a:r>
               <a:t>最大化は L-BFGS-B (範囲の制約つきの勾配法) で、出発点を変えて何度か行う。</a:t>
+            </a:r>
+          </a:p>
+          <a:p>
+            <a:r>
+              <a:t>最尤値の探し方: 本研究は勾配法 (L-BFGS-B)。Totani は MCMC で探している。同じ方法で比べた差は 0.006σ (MCMC の後のスライド)。</a:t>
             </a:r>
           </a:p>
         </p:txBody>
@@ -3333,6 +3424,11 @@
           <a:p>
             <a:r>
               <a:t>自己相関時間 τ: 何歩離れたら前の位置を「忘れる」か。50τ 以上の長さは emcee の推奨。</a:t>
+            </a:r>
+          </a:p>
+          <a:p>
+            <a:r>
+              <a:t>注意: Totani は MCMC で最尤値も求めているが、本研究では最尤値は勾配法で求め、MCMC は誤差の見積もりだけに使っている。同じ方法で比べた差は 0.006σ。</a:t>
             </a:r>
           </a:p>
         </p:txBody>
@@ -6911,7 +7007,7 @@
 </file>
 
 <file path=ppt/slides/slide10.xml><?xml version="1.0" encoding="utf-8"?>
-<p:sld xmlns:a="http://schemas.openxmlformats.org/drawingml/2006/main" xmlns:r="http://schemas.openxmlformats.org/officeDocument/2006/relationships" xmlns:p="http://schemas.openxmlformats.org/presentationml/2006/main">
+<p:sld xmlns:a="http://schemas.openxmlformats.org/drawingml/2006/main" xmlns:p="http://schemas.openxmlformats.org/presentationml/2006/main" xmlns:r="http://schemas.openxmlformats.org/officeDocument/2006/relationships">
   <p:cSld>
     <p:spTree>
       <p:nvGrpSpPr>
@@ -6919,14 +7015,7 @@
         <p:cNvGrpSpPr/>
         <p:nvPr/>
       </p:nvGrpSpPr>
-      <p:grpSpPr>
-        <a:xfrm>
-          <a:off x="0" y="0"/>
-          <a:ext cx="0" cy="0"/>
-          <a:chOff x="0" y="0"/>
-          <a:chExt cx="0" cy="0"/>
-        </a:xfrm>
-      </p:grpSpPr>
+      <p:grpSpPr/>
       <p:sp>
         <p:nvSpPr>
           <p:cNvPr id="2" name="Title 1"/>
@@ -6944,7 +7033,7 @@
           <a:p>
             <a:r>
               <a:rPr sz="3400"/>
-              <a:t>縮退が引き起こした 3 つの疑問</a:t>
+              <a:t>MCMC の中身③：今回の設定（emcee）</a:t>
             </a:r>
           </a:p>
         </p:txBody>
@@ -6962,56 +7051,107 @@
         <p:spPr>
           <a:xfrm>
             <a:off x="841248" y="1463040"/>
-            <a:ext cx="10515600" cy="4937760"/>
+            <a:ext cx="10515600" cy="4114800"/>
           </a:xfrm>
         </p:spPr>
         <p:txBody>
           <a:bodyPr/>
           <a:lstStyle/>
           <a:p>
-            <a:r>
-              <a:rPr sz="2400"/>
-              <a:t>① バブル領域を外すと 19.0σ → 5.0σ に落ちる</a:t>
+            <a:pPr/>
+            <a:r>
+              <a:rPr sz="2000"/>
+              <a:t>32 人の歩行者が同時に歩く。次の一歩は、他の歩行者の位置を使って決める</a:t>
             </a:r>
           </a:p>
           <a:p>
             <a:pPr lvl="1"/>
             <a:r>
+              <a:rPr sz="1600"/>
+              <a:t>候補：Y = X_j + Z (X_k − X_j)（X_k：自分、X_j：ランダムに選んだ他の歩行者）</a:t>
+            </a:r>
+          </a:p>
+          <a:p>
+            <a:pPr lvl="1"/>
+            <a:r>
+              <a:rPr sz="1600"/>
+              <a:t>Z は 1/2〜2 の乱数（確率 ∝ 1/√Z）、移る確率 = min(1, Z⁸ P(Y | D) / P(X_k | D))</a:t>
+            </a:r>
+          </a:p>
+          <a:p>
+            <a:pPr/>
+            <a:r>
               <a:rPr sz="2000"/>
-              <a:t>ハローは、本当は ICS やバブルの間違いでは？</a:t>
-            </a:r>
-          </a:p>
-          <a:p>
-            <a:r>
-              <a:rPr sz="2400"/>
-              <a:t>② 何も無い空でも、最大 4.5σ が出る</a:t>
+              <a:t>出発点：最尤推定の点のすぐ近く。最初の 400 歩は捨て、5 歩ごとに記録</a:t>
+            </a:r>
+          </a:p>
+          <a:p>
+            <a:pPr/>
+            <a:r>
+              <a:rPr sz="2000"/>
+              <a:t>結果の例（20.8 GeV）：ハローの倍率 f_halo = 1.48（68% 区間 1.40–1.55）</a:t>
+            </a:r>
+          </a:p>
+          <a:p>
+            <a:pPr/>
+            <a:r>
+              <a:rPr sz="2000"/>
+              <a:t>注意：推奨の長さ（自己相関時間 τ の 50 倍）に届かないビンが多い</a:t>
             </a:r>
           </a:p>
           <a:p>
             <a:pPr lvl="1"/>
             <a:r>
-              <a:rPr sz="2000"/>
-              <a:t>σ をそのまま信じてよいのか？</a:t>
-            </a:r>
-          </a:p>
-          <a:p>
-            <a:r>
-              <a:rPr sz="2400"/>
-              <a:t>③ 7/23 に出した 19.1σ が再現できない</a:t>
+              <a:rPr sz="1600"/>
+              <a:t>20.8 GeV で τ ≈ 127 歩、記録した長さ 5600 歩 &lt; 50τ。13 ビン中 2 ビンだけ到達</a:t>
             </a:r>
           </a:p>
           <a:p>
             <a:pPr lvl="1"/>
             <a:r>
-              <a:rPr sz="2000"/>
-              <a:t>結果そのものを信じてよいのか？</a:t>
-            </a:r>
-          </a:p>
-          <a:p>
-            <a:r>
-              <a:rPr sz="2400"/>
-              <a:t>→ 次から、1 つずつ調べた結果</a:t>
-            </a:r>
+              <a:rPr sz="1600"/>
+              <a:t>→ 誤差棒は目安。有意度 σ は Δln L から出すので影響しない</a:t>
+            </a:r>
+          </a:p>
+        </p:txBody>
+      </p:sp>
+      <p:sp>
+        <p:nvSpPr>
+          <p:cNvPr id="8" name="TextBox 7">
+            <a:extLst>
+              <a:ext uri="{FF2B5EF4-FFF2-40B4-BE49-F238E27FC236}">
+                <a16:creationId xmlns:a16="http://schemas.microsoft.com/office/drawing/2014/main" id="{F85CD606-E3CE-F314-B3EE-F3D7028115CB}"/>
+              </a:ext>
+            </a:extLst>
+          </p:cNvPr>
+          <p:cNvSpPr txBox="1"/>
+          <p:nvPr/>
+        </p:nvSpPr>
+        <p:spPr>
+          <a:xfrm>
+            <a:off x="5837182" y="5663239"/>
+            <a:ext cx="6093372" cy="923330"/>
+          </a:xfrm>
+          <a:prstGeom prst="rect">
+            <a:avLst/>
+          </a:prstGeom>
+          <a:noFill/>
+        </p:spPr>
+        <p:txBody>
+          <a:bodyPr wrap="square">
+            <a:spAutoFit/>
+          </a:bodyPr>
+          <a:lstStyle/>
+          <a:p>
+            <a:r>
+              <a:rPr lang="en-US" sz="1400" b="1"/>
+              <a:t>Reference:</a:t>
+            </a:r>
+            <a:r>
+              <a:rPr lang="en-US" sz="1400"/>
+              <a:t> J. Goodman &amp; J. Weare (2010), Comm. App. Math. Comp. Sci. 5, 65</a:t>
+            </a:r>
+            <a:endParaRPr lang="en-US"/>
           </a:p>
         </p:txBody>
       </p:sp>
@@ -7057,66 +7197,101 @@
           <a:p>
             <a:r>
               <a:rPr sz="3400"/>
-              <a:t>① を調べる：手がかりはどこにあるか</a:t>
-            </a:r>
-          </a:p>
-        </p:txBody>
-      </p:sp>
-      <p:sp>
-        <p:nvSpPr>
-          <p:cNvPr id="3" name="Content Placeholder 2"/>
-          <p:cNvSpPr>
-            <a:spLocks noGrp="1"/>
-          </p:cNvSpPr>
-          <p:nvPr>
-            <p:ph idx="1"/>
-          </p:nvPr>
-        </p:nvSpPr>
+              <a:t>結果：Totani の超過を再現</a:t>
+            </a:r>
+          </a:p>
+        </p:txBody>
+      </p:sp>
+      <p:pic>
+        <p:nvPicPr>
+          <p:cNvPr id="3" name="Picture 2" descr="fig_significance_v20r.png"/>
+          <p:cNvPicPr>
+            <a:picLocks noChangeAspect="1"/>
+          </p:cNvPicPr>
+          <p:nvPr/>
+        </p:nvPicPr>
+        <p:blipFill>
+          <a:blip r:embed="rId3"/>
+          <a:stretch>
+            <a:fillRect/>
+          </a:stretch>
+        </p:blipFill>
         <p:spPr>
           <a:xfrm>
-            <a:off x="841248" y="1463040"/>
-            <a:ext cx="10515600" cy="4937760"/>
+            <a:off x="2377440" y="1234440"/>
+            <a:ext cx="5334000" cy="4160520"/>
           </a:xfrm>
+          <a:prstGeom prst="rect">
+            <a:avLst/>
+          </a:prstGeom>
         </p:spPr>
-        <p:txBody>
-          <a:bodyPr/>
-          <a:lstStyle/>
-          <a:p>
-            <a:r>
-              <a:rPr sz="2200"/>
-              <a:t>フィッシャー情報：データがパラメータをどれだけ決められるか</a:t>
-            </a:r>
-          </a:p>
-          <a:p>
-            <a:r>
-              <a:rPr sz="2200"/>
-              <a:t>ICS など他の成分では説明できない「ハローだけの手がかり」を、空の場所ごとに計算</a:t>
-            </a:r>
-          </a:p>
-          <a:p>
-            <a:pPr lvl="1"/>
-            <a:r>
-              <a:rPr sz="1800"/>
-              <a:t>その 54% がバブル領域（面積は 34%）に集中</a:t>
-            </a:r>
-          </a:p>
-          <a:p>
-            <a:r>
-              <a:rPr sz="2200"/>
-              <a:t>手がかりの減り方だけで予測すると 6.4σ、実測 5.0σ</a:t>
-            </a:r>
-          </a:p>
-          <a:p>
-            <a:r>
-              <a:rPr sz="2200"/>
-              <a:t>同じ形の領域を横にずらして外すと 13〜16σ（予測とも一致）</a:t>
-            </a:r>
-          </a:p>
-          <a:p>
-            <a:r>
-              <a:rPr sz="2200"/>
-              <a:t>→ 19 → 5σ は「手がかりを捨てた」から。汚染の証拠ではない</a:t>
-            </a:r>
+      </p:pic>
+      <p:sp>
+        <p:nvSpPr>
+          <p:cNvPr id="4" name="TextBox 3"/>
+          <p:cNvSpPr txBox="1"/>
+          <p:nvPr/>
+        </p:nvSpPr>
+        <p:spPr>
+          <a:xfrm>
+            <a:off x="457200" y="5486400"/>
+            <a:ext cx="11247120" cy="457200"/>
+          </a:xfrm>
+          <a:prstGeom prst="rect">
+            <a:avLst/>
+          </a:prstGeom>
+          <a:noFill/>
+        </p:spPr>
+        <p:txBody>
+          <a:bodyPr wrap="square">
+            <a:spAutoFit/>
+          </a:bodyPr>
+          <a:lstStyle/>
+          <a:p>
+            <a:r>
+              <a:rPr sz="2000"/>
+              <a:t>20.8 GeV で 19.0σ（Totani は 13–19σ）。山の位置も一致</a:t>
+            </a:r>
+          </a:p>
+        </p:txBody>
+      </p:sp>
+      <p:sp>
+        <p:nvSpPr>
+          <p:cNvPr id="8" name="TextBox 7">
+            <a:extLst>
+              <a:ext uri="{FF2B5EF4-FFF2-40B4-BE49-F238E27FC236}">
+                <a16:creationId xmlns:a16="http://schemas.microsoft.com/office/drawing/2014/main" id="{F85CD606-E3CE-F314-B3EE-F3D7028115CB}"/>
+              </a:ext>
+            </a:extLst>
+          </p:cNvPr>
+          <p:cNvSpPr txBox="1"/>
+          <p:nvPr/>
+        </p:nvSpPr>
+        <p:spPr>
+          <a:xfrm>
+            <a:off x="5837182" y="6035040"/>
+            <a:ext cx="6093372" cy="923330"/>
+          </a:xfrm>
+          <a:prstGeom prst="rect">
+            <a:avLst/>
+          </a:prstGeom>
+          <a:noFill/>
+        </p:spPr>
+        <p:txBody>
+          <a:bodyPr wrap="square">
+            <a:spAutoFit/>
+          </a:bodyPr>
+          <a:lstStyle/>
+          <a:p>
+            <a:r>
+              <a:rPr lang="en-US" sz="1400" b="1"/>
+              <a:t>Reference:</a:t>
+            </a:r>
+            <a:r>
+              <a:rPr lang="en-US" sz="1400"/>
+              <a:t> T. Totani (2025), arXiv:2507.07209 Fig. 9</a:t>
+            </a:r>
+            <a:endParaRPr lang="en-US"/>
           </a:p>
         </p:txBody>
       </p:sp>
@@ -7162,7 +7337,7 @@
           <a:p>
             <a:r>
               <a:rPr sz="3400"/>
-              <a:t>① を調べる：ICS が犯人なら</a:t>
+              <a:t>問題：ハローと ICS が見分けにくい（縮退）</a:t>
             </a:r>
           </a:p>
         </p:txBody>
@@ -7180,7 +7355,7 @@
         <p:spPr>
           <a:xfrm>
             <a:off x="841248" y="1463040"/>
-            <a:ext cx="10515600" cy="4114800"/>
+            <a:ext cx="5669280" cy="4937760"/>
           </a:xfrm>
         </p:spPr>
         <p:txBody>
@@ -7189,90 +7364,61 @@
           <a:p>
             <a:r>
               <a:rPr sz="2200"/>
-              <a:t>ICS をバブルの内と外で別々の明るさにして当てはめた</a:t>
+              <a:t>ICS とハローは、空の上での形がよく似ている</a:t>
             </a:r>
           </a:p>
           <a:p>
             <a:pPr lvl="1"/>
             <a:r>
               <a:rPr sz="1800"/>
-              <a:t>内側が約 2.3 倍明るければ、ハローの改善の 92% を ICS が説明</a:t>
+              <a:t>緯度 25° → 55° で暗くなる割合：ハロー 2.74 倍、ICS 2.75 倍</a:t>
             </a:r>
           </a:p>
           <a:p>
             <a:r>
               <a:rPr sz="2200"/>
-              <a:t>ICS の計算の近似（等方近似）を直しても 1.1〜1.3 倍</a:t>
+              <a:t>違いは「銀河中心の方向に集まっているか」だけ</a:t>
+            </a:r>
+          </a:p>
+          <a:p>
+            <a:r>
+              <a:rPr sz="2200"/>
+              <a:t>ハローを入れると、その分 ICS が暗くなる</a:t>
             </a:r>
           </a:p>
           <a:p>
             <a:pPr lvl="1"/>
             <a:r>
               <a:rPr sz="1800"/>
-              <a:t>しかも外側のほうが大きくなる → 2.3 倍には届かない</a:t>
-            </a:r>
-          </a:p>
-          <a:p>
-            <a:r>
-              <a:rPr sz="2200"/>
-              <a:t>ICS を 3 種類に分けて、それぞれ自由に動かしても</a:t>
-            </a:r>
-          </a:p>
-          <a:p>
-            <a:pPr lvl="1"/>
-            <a:r>
-              <a:rPr sz="1800"/>
-              <a:t>19.5σ → 18.4σ（約 1σ しか下がらない）</a:t>
-            </a:r>
-          </a:p>
-          <a:p>
-            <a:r>
-              <a:rPr sz="2200"/>
-              <a:t>→ ICS の「明るさ」の間違いでは、ハローを説明できない</a:t>
-            </a:r>
-          </a:p>
-        </p:txBody>
-      </p:sp>
-      <p:sp>
-        <p:nvSpPr>
-          <p:cNvPr id="8" name="TextBox 7">
-            <a:extLst>
-              <a:ext uri="{FF2B5EF4-FFF2-40B4-BE49-F238E27FC236}">
-                <a16:creationId xmlns:a16="http://schemas.microsoft.com/office/drawing/2014/main" id="{F85CD606-E3CE-F314-B3EE-F3D7028115CB}"/>
-              </a:ext>
-            </a:extLst>
-          </p:cNvPr>
-          <p:cNvSpPr txBox="1"/>
+              <a:t>ハローの光の 8〜10 割は ICS から移ったもの</a:t>
+            </a:r>
+          </a:p>
+        </p:txBody>
+      </p:sp>
+      <p:pic>
+        <p:nvPicPr>
+          <p:cNvPr id="4" name="Picture 3" descr="fig_ics_norm_v20r.png"/>
+          <p:cNvPicPr>
+            <a:picLocks noChangeAspect="1"/>
+          </p:cNvPicPr>
           <p:nvPr/>
-        </p:nvSpPr>
+        </p:nvPicPr>
+        <p:blipFill>
+          <a:blip r:embed="rId3"/>
+          <a:stretch>
+            <a:fillRect/>
+          </a:stretch>
+        </p:blipFill>
         <p:spPr>
           <a:xfrm>
-            <a:off x="5837182" y="5663239"/>
-            <a:ext cx="6093372" cy="923330"/>
+            <a:off x="6309360" y="1737360"/>
+            <a:ext cx="5669280" cy="3968496"/>
           </a:xfrm>
           <a:prstGeom prst="rect">
             <a:avLst/>
           </a:prstGeom>
-          <a:noFill/>
         </p:spPr>
-        <p:txBody>
-          <a:bodyPr wrap="square">
-            <a:spAutoFit/>
-          </a:bodyPr>
-          <a:lstStyle/>
-          <a:p>
-            <a:r>
-              <a:rPr lang="en-US" sz="1400" b="1"/>
-              <a:t>Reference:</a:t>
-            </a:r>
-            <a:r>
-              <a:rPr lang="en-US" sz="1400"/>
-              <a:t> I. V. Moskalenko &amp; A. W. Strong (2000), ApJ 528, 357</a:t>
-            </a:r>
-            <a:endParaRPr lang="en-US"/>
-          </a:p>
-        </p:txBody>
-      </p:sp>
+      </p:pic>
     </p:spTree>
   </p:cSld>
   <p:clrMapOvr>
@@ -7315,7 +7461,7 @@
           <a:p>
             <a:r>
               <a:rPr sz="3400"/>
-              <a:t>② を調べる：σ を信じてよいか</a:t>
+              <a:t>縮退が引き起こした 3 つの疑問</a:t>
             </a:r>
           </a:p>
         </p:txBody>
@@ -7333,7 +7479,7 @@
         <p:spPr>
           <a:xfrm>
             <a:off x="841248" y="1463040"/>
-            <a:ext cx="10515600" cy="4114800"/>
+            <a:ext cx="10515600" cy="4937760"/>
           </a:xfrm>
         </p:spPr>
         <p:txBody>
@@ -7341,81 +7487,48 @@
           <a:lstStyle/>
           <a:p>
             <a:r>
-              <a:rPr sz="2200"/>
-              <a:t>何も無い空 23 か所で、天の川と同じ解析をした</a:t>
-            </a:r>
-          </a:p>
-          <a:p>
-            <a:r>
-              <a:rPr sz="2200"/>
-              <a:t>本物の信号が無ければ、σ は「平均 0、ばらつき 1」になるはず</a:t>
+              <a:rPr sz="2400"/>
+              <a:t>① バブル領域を外すと 19.0σ → 5.0σ に落ちる</a:t>
             </a:r>
           </a:p>
           <a:p>
             <a:pPr lvl="1"/>
             <a:r>
-              <a:rPr sz="1800"/>
-              <a:t>Wilks の定理が成り立っていれば</a:t>
-            </a:r>
-          </a:p>
-          <a:p>
-            <a:r>
-              <a:rPr sz="2200"/>
-              <a:t>実際のばらつき：1.26（95% 区間 1.14–1.39）</a:t>
+              <a:rPr sz="2000"/>
+              <a:t>ハローは、本当は ICS やバブルの間違いでは？</a:t>
+            </a:r>
+          </a:p>
+          <a:p>
+            <a:r>
+              <a:rPr sz="2400"/>
+              <a:t>② 何も無い空でも、最大 4.5σ が出る</a:t>
             </a:r>
           </a:p>
           <a:p>
             <a:pPr lvl="1"/>
             <a:r>
-              <a:rPr sz="1800"/>
-              <a:t>σ は 1.26 倍大きく出ている</a:t>
-            </a:r>
-          </a:p>
-          <a:p>
-            <a:r>
-              <a:rPr sz="2200"/>
-              <a:t>19.0σ を較正すると 19.0 ÷ 1.26 ≈ 15σ（13.7–16.6σ）</a:t>
-            </a:r>
-          </a:p>
-        </p:txBody>
-      </p:sp>
-      <p:sp>
-        <p:nvSpPr>
-          <p:cNvPr id="8" name="TextBox 7">
-            <a:extLst>
-              <a:ext uri="{FF2B5EF4-FFF2-40B4-BE49-F238E27FC236}">
-                <a16:creationId xmlns:a16="http://schemas.microsoft.com/office/drawing/2014/main" id="{F85CD606-E3CE-F314-B3EE-F3D7028115CB}"/>
-              </a:ext>
-            </a:extLst>
-          </p:cNvPr>
-          <p:cNvSpPr txBox="1"/>
-          <p:nvPr/>
-        </p:nvSpPr>
-        <p:spPr>
-          <a:xfrm>
-            <a:off x="5837182" y="5663239"/>
-            <a:ext cx="6093372" cy="923330"/>
-          </a:xfrm>
-          <a:prstGeom prst="rect">
-            <a:avLst/>
-          </a:prstGeom>
-          <a:noFill/>
-        </p:spPr>
-        <p:txBody>
-          <a:bodyPr wrap="square">
-            <a:spAutoFit/>
-          </a:bodyPr>
-          <a:lstStyle/>
-          <a:p>
-            <a:r>
-              <a:rPr lang="en-US" sz="1400" b="1"/>
-              <a:t>Reference:</a:t>
-            </a:r>
-            <a:r>
-              <a:rPr lang="en-US" sz="1400"/>
-              <a:t> B. Efron &amp; R. J. Tibshirani (1993), An Introduction to the Bootstrap</a:t>
-            </a:r>
-            <a:endParaRPr lang="en-US"/>
+              <a:rPr sz="2000"/>
+              <a:t>σ をそのまま信じてよいのか？</a:t>
+            </a:r>
+          </a:p>
+          <a:p>
+            <a:r>
+              <a:rPr sz="2400"/>
+              <a:t>③ 7/23 に出した 19.1σ が再現できない</a:t>
+            </a:r>
+          </a:p>
+          <a:p>
+            <a:pPr lvl="1"/>
+            <a:r>
+              <a:rPr sz="2000"/>
+              <a:t>結果そのものを信じてよいのか？</a:t>
+            </a:r>
+          </a:p>
+          <a:p>
+            <a:r>
+              <a:rPr sz="2400"/>
+              <a:t>→ 次から、1 つずつ調べた結果</a:t>
+            </a:r>
           </a:p>
         </p:txBody>
       </p:sp>
@@ -7461,60 +7574,65 @@
           <a:p>
             <a:r>
               <a:rPr sz="3400"/>
-              <a:t>② の結果：エネルギーごとのばらつき</a:t>
-            </a:r>
-          </a:p>
-        </p:txBody>
-      </p:sp>
-      <p:pic>
-        <p:nvPicPr>
-          <p:cNvPr id="3" name="Picture 2" descr="fig_null_variance.png"/>
-          <p:cNvPicPr>
-            <a:picLocks noChangeAspect="1"/>
-          </p:cNvPicPr>
-          <p:nvPr/>
-        </p:nvPicPr>
-        <p:blipFill>
-          <a:blip r:embed="rId3"/>
-          <a:stretch>
-            <a:fillRect/>
-          </a:stretch>
-        </p:blipFill>
+              <a:t>① を調べる：手がかりはどこにあるか</a:t>
+            </a:r>
+          </a:p>
+        </p:txBody>
+      </p:sp>
+      <p:sp>
+        <p:nvSpPr>
+          <p:cNvPr id="3" name="Content Placeholder 2"/>
+          <p:cNvSpPr>
+            <a:spLocks noGrp="1"/>
+          </p:cNvSpPr>
+          <p:nvPr>
+            <p:ph idx="1"/>
+          </p:nvPr>
+        </p:nvSpPr>
         <p:spPr>
           <a:xfrm>
-            <a:off x="2103120" y="1234440"/>
-            <a:ext cx="7156174" cy="4114800"/>
+            <a:off x="841248" y="1463040"/>
+            <a:ext cx="10515600" cy="4937760"/>
           </a:xfrm>
-          <a:prstGeom prst="rect">
-            <a:avLst/>
-          </a:prstGeom>
         </p:spPr>
-      </p:pic>
-      <p:sp>
-        <p:nvSpPr>
-          <p:cNvPr id="4" name="TextBox 3"/>
-          <p:cNvSpPr txBox="1"/>
-          <p:nvPr/>
-        </p:nvSpPr>
-        <p:spPr>
-          <a:xfrm>
-            <a:off x="457200" y="5486400"/>
-            <a:ext cx="11247120" cy="457200"/>
-          </a:xfrm>
-          <a:prstGeom prst="rect">
-            <a:avLst/>
-          </a:prstGeom>
-          <a:noFill/>
-        </p:spPr>
-        <p:txBody>
-          <a:bodyPr wrap="square">
-            <a:spAutoFit/>
-          </a:bodyPr>
-          <a:lstStyle/>
-          <a:p>
-            <a:r>
-              <a:rPr sz="2000"/>
-              <a:t>どのエネルギーでもばらつきは 1 より大きい（光子が十分ある範囲）</a:t>
+        <p:txBody>
+          <a:bodyPr/>
+          <a:lstStyle/>
+          <a:p>
+            <a:r>
+              <a:rPr sz="2200"/>
+              <a:t>フィッシャー情報：データがパラメータをどれだけ決められるか</a:t>
+            </a:r>
+          </a:p>
+          <a:p>
+            <a:r>
+              <a:rPr sz="2200"/>
+              <a:t>ICS など他の成分では説明できない「ハローだけの手がかり」を、空の場所ごとに計算</a:t>
+            </a:r>
+          </a:p>
+          <a:p>
+            <a:pPr lvl="1"/>
+            <a:r>
+              <a:rPr sz="1800"/>
+              <a:t>その 54% がバブル領域（面積は 34%）に集中</a:t>
+            </a:r>
+          </a:p>
+          <a:p>
+            <a:r>
+              <a:rPr sz="2200"/>
+              <a:t>手がかりの減り方だけで予測すると 6.4σ、実測 5.0σ</a:t>
+            </a:r>
+          </a:p>
+          <a:p>
+            <a:r>
+              <a:rPr sz="2200"/>
+              <a:t>同じ形の領域を横にずらして外すと 13〜16σ（予測とも一致）</a:t>
+            </a:r>
+          </a:p>
+          <a:p>
+            <a:r>
+              <a:rPr sz="2200"/>
+              <a:t>→ 19 → 5σ は「手がかりを捨てた」から。汚染の証拠ではない</a:t>
             </a:r>
           </a:p>
         </p:txBody>
@@ -7561,7 +7679,7 @@
           <a:p>
             <a:r>
               <a:rPr sz="3400"/>
-              <a:t>③ を調べる：19.1σ が再現できない理由</a:t>
+              <a:t>① を調べる：ICS が犯人なら</a:t>
             </a:r>
           </a:p>
         </p:txBody>
@@ -7579,7 +7697,7 @@
         <p:spPr>
           <a:xfrm>
             <a:off x="841248" y="1463040"/>
-            <a:ext cx="10515600" cy="4937760"/>
+            <a:ext cx="10515600" cy="4114800"/>
           </a:xfrm>
         </p:spPr>
         <p:txBody>
@@ -7587,27 +7705,88 @@
           <a:lstStyle/>
           <a:p>
             <a:r>
-              <a:rPr sz="2400"/>
-              <a:t>7/23 の計算の直後にコードを直していて、当時の状態が残っていなかった</a:t>
-            </a:r>
-          </a:p>
-          <a:p>
-            <a:r>
-              <a:rPr sz="2400"/>
-              <a:t>今のコードは、何度計算しても同じ答えになる（10/1 に確認）</a:t>
-            </a:r>
-          </a:p>
-          <a:p>
-            <a:r>
-              <a:rPr sz="2400"/>
-              <a:t>結果ファイルに、コードの版と設定を自動で記録するようにした</a:t>
-            </a:r>
-          </a:p>
-          <a:p>
-            <a:r>
-              <a:rPr sz="2400"/>
-              <a:t>→ 主結果を 19.0σ（10/1 の再計算）に統一</a:t>
-            </a:r>
+              <a:rPr sz="2200"/>
+              <a:t>ICS をバブルの内と外で別々の明るさにして当てはめた</a:t>
+            </a:r>
+          </a:p>
+          <a:p>
+            <a:pPr lvl="1"/>
+            <a:r>
+              <a:rPr sz="1800"/>
+              <a:t>内側が約 2.3 倍明るければ、ハローの改善の 92% を ICS が説明</a:t>
+            </a:r>
+          </a:p>
+          <a:p>
+            <a:r>
+              <a:rPr sz="2200"/>
+              <a:t>ICS の計算の近似（等方近似）を直しても 1.1〜1.3 倍</a:t>
+            </a:r>
+          </a:p>
+          <a:p>
+            <a:pPr lvl="1"/>
+            <a:r>
+              <a:rPr sz="1800"/>
+              <a:t>しかも外側のほうが大きくなる → 2.3 倍には届かない</a:t>
+            </a:r>
+          </a:p>
+          <a:p>
+            <a:r>
+              <a:rPr sz="2200"/>
+              <a:t>ICS を 3 種類に分けて、それぞれ自由に動かしても</a:t>
+            </a:r>
+          </a:p>
+          <a:p>
+            <a:pPr lvl="1"/>
+            <a:r>
+              <a:rPr sz="1800"/>
+              <a:t>19.5σ → 18.4σ（約 1σ しか下がらない）</a:t>
+            </a:r>
+          </a:p>
+          <a:p>
+            <a:r>
+              <a:rPr sz="2200"/>
+              <a:t>→ ICS の「明るさ」の間違いでは、ハローを説明できない</a:t>
+            </a:r>
+          </a:p>
+        </p:txBody>
+      </p:sp>
+      <p:sp>
+        <p:nvSpPr>
+          <p:cNvPr id="8" name="TextBox 7">
+            <a:extLst>
+              <a:ext uri="{FF2B5EF4-FFF2-40B4-BE49-F238E27FC236}">
+                <a16:creationId xmlns:a16="http://schemas.microsoft.com/office/drawing/2014/main" id="{F85CD606-E3CE-F314-B3EE-F3D7028115CB}"/>
+              </a:ext>
+            </a:extLst>
+          </p:cNvPr>
+          <p:cNvSpPr txBox="1"/>
+          <p:nvPr/>
+        </p:nvSpPr>
+        <p:spPr>
+          <a:xfrm>
+            <a:off x="5837182" y="5663239"/>
+            <a:ext cx="6093372" cy="923330"/>
+          </a:xfrm>
+          <a:prstGeom prst="rect">
+            <a:avLst/>
+          </a:prstGeom>
+          <a:noFill/>
+        </p:spPr>
+        <p:txBody>
+          <a:bodyPr wrap="square">
+            <a:spAutoFit/>
+          </a:bodyPr>
+          <a:lstStyle/>
+          <a:p>
+            <a:r>
+              <a:rPr lang="en-US" sz="1400" b="1"/>
+              <a:t>Reference:</a:t>
+            </a:r>
+            <a:r>
+              <a:rPr lang="en-US" sz="1400"/>
+              <a:t> I. V. Moskalenko &amp; A. W. Strong (2000), ApJ 528, 357</a:t>
+            </a:r>
+            <a:endParaRPr lang="en-US"/>
           </a:p>
         </p:txBody>
       </p:sp>
@@ -7653,7 +7832,7 @@
           <a:p>
             <a:r>
               <a:rPr sz="3400"/>
-              <a:t>ここまでのまとめ</a:t>
+              <a:t>② を調べる：σ を信じてよいか</a:t>
             </a:r>
           </a:p>
         </p:txBody>
@@ -7671,7 +7850,7 @@
         <p:spPr>
           <a:xfrm>
             <a:off x="841248" y="1463040"/>
-            <a:ext cx="10515600" cy="4937760"/>
+            <a:ext cx="10515600" cy="4114800"/>
           </a:xfrm>
         </p:spPr>
         <p:txBody>
@@ -7679,34 +7858,81 @@
           <a:lstStyle/>
           <a:p>
             <a:r>
-              <a:rPr sz="2400"/>
-              <a:t>ICS の明るさ・バブル・計算の近似の間違いでは、超過を説明できない</a:t>
-            </a:r>
-          </a:p>
-          <a:p>
-            <a:r>
-              <a:rPr sz="2400"/>
-              <a:t>σ は 1.26 倍の過大評価 → 較正すると約 15σ</a:t>
-            </a:r>
-          </a:p>
-          <a:p>
-            <a:r>
-              <a:rPr sz="2400"/>
-              <a:t>ただし、暗黒物質の証拠ではない</a:t>
+              <a:rPr sz="2200"/>
+              <a:t>何も無い空 23 か所で、天の川と同じ解析をした</a:t>
+            </a:r>
+          </a:p>
+          <a:p>
+            <a:r>
+              <a:rPr sz="2200"/>
+              <a:t>本物の信号が無ければ、σ は「平均 0、ばらつき 1」になるはず</a:t>
             </a:r>
           </a:p>
           <a:p>
             <a:pPr lvl="1"/>
             <a:r>
-              <a:rPr sz="2000"/>
-              <a:t>ICS の「空間の形」の間違いは否定できていない</a:t>
-            </a:r>
-          </a:p>
-          <a:p>
-            <a:r>
-              <a:rPr sz="2400"/>
-              <a:t>→ 独立な確認として、矮小銀河を見る</a:t>
-            </a:r>
+              <a:rPr sz="1800"/>
+              <a:t>Wilks の定理が成り立っていれば</a:t>
+            </a:r>
+          </a:p>
+          <a:p>
+            <a:r>
+              <a:rPr sz="2200"/>
+              <a:t>実際のばらつき：1.26（95% 区間 1.14–1.39）</a:t>
+            </a:r>
+          </a:p>
+          <a:p>
+            <a:pPr lvl="1"/>
+            <a:r>
+              <a:rPr sz="1800"/>
+              <a:t>σ は 1.26 倍大きく出ている</a:t>
+            </a:r>
+          </a:p>
+          <a:p>
+            <a:r>
+              <a:rPr sz="2200"/>
+              <a:t>19.0σ を較正すると 19.0 ÷ 1.26 ≈ 15σ（13.7–16.6σ）</a:t>
+            </a:r>
+          </a:p>
+        </p:txBody>
+      </p:sp>
+      <p:sp>
+        <p:nvSpPr>
+          <p:cNvPr id="8" name="TextBox 7">
+            <a:extLst>
+              <a:ext uri="{FF2B5EF4-FFF2-40B4-BE49-F238E27FC236}">
+                <a16:creationId xmlns:a16="http://schemas.microsoft.com/office/drawing/2014/main" id="{F85CD606-E3CE-F314-B3EE-F3D7028115CB}"/>
+              </a:ext>
+            </a:extLst>
+          </p:cNvPr>
+          <p:cNvSpPr txBox="1"/>
+          <p:nvPr/>
+        </p:nvSpPr>
+        <p:spPr>
+          <a:xfrm>
+            <a:off x="5837182" y="5663239"/>
+            <a:ext cx="6093372" cy="923330"/>
+          </a:xfrm>
+          <a:prstGeom prst="rect">
+            <a:avLst/>
+          </a:prstGeom>
+          <a:noFill/>
+        </p:spPr>
+        <p:txBody>
+          <a:bodyPr wrap="square">
+            <a:spAutoFit/>
+          </a:bodyPr>
+          <a:lstStyle/>
+          <a:p>
+            <a:r>
+              <a:rPr lang="en-US" sz="1400" b="1"/>
+              <a:t>Reference:</a:t>
+            </a:r>
+            <a:r>
+              <a:rPr lang="en-US" sz="1400"/>
+              <a:t> B. Efron &amp; R. J. Tibshirani (1993), An Introduction to the Bootstrap</a:t>
+            </a:r>
+            <a:endParaRPr lang="en-US"/>
           </a:p>
         </p:txBody>
       </p:sp>
@@ -7752,86 +7978,45 @@
           <a:p>
             <a:r>
               <a:rPr sz="3400"/>
-              <a:t>矮小銀河で確かめる</a:t>
-            </a:r>
-          </a:p>
-        </p:txBody>
-      </p:sp>
-      <p:sp>
-        <p:nvSpPr>
-          <p:cNvPr id="3" name="Content Placeholder 2"/>
-          <p:cNvSpPr>
-            <a:spLocks noGrp="1"/>
-          </p:cNvSpPr>
-          <p:nvPr>
-            <p:ph idx="1"/>
-          </p:nvPr>
-        </p:nvSpPr>
+              <a:t>② の結果：エネルギーごとのばらつき</a:t>
+            </a:r>
+          </a:p>
+        </p:txBody>
+      </p:sp>
+      <p:pic>
+        <p:nvPicPr>
+          <p:cNvPr id="3" name="Picture 2" descr="fig_null_variance.png"/>
+          <p:cNvPicPr>
+            <a:picLocks noChangeAspect="1"/>
+          </p:cNvPicPr>
+          <p:nvPr/>
+        </p:nvPicPr>
+        <p:blipFill>
+          <a:blip r:embed="rId3"/>
+          <a:stretch>
+            <a:fillRect/>
+          </a:stretch>
+        </p:blipFill>
         <p:spPr>
           <a:xfrm>
-            <a:off x="841248" y="1463040"/>
-            <a:ext cx="10515600" cy="4114800"/>
+            <a:off x="2103120" y="1234440"/>
+            <a:ext cx="7156174" cy="4114800"/>
           </a:xfrm>
+          <a:prstGeom prst="rect">
+            <a:avLst/>
+          </a:prstGeom>
         </p:spPr>
-        <p:txBody>
-          <a:bodyPr/>
-          <a:lstStyle/>
-          <a:p>
-            <a:r>
-              <a:rPr sz="2400"/>
-              <a:t>矮小銀河：天の川のまわりの小さな銀河</a:t>
-            </a:r>
-          </a:p>
-          <a:p>
-            <a:pPr lvl="1"/>
-            <a:r>
-              <a:rPr sz="2000"/>
-              <a:t>暗黒物質が多く、ガスや星形成が少ない（雑音が少ない）</a:t>
-            </a:r>
-          </a:p>
-          <a:p>
-            <a:r>
-              <a:rPr sz="2400"/>
-              <a:t>暗黒物質なら、矮小銀河からも同じ 20 GeV の光が来るはず</a:t>
-            </a:r>
-          </a:p>
-          <a:p>
-            <a:r>
-              <a:rPr sz="2400"/>
-              <a:t>同じ手法を、各天体のまわり半径 10° に使った</a:t>
-            </a:r>
-          </a:p>
-          <a:p>
-            <a:pPr lvl="1"/>
-            <a:r>
-              <a:rPr sz="2000"/>
-              <a:t>矮小銀河 54 ＋ M31・M33 ＋ 何も無い空 23 か所</a:t>
-            </a:r>
-          </a:p>
-          <a:p>
-            <a:r>
-              <a:rPr sz="2400"/>
-              <a:t>矮小銀河は小さい（0.2〜0.4°）ので、広がった ICS とは縮退しない</a:t>
-            </a:r>
-          </a:p>
-        </p:txBody>
-      </p:sp>
-      <p:sp>
-        <p:nvSpPr>
-          <p:cNvPr id="8" name="TextBox 7">
-            <a:extLst>
-              <a:ext uri="{FF2B5EF4-FFF2-40B4-BE49-F238E27FC236}">
-                <a16:creationId xmlns:a16="http://schemas.microsoft.com/office/drawing/2014/main" id="{F85CD606-E3CE-F314-B3EE-F3D7028115CB}"/>
-              </a:ext>
-            </a:extLst>
-          </p:cNvPr>
+      </p:pic>
+      <p:sp>
+        <p:nvSpPr>
+          <p:cNvPr id="4" name="TextBox 3"/>
           <p:cNvSpPr txBox="1"/>
           <p:nvPr/>
         </p:nvSpPr>
         <p:spPr>
           <a:xfrm>
-            <a:off x="5837182" y="5663239"/>
-            <a:ext cx="6093372" cy="923330"/>
+            <a:off x="457200" y="5486400"/>
+            <a:ext cx="11247120" cy="457200"/>
           </a:xfrm>
           <a:prstGeom prst="rect">
             <a:avLst/>
@@ -7845,14 +8030,9 @@
           <a:lstStyle/>
           <a:p>
             <a:r>
-              <a:rPr lang="en-US" sz="1400" b="1"/>
-              <a:t>Reference:</a:t>
-            </a:r>
-            <a:r>
-              <a:rPr lang="en-US" sz="1400"/>
-              <a:t> A. B. Pace (2025), Open J. Astrophys. 8, 142</a:t>
-            </a:r>
-            <a:endParaRPr lang="en-US"/>
+              <a:rPr sz="2000"/>
+              <a:t>どのエネルギーでもばらつきは 1 より大きい（光子が十分ある範囲）</a:t>
+            </a:r>
           </a:p>
         </p:txBody>
       </p:sp>
@@ -7898,7 +8078,7 @@
           <a:p>
             <a:r>
               <a:rPr sz="3400"/>
-              <a:t>予測の立て方：J ファクター</a:t>
+              <a:t>③ を調べる：19.1σ が再現できない理由</a:t>
             </a:r>
           </a:p>
         </p:txBody>
@@ -7916,7 +8096,7 @@
         <p:spPr>
           <a:xfrm>
             <a:off x="841248" y="1463040"/>
-            <a:ext cx="10515600" cy="4114800"/>
+            <a:ext cx="10515600" cy="4937760"/>
           </a:xfrm>
         </p:spPr>
         <p:txBody>
@@ -7925,79 +8105,26 @@
           <a:p>
             <a:r>
               <a:rPr sz="2400"/>
-              <a:t>対消滅の明るさ：F = ⟨σv⟩ / (8π m²) × dN/dE × J</a:t>
+              <a:t>7/23 の計算の直後にコードを直していて、当時の状態が残っていなかった</a:t>
             </a:r>
           </a:p>
           <a:p>
             <a:r>
               <a:rPr sz="2400"/>
-              <a:t>J ファクター = 暗黒物質の密度の 2 乗を、視線方向に足し合わせた量</a:t>
+              <a:t>今のコードは、何度計算しても同じ答えになる（10/1 に確認）</a:t>
             </a:r>
           </a:p>
           <a:p>
             <a:r>
               <a:rPr sz="2400"/>
-              <a:t>天の川と矮小銀河で粒子は同じ → 比をとると J の比だけが残る</a:t>
-            </a:r>
-          </a:p>
-          <a:p>
-            <a:pPr lvl="1"/>
-            <a:r>
-              <a:rPr sz="2000"/>
-              <a:t>F_矮小 = F_天の川 × J_矮小 / J_天の川</a:t>
+              <a:t>結果ファイルに、コードの版と設定を自動で記録するようにした</a:t>
             </a:r>
           </a:p>
           <a:p>
             <a:r>
               <a:rPr sz="2400"/>
-              <a:t>粒子の質量などを仮定せずに「何σ見えるはずか」が出る</a:t>
-            </a:r>
-          </a:p>
-          <a:p>
-            <a:r>
-              <a:rPr sz="2400"/>
-              <a:t>矮小銀河の J は、星の動きから推定する</a:t>
-            </a:r>
-          </a:p>
-        </p:txBody>
-      </p:sp>
-      <p:sp>
-        <p:nvSpPr>
-          <p:cNvPr id="8" name="TextBox 7">
-            <a:extLst>
-              <a:ext uri="{FF2B5EF4-FFF2-40B4-BE49-F238E27FC236}">
-                <a16:creationId xmlns:a16="http://schemas.microsoft.com/office/drawing/2014/main" id="{F85CD606-E3CE-F314-B3EE-F3D7028115CB}"/>
-              </a:ext>
-            </a:extLst>
-          </p:cNvPr>
-          <p:cNvSpPr txBox="1"/>
-          <p:nvPr/>
-        </p:nvSpPr>
-        <p:spPr>
-          <a:xfrm>
-            <a:off x="5837182" y="5663239"/>
-            <a:ext cx="6093372" cy="923330"/>
-          </a:xfrm>
-          <a:prstGeom prst="rect">
-            <a:avLst/>
-          </a:prstGeom>
-          <a:noFill/>
-        </p:spPr>
-        <p:txBody>
-          <a:bodyPr wrap="square">
-            <a:spAutoFit/>
-          </a:bodyPr>
-          <a:lstStyle/>
-          <a:p>
-            <a:r>
-              <a:rPr lang="en-US" sz="1400" b="1"/>
-              <a:t>Reference:</a:t>
-            </a:r>
-            <a:r>
-              <a:rPr lang="en-US" sz="1400"/>
-              <a:t> A. B. Pace &amp; L. E. Strigari (2019), MNRAS 482, 3480</a:t>
-            </a:r>
-            <a:endParaRPr lang="en-US"/>
+              <a:t>→ 主結果を 19.0σ（10/1 の再計算）に統一</a:t>
+            </a:r>
           </a:p>
         </p:txBody>
       </p:sp>
@@ -8043,60 +8170,59 @@
           <a:p>
             <a:r>
               <a:rPr sz="3400"/>
-              <a:t>結果：どこにも信号は見えなかった</a:t>
-            </a:r>
-          </a:p>
-        </p:txBody>
-      </p:sp>
-      <p:pic>
-        <p:nvPicPr>
-          <p:cNvPr id="3" name="Picture 2" descr="fig_dwarf_results.png"/>
-          <p:cNvPicPr>
-            <a:picLocks noChangeAspect="1"/>
-          </p:cNvPicPr>
-          <p:nvPr/>
-        </p:nvPicPr>
-        <p:blipFill>
-          <a:blip r:embed="rId3"/>
-          <a:stretch>
-            <a:fillRect/>
-          </a:stretch>
-        </p:blipFill>
+              <a:t>ここまでのまとめ</a:t>
+            </a:r>
+          </a:p>
+        </p:txBody>
+      </p:sp>
+      <p:sp>
+        <p:nvSpPr>
+          <p:cNvPr id="3" name="Content Placeholder 2"/>
+          <p:cNvSpPr>
+            <a:spLocks noGrp="1"/>
+          </p:cNvSpPr>
+          <p:nvPr>
+            <p:ph idx="1"/>
+          </p:nvPr>
+        </p:nvSpPr>
         <p:spPr>
           <a:xfrm>
-            <a:off x="2194560" y="1234440"/>
-            <a:ext cx="7156174" cy="4114800"/>
+            <a:off x="841248" y="1463040"/>
+            <a:ext cx="10515600" cy="4937760"/>
           </a:xfrm>
-          <a:prstGeom prst="rect">
-            <a:avLst/>
-          </a:prstGeom>
         </p:spPr>
-      </p:pic>
-      <p:sp>
-        <p:nvSpPr>
-          <p:cNvPr id="4" name="TextBox 3"/>
-          <p:cNvSpPr txBox="1"/>
-          <p:nvPr/>
-        </p:nvSpPr>
-        <p:spPr>
-          <a:xfrm>
-            <a:off x="457200" y="5486400"/>
-            <a:ext cx="11247120" cy="457200"/>
-          </a:xfrm>
-          <a:prstGeom prst="rect">
-            <a:avLst/>
-          </a:prstGeom>
-          <a:noFill/>
-        </p:spPr>
-        <p:txBody>
-          <a:bodyPr wrap="square">
-            <a:spAutoFit/>
-          </a:bodyPr>
-          <a:lstStyle/>
-          <a:p>
+        <p:txBody>
+          <a:bodyPr/>
+          <a:lstStyle/>
+          <a:p>
+            <a:r>
+              <a:rPr sz="2400"/>
+              <a:t>ICS の明るさ・バブル・計算の近似の間違いでは、超過を説明できない</a:t>
+            </a:r>
+          </a:p>
+          <a:p>
+            <a:r>
+              <a:rPr sz="2400"/>
+              <a:t>σ は 1.26 倍の過大評価 → 較正すると約 15σ</a:t>
+            </a:r>
+          </a:p>
+          <a:p>
+            <a:r>
+              <a:rPr sz="2400"/>
+              <a:t>ただし、暗黒物質の証拠ではない</a:t>
+            </a:r>
+          </a:p>
+          <a:p>
+            <a:pPr lvl="1"/>
             <a:r>
               <a:rPr sz="2000"/>
-              <a:t>どの天体・どのエネルギーでも最大 +3.46σ（何も無い空でも 4.50σ）</a:t>
+              <a:t>ICS の「空間の形」の間違いは否定できていない</a:t>
+            </a:r>
+          </a:p>
+          <a:p>
+            <a:r>
+              <a:rPr sz="2400"/>
+              <a:t>→ 独立な確認として、矮小銀河を見る</a:t>
             </a:r>
           </a:p>
         </p:txBody>
@@ -8320,7 +8446,7 @@
           <a:p>
             <a:r>
               <a:rPr sz="3400"/>
-              <a:t>天体をまとめて比べる</a:t>
+              <a:t>矮小銀河で確かめる</a:t>
             </a:r>
           </a:p>
         </p:txBody>
@@ -8338,7 +8464,7 @@
         <p:spPr>
           <a:xfrm>
             <a:off x="841248" y="1463040"/>
-            <a:ext cx="10515600" cy="4937760"/>
+            <a:ext cx="10515600" cy="4114800"/>
           </a:xfrm>
         </p:spPr>
         <p:txBody>
@@ -8347,45 +8473,80 @@
           <a:p>
             <a:r>
               <a:rPr sz="2400"/>
-              <a:t>1 個ずつでは弱いので、J が求まる 43 天体をまとめる</a:t>
+              <a:t>矮小銀河：天の川のまわりの小さな銀河</a:t>
+            </a:r>
+          </a:p>
+          <a:p>
+            <a:pPr lvl="1"/>
+            <a:r>
+              <a:rPr sz="2000"/>
+              <a:t>暗黒物質が多く、ガスや星形成が少ない（雑音が少ない）</a:t>
             </a:r>
           </a:p>
           <a:p>
             <a:r>
               <a:rPr sz="2400"/>
-              <a:t>T = Σ w_i z_i / √( Σ w_i² )、重み w_i = 天体 i の予測 σ</a:t>
+              <a:t>暗黒物質なら、矮小銀河からも同じ 20 GeV の光が来るはず</a:t>
+            </a:r>
+          </a:p>
+          <a:p>
+            <a:r>
+              <a:rPr sz="2400"/>
+              <a:t>同じ手法を、各天体のまわり半径 10° に使った</a:t>
             </a:r>
           </a:p>
           <a:p>
             <a:pPr lvl="1"/>
             <a:r>
               <a:rPr sz="2000"/>
-              <a:t>z_i：天体 i の実測の σ（20 GeV）</a:t>
+              <a:t>矮小銀河 54 ＋ M31・M33 ＋ 何も無い空 23 か所</a:t>
             </a:r>
           </a:p>
           <a:p>
             <a:r>
               <a:rPr sz="2400"/>
-              <a:t>暗黒物質が無ければ：T は平均 0、ばらつき 1</a:t>
-            </a:r>
-          </a:p>
-          <a:p>
-            <a:r>
-              <a:rPr sz="2400"/>
-              <a:t>暗黒物質があれば：T の平均 = √( Σ pred_i² ) = 1.73</a:t>
-            </a:r>
-          </a:p>
-          <a:p>
-            <a:r>
-              <a:rPr sz="2400"/>
-              <a:t>実測 T = 0.39 → ずれ 1.3σ</a:t>
-            </a:r>
-          </a:p>
-          <a:p>
-            <a:r>
-              <a:rPr sz="2400"/>
-              <a:t>ただし、ここでは J に誤差は無いとしていた</a:t>
-            </a:r>
+              <a:t>矮小銀河は小さい（0.2〜0.4°）ので、広がった ICS とは縮退しない</a:t>
+            </a:r>
+          </a:p>
+        </p:txBody>
+      </p:sp>
+      <p:sp>
+        <p:nvSpPr>
+          <p:cNvPr id="8" name="TextBox 7">
+            <a:extLst>
+              <a:ext uri="{FF2B5EF4-FFF2-40B4-BE49-F238E27FC236}">
+                <a16:creationId xmlns:a16="http://schemas.microsoft.com/office/drawing/2014/main" id="{F85CD606-E3CE-F314-B3EE-F3D7028115CB}"/>
+              </a:ext>
+            </a:extLst>
+          </p:cNvPr>
+          <p:cNvSpPr txBox="1"/>
+          <p:nvPr/>
+        </p:nvSpPr>
+        <p:spPr>
+          <a:xfrm>
+            <a:off x="5837182" y="5663239"/>
+            <a:ext cx="6093372" cy="923330"/>
+          </a:xfrm>
+          <a:prstGeom prst="rect">
+            <a:avLst/>
+          </a:prstGeom>
+          <a:noFill/>
+        </p:spPr>
+        <p:txBody>
+          <a:bodyPr wrap="square">
+            <a:spAutoFit/>
+          </a:bodyPr>
+          <a:lstStyle/>
+          <a:p>
+            <a:r>
+              <a:rPr lang="en-US" sz="1400" b="1"/>
+              <a:t>Reference:</a:t>
+            </a:r>
+            <a:r>
+              <a:rPr lang="en-US" sz="1400"/>
+              <a:t> A. B. Pace (2025), Open J. Astrophys. 8, 142</a:t>
+            </a:r>
+            <a:endParaRPr lang="en-US"/>
           </a:p>
         </p:txBody>
       </p:sp>
@@ -8431,7 +8592,7 @@
           <a:p>
             <a:r>
               <a:rPr sz="3400"/>
-              <a:t>ここで論文：J の誤差は小さく見積もられている</a:t>
+              <a:t>予測の立て方：J ファクター</a:t>
             </a:r>
           </a:p>
         </p:txBody>
@@ -8458,40 +8619,38 @@
           <a:p>
             <a:r>
               <a:rPr sz="2400"/>
-              <a:t>文献ごとの J の値は、書かれた誤差よりも大きくばらつく</a:t>
+              <a:t>対消滅の明るさ：F = ⟨σv⟩ / (8π m²) × dN/dE × J</a:t>
             </a:r>
           </a:p>
           <a:p>
             <a:r>
               <a:rPr sz="2400"/>
-              <a:t>見落とされがちな誤差の原因（8 つ）</a:t>
+              <a:t>J ファクター = 暗黒物質の密度の 2 乗を、視線方向に足し合わせた量</a:t>
+            </a:r>
+          </a:p>
+          <a:p>
+            <a:r>
+              <a:rPr sz="2400"/>
+              <a:t>天の川と矮小銀河で粒子は同じ → 比をとると J の比だけが残る</a:t>
             </a:r>
           </a:p>
           <a:p>
             <a:pPr lvl="1"/>
             <a:r>
               <a:rPr sz="2000"/>
-              <a:t>点として扱う・ハローの形・星の分布の形の仮定</a:t>
-            </a:r>
-          </a:p>
-          <a:p>
-            <a:pPr lvl="1"/>
-            <a:r>
-              <a:rPr sz="2000"/>
-              <a:t>非球対称（最大 0.4 dex）・非平衡（〜0.1）・連星（Ret II で〜0.3）</a:t>
-            </a:r>
-          </a:p>
-          <a:p>
-            <a:pPr lvl="1"/>
-            <a:r>
-              <a:rPr sz="2000"/>
-              <a:t>前景の星の混入・誤差の分布が正規分布でない</a:t>
+              <a:t>F_矮小 = F_天の川 × J_矮小 / J_天の川</a:t>
             </a:r>
           </a:p>
           <a:p>
             <a:r>
               <a:rPr sz="2400"/>
-              <a:t>Δlog₁₀J ≈ 0.5（約 3 倍）以上の誤差を見込むべき</a:t>
+              <a:t>粒子の質量などを仮定せずに「何σ見えるはずか」が出る</a:t>
+            </a:r>
+          </a:p>
+          <a:p>
+            <a:r>
+              <a:rPr sz="2400"/>
+              <a:t>矮小銀河の J は、星の動きから推定する</a:t>
             </a:r>
           </a:p>
         </p:txBody>
@@ -8530,7 +8689,7 @@
             </a:r>
             <a:r>
               <a:rPr lang="en-US" sz="1400"/>
-              <a:t> Bertólez-Martínez, Hooper &amp; Khatee Zathul (2026), arXiv:2609.20944 §II</a:t>
+              <a:t> A. B. Pace &amp; L. E. Strigari (2019), MNRAS 482, 3480</a:t>
             </a:r>
             <a:endParaRPr lang="en-US"/>
           </a:p>
@@ -8578,93 +8737,45 @@
           <a:p>
             <a:r>
               <a:rPr sz="3400"/>
-              <a:t>詳細なmethodについて①：仮想データの作り方</a:t>
-            </a:r>
-          </a:p>
-        </p:txBody>
-      </p:sp>
-      <p:sp>
-        <p:nvSpPr>
-          <p:cNvPr id="3" name="Content Placeholder 2"/>
-          <p:cNvSpPr>
-            <a:spLocks noGrp="1"/>
-          </p:cNvSpPr>
-          <p:nvPr>
-            <p:ph idx="1"/>
-          </p:nvPr>
-        </p:nvSpPr>
+              <a:t>結果：どこにも信号は見えなかった</a:t>
+            </a:r>
+          </a:p>
+        </p:txBody>
+      </p:sp>
+      <p:pic>
+        <p:nvPicPr>
+          <p:cNvPr id="3" name="Picture 2" descr="fig_dwarf_results.png"/>
+          <p:cNvPicPr>
+            <a:picLocks noChangeAspect="1"/>
+          </p:cNvPicPr>
+          <p:nvPr/>
+        </p:nvPicPr>
+        <p:blipFill>
+          <a:blip r:embed="rId3"/>
+          <a:stretch>
+            <a:fillRect/>
+          </a:stretch>
+        </p:blipFill>
         <p:spPr>
           <a:xfrm>
-            <a:off x="841248" y="1463040"/>
-            <a:ext cx="10515600" cy="4114800"/>
+            <a:off x="2194560" y="1234440"/>
+            <a:ext cx="7156174" cy="4114800"/>
           </a:xfrm>
+          <a:prstGeom prst="rect">
+            <a:avLst/>
+          </a:prstGeom>
         </p:spPr>
-        <p:txBody>
-          <a:bodyPr/>
-          <a:lstStyle/>
-          <a:p>
-            <a:r>
-              <a:rPr sz="2200"/>
-              <a:t>Fermi-LAT の観測を計算機の中で作る（FermiTools、fermipy）</a:t>
-            </a:r>
-          </a:p>
-          <a:p>
-            <a:pPr lvl="1"/>
-            <a:r>
-              <a:rPr sz="1800"/>
-              <a:t>17.4 年分、0.5 GeV〜1 TeV、10° × 10° の領域、0.08° の画素</a:t>
-            </a:r>
-          </a:p>
-          <a:p>
-            <a:r>
-              <a:rPr sz="2200"/>
-              <a:t>背景：銀河の拡散光＋等方の光から、ポアソン乱数で光子を作る</a:t>
-            </a:r>
-          </a:p>
-          <a:p>
-            <a:r>
-              <a:rPr sz="2200"/>
-              <a:t>暗黒物質の信号を入れる</a:t>
-            </a:r>
-          </a:p>
-          <a:p>
-            <a:pPr lvl="1"/>
-            <a:r>
-              <a:rPr sz="1800"/>
-              <a:t>質量 42 GeV、b クォーク対、⟨σv⟩ = 1.4 × 10⁻²⁶ cm³/s</a:t>
-            </a:r>
-          </a:p>
-          <a:p>
-            <a:pPr lvl="1"/>
-            <a:r>
-              <a:rPr sz="1800"/>
-              <a:t>銀河中心 GeV 超過（GCE）に合う値</a:t>
-            </a:r>
-          </a:p>
-          <a:p>
-            <a:r>
-              <a:rPr sz="2200"/>
-              <a:t>対象：Ursa Minor 1 個と、27 個の矮小銀河</a:t>
-            </a:r>
-          </a:p>
-        </p:txBody>
-      </p:sp>
-      <p:sp>
-        <p:nvSpPr>
-          <p:cNvPr id="8" name="TextBox 7">
-            <a:extLst>
-              <a:ext uri="{FF2B5EF4-FFF2-40B4-BE49-F238E27FC236}">
-                <a16:creationId xmlns:a16="http://schemas.microsoft.com/office/drawing/2014/main" id="{F85CD606-E3CE-F314-B3EE-F3D7028115CB}"/>
-              </a:ext>
-            </a:extLst>
-          </p:cNvPr>
+      </p:pic>
+      <p:sp>
+        <p:nvSpPr>
+          <p:cNvPr id="4" name="TextBox 3"/>
           <p:cNvSpPr txBox="1"/>
           <p:nvPr/>
         </p:nvSpPr>
         <p:spPr>
           <a:xfrm>
-            <a:off x="5837182" y="5663239"/>
-            <a:ext cx="6093372" cy="923330"/>
+            <a:off x="457200" y="5486400"/>
+            <a:ext cx="11247120" cy="457200"/>
           </a:xfrm>
           <a:prstGeom prst="rect">
             <a:avLst/>
@@ -8678,14 +8789,9 @@
           <a:lstStyle/>
           <a:p>
             <a:r>
-              <a:rPr lang="en-US" sz="1400" b="1"/>
-              <a:t>Reference:</a:t>
-            </a:r>
-            <a:r>
-              <a:rPr lang="en-US" sz="1400"/>
-              <a:t> Bertólez-Martínez, Hooper &amp; Khatee Zathul (2026), arXiv:2609.20944 §III</a:t>
-            </a:r>
-            <a:endParaRPr lang="en-US"/>
+              <a:rPr sz="2000"/>
+              <a:t>どの天体・どのエネルギーでも最大 +3.46σ（何も無い空でも 4.50σ）</a:t>
+            </a:r>
           </a:p>
         </p:txBody>
       </p:sp>
@@ -8731,7 +8837,7 @@
           <a:p>
             <a:r>
               <a:rPr sz="3400"/>
-              <a:t>詳細なmethodについて②：尤度と 2 つの誤差</a:t>
+              <a:t>天体をまとめて比べる</a:t>
             </a:r>
           </a:p>
         </p:txBody>
@@ -8749,7 +8855,7 @@
         <p:spPr>
           <a:xfrm>
             <a:off x="841248" y="1463040"/>
-            <a:ext cx="10515600" cy="4114800"/>
+            <a:ext cx="10515600" cy="4937760"/>
           </a:xfrm>
         </p:spPr>
         <p:txBody>
@@ -8757,88 +8863,46 @@
           <a:lstStyle/>
           <a:p>
             <a:r>
-              <a:rPr sz="2200"/>
-              <a:t>各天体の尤度 = 光子のポアソン尤度 × J の尤度</a:t>
+              <a:rPr sz="2400"/>
+              <a:t>1 個ずつでは弱いので、J が求まる 43 天体をまとめる</a:t>
+            </a:r>
+          </a:p>
+          <a:p>
+            <a:r>
+              <a:rPr sz="2400"/>
+              <a:t>T = Σ w_i z_i / √( Σ w_i² )、重み w_i = 天体 i の予測 σ</a:t>
             </a:r>
           </a:p>
           <a:p>
             <a:pPr lvl="1"/>
             <a:r>
-              <a:rPr sz="1800"/>
-              <a:t>L_J ∝ exp[ −(log₁₀J − log₁₀J_obs)² / 2σ_L² ]</a:t>
-            </a:r>
-          </a:p>
-          <a:p>
-            <a:r>
-              <a:rPr sz="2200"/>
-              <a:t>27 個は尤度の積でまとめる（⟨σv⟩ は共通、J は天体ごと）</a:t>
-            </a:r>
-          </a:p>
-          <a:p>
-            <a:r>
-              <a:rPr sz="2200"/>
-              <a:t>2 つの誤差を分けて動かす</a:t>
-            </a:r>
-          </a:p>
-          <a:p>
-            <a:pPr lvl="1"/>
-            <a:r>
-              <a:rPr sz="1800"/>
-              <a:t>σ：J の本当のばらつき（J_obs を J_true のまわりに σ でばらつかせる）</a:t>
-            </a:r>
-          </a:p>
-          <a:p>
-            <a:pPr lvl="1"/>
-            <a:r>
-              <a:rPr sz="1800"/>
-              <a:t>σ_L：解析で仮定する幅</a:t>
-            </a:r>
-          </a:p>
-          <a:p>
-            <a:r>
-              <a:rPr sz="2200"/>
-              <a:t>95% 上限：TS が最大値から 2.71 下がる点（Wilks の定理を仮定）</a:t>
-            </a:r>
-          </a:p>
-        </p:txBody>
-      </p:sp>
-      <p:sp>
-        <p:nvSpPr>
-          <p:cNvPr id="8" name="TextBox 7">
-            <a:extLst>
-              <a:ext uri="{FF2B5EF4-FFF2-40B4-BE49-F238E27FC236}">
-                <a16:creationId xmlns:a16="http://schemas.microsoft.com/office/drawing/2014/main" id="{F85CD606-E3CE-F314-B3EE-F3D7028115CB}"/>
-              </a:ext>
-            </a:extLst>
-          </p:cNvPr>
-          <p:cNvSpPr txBox="1"/>
-          <p:nvPr/>
-        </p:nvSpPr>
-        <p:spPr>
-          <a:xfrm>
-            <a:off x="5837182" y="5663239"/>
-            <a:ext cx="6093372" cy="923330"/>
-          </a:xfrm>
-          <a:prstGeom prst="rect">
-            <a:avLst/>
-          </a:prstGeom>
-          <a:noFill/>
-        </p:spPr>
-        <p:txBody>
-          <a:bodyPr wrap="square">
-            <a:spAutoFit/>
-          </a:bodyPr>
-          <a:lstStyle/>
-          <a:p>
-            <a:r>
-              <a:rPr lang="en-US" sz="1400" b="1"/>
-              <a:t>Reference:</a:t>
-            </a:r>
-            <a:r>
-              <a:rPr lang="en-US" sz="1400"/>
-              <a:t> Bertólez-Martínez, Hooper &amp; Khatee Zathul (2026), arXiv:2609.20944 式 (6)–(10)</a:t>
-            </a:r>
-            <a:endParaRPr lang="en-US"/>
+              <a:rPr sz="2000"/>
+              <a:t>z_i：天体 i の実測の σ（20 GeV）</a:t>
+            </a:r>
+          </a:p>
+          <a:p>
+            <a:r>
+              <a:rPr sz="2400"/>
+              <a:t>暗黒物質が無ければ：T は平均 0、ばらつき 1</a:t>
+            </a:r>
+          </a:p>
+          <a:p>
+            <a:r>
+              <a:rPr sz="2400"/>
+              <a:t>暗黒物質があれば：T の平均 = √( Σ pred_i² ) = 1.73</a:t>
+            </a:r>
+          </a:p>
+          <a:p>
+            <a:r>
+              <a:rPr sz="2400"/>
+              <a:t>実測 T = 0.39 → ずれ 1.3σ</a:t>
+            </a:r>
+          </a:p>
+          <a:p>
+            <a:r>
+              <a:rPr sz="2400"/>
+              <a:t>ただし、ここでは J に誤差は無いとしていた</a:t>
+            </a:r>
           </a:p>
         </p:txBody>
       </p:sp>
@@ -8884,7 +8948,7 @@
           <a:p>
             <a:r>
               <a:rPr sz="3400"/>
-              <a:t>詳細なmethodについて③：何を数えたか</a:t>
+              <a:t>ここで論文：J の誤差は小さく見積もられている</a:t>
             </a:r>
           </a:p>
         </p:txBody>
@@ -8911,39 +8975,40 @@
           <a:p>
             <a:r>
               <a:rPr sz="2400"/>
-              <a:t>本物の信号を入れた仮想データを何度も作る</a:t>
+              <a:t>文献ごとの J の値は、書かれた誤差よりも大きくばらつく</a:t>
+            </a:r>
+          </a:p>
+          <a:p>
+            <a:r>
+              <a:rPr sz="2400"/>
+              <a:t>見落とされがちな誤差の原因（8 つ）</a:t>
             </a:r>
           </a:p>
           <a:p>
             <a:pPr lvl="1"/>
             <a:r>
               <a:rPr sz="2000"/>
-              <a:t>Ursa Minor で 1000 回（基準の設定では 1 万回）</a:t>
+              <a:t>点として扱う・ハローの形・星の分布の形の仮定</a:t>
+            </a:r>
+          </a:p>
+          <a:p>
+            <a:pPr lvl="1"/>
+            <a:r>
+              <a:rPr sz="2000"/>
+              <a:t>非球対称（最大 0.4 dex）・非平衡（〜0.1）・連星（Ret II で〜0.3）</a:t>
+            </a:r>
+          </a:p>
+          <a:p>
+            <a:pPr lvl="1"/>
+            <a:r>
+              <a:rPr sz="2000"/>
+              <a:t>前景の星の混入・誤差の分布が正規分布でない</a:t>
             </a:r>
           </a:p>
           <a:p>
             <a:r>
               <a:rPr sz="2400"/>
-              <a:t>それぞれで 95% 上限を出す</a:t>
-            </a:r>
-          </a:p>
-          <a:p>
-            <a:r>
-              <a:rPr sz="2400"/>
-              <a:t>上限が本物の ⟨σv⟩ より下 =「本物を無いと間違えた」</a:t>
-            </a:r>
-          </a:p>
-          <a:p>
-            <a:r>
-              <a:rPr sz="2400"/>
-              <a:t>95% 上限なら、間違いは 5% 以下のはず</a:t>
-            </a:r>
-          </a:p>
-          <a:p>
-            <a:pPr lvl="1"/>
-            <a:r>
-              <a:rPr sz="2000"/>
-              <a:t>これが守られているか（カバレッジ）を調べる</a:t>
+              <a:t>Δlog₁₀J ≈ 0.5（約 3 倍）以上の誤差を見込むべき</a:t>
             </a:r>
           </a:p>
         </p:txBody>
@@ -8982,7 +9047,7 @@
             </a:r>
             <a:r>
               <a:rPr lang="en-US" sz="1400"/>
-              <a:t> Bertólez-Martínez, Hooper &amp; Khatee Zathul (2026), arXiv:2609.20944 §IV</a:t>
+              <a:t> Bertólez-Martínez, Hooper &amp; Khatee Zathul (2026), arXiv:2609.20944 §II</a:t>
             </a:r>
             <a:endParaRPr lang="en-US"/>
           </a:p>
@@ -9030,7 +9095,7 @@
           <a:p>
             <a:r>
               <a:rPr sz="3400"/>
-              <a:t>論文の結果①：Ursa Minor 1 個</a:t>
+              <a:t>詳細なmethodについて①：仮想データの作り方</a:t>
             </a:r>
           </a:p>
         </p:txBody>
@@ -9056,48 +9121,47 @@
           <a:lstStyle/>
           <a:p>
             <a:r>
-              <a:rPr sz="2400"/>
-              <a:t>σ_L を 0.3 / 0.5 / 1.0 だけ大きくすると</a:t>
+              <a:rPr sz="2200"/>
+              <a:t>Fermi-LAT の観測を計算機の中で作る（FermiTools、fermipy）</a:t>
             </a:r>
           </a:p>
           <a:p>
             <a:pPr lvl="1"/>
             <a:r>
-              <a:rPr sz="2000"/>
-              <a:t>上限が 1.5 / 2.5 / 11 倍ゆるくなる</a:t>
-            </a:r>
-          </a:p>
-          <a:p>
-            <a:r>
-              <a:rPr sz="2400"/>
-              <a:t>本当の誤差 σ だけ大きく、σ_L は小さいままだと</a:t>
+              <a:rPr sz="1800"/>
+              <a:t>17.4 年分、0.5 GeV〜1 TeV、10° × 10° の領域、0.08° の画素</a:t>
+            </a:r>
+          </a:p>
+          <a:p>
+            <a:r>
+              <a:rPr sz="2200"/>
+              <a:t>背景：銀河の拡散光＋等方の光から、ポアソン乱数で光子を作る</a:t>
+            </a:r>
+          </a:p>
+          <a:p>
+            <a:r>
+              <a:rPr sz="2200"/>
+              <a:t>暗黒物質の信号を入れる</a:t>
             </a:r>
           </a:p>
           <a:p>
             <a:pPr lvl="1"/>
             <a:r>
-              <a:rPr sz="2000"/>
-              <a:t>本物を除外する割合 1.7% / 8.0% / 22%</a:t>
+              <a:rPr sz="1800"/>
+              <a:t>質量 42 GeV、b クォーク対、⟨σv⟩ = 1.4 × 10⁻²⁶ cm³/s</a:t>
             </a:r>
           </a:p>
           <a:p>
             <a:pPr lvl="1"/>
             <a:r>
-              <a:rPr sz="2000"/>
-              <a:t>σ_L を σ に合わせれば 5% 以下に戻る</a:t>
-            </a:r>
-          </a:p>
-          <a:p>
-            <a:r>
-              <a:rPr sz="2400"/>
-              <a:t>形の間違い：球対称 NFW で解析 → 上限 2.4 倍厳しく</a:t>
-            </a:r>
-          </a:p>
-          <a:p>
-            <a:pPr lvl="1"/>
-            <a:r>
-              <a:rPr sz="2000"/>
-              <a:t>点として扱う → 1.4 倍厳しく</a:t>
+              <a:rPr sz="1800"/>
+              <a:t>銀河中心 GeV 超過（GCE）に合う値</a:t>
+            </a:r>
+          </a:p>
+          <a:p>
+            <a:r>
+              <a:rPr sz="2200"/>
+              <a:t>対象：Ursa Minor 1 個と、27 個の矮小銀河</a:t>
             </a:r>
           </a:p>
         </p:txBody>
@@ -9136,7 +9200,7 @@
             </a:r>
             <a:r>
               <a:rPr lang="en-US" sz="1400"/>
-              <a:t> Bertólez-Martínez, Hooper &amp; Khatee Zathul (2026), arXiv:2609.20944 §IV, Fig. 2–4</a:t>
+              <a:t> Bertólez-Martínez, Hooper &amp; Khatee Zathul (2026), arXiv:2609.20944 §III</a:t>
             </a:r>
             <a:endParaRPr lang="en-US"/>
           </a:p>
@@ -9184,7 +9248,7 @@
           <a:p>
             <a:r>
               <a:rPr sz="3400"/>
-              <a:t>論文の結果②：27 個をまとめると</a:t>
+              <a:t>詳細なmethodについて②：尤度と 2 つの誤差</a:t>
             </a:r>
           </a:p>
         </p:txBody>
@@ -9211,45 +9275,46 @@
           <a:p>
             <a:r>
               <a:rPr sz="2200"/>
-              <a:t>σ_L を 0.3 / 0.5 / 1.0 → 上限 1.14 / 1.44 / 3.23 倍ゆるく</a:t>
+              <a:t>各天体の尤度 = 光子のポアソン尤度 × J の尤度</a:t>
+            </a:r>
+          </a:p>
+          <a:p>
+            <a:pPr lvl="1"/>
+            <a:r>
+              <a:rPr sz="1800"/>
+              <a:t>L_J ∝ exp[ −(log₁₀J − log₁₀J_obs)² / 2σ_L² ]</a:t>
             </a:r>
           </a:p>
           <a:p>
             <a:r>
               <a:rPr sz="2200"/>
-              <a:t>誤差を正しく入れても、本物を除外する割合 21%（5% のはず）</a:t>
+              <a:t>27 個は尤度の積でまとめる（⟨σv⟩ は共通、J は天体ごと）</a:t>
+            </a:r>
+          </a:p>
+          <a:p>
+            <a:r>
+              <a:rPr sz="2200"/>
+              <a:t>2 つの誤差を分けて動かす</a:t>
             </a:r>
           </a:p>
           <a:p>
             <a:pPr lvl="1"/>
             <a:r>
               <a:rPr sz="1800"/>
-              <a:t>J の数が天体の数と一緒に増え、Wilks の定理の前提が崩れる</a:t>
+              <a:t>σ：J の本当のばらつき（J_obs を J_true のまわりに σ でばらつかせる）</a:t>
+            </a:r>
+          </a:p>
+          <a:p>
+            <a:pPr lvl="1"/>
+            <a:r>
+              <a:rPr sz="1800"/>
+              <a:t>σ_L：解析で仮定する幅</a:t>
             </a:r>
           </a:p>
           <a:p>
             <a:r>
               <a:rPr sz="2200"/>
-              <a:t>本当の誤差を 0.3 / 0.5 / 1.0 大きくすると 31% / 49% / 88%</a:t>
-            </a:r>
-          </a:p>
-          <a:p>
-            <a:pPr lvl="1"/>
-            <a:r>
-              <a:rPr sz="1800"/>
-              <a:t>σ_L を合わせても 23% / 28% / 38%</a:t>
-            </a:r>
-          </a:p>
-          <a:p>
-            <a:r>
-              <a:rPr sz="2200"/>
-              <a:t>原因：J が上に振れた天体が、上限を決めてしまう</a:t>
-            </a:r>
-          </a:p>
-          <a:p>
-            <a:r>
-              <a:rPr sz="2200"/>
-              <a:t>対策の一つ：何も無い領域で較正する</a:t>
+              <a:t>95% 上限：TS が最大値から 2.71 下がる点（Wilks の定理を仮定）</a:t>
             </a:r>
           </a:p>
         </p:txBody>
@@ -9288,7 +9353,7 @@
             </a:r>
             <a:r>
               <a:rPr lang="en-US" sz="1400"/>
-              <a:t> Bertólez-Martínez, Hooper &amp; Khatee Zathul (2026), arXiv:2609.20944 §V, Fig. 5–7</a:t>
+              <a:t> Bertólez-Martínez, Hooper &amp; Khatee Zathul (2026), arXiv:2609.20944 式 (6)–(10)</a:t>
             </a:r>
             <a:endParaRPr lang="en-US"/>
           </a:p>
@@ -9336,7 +9401,7 @@
           <a:p>
             <a:r>
               <a:rPr sz="3400"/>
-              <a:t>論文のまとめ</a:t>
+              <a:t>詳細なmethodについて③：何を数えたか</a:t>
             </a:r>
           </a:p>
         </p:txBody>
@@ -9363,19 +9428,39 @@
           <a:p>
             <a:r>
               <a:rPr sz="2400"/>
-              <a:t>J の誤差や形を雑に扱うと、上限は厳しく出すぎ、本物の信号を除外しやすい</a:t>
+              <a:t>本物の信号を入れた仮想データを何度も作る</a:t>
+            </a:r>
+          </a:p>
+          <a:p>
+            <a:pPr lvl="1"/>
+            <a:r>
+              <a:rPr sz="2000"/>
+              <a:t>Ursa Minor で 1000 回（基準の設定では 1 万回）</a:t>
             </a:r>
           </a:p>
           <a:p>
             <a:r>
               <a:rPr sz="2400"/>
-              <a:t>「銀河中心と矮小銀河が矛盾する」とは、まだ言えない</a:t>
+              <a:t>それぞれで 95% 上限を出す</a:t>
             </a:r>
           </a:p>
           <a:p>
             <a:r>
               <a:rPr sz="2400"/>
-              <a:t>Δlog₁₀J ≈ 0.5 程度の誤差を見込むべき</a:t>
+              <a:t>上限が本物の ⟨σv⟩ より下 =「本物を無いと間違えた」</a:t>
+            </a:r>
+          </a:p>
+          <a:p>
+            <a:r>
+              <a:rPr sz="2400"/>
+              <a:t>95% 上限なら、間違いは 5% 以下のはず</a:t>
+            </a:r>
+          </a:p>
+          <a:p>
+            <a:pPr lvl="1"/>
+            <a:r>
+              <a:rPr sz="2000"/>
+              <a:t>これが守られているか（カバレッジ）を調べる</a:t>
             </a:r>
           </a:p>
         </p:txBody>
@@ -9414,7 +9499,7 @@
             </a:r>
             <a:r>
               <a:rPr lang="en-US" sz="1400"/>
-              <a:t> Bertólez-Martínez, Hooper &amp; Khatee Zathul (2026), arXiv:2609.20944 §VI</a:t>
+              <a:t> Bertólez-Martínez, Hooper &amp; Khatee Zathul (2026), arXiv:2609.20944 §IV</a:t>
             </a:r>
             <a:endParaRPr lang="en-US"/>
           </a:p>
@@ -9462,7 +9547,7 @@
           <a:p>
             <a:r>
               <a:rPr sz="3400"/>
-              <a:t>論文の考え方を、僕の結果に当てはめる</a:t>
+              <a:t>論文の結果①：Ursa Minor 1 個</a:t>
             </a:r>
           </a:p>
         </p:txBody>
@@ -9489,39 +9574,47 @@
           <a:p>
             <a:r>
               <a:rPr sz="2400"/>
-              <a:t>これまで：J の誤差 = 0（J は推定値そのまま）</a:t>
+              <a:t>σ_L を 0.3 / 0.5 / 1.0 だけ大きくすると</a:t>
+            </a:r>
+          </a:p>
+          <a:p>
+            <a:pPr lvl="1"/>
+            <a:r>
+              <a:rPr sz="2000"/>
+              <a:t>上限が 1.5 / 2.5 / 11 倍ゆるくなる</a:t>
             </a:r>
           </a:p>
           <a:p>
             <a:r>
               <a:rPr sz="2400"/>
-              <a:t>今回：各天体の本当の J = 推定値 × 10^δ_i</a:t>
+              <a:t>本当の誤差 σ だけ大きく、σ_L は小さいままだと</a:t>
             </a:r>
           </a:p>
           <a:p>
             <a:pPr lvl="1"/>
             <a:r>
               <a:rPr sz="2000"/>
-              <a:t>δ_i は平均 0、幅 0.5 の正規分布（天体ごとに独立）</a:t>
+              <a:t>本物を除外する割合 1.7% / 8.0% / 22%</a:t>
             </a:r>
           </a:p>
           <a:p>
             <a:pPr lvl="1"/>
             <a:r>
               <a:rPr sz="2000"/>
-              <a:t>→ J がおよそ 1/3 倍〜3 倍の範囲でずれる</a:t>
+              <a:t>σ_L を σ に合わせれば 5% 以下に戻る</a:t>
             </a:r>
           </a:p>
           <a:p>
             <a:r>
               <a:rPr sz="2400"/>
-              <a:t>予測 σ は J に比例 → pred_i × 10^δ_i</a:t>
-            </a:r>
-          </a:p>
-          <a:p>
-            <a:r>
-              <a:rPr sz="2400"/>
-              <a:t>論文と同じく「J をずらした世界」をたくさん作る（20 万回）</a:t>
+              <a:t>形の間違い：球対称 NFW で解析 → 上限 2.4 倍厳しく</a:t>
+            </a:r>
+          </a:p>
+          <a:p>
+            <a:pPr lvl="1"/>
+            <a:r>
+              <a:rPr sz="2000"/>
+              <a:t>点として扱う → 1.4 倍厳しく</a:t>
             </a:r>
           </a:p>
         </p:txBody>
@@ -9560,7 +9653,7 @@
             </a:r>
             <a:r>
               <a:rPr lang="en-US" sz="1400"/>
-              <a:t> Bertólez-Martínez, Hooper &amp; Khatee Zathul (2026), arXiv:2609.20944 §IV</a:t>
+              <a:t> Bertólez-Martínez, Hooper &amp; Khatee Zathul (2026), arXiv:2609.20944 §IV, Fig. 2–4</a:t>
             </a:r>
             <a:endParaRPr lang="en-US"/>
           </a:p>
@@ -9608,7 +9701,7 @@
           <a:p>
             <a:r>
               <a:rPr sz="3400"/>
-              <a:t>有意度の計算式のどこに誤差が入るか</a:t>
+              <a:t>論文の結果②：27 個をまとめると</a:t>
             </a:r>
           </a:p>
         </p:txBody>
@@ -9626,7 +9719,7 @@
         <p:spPr>
           <a:xfrm>
             <a:off x="841248" y="1463040"/>
-            <a:ext cx="10515600" cy="4937760"/>
+            <a:ext cx="10515600" cy="4114800"/>
           </a:xfrm>
         </p:spPr>
         <p:txBody>
@@ -9634,48 +9727,87 @@
           <a:lstStyle/>
           <a:p>
             <a:r>
-              <a:rPr sz="2400"/>
-              <a:t>暗黒物質ありで期待される T</a:t>
+              <a:rPr sz="2200"/>
+              <a:t>σ_L を 0.3 / 0.5 / 1.0 → 上限 1.14 / 1.44 / 3.23 倍ゆるく</a:t>
+            </a:r>
+          </a:p>
+          <a:p>
+            <a:r>
+              <a:rPr sz="2200"/>
+              <a:t>誤差を正しく入れても、本物を除外する割合 21%（5% のはず）</a:t>
             </a:r>
           </a:p>
           <a:p>
             <a:pPr lvl="1"/>
             <a:r>
-              <a:rPr sz="2000"/>
-              <a:t>誤差なし：E[T] = Σ w_i pred_i / √Σ w_i² = 1.73</a:t>
+              <a:rPr sz="1800"/>
+              <a:t>J の数が天体の数と一緒に増え、Wilks の定理の前提が崩れる</a:t>
+            </a:r>
+          </a:p>
+          <a:p>
+            <a:r>
+              <a:rPr sz="2200"/>
+              <a:t>本当の誤差を 0.3 / 0.5 / 1.0 大きくすると 31% / 49% / 88%</a:t>
             </a:r>
           </a:p>
           <a:p>
             <a:pPr lvl="1"/>
             <a:r>
-              <a:rPr sz="2000"/>
-              <a:t>誤差あり：E[T] = Σ w_i pred_i 10^δ_i / √Σ w_i²  ← δ でばらつく</a:t>
-            </a:r>
-          </a:p>
-          <a:p>
-            <a:r>
-              <a:rPr sz="2400"/>
-              <a:t>実測 T にも測定の揺れ s がある（s = 1、または空で測った 1.26）</a:t>
-            </a:r>
-          </a:p>
-          <a:p>
-            <a:r>
-              <a:rPr sz="2400"/>
-              <a:t>暗黒物質ありで、実測 0.39 以下になる確率</a:t>
-            </a:r>
-          </a:p>
-          <a:p>
-            <a:pPr lvl="1"/>
-            <a:r>
-              <a:rPr sz="2000"/>
-              <a:t>p = （δ について平均）Φ( (0.39 − E[T]) / s )</a:t>
-            </a:r>
-          </a:p>
-          <a:p>
-            <a:r>
-              <a:rPr sz="2400"/>
-              <a:t>p を σ に直したもの =「ずれ」</a:t>
-            </a:r>
+              <a:rPr sz="1800"/>
+              <a:t>σ_L を合わせても 23% / 28% / 38%</a:t>
+            </a:r>
+          </a:p>
+          <a:p>
+            <a:r>
+              <a:rPr sz="2200"/>
+              <a:t>原因：J が上に振れた天体が、上限を決めてしまう</a:t>
+            </a:r>
+          </a:p>
+          <a:p>
+            <a:r>
+              <a:rPr sz="2200"/>
+              <a:t>対策の一つ：何も無い領域で較正する</a:t>
+            </a:r>
+          </a:p>
+        </p:txBody>
+      </p:sp>
+      <p:sp>
+        <p:nvSpPr>
+          <p:cNvPr id="8" name="TextBox 7">
+            <a:extLst>
+              <a:ext uri="{FF2B5EF4-FFF2-40B4-BE49-F238E27FC236}">
+                <a16:creationId xmlns:a16="http://schemas.microsoft.com/office/drawing/2014/main" id="{F85CD606-E3CE-F314-B3EE-F3D7028115CB}"/>
+              </a:ext>
+            </a:extLst>
+          </p:cNvPr>
+          <p:cNvSpPr txBox="1"/>
+          <p:nvPr/>
+        </p:nvSpPr>
+        <p:spPr>
+          <a:xfrm>
+            <a:off x="5837182" y="5663239"/>
+            <a:ext cx="6093372" cy="923330"/>
+          </a:xfrm>
+          <a:prstGeom prst="rect">
+            <a:avLst/>
+          </a:prstGeom>
+          <a:noFill/>
+        </p:spPr>
+        <p:txBody>
+          <a:bodyPr wrap="square">
+            <a:spAutoFit/>
+          </a:bodyPr>
+          <a:lstStyle/>
+          <a:p>
+            <a:r>
+              <a:rPr lang="en-US" sz="1400" b="1"/>
+              <a:t>Reference:</a:t>
+            </a:r>
+            <a:r>
+              <a:rPr lang="en-US" sz="1400"/>
+              <a:t> Bertólez-Martínez, Hooper &amp; Khatee Zathul (2026), arXiv:2609.20944 §V, Fig. 5–7</a:t>
+            </a:r>
+            <a:endParaRPr lang="en-US"/>
           </a:p>
         </p:txBody>
       </p:sp>
@@ -9963,45 +10095,66 @@
           <a:p>
             <a:r>
               <a:rPr sz="3400"/>
-              <a:t>結果：予測の幅と実測</a:t>
-            </a:r>
-          </a:p>
-        </p:txBody>
-      </p:sp>
-      <p:pic>
-        <p:nvPicPr>
-          <p:cNvPr id="3" name="Picture 2" descr="fig_dwarf_J_uncertainty.png"/>
-          <p:cNvPicPr>
-            <a:picLocks noChangeAspect="1"/>
-          </p:cNvPicPr>
-          <p:nvPr/>
-        </p:nvPicPr>
-        <p:blipFill>
-          <a:blip r:embed="rId3"/>
-          <a:stretch>
-            <a:fillRect/>
-          </a:stretch>
-        </p:blipFill>
+              <a:t>論文のまとめ</a:t>
+            </a:r>
+          </a:p>
+        </p:txBody>
+      </p:sp>
+      <p:sp>
+        <p:nvSpPr>
+          <p:cNvPr id="3" name="Content Placeholder 2"/>
+          <p:cNvSpPr>
+            <a:spLocks noGrp="1"/>
+          </p:cNvSpPr>
+          <p:nvPr>
+            <p:ph idx="1"/>
+          </p:nvPr>
+        </p:nvSpPr>
         <p:spPr>
           <a:xfrm>
-            <a:off x="2194560" y="1234440"/>
-            <a:ext cx="6858000" cy="4114800"/>
+            <a:off x="841248" y="1463040"/>
+            <a:ext cx="10515600" cy="4114800"/>
           </a:xfrm>
-          <a:prstGeom prst="rect">
-            <a:avLst/>
-          </a:prstGeom>
         </p:spPr>
-      </p:pic>
-      <p:sp>
-        <p:nvSpPr>
-          <p:cNvPr id="4" name="TextBox 3"/>
+        <p:txBody>
+          <a:bodyPr/>
+          <a:lstStyle/>
+          <a:p>
+            <a:r>
+              <a:rPr sz="2400"/>
+              <a:t>J の誤差や形を雑に扱うと、上限は厳しく出すぎ、本物の信号を除外しやすい</a:t>
+            </a:r>
+          </a:p>
+          <a:p>
+            <a:r>
+              <a:rPr sz="2400"/>
+              <a:t>「銀河中心と矮小銀河が矛盾する」とは、まだ言えない</a:t>
+            </a:r>
+          </a:p>
+          <a:p>
+            <a:r>
+              <a:rPr sz="2400"/>
+              <a:t>Δlog₁₀J ≈ 0.5 程度の誤差を見込むべき</a:t>
+            </a:r>
+          </a:p>
+        </p:txBody>
+      </p:sp>
+      <p:sp>
+        <p:nvSpPr>
+          <p:cNvPr id="8" name="TextBox 7">
+            <a:extLst>
+              <a:ext uri="{FF2B5EF4-FFF2-40B4-BE49-F238E27FC236}">
+                <a16:creationId xmlns:a16="http://schemas.microsoft.com/office/drawing/2014/main" id="{F85CD606-E3CE-F314-B3EE-F3D7028115CB}"/>
+              </a:ext>
+            </a:extLst>
+          </p:cNvPr>
           <p:cNvSpPr txBox="1"/>
           <p:nvPr/>
         </p:nvSpPr>
         <p:spPr>
           <a:xfrm>
-            <a:off x="457200" y="5486400"/>
-            <a:ext cx="11247120" cy="457200"/>
+            <a:off x="5837182" y="5663239"/>
+            <a:ext cx="6093372" cy="923330"/>
           </a:xfrm>
           <a:prstGeom prst="rect">
             <a:avLst/>
@@ -10015,9 +10168,14 @@
           <a:lstStyle/>
           <a:p>
             <a:r>
-              <a:rPr sz="2000"/>
-              <a:t>期待 1.7σ → J の誤差で 1.3〜5.0σ に広がる。実測 0.4σ ± 1.26。ずれ 1.3σ</a:t>
-            </a:r>
+              <a:rPr lang="en-US" sz="1400" b="1"/>
+              <a:t>Reference:</a:t>
+            </a:r>
+            <a:r>
+              <a:rPr lang="en-US" sz="1400"/>
+              <a:t> Bertólez-Martínez, Hooper &amp; Khatee Zathul (2026), arXiv:2609.20944 §VI</a:t>
+            </a:r>
+            <a:endParaRPr lang="en-US"/>
           </a:p>
         </p:txBody>
       </p:sp>
@@ -10063,7 +10221,7 @@
           <a:p>
             <a:r>
               <a:rPr sz="3400"/>
-              <a:t>結果の数字</a:t>
+              <a:t>論文の考え方を、僕の結果に当てはめる</a:t>
             </a:r>
           </a:p>
         </p:txBody>
@@ -10081,7 +10239,7 @@
         <p:spPr>
           <a:xfrm>
             <a:off x="841248" y="1463040"/>
-            <a:ext cx="10515600" cy="4937760"/>
+            <a:ext cx="10515600" cy="4114800"/>
           </a:xfrm>
         </p:spPr>
         <p:txBody>
@@ -10090,41 +10248,80 @@
           <a:p>
             <a:r>
               <a:rPr sz="2400"/>
-              <a:t>局所密度 0.42 GeV/cm³ の場合（43 天体、20 GeV）</a:t>
+              <a:t>これまで：J の誤差 = 0（J は推定値そのまま）</a:t>
+            </a:r>
+          </a:p>
+          <a:p>
+            <a:r>
+              <a:rPr sz="2400"/>
+              <a:t>今回：各天体の本当の J = 推定値 × 10^δ_i</a:t>
             </a:r>
           </a:p>
           <a:p>
             <a:pPr lvl="1"/>
             <a:r>
               <a:rPr sz="2000"/>
-              <a:t>J の誤差なし：期待 1.73、ずれ 1.3σ（s = 1.26 なら 1.1σ）</a:t>
+              <a:t>δ_i は平均 0、幅 0.5 の正規分布（天体ごとに独立）</a:t>
             </a:r>
           </a:p>
           <a:p>
             <a:pPr lvl="1"/>
             <a:r>
               <a:rPr sz="2000"/>
-              <a:t>J の誤差あり：期待 2.4（68% で 1.3–5.0）、ずれ 1.5σ（1.3σ）</a:t>
+              <a:t>→ J がおよそ 1/3 倍〜3 倍の範囲でずれる</a:t>
             </a:r>
           </a:p>
           <a:p>
             <a:r>
               <a:rPr sz="2400"/>
-              <a:t>天の川側の局所密度を 0.3〜0.6 GeV/cm³ で動かしても</a:t>
-            </a:r>
-          </a:p>
-          <a:p>
-            <a:pPr lvl="1"/>
-            <a:r>
-              <a:rPr sz="2000"/>
-              <a:t>ずれは較正後 2.4σ 以下</a:t>
+              <a:t>予測 σ は J に比例 → pred_i × 10^δ_i</a:t>
             </a:r>
           </a:p>
           <a:p>
             <a:r>
               <a:rPr sz="2400"/>
-              <a:t>→ 暗黒物質と矛盾はしないが、確認もできない（判定できない）</a:t>
-            </a:r>
+              <a:t>論文と同じく「J をずらした世界」をたくさん作る（20 万回）</a:t>
+            </a:r>
+          </a:p>
+        </p:txBody>
+      </p:sp>
+      <p:sp>
+        <p:nvSpPr>
+          <p:cNvPr id="8" name="TextBox 7">
+            <a:extLst>
+              <a:ext uri="{FF2B5EF4-FFF2-40B4-BE49-F238E27FC236}">
+                <a16:creationId xmlns:a16="http://schemas.microsoft.com/office/drawing/2014/main" id="{F85CD606-E3CE-F314-B3EE-F3D7028115CB}"/>
+              </a:ext>
+            </a:extLst>
+          </p:cNvPr>
+          <p:cNvSpPr txBox="1"/>
+          <p:nvPr/>
+        </p:nvSpPr>
+        <p:spPr>
+          <a:xfrm>
+            <a:off x="5837182" y="5663239"/>
+            <a:ext cx="6093372" cy="923330"/>
+          </a:xfrm>
+          <a:prstGeom prst="rect">
+            <a:avLst/>
+          </a:prstGeom>
+          <a:noFill/>
+        </p:spPr>
+        <p:txBody>
+          <a:bodyPr wrap="square">
+            <a:spAutoFit/>
+          </a:bodyPr>
+          <a:lstStyle/>
+          <a:p>
+            <a:r>
+              <a:rPr lang="en-US" sz="1400" b="1"/>
+              <a:t>Reference:</a:t>
+            </a:r>
+            <a:r>
+              <a:rPr lang="en-US" sz="1400"/>
+              <a:t> Bertólez-Martínez, Hooper &amp; Khatee Zathul (2026), arXiv:2609.20944 §IV</a:t>
+            </a:r>
+            <a:endParaRPr lang="en-US"/>
           </a:p>
         </p:txBody>
       </p:sp>
@@ -10170,7 +10367,7 @@
           <a:p>
             <a:r>
               <a:rPr sz="3400"/>
-              <a:t>2 つの数字の違い：15σ と 1.3σ</a:t>
+              <a:t>有意度の計算式のどこに誤差が入るか</a:t>
             </a:r>
           </a:p>
         </p:txBody>
@@ -10197,40 +10394,46 @@
           <a:p>
             <a:r>
               <a:rPr sz="2400"/>
-              <a:t>約 15σ：天の川のハロー超過の強さ</a:t>
+              <a:t>暗黒物質ありで期待される T</a:t>
             </a:r>
           </a:p>
           <a:p>
             <a:pPr lvl="1"/>
             <a:r>
               <a:rPr sz="2000"/>
-              <a:t>19.0σ を、何も無い空でのばらつき 1.26 で割ったもの</a:t>
+              <a:t>誤差なし：E[T] = Σ w_i pred_i / √Σ w_i² = 1.73</a:t>
             </a:r>
           </a:p>
           <a:p>
             <a:pPr lvl="1"/>
             <a:r>
               <a:rPr sz="2000"/>
-              <a:t>「天の川に、背景では説明しにくい何かがある」</a:t>
+              <a:t>誤差あり：E[T] = Σ w_i pred_i 10^δ_i / √Σ w_i²  ← δ でばらつく</a:t>
             </a:r>
           </a:p>
           <a:p>
             <a:r>
               <a:rPr sz="2400"/>
-              <a:t>1.3σ：矮小銀河での「予測と実測のずれ」</a:t>
+              <a:t>実測 T にも測定の揺れ s がある（s = 1、または空で測った 1.26）</a:t>
+            </a:r>
+          </a:p>
+          <a:p>
+            <a:r>
+              <a:rPr sz="2400"/>
+              <a:t>暗黒物質ありで、実測 0.39 以下になる確率</a:t>
             </a:r>
           </a:p>
           <a:p>
             <a:pPr lvl="1"/>
             <a:r>
               <a:rPr sz="2000"/>
-              <a:t>「天の川の超過が暗黒物質だとしても、矮小銀河の結果と矛盾しない」</a:t>
+              <a:t>p = （δ について平均）Φ( (0.39 − E[T]) / s )</a:t>
             </a:r>
           </a:p>
           <a:p>
             <a:r>
               <a:rPr sz="2400"/>
-              <a:t>別のものを測った、別の数字</a:t>
+              <a:t>p を σ に直したもの =「ずれ」</a:t>
             </a:r>
           </a:p>
         </p:txBody>
@@ -10277,60 +10480,60 @@
           <a:p>
             <a:r>
               <a:rPr sz="3400"/>
-              <a:t>結論</a:t>
-            </a:r>
-          </a:p>
-        </p:txBody>
-      </p:sp>
-      <p:sp>
-        <p:nvSpPr>
-          <p:cNvPr id="3" name="Content Placeholder 2"/>
-          <p:cNvSpPr>
-            <a:spLocks noGrp="1"/>
-          </p:cNvSpPr>
-          <p:nvPr>
-            <p:ph idx="1"/>
-          </p:nvPr>
-        </p:nvSpPr>
+              <a:t>結果：予測の幅と実測</a:t>
+            </a:r>
+          </a:p>
+        </p:txBody>
+      </p:sp>
+      <p:pic>
+        <p:nvPicPr>
+          <p:cNvPr id="3" name="Picture 2" descr="fig_dwarf_J_uncertainty.png"/>
+          <p:cNvPicPr>
+            <a:picLocks noChangeAspect="1"/>
+          </p:cNvPicPr>
+          <p:nvPr/>
+        </p:nvPicPr>
+        <p:blipFill>
+          <a:blip r:embed="rId3"/>
+          <a:stretch>
+            <a:fillRect/>
+          </a:stretch>
+        </p:blipFill>
         <p:spPr>
           <a:xfrm>
-            <a:off x="841248" y="1463040"/>
-            <a:ext cx="10515600" cy="4937760"/>
+            <a:off x="2194560" y="1234440"/>
+            <a:ext cx="6858000" cy="4114800"/>
           </a:xfrm>
+          <a:prstGeom prst="rect">
+            <a:avLst/>
+          </a:prstGeom>
         </p:spPr>
-        <p:txBody>
-          <a:bodyPr/>
-          <a:lstStyle/>
-          <a:p>
-            <a:r>
-              <a:rPr sz="2400"/>
-              <a:t>Totani の超過を再現（名目 19.0σ、較正後 約 15σ）</a:t>
-            </a:r>
-          </a:p>
-          <a:p>
-            <a:r>
-              <a:rPr sz="2400"/>
-              <a:t>ICS の明るさ・バブル・計算の近似の間違いでは説明できない</a:t>
-            </a:r>
-          </a:p>
-          <a:p>
-            <a:pPr lvl="1"/>
+      </p:pic>
+      <p:sp>
+        <p:nvSpPr>
+          <p:cNvPr id="4" name="TextBox 3"/>
+          <p:cNvSpPr txBox="1"/>
+          <p:nvPr/>
+        </p:nvSpPr>
+        <p:spPr>
+          <a:xfrm>
+            <a:off x="457200" y="5486400"/>
+            <a:ext cx="11247120" cy="457200"/>
+          </a:xfrm>
+          <a:prstGeom prst="rect">
+            <a:avLst/>
+          </a:prstGeom>
+          <a:noFill/>
+        </p:spPr>
+        <p:txBody>
+          <a:bodyPr wrap="square">
+            <a:spAutoFit/>
+          </a:bodyPr>
+          <a:lstStyle/>
+          <a:p>
             <a:r>
               <a:rPr sz="2000"/>
-              <a:t>暗黒物質の証拠ではない（ICS の空間の形は未確認）</a:t>
-            </a:r>
-          </a:p>
-          <a:p>
-            <a:r>
-              <a:rPr sz="2400"/>
-              <a:t>矮小銀河では非検出</a:t>
-            </a:r>
-          </a:p>
-          <a:p>
-            <a:pPr lvl="1"/>
-            <a:r>
-              <a:rPr sz="2000"/>
-              <a:t>J の誤差（約 3 倍）を入れると、予測とのずれは 1.3σ → 判定できない</a:t>
+              <a:t>期待 1.7σ → J の誤差で 1.3〜5.0σ に広がる。実測 0.4σ ± 1.26。ずれ 1.3σ</a:t>
             </a:r>
           </a:p>
         </p:txBody>
@@ -10377,7 +10580,7 @@
           <a:p>
             <a:r>
               <a:rPr sz="3400"/>
-              <a:t>統計の視点から：この研究に足りなかったもの</a:t>
+              <a:t>結果の数字</a:t>
             </a:r>
           </a:p>
         </p:txBody>
@@ -10395,7 +10598,7 @@
         <p:spPr>
           <a:xfrm>
             <a:off x="841248" y="1463040"/>
-            <a:ext cx="10515600" cy="4114800"/>
+            <a:ext cx="10515600" cy="4937760"/>
           </a:xfrm>
         </p:spPr>
         <p:txBody>
@@ -10404,81 +10607,41 @@
           <a:p>
             <a:r>
               <a:rPr sz="2400"/>
-              <a:t>σ が 1.26 倍に膨らんだ原因</a:t>
+              <a:t>局所密度 0.42 GeV/cm³ の場合（43 天体、20 GeV）</a:t>
             </a:r>
           </a:p>
           <a:p>
             <a:pPr lvl="1"/>
             <a:r>
               <a:rPr sz="2000"/>
-              <a:t>尤度は「型紙（GALPROP）は完璧、誤差は光子の数のばらつきだけ」と仮定</a:t>
+              <a:t>J の誤差なし：期待 1.73、ずれ 1.3σ（s = 1.26 なら 1.1σ）</a:t>
             </a:r>
           </a:p>
           <a:p>
             <a:pPr lvl="1"/>
             <a:r>
               <a:rPr sz="2000"/>
-              <a:t>型紙そのものの誤差が、統計モデルに入っていない</a:t>
+              <a:t>J の誤差あり：期待 2.4（68% で 1.3–5.0）、ずれ 1.5σ（1.3σ）</a:t>
             </a:r>
           </a:p>
           <a:p>
             <a:r>
               <a:rPr sz="2400"/>
-              <a:t>データ同化：シミュレーションの誤差と観測の誤差を分けて、統計モデルに入れる枠組み</a:t>
+              <a:t>天の川側の局所密度を 0.3〜0.6 GeV/cm³ で動かしても</a:t>
+            </a:r>
+          </a:p>
+          <a:p>
+            <a:pPr lvl="1"/>
+            <a:r>
+              <a:rPr sz="2000"/>
+              <a:t>ずれは較正後 2.4σ 以下</a:t>
             </a:r>
           </a:p>
           <a:p>
             <a:r>
               <a:rPr sz="2400"/>
-              <a:t>J をずらして何度も計算したのも、分布をたくさんのサンプルで表すという同じ発想</a:t>
-            </a:r>
-          </a:p>
-          <a:p>
-            <a:pPr lvl="1"/>
-            <a:r>
-              <a:rPr sz="2000"/>
-              <a:t>（アンサンブル・粒子フィルタ）</a:t>
-            </a:r>
-          </a:p>
-        </p:txBody>
-      </p:sp>
-      <p:sp>
-        <p:nvSpPr>
-          <p:cNvPr id="8" name="TextBox 7">
-            <a:extLst>
-              <a:ext uri="{FF2B5EF4-FFF2-40B4-BE49-F238E27FC236}">
-                <a16:creationId xmlns:a16="http://schemas.microsoft.com/office/drawing/2014/main" id="{F85CD606-E3CE-F314-B3EE-F3D7028115CB}"/>
-              </a:ext>
-            </a:extLst>
-          </p:cNvPr>
-          <p:cNvSpPr txBox="1"/>
-          <p:nvPr/>
-        </p:nvSpPr>
-        <p:spPr>
-          <a:xfrm>
-            <a:off x="5837182" y="5663239"/>
-            <a:ext cx="6093372" cy="923330"/>
-          </a:xfrm>
-          <a:prstGeom prst="rect">
-            <a:avLst/>
-          </a:prstGeom>
-          <a:noFill/>
-        </p:spPr>
-        <p:txBody>
-          <a:bodyPr wrap="square">
-            <a:spAutoFit/>
-          </a:bodyPr>
-          <a:lstStyle/>
-          <a:p>
-            <a:r>
-              <a:rPr lang="en-US" sz="1400" b="1"/>
-              <a:t>Reference:</a:t>
-            </a:r>
-            <a:r>
-              <a:rPr lang="en-US" sz="1400"/>
-              <a:t> 中村和幸 (2017), 数理解析研究所講究録 2057, 59–66</a:t>
-            </a:r>
-            <a:endParaRPr lang="en-US"/>
+              <a:t>→ 暗黒物質と矛盾はしないが、確認もできない（判定できない）</a:t>
+            </a:r>
           </a:p>
         </p:txBody>
       </p:sp>
@@ -10524,7 +10687,7 @@
           <a:p>
             <a:r>
               <a:rPr sz="3400"/>
-              <a:t>参考文献</a:t>
+              <a:t>2 つの数字の違い：15σ と 1.3σ</a:t>
             </a:r>
           </a:p>
         </p:txBody>
@@ -10550,56 +10713,41 @@
           <a:lstStyle/>
           <a:p>
             <a:r>
-              <a:rPr sz="1800"/>
-              <a:t>T. Totani (2025), arXiv:2507.07209</a:t>
-            </a:r>
-          </a:p>
-          <a:p>
-            <a:r>
-              <a:rPr sz="1800"/>
-              <a:t>Bertólez-Martínez, Hooper &amp; Khatee Zathul (2026), arXiv:2609.20944</a:t>
-            </a:r>
-          </a:p>
-          <a:p>
-            <a:r>
-              <a:rPr sz="1800"/>
-              <a:t>S. S. Wilks (1938), Ann. Math. Stat. 9, 60</a:t>
-            </a:r>
-          </a:p>
-          <a:p>
-            <a:r>
-              <a:rPr sz="1800"/>
-              <a:t>D. Foreman-Mackey et al. (2013), PASP 125, 306</a:t>
-            </a:r>
-          </a:p>
-          <a:p>
-            <a:r>
-              <a:rPr sz="1800"/>
-              <a:t>I. V. Moskalenko &amp; A. W. Strong (2000), ApJ 528, 357</a:t>
-            </a:r>
-          </a:p>
-          <a:p>
-            <a:r>
-              <a:rPr sz="1800"/>
-              <a:t>B. Efron &amp; R. J. Tibshirani (1993), An Introduction to the Bootstrap</a:t>
-            </a:r>
-          </a:p>
-          <a:p>
-            <a:r>
-              <a:rPr sz="1800"/>
-              <a:t>A. B. Pace (2025), Open J. Astrophys. 8, 142</a:t>
-            </a:r>
-          </a:p>
-          <a:p>
-            <a:r>
-              <a:rPr sz="1800"/>
-              <a:t>A. B. Pace &amp; L. E. Strigari (2019), MNRAS 482, 3480</a:t>
-            </a:r>
-          </a:p>
-          <a:p>
-            <a:r>
-              <a:rPr sz="1800"/>
-              <a:t>中村和幸 (2017), 数理解析研究所講究録 2057, 59–66</a:t>
+              <a:rPr sz="2400"/>
+              <a:t>約 15σ：天の川のハロー超過の強さ</a:t>
+            </a:r>
+          </a:p>
+          <a:p>
+            <a:pPr lvl="1"/>
+            <a:r>
+              <a:rPr sz="2000"/>
+              <a:t>19.0σ を、何も無い空でのばらつき 1.26 で割ったもの</a:t>
+            </a:r>
+          </a:p>
+          <a:p>
+            <a:pPr lvl="1"/>
+            <a:r>
+              <a:rPr sz="2000"/>
+              <a:t>「天の川に、背景では説明しにくい何かがある」</a:t>
+            </a:r>
+          </a:p>
+          <a:p>
+            <a:r>
+              <a:rPr sz="2400"/>
+              <a:t>1.3σ：矮小銀河での「予測と実測のずれ」</a:t>
+            </a:r>
+          </a:p>
+          <a:p>
+            <a:pPr lvl="1"/>
+            <a:r>
+              <a:rPr sz="2000"/>
+              <a:t>「天の川の超過が暗黒物質だとしても、矮小銀河の結果と矛盾しない」</a:t>
+            </a:r>
+          </a:p>
+          <a:p>
+            <a:r>
+              <a:rPr sz="2400"/>
+              <a:t>別のものを測った、別の数字</a:t>
             </a:r>
           </a:p>
         </p:txBody>
@@ -10613,7 +10761,7 @@
 </file>
 
 <file path=ppt/slides/slide36.xml><?xml version="1.0" encoding="utf-8"?>
-<p:sld xmlns:a="http://schemas.openxmlformats.org/drawingml/2006/main" xmlns:p="http://schemas.openxmlformats.org/presentationml/2006/main" xmlns:r="http://schemas.openxmlformats.org/officeDocument/2006/relationships">
+<p:sld xmlns:a="http://schemas.openxmlformats.org/drawingml/2006/main" xmlns:r="http://schemas.openxmlformats.org/officeDocument/2006/relationships" xmlns:p="http://schemas.openxmlformats.org/presentationml/2006/main">
   <p:cSld>
     <p:spTree>
       <p:nvGrpSpPr>
@@ -10621,7 +10769,14 @@
         <p:cNvGrpSpPr/>
         <p:nvPr/>
       </p:nvGrpSpPr>
-      <p:grpSpPr/>
+      <p:grpSpPr>
+        <a:xfrm>
+          <a:off x="0" y="0"/>
+          <a:ext cx="0" cy="0"/>
+          <a:chOff x="0" y="0"/>
+          <a:chExt cx="0" cy="0"/>
+        </a:xfrm>
+      </p:grpSpPr>
       <p:sp>
         <p:nvSpPr>
           <p:cNvPr id="2" name="Title 1"/>
@@ -10639,7 +10794,107 @@
           <a:p>
             <a:r>
               <a:rPr sz="3400"/>
-              <a:t>MCMC の中身①：何を求めているか</a:t>
+              <a:t>結論</a:t>
+            </a:r>
+          </a:p>
+        </p:txBody>
+      </p:sp>
+      <p:sp>
+        <p:nvSpPr>
+          <p:cNvPr id="3" name="Content Placeholder 2"/>
+          <p:cNvSpPr>
+            <a:spLocks noGrp="1"/>
+          </p:cNvSpPr>
+          <p:nvPr>
+            <p:ph idx="1"/>
+          </p:nvPr>
+        </p:nvSpPr>
+        <p:spPr>
+          <a:xfrm>
+            <a:off x="841248" y="1463040"/>
+            <a:ext cx="10515600" cy="4937760"/>
+          </a:xfrm>
+        </p:spPr>
+        <p:txBody>
+          <a:bodyPr/>
+          <a:lstStyle/>
+          <a:p>
+            <a:r>
+              <a:rPr sz="2400"/>
+              <a:t>Totani の超過を再現（名目 19.0σ、較正後 約 15σ）</a:t>
+            </a:r>
+          </a:p>
+          <a:p>
+            <a:r>
+              <a:rPr sz="2400"/>
+              <a:t>ICS の明るさ・バブル・計算の近似の間違いでは説明できない</a:t>
+            </a:r>
+          </a:p>
+          <a:p>
+            <a:pPr lvl="1"/>
+            <a:r>
+              <a:rPr sz="2000"/>
+              <a:t>暗黒物質の証拠ではない（ICS の空間の形は未確認）</a:t>
+            </a:r>
+          </a:p>
+          <a:p>
+            <a:r>
+              <a:rPr sz="2400"/>
+              <a:t>矮小銀河では非検出</a:t>
+            </a:r>
+          </a:p>
+          <a:p>
+            <a:pPr lvl="1"/>
+            <a:r>
+              <a:rPr sz="2000"/>
+              <a:t>J の誤差（約 3 倍）を入れると、予測とのずれは 1.3σ → 判定できない</a:t>
+            </a:r>
+          </a:p>
+        </p:txBody>
+      </p:sp>
+    </p:spTree>
+  </p:cSld>
+  <p:clrMapOvr>
+    <a:masterClrMapping/>
+  </p:clrMapOvr>
+</p:sld>
+</file>
+
+<file path=ppt/slides/slide37.xml><?xml version="1.0" encoding="utf-8"?>
+<p:sld xmlns:a="http://schemas.openxmlformats.org/drawingml/2006/main" xmlns:r="http://schemas.openxmlformats.org/officeDocument/2006/relationships" xmlns:p="http://schemas.openxmlformats.org/presentationml/2006/main">
+  <p:cSld>
+    <p:spTree>
+      <p:nvGrpSpPr>
+        <p:cNvPr id="1" name=""/>
+        <p:cNvGrpSpPr/>
+        <p:nvPr/>
+      </p:nvGrpSpPr>
+      <p:grpSpPr>
+        <a:xfrm>
+          <a:off x="0" y="0"/>
+          <a:ext cx="0" cy="0"/>
+          <a:chOff x="0" y="0"/>
+          <a:chExt cx="0" cy="0"/>
+        </a:xfrm>
+      </p:grpSpPr>
+      <p:sp>
+        <p:nvSpPr>
+          <p:cNvPr id="2" name="Title 1"/>
+          <p:cNvSpPr>
+            <a:spLocks noGrp="1"/>
+          </p:cNvSpPr>
+          <p:nvPr>
+            <p:ph type="title"/>
+          </p:nvPr>
+        </p:nvSpPr>
+        <p:spPr/>
+        <p:txBody>
+          <a:bodyPr/>
+          <a:lstStyle/>
+          <a:p>
+            <a:r>
+              <a:rPr sz="3400"/>
+              <a:t>統計の視点から：この研究に足りなかったもの</a:t>
             </a:r>
           </a:p>
         </p:txBody>
@@ -10664,59 +10919,42 @@
           <a:bodyPr/>
           <a:lstStyle/>
           <a:p>
-            <a:pPr/>
-            <a:r>
-              <a:rPr sz="2200"/>
-              <a:t>知りたいもの：データ D を見たあと、倍率 θ = (f₁, …, f₉) がどの値をとりうるか</a:t>
-            </a:r>
-          </a:p>
-          <a:p>
-            <a:pPr/>
-            <a:r>
-              <a:rPr sz="2200"/>
-              <a:t>ベイズの定理：P(θ | D) = L(D | θ) π(θ) / P(D)</a:t>
+            <a:r>
+              <a:rPr sz="2400"/>
+              <a:t>σ が 1.26 倍に膨らんだ原因</a:t>
             </a:r>
           </a:p>
           <a:p>
             <a:pPr lvl="1"/>
             <a:r>
-              <a:rPr sz="1800"/>
-              <a:t>P(θ | D)：事後分布（データを見た後の、θ のもっともらしさ）</a:t>
+              <a:rPr sz="2000"/>
+              <a:t>尤度は「型紙（GALPROP）は完璧、誤差は光子の数のばらつきだけ」と仮定</a:t>
             </a:r>
           </a:p>
           <a:p>
             <a:pPr lvl="1"/>
             <a:r>
-              <a:rPr sz="1800"/>
-              <a:t>L(D | θ)：尤度（手法② の L）　π(θ)：事前分布（今回は一様）</a:t>
+              <a:rPr sz="2000"/>
+              <a:t>型紙そのものの誤差が、統計モデルに入っていない</a:t>
+            </a:r>
+          </a:p>
+          <a:p>
+            <a:r>
+              <a:rPr sz="2400"/>
+              <a:t>データ同化：シミュレーションの誤差と観測の誤差を分けて、統計モデルに入れる枠組み</a:t>
+            </a:r>
+          </a:p>
+          <a:p>
+            <a:r>
+              <a:rPr sz="2400"/>
+              <a:t>J をずらして何度も計算したのも、分布をたくさんのサンプルで表すという同じ発想</a:t>
             </a:r>
           </a:p>
           <a:p>
             <a:pPr lvl="1"/>
             <a:r>
-              <a:rPr sz="1800"/>
-              <a:t>P(D)：θ によらない定数 → 計算しなくてよい</a:t>
-            </a:r>
-          </a:p>
-          <a:p>
-            <a:pPr/>
-            <a:r>
-              <a:rPr sz="2200"/>
-              <a:t>つまり P(θ | D) ∝ L(D | θ) × π(θ)</a:t>
-            </a:r>
-          </a:p>
-          <a:p>
-            <a:pPr/>
-            <a:r>
-              <a:rPr sz="2200"/>
-              <a:t>ただし θ は 9 次元。1 次元を 100 点に区切っても 100⁹ = 10¹⁸ 通り → 全部は計算できない</a:t>
-            </a:r>
-          </a:p>
-          <a:p>
-            <a:pPr/>
-            <a:r>
-              <a:rPr sz="2200"/>
-              <a:t>→ 事後分布から「サンプルを取り出す」方法が MCMC</a:t>
+              <a:rPr sz="2000"/>
+              <a:t>（アンサンブル・粒子フィルタ）</a:t>
             </a:r>
           </a:p>
         </p:txBody>
@@ -10755,7 +10993,7 @@
             </a:r>
             <a:r>
               <a:rPr lang="en-US" sz="1400"/>
-              <a:t> D. Foreman-Mackey et al. (2013), PASP 125, 306</a:t>
+              <a:t> 中村和幸 (2017), 数理解析研究所講究録 2057, 59–66</a:t>
             </a:r>
             <a:endParaRPr lang="en-US"/>
           </a:p>
@@ -10769,7 +11007,129 @@
 </p:sld>
 </file>
 
-<file path=ppt/slides/slide37.xml><?xml version="1.0" encoding="utf-8"?>
+<file path=ppt/slides/slide38.xml><?xml version="1.0" encoding="utf-8"?>
+<p:sld xmlns:a="http://schemas.openxmlformats.org/drawingml/2006/main" xmlns:r="http://schemas.openxmlformats.org/officeDocument/2006/relationships" xmlns:p="http://schemas.openxmlformats.org/presentationml/2006/main">
+  <p:cSld>
+    <p:spTree>
+      <p:nvGrpSpPr>
+        <p:cNvPr id="1" name=""/>
+        <p:cNvGrpSpPr/>
+        <p:nvPr/>
+      </p:nvGrpSpPr>
+      <p:grpSpPr>
+        <a:xfrm>
+          <a:off x="0" y="0"/>
+          <a:ext cx="0" cy="0"/>
+          <a:chOff x="0" y="0"/>
+          <a:chExt cx="0" cy="0"/>
+        </a:xfrm>
+      </p:grpSpPr>
+      <p:sp>
+        <p:nvSpPr>
+          <p:cNvPr id="2" name="Title 1"/>
+          <p:cNvSpPr>
+            <a:spLocks noGrp="1"/>
+          </p:cNvSpPr>
+          <p:nvPr>
+            <p:ph type="title"/>
+          </p:nvPr>
+        </p:nvSpPr>
+        <p:spPr/>
+        <p:txBody>
+          <a:bodyPr/>
+          <a:lstStyle/>
+          <a:p>
+            <a:r>
+              <a:rPr sz="3400"/>
+              <a:t>参考文献</a:t>
+            </a:r>
+          </a:p>
+        </p:txBody>
+      </p:sp>
+      <p:sp>
+        <p:nvSpPr>
+          <p:cNvPr id="3" name="Content Placeholder 2"/>
+          <p:cNvSpPr>
+            <a:spLocks noGrp="1"/>
+          </p:cNvSpPr>
+          <p:nvPr>
+            <p:ph idx="1"/>
+          </p:nvPr>
+        </p:nvSpPr>
+        <p:spPr>
+          <a:xfrm>
+            <a:off x="841248" y="1463040"/>
+            <a:ext cx="10515600" cy="4937760"/>
+          </a:xfrm>
+        </p:spPr>
+        <p:txBody>
+          <a:bodyPr/>
+          <a:lstStyle/>
+          <a:p>
+            <a:r>
+              <a:rPr sz="1800"/>
+              <a:t>T. Totani (2025), arXiv:2507.07209</a:t>
+            </a:r>
+          </a:p>
+          <a:p>
+            <a:r>
+              <a:rPr sz="1800"/>
+              <a:t>Bertólez-Martínez, Hooper &amp; Khatee Zathul (2026), arXiv:2609.20944</a:t>
+            </a:r>
+          </a:p>
+          <a:p>
+            <a:r>
+              <a:rPr sz="1800"/>
+              <a:t>S. S. Wilks (1938), Ann. Math. Stat. 9, 60</a:t>
+            </a:r>
+          </a:p>
+          <a:p>
+            <a:r>
+              <a:rPr sz="1800"/>
+              <a:t>D. Foreman-Mackey et al. (2013), PASP 125, 306</a:t>
+            </a:r>
+          </a:p>
+          <a:p>
+            <a:r>
+              <a:rPr sz="1800"/>
+              <a:t>I. V. Moskalenko &amp; A. W. Strong (2000), ApJ 528, 357</a:t>
+            </a:r>
+          </a:p>
+          <a:p>
+            <a:r>
+              <a:rPr sz="1800"/>
+              <a:t>B. Efron &amp; R. J. Tibshirani (1993), An Introduction to the Bootstrap</a:t>
+            </a:r>
+          </a:p>
+          <a:p>
+            <a:r>
+              <a:rPr sz="1800"/>
+              <a:t>A. B. Pace (2025), Open J. Astrophys. 8, 142</a:t>
+            </a:r>
+          </a:p>
+          <a:p>
+            <a:r>
+              <a:rPr sz="1800"/>
+              <a:t>A. B. Pace &amp; L. E. Strigari (2019), MNRAS 482, 3480</a:t>
+            </a:r>
+          </a:p>
+          <a:p>
+            <a:r>
+              <a:rPr sz="1800"/>
+              <a:t>中村和幸 (2017), 数理解析研究所講究録 2057, 59–66</a:t>
+            </a:r>
+          </a:p>
+        </p:txBody>
+      </p:sp>
+    </p:spTree>
+  </p:cSld>
+  <p:clrMapOvr>
+    <a:masterClrMapping/>
+  </p:clrMapOvr>
+</p:sld>
+</file>
+
+<file path=ppt/slides/slide39.xml><?xml version="1.0" encoding="utf-8"?>
 <p:sld xmlns:a="http://schemas.openxmlformats.org/drawingml/2006/main" xmlns:p="http://schemas.openxmlformats.org/presentationml/2006/main" xmlns:r="http://schemas.openxmlformats.org/officeDocument/2006/relationships">
   <p:cSld>
     <p:spTree>
@@ -10796,7 +11156,7 @@
           <a:p>
             <a:r>
               <a:rPr sz="3400"/>
-              <a:t>MCMC の中身②：歩き方（メトロポリス法）</a:t>
+              <a:t>最尤値の求め方：Totani との違い</a:t>
             </a:r>
           </a:p>
         </p:txBody>
@@ -10814,7 +11174,7 @@
         <p:spPr>
           <a:xfrm>
             <a:off x="841248" y="1463040"/>
-            <a:ext cx="5394960" cy="4114800"/>
+            <a:ext cx="10515600" cy="4114800"/>
           </a:xfrm>
         </p:spPr>
         <p:txBody>
@@ -10823,57 +11183,50 @@
           <a:p>
             <a:pPr/>
             <a:r>
-              <a:rPr sz="2000"/>
-              <a:t>① 今の点 θ から、少しずらした候補 θ′ を作る</a:t>
+              <a:rPr sz="2200"/>
+              <a:t>Totani：MCMC 1 つで、最尤値（歩いた中で ln L が最大の点）と誤差の両方を出す</a:t>
             </a:r>
           </a:p>
           <a:p>
             <a:pPr/>
             <a:r>
-              <a:rPr sz="2000"/>
-              <a:t>② 比 r = P(θ′ | D) / P(θ | D) を計算</a:t>
+              <a:rPr sz="2200"/>
+              <a:t>本研究：最尤値は勾配法（L-BFGS-B）、誤差は MCMC（emcee）</a:t>
             </a:r>
           </a:p>
           <a:p>
             <a:pPr lvl="1"/>
             <a:r>
-              <a:rPr sz="1600"/>
-              <a:t>P(D) は分母分子で消える</a:t>
+              <a:rPr sz="1800"/>
+              <a:t>求めているもの（ln L が最大になる f）は同じ。探し方だけが違う</a:t>
             </a:r>
           </a:p>
           <a:p>
             <a:pPr/>
             <a:r>
-              <a:rPr sz="2000"/>
-              <a:t>③ r ≥ 1 なら移る。r &lt; 1 なら確率 r で移る</a:t>
+              <a:rPr sz="2200"/>
+              <a:t>同じ型紙・同じ尤度で両方を計算して比べた（20.8 GeV）</a:t>
             </a:r>
           </a:p>
           <a:p>
             <a:pPr lvl="1"/>
             <a:r>
-              <a:rPr sz="1600"/>
-              <a:t>移らなければ、同じ点をもう一度記録</a:t>
+              <a:rPr sz="1800"/>
+              <a:t>勾配法：19.215σ　／　Totani と同じ MCMC：19.209σ　→ 差 0.006σ</a:t>
+            </a:r>
+          </a:p>
+          <a:p>
+            <a:pPr lvl="1"/>
+            <a:r>
+              <a:rPr sz="1800"/>
+              <a:t>ハローの倍率：1.478 ／ 1.457</a:t>
             </a:r>
           </a:p>
           <a:p>
             <a:pPr/>
             <a:r>
-              <a:rPr sz="2000"/>
-              <a:t>④ ①〜③ を何千回もくり返す</a:t>
-            </a:r>
-          </a:p>
-          <a:p>
-            <a:pPr/>
-            <a:r>
-              <a:rPr sz="2000"/>
-              <a:t>歩いた跡のヒストグラム = 事後分布</a:t>
-            </a:r>
-          </a:p>
-          <a:p>
-            <a:pPr lvl="1"/>
-            <a:r>
-              <a:rPr sz="1600"/>
-              <a:t>下がる方向にも確率的に進むので、山の広がり（誤差）まで分かる</a:t>
+              <a:rPr sz="2200"/>
+              <a:t>→ 方法の違いは結果に影響しない</a:t>
             </a:r>
           </a:p>
         </p:txBody>
@@ -10912,188 +11265,7 @@
             </a:r>
             <a:r>
               <a:rPr lang="en-US" sz="1400"/>
-              <a:t> N. Metropolis et al. (1953), J. Chem. Phys. 21, 1087</a:t>
-            </a:r>
-            <a:endParaRPr lang="en-US"/>
-          </a:p>
-        </p:txBody>
-      </p:sp>
-      <p:pic>
-        <p:nvPicPr>
-          <p:cNvPr id="9" name="Picture 8" descr="fig_mcmc_toy.png"/>
-          <p:cNvPicPr>
-            <a:picLocks noChangeAspect="1"/>
-          </p:cNvPicPr>
-          <p:nvPr/>
-        </p:nvPicPr>
-        <p:blipFill>
-          <a:blip r:embed="rId3"/>
-          <a:stretch>
-            <a:fillRect/>
-          </a:stretch>
-        </p:blipFill>
-        <p:spPr>
-          <a:xfrm>
-            <a:off x="6309360" y="1828800"/>
-            <a:ext cx="5669280" cy="2267712"/>
-          </a:xfrm>
-          <a:prstGeom prst="rect">
-            <a:avLst/>
-          </a:prstGeom>
-        </p:spPr>
-      </p:pic>
-    </p:spTree>
-  </p:cSld>
-  <p:clrMapOvr>
-    <a:masterClrMapping/>
-  </p:clrMapOvr>
-</p:sld>
-</file>
-
-<file path=ppt/slides/slide38.xml><?xml version="1.0" encoding="utf-8"?>
-<p:sld xmlns:a="http://schemas.openxmlformats.org/drawingml/2006/main" xmlns:p="http://schemas.openxmlformats.org/presentationml/2006/main" xmlns:r="http://schemas.openxmlformats.org/officeDocument/2006/relationships">
-  <p:cSld>
-    <p:spTree>
-      <p:nvGrpSpPr>
-        <p:cNvPr id="1" name=""/>
-        <p:cNvGrpSpPr/>
-        <p:nvPr/>
-      </p:nvGrpSpPr>
-      <p:grpSpPr/>
-      <p:sp>
-        <p:nvSpPr>
-          <p:cNvPr id="2" name="Title 1"/>
-          <p:cNvSpPr>
-            <a:spLocks noGrp="1"/>
-          </p:cNvSpPr>
-          <p:nvPr>
-            <p:ph type="title"/>
-          </p:nvPr>
-        </p:nvSpPr>
-        <p:spPr/>
-        <p:txBody>
-          <a:bodyPr/>
-          <a:lstStyle/>
-          <a:p>
-            <a:r>
-              <a:rPr sz="3400"/>
-              <a:t>MCMC の中身③：今回の設定（emcee）</a:t>
-            </a:r>
-          </a:p>
-        </p:txBody>
-      </p:sp>
-      <p:sp>
-        <p:nvSpPr>
-          <p:cNvPr id="3" name="Content Placeholder 2"/>
-          <p:cNvSpPr>
-            <a:spLocks noGrp="1"/>
-          </p:cNvSpPr>
-          <p:nvPr>
-            <p:ph idx="1"/>
-          </p:nvPr>
-        </p:nvSpPr>
-        <p:spPr>
-          <a:xfrm>
-            <a:off x="841248" y="1463040"/>
-            <a:ext cx="10515600" cy="4114800"/>
-          </a:xfrm>
-        </p:spPr>
-        <p:txBody>
-          <a:bodyPr/>
-          <a:lstStyle/>
-          <a:p>
-            <a:pPr/>
-            <a:r>
-              <a:rPr sz="2000"/>
-              <a:t>32 人の歩行者が同時に歩く。次の一歩は、他の歩行者の位置を使って決める</a:t>
-            </a:r>
-          </a:p>
-          <a:p>
-            <a:pPr lvl="1"/>
-            <a:r>
-              <a:rPr sz="1600"/>
-              <a:t>候補：Y = X_j + Z (X_k − X_j)（X_k：自分、X_j：ランダムに選んだ他の歩行者）</a:t>
-            </a:r>
-          </a:p>
-          <a:p>
-            <a:pPr lvl="1"/>
-            <a:r>
-              <a:rPr sz="1600"/>
-              <a:t>Z は 1/2〜2 の乱数（確率 ∝ 1/√Z）、移る確率 = min(1, Z⁸ P(Y | D) / P(X_k | D))</a:t>
-            </a:r>
-          </a:p>
-          <a:p>
-            <a:pPr/>
-            <a:r>
-              <a:rPr sz="2000"/>
-              <a:t>出発点：最尤推定の点のすぐ近く。最初の 400 歩は捨て、5 歩ごとに記録</a:t>
-            </a:r>
-          </a:p>
-          <a:p>
-            <a:pPr/>
-            <a:r>
-              <a:rPr sz="2000"/>
-              <a:t>結果の例（20.8 GeV）：ハローの倍率 f_halo = 1.48（68% 区間 1.40–1.55）</a:t>
-            </a:r>
-          </a:p>
-          <a:p>
-            <a:pPr/>
-            <a:r>
-              <a:rPr sz="2000"/>
-              <a:t>注意：推奨の長さ（自己相関時間 τ の 50 倍）に届かないビンが多い</a:t>
-            </a:r>
-          </a:p>
-          <a:p>
-            <a:pPr lvl="1"/>
-            <a:r>
-              <a:rPr sz="1600"/>
-              <a:t>20.8 GeV で τ ≈ 127 歩、記録した長さ 5600 歩 &lt; 50τ。13 ビン中 2 ビンだけ到達</a:t>
-            </a:r>
-          </a:p>
-          <a:p>
-            <a:pPr lvl="1"/>
-            <a:r>
-              <a:rPr sz="1600"/>
-              <a:t>→ 誤差棒は目安。有意度 σ は Δln L から出すので影響しない</a:t>
-            </a:r>
-          </a:p>
-        </p:txBody>
-      </p:sp>
-      <p:sp>
-        <p:nvSpPr>
-          <p:cNvPr id="8" name="TextBox 7">
-            <a:extLst>
-              <a:ext uri="{FF2B5EF4-FFF2-40B4-BE49-F238E27FC236}">
-                <a16:creationId xmlns:a16="http://schemas.microsoft.com/office/drawing/2014/main" id="{F85CD606-E3CE-F314-B3EE-F3D7028115CB}"/>
-              </a:ext>
-            </a:extLst>
-          </p:cNvPr>
-          <p:cNvSpPr txBox="1"/>
-          <p:nvPr/>
-        </p:nvSpPr>
-        <p:spPr>
-          <a:xfrm>
-            <a:off x="5837182" y="5663239"/>
-            <a:ext cx="6093372" cy="923330"/>
-          </a:xfrm>
-          <a:prstGeom prst="rect">
-            <a:avLst/>
-          </a:prstGeom>
-          <a:noFill/>
-        </p:spPr>
-        <p:txBody>
-          <a:bodyPr wrap="square">
-            <a:spAutoFit/>
-          </a:bodyPr>
-          <a:lstStyle/>
-          <a:p>
-            <a:r>
-              <a:rPr lang="en-US" sz="1400" b="1"/>
-              <a:t>Reference:</a:t>
-            </a:r>
-            <a:r>
-              <a:rPr lang="en-US" sz="1400"/>
-              <a:t> J. Goodman &amp; J. Weare (2010), Comm. App. Math. Comp. Sci. 5, 65</a:t>
+              <a:t> T. Totani (2025), arXiv:2507.07209 §2.2</a:t>
             </a:r>
             <a:endParaRPr lang="en-US"/>
           </a:p>
@@ -11695,7 +11867,7 @@
 </file>
 
 <file path=ppt/slides/slide8.xml><?xml version="1.0" encoding="utf-8"?>
-<p:sld xmlns:a="http://schemas.openxmlformats.org/drawingml/2006/main" xmlns:r="http://schemas.openxmlformats.org/officeDocument/2006/relationships" xmlns:p="http://schemas.openxmlformats.org/presentationml/2006/main">
+<p:sld xmlns:a="http://schemas.openxmlformats.org/drawingml/2006/main" xmlns:p="http://schemas.openxmlformats.org/presentationml/2006/main" xmlns:r="http://schemas.openxmlformats.org/officeDocument/2006/relationships">
   <p:cSld>
     <p:spTree>
       <p:nvGrpSpPr>
@@ -11703,14 +11875,7 @@
         <p:cNvGrpSpPr/>
         <p:nvPr/>
       </p:nvGrpSpPr>
-      <p:grpSpPr>
-        <a:xfrm>
-          <a:off x="0" y="0"/>
-          <a:ext cx="0" cy="0"/>
-          <a:chOff x="0" y="0"/>
-          <a:chExt cx="0" cy="0"/>
-        </a:xfrm>
-      </p:grpSpPr>
+      <p:grpSpPr/>
       <p:sp>
         <p:nvSpPr>
           <p:cNvPr id="2" name="Title 1"/>
@@ -11728,14 +11893,288 @@
           <a:p>
             <a:r>
               <a:rPr sz="3400"/>
-              <a:t>結果：Totani の超過を再現</a:t>
-            </a:r>
+              <a:t>MCMC の中身①：何を求めているか</a:t>
+            </a:r>
+          </a:p>
+        </p:txBody>
+      </p:sp>
+      <p:sp>
+        <p:nvSpPr>
+          <p:cNvPr id="3" name="Content Placeholder 2"/>
+          <p:cNvSpPr>
+            <a:spLocks noGrp="1"/>
+          </p:cNvSpPr>
+          <p:nvPr>
+            <p:ph idx="1"/>
+          </p:nvPr>
+        </p:nvSpPr>
+        <p:spPr>
+          <a:xfrm>
+            <a:off x="841248" y="1463040"/>
+            <a:ext cx="10515600" cy="4114800"/>
+          </a:xfrm>
+        </p:spPr>
+        <p:txBody>
+          <a:bodyPr/>
+          <a:lstStyle/>
+          <a:p>
+            <a:pPr/>
+            <a:r>
+              <a:rPr sz="2200"/>
+              <a:t>知りたいもの：データ D を見たあと、倍率 θ = (f₁, …, f₉) がどの値をとりうるか</a:t>
+            </a:r>
+          </a:p>
+          <a:p>
+            <a:pPr/>
+            <a:r>
+              <a:rPr sz="2200"/>
+              <a:t>ベイズの定理：P(θ | D) = L(D | θ) π(θ) / P(D)</a:t>
+            </a:r>
+          </a:p>
+          <a:p>
+            <a:pPr lvl="1"/>
+            <a:r>
+              <a:rPr sz="1800"/>
+              <a:t>P(θ | D)：事後分布（データを見た後の、θ のもっともらしさ）</a:t>
+            </a:r>
+          </a:p>
+          <a:p>
+            <a:pPr lvl="1"/>
+            <a:r>
+              <a:rPr sz="1800"/>
+              <a:t>L(D | θ)：尤度（手法② の L）　π(θ)：事前分布（今回は一様）</a:t>
+            </a:r>
+          </a:p>
+          <a:p>
+            <a:pPr lvl="1"/>
+            <a:r>
+              <a:rPr sz="1800"/>
+              <a:t>P(D)：θ によらない定数 → 計算しなくてよい</a:t>
+            </a:r>
+          </a:p>
+          <a:p>
+            <a:pPr/>
+            <a:r>
+              <a:rPr sz="2200"/>
+              <a:t>つまり P(θ | D) ∝ L(D | θ) × π(θ)</a:t>
+            </a:r>
+          </a:p>
+          <a:p>
+            <a:pPr/>
+            <a:r>
+              <a:rPr sz="2200"/>
+              <a:t>ただし θ は 9 次元。1 次元を 100 点に区切っても 100⁹ = 10¹⁸ 通り → 全部は計算できない</a:t>
+            </a:r>
+          </a:p>
+          <a:p>
+            <a:pPr/>
+            <a:r>
+              <a:rPr sz="2200"/>
+              <a:t>→ 事後分布から「サンプルを取り出す」方法が MCMC</a:t>
+            </a:r>
+          </a:p>
+        </p:txBody>
+      </p:sp>
+      <p:sp>
+        <p:nvSpPr>
+          <p:cNvPr id="8" name="TextBox 7">
+            <a:extLst>
+              <a:ext uri="{FF2B5EF4-FFF2-40B4-BE49-F238E27FC236}">
+                <a16:creationId xmlns:a16="http://schemas.microsoft.com/office/drawing/2014/main" id="{F85CD606-E3CE-F314-B3EE-F3D7028115CB}"/>
+              </a:ext>
+            </a:extLst>
+          </p:cNvPr>
+          <p:cNvSpPr txBox="1"/>
+          <p:nvPr/>
+        </p:nvSpPr>
+        <p:spPr>
+          <a:xfrm>
+            <a:off x="5837182" y="5663239"/>
+            <a:ext cx="6093372" cy="923330"/>
+          </a:xfrm>
+          <a:prstGeom prst="rect">
+            <a:avLst/>
+          </a:prstGeom>
+          <a:noFill/>
+        </p:spPr>
+        <p:txBody>
+          <a:bodyPr wrap="square">
+            <a:spAutoFit/>
+          </a:bodyPr>
+          <a:lstStyle/>
+          <a:p>
+            <a:r>
+              <a:rPr lang="en-US" sz="1400" b="1"/>
+              <a:t>Reference:</a:t>
+            </a:r>
+            <a:r>
+              <a:rPr lang="en-US" sz="1400"/>
+              <a:t> D. Foreman-Mackey et al. (2013), PASP 125, 306</a:t>
+            </a:r>
+            <a:endParaRPr lang="en-US"/>
+          </a:p>
+        </p:txBody>
+      </p:sp>
+    </p:spTree>
+  </p:cSld>
+  <p:clrMapOvr>
+    <a:masterClrMapping/>
+  </p:clrMapOvr>
+</p:sld>
+</file>
+
+<file path=ppt/slides/slide9.xml><?xml version="1.0" encoding="utf-8"?>
+<p:sld xmlns:a="http://schemas.openxmlformats.org/drawingml/2006/main" xmlns:p="http://schemas.openxmlformats.org/presentationml/2006/main" xmlns:r="http://schemas.openxmlformats.org/officeDocument/2006/relationships">
+  <p:cSld>
+    <p:spTree>
+      <p:nvGrpSpPr>
+        <p:cNvPr id="1" name=""/>
+        <p:cNvGrpSpPr/>
+        <p:nvPr/>
+      </p:nvGrpSpPr>
+      <p:grpSpPr/>
+      <p:sp>
+        <p:nvSpPr>
+          <p:cNvPr id="2" name="Title 1"/>
+          <p:cNvSpPr>
+            <a:spLocks noGrp="1"/>
+          </p:cNvSpPr>
+          <p:nvPr>
+            <p:ph type="title"/>
+          </p:nvPr>
+        </p:nvSpPr>
+        <p:spPr/>
+        <p:txBody>
+          <a:bodyPr/>
+          <a:lstStyle/>
+          <a:p>
+            <a:r>
+              <a:rPr sz="3400"/>
+              <a:t>MCMC の中身②：歩き方（メトロポリス法）</a:t>
+            </a:r>
+          </a:p>
+        </p:txBody>
+      </p:sp>
+      <p:sp>
+        <p:nvSpPr>
+          <p:cNvPr id="3" name="Content Placeholder 2"/>
+          <p:cNvSpPr>
+            <a:spLocks noGrp="1"/>
+          </p:cNvSpPr>
+          <p:nvPr>
+            <p:ph idx="1"/>
+          </p:nvPr>
+        </p:nvSpPr>
+        <p:spPr>
+          <a:xfrm>
+            <a:off x="841248" y="1463040"/>
+            <a:ext cx="5394960" cy="4114800"/>
+          </a:xfrm>
+        </p:spPr>
+        <p:txBody>
+          <a:bodyPr/>
+          <a:lstStyle/>
+          <a:p>
+            <a:pPr/>
+            <a:r>
+              <a:rPr sz="2000"/>
+              <a:t>① 今の点 θ から、少しずらした候補 θ′ を作る</a:t>
+            </a:r>
+          </a:p>
+          <a:p>
+            <a:pPr/>
+            <a:r>
+              <a:rPr sz="2000"/>
+              <a:t>② 比 r = P(θ′ | D) / P(θ | D) を計算</a:t>
+            </a:r>
+          </a:p>
+          <a:p>
+            <a:pPr lvl="1"/>
+            <a:r>
+              <a:rPr sz="1600"/>
+              <a:t>P(D) は分母分子で消える</a:t>
+            </a:r>
+          </a:p>
+          <a:p>
+            <a:pPr/>
+            <a:r>
+              <a:rPr sz="2000"/>
+              <a:t>③ r ≥ 1 なら移る。r &lt; 1 なら確率 r で移る</a:t>
+            </a:r>
+          </a:p>
+          <a:p>
+            <a:pPr lvl="1"/>
+            <a:r>
+              <a:rPr sz="1600"/>
+              <a:t>移らなければ、同じ点をもう一度記録</a:t>
+            </a:r>
+          </a:p>
+          <a:p>
+            <a:pPr/>
+            <a:r>
+              <a:rPr sz="2000"/>
+              <a:t>④ ①〜③ を何千回もくり返す</a:t>
+            </a:r>
+          </a:p>
+          <a:p>
+            <a:pPr/>
+            <a:r>
+              <a:rPr sz="2000"/>
+              <a:t>歩いた跡のヒストグラム = 事後分布</a:t>
+            </a:r>
+          </a:p>
+          <a:p>
+            <a:pPr lvl="1"/>
+            <a:r>
+              <a:rPr sz="1600"/>
+              <a:t>下がる方向にも確率的に進むので、山の広がり（誤差）まで分かる</a:t>
+            </a:r>
+          </a:p>
+        </p:txBody>
+      </p:sp>
+      <p:sp>
+        <p:nvSpPr>
+          <p:cNvPr id="8" name="TextBox 7">
+            <a:extLst>
+              <a:ext uri="{FF2B5EF4-FFF2-40B4-BE49-F238E27FC236}">
+                <a16:creationId xmlns:a16="http://schemas.microsoft.com/office/drawing/2014/main" id="{F85CD606-E3CE-F314-B3EE-F3D7028115CB}"/>
+              </a:ext>
+            </a:extLst>
+          </p:cNvPr>
+          <p:cNvSpPr txBox="1"/>
+          <p:nvPr/>
+        </p:nvSpPr>
+        <p:spPr>
+          <a:xfrm>
+            <a:off x="5837182" y="5663239"/>
+            <a:ext cx="6093372" cy="923330"/>
+          </a:xfrm>
+          <a:prstGeom prst="rect">
+            <a:avLst/>
+          </a:prstGeom>
+          <a:noFill/>
+        </p:spPr>
+        <p:txBody>
+          <a:bodyPr wrap="square">
+            <a:spAutoFit/>
+          </a:bodyPr>
+          <a:lstStyle/>
+          <a:p>
+            <a:r>
+              <a:rPr lang="en-US" sz="1400" b="1"/>
+              <a:t>Reference:</a:t>
+            </a:r>
+            <a:r>
+              <a:rPr lang="en-US" sz="1400"/>
+              <a:t> N. Metropolis et al. (1953), J. Chem. Phys. 21, 1087</a:t>
+            </a:r>
+            <a:endParaRPr lang="en-US"/>
           </a:p>
         </p:txBody>
       </p:sp>
       <p:pic>
         <p:nvPicPr>
-          <p:cNvPr id="3" name="Picture 2" descr="fig_significance_v20r.png"/>
+          <p:cNvPr id="9" name="Picture 8" descr="fig_mcmc_toy.png"/>
           <p:cNvPicPr>
             <a:picLocks noChangeAspect="1"/>
           </p:cNvPicPr>
@@ -11749,201 +12188,8 @@
         </p:blipFill>
         <p:spPr>
           <a:xfrm>
-            <a:off x="2377440" y="1234440"/>
-            <a:ext cx="5334000" cy="4160520"/>
-          </a:xfrm>
-          <a:prstGeom prst="rect">
-            <a:avLst/>
-          </a:prstGeom>
-        </p:spPr>
-      </p:pic>
-      <p:sp>
-        <p:nvSpPr>
-          <p:cNvPr id="4" name="TextBox 3"/>
-          <p:cNvSpPr txBox="1"/>
-          <p:nvPr/>
-        </p:nvSpPr>
-        <p:spPr>
-          <a:xfrm>
-            <a:off x="457200" y="5486400"/>
-            <a:ext cx="11247120" cy="457200"/>
-          </a:xfrm>
-          <a:prstGeom prst="rect">
-            <a:avLst/>
-          </a:prstGeom>
-          <a:noFill/>
-        </p:spPr>
-        <p:txBody>
-          <a:bodyPr wrap="square">
-            <a:spAutoFit/>
-          </a:bodyPr>
-          <a:lstStyle/>
-          <a:p>
-            <a:r>
-              <a:rPr sz="2000"/>
-              <a:t>20.8 GeV で 19.0σ（Totani は 13–19σ）。山の位置も一致</a:t>
-            </a:r>
-          </a:p>
-        </p:txBody>
-      </p:sp>
-      <p:sp>
-        <p:nvSpPr>
-          <p:cNvPr id="8" name="TextBox 7">
-            <a:extLst>
-              <a:ext uri="{FF2B5EF4-FFF2-40B4-BE49-F238E27FC236}">
-                <a16:creationId xmlns:a16="http://schemas.microsoft.com/office/drawing/2014/main" id="{F85CD606-E3CE-F314-B3EE-F3D7028115CB}"/>
-              </a:ext>
-            </a:extLst>
-          </p:cNvPr>
-          <p:cNvSpPr txBox="1"/>
-          <p:nvPr/>
-        </p:nvSpPr>
-        <p:spPr>
-          <a:xfrm>
-            <a:off x="5837182" y="6035040"/>
-            <a:ext cx="6093372" cy="923330"/>
-          </a:xfrm>
-          <a:prstGeom prst="rect">
-            <a:avLst/>
-          </a:prstGeom>
-          <a:noFill/>
-        </p:spPr>
-        <p:txBody>
-          <a:bodyPr wrap="square">
-            <a:spAutoFit/>
-          </a:bodyPr>
-          <a:lstStyle/>
-          <a:p>
-            <a:r>
-              <a:rPr lang="en-US" sz="1400" b="1"/>
-              <a:t>Reference:</a:t>
-            </a:r>
-            <a:r>
-              <a:rPr lang="en-US" sz="1400"/>
-              <a:t> T. Totani (2025), arXiv:2507.07209 Fig. 9</a:t>
-            </a:r>
-            <a:endParaRPr lang="en-US"/>
-          </a:p>
-        </p:txBody>
-      </p:sp>
-    </p:spTree>
-  </p:cSld>
-  <p:clrMapOvr>
-    <a:masterClrMapping/>
-  </p:clrMapOvr>
-</p:sld>
-</file>
-
-<file path=ppt/slides/slide9.xml><?xml version="1.0" encoding="utf-8"?>
-<p:sld xmlns:a="http://schemas.openxmlformats.org/drawingml/2006/main" xmlns:r="http://schemas.openxmlformats.org/officeDocument/2006/relationships" xmlns:p="http://schemas.openxmlformats.org/presentationml/2006/main">
-  <p:cSld>
-    <p:spTree>
-      <p:nvGrpSpPr>
-        <p:cNvPr id="1" name=""/>
-        <p:cNvGrpSpPr/>
-        <p:nvPr/>
-      </p:nvGrpSpPr>
-      <p:grpSpPr>
-        <a:xfrm>
-          <a:off x="0" y="0"/>
-          <a:ext cx="0" cy="0"/>
-          <a:chOff x="0" y="0"/>
-          <a:chExt cx="0" cy="0"/>
-        </a:xfrm>
-      </p:grpSpPr>
-      <p:sp>
-        <p:nvSpPr>
-          <p:cNvPr id="2" name="Title 1"/>
-          <p:cNvSpPr>
-            <a:spLocks noGrp="1"/>
-          </p:cNvSpPr>
-          <p:nvPr>
-            <p:ph type="title"/>
-          </p:nvPr>
-        </p:nvSpPr>
-        <p:spPr/>
-        <p:txBody>
-          <a:bodyPr/>
-          <a:lstStyle/>
-          <a:p>
-            <a:r>
-              <a:rPr sz="3400"/>
-              <a:t>問題：ハローと ICS が見分けにくい（縮退）</a:t>
-            </a:r>
-          </a:p>
-        </p:txBody>
-      </p:sp>
-      <p:sp>
-        <p:nvSpPr>
-          <p:cNvPr id="3" name="Content Placeholder 2"/>
-          <p:cNvSpPr>
-            <a:spLocks noGrp="1"/>
-          </p:cNvSpPr>
-          <p:nvPr>
-            <p:ph idx="1"/>
-          </p:nvPr>
-        </p:nvSpPr>
-        <p:spPr>
-          <a:xfrm>
-            <a:off x="841248" y="1463040"/>
-            <a:ext cx="5669280" cy="4937760"/>
-          </a:xfrm>
-        </p:spPr>
-        <p:txBody>
-          <a:bodyPr/>
-          <a:lstStyle/>
-          <a:p>
-            <a:r>
-              <a:rPr sz="2200"/>
-              <a:t>ICS とハローは、空の上での形がよく似ている</a:t>
-            </a:r>
-          </a:p>
-          <a:p>
-            <a:pPr lvl="1"/>
-            <a:r>
-              <a:rPr sz="1800"/>
-              <a:t>緯度 25° → 55° で暗くなる割合：ハロー 2.74 倍、ICS 2.75 倍</a:t>
-            </a:r>
-          </a:p>
-          <a:p>
-            <a:r>
-              <a:rPr sz="2200"/>
-              <a:t>違いは「銀河中心の方向に集まっているか」だけ</a:t>
-            </a:r>
-          </a:p>
-          <a:p>
-            <a:r>
-              <a:rPr sz="2200"/>
-              <a:t>ハローを入れると、その分 ICS が暗くなる</a:t>
-            </a:r>
-          </a:p>
-          <a:p>
-            <a:pPr lvl="1"/>
-            <a:r>
-              <a:rPr sz="1800"/>
-              <a:t>ハローの光の 8〜10 割は ICS から移ったもの</a:t>
-            </a:r>
-          </a:p>
-        </p:txBody>
-      </p:sp>
-      <p:pic>
-        <p:nvPicPr>
-          <p:cNvPr id="4" name="Picture 3" descr="fig_ics_norm_v20r.png"/>
-          <p:cNvPicPr>
-            <a:picLocks noChangeAspect="1"/>
-          </p:cNvPicPr>
-          <p:nvPr/>
-        </p:nvPicPr>
-        <p:blipFill>
-          <a:blip r:embed="rId3"/>
-          <a:stretch>
-            <a:fillRect/>
-          </a:stretch>
-        </p:blipFill>
-        <p:spPr>
-          <a:xfrm>
-            <a:off x="6309360" y="1737360"/>
-            <a:ext cx="5669280" cy="3968496"/>
+            <a:off x="6309360" y="1828800"/>
+            <a:ext cx="5669280" cy="2267712"/>
           </a:xfrm>
           <a:prstGeom prst="rect">
             <a:avLst/>

--- a/slides/2026-10-02_研究進捗報告_claude.pptx
+++ b/slides/2026-10-02_研究進捗報告_claude.pptx
@@ -18,7 +18,6 @@
     <p:sldId id="291" r:id="rId44"/>
     <p:sldId id="292" r:id="rId45"/>
     <p:sldId id="293" r:id="rId46"/>
-    <p:sldId id="294" r:id="rId47"/>
     <p:sldId id="263" r:id="rId9"/>
     <p:sldId id="264" r:id="rId10"/>
     <p:sldId id="265" r:id="rId11"/>
@@ -3113,91 +3112,6 @@
 </p:notes>
 </file>
 
-<file path=ppt/notesSlides/notesSlide38.xml><?xml version="1.0" encoding="utf-8"?>
-<p:notes xmlns:a="http://schemas.openxmlformats.org/drawingml/2006/main" xmlns:p="http://schemas.openxmlformats.org/presentationml/2006/main" xmlns:r="http://schemas.openxmlformats.org/officeDocument/2006/relationships">
-  <p:cSld>
-    <p:spTree>
-      <p:nvGrpSpPr>
-        <p:cNvPr id="1" name=""/>
-        <p:cNvGrpSpPr/>
-        <p:nvPr/>
-      </p:nvGrpSpPr>
-      <p:grpSpPr>
-        <a:xfrm>
-          <a:off x="0" y="0"/>
-          <a:ext cx="0" cy="0"/>
-          <a:chOff x="0" y="0"/>
-          <a:chExt cx="0" cy="0"/>
-        </a:xfrm>
-      </p:grpSpPr>
-      <p:sp>
-        <p:nvSpPr>
-          <p:cNvPr id="2" name="Slide Image Placeholder 1"/>
-          <p:cNvSpPr>
-            <a:spLocks noGrp="1"/>
-          </p:cNvSpPr>
-          <p:nvPr>
-            <p:ph type="sldImg" idx="2"/>
-          </p:nvPr>
-        </p:nvSpPr>
-        <p:spPr/>
-      </p:sp>
-      <p:sp>
-        <p:nvSpPr>
-          <p:cNvPr id="3" name="Notes Placeholder 2"/>
-          <p:cNvSpPr>
-            <a:spLocks noGrp="1"/>
-          </p:cNvSpPr>
-          <p:nvPr>
-            <p:ph type="body" idx="3" sz="quarter"/>
-          </p:nvPr>
-        </p:nvSpPr>
-        <p:spPr/>
-        <p:txBody>
-          <a:bodyPr/>
-          <a:lstStyle/>
-          <a:p>
-            <a:r>
-              <a:t>Totani §2.2: "the best-fit values and statistical errors of the fitting parameters f_l are obtained by maximizing the likelihood function using the MCMC method"。</a:t>
-            </a:r>
-          </a:p>
-          <a:p>
-            <a:r>
-              <a:t>勾配法を使う理由: MCMC はランダムに歩くので、ちょうど頂上の点を踏むとは限らない。坂を登る方法のほうが頂上を正確に求められる。実際、勾配法のほうが ln L がわずかに高かった (ハローありで +0.20)。</a:t>
-            </a:r>
-          </a:p>
-          <a:p>
-            <a:r>
-              <a:t>比較はクラウドの計算機 (x86_64) で、同じ型紙・同じ 10° セル尤度・同じ制約。Totani の初期値 (点源・GALPROP = 1、等方 = E²dN/dE 1e-4、他 = 0) から emcee 32 歩行者 × 6000 歩。本人 PC の 19.00σ との差は計算機の違いによるもので、比較は同じ環境どうし。</a:t>
-            </a:r>
-          </a:p>
-          <a:p>
-            <a:r>
-              <a:t>記録: cloud_reports/2026-10-02_totani_style_mcmc_check.md</a:t>
-            </a:r>
-          </a:p>
-        </p:txBody>
-      </p:sp>
-      <p:sp>
-        <p:nvSpPr>
-          <p:cNvPr id="4" name="Slide Number Placeholder 3"/>
-          <p:cNvSpPr>
-            <a:spLocks noGrp="1"/>
-          </p:cNvSpPr>
-          <p:nvPr>
-            <p:ph type="sldNum" idx="5" sz="quarter"/>
-          </p:nvPr>
-        </p:nvSpPr>
-        <p:spPr/>
-      </p:sp>
-    </p:spTree>
-  </p:cSld>
-  <p:clrMapOvr>
-    <a:masterClrMapping/>
-  </p:clrMapOvr>
-</p:notes>
-</file>
-
 <file path=ppt/notesSlides/notesSlide4.xml><?xml version="1.0" encoding="utf-8"?>
 <p:notes xmlns:a="http://schemas.openxmlformats.org/drawingml/2006/main" xmlns:r="http://schemas.openxmlformats.org/officeDocument/2006/relationships" xmlns:p="http://schemas.openxmlformats.org/presentationml/2006/main">
   <p:cSld>
@@ -3254,11 +3168,6 @@
           <a:p>
             <a:r>
               <a:t>最大化は L-BFGS-B (範囲の制約つきの勾配法) で、出発点を変えて何度か行う。</a:t>
-            </a:r>
-          </a:p>
-          <a:p>
-            <a:r>
-              <a:t>最尤値の探し方: 本研究は勾配法 (L-BFGS-B)。Totani は MCMC で探している。同じ方法で比べた差は 0.006σ (MCMC の後のスライド)。</a:t>
             </a:r>
           </a:p>
         </p:txBody>
@@ -3424,11 +3333,6 @@
           <a:p>
             <a:r>
               <a:t>自己相関時間 τ: 何歩離れたら前の位置を「忘れる」か。50τ 以上の長さは emcee の推奨。</a:t>
-            </a:r>
-          </a:p>
-          <a:p>
-            <a:r>
-              <a:t>注意: Totani は MCMC で最尤値も求めているが、本研究では最尤値は勾配法で求め、MCMC は誤差の見積もりだけに使っている。同じ方法で比べた差は 0.006σ。</a:t>
             </a:r>
           </a:p>
         </p:txBody>
@@ -7007,7 +6911,7 @@
 </file>
 
 <file path=ppt/slides/slide10.xml><?xml version="1.0" encoding="utf-8"?>
-<p:sld xmlns:a="http://schemas.openxmlformats.org/drawingml/2006/main" xmlns:p="http://schemas.openxmlformats.org/presentationml/2006/main" xmlns:r="http://schemas.openxmlformats.org/officeDocument/2006/relationships">
+<p:sld xmlns:a="http://schemas.openxmlformats.org/drawingml/2006/main" xmlns:r="http://schemas.openxmlformats.org/officeDocument/2006/relationships" xmlns:p="http://schemas.openxmlformats.org/presentationml/2006/main">
   <p:cSld>
     <p:spTree>
       <p:nvGrpSpPr>
@@ -7015,7 +6919,14 @@
         <p:cNvGrpSpPr/>
         <p:nvPr/>
       </p:nvGrpSpPr>
-      <p:grpSpPr/>
+      <p:grpSpPr>
+        <a:xfrm>
+          <a:off x="0" y="0"/>
+          <a:ext cx="0" cy="0"/>
+          <a:chOff x="0" y="0"/>
+          <a:chExt cx="0" cy="0"/>
+        </a:xfrm>
+      </p:grpSpPr>
       <p:sp>
         <p:nvSpPr>
           <p:cNvPr id="2" name="Title 1"/>
@@ -7033,7 +6944,7 @@
           <a:p>
             <a:r>
               <a:rPr sz="3400"/>
-              <a:t>MCMC の中身③：今回の設定（emcee）</a:t>
+              <a:t>縮退が引き起こした 3 つの疑問</a:t>
             </a:r>
           </a:p>
         </p:txBody>
@@ -7051,107 +6962,56 @@
         <p:spPr>
           <a:xfrm>
             <a:off x="841248" y="1463040"/>
-            <a:ext cx="10515600" cy="4114800"/>
+            <a:ext cx="10515600" cy="4937760"/>
           </a:xfrm>
         </p:spPr>
         <p:txBody>
           <a:bodyPr/>
           <a:lstStyle/>
           <a:p>
-            <a:pPr/>
+            <a:r>
+              <a:rPr sz="2400"/>
+              <a:t>① バブル領域を外すと 19.0σ → 5.0σ に落ちる</a:t>
+            </a:r>
+          </a:p>
+          <a:p>
+            <a:pPr lvl="1"/>
             <a:r>
               <a:rPr sz="2000"/>
-              <a:t>32 人の歩行者が同時に歩く。次の一歩は、他の歩行者の位置を使って決める</a:t>
+              <a:t>ハローは、本当は ICS やバブルの間違いでは？</a:t>
+            </a:r>
+          </a:p>
+          <a:p>
+            <a:r>
+              <a:rPr sz="2400"/>
+              <a:t>② 何も無い空でも、最大 4.5σ が出る</a:t>
             </a:r>
           </a:p>
           <a:p>
             <a:pPr lvl="1"/>
             <a:r>
-              <a:rPr sz="1600"/>
-              <a:t>候補：Y = X_j + Z (X_k − X_j)（X_k：自分、X_j：ランダムに選んだ他の歩行者）</a:t>
+              <a:rPr sz="2000"/>
+              <a:t>σ をそのまま信じてよいのか？</a:t>
+            </a:r>
+          </a:p>
+          <a:p>
+            <a:r>
+              <a:rPr sz="2400"/>
+              <a:t>③ 7/23 に出した 19.1σ が再現できない</a:t>
             </a:r>
           </a:p>
           <a:p>
             <a:pPr lvl="1"/>
             <a:r>
-              <a:rPr sz="1600"/>
-              <a:t>Z は 1/2〜2 の乱数（確率 ∝ 1/√Z）、移る確率 = min(1, Z⁸ P(Y | D) / P(X_k | D))</a:t>
-            </a:r>
-          </a:p>
-          <a:p>
-            <a:pPr/>
-            <a:r>
               <a:rPr sz="2000"/>
-              <a:t>出発点：最尤推定の点のすぐ近く。最初の 400 歩は捨て、5 歩ごとに記録</a:t>
-            </a:r>
-          </a:p>
-          <a:p>
-            <a:pPr/>
-            <a:r>
-              <a:rPr sz="2000"/>
-              <a:t>結果の例（20.8 GeV）：ハローの倍率 f_halo = 1.48（68% 区間 1.40–1.55）</a:t>
-            </a:r>
-          </a:p>
-          <a:p>
-            <a:pPr/>
-            <a:r>
-              <a:rPr sz="2000"/>
-              <a:t>注意：推奨の長さ（自己相関時間 τ の 50 倍）に届かないビンが多い</a:t>
-            </a:r>
-          </a:p>
-          <a:p>
-            <a:pPr lvl="1"/>
-            <a:r>
-              <a:rPr sz="1600"/>
-              <a:t>20.8 GeV で τ ≈ 127 歩、記録した長さ 5600 歩 &lt; 50τ。13 ビン中 2 ビンだけ到達</a:t>
-            </a:r>
-          </a:p>
-          <a:p>
-            <a:pPr lvl="1"/>
-            <a:r>
-              <a:rPr sz="1600"/>
-              <a:t>→ 誤差棒は目安。有意度 σ は Δln L から出すので影響しない</a:t>
-            </a:r>
-          </a:p>
-        </p:txBody>
-      </p:sp>
-      <p:sp>
-        <p:nvSpPr>
-          <p:cNvPr id="8" name="TextBox 7">
-            <a:extLst>
-              <a:ext uri="{FF2B5EF4-FFF2-40B4-BE49-F238E27FC236}">
-                <a16:creationId xmlns:a16="http://schemas.microsoft.com/office/drawing/2014/main" id="{F85CD606-E3CE-F314-B3EE-F3D7028115CB}"/>
-              </a:ext>
-            </a:extLst>
-          </p:cNvPr>
-          <p:cNvSpPr txBox="1"/>
-          <p:nvPr/>
-        </p:nvSpPr>
-        <p:spPr>
-          <a:xfrm>
-            <a:off x="5837182" y="5663239"/>
-            <a:ext cx="6093372" cy="923330"/>
-          </a:xfrm>
-          <a:prstGeom prst="rect">
-            <a:avLst/>
-          </a:prstGeom>
-          <a:noFill/>
-        </p:spPr>
-        <p:txBody>
-          <a:bodyPr wrap="square">
-            <a:spAutoFit/>
-          </a:bodyPr>
-          <a:lstStyle/>
-          <a:p>
-            <a:r>
-              <a:rPr lang="en-US" sz="1400" b="1"/>
-              <a:t>Reference:</a:t>
-            </a:r>
-            <a:r>
-              <a:rPr lang="en-US" sz="1400"/>
-              <a:t> J. Goodman &amp; J. Weare (2010), Comm. App. Math. Comp. Sci. 5, 65</a:t>
-            </a:r>
-            <a:endParaRPr lang="en-US"/>
+              <a:t>結果そのものを信じてよいのか？</a:t>
+            </a:r>
+          </a:p>
+          <a:p>
+            <a:r>
+              <a:rPr sz="2400"/>
+              <a:t>→ 次から、1 つずつ調べた結果</a:t>
+            </a:r>
           </a:p>
         </p:txBody>
       </p:sp>
@@ -7197,101 +7057,66 @@
           <a:p>
             <a:r>
               <a:rPr sz="3400"/>
-              <a:t>結果：Totani の超過を再現</a:t>
-            </a:r>
-          </a:p>
-        </p:txBody>
-      </p:sp>
-      <p:pic>
-        <p:nvPicPr>
-          <p:cNvPr id="3" name="Picture 2" descr="fig_significance_v20r.png"/>
-          <p:cNvPicPr>
-            <a:picLocks noChangeAspect="1"/>
-          </p:cNvPicPr>
-          <p:nvPr/>
-        </p:nvPicPr>
-        <p:blipFill>
-          <a:blip r:embed="rId3"/>
-          <a:stretch>
-            <a:fillRect/>
-          </a:stretch>
-        </p:blipFill>
+              <a:t>① を調べる：手がかりはどこにあるか</a:t>
+            </a:r>
+          </a:p>
+        </p:txBody>
+      </p:sp>
+      <p:sp>
+        <p:nvSpPr>
+          <p:cNvPr id="3" name="Content Placeholder 2"/>
+          <p:cNvSpPr>
+            <a:spLocks noGrp="1"/>
+          </p:cNvSpPr>
+          <p:nvPr>
+            <p:ph idx="1"/>
+          </p:nvPr>
+        </p:nvSpPr>
         <p:spPr>
           <a:xfrm>
-            <a:off x="2377440" y="1234440"/>
-            <a:ext cx="5334000" cy="4160520"/>
+            <a:off x="841248" y="1463040"/>
+            <a:ext cx="10515600" cy="4937760"/>
           </a:xfrm>
-          <a:prstGeom prst="rect">
-            <a:avLst/>
-          </a:prstGeom>
         </p:spPr>
-      </p:pic>
-      <p:sp>
-        <p:nvSpPr>
-          <p:cNvPr id="4" name="TextBox 3"/>
-          <p:cNvSpPr txBox="1"/>
-          <p:nvPr/>
-        </p:nvSpPr>
-        <p:spPr>
-          <a:xfrm>
-            <a:off x="457200" y="5486400"/>
-            <a:ext cx="11247120" cy="457200"/>
-          </a:xfrm>
-          <a:prstGeom prst="rect">
-            <a:avLst/>
-          </a:prstGeom>
-          <a:noFill/>
-        </p:spPr>
-        <p:txBody>
-          <a:bodyPr wrap="square">
-            <a:spAutoFit/>
-          </a:bodyPr>
-          <a:lstStyle/>
-          <a:p>
-            <a:r>
-              <a:rPr sz="2000"/>
-              <a:t>20.8 GeV で 19.0σ（Totani は 13–19σ）。山の位置も一致</a:t>
-            </a:r>
-          </a:p>
-        </p:txBody>
-      </p:sp>
-      <p:sp>
-        <p:nvSpPr>
-          <p:cNvPr id="8" name="TextBox 7">
-            <a:extLst>
-              <a:ext uri="{FF2B5EF4-FFF2-40B4-BE49-F238E27FC236}">
-                <a16:creationId xmlns:a16="http://schemas.microsoft.com/office/drawing/2014/main" id="{F85CD606-E3CE-F314-B3EE-F3D7028115CB}"/>
-              </a:ext>
-            </a:extLst>
-          </p:cNvPr>
-          <p:cNvSpPr txBox="1"/>
-          <p:nvPr/>
-        </p:nvSpPr>
-        <p:spPr>
-          <a:xfrm>
-            <a:off x="5837182" y="6035040"/>
-            <a:ext cx="6093372" cy="923330"/>
-          </a:xfrm>
-          <a:prstGeom prst="rect">
-            <a:avLst/>
-          </a:prstGeom>
-          <a:noFill/>
-        </p:spPr>
-        <p:txBody>
-          <a:bodyPr wrap="square">
-            <a:spAutoFit/>
-          </a:bodyPr>
-          <a:lstStyle/>
-          <a:p>
-            <a:r>
-              <a:rPr lang="en-US" sz="1400" b="1"/>
-              <a:t>Reference:</a:t>
-            </a:r>
-            <a:r>
-              <a:rPr lang="en-US" sz="1400"/>
-              <a:t> T. Totani (2025), arXiv:2507.07209 Fig. 9</a:t>
-            </a:r>
-            <a:endParaRPr lang="en-US"/>
+        <p:txBody>
+          <a:bodyPr/>
+          <a:lstStyle/>
+          <a:p>
+            <a:r>
+              <a:rPr sz="2200"/>
+              <a:t>フィッシャー情報：データがパラメータをどれだけ決められるか</a:t>
+            </a:r>
+          </a:p>
+          <a:p>
+            <a:r>
+              <a:rPr sz="2200"/>
+              <a:t>ICS など他の成分では説明できない「ハローだけの手がかり」を、空の場所ごとに計算</a:t>
+            </a:r>
+          </a:p>
+          <a:p>
+            <a:pPr lvl="1"/>
+            <a:r>
+              <a:rPr sz="1800"/>
+              <a:t>その 54% がバブル領域（面積は 34%）に集中</a:t>
+            </a:r>
+          </a:p>
+          <a:p>
+            <a:r>
+              <a:rPr sz="2200"/>
+              <a:t>手がかりの減り方だけで予測すると 6.4σ、実測 5.0σ</a:t>
+            </a:r>
+          </a:p>
+          <a:p>
+            <a:r>
+              <a:rPr sz="2200"/>
+              <a:t>同じ形の領域を横にずらして外すと 13〜16σ（予測とも一致）</a:t>
+            </a:r>
+          </a:p>
+          <a:p>
+            <a:r>
+              <a:rPr sz="2200"/>
+              <a:t>→ 19 → 5σ は「手がかりを捨てた」から。汚染の証拠ではない</a:t>
+            </a:r>
           </a:p>
         </p:txBody>
       </p:sp>
@@ -7337,7 +7162,7 @@
           <a:p>
             <a:r>
               <a:rPr sz="3400"/>
-              <a:t>問題：ハローと ICS が見分けにくい（縮退）</a:t>
+              <a:t>① を調べる：ICS が犯人なら</a:t>
             </a:r>
           </a:p>
         </p:txBody>
@@ -7355,7 +7180,7 @@
         <p:spPr>
           <a:xfrm>
             <a:off x="841248" y="1463040"/>
-            <a:ext cx="5669280" cy="4937760"/>
+            <a:ext cx="10515600" cy="4114800"/>
           </a:xfrm>
         </p:spPr>
         <p:txBody>
@@ -7364,61 +7189,90 @@
           <a:p>
             <a:r>
               <a:rPr sz="2200"/>
-              <a:t>ICS とハローは、空の上での形がよく似ている</a:t>
+              <a:t>ICS をバブルの内と外で別々の明るさにして当てはめた</a:t>
             </a:r>
           </a:p>
           <a:p>
             <a:pPr lvl="1"/>
             <a:r>
               <a:rPr sz="1800"/>
-              <a:t>緯度 25° → 55° で暗くなる割合：ハロー 2.74 倍、ICS 2.75 倍</a:t>
+              <a:t>内側が約 2.3 倍明るければ、ハローの改善の 92% を ICS が説明</a:t>
             </a:r>
           </a:p>
           <a:p>
             <a:r>
               <a:rPr sz="2200"/>
-              <a:t>違いは「銀河中心の方向に集まっているか」だけ</a:t>
+              <a:t>ICS の計算の近似（等方近似）を直しても 1.1〜1.3 倍</a:t>
+            </a:r>
+          </a:p>
+          <a:p>
+            <a:pPr lvl="1"/>
+            <a:r>
+              <a:rPr sz="1800"/>
+              <a:t>しかも外側のほうが大きくなる → 2.3 倍には届かない</a:t>
             </a:r>
           </a:p>
           <a:p>
             <a:r>
               <a:rPr sz="2200"/>
-              <a:t>ハローを入れると、その分 ICS が暗くなる</a:t>
+              <a:t>ICS を 3 種類に分けて、それぞれ自由に動かしても</a:t>
             </a:r>
           </a:p>
           <a:p>
             <a:pPr lvl="1"/>
             <a:r>
               <a:rPr sz="1800"/>
-              <a:t>ハローの光の 8〜10 割は ICS から移ったもの</a:t>
-            </a:r>
-          </a:p>
-        </p:txBody>
-      </p:sp>
-      <p:pic>
-        <p:nvPicPr>
-          <p:cNvPr id="4" name="Picture 3" descr="fig_ics_norm_v20r.png"/>
-          <p:cNvPicPr>
-            <a:picLocks noChangeAspect="1"/>
-          </p:cNvPicPr>
+              <a:t>19.5σ → 18.4σ（約 1σ しか下がらない）</a:t>
+            </a:r>
+          </a:p>
+          <a:p>
+            <a:r>
+              <a:rPr sz="2200"/>
+              <a:t>→ ICS の「明るさ」の間違いでは、ハローを説明できない</a:t>
+            </a:r>
+          </a:p>
+        </p:txBody>
+      </p:sp>
+      <p:sp>
+        <p:nvSpPr>
+          <p:cNvPr id="8" name="TextBox 7">
+            <a:extLst>
+              <a:ext uri="{FF2B5EF4-FFF2-40B4-BE49-F238E27FC236}">
+                <a16:creationId xmlns:a16="http://schemas.microsoft.com/office/drawing/2014/main" id="{F85CD606-E3CE-F314-B3EE-F3D7028115CB}"/>
+              </a:ext>
+            </a:extLst>
+          </p:cNvPr>
+          <p:cNvSpPr txBox="1"/>
           <p:nvPr/>
-        </p:nvPicPr>
-        <p:blipFill>
-          <a:blip r:embed="rId3"/>
-          <a:stretch>
-            <a:fillRect/>
-          </a:stretch>
-        </p:blipFill>
+        </p:nvSpPr>
         <p:spPr>
           <a:xfrm>
-            <a:off x="6309360" y="1737360"/>
-            <a:ext cx="5669280" cy="3968496"/>
+            <a:off x="5837182" y="5663239"/>
+            <a:ext cx="6093372" cy="923330"/>
           </a:xfrm>
           <a:prstGeom prst="rect">
             <a:avLst/>
           </a:prstGeom>
+          <a:noFill/>
         </p:spPr>
-      </p:pic>
+        <p:txBody>
+          <a:bodyPr wrap="square">
+            <a:spAutoFit/>
+          </a:bodyPr>
+          <a:lstStyle/>
+          <a:p>
+            <a:r>
+              <a:rPr lang="en-US" sz="1400" b="1"/>
+              <a:t>Reference:</a:t>
+            </a:r>
+            <a:r>
+              <a:rPr lang="en-US" sz="1400"/>
+              <a:t> I. V. Moskalenko &amp; A. W. Strong (2000), ApJ 528, 357</a:t>
+            </a:r>
+            <a:endParaRPr lang="en-US"/>
+          </a:p>
+        </p:txBody>
+      </p:sp>
     </p:spTree>
   </p:cSld>
   <p:clrMapOvr>
@@ -7461,7 +7315,7 @@
           <a:p>
             <a:r>
               <a:rPr sz="3400"/>
-              <a:t>縮退が引き起こした 3 つの疑問</a:t>
+              <a:t>② を調べる：σ を信じてよいか</a:t>
             </a:r>
           </a:p>
         </p:txBody>
@@ -7479,7 +7333,7 @@
         <p:spPr>
           <a:xfrm>
             <a:off x="841248" y="1463040"/>
-            <a:ext cx="10515600" cy="4937760"/>
+            <a:ext cx="10515600" cy="4114800"/>
           </a:xfrm>
         </p:spPr>
         <p:txBody>
@@ -7487,48 +7341,81 @@
           <a:lstStyle/>
           <a:p>
             <a:r>
-              <a:rPr sz="2400"/>
-              <a:t>① バブル領域を外すと 19.0σ → 5.0σ に落ちる</a:t>
+              <a:rPr sz="2200"/>
+              <a:t>何も無い空 23 か所で、天の川と同じ解析をした</a:t>
+            </a:r>
+          </a:p>
+          <a:p>
+            <a:r>
+              <a:rPr sz="2200"/>
+              <a:t>本物の信号が無ければ、σ は「平均 0、ばらつき 1」になるはず</a:t>
             </a:r>
           </a:p>
           <a:p>
             <a:pPr lvl="1"/>
             <a:r>
-              <a:rPr sz="2000"/>
-              <a:t>ハローは、本当は ICS やバブルの間違いでは？</a:t>
-            </a:r>
-          </a:p>
-          <a:p>
-            <a:r>
-              <a:rPr sz="2400"/>
-              <a:t>② 何も無い空でも、最大 4.5σ が出る</a:t>
+              <a:rPr sz="1800"/>
+              <a:t>Wilks の定理が成り立っていれば</a:t>
+            </a:r>
+          </a:p>
+          <a:p>
+            <a:r>
+              <a:rPr sz="2200"/>
+              <a:t>実際のばらつき：1.26（95% 区間 1.14–1.39）</a:t>
             </a:r>
           </a:p>
           <a:p>
             <a:pPr lvl="1"/>
             <a:r>
-              <a:rPr sz="2000"/>
-              <a:t>σ をそのまま信じてよいのか？</a:t>
-            </a:r>
-          </a:p>
-          <a:p>
-            <a:r>
-              <a:rPr sz="2400"/>
-              <a:t>③ 7/23 に出した 19.1σ が再現できない</a:t>
-            </a:r>
-          </a:p>
-          <a:p>
-            <a:pPr lvl="1"/>
-            <a:r>
-              <a:rPr sz="2000"/>
-              <a:t>結果そのものを信じてよいのか？</a:t>
-            </a:r>
-          </a:p>
-          <a:p>
-            <a:r>
-              <a:rPr sz="2400"/>
-              <a:t>→ 次から、1 つずつ調べた結果</a:t>
-            </a:r>
+              <a:rPr sz="1800"/>
+              <a:t>σ は 1.26 倍大きく出ている</a:t>
+            </a:r>
+          </a:p>
+          <a:p>
+            <a:r>
+              <a:rPr sz="2200"/>
+              <a:t>19.0σ を較正すると 19.0 ÷ 1.26 ≈ 15σ（13.7–16.6σ）</a:t>
+            </a:r>
+          </a:p>
+        </p:txBody>
+      </p:sp>
+      <p:sp>
+        <p:nvSpPr>
+          <p:cNvPr id="8" name="TextBox 7">
+            <a:extLst>
+              <a:ext uri="{FF2B5EF4-FFF2-40B4-BE49-F238E27FC236}">
+                <a16:creationId xmlns:a16="http://schemas.microsoft.com/office/drawing/2014/main" id="{F85CD606-E3CE-F314-B3EE-F3D7028115CB}"/>
+              </a:ext>
+            </a:extLst>
+          </p:cNvPr>
+          <p:cNvSpPr txBox="1"/>
+          <p:nvPr/>
+        </p:nvSpPr>
+        <p:spPr>
+          <a:xfrm>
+            <a:off x="5837182" y="5663239"/>
+            <a:ext cx="6093372" cy="923330"/>
+          </a:xfrm>
+          <a:prstGeom prst="rect">
+            <a:avLst/>
+          </a:prstGeom>
+          <a:noFill/>
+        </p:spPr>
+        <p:txBody>
+          <a:bodyPr wrap="square">
+            <a:spAutoFit/>
+          </a:bodyPr>
+          <a:lstStyle/>
+          <a:p>
+            <a:r>
+              <a:rPr lang="en-US" sz="1400" b="1"/>
+              <a:t>Reference:</a:t>
+            </a:r>
+            <a:r>
+              <a:rPr lang="en-US" sz="1400"/>
+              <a:t> B. Efron &amp; R. J. Tibshirani (1993), An Introduction to the Bootstrap</a:t>
+            </a:r>
+            <a:endParaRPr lang="en-US"/>
           </a:p>
         </p:txBody>
       </p:sp>
@@ -7574,65 +7461,60 @@
           <a:p>
             <a:r>
               <a:rPr sz="3400"/>
-              <a:t>① を調べる：手がかりはどこにあるか</a:t>
-            </a:r>
-          </a:p>
-        </p:txBody>
-      </p:sp>
-      <p:sp>
-        <p:nvSpPr>
-          <p:cNvPr id="3" name="Content Placeholder 2"/>
-          <p:cNvSpPr>
-            <a:spLocks noGrp="1"/>
-          </p:cNvSpPr>
-          <p:nvPr>
-            <p:ph idx="1"/>
-          </p:nvPr>
-        </p:nvSpPr>
+              <a:t>② の結果：エネルギーごとのばらつき</a:t>
+            </a:r>
+          </a:p>
+        </p:txBody>
+      </p:sp>
+      <p:pic>
+        <p:nvPicPr>
+          <p:cNvPr id="3" name="Picture 2" descr="fig_null_variance.png"/>
+          <p:cNvPicPr>
+            <a:picLocks noChangeAspect="1"/>
+          </p:cNvPicPr>
+          <p:nvPr/>
+        </p:nvPicPr>
+        <p:blipFill>
+          <a:blip r:embed="rId3"/>
+          <a:stretch>
+            <a:fillRect/>
+          </a:stretch>
+        </p:blipFill>
         <p:spPr>
           <a:xfrm>
-            <a:off x="841248" y="1463040"/>
-            <a:ext cx="10515600" cy="4937760"/>
+            <a:off x="2103120" y="1234440"/>
+            <a:ext cx="7156174" cy="4114800"/>
           </a:xfrm>
+          <a:prstGeom prst="rect">
+            <a:avLst/>
+          </a:prstGeom>
         </p:spPr>
-        <p:txBody>
-          <a:bodyPr/>
-          <a:lstStyle/>
-          <a:p>
-            <a:r>
-              <a:rPr sz="2200"/>
-              <a:t>フィッシャー情報：データがパラメータをどれだけ決められるか</a:t>
-            </a:r>
-          </a:p>
-          <a:p>
-            <a:r>
-              <a:rPr sz="2200"/>
-              <a:t>ICS など他の成分では説明できない「ハローだけの手がかり」を、空の場所ごとに計算</a:t>
-            </a:r>
-          </a:p>
-          <a:p>
-            <a:pPr lvl="1"/>
-            <a:r>
-              <a:rPr sz="1800"/>
-              <a:t>その 54% がバブル領域（面積は 34%）に集中</a:t>
-            </a:r>
-          </a:p>
-          <a:p>
-            <a:r>
-              <a:rPr sz="2200"/>
-              <a:t>手がかりの減り方だけで予測すると 6.4σ、実測 5.0σ</a:t>
-            </a:r>
-          </a:p>
-          <a:p>
-            <a:r>
-              <a:rPr sz="2200"/>
-              <a:t>同じ形の領域を横にずらして外すと 13〜16σ（予測とも一致）</a:t>
-            </a:r>
-          </a:p>
-          <a:p>
-            <a:r>
-              <a:rPr sz="2200"/>
-              <a:t>→ 19 → 5σ は「手がかりを捨てた」から。汚染の証拠ではない</a:t>
+      </p:pic>
+      <p:sp>
+        <p:nvSpPr>
+          <p:cNvPr id="4" name="TextBox 3"/>
+          <p:cNvSpPr txBox="1"/>
+          <p:nvPr/>
+        </p:nvSpPr>
+        <p:spPr>
+          <a:xfrm>
+            <a:off x="457200" y="5486400"/>
+            <a:ext cx="11247120" cy="457200"/>
+          </a:xfrm>
+          <a:prstGeom prst="rect">
+            <a:avLst/>
+          </a:prstGeom>
+          <a:noFill/>
+        </p:spPr>
+        <p:txBody>
+          <a:bodyPr wrap="square">
+            <a:spAutoFit/>
+          </a:bodyPr>
+          <a:lstStyle/>
+          <a:p>
+            <a:r>
+              <a:rPr sz="2000"/>
+              <a:t>どのエネルギーでもばらつきは 1 より大きい（光子が十分ある範囲）</a:t>
             </a:r>
           </a:p>
         </p:txBody>
@@ -7679,7 +7561,7 @@
           <a:p>
             <a:r>
               <a:rPr sz="3400"/>
-              <a:t>① を調べる：ICS が犯人なら</a:t>
+              <a:t>③ を調べる：19.1σ が再現できない理由</a:t>
             </a:r>
           </a:p>
         </p:txBody>
@@ -7697,7 +7579,7 @@
         <p:spPr>
           <a:xfrm>
             <a:off x="841248" y="1463040"/>
-            <a:ext cx="10515600" cy="4114800"/>
+            <a:ext cx="10515600" cy="4937760"/>
           </a:xfrm>
         </p:spPr>
         <p:txBody>
@@ -7705,88 +7587,27 @@
           <a:lstStyle/>
           <a:p>
             <a:r>
-              <a:rPr sz="2200"/>
-              <a:t>ICS をバブルの内と外で別々の明るさにして当てはめた</a:t>
-            </a:r>
-          </a:p>
-          <a:p>
-            <a:pPr lvl="1"/>
-            <a:r>
-              <a:rPr sz="1800"/>
-              <a:t>内側が約 2.3 倍明るければ、ハローの改善の 92% を ICS が説明</a:t>
-            </a:r>
-          </a:p>
-          <a:p>
-            <a:r>
-              <a:rPr sz="2200"/>
-              <a:t>ICS の計算の近似（等方近似）を直しても 1.1〜1.3 倍</a:t>
-            </a:r>
-          </a:p>
-          <a:p>
-            <a:pPr lvl="1"/>
-            <a:r>
-              <a:rPr sz="1800"/>
-              <a:t>しかも外側のほうが大きくなる → 2.3 倍には届かない</a:t>
-            </a:r>
-          </a:p>
-          <a:p>
-            <a:r>
-              <a:rPr sz="2200"/>
-              <a:t>ICS を 3 種類に分けて、それぞれ自由に動かしても</a:t>
-            </a:r>
-          </a:p>
-          <a:p>
-            <a:pPr lvl="1"/>
-            <a:r>
-              <a:rPr sz="1800"/>
-              <a:t>19.5σ → 18.4σ（約 1σ しか下がらない）</a:t>
-            </a:r>
-          </a:p>
-          <a:p>
-            <a:r>
-              <a:rPr sz="2200"/>
-              <a:t>→ ICS の「明るさ」の間違いでは、ハローを説明できない</a:t>
-            </a:r>
-          </a:p>
-        </p:txBody>
-      </p:sp>
-      <p:sp>
-        <p:nvSpPr>
-          <p:cNvPr id="8" name="TextBox 7">
-            <a:extLst>
-              <a:ext uri="{FF2B5EF4-FFF2-40B4-BE49-F238E27FC236}">
-                <a16:creationId xmlns:a16="http://schemas.microsoft.com/office/drawing/2014/main" id="{F85CD606-E3CE-F314-B3EE-F3D7028115CB}"/>
-              </a:ext>
-            </a:extLst>
-          </p:cNvPr>
-          <p:cNvSpPr txBox="1"/>
-          <p:nvPr/>
-        </p:nvSpPr>
-        <p:spPr>
-          <a:xfrm>
-            <a:off x="5837182" y="5663239"/>
-            <a:ext cx="6093372" cy="923330"/>
-          </a:xfrm>
-          <a:prstGeom prst="rect">
-            <a:avLst/>
-          </a:prstGeom>
-          <a:noFill/>
-        </p:spPr>
-        <p:txBody>
-          <a:bodyPr wrap="square">
-            <a:spAutoFit/>
-          </a:bodyPr>
-          <a:lstStyle/>
-          <a:p>
-            <a:r>
-              <a:rPr lang="en-US" sz="1400" b="1"/>
-              <a:t>Reference:</a:t>
-            </a:r>
-            <a:r>
-              <a:rPr lang="en-US" sz="1400"/>
-              <a:t> I. V. Moskalenko &amp; A. W. Strong (2000), ApJ 528, 357</a:t>
-            </a:r>
-            <a:endParaRPr lang="en-US"/>
+              <a:rPr sz="2400"/>
+              <a:t>7/23 の計算の直後にコードを直していて、当時の状態が残っていなかった</a:t>
+            </a:r>
+          </a:p>
+          <a:p>
+            <a:r>
+              <a:rPr sz="2400"/>
+              <a:t>今のコードは、何度計算しても同じ答えになる（10/1 に確認）</a:t>
+            </a:r>
+          </a:p>
+          <a:p>
+            <a:r>
+              <a:rPr sz="2400"/>
+              <a:t>結果ファイルに、コードの版と設定を自動で記録するようにした</a:t>
+            </a:r>
+          </a:p>
+          <a:p>
+            <a:r>
+              <a:rPr sz="2400"/>
+              <a:t>→ 主結果を 19.0σ（10/1 の再計算）に統一</a:t>
+            </a:r>
           </a:p>
         </p:txBody>
       </p:sp>
@@ -7832,7 +7653,7 @@
           <a:p>
             <a:r>
               <a:rPr sz="3400"/>
-              <a:t>② を調べる：σ を信じてよいか</a:t>
+              <a:t>ここまでのまとめ</a:t>
             </a:r>
           </a:p>
         </p:txBody>
@@ -7850,7 +7671,7 @@
         <p:spPr>
           <a:xfrm>
             <a:off x="841248" y="1463040"/>
-            <a:ext cx="10515600" cy="4114800"/>
+            <a:ext cx="10515600" cy="4937760"/>
           </a:xfrm>
         </p:spPr>
         <p:txBody>
@@ -7858,81 +7679,34 @@
           <a:lstStyle/>
           <a:p>
             <a:r>
-              <a:rPr sz="2200"/>
-              <a:t>何も無い空 23 か所で、天の川と同じ解析をした</a:t>
-            </a:r>
-          </a:p>
-          <a:p>
-            <a:r>
-              <a:rPr sz="2200"/>
-              <a:t>本物の信号が無ければ、σ は「平均 0、ばらつき 1」になるはず</a:t>
+              <a:rPr sz="2400"/>
+              <a:t>ICS の明るさ・バブル・計算の近似の間違いでは、超過を説明できない</a:t>
+            </a:r>
+          </a:p>
+          <a:p>
+            <a:r>
+              <a:rPr sz="2400"/>
+              <a:t>σ は 1.26 倍の過大評価 → 較正すると約 15σ</a:t>
+            </a:r>
+          </a:p>
+          <a:p>
+            <a:r>
+              <a:rPr sz="2400"/>
+              <a:t>ただし、暗黒物質の証拠ではない</a:t>
             </a:r>
           </a:p>
           <a:p>
             <a:pPr lvl="1"/>
             <a:r>
-              <a:rPr sz="1800"/>
-              <a:t>Wilks の定理が成り立っていれば</a:t>
-            </a:r>
-          </a:p>
-          <a:p>
-            <a:r>
-              <a:rPr sz="2200"/>
-              <a:t>実際のばらつき：1.26（95% 区間 1.14–1.39）</a:t>
-            </a:r>
-          </a:p>
-          <a:p>
-            <a:pPr lvl="1"/>
-            <a:r>
-              <a:rPr sz="1800"/>
-              <a:t>σ は 1.26 倍大きく出ている</a:t>
-            </a:r>
-          </a:p>
-          <a:p>
-            <a:r>
-              <a:rPr sz="2200"/>
-              <a:t>19.0σ を較正すると 19.0 ÷ 1.26 ≈ 15σ（13.7–16.6σ）</a:t>
-            </a:r>
-          </a:p>
-        </p:txBody>
-      </p:sp>
-      <p:sp>
-        <p:nvSpPr>
-          <p:cNvPr id="8" name="TextBox 7">
-            <a:extLst>
-              <a:ext uri="{FF2B5EF4-FFF2-40B4-BE49-F238E27FC236}">
-                <a16:creationId xmlns:a16="http://schemas.microsoft.com/office/drawing/2014/main" id="{F85CD606-E3CE-F314-B3EE-F3D7028115CB}"/>
-              </a:ext>
-            </a:extLst>
-          </p:cNvPr>
-          <p:cNvSpPr txBox="1"/>
-          <p:nvPr/>
-        </p:nvSpPr>
-        <p:spPr>
-          <a:xfrm>
-            <a:off x="5837182" y="5663239"/>
-            <a:ext cx="6093372" cy="923330"/>
-          </a:xfrm>
-          <a:prstGeom prst="rect">
-            <a:avLst/>
-          </a:prstGeom>
-          <a:noFill/>
-        </p:spPr>
-        <p:txBody>
-          <a:bodyPr wrap="square">
-            <a:spAutoFit/>
-          </a:bodyPr>
-          <a:lstStyle/>
-          <a:p>
-            <a:r>
-              <a:rPr lang="en-US" sz="1400" b="1"/>
-              <a:t>Reference:</a:t>
-            </a:r>
-            <a:r>
-              <a:rPr lang="en-US" sz="1400"/>
-              <a:t> B. Efron &amp; R. J. Tibshirani (1993), An Introduction to the Bootstrap</a:t>
-            </a:r>
-            <a:endParaRPr lang="en-US"/>
+              <a:rPr sz="2000"/>
+              <a:t>ICS の「空間の形」の間違いは否定できていない</a:t>
+            </a:r>
+          </a:p>
+          <a:p>
+            <a:r>
+              <a:rPr sz="2400"/>
+              <a:t>→ 独立な確認として、矮小銀河を見る</a:t>
+            </a:r>
           </a:p>
         </p:txBody>
       </p:sp>
@@ -7978,45 +7752,86 @@
           <a:p>
             <a:r>
               <a:rPr sz="3400"/>
-              <a:t>② の結果：エネルギーごとのばらつき</a:t>
-            </a:r>
-          </a:p>
-        </p:txBody>
-      </p:sp>
-      <p:pic>
-        <p:nvPicPr>
-          <p:cNvPr id="3" name="Picture 2" descr="fig_null_variance.png"/>
-          <p:cNvPicPr>
-            <a:picLocks noChangeAspect="1"/>
-          </p:cNvPicPr>
-          <p:nvPr/>
-        </p:nvPicPr>
-        <p:blipFill>
-          <a:blip r:embed="rId3"/>
-          <a:stretch>
-            <a:fillRect/>
-          </a:stretch>
-        </p:blipFill>
+              <a:t>矮小銀河で確かめる</a:t>
+            </a:r>
+          </a:p>
+        </p:txBody>
+      </p:sp>
+      <p:sp>
+        <p:nvSpPr>
+          <p:cNvPr id="3" name="Content Placeholder 2"/>
+          <p:cNvSpPr>
+            <a:spLocks noGrp="1"/>
+          </p:cNvSpPr>
+          <p:nvPr>
+            <p:ph idx="1"/>
+          </p:nvPr>
+        </p:nvSpPr>
         <p:spPr>
           <a:xfrm>
-            <a:off x="2103120" y="1234440"/>
-            <a:ext cx="7156174" cy="4114800"/>
+            <a:off x="841248" y="1463040"/>
+            <a:ext cx="10515600" cy="4114800"/>
           </a:xfrm>
-          <a:prstGeom prst="rect">
-            <a:avLst/>
-          </a:prstGeom>
         </p:spPr>
-      </p:pic>
-      <p:sp>
-        <p:nvSpPr>
-          <p:cNvPr id="4" name="TextBox 3"/>
+        <p:txBody>
+          <a:bodyPr/>
+          <a:lstStyle/>
+          <a:p>
+            <a:r>
+              <a:rPr sz="2400"/>
+              <a:t>矮小銀河：天の川のまわりの小さな銀河</a:t>
+            </a:r>
+          </a:p>
+          <a:p>
+            <a:pPr lvl="1"/>
+            <a:r>
+              <a:rPr sz="2000"/>
+              <a:t>暗黒物質が多く、ガスや星形成が少ない（雑音が少ない）</a:t>
+            </a:r>
+          </a:p>
+          <a:p>
+            <a:r>
+              <a:rPr sz="2400"/>
+              <a:t>暗黒物質なら、矮小銀河からも同じ 20 GeV の光が来るはず</a:t>
+            </a:r>
+          </a:p>
+          <a:p>
+            <a:r>
+              <a:rPr sz="2400"/>
+              <a:t>同じ手法を、各天体のまわり半径 10° に使った</a:t>
+            </a:r>
+          </a:p>
+          <a:p>
+            <a:pPr lvl="1"/>
+            <a:r>
+              <a:rPr sz="2000"/>
+              <a:t>矮小銀河 54 ＋ M31・M33 ＋ 何も無い空 23 か所</a:t>
+            </a:r>
+          </a:p>
+          <a:p>
+            <a:r>
+              <a:rPr sz="2400"/>
+              <a:t>矮小銀河は小さい（0.2〜0.4°）ので、広がった ICS とは縮退しない</a:t>
+            </a:r>
+          </a:p>
+        </p:txBody>
+      </p:sp>
+      <p:sp>
+        <p:nvSpPr>
+          <p:cNvPr id="8" name="TextBox 7">
+            <a:extLst>
+              <a:ext uri="{FF2B5EF4-FFF2-40B4-BE49-F238E27FC236}">
+                <a16:creationId xmlns:a16="http://schemas.microsoft.com/office/drawing/2014/main" id="{F85CD606-E3CE-F314-B3EE-F3D7028115CB}"/>
+              </a:ext>
+            </a:extLst>
+          </p:cNvPr>
           <p:cNvSpPr txBox="1"/>
           <p:nvPr/>
         </p:nvSpPr>
         <p:spPr>
           <a:xfrm>
-            <a:off x="457200" y="5486400"/>
-            <a:ext cx="11247120" cy="457200"/>
+            <a:off x="5837182" y="5663239"/>
+            <a:ext cx="6093372" cy="923330"/>
           </a:xfrm>
           <a:prstGeom prst="rect">
             <a:avLst/>
@@ -8030,9 +7845,14 @@
           <a:lstStyle/>
           <a:p>
             <a:r>
-              <a:rPr sz="2000"/>
-              <a:t>どのエネルギーでもばらつきは 1 より大きい（光子が十分ある範囲）</a:t>
-            </a:r>
+              <a:rPr lang="en-US" sz="1400" b="1"/>
+              <a:t>Reference:</a:t>
+            </a:r>
+            <a:r>
+              <a:rPr lang="en-US" sz="1400"/>
+              <a:t> A. B. Pace (2025), Open J. Astrophys. 8, 142</a:t>
+            </a:r>
+            <a:endParaRPr lang="en-US"/>
           </a:p>
         </p:txBody>
       </p:sp>
@@ -8078,7 +7898,7 @@
           <a:p>
             <a:r>
               <a:rPr sz="3400"/>
-              <a:t>③ を調べる：19.1σ が再現できない理由</a:t>
+              <a:t>予測の立て方：J ファクター</a:t>
             </a:r>
           </a:p>
         </p:txBody>
@@ -8096,7 +7916,7 @@
         <p:spPr>
           <a:xfrm>
             <a:off x="841248" y="1463040"/>
-            <a:ext cx="10515600" cy="4937760"/>
+            <a:ext cx="10515600" cy="4114800"/>
           </a:xfrm>
         </p:spPr>
         <p:txBody>
@@ -8105,26 +7925,79 @@
           <a:p>
             <a:r>
               <a:rPr sz="2400"/>
-              <a:t>7/23 の計算の直後にコードを直していて、当時の状態が残っていなかった</a:t>
+              <a:t>対消滅の明るさ：F = ⟨σv⟩ / (8π m²) × dN/dE × J</a:t>
             </a:r>
           </a:p>
           <a:p>
             <a:r>
               <a:rPr sz="2400"/>
-              <a:t>今のコードは、何度計算しても同じ答えになる（10/1 に確認）</a:t>
+              <a:t>J ファクター = 暗黒物質の密度の 2 乗を、視線方向に足し合わせた量</a:t>
             </a:r>
           </a:p>
           <a:p>
             <a:r>
               <a:rPr sz="2400"/>
-              <a:t>結果ファイルに、コードの版と設定を自動で記録するようにした</a:t>
+              <a:t>天の川と矮小銀河で粒子は同じ → 比をとると J の比だけが残る</a:t>
+            </a:r>
+          </a:p>
+          <a:p>
+            <a:pPr lvl="1"/>
+            <a:r>
+              <a:rPr sz="2000"/>
+              <a:t>F_矮小 = F_天の川 × J_矮小 / J_天の川</a:t>
             </a:r>
           </a:p>
           <a:p>
             <a:r>
               <a:rPr sz="2400"/>
-              <a:t>→ 主結果を 19.0σ（10/1 の再計算）に統一</a:t>
-            </a:r>
+              <a:t>粒子の質量などを仮定せずに「何σ見えるはずか」が出る</a:t>
+            </a:r>
+          </a:p>
+          <a:p>
+            <a:r>
+              <a:rPr sz="2400"/>
+              <a:t>矮小銀河の J は、星の動きから推定する</a:t>
+            </a:r>
+          </a:p>
+        </p:txBody>
+      </p:sp>
+      <p:sp>
+        <p:nvSpPr>
+          <p:cNvPr id="8" name="TextBox 7">
+            <a:extLst>
+              <a:ext uri="{FF2B5EF4-FFF2-40B4-BE49-F238E27FC236}">
+                <a16:creationId xmlns:a16="http://schemas.microsoft.com/office/drawing/2014/main" id="{F85CD606-E3CE-F314-B3EE-F3D7028115CB}"/>
+              </a:ext>
+            </a:extLst>
+          </p:cNvPr>
+          <p:cNvSpPr txBox="1"/>
+          <p:nvPr/>
+        </p:nvSpPr>
+        <p:spPr>
+          <a:xfrm>
+            <a:off x="5837182" y="5663239"/>
+            <a:ext cx="6093372" cy="923330"/>
+          </a:xfrm>
+          <a:prstGeom prst="rect">
+            <a:avLst/>
+          </a:prstGeom>
+          <a:noFill/>
+        </p:spPr>
+        <p:txBody>
+          <a:bodyPr wrap="square">
+            <a:spAutoFit/>
+          </a:bodyPr>
+          <a:lstStyle/>
+          <a:p>
+            <a:r>
+              <a:rPr lang="en-US" sz="1400" b="1"/>
+              <a:t>Reference:</a:t>
+            </a:r>
+            <a:r>
+              <a:rPr lang="en-US" sz="1400"/>
+              <a:t> A. B. Pace &amp; L. E. Strigari (2019), MNRAS 482, 3480</a:t>
+            </a:r>
+            <a:endParaRPr lang="en-US"/>
           </a:p>
         </p:txBody>
       </p:sp>
@@ -8170,59 +8043,60 @@
           <a:p>
             <a:r>
               <a:rPr sz="3400"/>
-              <a:t>ここまでのまとめ</a:t>
-            </a:r>
-          </a:p>
-        </p:txBody>
-      </p:sp>
-      <p:sp>
-        <p:nvSpPr>
-          <p:cNvPr id="3" name="Content Placeholder 2"/>
-          <p:cNvSpPr>
-            <a:spLocks noGrp="1"/>
-          </p:cNvSpPr>
-          <p:nvPr>
-            <p:ph idx="1"/>
-          </p:nvPr>
-        </p:nvSpPr>
+              <a:t>結果：どこにも信号は見えなかった</a:t>
+            </a:r>
+          </a:p>
+        </p:txBody>
+      </p:sp>
+      <p:pic>
+        <p:nvPicPr>
+          <p:cNvPr id="3" name="Picture 2" descr="fig_dwarf_results.png"/>
+          <p:cNvPicPr>
+            <a:picLocks noChangeAspect="1"/>
+          </p:cNvPicPr>
+          <p:nvPr/>
+        </p:nvPicPr>
+        <p:blipFill>
+          <a:blip r:embed="rId3"/>
+          <a:stretch>
+            <a:fillRect/>
+          </a:stretch>
+        </p:blipFill>
         <p:spPr>
           <a:xfrm>
-            <a:off x="841248" y="1463040"/>
-            <a:ext cx="10515600" cy="4937760"/>
+            <a:off x="2194560" y="1234440"/>
+            <a:ext cx="7156174" cy="4114800"/>
           </a:xfrm>
+          <a:prstGeom prst="rect">
+            <a:avLst/>
+          </a:prstGeom>
         </p:spPr>
-        <p:txBody>
-          <a:bodyPr/>
-          <a:lstStyle/>
-          <a:p>
-            <a:r>
-              <a:rPr sz="2400"/>
-              <a:t>ICS の明るさ・バブル・計算の近似の間違いでは、超過を説明できない</a:t>
-            </a:r>
-          </a:p>
-          <a:p>
-            <a:r>
-              <a:rPr sz="2400"/>
-              <a:t>σ は 1.26 倍の過大評価 → 較正すると約 15σ</a:t>
-            </a:r>
-          </a:p>
-          <a:p>
-            <a:r>
-              <a:rPr sz="2400"/>
-              <a:t>ただし、暗黒物質の証拠ではない</a:t>
-            </a:r>
-          </a:p>
-          <a:p>
-            <a:pPr lvl="1"/>
+      </p:pic>
+      <p:sp>
+        <p:nvSpPr>
+          <p:cNvPr id="4" name="TextBox 3"/>
+          <p:cNvSpPr txBox="1"/>
+          <p:nvPr/>
+        </p:nvSpPr>
+        <p:spPr>
+          <a:xfrm>
+            <a:off x="457200" y="5486400"/>
+            <a:ext cx="11247120" cy="457200"/>
+          </a:xfrm>
+          <a:prstGeom prst="rect">
+            <a:avLst/>
+          </a:prstGeom>
+          <a:noFill/>
+        </p:spPr>
+        <p:txBody>
+          <a:bodyPr wrap="square">
+            <a:spAutoFit/>
+          </a:bodyPr>
+          <a:lstStyle/>
+          <a:p>
             <a:r>
               <a:rPr sz="2000"/>
-              <a:t>ICS の「空間の形」の間違いは否定できていない</a:t>
-            </a:r>
-          </a:p>
-          <a:p>
-            <a:r>
-              <a:rPr sz="2400"/>
-              <a:t>→ 独立な確認として、矮小銀河を見る</a:t>
+              <a:t>どの天体・どのエネルギーでも最大 +3.46σ（何も無い空でも 4.50σ）</a:t>
             </a:r>
           </a:p>
         </p:txBody>
@@ -8446,7 +8320,7 @@
           <a:p>
             <a:r>
               <a:rPr sz="3400"/>
-              <a:t>矮小銀河で確かめる</a:t>
+              <a:t>天体をまとめて比べる</a:t>
             </a:r>
           </a:p>
         </p:txBody>
@@ -8464,7 +8338,7 @@
         <p:spPr>
           <a:xfrm>
             <a:off x="841248" y="1463040"/>
-            <a:ext cx="10515600" cy="4114800"/>
+            <a:ext cx="10515600" cy="4937760"/>
           </a:xfrm>
         </p:spPr>
         <p:txBody>
@@ -8473,80 +8347,45 @@
           <a:p>
             <a:r>
               <a:rPr sz="2400"/>
-              <a:t>矮小銀河：天の川のまわりの小さな銀河</a:t>
+              <a:t>1 個ずつでは弱いので、J が求まる 43 天体をまとめる</a:t>
+            </a:r>
+          </a:p>
+          <a:p>
+            <a:r>
+              <a:rPr sz="2400"/>
+              <a:t>T = Σ w_i z_i / √( Σ w_i² )、重み w_i = 天体 i の予測 σ</a:t>
             </a:r>
           </a:p>
           <a:p>
             <a:pPr lvl="1"/>
             <a:r>
               <a:rPr sz="2000"/>
-              <a:t>暗黒物質が多く、ガスや星形成が少ない（雑音が少ない）</a:t>
+              <a:t>z_i：天体 i の実測の σ（20 GeV）</a:t>
             </a:r>
           </a:p>
           <a:p>
             <a:r>
               <a:rPr sz="2400"/>
-              <a:t>暗黒物質なら、矮小銀河からも同じ 20 GeV の光が来るはず</a:t>
+              <a:t>暗黒物質が無ければ：T は平均 0、ばらつき 1</a:t>
             </a:r>
           </a:p>
           <a:p>
             <a:r>
               <a:rPr sz="2400"/>
-              <a:t>同じ手法を、各天体のまわり半径 10° に使った</a:t>
-            </a:r>
-          </a:p>
-          <a:p>
-            <a:pPr lvl="1"/>
-            <a:r>
-              <a:rPr sz="2000"/>
-              <a:t>矮小銀河 54 ＋ M31・M33 ＋ 何も無い空 23 か所</a:t>
+              <a:t>暗黒物質があれば：T の平均 = √( Σ pred_i² ) = 1.73</a:t>
             </a:r>
           </a:p>
           <a:p>
             <a:r>
               <a:rPr sz="2400"/>
-              <a:t>矮小銀河は小さい（0.2〜0.4°）ので、広がった ICS とは縮退しない</a:t>
-            </a:r>
-          </a:p>
-        </p:txBody>
-      </p:sp>
-      <p:sp>
-        <p:nvSpPr>
-          <p:cNvPr id="8" name="TextBox 7">
-            <a:extLst>
-              <a:ext uri="{FF2B5EF4-FFF2-40B4-BE49-F238E27FC236}">
-                <a16:creationId xmlns:a16="http://schemas.microsoft.com/office/drawing/2014/main" id="{F85CD606-E3CE-F314-B3EE-F3D7028115CB}"/>
-              </a:ext>
-            </a:extLst>
-          </p:cNvPr>
-          <p:cNvSpPr txBox="1"/>
-          <p:nvPr/>
-        </p:nvSpPr>
-        <p:spPr>
-          <a:xfrm>
-            <a:off x="5837182" y="5663239"/>
-            <a:ext cx="6093372" cy="923330"/>
-          </a:xfrm>
-          <a:prstGeom prst="rect">
-            <a:avLst/>
-          </a:prstGeom>
-          <a:noFill/>
-        </p:spPr>
-        <p:txBody>
-          <a:bodyPr wrap="square">
-            <a:spAutoFit/>
-          </a:bodyPr>
-          <a:lstStyle/>
-          <a:p>
-            <a:r>
-              <a:rPr lang="en-US" sz="1400" b="1"/>
-              <a:t>Reference:</a:t>
-            </a:r>
-            <a:r>
-              <a:rPr lang="en-US" sz="1400"/>
-              <a:t> A. B. Pace (2025), Open J. Astrophys. 8, 142</a:t>
-            </a:r>
-            <a:endParaRPr lang="en-US"/>
+              <a:t>実測 T = 0.39 → ずれ 1.3σ</a:t>
+            </a:r>
+          </a:p>
+          <a:p>
+            <a:r>
+              <a:rPr sz="2400"/>
+              <a:t>ただし、ここでは J に誤差は無いとしていた</a:t>
+            </a:r>
           </a:p>
         </p:txBody>
       </p:sp>
@@ -8592,7 +8431,7 @@
           <a:p>
             <a:r>
               <a:rPr sz="3400"/>
-              <a:t>予測の立て方：J ファクター</a:t>
+              <a:t>ここで論文：J の誤差は小さく見積もられている</a:t>
             </a:r>
           </a:p>
         </p:txBody>
@@ -8619,38 +8458,40 @@
           <a:p>
             <a:r>
               <a:rPr sz="2400"/>
-              <a:t>対消滅の明るさ：F = ⟨σv⟩ / (8π m²) × dN/dE × J</a:t>
+              <a:t>文献ごとの J の値は、書かれた誤差よりも大きくばらつく</a:t>
             </a:r>
           </a:p>
           <a:p>
             <a:r>
               <a:rPr sz="2400"/>
-              <a:t>J ファクター = 暗黒物質の密度の 2 乗を、視線方向に足し合わせた量</a:t>
+              <a:t>見落とされがちな誤差の原因（8 つ）</a:t>
+            </a:r>
+          </a:p>
+          <a:p>
+            <a:pPr lvl="1"/>
+            <a:r>
+              <a:rPr sz="2000"/>
+              <a:t>点として扱う・ハローの形・星の分布の形の仮定</a:t>
+            </a:r>
+          </a:p>
+          <a:p>
+            <a:pPr lvl="1"/>
+            <a:r>
+              <a:rPr sz="2000"/>
+              <a:t>非球対称（最大 0.4 dex）・非平衡（〜0.1）・連星（Ret II で〜0.3）</a:t>
+            </a:r>
+          </a:p>
+          <a:p>
+            <a:pPr lvl="1"/>
+            <a:r>
+              <a:rPr sz="2000"/>
+              <a:t>前景の星の混入・誤差の分布が正規分布でない</a:t>
             </a:r>
           </a:p>
           <a:p>
             <a:r>
               <a:rPr sz="2400"/>
-              <a:t>天の川と矮小銀河で粒子は同じ → 比をとると J の比だけが残る</a:t>
-            </a:r>
-          </a:p>
-          <a:p>
-            <a:pPr lvl="1"/>
-            <a:r>
-              <a:rPr sz="2000"/>
-              <a:t>F_矮小 = F_天の川 × J_矮小 / J_天の川</a:t>
-            </a:r>
-          </a:p>
-          <a:p>
-            <a:r>
-              <a:rPr sz="2400"/>
-              <a:t>粒子の質量などを仮定せずに「何σ見えるはずか」が出る</a:t>
-            </a:r>
-          </a:p>
-          <a:p>
-            <a:r>
-              <a:rPr sz="2400"/>
-              <a:t>矮小銀河の J は、星の動きから推定する</a:t>
+              <a:t>Δlog₁₀J ≈ 0.5（約 3 倍）以上の誤差を見込むべき</a:t>
             </a:r>
           </a:p>
         </p:txBody>
@@ -8689,7 +8530,7 @@
             </a:r>
             <a:r>
               <a:rPr lang="en-US" sz="1400"/>
-              <a:t> A. B. Pace &amp; L. E. Strigari (2019), MNRAS 482, 3480</a:t>
+              <a:t> Bertólez-Martínez, Hooper &amp; Khatee Zathul (2026), arXiv:2609.20944 §II</a:t>
             </a:r>
             <a:endParaRPr lang="en-US"/>
           </a:p>
@@ -8737,45 +8578,93 @@
           <a:p>
             <a:r>
               <a:rPr sz="3400"/>
-              <a:t>結果：どこにも信号は見えなかった</a:t>
-            </a:r>
-          </a:p>
-        </p:txBody>
-      </p:sp>
-      <p:pic>
-        <p:nvPicPr>
-          <p:cNvPr id="3" name="Picture 2" descr="fig_dwarf_results.png"/>
-          <p:cNvPicPr>
-            <a:picLocks noChangeAspect="1"/>
-          </p:cNvPicPr>
-          <p:nvPr/>
-        </p:nvPicPr>
-        <p:blipFill>
-          <a:blip r:embed="rId3"/>
-          <a:stretch>
-            <a:fillRect/>
-          </a:stretch>
-        </p:blipFill>
+              <a:t>詳細なmethodについて①：仮想データの作り方</a:t>
+            </a:r>
+          </a:p>
+        </p:txBody>
+      </p:sp>
+      <p:sp>
+        <p:nvSpPr>
+          <p:cNvPr id="3" name="Content Placeholder 2"/>
+          <p:cNvSpPr>
+            <a:spLocks noGrp="1"/>
+          </p:cNvSpPr>
+          <p:nvPr>
+            <p:ph idx="1"/>
+          </p:nvPr>
+        </p:nvSpPr>
         <p:spPr>
           <a:xfrm>
-            <a:off x="2194560" y="1234440"/>
-            <a:ext cx="7156174" cy="4114800"/>
+            <a:off x="841248" y="1463040"/>
+            <a:ext cx="10515600" cy="4114800"/>
           </a:xfrm>
-          <a:prstGeom prst="rect">
-            <a:avLst/>
-          </a:prstGeom>
         </p:spPr>
-      </p:pic>
-      <p:sp>
-        <p:nvSpPr>
-          <p:cNvPr id="4" name="TextBox 3"/>
+        <p:txBody>
+          <a:bodyPr/>
+          <a:lstStyle/>
+          <a:p>
+            <a:r>
+              <a:rPr sz="2200"/>
+              <a:t>Fermi-LAT の観測を計算機の中で作る（FermiTools、fermipy）</a:t>
+            </a:r>
+          </a:p>
+          <a:p>
+            <a:pPr lvl="1"/>
+            <a:r>
+              <a:rPr sz="1800"/>
+              <a:t>17.4 年分、0.5 GeV〜1 TeV、10° × 10° の領域、0.08° の画素</a:t>
+            </a:r>
+          </a:p>
+          <a:p>
+            <a:r>
+              <a:rPr sz="2200"/>
+              <a:t>背景：銀河の拡散光＋等方の光から、ポアソン乱数で光子を作る</a:t>
+            </a:r>
+          </a:p>
+          <a:p>
+            <a:r>
+              <a:rPr sz="2200"/>
+              <a:t>暗黒物質の信号を入れる</a:t>
+            </a:r>
+          </a:p>
+          <a:p>
+            <a:pPr lvl="1"/>
+            <a:r>
+              <a:rPr sz="1800"/>
+              <a:t>質量 42 GeV、b クォーク対、⟨σv⟩ = 1.4 × 10⁻²⁶ cm³/s</a:t>
+            </a:r>
+          </a:p>
+          <a:p>
+            <a:pPr lvl="1"/>
+            <a:r>
+              <a:rPr sz="1800"/>
+              <a:t>銀河中心 GeV 超過（GCE）に合う値</a:t>
+            </a:r>
+          </a:p>
+          <a:p>
+            <a:r>
+              <a:rPr sz="2200"/>
+              <a:t>対象：Ursa Minor 1 個と、27 個の矮小銀河</a:t>
+            </a:r>
+          </a:p>
+        </p:txBody>
+      </p:sp>
+      <p:sp>
+        <p:nvSpPr>
+          <p:cNvPr id="8" name="TextBox 7">
+            <a:extLst>
+              <a:ext uri="{FF2B5EF4-FFF2-40B4-BE49-F238E27FC236}">
+                <a16:creationId xmlns:a16="http://schemas.microsoft.com/office/drawing/2014/main" id="{F85CD606-E3CE-F314-B3EE-F3D7028115CB}"/>
+              </a:ext>
+            </a:extLst>
+          </p:cNvPr>
           <p:cNvSpPr txBox="1"/>
           <p:nvPr/>
         </p:nvSpPr>
         <p:spPr>
           <a:xfrm>
-            <a:off x="457200" y="5486400"/>
-            <a:ext cx="11247120" cy="457200"/>
+            <a:off x="5837182" y="5663239"/>
+            <a:ext cx="6093372" cy="923330"/>
           </a:xfrm>
           <a:prstGeom prst="rect">
             <a:avLst/>
@@ -8789,9 +8678,14 @@
           <a:lstStyle/>
           <a:p>
             <a:r>
-              <a:rPr sz="2000"/>
-              <a:t>どの天体・どのエネルギーでも最大 +3.46σ（何も無い空でも 4.50σ）</a:t>
-            </a:r>
+              <a:rPr lang="en-US" sz="1400" b="1"/>
+              <a:t>Reference:</a:t>
+            </a:r>
+            <a:r>
+              <a:rPr lang="en-US" sz="1400"/>
+              <a:t> Bertólez-Martínez, Hooper &amp; Khatee Zathul (2026), arXiv:2609.20944 §III</a:t>
+            </a:r>
+            <a:endParaRPr lang="en-US"/>
           </a:p>
         </p:txBody>
       </p:sp>
@@ -8837,7 +8731,7 @@
           <a:p>
             <a:r>
               <a:rPr sz="3400"/>
-              <a:t>天体をまとめて比べる</a:t>
+              <a:t>詳細なmethodについて②：尤度と 2 つの誤差</a:t>
             </a:r>
           </a:p>
         </p:txBody>
@@ -8855,7 +8749,7 @@
         <p:spPr>
           <a:xfrm>
             <a:off x="841248" y="1463040"/>
-            <a:ext cx="10515600" cy="4937760"/>
+            <a:ext cx="10515600" cy="4114800"/>
           </a:xfrm>
         </p:spPr>
         <p:txBody>
@@ -8863,46 +8757,88 @@
           <a:lstStyle/>
           <a:p>
             <a:r>
-              <a:rPr sz="2400"/>
-              <a:t>1 個ずつでは弱いので、J が求まる 43 天体をまとめる</a:t>
-            </a:r>
-          </a:p>
-          <a:p>
-            <a:r>
-              <a:rPr sz="2400"/>
-              <a:t>T = Σ w_i z_i / √( Σ w_i² )、重み w_i = 天体 i の予測 σ</a:t>
+              <a:rPr sz="2200"/>
+              <a:t>各天体の尤度 = 光子のポアソン尤度 × J の尤度</a:t>
             </a:r>
           </a:p>
           <a:p>
             <a:pPr lvl="1"/>
             <a:r>
-              <a:rPr sz="2000"/>
-              <a:t>z_i：天体 i の実測の σ（20 GeV）</a:t>
-            </a:r>
-          </a:p>
-          <a:p>
-            <a:r>
-              <a:rPr sz="2400"/>
-              <a:t>暗黒物質が無ければ：T は平均 0、ばらつき 1</a:t>
-            </a:r>
-          </a:p>
-          <a:p>
-            <a:r>
-              <a:rPr sz="2400"/>
-              <a:t>暗黒物質があれば：T の平均 = √( Σ pred_i² ) = 1.73</a:t>
-            </a:r>
-          </a:p>
-          <a:p>
-            <a:r>
-              <a:rPr sz="2400"/>
-              <a:t>実測 T = 0.39 → ずれ 1.3σ</a:t>
-            </a:r>
-          </a:p>
-          <a:p>
-            <a:r>
-              <a:rPr sz="2400"/>
-              <a:t>ただし、ここでは J に誤差は無いとしていた</a:t>
-            </a:r>
+              <a:rPr sz="1800"/>
+              <a:t>L_J ∝ exp[ −(log₁₀J − log₁₀J_obs)² / 2σ_L² ]</a:t>
+            </a:r>
+          </a:p>
+          <a:p>
+            <a:r>
+              <a:rPr sz="2200"/>
+              <a:t>27 個は尤度の積でまとめる（⟨σv⟩ は共通、J は天体ごと）</a:t>
+            </a:r>
+          </a:p>
+          <a:p>
+            <a:r>
+              <a:rPr sz="2200"/>
+              <a:t>2 つの誤差を分けて動かす</a:t>
+            </a:r>
+          </a:p>
+          <a:p>
+            <a:pPr lvl="1"/>
+            <a:r>
+              <a:rPr sz="1800"/>
+              <a:t>σ：J の本当のばらつき（J_obs を J_true のまわりに σ でばらつかせる）</a:t>
+            </a:r>
+          </a:p>
+          <a:p>
+            <a:pPr lvl="1"/>
+            <a:r>
+              <a:rPr sz="1800"/>
+              <a:t>σ_L：解析で仮定する幅</a:t>
+            </a:r>
+          </a:p>
+          <a:p>
+            <a:r>
+              <a:rPr sz="2200"/>
+              <a:t>95% 上限：TS が最大値から 2.71 下がる点（Wilks の定理を仮定）</a:t>
+            </a:r>
+          </a:p>
+        </p:txBody>
+      </p:sp>
+      <p:sp>
+        <p:nvSpPr>
+          <p:cNvPr id="8" name="TextBox 7">
+            <a:extLst>
+              <a:ext uri="{FF2B5EF4-FFF2-40B4-BE49-F238E27FC236}">
+                <a16:creationId xmlns:a16="http://schemas.microsoft.com/office/drawing/2014/main" id="{F85CD606-E3CE-F314-B3EE-F3D7028115CB}"/>
+              </a:ext>
+            </a:extLst>
+          </p:cNvPr>
+          <p:cNvSpPr txBox="1"/>
+          <p:nvPr/>
+        </p:nvSpPr>
+        <p:spPr>
+          <a:xfrm>
+            <a:off x="5837182" y="5663239"/>
+            <a:ext cx="6093372" cy="923330"/>
+          </a:xfrm>
+          <a:prstGeom prst="rect">
+            <a:avLst/>
+          </a:prstGeom>
+          <a:noFill/>
+        </p:spPr>
+        <p:txBody>
+          <a:bodyPr wrap="square">
+            <a:spAutoFit/>
+          </a:bodyPr>
+          <a:lstStyle/>
+          <a:p>
+            <a:r>
+              <a:rPr lang="en-US" sz="1400" b="1"/>
+              <a:t>Reference:</a:t>
+            </a:r>
+            <a:r>
+              <a:rPr lang="en-US" sz="1400"/>
+              <a:t> Bertólez-Martínez, Hooper &amp; Khatee Zathul (2026), arXiv:2609.20944 式 (6)–(10)</a:t>
+            </a:r>
+            <a:endParaRPr lang="en-US"/>
           </a:p>
         </p:txBody>
       </p:sp>
@@ -8948,7 +8884,7 @@
           <a:p>
             <a:r>
               <a:rPr sz="3400"/>
-              <a:t>ここで論文：J の誤差は小さく見積もられている</a:t>
+              <a:t>詳細なmethodについて③：何を数えたか</a:t>
             </a:r>
           </a:p>
         </p:txBody>
@@ -8975,40 +8911,39 @@
           <a:p>
             <a:r>
               <a:rPr sz="2400"/>
-              <a:t>文献ごとの J の値は、書かれた誤差よりも大きくばらつく</a:t>
+              <a:t>本物の信号を入れた仮想データを何度も作る</a:t>
+            </a:r>
+          </a:p>
+          <a:p>
+            <a:pPr lvl="1"/>
+            <a:r>
+              <a:rPr sz="2000"/>
+              <a:t>Ursa Minor で 1000 回（基準の設定では 1 万回）</a:t>
             </a:r>
           </a:p>
           <a:p>
             <a:r>
               <a:rPr sz="2400"/>
-              <a:t>見落とされがちな誤差の原因（8 つ）</a:t>
+              <a:t>それぞれで 95% 上限を出す</a:t>
+            </a:r>
+          </a:p>
+          <a:p>
+            <a:r>
+              <a:rPr sz="2400"/>
+              <a:t>上限が本物の ⟨σv⟩ より下 =「本物を無いと間違えた」</a:t>
+            </a:r>
+          </a:p>
+          <a:p>
+            <a:r>
+              <a:rPr sz="2400"/>
+              <a:t>95% 上限なら、間違いは 5% 以下のはず</a:t>
             </a:r>
           </a:p>
           <a:p>
             <a:pPr lvl="1"/>
             <a:r>
               <a:rPr sz="2000"/>
-              <a:t>点として扱う・ハローの形・星の分布の形の仮定</a:t>
-            </a:r>
-          </a:p>
-          <a:p>
-            <a:pPr lvl="1"/>
-            <a:r>
-              <a:rPr sz="2000"/>
-              <a:t>非球対称（最大 0.4 dex）・非平衡（〜0.1）・連星（Ret II で〜0.3）</a:t>
-            </a:r>
-          </a:p>
-          <a:p>
-            <a:pPr lvl="1"/>
-            <a:r>
-              <a:rPr sz="2000"/>
-              <a:t>前景の星の混入・誤差の分布が正規分布でない</a:t>
-            </a:r>
-          </a:p>
-          <a:p>
-            <a:r>
-              <a:rPr sz="2400"/>
-              <a:t>Δlog₁₀J ≈ 0.5（約 3 倍）以上の誤差を見込むべき</a:t>
+              <a:t>これが守られているか（カバレッジ）を調べる</a:t>
             </a:r>
           </a:p>
         </p:txBody>
@@ -9047,7 +8982,7 @@
             </a:r>
             <a:r>
               <a:rPr lang="en-US" sz="1400"/>
-              <a:t> Bertólez-Martínez, Hooper &amp; Khatee Zathul (2026), arXiv:2609.20944 §II</a:t>
+              <a:t> Bertólez-Martínez, Hooper &amp; Khatee Zathul (2026), arXiv:2609.20944 §IV</a:t>
             </a:r>
             <a:endParaRPr lang="en-US"/>
           </a:p>
@@ -9095,7 +9030,7 @@
           <a:p>
             <a:r>
               <a:rPr sz="3400"/>
-              <a:t>詳細なmethodについて①：仮想データの作り方</a:t>
+              <a:t>論文の結果①：Ursa Minor 1 個</a:t>
             </a:r>
           </a:p>
         </p:txBody>
@@ -9121,47 +9056,48 @@
           <a:lstStyle/>
           <a:p>
             <a:r>
-              <a:rPr sz="2200"/>
-              <a:t>Fermi-LAT の観測を計算機の中で作る（FermiTools、fermipy）</a:t>
+              <a:rPr sz="2400"/>
+              <a:t>σ_L を 0.3 / 0.5 / 1.0 だけ大きくすると</a:t>
             </a:r>
           </a:p>
           <a:p>
             <a:pPr lvl="1"/>
             <a:r>
-              <a:rPr sz="1800"/>
-              <a:t>17.4 年分、0.5 GeV〜1 TeV、10° × 10° の領域、0.08° の画素</a:t>
-            </a:r>
-          </a:p>
-          <a:p>
-            <a:r>
-              <a:rPr sz="2200"/>
-              <a:t>背景：銀河の拡散光＋等方の光から、ポアソン乱数で光子を作る</a:t>
-            </a:r>
-          </a:p>
-          <a:p>
-            <a:r>
-              <a:rPr sz="2200"/>
-              <a:t>暗黒物質の信号を入れる</a:t>
+              <a:rPr sz="2000"/>
+              <a:t>上限が 1.5 / 2.5 / 11 倍ゆるくなる</a:t>
+            </a:r>
+          </a:p>
+          <a:p>
+            <a:r>
+              <a:rPr sz="2400"/>
+              <a:t>本当の誤差 σ だけ大きく、σ_L は小さいままだと</a:t>
             </a:r>
           </a:p>
           <a:p>
             <a:pPr lvl="1"/>
             <a:r>
-              <a:rPr sz="1800"/>
-              <a:t>質量 42 GeV、b クォーク対、⟨σv⟩ = 1.4 × 10⁻²⁶ cm³/s</a:t>
+              <a:rPr sz="2000"/>
+              <a:t>本物を除外する割合 1.7% / 8.0% / 22%</a:t>
             </a:r>
           </a:p>
           <a:p>
             <a:pPr lvl="1"/>
             <a:r>
-              <a:rPr sz="1800"/>
-              <a:t>銀河中心 GeV 超過（GCE）に合う値</a:t>
-            </a:r>
-          </a:p>
-          <a:p>
-            <a:r>
-              <a:rPr sz="2200"/>
-              <a:t>対象：Ursa Minor 1 個と、27 個の矮小銀河</a:t>
+              <a:rPr sz="2000"/>
+              <a:t>σ_L を σ に合わせれば 5% 以下に戻る</a:t>
+            </a:r>
+          </a:p>
+          <a:p>
+            <a:r>
+              <a:rPr sz="2400"/>
+              <a:t>形の間違い：球対称 NFW で解析 → 上限 2.4 倍厳しく</a:t>
+            </a:r>
+          </a:p>
+          <a:p>
+            <a:pPr lvl="1"/>
+            <a:r>
+              <a:rPr sz="2000"/>
+              <a:t>点として扱う → 1.4 倍厳しく</a:t>
             </a:r>
           </a:p>
         </p:txBody>
@@ -9200,7 +9136,7 @@
             </a:r>
             <a:r>
               <a:rPr lang="en-US" sz="1400"/>
-              <a:t> Bertólez-Martínez, Hooper &amp; Khatee Zathul (2026), arXiv:2609.20944 §III</a:t>
+              <a:t> Bertólez-Martínez, Hooper &amp; Khatee Zathul (2026), arXiv:2609.20944 §IV, Fig. 2–4</a:t>
             </a:r>
             <a:endParaRPr lang="en-US"/>
           </a:p>
@@ -9248,7 +9184,7 @@
           <a:p>
             <a:r>
               <a:rPr sz="3400"/>
-              <a:t>詳細なmethodについて②：尤度と 2 つの誤差</a:t>
+              <a:t>論文の結果②：27 個をまとめると</a:t>
             </a:r>
           </a:p>
         </p:txBody>
@@ -9275,46 +9211,45 @@
           <a:p>
             <a:r>
               <a:rPr sz="2200"/>
-              <a:t>各天体の尤度 = 光子のポアソン尤度 × J の尤度</a:t>
+              <a:t>σ_L を 0.3 / 0.5 / 1.0 → 上限 1.14 / 1.44 / 3.23 倍ゆるく</a:t>
+            </a:r>
+          </a:p>
+          <a:p>
+            <a:r>
+              <a:rPr sz="2200"/>
+              <a:t>誤差を正しく入れても、本物を除外する割合 21%（5% のはず）</a:t>
             </a:r>
           </a:p>
           <a:p>
             <a:pPr lvl="1"/>
             <a:r>
               <a:rPr sz="1800"/>
-              <a:t>L_J ∝ exp[ −(log₁₀J − log₁₀J_obs)² / 2σ_L² ]</a:t>
+              <a:t>J の数が天体の数と一緒に増え、Wilks の定理の前提が崩れる</a:t>
             </a:r>
           </a:p>
           <a:p>
             <a:r>
               <a:rPr sz="2200"/>
-              <a:t>27 個は尤度の積でまとめる（⟨σv⟩ は共通、J は天体ごと）</a:t>
+              <a:t>本当の誤差を 0.3 / 0.5 / 1.0 大きくすると 31% / 49% / 88%</a:t>
+            </a:r>
+          </a:p>
+          <a:p>
+            <a:pPr lvl="1"/>
+            <a:r>
+              <a:rPr sz="1800"/>
+              <a:t>σ_L を合わせても 23% / 28% / 38%</a:t>
             </a:r>
           </a:p>
           <a:p>
             <a:r>
               <a:rPr sz="2200"/>
-              <a:t>2 つの誤差を分けて動かす</a:t>
-            </a:r>
-          </a:p>
-          <a:p>
-            <a:pPr lvl="1"/>
-            <a:r>
-              <a:rPr sz="1800"/>
-              <a:t>σ：J の本当のばらつき（J_obs を J_true のまわりに σ でばらつかせる）</a:t>
-            </a:r>
-          </a:p>
-          <a:p>
-            <a:pPr lvl="1"/>
-            <a:r>
-              <a:rPr sz="1800"/>
-              <a:t>σ_L：解析で仮定する幅</a:t>
+              <a:t>原因：J が上に振れた天体が、上限を決めてしまう</a:t>
             </a:r>
           </a:p>
           <a:p>
             <a:r>
               <a:rPr sz="2200"/>
-              <a:t>95% 上限：TS が最大値から 2.71 下がる点（Wilks の定理を仮定）</a:t>
+              <a:t>対策の一つ：何も無い領域で較正する</a:t>
             </a:r>
           </a:p>
         </p:txBody>
@@ -9353,7 +9288,7 @@
             </a:r>
             <a:r>
               <a:rPr lang="en-US" sz="1400"/>
-              <a:t> Bertólez-Martínez, Hooper &amp; Khatee Zathul (2026), arXiv:2609.20944 式 (6)–(10)</a:t>
+              <a:t> Bertólez-Martínez, Hooper &amp; Khatee Zathul (2026), arXiv:2609.20944 §V, Fig. 5–7</a:t>
             </a:r>
             <a:endParaRPr lang="en-US"/>
           </a:p>
@@ -9401,7 +9336,7 @@
           <a:p>
             <a:r>
               <a:rPr sz="3400"/>
-              <a:t>詳細なmethodについて③：何を数えたか</a:t>
+              <a:t>論文のまとめ</a:t>
             </a:r>
           </a:p>
         </p:txBody>
@@ -9428,39 +9363,19 @@
           <a:p>
             <a:r>
               <a:rPr sz="2400"/>
-              <a:t>本物の信号を入れた仮想データを何度も作る</a:t>
-            </a:r>
-          </a:p>
-          <a:p>
-            <a:pPr lvl="1"/>
-            <a:r>
-              <a:rPr sz="2000"/>
-              <a:t>Ursa Minor で 1000 回（基準の設定では 1 万回）</a:t>
+              <a:t>J の誤差や形を雑に扱うと、上限は厳しく出すぎ、本物の信号を除外しやすい</a:t>
             </a:r>
           </a:p>
           <a:p>
             <a:r>
               <a:rPr sz="2400"/>
-              <a:t>それぞれで 95% 上限を出す</a:t>
+              <a:t>「銀河中心と矮小銀河が矛盾する」とは、まだ言えない</a:t>
             </a:r>
           </a:p>
           <a:p>
             <a:r>
               <a:rPr sz="2400"/>
-              <a:t>上限が本物の ⟨σv⟩ より下 =「本物を無いと間違えた」</a:t>
-            </a:r>
-          </a:p>
-          <a:p>
-            <a:r>
-              <a:rPr sz="2400"/>
-              <a:t>95% 上限なら、間違いは 5% 以下のはず</a:t>
-            </a:r>
-          </a:p>
-          <a:p>
-            <a:pPr lvl="1"/>
-            <a:r>
-              <a:rPr sz="2000"/>
-              <a:t>これが守られているか（カバレッジ）を調べる</a:t>
+              <a:t>Δlog₁₀J ≈ 0.5 程度の誤差を見込むべき</a:t>
             </a:r>
           </a:p>
         </p:txBody>
@@ -9499,7 +9414,7 @@
             </a:r>
             <a:r>
               <a:rPr lang="en-US" sz="1400"/>
-              <a:t> Bertólez-Martínez, Hooper &amp; Khatee Zathul (2026), arXiv:2609.20944 §IV</a:t>
+              <a:t> Bertólez-Martínez, Hooper &amp; Khatee Zathul (2026), arXiv:2609.20944 §VI</a:t>
             </a:r>
             <a:endParaRPr lang="en-US"/>
           </a:p>
@@ -9547,7 +9462,7 @@
           <a:p>
             <a:r>
               <a:rPr sz="3400"/>
-              <a:t>論文の結果①：Ursa Minor 1 個</a:t>
+              <a:t>論文の考え方を、僕の結果に当てはめる</a:t>
             </a:r>
           </a:p>
         </p:txBody>
@@ -9574,47 +9489,39 @@
           <a:p>
             <a:r>
               <a:rPr sz="2400"/>
-              <a:t>σ_L を 0.3 / 0.5 / 1.0 だけ大きくすると</a:t>
+              <a:t>これまで：J の誤差 = 0（J は推定値そのまま）</a:t>
+            </a:r>
+          </a:p>
+          <a:p>
+            <a:r>
+              <a:rPr sz="2400"/>
+              <a:t>今回：各天体の本当の J = 推定値 × 10^δ_i</a:t>
             </a:r>
           </a:p>
           <a:p>
             <a:pPr lvl="1"/>
             <a:r>
               <a:rPr sz="2000"/>
-              <a:t>上限が 1.5 / 2.5 / 11 倍ゆるくなる</a:t>
+              <a:t>δ_i は平均 0、幅 0.5 の正規分布（天体ごとに独立）</a:t>
+            </a:r>
+          </a:p>
+          <a:p>
+            <a:pPr lvl="1"/>
+            <a:r>
+              <a:rPr sz="2000"/>
+              <a:t>→ J がおよそ 1/3 倍〜3 倍の範囲でずれる</a:t>
             </a:r>
           </a:p>
           <a:p>
             <a:r>
               <a:rPr sz="2400"/>
-              <a:t>本当の誤差 σ だけ大きく、σ_L は小さいままだと</a:t>
-            </a:r>
-          </a:p>
-          <a:p>
-            <a:pPr lvl="1"/>
-            <a:r>
-              <a:rPr sz="2000"/>
-              <a:t>本物を除外する割合 1.7% / 8.0% / 22%</a:t>
-            </a:r>
-          </a:p>
-          <a:p>
-            <a:pPr lvl="1"/>
-            <a:r>
-              <a:rPr sz="2000"/>
-              <a:t>σ_L を σ に合わせれば 5% 以下に戻る</a:t>
+              <a:t>予測 σ は J に比例 → pred_i × 10^δ_i</a:t>
             </a:r>
           </a:p>
           <a:p>
             <a:r>
               <a:rPr sz="2400"/>
-              <a:t>形の間違い：球対称 NFW で解析 → 上限 2.4 倍厳しく</a:t>
-            </a:r>
-          </a:p>
-          <a:p>
-            <a:pPr lvl="1"/>
-            <a:r>
-              <a:rPr sz="2000"/>
-              <a:t>点として扱う → 1.4 倍厳しく</a:t>
+              <a:t>論文と同じく「J をずらした世界」をたくさん作る（20 万回）</a:t>
             </a:r>
           </a:p>
         </p:txBody>
@@ -9653,7 +9560,7 @@
             </a:r>
             <a:r>
               <a:rPr lang="en-US" sz="1400"/>
-              <a:t> Bertólez-Martínez, Hooper &amp; Khatee Zathul (2026), arXiv:2609.20944 §IV, Fig. 2–4</a:t>
+              <a:t> Bertólez-Martínez, Hooper &amp; Khatee Zathul (2026), arXiv:2609.20944 §IV</a:t>
             </a:r>
             <a:endParaRPr lang="en-US"/>
           </a:p>
@@ -9701,7 +9608,7 @@
           <a:p>
             <a:r>
               <a:rPr sz="3400"/>
-              <a:t>論文の結果②：27 個をまとめると</a:t>
+              <a:t>有意度の計算式のどこに誤差が入るか</a:t>
             </a:r>
           </a:p>
         </p:txBody>
@@ -9719,7 +9626,7 @@
         <p:spPr>
           <a:xfrm>
             <a:off x="841248" y="1463040"/>
-            <a:ext cx="10515600" cy="4114800"/>
+            <a:ext cx="10515600" cy="4937760"/>
           </a:xfrm>
         </p:spPr>
         <p:txBody>
@@ -9727,87 +9634,48 @@
           <a:lstStyle/>
           <a:p>
             <a:r>
-              <a:rPr sz="2200"/>
-              <a:t>σ_L を 0.3 / 0.5 / 1.0 → 上限 1.14 / 1.44 / 3.23 倍ゆるく</a:t>
-            </a:r>
-          </a:p>
-          <a:p>
-            <a:r>
-              <a:rPr sz="2200"/>
-              <a:t>誤差を正しく入れても、本物を除外する割合 21%（5% のはず）</a:t>
+              <a:rPr sz="2400"/>
+              <a:t>暗黒物質ありで期待される T</a:t>
             </a:r>
           </a:p>
           <a:p>
             <a:pPr lvl="1"/>
             <a:r>
-              <a:rPr sz="1800"/>
-              <a:t>J の数が天体の数と一緒に増え、Wilks の定理の前提が崩れる</a:t>
-            </a:r>
-          </a:p>
-          <a:p>
-            <a:r>
-              <a:rPr sz="2200"/>
-              <a:t>本当の誤差を 0.3 / 0.5 / 1.0 大きくすると 31% / 49% / 88%</a:t>
+              <a:rPr sz="2000"/>
+              <a:t>誤差なし：E[T] = Σ w_i pred_i / √Σ w_i² = 1.73</a:t>
             </a:r>
           </a:p>
           <a:p>
             <a:pPr lvl="1"/>
             <a:r>
-              <a:rPr sz="1800"/>
-              <a:t>σ_L を合わせても 23% / 28% / 38%</a:t>
-            </a:r>
-          </a:p>
-          <a:p>
-            <a:r>
-              <a:rPr sz="2200"/>
-              <a:t>原因：J が上に振れた天体が、上限を決めてしまう</a:t>
-            </a:r>
-          </a:p>
-          <a:p>
-            <a:r>
-              <a:rPr sz="2200"/>
-              <a:t>対策の一つ：何も無い領域で較正する</a:t>
-            </a:r>
-          </a:p>
-        </p:txBody>
-      </p:sp>
-      <p:sp>
-        <p:nvSpPr>
-          <p:cNvPr id="8" name="TextBox 7">
-            <a:extLst>
-              <a:ext uri="{FF2B5EF4-FFF2-40B4-BE49-F238E27FC236}">
-                <a16:creationId xmlns:a16="http://schemas.microsoft.com/office/drawing/2014/main" id="{F85CD606-E3CE-F314-B3EE-F3D7028115CB}"/>
-              </a:ext>
-            </a:extLst>
-          </p:cNvPr>
-          <p:cNvSpPr txBox="1"/>
-          <p:nvPr/>
-        </p:nvSpPr>
-        <p:spPr>
-          <a:xfrm>
-            <a:off x="5837182" y="5663239"/>
-            <a:ext cx="6093372" cy="923330"/>
-          </a:xfrm>
-          <a:prstGeom prst="rect">
-            <a:avLst/>
-          </a:prstGeom>
-          <a:noFill/>
-        </p:spPr>
-        <p:txBody>
-          <a:bodyPr wrap="square">
-            <a:spAutoFit/>
-          </a:bodyPr>
-          <a:lstStyle/>
-          <a:p>
-            <a:r>
-              <a:rPr lang="en-US" sz="1400" b="1"/>
-              <a:t>Reference:</a:t>
-            </a:r>
-            <a:r>
-              <a:rPr lang="en-US" sz="1400"/>
-              <a:t> Bertólez-Martínez, Hooper &amp; Khatee Zathul (2026), arXiv:2609.20944 §V, Fig. 5–7</a:t>
-            </a:r>
-            <a:endParaRPr lang="en-US"/>
+              <a:rPr sz="2000"/>
+              <a:t>誤差あり：E[T] = Σ w_i pred_i 10^δ_i / √Σ w_i²  ← δ でばらつく</a:t>
+            </a:r>
+          </a:p>
+          <a:p>
+            <a:r>
+              <a:rPr sz="2400"/>
+              <a:t>実測 T にも測定の揺れ s がある（s = 1、または空で測った 1.26）</a:t>
+            </a:r>
+          </a:p>
+          <a:p>
+            <a:r>
+              <a:rPr sz="2400"/>
+              <a:t>暗黒物質ありで、実測 0.39 以下になる確率</a:t>
+            </a:r>
+          </a:p>
+          <a:p>
+            <a:pPr lvl="1"/>
+            <a:r>
+              <a:rPr sz="2000"/>
+              <a:t>p = （δ について平均）Φ( (0.39 − E[T]) / s )</a:t>
+            </a:r>
+          </a:p>
+          <a:p>
+            <a:r>
+              <a:rPr sz="2400"/>
+              <a:t>p を σ に直したもの =「ずれ」</a:t>
+            </a:r>
           </a:p>
         </p:txBody>
       </p:sp>
@@ -10095,66 +9963,45 @@
           <a:p>
             <a:r>
               <a:rPr sz="3400"/>
-              <a:t>論文のまとめ</a:t>
-            </a:r>
-          </a:p>
-        </p:txBody>
-      </p:sp>
-      <p:sp>
-        <p:nvSpPr>
-          <p:cNvPr id="3" name="Content Placeholder 2"/>
-          <p:cNvSpPr>
-            <a:spLocks noGrp="1"/>
-          </p:cNvSpPr>
-          <p:nvPr>
-            <p:ph idx="1"/>
-          </p:nvPr>
-        </p:nvSpPr>
+              <a:t>結果：予測の幅と実測</a:t>
+            </a:r>
+          </a:p>
+        </p:txBody>
+      </p:sp>
+      <p:pic>
+        <p:nvPicPr>
+          <p:cNvPr id="3" name="Picture 2" descr="fig_dwarf_J_uncertainty.png"/>
+          <p:cNvPicPr>
+            <a:picLocks noChangeAspect="1"/>
+          </p:cNvPicPr>
+          <p:nvPr/>
+        </p:nvPicPr>
+        <p:blipFill>
+          <a:blip r:embed="rId3"/>
+          <a:stretch>
+            <a:fillRect/>
+          </a:stretch>
+        </p:blipFill>
         <p:spPr>
           <a:xfrm>
-            <a:off x="841248" y="1463040"/>
-            <a:ext cx="10515600" cy="4114800"/>
+            <a:off x="2194560" y="1234440"/>
+            <a:ext cx="6858000" cy="4114800"/>
           </a:xfrm>
+          <a:prstGeom prst="rect">
+            <a:avLst/>
+          </a:prstGeom>
         </p:spPr>
-        <p:txBody>
-          <a:bodyPr/>
-          <a:lstStyle/>
-          <a:p>
-            <a:r>
-              <a:rPr sz="2400"/>
-              <a:t>J の誤差や形を雑に扱うと、上限は厳しく出すぎ、本物の信号を除外しやすい</a:t>
-            </a:r>
-          </a:p>
-          <a:p>
-            <a:r>
-              <a:rPr sz="2400"/>
-              <a:t>「銀河中心と矮小銀河が矛盾する」とは、まだ言えない</a:t>
-            </a:r>
-          </a:p>
-          <a:p>
-            <a:r>
-              <a:rPr sz="2400"/>
-              <a:t>Δlog₁₀J ≈ 0.5 程度の誤差を見込むべき</a:t>
-            </a:r>
-          </a:p>
-        </p:txBody>
-      </p:sp>
-      <p:sp>
-        <p:nvSpPr>
-          <p:cNvPr id="8" name="TextBox 7">
-            <a:extLst>
-              <a:ext uri="{FF2B5EF4-FFF2-40B4-BE49-F238E27FC236}">
-                <a16:creationId xmlns:a16="http://schemas.microsoft.com/office/drawing/2014/main" id="{F85CD606-E3CE-F314-B3EE-F3D7028115CB}"/>
-              </a:ext>
-            </a:extLst>
-          </p:cNvPr>
+      </p:pic>
+      <p:sp>
+        <p:nvSpPr>
+          <p:cNvPr id="4" name="TextBox 3"/>
           <p:cNvSpPr txBox="1"/>
           <p:nvPr/>
         </p:nvSpPr>
         <p:spPr>
           <a:xfrm>
-            <a:off x="5837182" y="5663239"/>
-            <a:ext cx="6093372" cy="923330"/>
+            <a:off x="457200" y="5486400"/>
+            <a:ext cx="11247120" cy="457200"/>
           </a:xfrm>
           <a:prstGeom prst="rect">
             <a:avLst/>
@@ -10168,14 +10015,9 @@
           <a:lstStyle/>
           <a:p>
             <a:r>
-              <a:rPr lang="en-US" sz="1400" b="1"/>
-              <a:t>Reference:</a:t>
-            </a:r>
-            <a:r>
-              <a:rPr lang="en-US" sz="1400"/>
-              <a:t> Bertólez-Martínez, Hooper &amp; Khatee Zathul (2026), arXiv:2609.20944 §VI</a:t>
-            </a:r>
-            <a:endParaRPr lang="en-US"/>
+              <a:rPr sz="2000"/>
+              <a:t>期待 1.7σ → J の誤差で 1.3〜5.0σ に広がる。実測 0.4σ ± 1.26。ずれ 1.3σ</a:t>
+            </a:r>
           </a:p>
         </p:txBody>
       </p:sp>
@@ -10221,7 +10063,7 @@
           <a:p>
             <a:r>
               <a:rPr sz="3400"/>
-              <a:t>論文の考え方を、僕の結果に当てはめる</a:t>
+              <a:t>結果の数字</a:t>
             </a:r>
           </a:p>
         </p:txBody>
@@ -10239,7 +10081,7 @@
         <p:spPr>
           <a:xfrm>
             <a:off x="841248" y="1463040"/>
-            <a:ext cx="10515600" cy="4114800"/>
+            <a:ext cx="10515600" cy="4937760"/>
           </a:xfrm>
         </p:spPr>
         <p:txBody>
@@ -10248,80 +10090,41 @@
           <a:p>
             <a:r>
               <a:rPr sz="2400"/>
-              <a:t>これまで：J の誤差 = 0（J は推定値そのまま）</a:t>
+              <a:t>局所密度 0.42 GeV/cm³ の場合（43 天体、20 GeV）</a:t>
+            </a:r>
+          </a:p>
+          <a:p>
+            <a:pPr lvl="1"/>
+            <a:r>
+              <a:rPr sz="2000"/>
+              <a:t>J の誤差なし：期待 1.73、ずれ 1.3σ（s = 1.26 なら 1.1σ）</a:t>
+            </a:r>
+          </a:p>
+          <a:p>
+            <a:pPr lvl="1"/>
+            <a:r>
+              <a:rPr sz="2000"/>
+              <a:t>J の誤差あり：期待 2.4（68% で 1.3–5.0）、ずれ 1.5σ（1.3σ）</a:t>
             </a:r>
           </a:p>
           <a:p>
             <a:r>
               <a:rPr sz="2400"/>
-              <a:t>今回：各天体の本当の J = 推定値 × 10^δ_i</a:t>
+              <a:t>天の川側の局所密度を 0.3〜0.6 GeV/cm³ で動かしても</a:t>
             </a:r>
           </a:p>
           <a:p>
             <a:pPr lvl="1"/>
             <a:r>
               <a:rPr sz="2000"/>
-              <a:t>δ_i は平均 0、幅 0.5 の正規分布（天体ごとに独立）</a:t>
-            </a:r>
-          </a:p>
-          <a:p>
-            <a:pPr lvl="1"/>
-            <a:r>
-              <a:rPr sz="2000"/>
-              <a:t>→ J がおよそ 1/3 倍〜3 倍の範囲でずれる</a:t>
+              <a:t>ずれは較正後 2.4σ 以下</a:t>
             </a:r>
           </a:p>
           <a:p>
             <a:r>
               <a:rPr sz="2400"/>
-              <a:t>予測 σ は J に比例 → pred_i × 10^δ_i</a:t>
-            </a:r>
-          </a:p>
-          <a:p>
-            <a:r>
-              <a:rPr sz="2400"/>
-              <a:t>論文と同じく「J をずらした世界」をたくさん作る（20 万回）</a:t>
-            </a:r>
-          </a:p>
-        </p:txBody>
-      </p:sp>
-      <p:sp>
-        <p:nvSpPr>
-          <p:cNvPr id="8" name="TextBox 7">
-            <a:extLst>
-              <a:ext uri="{FF2B5EF4-FFF2-40B4-BE49-F238E27FC236}">
-                <a16:creationId xmlns:a16="http://schemas.microsoft.com/office/drawing/2014/main" id="{F85CD606-E3CE-F314-B3EE-F3D7028115CB}"/>
-              </a:ext>
-            </a:extLst>
-          </p:cNvPr>
-          <p:cNvSpPr txBox="1"/>
-          <p:nvPr/>
-        </p:nvSpPr>
-        <p:spPr>
-          <a:xfrm>
-            <a:off x="5837182" y="5663239"/>
-            <a:ext cx="6093372" cy="923330"/>
-          </a:xfrm>
-          <a:prstGeom prst="rect">
-            <a:avLst/>
-          </a:prstGeom>
-          <a:noFill/>
-        </p:spPr>
-        <p:txBody>
-          <a:bodyPr wrap="square">
-            <a:spAutoFit/>
-          </a:bodyPr>
-          <a:lstStyle/>
-          <a:p>
-            <a:r>
-              <a:rPr lang="en-US" sz="1400" b="1"/>
-              <a:t>Reference:</a:t>
-            </a:r>
-            <a:r>
-              <a:rPr lang="en-US" sz="1400"/>
-              <a:t> Bertólez-Martínez, Hooper &amp; Khatee Zathul (2026), arXiv:2609.20944 §IV</a:t>
-            </a:r>
-            <a:endParaRPr lang="en-US"/>
+              <a:t>→ 暗黒物質と矛盾はしないが、確認もできない（判定できない）</a:t>
+            </a:r>
           </a:p>
         </p:txBody>
       </p:sp>
@@ -10367,7 +10170,7 @@
           <a:p>
             <a:r>
               <a:rPr sz="3400"/>
-              <a:t>有意度の計算式のどこに誤差が入るか</a:t>
+              <a:t>2 つの数字の違い：15σ と 1.3σ</a:t>
             </a:r>
           </a:p>
         </p:txBody>
@@ -10394,46 +10197,40 @@
           <a:p>
             <a:r>
               <a:rPr sz="2400"/>
-              <a:t>暗黒物質ありで期待される T</a:t>
+              <a:t>約 15σ：天の川のハロー超過の強さ</a:t>
             </a:r>
           </a:p>
           <a:p>
             <a:pPr lvl="1"/>
             <a:r>
               <a:rPr sz="2000"/>
-              <a:t>誤差なし：E[T] = Σ w_i pred_i / √Σ w_i² = 1.73</a:t>
+              <a:t>19.0σ を、何も無い空でのばらつき 1.26 で割ったもの</a:t>
             </a:r>
           </a:p>
           <a:p>
             <a:pPr lvl="1"/>
             <a:r>
               <a:rPr sz="2000"/>
-              <a:t>誤差あり：E[T] = Σ w_i pred_i 10^δ_i / √Σ w_i²  ← δ でばらつく</a:t>
+              <a:t>「天の川に、背景では説明しにくい何かがある」</a:t>
             </a:r>
           </a:p>
           <a:p>
             <a:r>
               <a:rPr sz="2400"/>
-              <a:t>実測 T にも測定の揺れ s がある（s = 1、または空で測った 1.26）</a:t>
+              <a:t>1.3σ：矮小銀河での「予測と実測のずれ」</a:t>
+            </a:r>
+          </a:p>
+          <a:p>
+            <a:pPr lvl="1"/>
+            <a:r>
+              <a:rPr sz="2000"/>
+              <a:t>「天の川の超過が暗黒物質だとしても、矮小銀河の結果と矛盾しない」</a:t>
             </a:r>
           </a:p>
           <a:p>
             <a:r>
               <a:rPr sz="2400"/>
-              <a:t>暗黒物質ありで、実測 0.39 以下になる確率</a:t>
-            </a:r>
-          </a:p>
-          <a:p>
-            <a:pPr lvl="1"/>
-            <a:r>
-              <a:rPr sz="2000"/>
-              <a:t>p = （δ について平均）Φ( (0.39 − E[T]) / s )</a:t>
-            </a:r>
-          </a:p>
-          <a:p>
-            <a:r>
-              <a:rPr sz="2400"/>
-              <a:t>p を σ に直したもの =「ずれ」</a:t>
+              <a:t>別のものを測った、別の数字</a:t>
             </a:r>
           </a:p>
         </p:txBody>
@@ -10480,60 +10277,60 @@
           <a:p>
             <a:r>
               <a:rPr sz="3400"/>
-              <a:t>結果：予測の幅と実測</a:t>
-            </a:r>
-          </a:p>
-        </p:txBody>
-      </p:sp>
-      <p:pic>
-        <p:nvPicPr>
-          <p:cNvPr id="3" name="Picture 2" descr="fig_dwarf_J_uncertainty.png"/>
-          <p:cNvPicPr>
-            <a:picLocks noChangeAspect="1"/>
-          </p:cNvPicPr>
-          <p:nvPr/>
-        </p:nvPicPr>
-        <p:blipFill>
-          <a:blip r:embed="rId3"/>
-          <a:stretch>
-            <a:fillRect/>
-          </a:stretch>
-        </p:blipFill>
+              <a:t>結論</a:t>
+            </a:r>
+          </a:p>
+        </p:txBody>
+      </p:sp>
+      <p:sp>
+        <p:nvSpPr>
+          <p:cNvPr id="3" name="Content Placeholder 2"/>
+          <p:cNvSpPr>
+            <a:spLocks noGrp="1"/>
+          </p:cNvSpPr>
+          <p:nvPr>
+            <p:ph idx="1"/>
+          </p:nvPr>
+        </p:nvSpPr>
         <p:spPr>
           <a:xfrm>
-            <a:off x="2194560" y="1234440"/>
-            <a:ext cx="6858000" cy="4114800"/>
+            <a:off x="841248" y="1463040"/>
+            <a:ext cx="10515600" cy="4937760"/>
           </a:xfrm>
-          <a:prstGeom prst="rect">
-            <a:avLst/>
-          </a:prstGeom>
         </p:spPr>
-      </p:pic>
-      <p:sp>
-        <p:nvSpPr>
-          <p:cNvPr id="4" name="TextBox 3"/>
-          <p:cNvSpPr txBox="1"/>
-          <p:nvPr/>
-        </p:nvSpPr>
-        <p:spPr>
-          <a:xfrm>
-            <a:off x="457200" y="5486400"/>
-            <a:ext cx="11247120" cy="457200"/>
-          </a:xfrm>
-          <a:prstGeom prst="rect">
-            <a:avLst/>
-          </a:prstGeom>
-          <a:noFill/>
-        </p:spPr>
-        <p:txBody>
-          <a:bodyPr wrap="square">
-            <a:spAutoFit/>
-          </a:bodyPr>
-          <a:lstStyle/>
-          <a:p>
+        <p:txBody>
+          <a:bodyPr/>
+          <a:lstStyle/>
+          <a:p>
+            <a:r>
+              <a:rPr sz="2400"/>
+              <a:t>Totani の超過を再現（名目 19.0σ、較正後 約 15σ）</a:t>
+            </a:r>
+          </a:p>
+          <a:p>
+            <a:r>
+              <a:rPr sz="2400"/>
+              <a:t>ICS の明るさ・バブル・計算の近似の間違いでは説明できない</a:t>
+            </a:r>
+          </a:p>
+          <a:p>
+            <a:pPr lvl="1"/>
             <a:r>
               <a:rPr sz="2000"/>
-              <a:t>期待 1.7σ → J の誤差で 1.3〜5.0σ に広がる。実測 0.4σ ± 1.26。ずれ 1.3σ</a:t>
+              <a:t>暗黒物質の証拠ではない（ICS の空間の形は未確認）</a:t>
+            </a:r>
+          </a:p>
+          <a:p>
+            <a:r>
+              <a:rPr sz="2400"/>
+              <a:t>矮小銀河では非検出</a:t>
+            </a:r>
+          </a:p>
+          <a:p>
+            <a:pPr lvl="1"/>
+            <a:r>
+              <a:rPr sz="2000"/>
+              <a:t>J の誤差（約 3 倍）を入れると、予測とのずれは 1.3σ → 判定できない</a:t>
             </a:r>
           </a:p>
         </p:txBody>
@@ -10580,7 +10377,7 @@
           <a:p>
             <a:r>
               <a:rPr sz="3400"/>
-              <a:t>結果の数字</a:t>
+              <a:t>統計の視点から：この研究に足りなかったもの</a:t>
             </a:r>
           </a:p>
         </p:txBody>
@@ -10598,7 +10395,7 @@
         <p:spPr>
           <a:xfrm>
             <a:off x="841248" y="1463040"/>
-            <a:ext cx="10515600" cy="4937760"/>
+            <a:ext cx="10515600" cy="4114800"/>
           </a:xfrm>
         </p:spPr>
         <p:txBody>
@@ -10607,41 +10404,81 @@
           <a:p>
             <a:r>
               <a:rPr sz="2400"/>
-              <a:t>局所密度 0.42 GeV/cm³ の場合（43 天体、20 GeV）</a:t>
+              <a:t>σ が 1.26 倍に膨らんだ原因</a:t>
             </a:r>
           </a:p>
           <a:p>
             <a:pPr lvl="1"/>
             <a:r>
               <a:rPr sz="2000"/>
-              <a:t>J の誤差なし：期待 1.73、ずれ 1.3σ（s = 1.26 なら 1.1σ）</a:t>
+              <a:t>尤度は「型紙（GALPROP）は完璧、誤差は光子の数のばらつきだけ」と仮定</a:t>
             </a:r>
           </a:p>
           <a:p>
             <a:pPr lvl="1"/>
             <a:r>
               <a:rPr sz="2000"/>
-              <a:t>J の誤差あり：期待 2.4（68% で 1.3–5.0）、ずれ 1.5σ（1.3σ）</a:t>
+              <a:t>型紙そのものの誤差が、統計モデルに入っていない</a:t>
             </a:r>
           </a:p>
           <a:p>
             <a:r>
               <a:rPr sz="2400"/>
-              <a:t>天の川側の局所密度を 0.3〜0.6 GeV/cm³ で動かしても</a:t>
+              <a:t>データ同化：シミュレーションの誤差と観測の誤差を分けて、統計モデルに入れる枠組み</a:t>
+            </a:r>
+          </a:p>
+          <a:p>
+            <a:r>
+              <a:rPr sz="2400"/>
+              <a:t>J をずらして何度も計算したのも、分布をたくさんのサンプルで表すという同じ発想</a:t>
             </a:r>
           </a:p>
           <a:p>
             <a:pPr lvl="1"/>
             <a:r>
               <a:rPr sz="2000"/>
-              <a:t>ずれは較正後 2.4σ 以下</a:t>
-            </a:r>
-          </a:p>
-          <a:p>
-            <a:r>
-              <a:rPr sz="2400"/>
-              <a:t>→ 暗黒物質と矛盾はしないが、確認もできない（判定できない）</a:t>
-            </a:r>
+              <a:t>（アンサンブル・粒子フィルタ）</a:t>
+            </a:r>
+          </a:p>
+        </p:txBody>
+      </p:sp>
+      <p:sp>
+        <p:nvSpPr>
+          <p:cNvPr id="8" name="TextBox 7">
+            <a:extLst>
+              <a:ext uri="{FF2B5EF4-FFF2-40B4-BE49-F238E27FC236}">
+                <a16:creationId xmlns:a16="http://schemas.microsoft.com/office/drawing/2014/main" id="{F85CD606-E3CE-F314-B3EE-F3D7028115CB}"/>
+              </a:ext>
+            </a:extLst>
+          </p:cNvPr>
+          <p:cNvSpPr txBox="1"/>
+          <p:nvPr/>
+        </p:nvSpPr>
+        <p:spPr>
+          <a:xfrm>
+            <a:off x="5837182" y="5663239"/>
+            <a:ext cx="6093372" cy="923330"/>
+          </a:xfrm>
+          <a:prstGeom prst="rect">
+            <a:avLst/>
+          </a:prstGeom>
+          <a:noFill/>
+        </p:spPr>
+        <p:txBody>
+          <a:bodyPr wrap="square">
+            <a:spAutoFit/>
+          </a:bodyPr>
+          <a:lstStyle/>
+          <a:p>
+            <a:r>
+              <a:rPr lang="en-US" sz="1400" b="1"/>
+              <a:t>Reference:</a:t>
+            </a:r>
+            <a:r>
+              <a:rPr lang="en-US" sz="1400"/>
+              <a:t> 中村和幸 (2017), 数理解析研究所講究録 2057, 59–66</a:t>
+            </a:r>
+            <a:endParaRPr lang="en-US"/>
           </a:p>
         </p:txBody>
       </p:sp>
@@ -10687,7 +10524,7 @@
           <a:p>
             <a:r>
               <a:rPr sz="3400"/>
-              <a:t>2 つの数字の違い：15σ と 1.3σ</a:t>
+              <a:t>参考文献</a:t>
             </a:r>
           </a:p>
         </p:txBody>
@@ -10713,41 +10550,56 @@
           <a:lstStyle/>
           <a:p>
             <a:r>
-              <a:rPr sz="2400"/>
-              <a:t>約 15σ：天の川のハロー超過の強さ</a:t>
-            </a:r>
-          </a:p>
-          <a:p>
-            <a:pPr lvl="1"/>
-            <a:r>
-              <a:rPr sz="2000"/>
-              <a:t>19.0σ を、何も無い空でのばらつき 1.26 で割ったもの</a:t>
-            </a:r>
-          </a:p>
-          <a:p>
-            <a:pPr lvl="1"/>
-            <a:r>
-              <a:rPr sz="2000"/>
-              <a:t>「天の川に、背景では説明しにくい何かがある」</a:t>
-            </a:r>
-          </a:p>
-          <a:p>
-            <a:r>
-              <a:rPr sz="2400"/>
-              <a:t>1.3σ：矮小銀河での「予測と実測のずれ」</a:t>
-            </a:r>
-          </a:p>
-          <a:p>
-            <a:pPr lvl="1"/>
-            <a:r>
-              <a:rPr sz="2000"/>
-              <a:t>「天の川の超過が暗黒物質だとしても、矮小銀河の結果と矛盾しない」</a:t>
-            </a:r>
-          </a:p>
-          <a:p>
-            <a:r>
-              <a:rPr sz="2400"/>
-              <a:t>別のものを測った、別の数字</a:t>
+              <a:rPr sz="1800"/>
+              <a:t>T. Totani (2025), arXiv:2507.07209</a:t>
+            </a:r>
+          </a:p>
+          <a:p>
+            <a:r>
+              <a:rPr sz="1800"/>
+              <a:t>Bertólez-Martínez, Hooper &amp; Khatee Zathul (2026), arXiv:2609.20944</a:t>
+            </a:r>
+          </a:p>
+          <a:p>
+            <a:r>
+              <a:rPr sz="1800"/>
+              <a:t>S. S. Wilks (1938), Ann. Math. Stat. 9, 60</a:t>
+            </a:r>
+          </a:p>
+          <a:p>
+            <a:r>
+              <a:rPr sz="1800"/>
+              <a:t>D. Foreman-Mackey et al. (2013), PASP 125, 306</a:t>
+            </a:r>
+          </a:p>
+          <a:p>
+            <a:r>
+              <a:rPr sz="1800"/>
+              <a:t>I. V. Moskalenko &amp; A. W. Strong (2000), ApJ 528, 357</a:t>
+            </a:r>
+          </a:p>
+          <a:p>
+            <a:r>
+              <a:rPr sz="1800"/>
+              <a:t>B. Efron &amp; R. J. Tibshirani (1993), An Introduction to the Bootstrap</a:t>
+            </a:r>
+          </a:p>
+          <a:p>
+            <a:r>
+              <a:rPr sz="1800"/>
+              <a:t>A. B. Pace (2025), Open J. Astrophys. 8, 142</a:t>
+            </a:r>
+          </a:p>
+          <a:p>
+            <a:r>
+              <a:rPr sz="1800"/>
+              <a:t>A. B. Pace &amp; L. E. Strigari (2019), MNRAS 482, 3480</a:t>
+            </a:r>
+          </a:p>
+          <a:p>
+            <a:r>
+              <a:rPr sz="1800"/>
+              <a:t>中村和幸 (2017), 数理解析研究所講究録 2057, 59–66</a:t>
             </a:r>
           </a:p>
         </p:txBody>
@@ -10761,7 +10613,7 @@
 </file>
 
 <file path=ppt/slides/slide36.xml><?xml version="1.0" encoding="utf-8"?>
-<p:sld xmlns:a="http://schemas.openxmlformats.org/drawingml/2006/main" xmlns:r="http://schemas.openxmlformats.org/officeDocument/2006/relationships" xmlns:p="http://schemas.openxmlformats.org/presentationml/2006/main">
+<p:sld xmlns:a="http://schemas.openxmlformats.org/drawingml/2006/main" xmlns:p="http://schemas.openxmlformats.org/presentationml/2006/main" xmlns:r="http://schemas.openxmlformats.org/officeDocument/2006/relationships">
   <p:cSld>
     <p:spTree>
       <p:nvGrpSpPr>
@@ -10769,14 +10621,7 @@
         <p:cNvGrpSpPr/>
         <p:nvPr/>
       </p:nvGrpSpPr>
-      <p:grpSpPr>
-        <a:xfrm>
-          <a:off x="0" y="0"/>
-          <a:ext cx="0" cy="0"/>
-          <a:chOff x="0" y="0"/>
-          <a:chExt cx="0" cy="0"/>
-        </a:xfrm>
-      </p:grpSpPr>
+      <p:grpSpPr/>
       <p:sp>
         <p:nvSpPr>
           <p:cNvPr id="2" name="Title 1"/>
@@ -10794,107 +10639,7 @@
           <a:p>
             <a:r>
               <a:rPr sz="3400"/>
-              <a:t>結論</a:t>
-            </a:r>
-          </a:p>
-        </p:txBody>
-      </p:sp>
-      <p:sp>
-        <p:nvSpPr>
-          <p:cNvPr id="3" name="Content Placeholder 2"/>
-          <p:cNvSpPr>
-            <a:spLocks noGrp="1"/>
-          </p:cNvSpPr>
-          <p:nvPr>
-            <p:ph idx="1"/>
-          </p:nvPr>
-        </p:nvSpPr>
-        <p:spPr>
-          <a:xfrm>
-            <a:off x="841248" y="1463040"/>
-            <a:ext cx="10515600" cy="4937760"/>
-          </a:xfrm>
-        </p:spPr>
-        <p:txBody>
-          <a:bodyPr/>
-          <a:lstStyle/>
-          <a:p>
-            <a:r>
-              <a:rPr sz="2400"/>
-              <a:t>Totani の超過を再現（名目 19.0σ、較正後 約 15σ）</a:t>
-            </a:r>
-          </a:p>
-          <a:p>
-            <a:r>
-              <a:rPr sz="2400"/>
-              <a:t>ICS の明るさ・バブル・計算の近似の間違いでは説明できない</a:t>
-            </a:r>
-          </a:p>
-          <a:p>
-            <a:pPr lvl="1"/>
-            <a:r>
-              <a:rPr sz="2000"/>
-              <a:t>暗黒物質の証拠ではない（ICS の空間の形は未確認）</a:t>
-            </a:r>
-          </a:p>
-          <a:p>
-            <a:r>
-              <a:rPr sz="2400"/>
-              <a:t>矮小銀河では非検出</a:t>
-            </a:r>
-          </a:p>
-          <a:p>
-            <a:pPr lvl="1"/>
-            <a:r>
-              <a:rPr sz="2000"/>
-              <a:t>J の誤差（約 3 倍）を入れると、予測とのずれは 1.3σ → 判定できない</a:t>
-            </a:r>
-          </a:p>
-        </p:txBody>
-      </p:sp>
-    </p:spTree>
-  </p:cSld>
-  <p:clrMapOvr>
-    <a:masterClrMapping/>
-  </p:clrMapOvr>
-</p:sld>
-</file>
-
-<file path=ppt/slides/slide37.xml><?xml version="1.0" encoding="utf-8"?>
-<p:sld xmlns:a="http://schemas.openxmlformats.org/drawingml/2006/main" xmlns:r="http://schemas.openxmlformats.org/officeDocument/2006/relationships" xmlns:p="http://schemas.openxmlformats.org/presentationml/2006/main">
-  <p:cSld>
-    <p:spTree>
-      <p:nvGrpSpPr>
-        <p:cNvPr id="1" name=""/>
-        <p:cNvGrpSpPr/>
-        <p:nvPr/>
-      </p:nvGrpSpPr>
-      <p:grpSpPr>
-        <a:xfrm>
-          <a:off x="0" y="0"/>
-          <a:ext cx="0" cy="0"/>
-          <a:chOff x="0" y="0"/>
-          <a:chExt cx="0" cy="0"/>
-        </a:xfrm>
-      </p:grpSpPr>
-      <p:sp>
-        <p:nvSpPr>
-          <p:cNvPr id="2" name="Title 1"/>
-          <p:cNvSpPr>
-            <a:spLocks noGrp="1"/>
-          </p:cNvSpPr>
-          <p:nvPr>
-            <p:ph type="title"/>
-          </p:nvPr>
-        </p:nvSpPr>
-        <p:spPr/>
-        <p:txBody>
-          <a:bodyPr/>
-          <a:lstStyle/>
-          <a:p>
-            <a:r>
-              <a:rPr sz="3400"/>
-              <a:t>統計の視点から：この研究に足りなかったもの</a:t>
+              <a:t>MCMC の中身①：何を求めているか</a:t>
             </a:r>
           </a:p>
         </p:txBody>
@@ -10919,42 +10664,59 @@
           <a:bodyPr/>
           <a:lstStyle/>
           <a:p>
-            <a:r>
-              <a:rPr sz="2400"/>
-              <a:t>σ が 1.26 倍に膨らんだ原因</a:t>
+            <a:pPr/>
+            <a:r>
+              <a:rPr sz="2200"/>
+              <a:t>知りたいもの：データ D を見たあと、倍率 θ = (f₁, …, f₉) がどの値をとりうるか</a:t>
+            </a:r>
+          </a:p>
+          <a:p>
+            <a:pPr/>
+            <a:r>
+              <a:rPr sz="2200"/>
+              <a:t>ベイズの定理：P(θ | D) = L(D | θ) π(θ) / P(D)</a:t>
             </a:r>
           </a:p>
           <a:p>
             <a:pPr lvl="1"/>
             <a:r>
-              <a:rPr sz="2000"/>
-              <a:t>尤度は「型紙（GALPROP）は完璧、誤差は光子の数のばらつきだけ」と仮定</a:t>
+              <a:rPr sz="1800"/>
+              <a:t>P(θ | D)：事後分布（データを見た後の、θ のもっともらしさ）</a:t>
             </a:r>
           </a:p>
           <a:p>
             <a:pPr lvl="1"/>
             <a:r>
-              <a:rPr sz="2000"/>
-              <a:t>型紙そのものの誤差が、統計モデルに入っていない</a:t>
-            </a:r>
-          </a:p>
-          <a:p>
-            <a:r>
-              <a:rPr sz="2400"/>
-              <a:t>データ同化：シミュレーションの誤差と観測の誤差を分けて、統計モデルに入れる枠組み</a:t>
-            </a:r>
-          </a:p>
-          <a:p>
-            <a:r>
-              <a:rPr sz="2400"/>
-              <a:t>J をずらして何度も計算したのも、分布をたくさんのサンプルで表すという同じ発想</a:t>
+              <a:rPr sz="1800"/>
+              <a:t>L(D | θ)：尤度（手法② の L）　π(θ)：事前分布（今回は一様）</a:t>
             </a:r>
           </a:p>
           <a:p>
             <a:pPr lvl="1"/>
             <a:r>
-              <a:rPr sz="2000"/>
-              <a:t>（アンサンブル・粒子フィルタ）</a:t>
+              <a:rPr sz="1800"/>
+              <a:t>P(D)：θ によらない定数 → 計算しなくてよい</a:t>
+            </a:r>
+          </a:p>
+          <a:p>
+            <a:pPr/>
+            <a:r>
+              <a:rPr sz="2200"/>
+              <a:t>つまり P(θ | D) ∝ L(D | θ) × π(θ)</a:t>
+            </a:r>
+          </a:p>
+          <a:p>
+            <a:pPr/>
+            <a:r>
+              <a:rPr sz="2200"/>
+              <a:t>ただし θ は 9 次元。1 次元を 100 点に区切っても 100⁹ = 10¹⁸ 通り → 全部は計算できない</a:t>
+            </a:r>
+          </a:p>
+          <a:p>
+            <a:pPr/>
+            <a:r>
+              <a:rPr sz="2200"/>
+              <a:t>→ 事後分布から「サンプルを取り出す」方法が MCMC</a:t>
             </a:r>
           </a:p>
         </p:txBody>
@@ -10993,7 +10755,7 @@
             </a:r>
             <a:r>
               <a:rPr lang="en-US" sz="1400"/>
-              <a:t> 中村和幸 (2017), 数理解析研究所講究録 2057, 59–66</a:t>
+              <a:t> D. Foreman-Mackey et al. (2013), PASP 125, 306</a:t>
             </a:r>
             <a:endParaRPr lang="en-US"/>
           </a:p>
@@ -11007,129 +10769,7 @@
 </p:sld>
 </file>
 
-<file path=ppt/slides/slide38.xml><?xml version="1.0" encoding="utf-8"?>
-<p:sld xmlns:a="http://schemas.openxmlformats.org/drawingml/2006/main" xmlns:r="http://schemas.openxmlformats.org/officeDocument/2006/relationships" xmlns:p="http://schemas.openxmlformats.org/presentationml/2006/main">
-  <p:cSld>
-    <p:spTree>
-      <p:nvGrpSpPr>
-        <p:cNvPr id="1" name=""/>
-        <p:cNvGrpSpPr/>
-        <p:nvPr/>
-      </p:nvGrpSpPr>
-      <p:grpSpPr>
-        <a:xfrm>
-          <a:off x="0" y="0"/>
-          <a:ext cx="0" cy="0"/>
-          <a:chOff x="0" y="0"/>
-          <a:chExt cx="0" cy="0"/>
-        </a:xfrm>
-      </p:grpSpPr>
-      <p:sp>
-        <p:nvSpPr>
-          <p:cNvPr id="2" name="Title 1"/>
-          <p:cNvSpPr>
-            <a:spLocks noGrp="1"/>
-          </p:cNvSpPr>
-          <p:nvPr>
-            <p:ph type="title"/>
-          </p:nvPr>
-        </p:nvSpPr>
-        <p:spPr/>
-        <p:txBody>
-          <a:bodyPr/>
-          <a:lstStyle/>
-          <a:p>
-            <a:r>
-              <a:rPr sz="3400"/>
-              <a:t>参考文献</a:t>
-            </a:r>
-          </a:p>
-        </p:txBody>
-      </p:sp>
-      <p:sp>
-        <p:nvSpPr>
-          <p:cNvPr id="3" name="Content Placeholder 2"/>
-          <p:cNvSpPr>
-            <a:spLocks noGrp="1"/>
-          </p:cNvSpPr>
-          <p:nvPr>
-            <p:ph idx="1"/>
-          </p:nvPr>
-        </p:nvSpPr>
-        <p:spPr>
-          <a:xfrm>
-            <a:off x="841248" y="1463040"/>
-            <a:ext cx="10515600" cy="4937760"/>
-          </a:xfrm>
-        </p:spPr>
-        <p:txBody>
-          <a:bodyPr/>
-          <a:lstStyle/>
-          <a:p>
-            <a:r>
-              <a:rPr sz="1800"/>
-              <a:t>T. Totani (2025), arXiv:2507.07209</a:t>
-            </a:r>
-          </a:p>
-          <a:p>
-            <a:r>
-              <a:rPr sz="1800"/>
-              <a:t>Bertólez-Martínez, Hooper &amp; Khatee Zathul (2026), arXiv:2609.20944</a:t>
-            </a:r>
-          </a:p>
-          <a:p>
-            <a:r>
-              <a:rPr sz="1800"/>
-              <a:t>S. S. Wilks (1938), Ann. Math. Stat. 9, 60</a:t>
-            </a:r>
-          </a:p>
-          <a:p>
-            <a:r>
-              <a:rPr sz="1800"/>
-              <a:t>D. Foreman-Mackey et al. (2013), PASP 125, 306</a:t>
-            </a:r>
-          </a:p>
-          <a:p>
-            <a:r>
-              <a:rPr sz="1800"/>
-              <a:t>I. V. Moskalenko &amp; A. W. Strong (2000), ApJ 528, 357</a:t>
-            </a:r>
-          </a:p>
-          <a:p>
-            <a:r>
-              <a:rPr sz="1800"/>
-              <a:t>B. Efron &amp; R. J. Tibshirani (1993), An Introduction to the Bootstrap</a:t>
-            </a:r>
-          </a:p>
-          <a:p>
-            <a:r>
-              <a:rPr sz="1800"/>
-              <a:t>A. B. Pace (2025), Open J. Astrophys. 8, 142</a:t>
-            </a:r>
-          </a:p>
-          <a:p>
-            <a:r>
-              <a:rPr sz="1800"/>
-              <a:t>A. B. Pace &amp; L. E. Strigari (2019), MNRAS 482, 3480</a:t>
-            </a:r>
-          </a:p>
-          <a:p>
-            <a:r>
-              <a:rPr sz="1800"/>
-              <a:t>中村和幸 (2017), 数理解析研究所講究録 2057, 59–66</a:t>
-            </a:r>
-          </a:p>
-        </p:txBody>
-      </p:sp>
-    </p:spTree>
-  </p:cSld>
-  <p:clrMapOvr>
-    <a:masterClrMapping/>
-  </p:clrMapOvr>
-</p:sld>
-</file>
-
-<file path=ppt/slides/slide39.xml><?xml version="1.0" encoding="utf-8"?>
+<file path=ppt/slides/slide37.xml><?xml version="1.0" encoding="utf-8"?>
 <p:sld xmlns:a="http://schemas.openxmlformats.org/drawingml/2006/main" xmlns:p="http://schemas.openxmlformats.org/presentationml/2006/main" xmlns:r="http://schemas.openxmlformats.org/officeDocument/2006/relationships">
   <p:cSld>
     <p:spTree>
@@ -11156,7 +10796,7 @@
           <a:p>
             <a:r>
               <a:rPr sz="3400"/>
-              <a:t>最尤値の求め方：Totani との違い</a:t>
+              <a:t>MCMC の中身②：歩き方（メトロポリス法）</a:t>
             </a:r>
           </a:p>
         </p:txBody>
@@ -11174,7 +10814,7 @@
         <p:spPr>
           <a:xfrm>
             <a:off x="841248" y="1463040"/>
-            <a:ext cx="10515600" cy="4114800"/>
+            <a:ext cx="5394960" cy="4114800"/>
           </a:xfrm>
         </p:spPr>
         <p:txBody>
@@ -11183,50 +10823,57 @@
           <a:p>
             <a:pPr/>
             <a:r>
-              <a:rPr sz="2200"/>
-              <a:t>Totani：MCMC 1 つで、最尤値（歩いた中で ln L が最大の点）と誤差の両方を出す</a:t>
+              <a:rPr sz="2000"/>
+              <a:t>① 今の点 θ から、少しずらした候補 θ′ を作る</a:t>
             </a:r>
           </a:p>
           <a:p>
             <a:pPr/>
             <a:r>
-              <a:rPr sz="2200"/>
-              <a:t>本研究：最尤値は勾配法（L-BFGS-B）、誤差は MCMC（emcee）</a:t>
+              <a:rPr sz="2000"/>
+              <a:t>② 比 r = P(θ′ | D) / P(θ | D) を計算</a:t>
             </a:r>
           </a:p>
           <a:p>
             <a:pPr lvl="1"/>
             <a:r>
-              <a:rPr sz="1800"/>
-              <a:t>求めているもの（ln L が最大になる f）は同じ。探し方だけが違う</a:t>
+              <a:rPr sz="1600"/>
+              <a:t>P(D) は分母分子で消える</a:t>
             </a:r>
           </a:p>
           <a:p>
             <a:pPr/>
             <a:r>
-              <a:rPr sz="2200"/>
-              <a:t>同じ型紙・同じ尤度で両方を計算して比べた（20.8 GeV）</a:t>
+              <a:rPr sz="2000"/>
+              <a:t>③ r ≥ 1 なら移る。r &lt; 1 なら確率 r で移る</a:t>
             </a:r>
           </a:p>
           <a:p>
             <a:pPr lvl="1"/>
             <a:r>
-              <a:rPr sz="1800"/>
-              <a:t>勾配法：19.215σ　／　Totani と同じ MCMC：19.209σ　→ 差 0.006σ</a:t>
+              <a:rPr sz="1600"/>
+              <a:t>移らなければ、同じ点をもう一度記録</a:t>
+            </a:r>
+          </a:p>
+          <a:p>
+            <a:pPr/>
+            <a:r>
+              <a:rPr sz="2000"/>
+              <a:t>④ ①〜③ を何千回もくり返す</a:t>
+            </a:r>
+          </a:p>
+          <a:p>
+            <a:pPr/>
+            <a:r>
+              <a:rPr sz="2000"/>
+              <a:t>歩いた跡のヒストグラム = 事後分布</a:t>
             </a:r>
           </a:p>
           <a:p>
             <a:pPr lvl="1"/>
             <a:r>
-              <a:rPr sz="1800"/>
-              <a:t>ハローの倍率：1.478 ／ 1.457</a:t>
-            </a:r>
-          </a:p>
-          <a:p>
-            <a:pPr/>
-            <a:r>
-              <a:rPr sz="2200"/>
-              <a:t>→ 方法の違いは結果に影響しない</a:t>
+              <a:rPr sz="1600"/>
+              <a:t>下がる方向にも確率的に進むので、山の広がり（誤差）まで分かる</a:t>
             </a:r>
           </a:p>
         </p:txBody>
@@ -11265,7 +10912,188 @@
             </a:r>
             <a:r>
               <a:rPr lang="en-US" sz="1400"/>
-              <a:t> T. Totani (2025), arXiv:2507.07209 §2.2</a:t>
+              <a:t> N. Metropolis et al. (1953), J. Chem. Phys. 21, 1087</a:t>
+            </a:r>
+            <a:endParaRPr lang="en-US"/>
+          </a:p>
+        </p:txBody>
+      </p:sp>
+      <p:pic>
+        <p:nvPicPr>
+          <p:cNvPr id="9" name="Picture 8" descr="fig_mcmc_toy.png"/>
+          <p:cNvPicPr>
+            <a:picLocks noChangeAspect="1"/>
+          </p:cNvPicPr>
+          <p:nvPr/>
+        </p:nvPicPr>
+        <p:blipFill>
+          <a:blip r:embed="rId3"/>
+          <a:stretch>
+            <a:fillRect/>
+          </a:stretch>
+        </p:blipFill>
+        <p:spPr>
+          <a:xfrm>
+            <a:off x="6309360" y="1828800"/>
+            <a:ext cx="5669280" cy="2267712"/>
+          </a:xfrm>
+          <a:prstGeom prst="rect">
+            <a:avLst/>
+          </a:prstGeom>
+        </p:spPr>
+      </p:pic>
+    </p:spTree>
+  </p:cSld>
+  <p:clrMapOvr>
+    <a:masterClrMapping/>
+  </p:clrMapOvr>
+</p:sld>
+</file>
+
+<file path=ppt/slides/slide38.xml><?xml version="1.0" encoding="utf-8"?>
+<p:sld xmlns:a="http://schemas.openxmlformats.org/drawingml/2006/main" xmlns:p="http://schemas.openxmlformats.org/presentationml/2006/main" xmlns:r="http://schemas.openxmlformats.org/officeDocument/2006/relationships">
+  <p:cSld>
+    <p:spTree>
+      <p:nvGrpSpPr>
+        <p:cNvPr id="1" name=""/>
+        <p:cNvGrpSpPr/>
+        <p:nvPr/>
+      </p:nvGrpSpPr>
+      <p:grpSpPr/>
+      <p:sp>
+        <p:nvSpPr>
+          <p:cNvPr id="2" name="Title 1"/>
+          <p:cNvSpPr>
+            <a:spLocks noGrp="1"/>
+          </p:cNvSpPr>
+          <p:nvPr>
+            <p:ph type="title"/>
+          </p:nvPr>
+        </p:nvSpPr>
+        <p:spPr/>
+        <p:txBody>
+          <a:bodyPr/>
+          <a:lstStyle/>
+          <a:p>
+            <a:r>
+              <a:rPr sz="3400"/>
+              <a:t>MCMC の中身③：今回の設定（emcee）</a:t>
+            </a:r>
+          </a:p>
+        </p:txBody>
+      </p:sp>
+      <p:sp>
+        <p:nvSpPr>
+          <p:cNvPr id="3" name="Content Placeholder 2"/>
+          <p:cNvSpPr>
+            <a:spLocks noGrp="1"/>
+          </p:cNvSpPr>
+          <p:nvPr>
+            <p:ph idx="1"/>
+          </p:nvPr>
+        </p:nvSpPr>
+        <p:spPr>
+          <a:xfrm>
+            <a:off x="841248" y="1463040"/>
+            <a:ext cx="10515600" cy="4114800"/>
+          </a:xfrm>
+        </p:spPr>
+        <p:txBody>
+          <a:bodyPr/>
+          <a:lstStyle/>
+          <a:p>
+            <a:pPr/>
+            <a:r>
+              <a:rPr sz="2000"/>
+              <a:t>32 人の歩行者が同時に歩く。次の一歩は、他の歩行者の位置を使って決める</a:t>
+            </a:r>
+          </a:p>
+          <a:p>
+            <a:pPr lvl="1"/>
+            <a:r>
+              <a:rPr sz="1600"/>
+              <a:t>候補：Y = X_j + Z (X_k − X_j)（X_k：自分、X_j：ランダムに選んだ他の歩行者）</a:t>
+            </a:r>
+          </a:p>
+          <a:p>
+            <a:pPr lvl="1"/>
+            <a:r>
+              <a:rPr sz="1600"/>
+              <a:t>Z は 1/2〜2 の乱数（確率 ∝ 1/√Z）、移る確率 = min(1, Z⁸ P(Y | D) / P(X_k | D))</a:t>
+            </a:r>
+          </a:p>
+          <a:p>
+            <a:pPr/>
+            <a:r>
+              <a:rPr sz="2000"/>
+              <a:t>出発点：最尤推定の点のすぐ近く。最初の 400 歩は捨て、5 歩ごとに記録</a:t>
+            </a:r>
+          </a:p>
+          <a:p>
+            <a:pPr/>
+            <a:r>
+              <a:rPr sz="2000"/>
+              <a:t>結果の例（20.8 GeV）：ハローの倍率 f_halo = 1.48（68% 区間 1.40–1.55）</a:t>
+            </a:r>
+          </a:p>
+          <a:p>
+            <a:pPr/>
+            <a:r>
+              <a:rPr sz="2000"/>
+              <a:t>注意：推奨の長さ（自己相関時間 τ の 50 倍）に届かないビンが多い</a:t>
+            </a:r>
+          </a:p>
+          <a:p>
+            <a:pPr lvl="1"/>
+            <a:r>
+              <a:rPr sz="1600"/>
+              <a:t>20.8 GeV で τ ≈ 127 歩、記録した長さ 5600 歩 &lt; 50τ。13 ビン中 2 ビンだけ到達</a:t>
+            </a:r>
+          </a:p>
+          <a:p>
+            <a:pPr lvl="1"/>
+            <a:r>
+              <a:rPr sz="1600"/>
+              <a:t>→ 誤差棒は目安。有意度 σ は Δln L から出すので影響しない</a:t>
+            </a:r>
+          </a:p>
+        </p:txBody>
+      </p:sp>
+      <p:sp>
+        <p:nvSpPr>
+          <p:cNvPr id="8" name="TextBox 7">
+            <a:extLst>
+              <a:ext uri="{FF2B5EF4-FFF2-40B4-BE49-F238E27FC236}">
+                <a16:creationId xmlns:a16="http://schemas.microsoft.com/office/drawing/2014/main" id="{F85CD606-E3CE-F314-B3EE-F3D7028115CB}"/>
+              </a:ext>
+            </a:extLst>
+          </p:cNvPr>
+          <p:cNvSpPr txBox="1"/>
+          <p:nvPr/>
+        </p:nvSpPr>
+        <p:spPr>
+          <a:xfrm>
+            <a:off x="5837182" y="5663239"/>
+            <a:ext cx="6093372" cy="923330"/>
+          </a:xfrm>
+          <a:prstGeom prst="rect">
+            <a:avLst/>
+          </a:prstGeom>
+          <a:noFill/>
+        </p:spPr>
+        <p:txBody>
+          <a:bodyPr wrap="square">
+            <a:spAutoFit/>
+          </a:bodyPr>
+          <a:lstStyle/>
+          <a:p>
+            <a:r>
+              <a:rPr lang="en-US" sz="1400" b="1"/>
+              <a:t>Reference:</a:t>
+            </a:r>
+            <a:r>
+              <a:rPr lang="en-US" sz="1400"/>
+              <a:t> J. Goodman &amp; J. Weare (2010), Comm. App. Math. Comp. Sci. 5, 65</a:t>
             </a:r>
             <a:endParaRPr lang="en-US"/>
           </a:p>
@@ -11867,7 +11695,7 @@
 </file>
 
 <file path=ppt/slides/slide8.xml><?xml version="1.0" encoding="utf-8"?>
-<p:sld xmlns:a="http://schemas.openxmlformats.org/drawingml/2006/main" xmlns:p="http://schemas.openxmlformats.org/presentationml/2006/main" xmlns:r="http://schemas.openxmlformats.org/officeDocument/2006/relationships">
+<p:sld xmlns:a="http://schemas.openxmlformats.org/drawingml/2006/main" xmlns:r="http://schemas.openxmlformats.org/officeDocument/2006/relationships" xmlns:p="http://schemas.openxmlformats.org/presentationml/2006/main">
   <p:cSld>
     <p:spTree>
       <p:nvGrpSpPr>
@@ -11875,7 +11703,14 @@
         <p:cNvGrpSpPr/>
         <p:nvPr/>
       </p:nvGrpSpPr>
-      <p:grpSpPr/>
+      <p:grpSpPr>
+        <a:xfrm>
+          <a:off x="0" y="0"/>
+          <a:ext cx="0" cy="0"/>
+          <a:chOff x="0" y="0"/>
+          <a:chExt cx="0" cy="0"/>
+        </a:xfrm>
+      </p:grpSpPr>
       <p:sp>
         <p:nvSpPr>
           <p:cNvPr id="2" name="Title 1"/>
@@ -11893,288 +11728,14 @@
           <a:p>
             <a:r>
               <a:rPr sz="3400"/>
-              <a:t>MCMC の中身①：何を求めているか</a:t>
-            </a:r>
-          </a:p>
-        </p:txBody>
-      </p:sp>
-      <p:sp>
-        <p:nvSpPr>
-          <p:cNvPr id="3" name="Content Placeholder 2"/>
-          <p:cNvSpPr>
-            <a:spLocks noGrp="1"/>
-          </p:cNvSpPr>
-          <p:nvPr>
-            <p:ph idx="1"/>
-          </p:nvPr>
-        </p:nvSpPr>
-        <p:spPr>
-          <a:xfrm>
-            <a:off x="841248" y="1463040"/>
-            <a:ext cx="10515600" cy="4114800"/>
-          </a:xfrm>
-        </p:spPr>
-        <p:txBody>
-          <a:bodyPr/>
-          <a:lstStyle/>
-          <a:p>
-            <a:pPr/>
-            <a:r>
-              <a:rPr sz="2200"/>
-              <a:t>知りたいもの：データ D を見たあと、倍率 θ = (f₁, …, f₉) がどの値をとりうるか</a:t>
-            </a:r>
-          </a:p>
-          <a:p>
-            <a:pPr/>
-            <a:r>
-              <a:rPr sz="2200"/>
-              <a:t>ベイズの定理：P(θ | D) = L(D | θ) π(θ) / P(D)</a:t>
-            </a:r>
-          </a:p>
-          <a:p>
-            <a:pPr lvl="1"/>
-            <a:r>
-              <a:rPr sz="1800"/>
-              <a:t>P(θ | D)：事後分布（データを見た後の、θ のもっともらしさ）</a:t>
-            </a:r>
-          </a:p>
-          <a:p>
-            <a:pPr lvl="1"/>
-            <a:r>
-              <a:rPr sz="1800"/>
-              <a:t>L(D | θ)：尤度（手法② の L）　π(θ)：事前分布（今回は一様）</a:t>
-            </a:r>
-          </a:p>
-          <a:p>
-            <a:pPr lvl="1"/>
-            <a:r>
-              <a:rPr sz="1800"/>
-              <a:t>P(D)：θ によらない定数 → 計算しなくてよい</a:t>
-            </a:r>
-          </a:p>
-          <a:p>
-            <a:pPr/>
-            <a:r>
-              <a:rPr sz="2200"/>
-              <a:t>つまり P(θ | D) ∝ L(D | θ) × π(θ)</a:t>
-            </a:r>
-          </a:p>
-          <a:p>
-            <a:pPr/>
-            <a:r>
-              <a:rPr sz="2200"/>
-              <a:t>ただし θ は 9 次元。1 次元を 100 点に区切っても 100⁹ = 10¹⁸ 通り → 全部は計算できない</a:t>
-            </a:r>
-          </a:p>
-          <a:p>
-            <a:pPr/>
-            <a:r>
-              <a:rPr sz="2200"/>
-              <a:t>→ 事後分布から「サンプルを取り出す」方法が MCMC</a:t>
-            </a:r>
-          </a:p>
-        </p:txBody>
-      </p:sp>
-      <p:sp>
-        <p:nvSpPr>
-          <p:cNvPr id="8" name="TextBox 7">
-            <a:extLst>
-              <a:ext uri="{FF2B5EF4-FFF2-40B4-BE49-F238E27FC236}">
-                <a16:creationId xmlns:a16="http://schemas.microsoft.com/office/drawing/2014/main" id="{F85CD606-E3CE-F314-B3EE-F3D7028115CB}"/>
-              </a:ext>
-            </a:extLst>
-          </p:cNvPr>
-          <p:cNvSpPr txBox="1"/>
-          <p:nvPr/>
-        </p:nvSpPr>
-        <p:spPr>
-          <a:xfrm>
-            <a:off x="5837182" y="5663239"/>
-            <a:ext cx="6093372" cy="923330"/>
-          </a:xfrm>
-          <a:prstGeom prst="rect">
-            <a:avLst/>
-          </a:prstGeom>
-          <a:noFill/>
-        </p:spPr>
-        <p:txBody>
-          <a:bodyPr wrap="square">
-            <a:spAutoFit/>
-          </a:bodyPr>
-          <a:lstStyle/>
-          <a:p>
-            <a:r>
-              <a:rPr lang="en-US" sz="1400" b="1"/>
-              <a:t>Reference:</a:t>
-            </a:r>
-            <a:r>
-              <a:rPr lang="en-US" sz="1400"/>
-              <a:t> D. Foreman-Mackey et al. (2013), PASP 125, 306</a:t>
-            </a:r>
-            <a:endParaRPr lang="en-US"/>
-          </a:p>
-        </p:txBody>
-      </p:sp>
-    </p:spTree>
-  </p:cSld>
-  <p:clrMapOvr>
-    <a:masterClrMapping/>
-  </p:clrMapOvr>
-</p:sld>
-</file>
-
-<file path=ppt/slides/slide9.xml><?xml version="1.0" encoding="utf-8"?>
-<p:sld xmlns:a="http://schemas.openxmlformats.org/drawingml/2006/main" xmlns:p="http://schemas.openxmlformats.org/presentationml/2006/main" xmlns:r="http://schemas.openxmlformats.org/officeDocument/2006/relationships">
-  <p:cSld>
-    <p:spTree>
-      <p:nvGrpSpPr>
-        <p:cNvPr id="1" name=""/>
-        <p:cNvGrpSpPr/>
-        <p:nvPr/>
-      </p:nvGrpSpPr>
-      <p:grpSpPr/>
-      <p:sp>
-        <p:nvSpPr>
-          <p:cNvPr id="2" name="Title 1"/>
-          <p:cNvSpPr>
-            <a:spLocks noGrp="1"/>
-          </p:cNvSpPr>
-          <p:nvPr>
-            <p:ph type="title"/>
-          </p:nvPr>
-        </p:nvSpPr>
-        <p:spPr/>
-        <p:txBody>
-          <a:bodyPr/>
-          <a:lstStyle/>
-          <a:p>
-            <a:r>
-              <a:rPr sz="3400"/>
-              <a:t>MCMC の中身②：歩き方（メトロポリス法）</a:t>
-            </a:r>
-          </a:p>
-        </p:txBody>
-      </p:sp>
-      <p:sp>
-        <p:nvSpPr>
-          <p:cNvPr id="3" name="Content Placeholder 2"/>
-          <p:cNvSpPr>
-            <a:spLocks noGrp="1"/>
-          </p:cNvSpPr>
-          <p:nvPr>
-            <p:ph idx="1"/>
-          </p:nvPr>
-        </p:nvSpPr>
-        <p:spPr>
-          <a:xfrm>
-            <a:off x="841248" y="1463040"/>
-            <a:ext cx="5394960" cy="4114800"/>
-          </a:xfrm>
-        </p:spPr>
-        <p:txBody>
-          <a:bodyPr/>
-          <a:lstStyle/>
-          <a:p>
-            <a:pPr/>
-            <a:r>
-              <a:rPr sz="2000"/>
-              <a:t>① 今の点 θ から、少しずらした候補 θ′ を作る</a:t>
-            </a:r>
-          </a:p>
-          <a:p>
-            <a:pPr/>
-            <a:r>
-              <a:rPr sz="2000"/>
-              <a:t>② 比 r = P(θ′ | D) / P(θ | D) を計算</a:t>
-            </a:r>
-          </a:p>
-          <a:p>
-            <a:pPr lvl="1"/>
-            <a:r>
-              <a:rPr sz="1600"/>
-              <a:t>P(D) は分母分子で消える</a:t>
-            </a:r>
-          </a:p>
-          <a:p>
-            <a:pPr/>
-            <a:r>
-              <a:rPr sz="2000"/>
-              <a:t>③ r ≥ 1 なら移る。r &lt; 1 なら確率 r で移る</a:t>
-            </a:r>
-          </a:p>
-          <a:p>
-            <a:pPr lvl="1"/>
-            <a:r>
-              <a:rPr sz="1600"/>
-              <a:t>移らなければ、同じ点をもう一度記録</a:t>
-            </a:r>
-          </a:p>
-          <a:p>
-            <a:pPr/>
-            <a:r>
-              <a:rPr sz="2000"/>
-              <a:t>④ ①〜③ を何千回もくり返す</a:t>
-            </a:r>
-          </a:p>
-          <a:p>
-            <a:pPr/>
-            <a:r>
-              <a:rPr sz="2000"/>
-              <a:t>歩いた跡のヒストグラム = 事後分布</a:t>
-            </a:r>
-          </a:p>
-          <a:p>
-            <a:pPr lvl="1"/>
-            <a:r>
-              <a:rPr sz="1600"/>
-              <a:t>下がる方向にも確率的に進むので、山の広がり（誤差）まで分かる</a:t>
-            </a:r>
-          </a:p>
-        </p:txBody>
-      </p:sp>
-      <p:sp>
-        <p:nvSpPr>
-          <p:cNvPr id="8" name="TextBox 7">
-            <a:extLst>
-              <a:ext uri="{FF2B5EF4-FFF2-40B4-BE49-F238E27FC236}">
-                <a16:creationId xmlns:a16="http://schemas.microsoft.com/office/drawing/2014/main" id="{F85CD606-E3CE-F314-B3EE-F3D7028115CB}"/>
-              </a:ext>
-            </a:extLst>
-          </p:cNvPr>
-          <p:cNvSpPr txBox="1"/>
-          <p:nvPr/>
-        </p:nvSpPr>
-        <p:spPr>
-          <a:xfrm>
-            <a:off x="5837182" y="5663239"/>
-            <a:ext cx="6093372" cy="923330"/>
-          </a:xfrm>
-          <a:prstGeom prst="rect">
-            <a:avLst/>
-          </a:prstGeom>
-          <a:noFill/>
-        </p:spPr>
-        <p:txBody>
-          <a:bodyPr wrap="square">
-            <a:spAutoFit/>
-          </a:bodyPr>
-          <a:lstStyle/>
-          <a:p>
-            <a:r>
-              <a:rPr lang="en-US" sz="1400" b="1"/>
-              <a:t>Reference:</a:t>
-            </a:r>
-            <a:r>
-              <a:rPr lang="en-US" sz="1400"/>
-              <a:t> N. Metropolis et al. (1953), J. Chem. Phys. 21, 1087</a:t>
-            </a:r>
-            <a:endParaRPr lang="en-US"/>
+              <a:t>結果：Totani の超過を再現</a:t>
+            </a:r>
           </a:p>
         </p:txBody>
       </p:sp>
       <p:pic>
         <p:nvPicPr>
-          <p:cNvPr id="9" name="Picture 8" descr="fig_mcmc_toy.png"/>
+          <p:cNvPr id="3" name="Picture 2" descr="fig_significance_v20r.png"/>
           <p:cNvPicPr>
             <a:picLocks noChangeAspect="1"/>
           </p:cNvPicPr>
@@ -12188,8 +11749,201 @@
         </p:blipFill>
         <p:spPr>
           <a:xfrm>
-            <a:off x="6309360" y="1828800"/>
-            <a:ext cx="5669280" cy="2267712"/>
+            <a:off x="2377440" y="1234440"/>
+            <a:ext cx="5334000" cy="4160520"/>
+          </a:xfrm>
+          <a:prstGeom prst="rect">
+            <a:avLst/>
+          </a:prstGeom>
+        </p:spPr>
+      </p:pic>
+      <p:sp>
+        <p:nvSpPr>
+          <p:cNvPr id="4" name="TextBox 3"/>
+          <p:cNvSpPr txBox="1"/>
+          <p:nvPr/>
+        </p:nvSpPr>
+        <p:spPr>
+          <a:xfrm>
+            <a:off x="457200" y="5486400"/>
+            <a:ext cx="11247120" cy="457200"/>
+          </a:xfrm>
+          <a:prstGeom prst="rect">
+            <a:avLst/>
+          </a:prstGeom>
+          <a:noFill/>
+        </p:spPr>
+        <p:txBody>
+          <a:bodyPr wrap="square">
+            <a:spAutoFit/>
+          </a:bodyPr>
+          <a:lstStyle/>
+          <a:p>
+            <a:r>
+              <a:rPr sz="2000"/>
+              <a:t>20.8 GeV で 19.0σ（Totani は 13–19σ）。山の位置も一致</a:t>
+            </a:r>
+          </a:p>
+        </p:txBody>
+      </p:sp>
+      <p:sp>
+        <p:nvSpPr>
+          <p:cNvPr id="8" name="TextBox 7">
+            <a:extLst>
+              <a:ext uri="{FF2B5EF4-FFF2-40B4-BE49-F238E27FC236}">
+                <a16:creationId xmlns:a16="http://schemas.microsoft.com/office/drawing/2014/main" id="{F85CD606-E3CE-F314-B3EE-F3D7028115CB}"/>
+              </a:ext>
+            </a:extLst>
+          </p:cNvPr>
+          <p:cNvSpPr txBox="1"/>
+          <p:nvPr/>
+        </p:nvSpPr>
+        <p:spPr>
+          <a:xfrm>
+            <a:off x="5837182" y="6035040"/>
+            <a:ext cx="6093372" cy="923330"/>
+          </a:xfrm>
+          <a:prstGeom prst="rect">
+            <a:avLst/>
+          </a:prstGeom>
+          <a:noFill/>
+        </p:spPr>
+        <p:txBody>
+          <a:bodyPr wrap="square">
+            <a:spAutoFit/>
+          </a:bodyPr>
+          <a:lstStyle/>
+          <a:p>
+            <a:r>
+              <a:rPr lang="en-US" sz="1400" b="1"/>
+              <a:t>Reference:</a:t>
+            </a:r>
+            <a:r>
+              <a:rPr lang="en-US" sz="1400"/>
+              <a:t> T. Totani (2025), arXiv:2507.07209 Fig. 9</a:t>
+            </a:r>
+            <a:endParaRPr lang="en-US"/>
+          </a:p>
+        </p:txBody>
+      </p:sp>
+    </p:spTree>
+  </p:cSld>
+  <p:clrMapOvr>
+    <a:masterClrMapping/>
+  </p:clrMapOvr>
+</p:sld>
+</file>
+
+<file path=ppt/slides/slide9.xml><?xml version="1.0" encoding="utf-8"?>
+<p:sld xmlns:a="http://schemas.openxmlformats.org/drawingml/2006/main" xmlns:r="http://schemas.openxmlformats.org/officeDocument/2006/relationships" xmlns:p="http://schemas.openxmlformats.org/presentationml/2006/main">
+  <p:cSld>
+    <p:spTree>
+      <p:nvGrpSpPr>
+        <p:cNvPr id="1" name=""/>
+        <p:cNvGrpSpPr/>
+        <p:nvPr/>
+      </p:nvGrpSpPr>
+      <p:grpSpPr>
+        <a:xfrm>
+          <a:off x="0" y="0"/>
+          <a:ext cx="0" cy="0"/>
+          <a:chOff x="0" y="0"/>
+          <a:chExt cx="0" cy="0"/>
+        </a:xfrm>
+      </p:grpSpPr>
+      <p:sp>
+        <p:nvSpPr>
+          <p:cNvPr id="2" name="Title 1"/>
+          <p:cNvSpPr>
+            <a:spLocks noGrp="1"/>
+          </p:cNvSpPr>
+          <p:nvPr>
+            <p:ph type="title"/>
+          </p:nvPr>
+        </p:nvSpPr>
+        <p:spPr/>
+        <p:txBody>
+          <a:bodyPr/>
+          <a:lstStyle/>
+          <a:p>
+            <a:r>
+              <a:rPr sz="3400"/>
+              <a:t>問題：ハローと ICS が見分けにくい（縮退）</a:t>
+            </a:r>
+          </a:p>
+        </p:txBody>
+      </p:sp>
+      <p:sp>
+        <p:nvSpPr>
+          <p:cNvPr id="3" name="Content Placeholder 2"/>
+          <p:cNvSpPr>
+            <a:spLocks noGrp="1"/>
+          </p:cNvSpPr>
+          <p:nvPr>
+            <p:ph idx="1"/>
+          </p:nvPr>
+        </p:nvSpPr>
+        <p:spPr>
+          <a:xfrm>
+            <a:off x="841248" y="1463040"/>
+            <a:ext cx="5669280" cy="4937760"/>
+          </a:xfrm>
+        </p:spPr>
+        <p:txBody>
+          <a:bodyPr/>
+          <a:lstStyle/>
+          <a:p>
+            <a:r>
+              <a:rPr sz="2200"/>
+              <a:t>ICS とハローは、空の上での形がよく似ている</a:t>
+            </a:r>
+          </a:p>
+          <a:p>
+            <a:pPr lvl="1"/>
+            <a:r>
+              <a:rPr sz="1800"/>
+              <a:t>緯度 25° → 55° で暗くなる割合：ハロー 2.74 倍、ICS 2.75 倍</a:t>
+            </a:r>
+          </a:p>
+          <a:p>
+            <a:r>
+              <a:rPr sz="2200"/>
+              <a:t>違いは「銀河中心の方向に集まっているか」だけ</a:t>
+            </a:r>
+          </a:p>
+          <a:p>
+            <a:r>
+              <a:rPr sz="2200"/>
+              <a:t>ハローを入れると、その分 ICS が暗くなる</a:t>
+            </a:r>
+          </a:p>
+          <a:p>
+            <a:pPr lvl="1"/>
+            <a:r>
+              <a:rPr sz="1800"/>
+              <a:t>ハローの光の 8〜10 割は ICS から移ったもの</a:t>
+            </a:r>
+          </a:p>
+        </p:txBody>
+      </p:sp>
+      <p:pic>
+        <p:nvPicPr>
+          <p:cNvPr id="4" name="Picture 3" descr="fig_ics_norm_v20r.png"/>
+          <p:cNvPicPr>
+            <a:picLocks noChangeAspect="1"/>
+          </p:cNvPicPr>
+          <p:nvPr/>
+        </p:nvPicPr>
+        <p:blipFill>
+          <a:blip r:embed="rId3"/>
+          <a:stretch>
+            <a:fillRect/>
+          </a:stretch>
+        </p:blipFill>
+        <p:spPr>
+          <a:xfrm>
+            <a:off x="6309360" y="1737360"/>
+            <a:ext cx="5669280" cy="3968496"/>
           </a:xfrm>
           <a:prstGeom prst="rect">
             <a:avLst/>

--- a/slides/2026-10-02_研究進捗報告_claude.pptx
+++ b/slides/2026-10-02_研究進捗報告_claude.pptx
@@ -714,12 +714,12 @@
           </a:p>
           <a:p>
             <a:r>
-              <a:t>予測 6.4σ と実測 5.0σ の残りの差は、バブル外でハローの倍率が 0.77 倍と低いことで説明できる。この内外の差は約 1.5σ で、意味のある差ではない。</a:t>
-            </a:r>
-          </a:p>
-          <a:p>
-            <a:r>
-              <a:t>対照: 同じ形の矩形を経度方向に ±20°, ±30°, ±38° ずらして外すと 13.4〜16.3σ。</a:t>
+              <a:t>予測 6.6σ と実測 5.0σ の残りの差は、バブル外でハローの倍率が 0.77 倍と低いことで説明できる。この内外の差は約 1.5σ で、意味のある差ではない。</a:t>
+            </a:r>
+          </a:p>
+          <a:p>
+            <a:r>
+              <a:t>対照: 同じ形の矩形を経度方向に ±20°, ±30°, ±38° ずらして外すと 14.6〜16.4σ (Totani と同じやり方)。</a:t>
             </a:r>
           </a:p>
           <a:p>
@@ -804,7 +804,7 @@
           </a:p>
           <a:p>
             <a:r>
-              <a:t>3 分割 = 星の光・ちり・宇宙背景の光、の 3 種類の光を電子がはね上げたもの。19.5σ と 18.4σ はクラウドの計算機で同じ条件で比べた値 (本人 PC の基準は 19.0σ なので、差で言う)。Totani §3.4.4 の同種の確認とも同じ結論。</a:t>
+              <a:t>3 分割 = 星の光・ちり・宇宙背景の光、の 3 種類の光を電子がはね上げたもの。19.5σ と 18.4σ はクラウドの計算機で、Totani と同じやり方で比べた値 (どちらも同じ条件なので、差で言う)。Totani §3.4.4 の同種の確認とも同じ結論。</a:t>
             </a:r>
           </a:p>
           <a:p>
@@ -1054,7 +1054,7 @@
           </a:p>
           <a:p>
             <a:r>
-              <a:t>有意度は 19.1σ → 19.0σ でほぼ同じ。全 13 ビンで差は 1σ 未満。</a:t>
+              <a:t>有意度は 19.1σ → 19.0σ でほぼ同じ。10/2 に最良値の求め方を Totani と同じ (MCMC) に直して計算し直し、19.5σ (クラウド)。全 13 ビンで差は 1σ 未満。</a:t>
             </a:r>
           </a:p>
         </p:txBody>
@@ -1449,7 +1449,7 @@
           </a:p>
           <a:p>
             <a:r>
-              <a:t>ずれ = (1.73 − 0.39) ÷ 1 = 1.3σ。天の川側の局所密度 0.42 GeV/cm³ の場合。</a:t>
+              <a:t>ずれ = (1.77 − 0.39) ÷ 1 = 1.4σ。天の川のハローの明るさは Totani と同じやり方の最良値。天の川側の局所密度 0.42 GeV/cm³ の場合。</a:t>
             </a:r>
           </a:p>
           <a:p>
@@ -2344,7 +2344,7 @@
           <a:lstStyle/>
           <a:p>
             <a:r>
-              <a:t>灰色の山: J の誤差を入れたときの予測の分布 (20 万回)。点線: J の誤差なしの予測 1.73。黒い点: 実測 0.39、横棒は測定の揺れ ±1.26。</a:t>
+              <a:t>灰色の山: J の誤差を入れたときの予測の分布 (20 万回)。点線: J の誤差なしの予測 1.77。黒い点: 実測 0.39、横棒は測定の揺れ ±1.26。</a:t>
             </a:r>
           </a:p>
           <a:p>
@@ -2519,12 +2519,12 @@
           </a:p>
           <a:p>
             <a:r>
-              <a:t>ρ☉ = 0.3: 期待 3.38 (誤差なし) / 4.74 (誤差あり、68% 2.58–9.72)、ずれ 2.4σ / 2.0σ (s = 1.26)。</a:t>
-            </a:r>
-          </a:p>
-          <a:p>
-            <a:r>
-              <a:t>ρ☉ = 0.6: 期待 0.85 / 1.19 (0.64–2.43)、ずれ 0.4σ / 0.7σ。</a:t>
+              <a:t>ρ☉ = 0.3: 期待 3.46 (誤差なし) / 4.86 (誤差あり、68% 2.64–9.95)、ずれ 2.4σ / 2.1σ (s = 1.26)。</a:t>
+            </a:r>
+          </a:p>
+          <a:p>
+            <a:r>
+              <a:t>ρ☉ = 0.6: 期待 0.87 / 1.21 (0.66–2.49)、ずれ 0.4σ / 0.7σ。</a:t>
             </a:r>
           </a:p>
           <a:p>
@@ -3087,7 +3087,7 @@
           </a:p>
           <a:p>
             <a:r>
-              <a:t>数字は results/mcmc_allbins_gasICS_v20r_rerun/mcmc_bin06.json から。</a:t>
+              <a:t>数字は 10/2 に Totani と同じやり方で計算し直した結果 (クラウド、cloud_reports/2026-10-02_totani_mode/)。最良値が頂上に届いているかは、勾配法で頂上を求めて確認した (13 ビンすべてで ln L の差 0.6 以下、有意度の差 0.28σ 以下。確認のためだけで、結果には使っていない)。</a:t>
             </a:r>
           </a:p>
         </p:txBody>
@@ -3167,7 +3167,7 @@
           </a:p>
           <a:p>
             <a:r>
-              <a:t>最大化は L-BFGS-B (範囲の制約つきの勾配法) で、出発点を変えて何度か行う。</a:t>
+              <a:t>最大化は Totani (2025) §2.2 と同じく MCMC (emcee) で行い、歩いた中で ln L が最大の点を最良値とする。</a:t>
             </a:r>
           </a:p>
         </p:txBody>
@@ -3402,12 +3402,12 @@
           <a:lstStyle/>
           <a:p>
             <a:r>
-              <a:t>青が本研究 (v20r、10/1 にコードの版と設定の記録つきで再計算)、赤が Totani Fig. 9。</a:t>
-            </a:r>
-          </a:p>
-          <a:p>
-            <a:r>
-              <a:t>ただしこの 19.0σ は Wilks の定理を信じた「名目の値」。後で較正する。</a:t>
+              <a:t>青が本研究 (10/2 に Totani と同じやり方 = MCMC で最良値、で計算し直した。クラウドの計算機)、赤が Totani Fig. 9。本人 PC での確定値は後日。</a:t>
+            </a:r>
+          </a:p>
+          <a:p>
+            <a:r>
+              <a:t>ただしこの 19.5σ は Wilks の定理を信じた「名目の値」。後で較正する。</a:t>
             </a:r>
           </a:p>
         </p:txBody>
@@ -3487,7 +3487,7 @@
           </a:p>
           <a:p>
             <a:r>
-              <a:t>図: ICS の倍率 (GALPROP の予測の何倍か)。ハローなしでは全エネルギーで約 1.6 倍で平ら。ハローを入れると、ハローが効くビンでだけへこむ。</a:t>
+              <a:t>図: ICS の倍率 (GALPROP の予測の何倍か)。ハローなしでは全エネルギーで約 1.4〜1.6 倍でほぼ平ら (最良値)。ハローを入れると、ハローが効くビンでだけへこむ。</a:t>
             </a:r>
           </a:p>
         </p:txBody>
@@ -6911,7 +6911,7 @@
 </file>
 
 <file path=ppt/slides/slide10.xml><?xml version="1.0" encoding="utf-8"?>
-<p:sld xmlns:a="http://schemas.openxmlformats.org/drawingml/2006/main" xmlns:r="http://schemas.openxmlformats.org/officeDocument/2006/relationships" xmlns:p="http://schemas.openxmlformats.org/presentationml/2006/main">
+<p:sld xmlns:a="http://schemas.openxmlformats.org/drawingml/2006/main" xmlns:p="http://schemas.openxmlformats.org/presentationml/2006/main" xmlns:r="http://schemas.openxmlformats.org/officeDocument/2006/relationships">
   <p:cSld>
     <p:spTree>
       <p:nvGrpSpPr>
@@ -6919,14 +6919,7 @@
         <p:cNvGrpSpPr/>
         <p:nvPr/>
       </p:nvGrpSpPr>
-      <p:grpSpPr>
-        <a:xfrm>
-          <a:off x="0" y="0"/>
-          <a:ext cx="0" cy="0"/>
-          <a:chOff x="0" y="0"/>
-          <a:chExt cx="0" cy="0"/>
-        </a:xfrm>
-      </p:grpSpPr>
+      <p:grpSpPr/>
       <p:sp>
         <p:nvSpPr>
           <p:cNvPr id="2" name="Title 1"/>
@@ -6944,7 +6937,7 @@
           <a:p>
             <a:r>
               <a:rPr sz="3400"/>
-              <a:t>縮退が引き起こした 3 つの疑問</a:t>
+              <a:t>MCMC の中身③：今回の設定（emcee）</a:t>
             </a:r>
           </a:p>
         </p:txBody>
@@ -6962,56 +6955,107 @@
         <p:spPr>
           <a:xfrm>
             <a:off x="841248" y="1463040"/>
-            <a:ext cx="10515600" cy="4937760"/>
+            <a:ext cx="10515600" cy="4114800"/>
           </a:xfrm>
         </p:spPr>
         <p:txBody>
           <a:bodyPr/>
           <a:lstStyle/>
           <a:p>
-            <a:r>
-              <a:rPr sz="2400"/>
-              <a:t>① バブル領域を外すと 19.0σ → 5.0σ に落ちる</a:t>
+            <a:pPr/>
+            <a:r>
+              <a:rPr sz="2000"/>
+              <a:t>32 人の歩行者が同時に歩く。次の一歩は、他の歩行者の位置を使って決める</a:t>
             </a:r>
           </a:p>
           <a:p>
             <a:pPr lvl="1"/>
             <a:r>
+              <a:rPr sz="1600"/>
+              <a:t>候補：Y = X_j + Z (X_k − X_j)（X_k：自分、X_j：ランダムに選んだ他の歩行者）</a:t>
+            </a:r>
+          </a:p>
+          <a:p>
+            <a:pPr lvl="1"/>
+            <a:r>
+              <a:rPr sz="1600"/>
+              <a:t>Z は 1/2〜2 の乱数（確率 ∝ 1/√Z）、移る確率 = min(1, Z⁸ P(Y | D) / P(X_k | D))</a:t>
+            </a:r>
+          </a:p>
+          <a:p>
+            <a:pPr/>
+            <a:r>
               <a:rPr sz="2000"/>
-              <a:t>ハローは、本当は ICS やバブルの間違いでは？</a:t>
-            </a:r>
-          </a:p>
-          <a:p>
-            <a:r>
-              <a:rPr sz="2400"/>
-              <a:t>② 何も無い空でも、最大 4.5σ が出る</a:t>
+              <a:t>出発点：Totani と同じ初期値。6000 歩歩き、尤度が最大の点を最良値にする</a:t>
+            </a:r>
+          </a:p>
+          <a:p>
+            <a:pPr/>
+            <a:r>
+              <a:rPr sz="2000"/>
+              <a:t>結果の例（20.8 GeV）：ハローの倍率 f_halo = 1.51（68% 区間 1.43–1.61）</a:t>
+            </a:r>
+          </a:p>
+          <a:p>
+            <a:pPr/>
+            <a:r>
+              <a:rPr sz="2000"/>
+              <a:t>注意：推奨の長さ（自己相関時間 τ の 50 倍）に届かないビンが多い</a:t>
             </a:r>
           </a:p>
           <a:p>
             <a:pPr lvl="1"/>
             <a:r>
-              <a:rPr sz="2000"/>
-              <a:t>σ をそのまま信じてよいのか？</a:t>
-            </a:r>
-          </a:p>
-          <a:p>
-            <a:r>
-              <a:rPr sz="2400"/>
-              <a:t>③ 7/23 に出した 19.1σ が再現できない</a:t>
+              <a:rPr sz="1600"/>
+              <a:t>20.8 GeV で τ ≈ 650 歩、6000 歩 &lt; 50τ</a:t>
             </a:r>
           </a:p>
           <a:p>
             <a:pPr lvl="1"/>
             <a:r>
-              <a:rPr sz="2000"/>
-              <a:t>結果そのものを信じてよいのか？</a:t>
-            </a:r>
-          </a:p>
-          <a:p>
-            <a:r>
-              <a:rPr sz="2400"/>
-              <a:t>→ 次から、1 つずつ調べた結果</a:t>
-            </a:r>
+              <a:rPr sz="1600"/>
+              <a:t>→ 誤差棒は目安。ただし最良値は尤度の頂上に届いている（頂上との差は ln L で 0.6 以下）</a:t>
+            </a:r>
+          </a:p>
+        </p:txBody>
+      </p:sp>
+      <p:sp>
+        <p:nvSpPr>
+          <p:cNvPr id="8" name="TextBox 7">
+            <a:extLst>
+              <a:ext uri="{FF2B5EF4-FFF2-40B4-BE49-F238E27FC236}">
+                <a16:creationId xmlns:a16="http://schemas.microsoft.com/office/drawing/2014/main" id="{F85CD606-E3CE-F314-B3EE-F3D7028115CB}"/>
+              </a:ext>
+            </a:extLst>
+          </p:cNvPr>
+          <p:cNvSpPr txBox="1"/>
+          <p:nvPr/>
+        </p:nvSpPr>
+        <p:spPr>
+          <a:xfrm>
+            <a:off x="5837182" y="5663239"/>
+            <a:ext cx="6093372" cy="923330"/>
+          </a:xfrm>
+          <a:prstGeom prst="rect">
+            <a:avLst/>
+          </a:prstGeom>
+          <a:noFill/>
+        </p:spPr>
+        <p:txBody>
+          <a:bodyPr wrap="square">
+            <a:spAutoFit/>
+          </a:bodyPr>
+          <a:lstStyle/>
+          <a:p>
+            <a:r>
+              <a:rPr lang="en-US" sz="1400" b="1"/>
+              <a:t>Reference:</a:t>
+            </a:r>
+            <a:r>
+              <a:rPr lang="en-US" sz="1400"/>
+              <a:t> J. Goodman &amp; J. Weare (2010), Comm. App. Math. Comp. Sci. 5, 65</a:t>
+            </a:r>
+            <a:endParaRPr lang="en-US"/>
           </a:p>
         </p:txBody>
       </p:sp>
@@ -7057,66 +7101,102 @@
           <a:p>
             <a:r>
               <a:rPr sz="3400"/>
-              <a:t>① を調べる：手がかりはどこにあるか</a:t>
-            </a:r>
-          </a:p>
-        </p:txBody>
-      </p:sp>
-      <p:sp>
-        <p:nvSpPr>
-          <p:cNvPr id="3" name="Content Placeholder 2"/>
-          <p:cNvSpPr>
-            <a:spLocks noGrp="1"/>
-          </p:cNvSpPr>
-          <p:nvPr>
-            <p:ph idx="1"/>
-          </p:nvPr>
-        </p:nvSpPr>
+              <a:t>結果：Totani の超過を再現</a:t>
+            </a:r>
+          </a:p>
+        </p:txBody>
+      </p:sp>
+      <p:pic>
+        <p:nvPicPr>
+          <p:cNvPr id="9" name="Picture 8" descr="significance_spectrum.png"/>
+          <p:cNvPicPr>
+            <a:picLocks noChangeAspect="1"/>
+          </p:cNvPicPr>
+          <p:nvPr/>
+        </p:nvPicPr>
+        <p:blipFill>
+          <a:blip r:embed="rId4"/>
+          <a:srcRect/>
+          <a:stretch>
+            <a:fillRect/>
+          </a:stretch>
+        </p:blipFill>
         <p:spPr>
           <a:xfrm>
-            <a:off x="841248" y="1463040"/>
-            <a:ext cx="10515600" cy="4937760"/>
+            <a:off x="2377440" y="1234440"/>
+            <a:ext cx="5334000" cy="4160520"/>
           </a:xfrm>
+          <a:prstGeom prst="rect">
+            <a:avLst/>
+          </a:prstGeom>
         </p:spPr>
-        <p:txBody>
-          <a:bodyPr/>
-          <a:lstStyle/>
-          <a:p>
-            <a:r>
-              <a:rPr sz="2200"/>
-              <a:t>フィッシャー情報：データがパラメータをどれだけ決められるか</a:t>
-            </a:r>
-          </a:p>
-          <a:p>
-            <a:r>
-              <a:rPr sz="2200"/>
-              <a:t>ICS など他の成分では説明できない「ハローだけの手がかり」を、空の場所ごとに計算</a:t>
-            </a:r>
-          </a:p>
-          <a:p>
-            <a:pPr lvl="1"/>
-            <a:r>
-              <a:rPr sz="1800"/>
-              <a:t>その 54% がバブル領域（面積は 34%）に集中</a:t>
-            </a:r>
-          </a:p>
-          <a:p>
-            <a:r>
-              <a:rPr sz="2200"/>
-              <a:t>手がかりの減り方だけで予測すると 6.4σ、実測 5.0σ</a:t>
-            </a:r>
-          </a:p>
-          <a:p>
-            <a:r>
-              <a:rPr sz="2200"/>
-              <a:t>同じ形の領域を横にずらして外すと 13〜16σ（予測とも一致）</a:t>
-            </a:r>
-          </a:p>
-          <a:p>
-            <a:r>
-              <a:rPr sz="2200"/>
-              <a:t>→ 19 → 5σ は「手がかりを捨てた」から。汚染の証拠ではない</a:t>
-            </a:r>
+      </p:pic>
+      <p:sp>
+        <p:nvSpPr>
+          <p:cNvPr id="4" name="TextBox 3"/>
+          <p:cNvSpPr txBox="1"/>
+          <p:nvPr/>
+        </p:nvSpPr>
+        <p:spPr>
+          <a:xfrm>
+            <a:off x="457200" y="5486400"/>
+            <a:ext cx="11247120" cy="457200"/>
+          </a:xfrm>
+          <a:prstGeom prst="rect">
+            <a:avLst/>
+          </a:prstGeom>
+          <a:noFill/>
+        </p:spPr>
+        <p:txBody>
+          <a:bodyPr wrap="square">
+            <a:spAutoFit/>
+          </a:bodyPr>
+          <a:lstStyle/>
+          <a:p>
+            <a:r>
+              <a:rPr sz="2000"/>
+              <a:t>20.8 GeV で 19.5σ（Totani は 13–19σ）。山の位置も一致</a:t>
+            </a:r>
+          </a:p>
+        </p:txBody>
+      </p:sp>
+      <p:sp>
+        <p:nvSpPr>
+          <p:cNvPr id="8" name="TextBox 7">
+            <a:extLst>
+              <a:ext uri="{FF2B5EF4-FFF2-40B4-BE49-F238E27FC236}">
+                <a16:creationId xmlns:a16="http://schemas.microsoft.com/office/drawing/2014/main" id="{F85CD606-E3CE-F314-B3EE-F3D7028115CB}"/>
+              </a:ext>
+            </a:extLst>
+          </p:cNvPr>
+          <p:cNvSpPr txBox="1"/>
+          <p:nvPr/>
+        </p:nvSpPr>
+        <p:spPr>
+          <a:xfrm>
+            <a:off x="5837182" y="6035040"/>
+            <a:ext cx="6093372" cy="923330"/>
+          </a:xfrm>
+          <a:prstGeom prst="rect">
+            <a:avLst/>
+          </a:prstGeom>
+          <a:noFill/>
+        </p:spPr>
+        <p:txBody>
+          <a:bodyPr wrap="square">
+            <a:spAutoFit/>
+          </a:bodyPr>
+          <a:lstStyle/>
+          <a:p>
+            <a:r>
+              <a:rPr lang="en-US" sz="1400" b="1"/>
+              <a:t>Reference:</a:t>
+            </a:r>
+            <a:r>
+              <a:rPr lang="en-US" sz="1400"/>
+              <a:t> T. Totani (2025), arXiv:2507.07209 Fig. 9</a:t>
+            </a:r>
+            <a:endParaRPr lang="en-US"/>
           </a:p>
         </p:txBody>
       </p:sp>
@@ -7162,7 +7242,7 @@
           <a:p>
             <a:r>
               <a:rPr sz="3400"/>
-              <a:t>① を調べる：ICS が犯人なら</a:t>
+              <a:t>問題：ハローと ICS が見分けにくい（縮退）</a:t>
             </a:r>
           </a:p>
         </p:txBody>
@@ -7180,7 +7260,7 @@
         <p:spPr>
           <a:xfrm>
             <a:off x="841248" y="1463040"/>
-            <a:ext cx="10515600" cy="4114800"/>
+            <a:ext cx="5669280" cy="4937760"/>
           </a:xfrm>
         </p:spPr>
         <p:txBody>
@@ -7189,90 +7269,62 @@
           <a:p>
             <a:r>
               <a:rPr sz="2200"/>
-              <a:t>ICS をバブルの内と外で別々の明るさにして当てはめた</a:t>
+              <a:t>ICS とハローは、空の上での形がよく似ている</a:t>
             </a:r>
           </a:p>
           <a:p>
             <a:pPr lvl="1"/>
             <a:r>
               <a:rPr sz="1800"/>
-              <a:t>内側が約 2.3 倍明るければ、ハローの改善の 92% を ICS が説明</a:t>
+              <a:t>緯度 25° → 55° で暗くなる割合：ハロー 2.74 倍、ICS 2.75 倍</a:t>
             </a:r>
           </a:p>
           <a:p>
             <a:r>
               <a:rPr sz="2200"/>
-              <a:t>ICS の計算の近似（等方近似）を直しても 1.1〜1.3 倍</a:t>
+              <a:t>違いは「銀河中心の方向に集まっているか」だけ</a:t>
+            </a:r>
+          </a:p>
+          <a:p>
+            <a:r>
+              <a:rPr sz="2200"/>
+              <a:t>ハローを入れると、その分 ICS が暗くなる</a:t>
             </a:r>
           </a:p>
           <a:p>
             <a:pPr lvl="1"/>
             <a:r>
               <a:rPr sz="1800"/>
-              <a:t>しかも外側のほうが大きくなる → 2.3 倍には届かない</a:t>
-            </a:r>
-          </a:p>
-          <a:p>
-            <a:r>
-              <a:rPr sz="2200"/>
-              <a:t>ICS を 3 種類に分けて、それぞれ自由に動かしても</a:t>
-            </a:r>
-          </a:p>
-          <a:p>
-            <a:pPr lvl="1"/>
-            <a:r>
-              <a:rPr sz="1800"/>
-              <a:t>19.5σ → 18.4σ（約 1σ しか下がらない）</a:t>
-            </a:r>
-          </a:p>
-          <a:p>
-            <a:r>
-              <a:rPr sz="2200"/>
-              <a:t>→ ICS の「明るさ」の間違いでは、ハローを説明できない</a:t>
-            </a:r>
-          </a:p>
-        </p:txBody>
-      </p:sp>
-      <p:sp>
-        <p:nvSpPr>
-          <p:cNvPr id="8" name="TextBox 7">
-            <a:extLst>
-              <a:ext uri="{FF2B5EF4-FFF2-40B4-BE49-F238E27FC236}">
-                <a16:creationId xmlns:a16="http://schemas.microsoft.com/office/drawing/2014/main" id="{F85CD606-E3CE-F314-B3EE-F3D7028115CB}"/>
-              </a:ext>
-            </a:extLst>
-          </p:cNvPr>
-          <p:cNvSpPr txBox="1"/>
+              <a:t>ICS の倍率 1.39 → 0.48（20.8 GeV）</a:t>
+            </a:r>
+          </a:p>
+        </p:txBody>
+      </p:sp>
+      <p:pic>
+        <p:nvPicPr>
+          <p:cNvPr id="5" name="Picture 4" descr="fig_ics_norm_totani.png"/>
+          <p:cNvPicPr>
+            <a:picLocks noChangeAspect="1"/>
+          </p:cNvPicPr>
           <p:nvPr/>
-        </p:nvSpPr>
+        </p:nvPicPr>
+        <p:blipFill>
+          <a:blip r:embed="rId4"/>
+          <a:srcRect/>
+          <a:stretch>
+            <a:fillRect/>
+          </a:stretch>
+        </p:blipFill>
         <p:spPr>
           <a:xfrm>
-            <a:off x="5837182" y="5663239"/>
-            <a:ext cx="6093372" cy="923330"/>
+            <a:off x="6309360" y="1737360"/>
+            <a:ext cx="5669280" cy="3897630"/>
           </a:xfrm>
           <a:prstGeom prst="rect">
             <a:avLst/>
           </a:prstGeom>
-          <a:noFill/>
         </p:spPr>
-        <p:txBody>
-          <a:bodyPr wrap="square">
-            <a:spAutoFit/>
-          </a:bodyPr>
-          <a:lstStyle/>
-          <a:p>
-            <a:r>
-              <a:rPr lang="en-US" sz="1400" b="1"/>
-              <a:t>Reference:</a:t>
-            </a:r>
-            <a:r>
-              <a:rPr lang="en-US" sz="1400"/>
-              <a:t> I. V. Moskalenko &amp; A. W. Strong (2000), ApJ 528, 357</a:t>
-            </a:r>
-            <a:endParaRPr lang="en-US"/>
-          </a:p>
-        </p:txBody>
-      </p:sp>
+      </p:pic>
     </p:spTree>
   </p:cSld>
   <p:clrMapOvr>
@@ -7315,7 +7367,7 @@
           <a:p>
             <a:r>
               <a:rPr sz="3400"/>
-              <a:t>② を調べる：σ を信じてよいか</a:t>
+              <a:t>縮退が引き起こした 3 つの疑問</a:t>
             </a:r>
           </a:p>
         </p:txBody>
@@ -7333,7 +7385,7 @@
         <p:spPr>
           <a:xfrm>
             <a:off x="841248" y="1463040"/>
-            <a:ext cx="10515600" cy="4114800"/>
+            <a:ext cx="10515600" cy="4937760"/>
           </a:xfrm>
         </p:spPr>
         <p:txBody>
@@ -7341,81 +7393,48 @@
           <a:lstStyle/>
           <a:p>
             <a:r>
-              <a:rPr sz="2200"/>
-              <a:t>何も無い空 23 か所で、天の川と同じ解析をした</a:t>
-            </a:r>
-          </a:p>
-          <a:p>
-            <a:r>
-              <a:rPr sz="2200"/>
-              <a:t>本物の信号が無ければ、σ は「平均 0、ばらつき 1」になるはず</a:t>
+              <a:rPr sz="2400"/>
+              <a:t>① バブル領域を外すと 19.5σ → 5.0σ に落ちる</a:t>
             </a:r>
           </a:p>
           <a:p>
             <a:pPr lvl="1"/>
             <a:r>
-              <a:rPr sz="1800"/>
-              <a:t>Wilks の定理が成り立っていれば</a:t>
-            </a:r>
-          </a:p>
-          <a:p>
-            <a:r>
-              <a:rPr sz="2200"/>
-              <a:t>実際のばらつき：1.26（95% 区間 1.14–1.39）</a:t>
+              <a:rPr sz="2000"/>
+              <a:t>ハローは、本当は ICS やバブルの間違いでは？</a:t>
+            </a:r>
+          </a:p>
+          <a:p>
+            <a:r>
+              <a:rPr sz="2400"/>
+              <a:t>② 何も無い空でも、最大 4.5σ が出る</a:t>
             </a:r>
           </a:p>
           <a:p>
             <a:pPr lvl="1"/>
             <a:r>
-              <a:rPr sz="1800"/>
-              <a:t>σ は 1.26 倍大きく出ている</a:t>
-            </a:r>
-          </a:p>
-          <a:p>
-            <a:r>
-              <a:rPr sz="2200"/>
-              <a:t>19.0σ を較正すると 19.0 ÷ 1.26 ≈ 15σ（13.7–16.6σ）</a:t>
-            </a:r>
-          </a:p>
-        </p:txBody>
-      </p:sp>
-      <p:sp>
-        <p:nvSpPr>
-          <p:cNvPr id="8" name="TextBox 7">
-            <a:extLst>
-              <a:ext uri="{FF2B5EF4-FFF2-40B4-BE49-F238E27FC236}">
-                <a16:creationId xmlns:a16="http://schemas.microsoft.com/office/drawing/2014/main" id="{F85CD606-E3CE-F314-B3EE-F3D7028115CB}"/>
-              </a:ext>
-            </a:extLst>
-          </p:cNvPr>
-          <p:cNvSpPr txBox="1"/>
-          <p:nvPr/>
-        </p:nvSpPr>
-        <p:spPr>
-          <a:xfrm>
-            <a:off x="5837182" y="5663239"/>
-            <a:ext cx="6093372" cy="923330"/>
-          </a:xfrm>
-          <a:prstGeom prst="rect">
-            <a:avLst/>
-          </a:prstGeom>
-          <a:noFill/>
-        </p:spPr>
-        <p:txBody>
-          <a:bodyPr wrap="square">
-            <a:spAutoFit/>
-          </a:bodyPr>
-          <a:lstStyle/>
-          <a:p>
-            <a:r>
-              <a:rPr lang="en-US" sz="1400" b="1"/>
-              <a:t>Reference:</a:t>
-            </a:r>
-            <a:r>
-              <a:rPr lang="en-US" sz="1400"/>
-              <a:t> B. Efron &amp; R. J. Tibshirani (1993), An Introduction to the Bootstrap</a:t>
-            </a:r>
-            <a:endParaRPr lang="en-US"/>
+              <a:rPr sz="2000"/>
+              <a:t>σ をそのまま信じてよいのか？</a:t>
+            </a:r>
+          </a:p>
+          <a:p>
+            <a:r>
+              <a:rPr sz="2400"/>
+              <a:t>③ 7/23 に出した 19.1σ が再現できない</a:t>
+            </a:r>
+          </a:p>
+          <a:p>
+            <a:pPr lvl="1"/>
+            <a:r>
+              <a:rPr sz="2000"/>
+              <a:t>結果そのものを信じてよいのか？</a:t>
+            </a:r>
+          </a:p>
+          <a:p>
+            <a:r>
+              <a:rPr sz="2400"/>
+              <a:t>→ 次から、1 つずつ調べた結果</a:t>
+            </a:r>
           </a:p>
         </p:txBody>
       </p:sp>
@@ -7461,60 +7480,65 @@
           <a:p>
             <a:r>
               <a:rPr sz="3400"/>
-              <a:t>② の結果：エネルギーごとのばらつき</a:t>
-            </a:r>
-          </a:p>
-        </p:txBody>
-      </p:sp>
-      <p:pic>
-        <p:nvPicPr>
-          <p:cNvPr id="3" name="Picture 2" descr="fig_null_variance.png"/>
-          <p:cNvPicPr>
-            <a:picLocks noChangeAspect="1"/>
-          </p:cNvPicPr>
-          <p:nvPr/>
-        </p:nvPicPr>
-        <p:blipFill>
-          <a:blip r:embed="rId3"/>
-          <a:stretch>
-            <a:fillRect/>
-          </a:stretch>
-        </p:blipFill>
+              <a:t>① を調べる：手がかりはどこにあるか</a:t>
+            </a:r>
+          </a:p>
+        </p:txBody>
+      </p:sp>
+      <p:sp>
+        <p:nvSpPr>
+          <p:cNvPr id="3" name="Content Placeholder 2"/>
+          <p:cNvSpPr>
+            <a:spLocks noGrp="1"/>
+          </p:cNvSpPr>
+          <p:nvPr>
+            <p:ph idx="1"/>
+          </p:nvPr>
+        </p:nvSpPr>
         <p:spPr>
           <a:xfrm>
-            <a:off x="2103120" y="1234440"/>
-            <a:ext cx="7156174" cy="4114800"/>
+            <a:off x="841248" y="1463040"/>
+            <a:ext cx="10515600" cy="4937760"/>
           </a:xfrm>
-          <a:prstGeom prst="rect">
-            <a:avLst/>
-          </a:prstGeom>
         </p:spPr>
-      </p:pic>
-      <p:sp>
-        <p:nvSpPr>
-          <p:cNvPr id="4" name="TextBox 3"/>
-          <p:cNvSpPr txBox="1"/>
-          <p:nvPr/>
-        </p:nvSpPr>
-        <p:spPr>
-          <a:xfrm>
-            <a:off x="457200" y="5486400"/>
-            <a:ext cx="11247120" cy="457200"/>
-          </a:xfrm>
-          <a:prstGeom prst="rect">
-            <a:avLst/>
-          </a:prstGeom>
-          <a:noFill/>
-        </p:spPr>
-        <p:txBody>
-          <a:bodyPr wrap="square">
-            <a:spAutoFit/>
-          </a:bodyPr>
-          <a:lstStyle/>
-          <a:p>
-            <a:r>
-              <a:rPr sz="2000"/>
-              <a:t>どのエネルギーでもばらつきは 1 より大きい（光子が十分ある範囲）</a:t>
+        <p:txBody>
+          <a:bodyPr/>
+          <a:lstStyle/>
+          <a:p>
+            <a:r>
+              <a:rPr sz="2200"/>
+              <a:t>フィッシャー情報：データがパラメータをどれだけ決められるか</a:t>
+            </a:r>
+          </a:p>
+          <a:p>
+            <a:r>
+              <a:rPr sz="2200"/>
+              <a:t>ICS など他の成分では説明できない「ハローだけの手がかり」を、空の場所ごとに計算</a:t>
+            </a:r>
+          </a:p>
+          <a:p>
+            <a:pPr lvl="1"/>
+            <a:r>
+              <a:rPr sz="1800"/>
+              <a:t>その 54% がバブル領域（面積は 34%）に集中</a:t>
+            </a:r>
+          </a:p>
+          <a:p>
+            <a:r>
+              <a:rPr sz="2200"/>
+              <a:t>手がかりの減り方だけで予測すると 6.6σ、実測 5.0σ</a:t>
+            </a:r>
+          </a:p>
+          <a:p>
+            <a:r>
+              <a:rPr sz="2200"/>
+              <a:t>同じ形の領域を横にずらして外すと 15〜16σ</a:t>
+            </a:r>
+          </a:p>
+          <a:p>
+            <a:r>
+              <a:rPr sz="2200"/>
+              <a:t>→ 19 → 5σ は「手がかりを捨てた」から。汚染の証拠ではない</a:t>
             </a:r>
           </a:p>
         </p:txBody>
@@ -7561,7 +7585,7 @@
           <a:p>
             <a:r>
               <a:rPr sz="3400"/>
-              <a:t>③ を調べる：19.1σ が再現できない理由</a:t>
+              <a:t>① を調べる：ICS が犯人なら</a:t>
             </a:r>
           </a:p>
         </p:txBody>
@@ -7579,7 +7603,7 @@
         <p:spPr>
           <a:xfrm>
             <a:off x="841248" y="1463040"/>
-            <a:ext cx="10515600" cy="4937760"/>
+            <a:ext cx="10515600" cy="4114800"/>
           </a:xfrm>
         </p:spPr>
         <p:txBody>
@@ -7587,27 +7611,88 @@
           <a:lstStyle/>
           <a:p>
             <a:r>
-              <a:rPr sz="2400"/>
-              <a:t>7/23 の計算の直後にコードを直していて、当時の状態が残っていなかった</a:t>
-            </a:r>
-          </a:p>
-          <a:p>
-            <a:r>
-              <a:rPr sz="2400"/>
-              <a:t>今のコードは、何度計算しても同じ答えになる（10/1 に確認）</a:t>
-            </a:r>
-          </a:p>
-          <a:p>
-            <a:r>
-              <a:rPr sz="2400"/>
-              <a:t>結果ファイルに、コードの版と設定を自動で記録するようにした</a:t>
-            </a:r>
-          </a:p>
-          <a:p>
-            <a:r>
-              <a:rPr sz="2400"/>
-              <a:t>→ 主結果を 19.0σ（10/1 の再計算）に統一</a:t>
-            </a:r>
+              <a:rPr sz="2200"/>
+              <a:t>ICS をバブルの内と外で別々の明るさにして当てはめた</a:t>
+            </a:r>
+          </a:p>
+          <a:p>
+            <a:pPr lvl="1"/>
+            <a:r>
+              <a:rPr sz="1800"/>
+              <a:t>内側が約 2.3 倍明るければ、ハローの改善の 92% を ICS が説明</a:t>
+            </a:r>
+          </a:p>
+          <a:p>
+            <a:r>
+              <a:rPr sz="2200"/>
+              <a:t>ICS の計算の近似（等方近似）を直しても 1.1〜1.3 倍</a:t>
+            </a:r>
+          </a:p>
+          <a:p>
+            <a:pPr lvl="1"/>
+            <a:r>
+              <a:rPr sz="1800"/>
+              <a:t>しかも外側のほうが大きくなる → 2.3 倍には届かない</a:t>
+            </a:r>
+          </a:p>
+          <a:p>
+            <a:r>
+              <a:rPr sz="2200"/>
+              <a:t>ICS を 3 種類に分けて、それぞれ自由に動かしても</a:t>
+            </a:r>
+          </a:p>
+          <a:p>
+            <a:pPr lvl="1"/>
+            <a:r>
+              <a:rPr sz="1800"/>
+              <a:t>19.5σ → 18.4σ（約 1σ しか下がらない）</a:t>
+            </a:r>
+          </a:p>
+          <a:p>
+            <a:r>
+              <a:rPr sz="2200"/>
+              <a:t>→ ICS の「明るさ」の間違いでは、ハローを説明できない</a:t>
+            </a:r>
+          </a:p>
+        </p:txBody>
+      </p:sp>
+      <p:sp>
+        <p:nvSpPr>
+          <p:cNvPr id="8" name="TextBox 7">
+            <a:extLst>
+              <a:ext uri="{FF2B5EF4-FFF2-40B4-BE49-F238E27FC236}">
+                <a16:creationId xmlns:a16="http://schemas.microsoft.com/office/drawing/2014/main" id="{F85CD606-E3CE-F314-B3EE-F3D7028115CB}"/>
+              </a:ext>
+            </a:extLst>
+          </p:cNvPr>
+          <p:cNvSpPr txBox="1"/>
+          <p:nvPr/>
+        </p:nvSpPr>
+        <p:spPr>
+          <a:xfrm>
+            <a:off x="5837182" y="5663239"/>
+            <a:ext cx="6093372" cy="923330"/>
+          </a:xfrm>
+          <a:prstGeom prst="rect">
+            <a:avLst/>
+          </a:prstGeom>
+          <a:noFill/>
+        </p:spPr>
+        <p:txBody>
+          <a:bodyPr wrap="square">
+            <a:spAutoFit/>
+          </a:bodyPr>
+          <a:lstStyle/>
+          <a:p>
+            <a:r>
+              <a:rPr lang="en-US" sz="1400" b="1"/>
+              <a:t>Reference:</a:t>
+            </a:r>
+            <a:r>
+              <a:rPr lang="en-US" sz="1400"/>
+              <a:t> I. V. Moskalenko &amp; A. W. Strong (2000), ApJ 528, 357</a:t>
+            </a:r>
+            <a:endParaRPr lang="en-US"/>
           </a:p>
         </p:txBody>
       </p:sp>
@@ -7653,7 +7738,7 @@
           <a:p>
             <a:r>
               <a:rPr sz="3400"/>
-              <a:t>ここまでのまとめ</a:t>
+              <a:t>② を調べる：σ を信じてよいか</a:t>
             </a:r>
           </a:p>
         </p:txBody>
@@ -7671,7 +7756,7 @@
         <p:spPr>
           <a:xfrm>
             <a:off x="841248" y="1463040"/>
-            <a:ext cx="10515600" cy="4937760"/>
+            <a:ext cx="10515600" cy="4114800"/>
           </a:xfrm>
         </p:spPr>
         <p:txBody>
@@ -7679,34 +7764,81 @@
           <a:lstStyle/>
           <a:p>
             <a:r>
-              <a:rPr sz="2400"/>
-              <a:t>ICS の明るさ・バブル・計算の近似の間違いでは、超過を説明できない</a:t>
-            </a:r>
-          </a:p>
-          <a:p>
-            <a:r>
-              <a:rPr sz="2400"/>
-              <a:t>σ は 1.26 倍の過大評価 → 較正すると約 15σ</a:t>
-            </a:r>
-          </a:p>
-          <a:p>
-            <a:r>
-              <a:rPr sz="2400"/>
-              <a:t>ただし、暗黒物質の証拠ではない</a:t>
+              <a:rPr sz="2200"/>
+              <a:t>何も無い空 23 か所で、天の川と同じ解析をした</a:t>
+            </a:r>
+          </a:p>
+          <a:p>
+            <a:r>
+              <a:rPr sz="2200"/>
+              <a:t>本物の信号が無ければ、σ は「平均 0、ばらつき 1」になるはず</a:t>
             </a:r>
           </a:p>
           <a:p>
             <a:pPr lvl="1"/>
             <a:r>
-              <a:rPr sz="2000"/>
-              <a:t>ICS の「空間の形」の間違いは否定できていない</a:t>
-            </a:r>
-          </a:p>
-          <a:p>
-            <a:r>
-              <a:rPr sz="2400"/>
-              <a:t>→ 独立な確認として、矮小銀河を見る</a:t>
-            </a:r>
+              <a:rPr sz="1800"/>
+              <a:t>Wilks の定理が成り立っていれば</a:t>
+            </a:r>
+          </a:p>
+          <a:p>
+            <a:r>
+              <a:rPr sz="2200"/>
+              <a:t>実際のばらつき：1.26（95% 区間 1.14–1.39）</a:t>
+            </a:r>
+          </a:p>
+          <a:p>
+            <a:pPr lvl="1"/>
+            <a:r>
+              <a:rPr sz="1800"/>
+              <a:t>σ は 1.26 倍大きく出ている</a:t>
+            </a:r>
+          </a:p>
+          <a:p>
+            <a:r>
+              <a:rPr sz="2200"/>
+              <a:t>19.5σ を較正すると 19.5 ÷ 1.26 ≈ 15σ（14.0–17.0σ）</a:t>
+            </a:r>
+          </a:p>
+        </p:txBody>
+      </p:sp>
+      <p:sp>
+        <p:nvSpPr>
+          <p:cNvPr id="8" name="TextBox 7">
+            <a:extLst>
+              <a:ext uri="{FF2B5EF4-FFF2-40B4-BE49-F238E27FC236}">
+                <a16:creationId xmlns:a16="http://schemas.microsoft.com/office/drawing/2014/main" id="{F85CD606-E3CE-F314-B3EE-F3D7028115CB}"/>
+              </a:ext>
+            </a:extLst>
+          </p:cNvPr>
+          <p:cNvSpPr txBox="1"/>
+          <p:nvPr/>
+        </p:nvSpPr>
+        <p:spPr>
+          <a:xfrm>
+            <a:off x="5837182" y="5663239"/>
+            <a:ext cx="6093372" cy="923330"/>
+          </a:xfrm>
+          <a:prstGeom prst="rect">
+            <a:avLst/>
+          </a:prstGeom>
+          <a:noFill/>
+        </p:spPr>
+        <p:txBody>
+          <a:bodyPr wrap="square">
+            <a:spAutoFit/>
+          </a:bodyPr>
+          <a:lstStyle/>
+          <a:p>
+            <a:r>
+              <a:rPr lang="en-US" sz="1400" b="1"/>
+              <a:t>Reference:</a:t>
+            </a:r>
+            <a:r>
+              <a:rPr lang="en-US" sz="1400"/>
+              <a:t> B. Efron &amp; R. J. Tibshirani (1993), An Introduction to the Bootstrap</a:t>
+            </a:r>
+            <a:endParaRPr lang="en-US"/>
           </a:p>
         </p:txBody>
       </p:sp>
@@ -7752,86 +7884,45 @@
           <a:p>
             <a:r>
               <a:rPr sz="3400"/>
-              <a:t>矮小銀河で確かめる</a:t>
-            </a:r>
-          </a:p>
-        </p:txBody>
-      </p:sp>
-      <p:sp>
-        <p:nvSpPr>
-          <p:cNvPr id="3" name="Content Placeholder 2"/>
-          <p:cNvSpPr>
-            <a:spLocks noGrp="1"/>
-          </p:cNvSpPr>
-          <p:nvPr>
-            <p:ph idx="1"/>
-          </p:nvPr>
-        </p:nvSpPr>
+              <a:t>② の結果：エネルギーごとのばらつき</a:t>
+            </a:r>
+          </a:p>
+        </p:txBody>
+      </p:sp>
+      <p:pic>
+        <p:nvPicPr>
+          <p:cNvPr id="3" name="Picture 2" descr="fig_null_variance.png"/>
+          <p:cNvPicPr>
+            <a:picLocks noChangeAspect="1"/>
+          </p:cNvPicPr>
+          <p:nvPr/>
+        </p:nvPicPr>
+        <p:blipFill>
+          <a:blip r:embed="rId3"/>
+          <a:stretch>
+            <a:fillRect/>
+          </a:stretch>
+        </p:blipFill>
         <p:spPr>
           <a:xfrm>
-            <a:off x="841248" y="1463040"/>
-            <a:ext cx="10515600" cy="4114800"/>
+            <a:off x="2103120" y="1234440"/>
+            <a:ext cx="7156174" cy="4114800"/>
           </a:xfrm>
+          <a:prstGeom prst="rect">
+            <a:avLst/>
+          </a:prstGeom>
         </p:spPr>
-        <p:txBody>
-          <a:bodyPr/>
-          <a:lstStyle/>
-          <a:p>
-            <a:r>
-              <a:rPr sz="2400"/>
-              <a:t>矮小銀河：天の川のまわりの小さな銀河</a:t>
-            </a:r>
-          </a:p>
-          <a:p>
-            <a:pPr lvl="1"/>
-            <a:r>
-              <a:rPr sz="2000"/>
-              <a:t>暗黒物質が多く、ガスや星形成が少ない（雑音が少ない）</a:t>
-            </a:r>
-          </a:p>
-          <a:p>
-            <a:r>
-              <a:rPr sz="2400"/>
-              <a:t>暗黒物質なら、矮小銀河からも同じ 20 GeV の光が来るはず</a:t>
-            </a:r>
-          </a:p>
-          <a:p>
-            <a:r>
-              <a:rPr sz="2400"/>
-              <a:t>同じ手法を、各天体のまわり半径 10° に使った</a:t>
-            </a:r>
-          </a:p>
-          <a:p>
-            <a:pPr lvl="1"/>
-            <a:r>
-              <a:rPr sz="2000"/>
-              <a:t>矮小銀河 54 ＋ M31・M33 ＋ 何も無い空 23 か所</a:t>
-            </a:r>
-          </a:p>
-          <a:p>
-            <a:r>
-              <a:rPr sz="2400"/>
-              <a:t>矮小銀河は小さい（0.2〜0.4°）ので、広がった ICS とは縮退しない</a:t>
-            </a:r>
-          </a:p>
-        </p:txBody>
-      </p:sp>
-      <p:sp>
-        <p:nvSpPr>
-          <p:cNvPr id="8" name="TextBox 7">
-            <a:extLst>
-              <a:ext uri="{FF2B5EF4-FFF2-40B4-BE49-F238E27FC236}">
-                <a16:creationId xmlns:a16="http://schemas.microsoft.com/office/drawing/2014/main" id="{F85CD606-E3CE-F314-B3EE-F3D7028115CB}"/>
-              </a:ext>
-            </a:extLst>
-          </p:cNvPr>
+      </p:pic>
+      <p:sp>
+        <p:nvSpPr>
+          <p:cNvPr id="4" name="TextBox 3"/>
           <p:cNvSpPr txBox="1"/>
           <p:nvPr/>
         </p:nvSpPr>
         <p:spPr>
           <a:xfrm>
-            <a:off x="5837182" y="5663239"/>
-            <a:ext cx="6093372" cy="923330"/>
+            <a:off x="457200" y="5486400"/>
+            <a:ext cx="11247120" cy="457200"/>
           </a:xfrm>
           <a:prstGeom prst="rect">
             <a:avLst/>
@@ -7845,14 +7936,9 @@
           <a:lstStyle/>
           <a:p>
             <a:r>
-              <a:rPr lang="en-US" sz="1400" b="1"/>
-              <a:t>Reference:</a:t>
-            </a:r>
-            <a:r>
-              <a:rPr lang="en-US" sz="1400"/>
-              <a:t> A. B. Pace (2025), Open J. Astrophys. 8, 142</a:t>
-            </a:r>
-            <a:endParaRPr lang="en-US"/>
+              <a:rPr sz="2000"/>
+              <a:t>どのエネルギーでもばらつきは 1 より大きい（光子が十分ある範囲）</a:t>
+            </a:r>
           </a:p>
         </p:txBody>
       </p:sp>
@@ -7898,7 +7984,7 @@
           <a:p>
             <a:r>
               <a:rPr sz="3400"/>
-              <a:t>予測の立て方：J ファクター</a:t>
+              <a:t>③ を調べる：19.1σ が再現できない理由</a:t>
             </a:r>
           </a:p>
         </p:txBody>
@@ -7916,7 +8002,7 @@
         <p:spPr>
           <a:xfrm>
             <a:off x="841248" y="1463040"/>
-            <a:ext cx="10515600" cy="4114800"/>
+            <a:ext cx="10515600" cy="4937760"/>
           </a:xfrm>
         </p:spPr>
         <p:txBody>
@@ -7925,79 +8011,26 @@
           <a:p>
             <a:r>
               <a:rPr sz="2400"/>
-              <a:t>対消滅の明るさ：F = ⟨σv⟩ / (8π m²) × dN/dE × J</a:t>
+              <a:t>7/23 の計算の直後にコードを直していて、当時の状態が残っていなかった</a:t>
             </a:r>
           </a:p>
           <a:p>
             <a:r>
               <a:rPr sz="2400"/>
-              <a:t>J ファクター = 暗黒物質の密度の 2 乗を、視線方向に足し合わせた量</a:t>
+              <a:t>今のコードは、何度計算しても同じ答えになる（10/1 に確認）</a:t>
             </a:r>
           </a:p>
           <a:p>
             <a:r>
               <a:rPr sz="2400"/>
-              <a:t>天の川と矮小銀河で粒子は同じ → 比をとると J の比だけが残る</a:t>
-            </a:r>
-          </a:p>
-          <a:p>
-            <a:pPr lvl="1"/>
-            <a:r>
-              <a:rPr sz="2000"/>
-              <a:t>F_矮小 = F_天の川 × J_矮小 / J_天の川</a:t>
+              <a:t>結果ファイルに、コードの版と設定を自動で記録するようにした</a:t>
             </a:r>
           </a:p>
           <a:p>
             <a:r>
               <a:rPr sz="2400"/>
-              <a:t>粒子の質量などを仮定せずに「何σ見えるはずか」が出る</a:t>
-            </a:r>
-          </a:p>
-          <a:p>
-            <a:r>
-              <a:rPr sz="2400"/>
-              <a:t>矮小銀河の J は、星の動きから推定する</a:t>
-            </a:r>
-          </a:p>
-        </p:txBody>
-      </p:sp>
-      <p:sp>
-        <p:nvSpPr>
-          <p:cNvPr id="8" name="TextBox 7">
-            <a:extLst>
-              <a:ext uri="{FF2B5EF4-FFF2-40B4-BE49-F238E27FC236}">
-                <a16:creationId xmlns:a16="http://schemas.microsoft.com/office/drawing/2014/main" id="{F85CD606-E3CE-F314-B3EE-F3D7028115CB}"/>
-              </a:ext>
-            </a:extLst>
-          </p:cNvPr>
-          <p:cNvSpPr txBox="1"/>
-          <p:nvPr/>
-        </p:nvSpPr>
-        <p:spPr>
-          <a:xfrm>
-            <a:off x="5837182" y="5663239"/>
-            <a:ext cx="6093372" cy="923330"/>
-          </a:xfrm>
-          <a:prstGeom prst="rect">
-            <a:avLst/>
-          </a:prstGeom>
-          <a:noFill/>
-        </p:spPr>
-        <p:txBody>
-          <a:bodyPr wrap="square">
-            <a:spAutoFit/>
-          </a:bodyPr>
-          <a:lstStyle/>
-          <a:p>
-            <a:r>
-              <a:rPr lang="en-US" sz="1400" b="1"/>
-              <a:t>Reference:</a:t>
-            </a:r>
-            <a:r>
-              <a:rPr lang="en-US" sz="1400"/>
-              <a:t> A. B. Pace &amp; L. E. Strigari (2019), MNRAS 482, 3480</a:t>
-            </a:r>
-            <a:endParaRPr lang="en-US"/>
+              <a:t>→ 10/2 に Totani と同じやり方で計算し直し、主結果は 19.5σ</a:t>
+            </a:r>
           </a:p>
         </p:txBody>
       </p:sp>
@@ -8043,60 +8076,59 @@
           <a:p>
             <a:r>
               <a:rPr sz="3400"/>
-              <a:t>結果：どこにも信号は見えなかった</a:t>
-            </a:r>
-          </a:p>
-        </p:txBody>
-      </p:sp>
-      <p:pic>
-        <p:nvPicPr>
-          <p:cNvPr id="3" name="Picture 2" descr="fig_dwarf_results.png"/>
-          <p:cNvPicPr>
-            <a:picLocks noChangeAspect="1"/>
-          </p:cNvPicPr>
-          <p:nvPr/>
-        </p:nvPicPr>
-        <p:blipFill>
-          <a:blip r:embed="rId3"/>
-          <a:stretch>
-            <a:fillRect/>
-          </a:stretch>
-        </p:blipFill>
+              <a:t>ここまでのまとめ</a:t>
+            </a:r>
+          </a:p>
+        </p:txBody>
+      </p:sp>
+      <p:sp>
+        <p:nvSpPr>
+          <p:cNvPr id="3" name="Content Placeholder 2"/>
+          <p:cNvSpPr>
+            <a:spLocks noGrp="1"/>
+          </p:cNvSpPr>
+          <p:nvPr>
+            <p:ph idx="1"/>
+          </p:nvPr>
+        </p:nvSpPr>
         <p:spPr>
           <a:xfrm>
-            <a:off x="2194560" y="1234440"/>
-            <a:ext cx="7156174" cy="4114800"/>
+            <a:off x="841248" y="1463040"/>
+            <a:ext cx="10515600" cy="4937760"/>
           </a:xfrm>
-          <a:prstGeom prst="rect">
-            <a:avLst/>
-          </a:prstGeom>
         </p:spPr>
-      </p:pic>
-      <p:sp>
-        <p:nvSpPr>
-          <p:cNvPr id="4" name="TextBox 3"/>
-          <p:cNvSpPr txBox="1"/>
-          <p:nvPr/>
-        </p:nvSpPr>
-        <p:spPr>
-          <a:xfrm>
-            <a:off x="457200" y="5486400"/>
-            <a:ext cx="11247120" cy="457200"/>
-          </a:xfrm>
-          <a:prstGeom prst="rect">
-            <a:avLst/>
-          </a:prstGeom>
-          <a:noFill/>
-        </p:spPr>
-        <p:txBody>
-          <a:bodyPr wrap="square">
-            <a:spAutoFit/>
-          </a:bodyPr>
-          <a:lstStyle/>
-          <a:p>
+        <p:txBody>
+          <a:bodyPr/>
+          <a:lstStyle/>
+          <a:p>
+            <a:r>
+              <a:rPr sz="2400"/>
+              <a:t>ICS の明るさ・バブル・計算の近似の間違いでは、超過を説明できない</a:t>
+            </a:r>
+          </a:p>
+          <a:p>
+            <a:r>
+              <a:rPr sz="2400"/>
+              <a:t>σ は 1.26 倍の過大評価 → 較正すると約 15σ</a:t>
+            </a:r>
+          </a:p>
+          <a:p>
+            <a:r>
+              <a:rPr sz="2400"/>
+              <a:t>ただし、暗黒物質の証拠ではない</a:t>
+            </a:r>
+          </a:p>
+          <a:p>
+            <a:pPr lvl="1"/>
             <a:r>
               <a:rPr sz="2000"/>
-              <a:t>どの天体・どのエネルギーでも最大 +3.46σ（何も無い空でも 4.50σ）</a:t>
+              <a:t>ICS の「空間の形」の間違いは否定できていない</a:t>
+            </a:r>
+          </a:p>
+          <a:p>
+            <a:r>
+              <a:rPr sz="2400"/>
+              <a:t>→ 独立な確認として、矮小銀河を見る</a:t>
             </a:r>
           </a:p>
         </p:txBody>
@@ -8320,7 +8352,7 @@
           <a:p>
             <a:r>
               <a:rPr sz="3400"/>
-              <a:t>天体をまとめて比べる</a:t>
+              <a:t>矮小銀河で確かめる</a:t>
             </a:r>
           </a:p>
         </p:txBody>
@@ -8338,7 +8370,7 @@
         <p:spPr>
           <a:xfrm>
             <a:off x="841248" y="1463040"/>
-            <a:ext cx="10515600" cy="4937760"/>
+            <a:ext cx="10515600" cy="4114800"/>
           </a:xfrm>
         </p:spPr>
         <p:txBody>
@@ -8347,45 +8379,80 @@
           <a:p>
             <a:r>
               <a:rPr sz="2400"/>
-              <a:t>1 個ずつでは弱いので、J が求まる 43 天体をまとめる</a:t>
+              <a:t>矮小銀河：天の川のまわりの小さな銀河</a:t>
+            </a:r>
+          </a:p>
+          <a:p>
+            <a:pPr lvl="1"/>
+            <a:r>
+              <a:rPr sz="2000"/>
+              <a:t>暗黒物質が多く、ガスや星形成が少ない（雑音が少ない）</a:t>
             </a:r>
           </a:p>
           <a:p>
             <a:r>
               <a:rPr sz="2400"/>
-              <a:t>T = Σ w_i z_i / √( Σ w_i² )、重み w_i = 天体 i の予測 σ</a:t>
+              <a:t>暗黒物質なら、矮小銀河からも同じ 20 GeV の光が来るはず</a:t>
+            </a:r>
+          </a:p>
+          <a:p>
+            <a:r>
+              <a:rPr sz="2400"/>
+              <a:t>同じ手法を、各天体のまわり半径 10° に使った</a:t>
             </a:r>
           </a:p>
           <a:p>
             <a:pPr lvl="1"/>
             <a:r>
               <a:rPr sz="2000"/>
-              <a:t>z_i：天体 i の実測の σ（20 GeV）</a:t>
+              <a:t>矮小銀河 54 ＋ M31・M33 ＋ 何も無い空 23 か所</a:t>
             </a:r>
           </a:p>
           <a:p>
             <a:r>
               <a:rPr sz="2400"/>
-              <a:t>暗黒物質が無ければ：T は平均 0、ばらつき 1</a:t>
-            </a:r>
-          </a:p>
-          <a:p>
-            <a:r>
-              <a:rPr sz="2400"/>
-              <a:t>暗黒物質があれば：T の平均 = √( Σ pred_i² ) = 1.73</a:t>
-            </a:r>
-          </a:p>
-          <a:p>
-            <a:r>
-              <a:rPr sz="2400"/>
-              <a:t>実測 T = 0.39 → ずれ 1.3σ</a:t>
-            </a:r>
-          </a:p>
-          <a:p>
-            <a:r>
-              <a:rPr sz="2400"/>
-              <a:t>ただし、ここでは J に誤差は無いとしていた</a:t>
-            </a:r>
+              <a:t>矮小銀河は小さい（0.2〜0.4°）ので、広がった ICS とは縮退しない</a:t>
+            </a:r>
+          </a:p>
+        </p:txBody>
+      </p:sp>
+      <p:sp>
+        <p:nvSpPr>
+          <p:cNvPr id="8" name="TextBox 7">
+            <a:extLst>
+              <a:ext uri="{FF2B5EF4-FFF2-40B4-BE49-F238E27FC236}">
+                <a16:creationId xmlns:a16="http://schemas.microsoft.com/office/drawing/2014/main" id="{F85CD606-E3CE-F314-B3EE-F3D7028115CB}"/>
+              </a:ext>
+            </a:extLst>
+          </p:cNvPr>
+          <p:cNvSpPr txBox="1"/>
+          <p:nvPr/>
+        </p:nvSpPr>
+        <p:spPr>
+          <a:xfrm>
+            <a:off x="5837182" y="5663239"/>
+            <a:ext cx="6093372" cy="923330"/>
+          </a:xfrm>
+          <a:prstGeom prst="rect">
+            <a:avLst/>
+          </a:prstGeom>
+          <a:noFill/>
+        </p:spPr>
+        <p:txBody>
+          <a:bodyPr wrap="square">
+            <a:spAutoFit/>
+          </a:bodyPr>
+          <a:lstStyle/>
+          <a:p>
+            <a:r>
+              <a:rPr lang="en-US" sz="1400" b="1"/>
+              <a:t>Reference:</a:t>
+            </a:r>
+            <a:r>
+              <a:rPr lang="en-US" sz="1400"/>
+              <a:t> A. B. Pace (2025), Open J. Astrophys. 8, 142</a:t>
+            </a:r>
+            <a:endParaRPr lang="en-US"/>
           </a:p>
         </p:txBody>
       </p:sp>
@@ -8431,7 +8498,7 @@
           <a:p>
             <a:r>
               <a:rPr sz="3400"/>
-              <a:t>ここで論文：J の誤差は小さく見積もられている</a:t>
+              <a:t>予測の立て方：J ファクター</a:t>
             </a:r>
           </a:p>
         </p:txBody>
@@ -8458,40 +8525,38 @@
           <a:p>
             <a:r>
               <a:rPr sz="2400"/>
-              <a:t>文献ごとの J の値は、書かれた誤差よりも大きくばらつく</a:t>
+              <a:t>対消滅の明るさ：F = ⟨σv⟩ / (8π m²) × dN/dE × J</a:t>
             </a:r>
           </a:p>
           <a:p>
             <a:r>
               <a:rPr sz="2400"/>
-              <a:t>見落とされがちな誤差の原因（8 つ）</a:t>
+              <a:t>J ファクター = 暗黒物質の密度の 2 乗を、視線方向に足し合わせた量</a:t>
+            </a:r>
+          </a:p>
+          <a:p>
+            <a:r>
+              <a:rPr sz="2400"/>
+              <a:t>天の川と矮小銀河で粒子は同じ → 比をとると J の比だけが残る</a:t>
             </a:r>
           </a:p>
           <a:p>
             <a:pPr lvl="1"/>
             <a:r>
               <a:rPr sz="2000"/>
-              <a:t>点として扱う・ハローの形・星の分布の形の仮定</a:t>
-            </a:r>
-          </a:p>
-          <a:p>
-            <a:pPr lvl="1"/>
-            <a:r>
-              <a:rPr sz="2000"/>
-              <a:t>非球対称（最大 0.4 dex）・非平衡（〜0.1）・連星（Ret II で〜0.3）</a:t>
-            </a:r>
-          </a:p>
-          <a:p>
-            <a:pPr lvl="1"/>
-            <a:r>
-              <a:rPr sz="2000"/>
-              <a:t>前景の星の混入・誤差の分布が正規分布でない</a:t>
+              <a:t>F_矮小 = F_天の川 × J_矮小 / J_天の川</a:t>
             </a:r>
           </a:p>
           <a:p>
             <a:r>
               <a:rPr sz="2400"/>
-              <a:t>Δlog₁₀J ≈ 0.5（約 3 倍）以上の誤差を見込むべき</a:t>
+              <a:t>粒子の質量などを仮定せずに「何σ見えるはずか」が出る</a:t>
+            </a:r>
+          </a:p>
+          <a:p>
+            <a:r>
+              <a:rPr sz="2400"/>
+              <a:t>矮小銀河の J は、星の動きから推定する</a:t>
             </a:r>
           </a:p>
         </p:txBody>
@@ -8530,7 +8595,7 @@
             </a:r>
             <a:r>
               <a:rPr lang="en-US" sz="1400"/>
-              <a:t> Bertólez-Martínez, Hooper &amp; Khatee Zathul (2026), arXiv:2609.20944 §II</a:t>
+              <a:t> A. B. Pace &amp; L. E. Strigari (2019), MNRAS 482, 3480</a:t>
             </a:r>
             <a:endParaRPr lang="en-US"/>
           </a:p>
@@ -8578,93 +8643,45 @@
           <a:p>
             <a:r>
               <a:rPr sz="3400"/>
-              <a:t>詳細なmethodについて①：仮想データの作り方</a:t>
-            </a:r>
-          </a:p>
-        </p:txBody>
-      </p:sp>
-      <p:sp>
-        <p:nvSpPr>
-          <p:cNvPr id="3" name="Content Placeholder 2"/>
-          <p:cNvSpPr>
-            <a:spLocks noGrp="1"/>
-          </p:cNvSpPr>
-          <p:nvPr>
-            <p:ph idx="1"/>
-          </p:nvPr>
-        </p:nvSpPr>
+              <a:t>結果：どこにも信号は見えなかった</a:t>
+            </a:r>
+          </a:p>
+        </p:txBody>
+      </p:sp>
+      <p:pic>
+        <p:nvPicPr>
+          <p:cNvPr id="3" name="Picture 2" descr="fig_dwarf_results.png"/>
+          <p:cNvPicPr>
+            <a:picLocks noChangeAspect="1"/>
+          </p:cNvPicPr>
+          <p:nvPr/>
+        </p:nvPicPr>
+        <p:blipFill>
+          <a:blip r:embed="rId3"/>
+          <a:stretch>
+            <a:fillRect/>
+          </a:stretch>
+        </p:blipFill>
         <p:spPr>
           <a:xfrm>
-            <a:off x="841248" y="1463040"/>
-            <a:ext cx="10515600" cy="4114800"/>
+            <a:off x="2194560" y="1234440"/>
+            <a:ext cx="7156174" cy="4114800"/>
           </a:xfrm>
+          <a:prstGeom prst="rect">
+            <a:avLst/>
+          </a:prstGeom>
         </p:spPr>
-        <p:txBody>
-          <a:bodyPr/>
-          <a:lstStyle/>
-          <a:p>
-            <a:r>
-              <a:rPr sz="2200"/>
-              <a:t>Fermi-LAT の観測を計算機の中で作る（FermiTools、fermipy）</a:t>
-            </a:r>
-          </a:p>
-          <a:p>
-            <a:pPr lvl="1"/>
-            <a:r>
-              <a:rPr sz="1800"/>
-              <a:t>17.4 年分、0.5 GeV〜1 TeV、10° × 10° の領域、0.08° の画素</a:t>
-            </a:r>
-          </a:p>
-          <a:p>
-            <a:r>
-              <a:rPr sz="2200"/>
-              <a:t>背景：銀河の拡散光＋等方の光から、ポアソン乱数で光子を作る</a:t>
-            </a:r>
-          </a:p>
-          <a:p>
-            <a:r>
-              <a:rPr sz="2200"/>
-              <a:t>暗黒物質の信号を入れる</a:t>
-            </a:r>
-          </a:p>
-          <a:p>
-            <a:pPr lvl="1"/>
-            <a:r>
-              <a:rPr sz="1800"/>
-              <a:t>質量 42 GeV、b クォーク対、⟨σv⟩ = 1.4 × 10⁻²⁶ cm³/s</a:t>
-            </a:r>
-          </a:p>
-          <a:p>
-            <a:pPr lvl="1"/>
-            <a:r>
-              <a:rPr sz="1800"/>
-              <a:t>銀河中心 GeV 超過（GCE）に合う値</a:t>
-            </a:r>
-          </a:p>
-          <a:p>
-            <a:r>
-              <a:rPr sz="2200"/>
-              <a:t>対象：Ursa Minor 1 個と、27 個の矮小銀河</a:t>
-            </a:r>
-          </a:p>
-        </p:txBody>
-      </p:sp>
-      <p:sp>
-        <p:nvSpPr>
-          <p:cNvPr id="8" name="TextBox 7">
-            <a:extLst>
-              <a:ext uri="{FF2B5EF4-FFF2-40B4-BE49-F238E27FC236}">
-                <a16:creationId xmlns:a16="http://schemas.microsoft.com/office/drawing/2014/main" id="{F85CD606-E3CE-F314-B3EE-F3D7028115CB}"/>
-              </a:ext>
-            </a:extLst>
-          </p:cNvPr>
+      </p:pic>
+      <p:sp>
+        <p:nvSpPr>
+          <p:cNvPr id="4" name="TextBox 3"/>
           <p:cNvSpPr txBox="1"/>
           <p:nvPr/>
         </p:nvSpPr>
         <p:spPr>
           <a:xfrm>
-            <a:off x="5837182" y="5663239"/>
-            <a:ext cx="6093372" cy="923330"/>
+            <a:off x="457200" y="5486400"/>
+            <a:ext cx="11247120" cy="457200"/>
           </a:xfrm>
           <a:prstGeom prst="rect">
             <a:avLst/>
@@ -8678,14 +8695,9 @@
           <a:lstStyle/>
           <a:p>
             <a:r>
-              <a:rPr lang="en-US" sz="1400" b="1"/>
-              <a:t>Reference:</a:t>
-            </a:r>
-            <a:r>
-              <a:rPr lang="en-US" sz="1400"/>
-              <a:t> Bertólez-Martínez, Hooper &amp; Khatee Zathul (2026), arXiv:2609.20944 §III</a:t>
-            </a:r>
-            <a:endParaRPr lang="en-US"/>
+              <a:rPr sz="2000"/>
+              <a:t>どの天体・どのエネルギーでも最大 +3.46σ（何も無い空でも 4.50σ）</a:t>
+            </a:r>
           </a:p>
         </p:txBody>
       </p:sp>
@@ -8731,7 +8743,7 @@
           <a:p>
             <a:r>
               <a:rPr sz="3400"/>
-              <a:t>詳細なmethodについて②：尤度と 2 つの誤差</a:t>
+              <a:t>天体をまとめて比べる</a:t>
             </a:r>
           </a:p>
         </p:txBody>
@@ -8749,7 +8761,7 @@
         <p:spPr>
           <a:xfrm>
             <a:off x="841248" y="1463040"/>
-            <a:ext cx="10515600" cy="4114800"/>
+            <a:ext cx="10515600" cy="4937760"/>
           </a:xfrm>
         </p:spPr>
         <p:txBody>
@@ -8757,88 +8769,46 @@
           <a:lstStyle/>
           <a:p>
             <a:r>
-              <a:rPr sz="2200"/>
-              <a:t>各天体の尤度 = 光子のポアソン尤度 × J の尤度</a:t>
+              <a:rPr sz="2400"/>
+              <a:t>1 個ずつでは弱いので、J が求まる 43 天体をまとめる</a:t>
+            </a:r>
+          </a:p>
+          <a:p>
+            <a:r>
+              <a:rPr sz="2400"/>
+              <a:t>T = Σ w_i z_i / √( Σ w_i² )、重み w_i = 天体 i の予測 σ</a:t>
             </a:r>
           </a:p>
           <a:p>
             <a:pPr lvl="1"/>
             <a:r>
-              <a:rPr sz="1800"/>
-              <a:t>L_J ∝ exp[ −(log₁₀J − log₁₀J_obs)² / 2σ_L² ]</a:t>
-            </a:r>
-          </a:p>
-          <a:p>
-            <a:r>
-              <a:rPr sz="2200"/>
-              <a:t>27 個は尤度の積でまとめる（⟨σv⟩ は共通、J は天体ごと）</a:t>
-            </a:r>
-          </a:p>
-          <a:p>
-            <a:r>
-              <a:rPr sz="2200"/>
-              <a:t>2 つの誤差を分けて動かす</a:t>
-            </a:r>
-          </a:p>
-          <a:p>
-            <a:pPr lvl="1"/>
-            <a:r>
-              <a:rPr sz="1800"/>
-              <a:t>σ：J の本当のばらつき（J_obs を J_true のまわりに σ でばらつかせる）</a:t>
-            </a:r>
-          </a:p>
-          <a:p>
-            <a:pPr lvl="1"/>
-            <a:r>
-              <a:rPr sz="1800"/>
-              <a:t>σ_L：解析で仮定する幅</a:t>
-            </a:r>
-          </a:p>
-          <a:p>
-            <a:r>
-              <a:rPr sz="2200"/>
-              <a:t>95% 上限：TS が最大値から 2.71 下がる点（Wilks の定理を仮定）</a:t>
-            </a:r>
-          </a:p>
-        </p:txBody>
-      </p:sp>
-      <p:sp>
-        <p:nvSpPr>
-          <p:cNvPr id="8" name="TextBox 7">
-            <a:extLst>
-              <a:ext uri="{FF2B5EF4-FFF2-40B4-BE49-F238E27FC236}">
-                <a16:creationId xmlns:a16="http://schemas.microsoft.com/office/drawing/2014/main" id="{F85CD606-E3CE-F314-B3EE-F3D7028115CB}"/>
-              </a:ext>
-            </a:extLst>
-          </p:cNvPr>
-          <p:cNvSpPr txBox="1"/>
-          <p:nvPr/>
-        </p:nvSpPr>
-        <p:spPr>
-          <a:xfrm>
-            <a:off x="5837182" y="5663239"/>
-            <a:ext cx="6093372" cy="923330"/>
-          </a:xfrm>
-          <a:prstGeom prst="rect">
-            <a:avLst/>
-          </a:prstGeom>
-          <a:noFill/>
-        </p:spPr>
-        <p:txBody>
-          <a:bodyPr wrap="square">
-            <a:spAutoFit/>
-          </a:bodyPr>
-          <a:lstStyle/>
-          <a:p>
-            <a:r>
-              <a:rPr lang="en-US" sz="1400" b="1"/>
-              <a:t>Reference:</a:t>
-            </a:r>
-            <a:r>
-              <a:rPr lang="en-US" sz="1400"/>
-              <a:t> Bertólez-Martínez, Hooper &amp; Khatee Zathul (2026), arXiv:2609.20944 式 (6)–(10)</a:t>
-            </a:r>
-            <a:endParaRPr lang="en-US"/>
+              <a:rPr sz="2000"/>
+              <a:t>z_i：天体 i の実測の σ（20 GeV）</a:t>
+            </a:r>
+          </a:p>
+          <a:p>
+            <a:r>
+              <a:rPr sz="2400"/>
+              <a:t>暗黒物質が無ければ：T は平均 0、ばらつき 1</a:t>
+            </a:r>
+          </a:p>
+          <a:p>
+            <a:r>
+              <a:rPr sz="2400"/>
+              <a:t>暗黒物質があれば：T の平均 = √( Σ pred_i² ) = 1.77</a:t>
+            </a:r>
+          </a:p>
+          <a:p>
+            <a:r>
+              <a:rPr sz="2400"/>
+              <a:t>実測 T = 0.39 → ずれ 1.4σ</a:t>
+            </a:r>
+          </a:p>
+          <a:p>
+            <a:r>
+              <a:rPr sz="2400"/>
+              <a:t>ただし、ここでは J に誤差は無いとしていた</a:t>
+            </a:r>
           </a:p>
         </p:txBody>
       </p:sp>
@@ -8884,7 +8854,7 @@
           <a:p>
             <a:r>
               <a:rPr sz="3400"/>
-              <a:t>詳細なmethodについて③：何を数えたか</a:t>
+              <a:t>ここで論文：J の誤差は小さく見積もられている</a:t>
             </a:r>
           </a:p>
         </p:txBody>
@@ -8911,39 +8881,40 @@
           <a:p>
             <a:r>
               <a:rPr sz="2400"/>
-              <a:t>本物の信号を入れた仮想データを何度も作る</a:t>
+              <a:t>文献ごとの J の値は、書かれた誤差よりも大きくばらつく</a:t>
+            </a:r>
+          </a:p>
+          <a:p>
+            <a:r>
+              <a:rPr sz="2400"/>
+              <a:t>見落とされがちな誤差の原因（8 つ）</a:t>
             </a:r>
           </a:p>
           <a:p>
             <a:pPr lvl="1"/>
             <a:r>
               <a:rPr sz="2000"/>
-              <a:t>Ursa Minor で 1000 回（基準の設定では 1 万回）</a:t>
+              <a:t>点として扱う・ハローの形・星の分布の形の仮定</a:t>
+            </a:r>
+          </a:p>
+          <a:p>
+            <a:pPr lvl="1"/>
+            <a:r>
+              <a:rPr sz="2000"/>
+              <a:t>非球対称（最大 0.4 dex）・非平衡（〜0.1）・連星（Ret II で〜0.3）</a:t>
+            </a:r>
+          </a:p>
+          <a:p>
+            <a:pPr lvl="1"/>
+            <a:r>
+              <a:rPr sz="2000"/>
+              <a:t>前景の星の混入・誤差の分布が正規分布でない</a:t>
             </a:r>
           </a:p>
           <a:p>
             <a:r>
               <a:rPr sz="2400"/>
-              <a:t>それぞれで 95% 上限を出す</a:t>
-            </a:r>
-          </a:p>
-          <a:p>
-            <a:r>
-              <a:rPr sz="2400"/>
-              <a:t>上限が本物の ⟨σv⟩ より下 =「本物を無いと間違えた」</a:t>
-            </a:r>
-          </a:p>
-          <a:p>
-            <a:r>
-              <a:rPr sz="2400"/>
-              <a:t>95% 上限なら、間違いは 5% 以下のはず</a:t>
-            </a:r>
-          </a:p>
-          <a:p>
-            <a:pPr lvl="1"/>
-            <a:r>
-              <a:rPr sz="2000"/>
-              <a:t>これが守られているか（カバレッジ）を調べる</a:t>
+              <a:t>Δlog₁₀J ≈ 0.5（約 3 倍）以上の誤差を見込むべき</a:t>
             </a:r>
           </a:p>
         </p:txBody>
@@ -8982,7 +8953,7 @@
             </a:r>
             <a:r>
               <a:rPr lang="en-US" sz="1400"/>
-              <a:t> Bertólez-Martínez, Hooper &amp; Khatee Zathul (2026), arXiv:2609.20944 §IV</a:t>
+              <a:t> Bertólez-Martínez, Hooper &amp; Khatee Zathul (2026), arXiv:2609.20944 §II</a:t>
             </a:r>
             <a:endParaRPr lang="en-US"/>
           </a:p>
@@ -9030,7 +9001,7 @@
           <a:p>
             <a:r>
               <a:rPr sz="3400"/>
-              <a:t>論文の結果①：Ursa Minor 1 個</a:t>
+              <a:t>詳細なmethodについて①：仮想データの作り方</a:t>
             </a:r>
           </a:p>
         </p:txBody>
@@ -9056,48 +9027,47 @@
           <a:lstStyle/>
           <a:p>
             <a:r>
-              <a:rPr sz="2400"/>
-              <a:t>σ_L を 0.3 / 0.5 / 1.0 だけ大きくすると</a:t>
+              <a:rPr sz="2200"/>
+              <a:t>Fermi-LAT の観測を計算機の中で作る（FermiTools、fermipy）</a:t>
             </a:r>
           </a:p>
           <a:p>
             <a:pPr lvl="1"/>
             <a:r>
-              <a:rPr sz="2000"/>
-              <a:t>上限が 1.5 / 2.5 / 11 倍ゆるくなる</a:t>
-            </a:r>
-          </a:p>
-          <a:p>
-            <a:r>
-              <a:rPr sz="2400"/>
-              <a:t>本当の誤差 σ だけ大きく、σ_L は小さいままだと</a:t>
+              <a:rPr sz="1800"/>
+              <a:t>17.4 年分、0.5 GeV〜1 TeV、10° × 10° の領域、0.08° の画素</a:t>
+            </a:r>
+          </a:p>
+          <a:p>
+            <a:r>
+              <a:rPr sz="2200"/>
+              <a:t>背景：銀河の拡散光＋等方の光から、ポアソン乱数で光子を作る</a:t>
+            </a:r>
+          </a:p>
+          <a:p>
+            <a:r>
+              <a:rPr sz="2200"/>
+              <a:t>暗黒物質の信号を入れる</a:t>
             </a:r>
           </a:p>
           <a:p>
             <a:pPr lvl="1"/>
             <a:r>
-              <a:rPr sz="2000"/>
-              <a:t>本物を除外する割合 1.7% / 8.0% / 22%</a:t>
+              <a:rPr sz="1800"/>
+              <a:t>質量 42 GeV、b クォーク対、⟨σv⟩ = 1.4 × 10⁻²⁶ cm³/s</a:t>
             </a:r>
           </a:p>
           <a:p>
             <a:pPr lvl="1"/>
             <a:r>
-              <a:rPr sz="2000"/>
-              <a:t>σ_L を σ に合わせれば 5% 以下に戻る</a:t>
-            </a:r>
-          </a:p>
-          <a:p>
-            <a:r>
-              <a:rPr sz="2400"/>
-              <a:t>形の間違い：球対称 NFW で解析 → 上限 2.4 倍厳しく</a:t>
-            </a:r>
-          </a:p>
-          <a:p>
-            <a:pPr lvl="1"/>
-            <a:r>
-              <a:rPr sz="2000"/>
-              <a:t>点として扱う → 1.4 倍厳しく</a:t>
+              <a:rPr sz="1800"/>
+              <a:t>銀河中心 GeV 超過（GCE）に合う値</a:t>
+            </a:r>
+          </a:p>
+          <a:p>
+            <a:r>
+              <a:rPr sz="2200"/>
+              <a:t>対象：Ursa Minor 1 個と、27 個の矮小銀河</a:t>
             </a:r>
           </a:p>
         </p:txBody>
@@ -9136,7 +9106,7 @@
             </a:r>
             <a:r>
               <a:rPr lang="en-US" sz="1400"/>
-              <a:t> Bertólez-Martínez, Hooper &amp; Khatee Zathul (2026), arXiv:2609.20944 §IV, Fig. 2–4</a:t>
+              <a:t> Bertólez-Martínez, Hooper &amp; Khatee Zathul (2026), arXiv:2609.20944 §III</a:t>
             </a:r>
             <a:endParaRPr lang="en-US"/>
           </a:p>
@@ -9184,7 +9154,7 @@
           <a:p>
             <a:r>
               <a:rPr sz="3400"/>
-              <a:t>論文の結果②：27 個をまとめると</a:t>
+              <a:t>詳細なmethodについて②：尤度と 2 つの誤差</a:t>
             </a:r>
           </a:p>
         </p:txBody>
@@ -9211,45 +9181,46 @@
           <a:p>
             <a:r>
               <a:rPr sz="2200"/>
-              <a:t>σ_L を 0.3 / 0.5 / 1.0 → 上限 1.14 / 1.44 / 3.23 倍ゆるく</a:t>
+              <a:t>各天体の尤度 = 光子のポアソン尤度 × J の尤度</a:t>
+            </a:r>
+          </a:p>
+          <a:p>
+            <a:pPr lvl="1"/>
+            <a:r>
+              <a:rPr sz="1800"/>
+              <a:t>L_J ∝ exp[ −(log₁₀J − log₁₀J_obs)² / 2σ_L² ]</a:t>
             </a:r>
           </a:p>
           <a:p>
             <a:r>
               <a:rPr sz="2200"/>
-              <a:t>誤差を正しく入れても、本物を除外する割合 21%（5% のはず）</a:t>
+              <a:t>27 個は尤度の積でまとめる（⟨σv⟩ は共通、J は天体ごと）</a:t>
+            </a:r>
+          </a:p>
+          <a:p>
+            <a:r>
+              <a:rPr sz="2200"/>
+              <a:t>2 つの誤差を分けて動かす</a:t>
             </a:r>
           </a:p>
           <a:p>
             <a:pPr lvl="1"/>
             <a:r>
               <a:rPr sz="1800"/>
-              <a:t>J の数が天体の数と一緒に増え、Wilks の定理の前提が崩れる</a:t>
+              <a:t>σ：J の本当のばらつき（J_obs を J_true のまわりに σ でばらつかせる）</a:t>
+            </a:r>
+          </a:p>
+          <a:p>
+            <a:pPr lvl="1"/>
+            <a:r>
+              <a:rPr sz="1800"/>
+              <a:t>σ_L：解析で仮定する幅</a:t>
             </a:r>
           </a:p>
           <a:p>
             <a:r>
               <a:rPr sz="2200"/>
-              <a:t>本当の誤差を 0.3 / 0.5 / 1.0 大きくすると 31% / 49% / 88%</a:t>
-            </a:r>
-          </a:p>
-          <a:p>
-            <a:pPr lvl="1"/>
-            <a:r>
-              <a:rPr sz="1800"/>
-              <a:t>σ_L を合わせても 23% / 28% / 38%</a:t>
-            </a:r>
-          </a:p>
-          <a:p>
-            <a:r>
-              <a:rPr sz="2200"/>
-              <a:t>原因：J が上に振れた天体が、上限を決めてしまう</a:t>
-            </a:r>
-          </a:p>
-          <a:p>
-            <a:r>
-              <a:rPr sz="2200"/>
-              <a:t>対策の一つ：何も無い領域で較正する</a:t>
+              <a:t>95% 上限：TS が最大値から 2.71 下がる点（Wilks の定理を仮定）</a:t>
             </a:r>
           </a:p>
         </p:txBody>
@@ -9288,7 +9259,7 @@
             </a:r>
             <a:r>
               <a:rPr lang="en-US" sz="1400"/>
-              <a:t> Bertólez-Martínez, Hooper &amp; Khatee Zathul (2026), arXiv:2609.20944 §V, Fig. 5–7</a:t>
+              <a:t> Bertólez-Martínez, Hooper &amp; Khatee Zathul (2026), arXiv:2609.20944 式 (6)–(10)</a:t>
             </a:r>
             <a:endParaRPr lang="en-US"/>
           </a:p>
@@ -9336,7 +9307,7 @@
           <a:p>
             <a:r>
               <a:rPr sz="3400"/>
-              <a:t>論文のまとめ</a:t>
+              <a:t>詳細なmethodについて③：何を数えたか</a:t>
             </a:r>
           </a:p>
         </p:txBody>
@@ -9363,19 +9334,39 @@
           <a:p>
             <a:r>
               <a:rPr sz="2400"/>
-              <a:t>J の誤差や形を雑に扱うと、上限は厳しく出すぎ、本物の信号を除外しやすい</a:t>
+              <a:t>本物の信号を入れた仮想データを何度も作る</a:t>
+            </a:r>
+          </a:p>
+          <a:p>
+            <a:pPr lvl="1"/>
+            <a:r>
+              <a:rPr sz="2000"/>
+              <a:t>Ursa Minor で 1000 回（基準の設定では 1 万回）</a:t>
             </a:r>
           </a:p>
           <a:p>
             <a:r>
               <a:rPr sz="2400"/>
-              <a:t>「銀河中心と矮小銀河が矛盾する」とは、まだ言えない</a:t>
+              <a:t>それぞれで 95% 上限を出す</a:t>
             </a:r>
           </a:p>
           <a:p>
             <a:r>
               <a:rPr sz="2400"/>
-              <a:t>Δlog₁₀J ≈ 0.5 程度の誤差を見込むべき</a:t>
+              <a:t>上限が本物の ⟨σv⟩ より下 =「本物を無いと間違えた」</a:t>
+            </a:r>
+          </a:p>
+          <a:p>
+            <a:r>
+              <a:rPr sz="2400"/>
+              <a:t>95% 上限なら、間違いは 5% 以下のはず</a:t>
+            </a:r>
+          </a:p>
+          <a:p>
+            <a:pPr lvl="1"/>
+            <a:r>
+              <a:rPr sz="2000"/>
+              <a:t>これが守られているか（カバレッジ）を調べる</a:t>
             </a:r>
           </a:p>
         </p:txBody>
@@ -9414,7 +9405,7 @@
             </a:r>
             <a:r>
               <a:rPr lang="en-US" sz="1400"/>
-              <a:t> Bertólez-Martínez, Hooper &amp; Khatee Zathul (2026), arXiv:2609.20944 §VI</a:t>
+              <a:t> Bertólez-Martínez, Hooper &amp; Khatee Zathul (2026), arXiv:2609.20944 §IV</a:t>
             </a:r>
             <a:endParaRPr lang="en-US"/>
           </a:p>
@@ -9462,7 +9453,7 @@
           <a:p>
             <a:r>
               <a:rPr sz="3400"/>
-              <a:t>論文の考え方を、僕の結果に当てはめる</a:t>
+              <a:t>論文の結果①：Ursa Minor 1 個</a:t>
             </a:r>
           </a:p>
         </p:txBody>
@@ -9489,39 +9480,47 @@
           <a:p>
             <a:r>
               <a:rPr sz="2400"/>
-              <a:t>これまで：J の誤差 = 0（J は推定値そのまま）</a:t>
+              <a:t>σ_L を 0.3 / 0.5 / 1.0 だけ大きくすると</a:t>
+            </a:r>
+          </a:p>
+          <a:p>
+            <a:pPr lvl="1"/>
+            <a:r>
+              <a:rPr sz="2000"/>
+              <a:t>上限が 1.5 / 2.5 / 11 倍ゆるくなる</a:t>
             </a:r>
           </a:p>
           <a:p>
             <a:r>
               <a:rPr sz="2400"/>
-              <a:t>今回：各天体の本当の J = 推定値 × 10^δ_i</a:t>
+              <a:t>本当の誤差 σ だけ大きく、σ_L は小さいままだと</a:t>
             </a:r>
           </a:p>
           <a:p>
             <a:pPr lvl="1"/>
             <a:r>
               <a:rPr sz="2000"/>
-              <a:t>δ_i は平均 0、幅 0.5 の正規分布（天体ごとに独立）</a:t>
+              <a:t>本物を除外する割合 1.7% / 8.0% / 22%</a:t>
             </a:r>
           </a:p>
           <a:p>
             <a:pPr lvl="1"/>
             <a:r>
               <a:rPr sz="2000"/>
-              <a:t>→ J がおよそ 1/3 倍〜3 倍の範囲でずれる</a:t>
+              <a:t>σ_L を σ に合わせれば 5% 以下に戻る</a:t>
             </a:r>
           </a:p>
           <a:p>
             <a:r>
               <a:rPr sz="2400"/>
-              <a:t>予測 σ は J に比例 → pred_i × 10^δ_i</a:t>
-            </a:r>
-          </a:p>
-          <a:p>
-            <a:r>
-              <a:rPr sz="2400"/>
-              <a:t>論文と同じく「J をずらした世界」をたくさん作る（20 万回）</a:t>
+              <a:t>形の間違い：球対称 NFW で解析 → 上限 2.4 倍厳しく</a:t>
+            </a:r>
+          </a:p>
+          <a:p>
+            <a:pPr lvl="1"/>
+            <a:r>
+              <a:rPr sz="2000"/>
+              <a:t>点として扱う → 1.4 倍厳しく</a:t>
             </a:r>
           </a:p>
         </p:txBody>
@@ -9560,7 +9559,7 @@
             </a:r>
             <a:r>
               <a:rPr lang="en-US" sz="1400"/>
-              <a:t> Bertólez-Martínez, Hooper &amp; Khatee Zathul (2026), arXiv:2609.20944 §IV</a:t>
+              <a:t> Bertólez-Martínez, Hooper &amp; Khatee Zathul (2026), arXiv:2609.20944 §IV, Fig. 2–4</a:t>
             </a:r>
             <a:endParaRPr lang="en-US"/>
           </a:p>
@@ -9608,7 +9607,7 @@
           <a:p>
             <a:r>
               <a:rPr sz="3400"/>
-              <a:t>有意度の計算式のどこに誤差が入るか</a:t>
+              <a:t>論文の結果②：27 個をまとめると</a:t>
             </a:r>
           </a:p>
         </p:txBody>
@@ -9626,7 +9625,7 @@
         <p:spPr>
           <a:xfrm>
             <a:off x="841248" y="1463040"/>
-            <a:ext cx="10515600" cy="4937760"/>
+            <a:ext cx="10515600" cy="4114800"/>
           </a:xfrm>
         </p:spPr>
         <p:txBody>
@@ -9634,48 +9633,87 @@
           <a:lstStyle/>
           <a:p>
             <a:r>
-              <a:rPr sz="2400"/>
-              <a:t>暗黒物質ありで期待される T</a:t>
+              <a:rPr sz="2200"/>
+              <a:t>σ_L を 0.3 / 0.5 / 1.0 → 上限 1.14 / 1.44 / 3.23 倍ゆるく</a:t>
+            </a:r>
+          </a:p>
+          <a:p>
+            <a:r>
+              <a:rPr sz="2200"/>
+              <a:t>誤差を正しく入れても、本物を除外する割合 21%（5% のはず）</a:t>
             </a:r>
           </a:p>
           <a:p>
             <a:pPr lvl="1"/>
             <a:r>
-              <a:rPr sz="2000"/>
-              <a:t>誤差なし：E[T] = Σ w_i pred_i / √Σ w_i² = 1.73</a:t>
+              <a:rPr sz="1800"/>
+              <a:t>J の数が天体の数と一緒に増え、Wilks の定理の前提が崩れる</a:t>
+            </a:r>
+          </a:p>
+          <a:p>
+            <a:r>
+              <a:rPr sz="2200"/>
+              <a:t>本当の誤差を 0.3 / 0.5 / 1.0 大きくすると 31% / 49% / 88%</a:t>
             </a:r>
           </a:p>
           <a:p>
             <a:pPr lvl="1"/>
             <a:r>
-              <a:rPr sz="2000"/>
-              <a:t>誤差あり：E[T] = Σ w_i pred_i 10^δ_i / √Σ w_i²  ← δ でばらつく</a:t>
-            </a:r>
-          </a:p>
-          <a:p>
-            <a:r>
-              <a:rPr sz="2400"/>
-              <a:t>実測 T にも測定の揺れ s がある（s = 1、または空で測った 1.26）</a:t>
-            </a:r>
-          </a:p>
-          <a:p>
-            <a:r>
-              <a:rPr sz="2400"/>
-              <a:t>暗黒物質ありで、実測 0.39 以下になる確率</a:t>
-            </a:r>
-          </a:p>
-          <a:p>
-            <a:pPr lvl="1"/>
-            <a:r>
-              <a:rPr sz="2000"/>
-              <a:t>p = （δ について平均）Φ( (0.39 − E[T]) / s )</a:t>
-            </a:r>
-          </a:p>
-          <a:p>
-            <a:r>
-              <a:rPr sz="2400"/>
-              <a:t>p を σ に直したもの =「ずれ」</a:t>
-            </a:r>
+              <a:rPr sz="1800"/>
+              <a:t>σ_L を合わせても 23% / 28% / 38%</a:t>
+            </a:r>
+          </a:p>
+          <a:p>
+            <a:r>
+              <a:rPr sz="2200"/>
+              <a:t>原因：J が上に振れた天体が、上限を決めてしまう</a:t>
+            </a:r>
+          </a:p>
+          <a:p>
+            <a:r>
+              <a:rPr sz="2200"/>
+              <a:t>対策の一つ：何も無い領域で較正する</a:t>
+            </a:r>
+          </a:p>
+        </p:txBody>
+      </p:sp>
+      <p:sp>
+        <p:nvSpPr>
+          <p:cNvPr id="8" name="TextBox 7">
+            <a:extLst>
+              <a:ext uri="{FF2B5EF4-FFF2-40B4-BE49-F238E27FC236}">
+                <a16:creationId xmlns:a16="http://schemas.microsoft.com/office/drawing/2014/main" id="{F85CD606-E3CE-F314-B3EE-F3D7028115CB}"/>
+              </a:ext>
+            </a:extLst>
+          </p:cNvPr>
+          <p:cNvSpPr txBox="1"/>
+          <p:nvPr/>
+        </p:nvSpPr>
+        <p:spPr>
+          <a:xfrm>
+            <a:off x="5837182" y="5663239"/>
+            <a:ext cx="6093372" cy="923330"/>
+          </a:xfrm>
+          <a:prstGeom prst="rect">
+            <a:avLst/>
+          </a:prstGeom>
+          <a:noFill/>
+        </p:spPr>
+        <p:txBody>
+          <a:bodyPr wrap="square">
+            <a:spAutoFit/>
+          </a:bodyPr>
+          <a:lstStyle/>
+          <a:p>
+            <a:r>
+              <a:rPr lang="en-US" sz="1400" b="1"/>
+              <a:t>Reference:</a:t>
+            </a:r>
+            <a:r>
+              <a:rPr lang="en-US" sz="1400"/>
+              <a:t> Bertólez-Martínez, Hooper &amp; Khatee Zathul (2026), arXiv:2609.20944 §V, Fig. 5–7</a:t>
+            </a:r>
+            <a:endParaRPr lang="en-US"/>
           </a:p>
         </p:txBody>
       </p:sp>
@@ -9785,20 +9823,14 @@
       </p:sp>
       <p:pic>
         <p:nvPicPr>
-          <p:cNvPr id="5" name="Picture 4">
-            <a:extLst>
-              <a:ext uri="{FF2B5EF4-FFF2-40B4-BE49-F238E27FC236}">
-                <a16:creationId xmlns:a16="http://schemas.microsoft.com/office/drawing/2014/main" id="{B2B30F14-F3FD-3F53-EC7E-3A869D50EC03}"/>
-              </a:ext>
-            </a:extLst>
-          </p:cNvPr>
+          <p:cNvPr id="8" name="Picture 7" descr="fig_bin6_before_after_totani.png"/>
           <p:cNvPicPr>
             <a:picLocks noChangeAspect="1"/>
           </p:cNvPicPr>
           <p:nvPr/>
         </p:nvPicPr>
         <p:blipFill>
-          <a:blip r:embed="rId3"/>
+          <a:blip r:embed="rId4"/>
           <a:srcRect r="49322"/>
           <a:stretch>
             <a:fillRect/>
@@ -9963,45 +9995,66 @@
           <a:p>
             <a:r>
               <a:rPr sz="3400"/>
-              <a:t>結果：予測の幅と実測</a:t>
-            </a:r>
-          </a:p>
-        </p:txBody>
-      </p:sp>
-      <p:pic>
-        <p:nvPicPr>
-          <p:cNvPr id="3" name="Picture 2" descr="fig_dwarf_J_uncertainty.png"/>
-          <p:cNvPicPr>
-            <a:picLocks noChangeAspect="1"/>
-          </p:cNvPicPr>
-          <p:nvPr/>
-        </p:nvPicPr>
-        <p:blipFill>
-          <a:blip r:embed="rId3"/>
-          <a:stretch>
-            <a:fillRect/>
-          </a:stretch>
-        </p:blipFill>
+              <a:t>論文のまとめ</a:t>
+            </a:r>
+          </a:p>
+        </p:txBody>
+      </p:sp>
+      <p:sp>
+        <p:nvSpPr>
+          <p:cNvPr id="3" name="Content Placeholder 2"/>
+          <p:cNvSpPr>
+            <a:spLocks noGrp="1"/>
+          </p:cNvSpPr>
+          <p:nvPr>
+            <p:ph idx="1"/>
+          </p:nvPr>
+        </p:nvSpPr>
         <p:spPr>
           <a:xfrm>
-            <a:off x="2194560" y="1234440"/>
-            <a:ext cx="6858000" cy="4114800"/>
+            <a:off x="841248" y="1463040"/>
+            <a:ext cx="10515600" cy="4114800"/>
           </a:xfrm>
-          <a:prstGeom prst="rect">
-            <a:avLst/>
-          </a:prstGeom>
         </p:spPr>
-      </p:pic>
-      <p:sp>
-        <p:nvSpPr>
-          <p:cNvPr id="4" name="TextBox 3"/>
+        <p:txBody>
+          <a:bodyPr/>
+          <a:lstStyle/>
+          <a:p>
+            <a:r>
+              <a:rPr sz="2400"/>
+              <a:t>J の誤差や形を雑に扱うと、上限は厳しく出すぎ、本物の信号を除外しやすい</a:t>
+            </a:r>
+          </a:p>
+          <a:p>
+            <a:r>
+              <a:rPr sz="2400"/>
+              <a:t>「銀河中心と矮小銀河が矛盾する」とは、まだ言えない</a:t>
+            </a:r>
+          </a:p>
+          <a:p>
+            <a:r>
+              <a:rPr sz="2400"/>
+              <a:t>Δlog₁₀J ≈ 0.5 程度の誤差を見込むべき</a:t>
+            </a:r>
+          </a:p>
+        </p:txBody>
+      </p:sp>
+      <p:sp>
+        <p:nvSpPr>
+          <p:cNvPr id="8" name="TextBox 7">
+            <a:extLst>
+              <a:ext uri="{FF2B5EF4-FFF2-40B4-BE49-F238E27FC236}">
+                <a16:creationId xmlns:a16="http://schemas.microsoft.com/office/drawing/2014/main" id="{F85CD606-E3CE-F314-B3EE-F3D7028115CB}"/>
+              </a:ext>
+            </a:extLst>
+          </p:cNvPr>
           <p:cNvSpPr txBox="1"/>
           <p:nvPr/>
         </p:nvSpPr>
         <p:spPr>
           <a:xfrm>
-            <a:off x="457200" y="5486400"/>
-            <a:ext cx="11247120" cy="457200"/>
+            <a:off x="5837182" y="5663239"/>
+            <a:ext cx="6093372" cy="923330"/>
           </a:xfrm>
           <a:prstGeom prst="rect">
             <a:avLst/>
@@ -10015,9 +10068,14 @@
           <a:lstStyle/>
           <a:p>
             <a:r>
-              <a:rPr sz="2000"/>
-              <a:t>期待 1.7σ → J の誤差で 1.3〜5.0σ に広がる。実測 0.4σ ± 1.26。ずれ 1.3σ</a:t>
-            </a:r>
+              <a:rPr lang="en-US" sz="1400" b="1"/>
+              <a:t>Reference:</a:t>
+            </a:r>
+            <a:r>
+              <a:rPr lang="en-US" sz="1400"/>
+              <a:t> Bertólez-Martínez, Hooper &amp; Khatee Zathul (2026), arXiv:2609.20944 §VI</a:t>
+            </a:r>
+            <a:endParaRPr lang="en-US"/>
           </a:p>
         </p:txBody>
       </p:sp>
@@ -10063,7 +10121,7 @@
           <a:p>
             <a:r>
               <a:rPr sz="3400"/>
-              <a:t>結果の数字</a:t>
+              <a:t>論文の考え方を、僕の結果に当てはめる</a:t>
             </a:r>
           </a:p>
         </p:txBody>
@@ -10081,7 +10139,7 @@
         <p:spPr>
           <a:xfrm>
             <a:off x="841248" y="1463040"/>
-            <a:ext cx="10515600" cy="4937760"/>
+            <a:ext cx="10515600" cy="4114800"/>
           </a:xfrm>
         </p:spPr>
         <p:txBody>
@@ -10090,41 +10148,80 @@
           <a:p>
             <a:r>
               <a:rPr sz="2400"/>
-              <a:t>局所密度 0.42 GeV/cm³ の場合（43 天体、20 GeV）</a:t>
+              <a:t>これまで：J の誤差 = 0（J は推定値そのまま）</a:t>
+            </a:r>
+          </a:p>
+          <a:p>
+            <a:r>
+              <a:rPr sz="2400"/>
+              <a:t>今回：各天体の本当の J = 推定値 × 10^δ_i</a:t>
             </a:r>
           </a:p>
           <a:p>
             <a:pPr lvl="1"/>
             <a:r>
               <a:rPr sz="2000"/>
-              <a:t>J の誤差なし：期待 1.73、ずれ 1.3σ（s = 1.26 なら 1.1σ）</a:t>
+              <a:t>δ_i は平均 0、幅 0.5 の正規分布（天体ごとに独立）</a:t>
             </a:r>
           </a:p>
           <a:p>
             <a:pPr lvl="1"/>
             <a:r>
               <a:rPr sz="2000"/>
-              <a:t>J の誤差あり：期待 2.4（68% で 1.3–5.0）、ずれ 1.5σ（1.3σ）</a:t>
+              <a:t>→ J がおよそ 1/3 倍〜3 倍の範囲でずれる</a:t>
             </a:r>
           </a:p>
           <a:p>
             <a:r>
               <a:rPr sz="2400"/>
-              <a:t>天の川側の局所密度を 0.3〜0.6 GeV/cm³ で動かしても</a:t>
-            </a:r>
-          </a:p>
-          <a:p>
-            <a:pPr lvl="1"/>
-            <a:r>
-              <a:rPr sz="2000"/>
-              <a:t>ずれは較正後 2.4σ 以下</a:t>
+              <a:t>予測 σ は J に比例 → pred_i × 10^δ_i</a:t>
             </a:r>
           </a:p>
           <a:p>
             <a:r>
               <a:rPr sz="2400"/>
-              <a:t>→ 暗黒物質と矛盾はしないが、確認もできない（判定できない）</a:t>
-            </a:r>
+              <a:t>論文と同じく「J をずらした世界」をたくさん作る（20 万回）</a:t>
+            </a:r>
+          </a:p>
+        </p:txBody>
+      </p:sp>
+      <p:sp>
+        <p:nvSpPr>
+          <p:cNvPr id="8" name="TextBox 7">
+            <a:extLst>
+              <a:ext uri="{FF2B5EF4-FFF2-40B4-BE49-F238E27FC236}">
+                <a16:creationId xmlns:a16="http://schemas.microsoft.com/office/drawing/2014/main" id="{F85CD606-E3CE-F314-B3EE-F3D7028115CB}"/>
+              </a:ext>
+            </a:extLst>
+          </p:cNvPr>
+          <p:cNvSpPr txBox="1"/>
+          <p:nvPr/>
+        </p:nvSpPr>
+        <p:spPr>
+          <a:xfrm>
+            <a:off x="5837182" y="5663239"/>
+            <a:ext cx="6093372" cy="923330"/>
+          </a:xfrm>
+          <a:prstGeom prst="rect">
+            <a:avLst/>
+          </a:prstGeom>
+          <a:noFill/>
+        </p:spPr>
+        <p:txBody>
+          <a:bodyPr wrap="square">
+            <a:spAutoFit/>
+          </a:bodyPr>
+          <a:lstStyle/>
+          <a:p>
+            <a:r>
+              <a:rPr lang="en-US" sz="1400" b="1"/>
+              <a:t>Reference:</a:t>
+            </a:r>
+            <a:r>
+              <a:rPr lang="en-US" sz="1400"/>
+              <a:t> Bertólez-Martínez, Hooper &amp; Khatee Zathul (2026), arXiv:2609.20944 §IV</a:t>
+            </a:r>
+            <a:endParaRPr lang="en-US"/>
           </a:p>
         </p:txBody>
       </p:sp>
@@ -10170,7 +10267,7 @@
           <a:p>
             <a:r>
               <a:rPr sz="3400"/>
-              <a:t>2 つの数字の違い：15σ と 1.3σ</a:t>
+              <a:t>有意度の計算式のどこに誤差が入るか</a:t>
             </a:r>
           </a:p>
         </p:txBody>
@@ -10197,40 +10294,46 @@
           <a:p>
             <a:r>
               <a:rPr sz="2400"/>
-              <a:t>約 15σ：天の川のハロー超過の強さ</a:t>
+              <a:t>暗黒物質ありで期待される T</a:t>
             </a:r>
           </a:p>
           <a:p>
             <a:pPr lvl="1"/>
             <a:r>
               <a:rPr sz="2000"/>
-              <a:t>19.0σ を、何も無い空でのばらつき 1.26 で割ったもの</a:t>
+              <a:t>誤差なし：E[T] = Σ w_i pred_i / √Σ w_i² = 1.77</a:t>
             </a:r>
           </a:p>
           <a:p>
             <a:pPr lvl="1"/>
             <a:r>
               <a:rPr sz="2000"/>
-              <a:t>「天の川に、背景では説明しにくい何かがある」</a:t>
+              <a:t>誤差あり：E[T] = Σ w_i pred_i 10^δ_i / √Σ w_i²  ← δ でばらつく</a:t>
             </a:r>
           </a:p>
           <a:p>
             <a:r>
               <a:rPr sz="2400"/>
-              <a:t>1.3σ：矮小銀河での「予測と実測のずれ」</a:t>
+              <a:t>実測 T にも測定の揺れ s がある（s = 1、または空で測った 1.26）</a:t>
+            </a:r>
+          </a:p>
+          <a:p>
+            <a:r>
+              <a:rPr sz="2400"/>
+              <a:t>暗黒物質ありで、実測 0.39 以下になる確率</a:t>
             </a:r>
           </a:p>
           <a:p>
             <a:pPr lvl="1"/>
             <a:r>
               <a:rPr sz="2000"/>
-              <a:t>「天の川の超過が暗黒物質だとしても、矮小銀河の結果と矛盾しない」</a:t>
+              <a:t>p = （δ について平均）Φ( (0.39 − E[T]) / s )</a:t>
             </a:r>
           </a:p>
           <a:p>
             <a:r>
               <a:rPr sz="2400"/>
-              <a:t>別のものを測った、別の数字</a:t>
+              <a:t>p を σ に直したもの =「ずれ」</a:t>
             </a:r>
           </a:p>
         </p:txBody>
@@ -10277,60 +10380,61 @@
           <a:p>
             <a:r>
               <a:rPr sz="3400"/>
-              <a:t>結論</a:t>
-            </a:r>
-          </a:p>
-        </p:txBody>
-      </p:sp>
-      <p:sp>
-        <p:nvSpPr>
-          <p:cNvPr id="3" name="Content Placeholder 2"/>
-          <p:cNvSpPr>
-            <a:spLocks noGrp="1"/>
-          </p:cNvSpPr>
-          <p:nvPr>
-            <p:ph idx="1"/>
-          </p:nvPr>
-        </p:nvSpPr>
+              <a:t>結果：予測の幅と実測</a:t>
+            </a:r>
+          </a:p>
+        </p:txBody>
+      </p:sp>
+      <p:pic>
+        <p:nvPicPr>
+          <p:cNvPr id="5" name="Picture 4" descr="fig_dwarf_J_uncertainty_totani.png"/>
+          <p:cNvPicPr>
+            <a:picLocks noChangeAspect="1"/>
+          </p:cNvPicPr>
+          <p:nvPr/>
+        </p:nvPicPr>
+        <p:blipFill>
+          <a:blip r:embed="rId4"/>
+          <a:srcRect/>
+          <a:stretch>
+            <a:fillRect/>
+          </a:stretch>
+        </p:blipFill>
         <p:spPr>
           <a:xfrm>
-            <a:off x="841248" y="1463040"/>
-            <a:ext cx="10515600" cy="4937760"/>
+            <a:off x="2194560" y="1234440"/>
+            <a:ext cx="6858000" cy="4114800"/>
           </a:xfrm>
+          <a:prstGeom prst="rect">
+            <a:avLst/>
+          </a:prstGeom>
         </p:spPr>
-        <p:txBody>
-          <a:bodyPr/>
-          <a:lstStyle/>
-          <a:p>
-            <a:r>
-              <a:rPr sz="2400"/>
-              <a:t>Totani の超過を再現（名目 19.0σ、較正後 約 15σ）</a:t>
-            </a:r>
-          </a:p>
-          <a:p>
-            <a:r>
-              <a:rPr sz="2400"/>
-              <a:t>ICS の明るさ・バブル・計算の近似の間違いでは説明できない</a:t>
-            </a:r>
-          </a:p>
-          <a:p>
-            <a:pPr lvl="1"/>
+      </p:pic>
+      <p:sp>
+        <p:nvSpPr>
+          <p:cNvPr id="4" name="TextBox 3"/>
+          <p:cNvSpPr txBox="1"/>
+          <p:nvPr/>
+        </p:nvSpPr>
+        <p:spPr>
+          <a:xfrm>
+            <a:off x="457200" y="5486400"/>
+            <a:ext cx="11247120" cy="457200"/>
+          </a:xfrm>
+          <a:prstGeom prst="rect">
+            <a:avLst/>
+          </a:prstGeom>
+          <a:noFill/>
+        </p:spPr>
+        <p:txBody>
+          <a:bodyPr wrap="square">
+            <a:spAutoFit/>
+          </a:bodyPr>
+          <a:lstStyle/>
+          <a:p>
             <a:r>
               <a:rPr sz="2000"/>
-              <a:t>暗黒物質の証拠ではない（ICS の空間の形は未確認）</a:t>
-            </a:r>
-          </a:p>
-          <a:p>
-            <a:r>
-              <a:rPr sz="2400"/>
-              <a:t>矮小銀河では非検出</a:t>
-            </a:r>
-          </a:p>
-          <a:p>
-            <a:pPr lvl="1"/>
-            <a:r>
-              <a:rPr sz="2000"/>
-              <a:t>J の誤差（約 3 倍）を入れると、予測とのずれは 1.3σ → 判定できない</a:t>
+              <a:t>期待 1.8σ → J の誤差で 1.4〜5.1σ に広がる。実測 0.4σ ± 1.26。ずれ 1.3σ</a:t>
             </a:r>
           </a:p>
         </p:txBody>
@@ -10377,7 +10481,7 @@
           <a:p>
             <a:r>
               <a:rPr sz="3400"/>
-              <a:t>統計の視点から：この研究に足りなかったもの</a:t>
+              <a:t>結果の数字</a:t>
             </a:r>
           </a:p>
         </p:txBody>
@@ -10395,7 +10499,7 @@
         <p:spPr>
           <a:xfrm>
             <a:off x="841248" y="1463040"/>
-            <a:ext cx="10515600" cy="4114800"/>
+            <a:ext cx="10515600" cy="4937760"/>
           </a:xfrm>
         </p:spPr>
         <p:txBody>
@@ -10404,81 +10508,41 @@
           <a:p>
             <a:r>
               <a:rPr sz="2400"/>
-              <a:t>σ が 1.26 倍に膨らんだ原因</a:t>
+              <a:t>局所密度 0.42 GeV/cm³ の場合（43 天体、20 GeV）</a:t>
             </a:r>
           </a:p>
           <a:p>
             <a:pPr lvl="1"/>
             <a:r>
               <a:rPr sz="2000"/>
-              <a:t>尤度は「型紙（GALPROP）は完璧、誤差は光子の数のばらつきだけ」と仮定</a:t>
+              <a:t>J の誤差なし：期待 1.77、ずれ 1.4σ（s = 1.26 なら 1.1σ）</a:t>
             </a:r>
           </a:p>
           <a:p>
             <a:pPr lvl="1"/>
             <a:r>
               <a:rPr sz="2000"/>
-              <a:t>型紙そのものの誤差が、統計モデルに入っていない</a:t>
+              <a:t>J の誤差あり：期待 2.5（68% で 1.4–5.1）、ずれ 1.5σ（1.3σ）</a:t>
             </a:r>
           </a:p>
           <a:p>
             <a:r>
               <a:rPr sz="2400"/>
-              <a:t>データ同化：シミュレーションの誤差と観測の誤差を分けて、統計モデルに入れる枠組み</a:t>
+              <a:t>天の川側の局所密度を 0.3〜0.6 GeV/cm³ で動かしても</a:t>
+            </a:r>
+          </a:p>
+          <a:p>
+            <a:pPr lvl="1"/>
+            <a:r>
+              <a:rPr sz="2000"/>
+              <a:t>ずれは較正後 2.4σ 以下</a:t>
             </a:r>
           </a:p>
           <a:p>
             <a:r>
               <a:rPr sz="2400"/>
-              <a:t>J をずらして何度も計算したのも、分布をたくさんのサンプルで表すという同じ発想</a:t>
-            </a:r>
-          </a:p>
-          <a:p>
-            <a:pPr lvl="1"/>
-            <a:r>
-              <a:rPr sz="2000"/>
-              <a:t>（アンサンブル・粒子フィルタ）</a:t>
-            </a:r>
-          </a:p>
-        </p:txBody>
-      </p:sp>
-      <p:sp>
-        <p:nvSpPr>
-          <p:cNvPr id="8" name="TextBox 7">
-            <a:extLst>
-              <a:ext uri="{FF2B5EF4-FFF2-40B4-BE49-F238E27FC236}">
-                <a16:creationId xmlns:a16="http://schemas.microsoft.com/office/drawing/2014/main" id="{F85CD606-E3CE-F314-B3EE-F3D7028115CB}"/>
-              </a:ext>
-            </a:extLst>
-          </p:cNvPr>
-          <p:cNvSpPr txBox="1"/>
-          <p:nvPr/>
-        </p:nvSpPr>
-        <p:spPr>
-          <a:xfrm>
-            <a:off x="5837182" y="5663239"/>
-            <a:ext cx="6093372" cy="923330"/>
-          </a:xfrm>
-          <a:prstGeom prst="rect">
-            <a:avLst/>
-          </a:prstGeom>
-          <a:noFill/>
-        </p:spPr>
-        <p:txBody>
-          <a:bodyPr wrap="square">
-            <a:spAutoFit/>
-          </a:bodyPr>
-          <a:lstStyle/>
-          <a:p>
-            <a:r>
-              <a:rPr lang="en-US" sz="1400" b="1"/>
-              <a:t>Reference:</a:t>
-            </a:r>
-            <a:r>
-              <a:rPr lang="en-US" sz="1400"/>
-              <a:t> 中村和幸 (2017), 数理解析研究所講究録 2057, 59–66</a:t>
-            </a:r>
-            <a:endParaRPr lang="en-US"/>
+              <a:t>→ 暗黒物質と矛盾はしないが、確認もできない（判定できない）</a:t>
+            </a:r>
           </a:p>
         </p:txBody>
       </p:sp>
@@ -10524,7 +10588,7 @@
           <a:p>
             <a:r>
               <a:rPr sz="3400"/>
-              <a:t>参考文献</a:t>
+              <a:t>2 つの数字の違い：15σ と 1.3σ</a:t>
             </a:r>
           </a:p>
         </p:txBody>
@@ -10550,56 +10614,41 @@
           <a:lstStyle/>
           <a:p>
             <a:r>
-              <a:rPr sz="1800"/>
-              <a:t>T. Totani (2025), arXiv:2507.07209</a:t>
-            </a:r>
-          </a:p>
-          <a:p>
-            <a:r>
-              <a:rPr sz="1800"/>
-              <a:t>Bertólez-Martínez, Hooper &amp; Khatee Zathul (2026), arXiv:2609.20944</a:t>
-            </a:r>
-          </a:p>
-          <a:p>
-            <a:r>
-              <a:rPr sz="1800"/>
-              <a:t>S. S. Wilks (1938), Ann. Math. Stat. 9, 60</a:t>
-            </a:r>
-          </a:p>
-          <a:p>
-            <a:r>
-              <a:rPr sz="1800"/>
-              <a:t>D. Foreman-Mackey et al. (2013), PASP 125, 306</a:t>
-            </a:r>
-          </a:p>
-          <a:p>
-            <a:r>
-              <a:rPr sz="1800"/>
-              <a:t>I. V. Moskalenko &amp; A. W. Strong (2000), ApJ 528, 357</a:t>
-            </a:r>
-          </a:p>
-          <a:p>
-            <a:r>
-              <a:rPr sz="1800"/>
-              <a:t>B. Efron &amp; R. J. Tibshirani (1993), An Introduction to the Bootstrap</a:t>
-            </a:r>
-          </a:p>
-          <a:p>
-            <a:r>
-              <a:rPr sz="1800"/>
-              <a:t>A. B. Pace (2025), Open J. Astrophys. 8, 142</a:t>
-            </a:r>
-          </a:p>
-          <a:p>
-            <a:r>
-              <a:rPr sz="1800"/>
-              <a:t>A. B. Pace &amp; L. E. Strigari (2019), MNRAS 482, 3480</a:t>
-            </a:r>
-          </a:p>
-          <a:p>
-            <a:r>
-              <a:rPr sz="1800"/>
-              <a:t>中村和幸 (2017), 数理解析研究所講究録 2057, 59–66</a:t>
+              <a:rPr sz="2400"/>
+              <a:t>約 15σ：天の川のハロー超過の強さ</a:t>
+            </a:r>
+          </a:p>
+          <a:p>
+            <a:pPr lvl="1"/>
+            <a:r>
+              <a:rPr sz="2000"/>
+              <a:t>19.5σ を、何も無い空でのばらつき 1.26 で割ったもの</a:t>
+            </a:r>
+          </a:p>
+          <a:p>
+            <a:pPr lvl="1"/>
+            <a:r>
+              <a:rPr sz="2000"/>
+              <a:t>「天の川に、背景では説明しにくい何かがある」</a:t>
+            </a:r>
+          </a:p>
+          <a:p>
+            <a:r>
+              <a:rPr sz="2400"/>
+              <a:t>1.3σ：矮小銀河での「予測と実測のずれ」</a:t>
+            </a:r>
+          </a:p>
+          <a:p>
+            <a:pPr lvl="1"/>
+            <a:r>
+              <a:rPr sz="2000"/>
+              <a:t>「天の川の超過が暗黒物質だとしても、矮小銀河の結果と矛盾しない」</a:t>
+            </a:r>
+          </a:p>
+          <a:p>
+            <a:r>
+              <a:rPr sz="2400"/>
+              <a:t>別のものを測った、別の数字</a:t>
             </a:r>
           </a:p>
         </p:txBody>
@@ -10613,7 +10662,7 @@
 </file>
 
 <file path=ppt/slides/slide36.xml><?xml version="1.0" encoding="utf-8"?>
-<p:sld xmlns:a="http://schemas.openxmlformats.org/drawingml/2006/main" xmlns:p="http://schemas.openxmlformats.org/presentationml/2006/main" xmlns:r="http://schemas.openxmlformats.org/officeDocument/2006/relationships">
+<p:sld xmlns:a="http://schemas.openxmlformats.org/drawingml/2006/main" xmlns:r="http://schemas.openxmlformats.org/officeDocument/2006/relationships" xmlns:p="http://schemas.openxmlformats.org/presentationml/2006/main">
   <p:cSld>
     <p:spTree>
       <p:nvGrpSpPr>
@@ -10621,7 +10670,14 @@
         <p:cNvGrpSpPr/>
         <p:nvPr/>
       </p:nvGrpSpPr>
-      <p:grpSpPr/>
+      <p:grpSpPr>
+        <a:xfrm>
+          <a:off x="0" y="0"/>
+          <a:ext cx="0" cy="0"/>
+          <a:chOff x="0" y="0"/>
+          <a:chExt cx="0" cy="0"/>
+        </a:xfrm>
+      </p:grpSpPr>
       <p:sp>
         <p:nvSpPr>
           <p:cNvPr id="2" name="Title 1"/>
@@ -10639,7 +10695,107 @@
           <a:p>
             <a:r>
               <a:rPr sz="3400"/>
-              <a:t>MCMC の中身①：何を求めているか</a:t>
+              <a:t>結論</a:t>
+            </a:r>
+          </a:p>
+        </p:txBody>
+      </p:sp>
+      <p:sp>
+        <p:nvSpPr>
+          <p:cNvPr id="3" name="Content Placeholder 2"/>
+          <p:cNvSpPr>
+            <a:spLocks noGrp="1"/>
+          </p:cNvSpPr>
+          <p:nvPr>
+            <p:ph idx="1"/>
+          </p:nvPr>
+        </p:nvSpPr>
+        <p:spPr>
+          <a:xfrm>
+            <a:off x="841248" y="1463040"/>
+            <a:ext cx="10515600" cy="4937760"/>
+          </a:xfrm>
+        </p:spPr>
+        <p:txBody>
+          <a:bodyPr/>
+          <a:lstStyle/>
+          <a:p>
+            <a:r>
+              <a:rPr sz="2400"/>
+              <a:t>Totani の超過を再現（名目 19.5σ、較正後 約 15σ）</a:t>
+            </a:r>
+          </a:p>
+          <a:p>
+            <a:r>
+              <a:rPr sz="2400"/>
+              <a:t>ICS の明るさ・バブル・計算の近似の間違いでは説明できない</a:t>
+            </a:r>
+          </a:p>
+          <a:p>
+            <a:pPr lvl="1"/>
+            <a:r>
+              <a:rPr sz="2000"/>
+              <a:t>暗黒物質の証拠ではない（ICS の空間の形は未確認）</a:t>
+            </a:r>
+          </a:p>
+          <a:p>
+            <a:r>
+              <a:rPr sz="2400"/>
+              <a:t>矮小銀河では非検出</a:t>
+            </a:r>
+          </a:p>
+          <a:p>
+            <a:pPr lvl="1"/>
+            <a:r>
+              <a:rPr sz="2000"/>
+              <a:t>J の誤差（約 3 倍）を入れると、予測とのずれは 1.3σ → 判定できない</a:t>
+            </a:r>
+          </a:p>
+        </p:txBody>
+      </p:sp>
+    </p:spTree>
+  </p:cSld>
+  <p:clrMapOvr>
+    <a:masterClrMapping/>
+  </p:clrMapOvr>
+</p:sld>
+</file>
+
+<file path=ppt/slides/slide37.xml><?xml version="1.0" encoding="utf-8"?>
+<p:sld xmlns:a="http://schemas.openxmlformats.org/drawingml/2006/main" xmlns:r="http://schemas.openxmlformats.org/officeDocument/2006/relationships" xmlns:p="http://schemas.openxmlformats.org/presentationml/2006/main">
+  <p:cSld>
+    <p:spTree>
+      <p:nvGrpSpPr>
+        <p:cNvPr id="1" name=""/>
+        <p:cNvGrpSpPr/>
+        <p:nvPr/>
+      </p:nvGrpSpPr>
+      <p:grpSpPr>
+        <a:xfrm>
+          <a:off x="0" y="0"/>
+          <a:ext cx="0" cy="0"/>
+          <a:chOff x="0" y="0"/>
+          <a:chExt cx="0" cy="0"/>
+        </a:xfrm>
+      </p:grpSpPr>
+      <p:sp>
+        <p:nvSpPr>
+          <p:cNvPr id="2" name="Title 1"/>
+          <p:cNvSpPr>
+            <a:spLocks noGrp="1"/>
+          </p:cNvSpPr>
+          <p:nvPr>
+            <p:ph type="title"/>
+          </p:nvPr>
+        </p:nvSpPr>
+        <p:spPr/>
+        <p:txBody>
+          <a:bodyPr/>
+          <a:lstStyle/>
+          <a:p>
+            <a:r>
+              <a:rPr sz="3400"/>
+              <a:t>統計の視点から：この研究に足りなかったもの</a:t>
             </a:r>
           </a:p>
         </p:txBody>
@@ -10664,59 +10820,42 @@
           <a:bodyPr/>
           <a:lstStyle/>
           <a:p>
-            <a:pPr/>
-            <a:r>
-              <a:rPr sz="2200"/>
-              <a:t>知りたいもの：データ D を見たあと、倍率 θ = (f₁, …, f₉) がどの値をとりうるか</a:t>
-            </a:r>
-          </a:p>
-          <a:p>
-            <a:pPr/>
-            <a:r>
-              <a:rPr sz="2200"/>
-              <a:t>ベイズの定理：P(θ | D) = L(D | θ) π(θ) / P(D)</a:t>
+            <a:r>
+              <a:rPr sz="2400"/>
+              <a:t>σ が 1.26 倍に膨らんだ原因</a:t>
             </a:r>
           </a:p>
           <a:p>
             <a:pPr lvl="1"/>
             <a:r>
-              <a:rPr sz="1800"/>
-              <a:t>P(θ | D)：事後分布（データを見た後の、θ のもっともらしさ）</a:t>
+              <a:rPr sz="2000"/>
+              <a:t>尤度は「型紙（GALPROP）は完璧、誤差は光子の数のばらつきだけ」と仮定</a:t>
             </a:r>
           </a:p>
           <a:p>
             <a:pPr lvl="1"/>
             <a:r>
-              <a:rPr sz="1800"/>
-              <a:t>L(D | θ)：尤度（手法② の L）　π(θ)：事前分布（今回は一様）</a:t>
+              <a:rPr sz="2000"/>
+              <a:t>型紙そのものの誤差が、統計モデルに入っていない</a:t>
+            </a:r>
+          </a:p>
+          <a:p>
+            <a:r>
+              <a:rPr sz="2400"/>
+              <a:t>データ同化：シミュレーションの誤差と観測の誤差を分けて、統計モデルに入れる枠組み</a:t>
+            </a:r>
+          </a:p>
+          <a:p>
+            <a:r>
+              <a:rPr sz="2400"/>
+              <a:t>J をずらして何度も計算したのも、分布をたくさんのサンプルで表すという同じ発想</a:t>
             </a:r>
           </a:p>
           <a:p>
             <a:pPr lvl="1"/>
             <a:r>
-              <a:rPr sz="1800"/>
-              <a:t>P(D)：θ によらない定数 → 計算しなくてよい</a:t>
-            </a:r>
-          </a:p>
-          <a:p>
-            <a:pPr/>
-            <a:r>
-              <a:rPr sz="2200"/>
-              <a:t>つまり P(θ | D) ∝ L(D | θ) × π(θ)</a:t>
-            </a:r>
-          </a:p>
-          <a:p>
-            <a:pPr/>
-            <a:r>
-              <a:rPr sz="2200"/>
-              <a:t>ただし θ は 9 次元。1 次元を 100 点に区切っても 100⁹ = 10¹⁸ 通り → 全部は計算できない</a:t>
-            </a:r>
-          </a:p>
-          <a:p>
-            <a:pPr/>
-            <a:r>
-              <a:rPr sz="2200"/>
-              <a:t>→ 事後分布から「サンプルを取り出す」方法が MCMC</a:t>
+              <a:rPr sz="2000"/>
+              <a:t>（アンサンブル・粒子フィルタ）</a:t>
             </a:r>
           </a:p>
         </p:txBody>
@@ -10755,193 +10894,12 @@
             </a:r>
             <a:r>
               <a:rPr lang="en-US" sz="1400"/>
-              <a:t> D. Foreman-Mackey et al. (2013), PASP 125, 306</a:t>
+              <a:t> 中村和幸 (2017), 数理解析研究所講究録 2057, 59–66</a:t>
             </a:r>
             <a:endParaRPr lang="en-US"/>
           </a:p>
         </p:txBody>
       </p:sp>
-    </p:spTree>
-  </p:cSld>
-  <p:clrMapOvr>
-    <a:masterClrMapping/>
-  </p:clrMapOvr>
-</p:sld>
-</file>
-
-<file path=ppt/slides/slide37.xml><?xml version="1.0" encoding="utf-8"?>
-<p:sld xmlns:a="http://schemas.openxmlformats.org/drawingml/2006/main" xmlns:p="http://schemas.openxmlformats.org/presentationml/2006/main" xmlns:r="http://schemas.openxmlformats.org/officeDocument/2006/relationships">
-  <p:cSld>
-    <p:spTree>
-      <p:nvGrpSpPr>
-        <p:cNvPr id="1" name=""/>
-        <p:cNvGrpSpPr/>
-        <p:nvPr/>
-      </p:nvGrpSpPr>
-      <p:grpSpPr/>
-      <p:sp>
-        <p:nvSpPr>
-          <p:cNvPr id="2" name="Title 1"/>
-          <p:cNvSpPr>
-            <a:spLocks noGrp="1"/>
-          </p:cNvSpPr>
-          <p:nvPr>
-            <p:ph type="title"/>
-          </p:nvPr>
-        </p:nvSpPr>
-        <p:spPr/>
-        <p:txBody>
-          <a:bodyPr/>
-          <a:lstStyle/>
-          <a:p>
-            <a:r>
-              <a:rPr sz="3400"/>
-              <a:t>MCMC の中身②：歩き方（メトロポリス法）</a:t>
-            </a:r>
-          </a:p>
-        </p:txBody>
-      </p:sp>
-      <p:sp>
-        <p:nvSpPr>
-          <p:cNvPr id="3" name="Content Placeholder 2"/>
-          <p:cNvSpPr>
-            <a:spLocks noGrp="1"/>
-          </p:cNvSpPr>
-          <p:nvPr>
-            <p:ph idx="1"/>
-          </p:nvPr>
-        </p:nvSpPr>
-        <p:spPr>
-          <a:xfrm>
-            <a:off x="841248" y="1463040"/>
-            <a:ext cx="5394960" cy="4114800"/>
-          </a:xfrm>
-        </p:spPr>
-        <p:txBody>
-          <a:bodyPr/>
-          <a:lstStyle/>
-          <a:p>
-            <a:pPr/>
-            <a:r>
-              <a:rPr sz="2000"/>
-              <a:t>① 今の点 θ から、少しずらした候補 θ′ を作る</a:t>
-            </a:r>
-          </a:p>
-          <a:p>
-            <a:pPr/>
-            <a:r>
-              <a:rPr sz="2000"/>
-              <a:t>② 比 r = P(θ′ | D) / P(θ | D) を計算</a:t>
-            </a:r>
-          </a:p>
-          <a:p>
-            <a:pPr lvl="1"/>
-            <a:r>
-              <a:rPr sz="1600"/>
-              <a:t>P(D) は分母分子で消える</a:t>
-            </a:r>
-          </a:p>
-          <a:p>
-            <a:pPr/>
-            <a:r>
-              <a:rPr sz="2000"/>
-              <a:t>③ r ≥ 1 なら移る。r &lt; 1 なら確率 r で移る</a:t>
-            </a:r>
-          </a:p>
-          <a:p>
-            <a:pPr lvl="1"/>
-            <a:r>
-              <a:rPr sz="1600"/>
-              <a:t>移らなければ、同じ点をもう一度記録</a:t>
-            </a:r>
-          </a:p>
-          <a:p>
-            <a:pPr/>
-            <a:r>
-              <a:rPr sz="2000"/>
-              <a:t>④ ①〜③ を何千回もくり返す</a:t>
-            </a:r>
-          </a:p>
-          <a:p>
-            <a:pPr/>
-            <a:r>
-              <a:rPr sz="2000"/>
-              <a:t>歩いた跡のヒストグラム = 事後分布</a:t>
-            </a:r>
-          </a:p>
-          <a:p>
-            <a:pPr lvl="1"/>
-            <a:r>
-              <a:rPr sz="1600"/>
-              <a:t>下がる方向にも確率的に進むので、山の広がり（誤差）まで分かる</a:t>
-            </a:r>
-          </a:p>
-        </p:txBody>
-      </p:sp>
-      <p:sp>
-        <p:nvSpPr>
-          <p:cNvPr id="8" name="TextBox 7">
-            <a:extLst>
-              <a:ext uri="{FF2B5EF4-FFF2-40B4-BE49-F238E27FC236}">
-                <a16:creationId xmlns:a16="http://schemas.microsoft.com/office/drawing/2014/main" id="{F85CD606-E3CE-F314-B3EE-F3D7028115CB}"/>
-              </a:ext>
-            </a:extLst>
-          </p:cNvPr>
-          <p:cNvSpPr txBox="1"/>
-          <p:nvPr/>
-        </p:nvSpPr>
-        <p:spPr>
-          <a:xfrm>
-            <a:off x="5837182" y="5663239"/>
-            <a:ext cx="6093372" cy="923330"/>
-          </a:xfrm>
-          <a:prstGeom prst="rect">
-            <a:avLst/>
-          </a:prstGeom>
-          <a:noFill/>
-        </p:spPr>
-        <p:txBody>
-          <a:bodyPr wrap="square">
-            <a:spAutoFit/>
-          </a:bodyPr>
-          <a:lstStyle/>
-          <a:p>
-            <a:r>
-              <a:rPr lang="en-US" sz="1400" b="1"/>
-              <a:t>Reference:</a:t>
-            </a:r>
-            <a:r>
-              <a:rPr lang="en-US" sz="1400"/>
-              <a:t> N. Metropolis et al. (1953), J. Chem. Phys. 21, 1087</a:t>
-            </a:r>
-            <a:endParaRPr lang="en-US"/>
-          </a:p>
-        </p:txBody>
-      </p:sp>
-      <p:pic>
-        <p:nvPicPr>
-          <p:cNvPr id="9" name="Picture 8" descr="fig_mcmc_toy.png"/>
-          <p:cNvPicPr>
-            <a:picLocks noChangeAspect="1"/>
-          </p:cNvPicPr>
-          <p:nvPr/>
-        </p:nvPicPr>
-        <p:blipFill>
-          <a:blip r:embed="rId3"/>
-          <a:stretch>
-            <a:fillRect/>
-          </a:stretch>
-        </p:blipFill>
-        <p:spPr>
-          <a:xfrm>
-            <a:off x="6309360" y="1828800"/>
-            <a:ext cx="5669280" cy="2267712"/>
-          </a:xfrm>
-          <a:prstGeom prst="rect">
-            <a:avLst/>
-          </a:prstGeom>
-        </p:spPr>
-      </p:pic>
     </p:spTree>
   </p:cSld>
   <p:clrMapOvr>
@@ -10951,7 +10909,7 @@
 </file>
 
 <file path=ppt/slides/slide38.xml><?xml version="1.0" encoding="utf-8"?>
-<p:sld xmlns:a="http://schemas.openxmlformats.org/drawingml/2006/main" xmlns:p="http://schemas.openxmlformats.org/presentationml/2006/main" xmlns:r="http://schemas.openxmlformats.org/officeDocument/2006/relationships">
+<p:sld xmlns:a="http://schemas.openxmlformats.org/drawingml/2006/main" xmlns:r="http://schemas.openxmlformats.org/officeDocument/2006/relationships" xmlns:p="http://schemas.openxmlformats.org/presentationml/2006/main">
   <p:cSld>
     <p:spTree>
       <p:nvGrpSpPr>
@@ -10959,7 +10917,14 @@
         <p:cNvGrpSpPr/>
         <p:nvPr/>
       </p:nvGrpSpPr>
-      <p:grpSpPr/>
+      <p:grpSpPr>
+        <a:xfrm>
+          <a:off x="0" y="0"/>
+          <a:ext cx="0" cy="0"/>
+          <a:chOff x="0" y="0"/>
+          <a:chExt cx="0" cy="0"/>
+        </a:xfrm>
+      </p:grpSpPr>
       <p:sp>
         <p:nvSpPr>
           <p:cNvPr id="2" name="Title 1"/>
@@ -10977,7 +10942,7 @@
           <a:p>
             <a:r>
               <a:rPr sz="3400"/>
-              <a:t>MCMC の中身③：今回の設定（emcee）</a:t>
+              <a:t>参考文献</a:t>
             </a:r>
           </a:p>
         </p:txBody>
@@ -10995,107 +10960,65 @@
         <p:spPr>
           <a:xfrm>
             <a:off x="841248" y="1463040"/>
-            <a:ext cx="10515600" cy="4114800"/>
+            <a:ext cx="10515600" cy="4937760"/>
           </a:xfrm>
         </p:spPr>
         <p:txBody>
           <a:bodyPr/>
           <a:lstStyle/>
           <a:p>
-            <a:pPr/>
-            <a:r>
-              <a:rPr sz="2000"/>
-              <a:t>32 人の歩行者が同時に歩く。次の一歩は、他の歩行者の位置を使って決める</a:t>
-            </a:r>
-          </a:p>
-          <a:p>
-            <a:pPr lvl="1"/>
-            <a:r>
-              <a:rPr sz="1600"/>
-              <a:t>候補：Y = X_j + Z (X_k − X_j)（X_k：自分、X_j：ランダムに選んだ他の歩行者）</a:t>
-            </a:r>
-          </a:p>
-          <a:p>
-            <a:pPr lvl="1"/>
-            <a:r>
-              <a:rPr sz="1600"/>
-              <a:t>Z は 1/2〜2 の乱数（確率 ∝ 1/√Z）、移る確率 = min(1, Z⁸ P(Y | D) / P(X_k | D))</a:t>
-            </a:r>
-          </a:p>
-          <a:p>
-            <a:pPr/>
-            <a:r>
-              <a:rPr sz="2000"/>
-              <a:t>出発点：最尤推定の点のすぐ近く。最初の 400 歩は捨て、5 歩ごとに記録</a:t>
-            </a:r>
-          </a:p>
-          <a:p>
-            <a:pPr/>
-            <a:r>
-              <a:rPr sz="2000"/>
-              <a:t>結果の例（20.8 GeV）：ハローの倍率 f_halo = 1.48（68% 区間 1.40–1.55）</a:t>
-            </a:r>
-          </a:p>
-          <a:p>
-            <a:pPr/>
-            <a:r>
-              <a:rPr sz="2000"/>
-              <a:t>注意：推奨の長さ（自己相関時間 τ の 50 倍）に届かないビンが多い</a:t>
-            </a:r>
-          </a:p>
-          <a:p>
-            <a:pPr lvl="1"/>
-            <a:r>
-              <a:rPr sz="1600"/>
-              <a:t>20.8 GeV で τ ≈ 127 歩、記録した長さ 5600 歩 &lt; 50τ。13 ビン中 2 ビンだけ到達</a:t>
-            </a:r>
-          </a:p>
-          <a:p>
-            <a:pPr lvl="1"/>
-            <a:r>
-              <a:rPr sz="1600"/>
-              <a:t>→ 誤差棒は目安。有意度 σ は Δln L から出すので影響しない</a:t>
-            </a:r>
-          </a:p>
-        </p:txBody>
-      </p:sp>
-      <p:sp>
-        <p:nvSpPr>
-          <p:cNvPr id="8" name="TextBox 7">
-            <a:extLst>
-              <a:ext uri="{FF2B5EF4-FFF2-40B4-BE49-F238E27FC236}">
-                <a16:creationId xmlns:a16="http://schemas.microsoft.com/office/drawing/2014/main" id="{F85CD606-E3CE-F314-B3EE-F3D7028115CB}"/>
-              </a:ext>
-            </a:extLst>
-          </p:cNvPr>
-          <p:cNvSpPr txBox="1"/>
-          <p:nvPr/>
-        </p:nvSpPr>
-        <p:spPr>
-          <a:xfrm>
-            <a:off x="5837182" y="5663239"/>
-            <a:ext cx="6093372" cy="923330"/>
-          </a:xfrm>
-          <a:prstGeom prst="rect">
-            <a:avLst/>
-          </a:prstGeom>
-          <a:noFill/>
-        </p:spPr>
-        <p:txBody>
-          <a:bodyPr wrap="square">
-            <a:spAutoFit/>
-          </a:bodyPr>
-          <a:lstStyle/>
-          <a:p>
-            <a:r>
-              <a:rPr lang="en-US" sz="1400" b="1"/>
-              <a:t>Reference:</a:t>
-            </a:r>
-            <a:r>
-              <a:rPr lang="en-US" sz="1400"/>
-              <a:t> J. Goodman &amp; J. Weare (2010), Comm. App. Math. Comp. Sci. 5, 65</a:t>
-            </a:r>
-            <a:endParaRPr lang="en-US"/>
+            <a:r>
+              <a:rPr sz="1800"/>
+              <a:t>T. Totani (2025), arXiv:2507.07209</a:t>
+            </a:r>
+          </a:p>
+          <a:p>
+            <a:r>
+              <a:rPr sz="1800"/>
+              <a:t>Bertólez-Martínez, Hooper &amp; Khatee Zathul (2026), arXiv:2609.20944</a:t>
+            </a:r>
+          </a:p>
+          <a:p>
+            <a:r>
+              <a:rPr sz="1800"/>
+              <a:t>S. S. Wilks (1938), Ann. Math. Stat. 9, 60</a:t>
+            </a:r>
+          </a:p>
+          <a:p>
+            <a:r>
+              <a:rPr sz="1800"/>
+              <a:t>D. Foreman-Mackey et al. (2013), PASP 125, 306</a:t>
+            </a:r>
+          </a:p>
+          <a:p>
+            <a:r>
+              <a:rPr sz="1800"/>
+              <a:t>I. V. Moskalenko &amp; A. W. Strong (2000), ApJ 528, 357</a:t>
+            </a:r>
+          </a:p>
+          <a:p>
+            <a:r>
+              <a:rPr sz="1800"/>
+              <a:t>B. Efron &amp; R. J. Tibshirani (1993), An Introduction to the Bootstrap</a:t>
+            </a:r>
+          </a:p>
+          <a:p>
+            <a:r>
+              <a:rPr sz="1800"/>
+              <a:t>A. B. Pace (2025), Open J. Astrophys. 8, 142</a:t>
+            </a:r>
+          </a:p>
+          <a:p>
+            <a:r>
+              <a:rPr sz="1800"/>
+              <a:t>A. B. Pace &amp; L. E. Strigari (2019), MNRAS 482, 3480</a:t>
+            </a:r>
+          </a:p>
+          <a:p>
+            <a:r>
+              <a:rPr sz="1800"/>
+              <a:t>中村和幸 (2017), 数理解析研究所講究録 2057, 59–66</a:t>
+            </a:r>
           </a:p>
         </p:txBody>
       </p:sp>
@@ -11367,20 +11290,15 @@
       </p:sp>
       <p:pic>
         <p:nvPicPr>
-          <p:cNvPr id="5" name="Picture 4">
-            <a:extLst>
-              <a:ext uri="{FF2B5EF4-FFF2-40B4-BE49-F238E27FC236}">
-                <a16:creationId xmlns:a16="http://schemas.microsoft.com/office/drawing/2014/main" id="{1322290E-F674-5B31-CE05-04E65EC1C03F}"/>
-              </a:ext>
-            </a:extLst>
-          </p:cNvPr>
+          <p:cNvPr id="6" name="Picture 5" descr="fig_bin6_before_after_totani.png"/>
           <p:cNvPicPr>
             <a:picLocks noChangeAspect="1"/>
           </p:cNvPicPr>
           <p:nvPr/>
         </p:nvPicPr>
         <p:blipFill>
-          <a:blip r:embed="rId3"/>
+          <a:blip r:embed="rId4"/>
+          <a:srcRect/>
           <a:stretch>
             <a:fillRect/>
           </a:stretch>
@@ -11582,7 +11500,7 @@
           <a:p>
             <a:r>
               <a:rPr sz="3400"/>
-              <a:t>手法④：MCMC（誤差の見積もり）</a:t>
+              <a:t>手法④：MCMC（最良値と誤差）</a:t>
             </a:r>
           </a:p>
         </p:txBody>
@@ -11609,7 +11527,7 @@
           <a:p>
             <a:r>
               <a:rPr sz="2400"/>
-              <a:t>最尤の 1 点だけでなく、倍率 f が「どれくらいの範囲にありうるか」を知りたい</a:t>
+              <a:t>MCMC で、最良の倍率 f と、その誤差の両方を求める（Totani と同じ）</a:t>
             </a:r>
           </a:p>
           <a:p>
@@ -11622,26 +11540,26 @@
             <a:pPr lvl="1"/>
             <a:r>
               <a:rPr sz="2000"/>
-              <a:t>歩いた跡の分布 = パラメータの事後分布 → 誤差棒</a:t>
+              <a:t>歩いた中で尤度が最大の点 = 最良値、歩いた跡の分布 → 誤差棒</a:t>
             </a:r>
           </a:p>
           <a:p>
             <a:r>
               <a:rPr sz="2400"/>
-              <a:t>emcee を使用：32 本の歩行者、最初の 400 歩は捨てる</a:t>
+              <a:t>emcee を使用：32 本の歩行者 × 6000 歩</a:t>
             </a:r>
           </a:p>
           <a:p>
             <a:pPr lvl="1"/>
             <a:r>
               <a:rPr sz="2000"/>
-              <a:t>自己相関時間の 50 倍以上の長さがあるか確認</a:t>
+              <a:t>出発点は Totani と同じ初期値（点源・GALPROP = 1、他 = 0 など）</a:t>
             </a:r>
           </a:p>
           <a:p>
             <a:r>
               <a:rPr sz="2400"/>
-              <a:t>有意度 σ は Δln L から出すので、MCMC の有無で変わらない</a:t>
+              <a:t>有意度 σ も、ハローあり・なしそれぞれの MCMC で見つけた最大 ln L の差から出す</a:t>
             </a:r>
           </a:p>
         </p:txBody>
@@ -11695,7 +11613,7 @@
 </file>
 
 <file path=ppt/slides/slide8.xml><?xml version="1.0" encoding="utf-8"?>
-<p:sld xmlns:a="http://schemas.openxmlformats.org/drawingml/2006/main" xmlns:r="http://schemas.openxmlformats.org/officeDocument/2006/relationships" xmlns:p="http://schemas.openxmlformats.org/presentationml/2006/main">
+<p:sld xmlns:a="http://schemas.openxmlformats.org/drawingml/2006/main" xmlns:p="http://schemas.openxmlformats.org/presentationml/2006/main" xmlns:r="http://schemas.openxmlformats.org/officeDocument/2006/relationships">
   <p:cSld>
     <p:spTree>
       <p:nvGrpSpPr>
@@ -11703,14 +11621,7 @@
         <p:cNvGrpSpPr/>
         <p:nvPr/>
       </p:nvGrpSpPr>
-      <p:grpSpPr>
-        <a:xfrm>
-          <a:off x="0" y="0"/>
-          <a:ext cx="0" cy="0"/>
-          <a:chOff x="0" y="0"/>
-          <a:chExt cx="0" cy="0"/>
-        </a:xfrm>
-      </p:grpSpPr>
+      <p:grpSpPr/>
       <p:sp>
         <p:nvSpPr>
           <p:cNvPr id="2" name="Title 1"/>
@@ -11728,14 +11639,288 @@
           <a:p>
             <a:r>
               <a:rPr sz="3400"/>
-              <a:t>結果：Totani の超過を再現</a:t>
-            </a:r>
+              <a:t>MCMC の中身①：何を求めているか</a:t>
+            </a:r>
+          </a:p>
+        </p:txBody>
+      </p:sp>
+      <p:sp>
+        <p:nvSpPr>
+          <p:cNvPr id="3" name="Content Placeholder 2"/>
+          <p:cNvSpPr>
+            <a:spLocks noGrp="1"/>
+          </p:cNvSpPr>
+          <p:nvPr>
+            <p:ph idx="1"/>
+          </p:nvPr>
+        </p:nvSpPr>
+        <p:spPr>
+          <a:xfrm>
+            <a:off x="841248" y="1463040"/>
+            <a:ext cx="10515600" cy="4114800"/>
+          </a:xfrm>
+        </p:spPr>
+        <p:txBody>
+          <a:bodyPr/>
+          <a:lstStyle/>
+          <a:p>
+            <a:pPr/>
+            <a:r>
+              <a:rPr sz="2200"/>
+              <a:t>知りたいもの：データ D を見たあと、倍率 θ = (f₁, …, f₉) がどの値をとりうるか</a:t>
+            </a:r>
+          </a:p>
+          <a:p>
+            <a:pPr/>
+            <a:r>
+              <a:rPr sz="2200"/>
+              <a:t>ベイズの定理：P(θ | D) = L(D | θ) π(θ) / P(D)</a:t>
+            </a:r>
+          </a:p>
+          <a:p>
+            <a:pPr lvl="1"/>
+            <a:r>
+              <a:rPr sz="1800"/>
+              <a:t>P(θ | D)：事後分布（データを見た後の、θ のもっともらしさ）</a:t>
+            </a:r>
+          </a:p>
+          <a:p>
+            <a:pPr lvl="1"/>
+            <a:r>
+              <a:rPr sz="1800"/>
+              <a:t>L(D | θ)：尤度（手法② の L）　π(θ)：事前分布（今回は一様）</a:t>
+            </a:r>
+          </a:p>
+          <a:p>
+            <a:pPr lvl="1"/>
+            <a:r>
+              <a:rPr sz="1800"/>
+              <a:t>P(D)：θ によらない定数 → 計算しなくてよい</a:t>
+            </a:r>
+          </a:p>
+          <a:p>
+            <a:pPr/>
+            <a:r>
+              <a:rPr sz="2200"/>
+              <a:t>つまり P(θ | D) ∝ L(D | θ) × π(θ)</a:t>
+            </a:r>
+          </a:p>
+          <a:p>
+            <a:pPr/>
+            <a:r>
+              <a:rPr sz="2200"/>
+              <a:t>ただし θ は 9 次元。1 次元を 100 点に区切っても 100⁹ = 10¹⁸ 通り → 全部は計算できない</a:t>
+            </a:r>
+          </a:p>
+          <a:p>
+            <a:pPr/>
+            <a:r>
+              <a:rPr sz="2200"/>
+              <a:t>→ 事後分布から「サンプルを取り出す」方法が MCMC</a:t>
+            </a:r>
+          </a:p>
+        </p:txBody>
+      </p:sp>
+      <p:sp>
+        <p:nvSpPr>
+          <p:cNvPr id="8" name="TextBox 7">
+            <a:extLst>
+              <a:ext uri="{FF2B5EF4-FFF2-40B4-BE49-F238E27FC236}">
+                <a16:creationId xmlns:a16="http://schemas.microsoft.com/office/drawing/2014/main" id="{F85CD606-E3CE-F314-B3EE-F3D7028115CB}"/>
+              </a:ext>
+            </a:extLst>
+          </p:cNvPr>
+          <p:cNvSpPr txBox="1"/>
+          <p:nvPr/>
+        </p:nvSpPr>
+        <p:spPr>
+          <a:xfrm>
+            <a:off x="5837182" y="5663239"/>
+            <a:ext cx="6093372" cy="923330"/>
+          </a:xfrm>
+          <a:prstGeom prst="rect">
+            <a:avLst/>
+          </a:prstGeom>
+          <a:noFill/>
+        </p:spPr>
+        <p:txBody>
+          <a:bodyPr wrap="square">
+            <a:spAutoFit/>
+          </a:bodyPr>
+          <a:lstStyle/>
+          <a:p>
+            <a:r>
+              <a:rPr lang="en-US" sz="1400" b="1"/>
+              <a:t>Reference:</a:t>
+            </a:r>
+            <a:r>
+              <a:rPr lang="en-US" sz="1400"/>
+              <a:t> D. Foreman-Mackey et al. (2013), PASP 125, 306</a:t>
+            </a:r>
+            <a:endParaRPr lang="en-US"/>
+          </a:p>
+        </p:txBody>
+      </p:sp>
+    </p:spTree>
+  </p:cSld>
+  <p:clrMapOvr>
+    <a:masterClrMapping/>
+  </p:clrMapOvr>
+</p:sld>
+</file>
+
+<file path=ppt/slides/slide9.xml><?xml version="1.0" encoding="utf-8"?>
+<p:sld xmlns:a="http://schemas.openxmlformats.org/drawingml/2006/main" xmlns:p="http://schemas.openxmlformats.org/presentationml/2006/main" xmlns:r="http://schemas.openxmlformats.org/officeDocument/2006/relationships">
+  <p:cSld>
+    <p:spTree>
+      <p:nvGrpSpPr>
+        <p:cNvPr id="1" name=""/>
+        <p:cNvGrpSpPr/>
+        <p:nvPr/>
+      </p:nvGrpSpPr>
+      <p:grpSpPr/>
+      <p:sp>
+        <p:nvSpPr>
+          <p:cNvPr id="2" name="Title 1"/>
+          <p:cNvSpPr>
+            <a:spLocks noGrp="1"/>
+          </p:cNvSpPr>
+          <p:nvPr>
+            <p:ph type="title"/>
+          </p:nvPr>
+        </p:nvSpPr>
+        <p:spPr/>
+        <p:txBody>
+          <a:bodyPr/>
+          <a:lstStyle/>
+          <a:p>
+            <a:r>
+              <a:rPr sz="3400"/>
+              <a:t>MCMC の中身②：歩き方（メトロポリス法）</a:t>
+            </a:r>
+          </a:p>
+        </p:txBody>
+      </p:sp>
+      <p:sp>
+        <p:nvSpPr>
+          <p:cNvPr id="3" name="Content Placeholder 2"/>
+          <p:cNvSpPr>
+            <a:spLocks noGrp="1"/>
+          </p:cNvSpPr>
+          <p:nvPr>
+            <p:ph idx="1"/>
+          </p:nvPr>
+        </p:nvSpPr>
+        <p:spPr>
+          <a:xfrm>
+            <a:off x="841248" y="1463040"/>
+            <a:ext cx="5394960" cy="4114800"/>
+          </a:xfrm>
+        </p:spPr>
+        <p:txBody>
+          <a:bodyPr/>
+          <a:lstStyle/>
+          <a:p>
+            <a:pPr/>
+            <a:r>
+              <a:rPr sz="2000"/>
+              <a:t>① 今の点 θ から、少しずらした候補 θ′ を作る</a:t>
+            </a:r>
+          </a:p>
+          <a:p>
+            <a:pPr/>
+            <a:r>
+              <a:rPr sz="2000"/>
+              <a:t>② 比 r = P(θ′ | D) / P(θ | D) を計算</a:t>
+            </a:r>
+          </a:p>
+          <a:p>
+            <a:pPr lvl="1"/>
+            <a:r>
+              <a:rPr sz="1600"/>
+              <a:t>P(D) は分母分子で消える</a:t>
+            </a:r>
+          </a:p>
+          <a:p>
+            <a:pPr/>
+            <a:r>
+              <a:rPr sz="2000"/>
+              <a:t>③ r ≥ 1 なら移る。r &lt; 1 なら確率 r で移る</a:t>
+            </a:r>
+          </a:p>
+          <a:p>
+            <a:pPr lvl="1"/>
+            <a:r>
+              <a:rPr sz="1600"/>
+              <a:t>移らなければ、同じ点をもう一度記録</a:t>
+            </a:r>
+          </a:p>
+          <a:p>
+            <a:pPr/>
+            <a:r>
+              <a:rPr sz="2000"/>
+              <a:t>④ ①〜③ を何千回もくり返す</a:t>
+            </a:r>
+          </a:p>
+          <a:p>
+            <a:pPr/>
+            <a:r>
+              <a:rPr sz="2000"/>
+              <a:t>歩いた跡のヒストグラム = 事後分布</a:t>
+            </a:r>
+          </a:p>
+          <a:p>
+            <a:pPr lvl="1"/>
+            <a:r>
+              <a:rPr sz="1600"/>
+              <a:t>下がる方向にも確率的に進むので、山の広がり（誤差）まで分かる</a:t>
+            </a:r>
+          </a:p>
+        </p:txBody>
+      </p:sp>
+      <p:sp>
+        <p:nvSpPr>
+          <p:cNvPr id="8" name="TextBox 7">
+            <a:extLst>
+              <a:ext uri="{FF2B5EF4-FFF2-40B4-BE49-F238E27FC236}">
+                <a16:creationId xmlns:a16="http://schemas.microsoft.com/office/drawing/2014/main" id="{F85CD606-E3CE-F314-B3EE-F3D7028115CB}"/>
+              </a:ext>
+            </a:extLst>
+          </p:cNvPr>
+          <p:cNvSpPr txBox="1"/>
+          <p:nvPr/>
+        </p:nvSpPr>
+        <p:spPr>
+          <a:xfrm>
+            <a:off x="5837182" y="5663239"/>
+            <a:ext cx="6093372" cy="923330"/>
+          </a:xfrm>
+          <a:prstGeom prst="rect">
+            <a:avLst/>
+          </a:prstGeom>
+          <a:noFill/>
+        </p:spPr>
+        <p:txBody>
+          <a:bodyPr wrap="square">
+            <a:spAutoFit/>
+          </a:bodyPr>
+          <a:lstStyle/>
+          <a:p>
+            <a:r>
+              <a:rPr lang="en-US" sz="1400" b="1"/>
+              <a:t>Reference:</a:t>
+            </a:r>
+            <a:r>
+              <a:rPr lang="en-US" sz="1400"/>
+              <a:t> N. Metropolis et al. (1953), J. Chem. Phys. 21, 1087</a:t>
+            </a:r>
+            <a:endParaRPr lang="en-US"/>
           </a:p>
         </p:txBody>
       </p:sp>
       <p:pic>
         <p:nvPicPr>
-          <p:cNvPr id="3" name="Picture 2" descr="fig_significance_v20r.png"/>
+          <p:cNvPr id="9" name="Picture 8" descr="fig_mcmc_toy.png"/>
           <p:cNvPicPr>
             <a:picLocks noChangeAspect="1"/>
           </p:cNvPicPr>
@@ -11749,201 +11934,8 @@
         </p:blipFill>
         <p:spPr>
           <a:xfrm>
-            <a:off x="2377440" y="1234440"/>
-            <a:ext cx="5334000" cy="4160520"/>
-          </a:xfrm>
-          <a:prstGeom prst="rect">
-            <a:avLst/>
-          </a:prstGeom>
-        </p:spPr>
-      </p:pic>
-      <p:sp>
-        <p:nvSpPr>
-          <p:cNvPr id="4" name="TextBox 3"/>
-          <p:cNvSpPr txBox="1"/>
-          <p:nvPr/>
-        </p:nvSpPr>
-        <p:spPr>
-          <a:xfrm>
-            <a:off x="457200" y="5486400"/>
-            <a:ext cx="11247120" cy="457200"/>
-          </a:xfrm>
-          <a:prstGeom prst="rect">
-            <a:avLst/>
-          </a:prstGeom>
-          <a:noFill/>
-        </p:spPr>
-        <p:txBody>
-          <a:bodyPr wrap="square">
-            <a:spAutoFit/>
-          </a:bodyPr>
-          <a:lstStyle/>
-          <a:p>
-            <a:r>
-              <a:rPr sz="2000"/>
-              <a:t>20.8 GeV で 19.0σ（Totani は 13–19σ）。山の位置も一致</a:t>
-            </a:r>
-          </a:p>
-        </p:txBody>
-      </p:sp>
-      <p:sp>
-        <p:nvSpPr>
-          <p:cNvPr id="8" name="TextBox 7">
-            <a:extLst>
-              <a:ext uri="{FF2B5EF4-FFF2-40B4-BE49-F238E27FC236}">
-                <a16:creationId xmlns:a16="http://schemas.microsoft.com/office/drawing/2014/main" id="{F85CD606-E3CE-F314-B3EE-F3D7028115CB}"/>
-              </a:ext>
-            </a:extLst>
-          </p:cNvPr>
-          <p:cNvSpPr txBox="1"/>
-          <p:nvPr/>
-        </p:nvSpPr>
-        <p:spPr>
-          <a:xfrm>
-            <a:off x="5837182" y="6035040"/>
-            <a:ext cx="6093372" cy="923330"/>
-          </a:xfrm>
-          <a:prstGeom prst="rect">
-            <a:avLst/>
-          </a:prstGeom>
-          <a:noFill/>
-        </p:spPr>
-        <p:txBody>
-          <a:bodyPr wrap="square">
-            <a:spAutoFit/>
-          </a:bodyPr>
-          <a:lstStyle/>
-          <a:p>
-            <a:r>
-              <a:rPr lang="en-US" sz="1400" b="1"/>
-              <a:t>Reference:</a:t>
-            </a:r>
-            <a:r>
-              <a:rPr lang="en-US" sz="1400"/>
-              <a:t> T. Totani (2025), arXiv:2507.07209 Fig. 9</a:t>
-            </a:r>
-            <a:endParaRPr lang="en-US"/>
-          </a:p>
-        </p:txBody>
-      </p:sp>
-    </p:spTree>
-  </p:cSld>
-  <p:clrMapOvr>
-    <a:masterClrMapping/>
-  </p:clrMapOvr>
-</p:sld>
-</file>
-
-<file path=ppt/slides/slide9.xml><?xml version="1.0" encoding="utf-8"?>
-<p:sld xmlns:a="http://schemas.openxmlformats.org/drawingml/2006/main" xmlns:r="http://schemas.openxmlformats.org/officeDocument/2006/relationships" xmlns:p="http://schemas.openxmlformats.org/presentationml/2006/main">
-  <p:cSld>
-    <p:spTree>
-      <p:nvGrpSpPr>
-        <p:cNvPr id="1" name=""/>
-        <p:cNvGrpSpPr/>
-        <p:nvPr/>
-      </p:nvGrpSpPr>
-      <p:grpSpPr>
-        <a:xfrm>
-          <a:off x="0" y="0"/>
-          <a:ext cx="0" cy="0"/>
-          <a:chOff x="0" y="0"/>
-          <a:chExt cx="0" cy="0"/>
-        </a:xfrm>
-      </p:grpSpPr>
-      <p:sp>
-        <p:nvSpPr>
-          <p:cNvPr id="2" name="Title 1"/>
-          <p:cNvSpPr>
-            <a:spLocks noGrp="1"/>
-          </p:cNvSpPr>
-          <p:nvPr>
-            <p:ph type="title"/>
-          </p:nvPr>
-        </p:nvSpPr>
-        <p:spPr/>
-        <p:txBody>
-          <a:bodyPr/>
-          <a:lstStyle/>
-          <a:p>
-            <a:r>
-              <a:rPr sz="3400"/>
-              <a:t>問題：ハローと ICS が見分けにくい（縮退）</a:t>
-            </a:r>
-          </a:p>
-        </p:txBody>
-      </p:sp>
-      <p:sp>
-        <p:nvSpPr>
-          <p:cNvPr id="3" name="Content Placeholder 2"/>
-          <p:cNvSpPr>
-            <a:spLocks noGrp="1"/>
-          </p:cNvSpPr>
-          <p:nvPr>
-            <p:ph idx="1"/>
-          </p:nvPr>
-        </p:nvSpPr>
-        <p:spPr>
-          <a:xfrm>
-            <a:off x="841248" y="1463040"/>
-            <a:ext cx="5669280" cy="4937760"/>
-          </a:xfrm>
-        </p:spPr>
-        <p:txBody>
-          <a:bodyPr/>
-          <a:lstStyle/>
-          <a:p>
-            <a:r>
-              <a:rPr sz="2200"/>
-              <a:t>ICS とハローは、空の上での形がよく似ている</a:t>
-            </a:r>
-          </a:p>
-          <a:p>
-            <a:pPr lvl="1"/>
-            <a:r>
-              <a:rPr sz="1800"/>
-              <a:t>緯度 25° → 55° で暗くなる割合：ハロー 2.74 倍、ICS 2.75 倍</a:t>
-            </a:r>
-          </a:p>
-          <a:p>
-            <a:r>
-              <a:rPr sz="2200"/>
-              <a:t>違いは「銀河中心の方向に集まっているか」だけ</a:t>
-            </a:r>
-          </a:p>
-          <a:p>
-            <a:r>
-              <a:rPr sz="2200"/>
-              <a:t>ハローを入れると、その分 ICS が暗くなる</a:t>
-            </a:r>
-          </a:p>
-          <a:p>
-            <a:pPr lvl="1"/>
-            <a:r>
-              <a:rPr sz="1800"/>
-              <a:t>ハローの光の 8〜10 割は ICS から移ったもの</a:t>
-            </a:r>
-          </a:p>
-        </p:txBody>
-      </p:sp>
-      <p:pic>
-        <p:nvPicPr>
-          <p:cNvPr id="4" name="Picture 3" descr="fig_ics_norm_v20r.png"/>
-          <p:cNvPicPr>
-            <a:picLocks noChangeAspect="1"/>
-          </p:cNvPicPr>
-          <p:nvPr/>
-        </p:nvPicPr>
-        <p:blipFill>
-          <a:blip r:embed="rId3"/>
-          <a:stretch>
-            <a:fillRect/>
-          </a:stretch>
-        </p:blipFill>
-        <p:spPr>
-          <a:xfrm>
-            <a:off x="6309360" y="1737360"/>
-            <a:ext cx="5669280" cy="3968496"/>
+            <a:off x="6309360" y="1828800"/>
+            <a:ext cx="5669280" cy="2267712"/>
           </a:xfrm>
           <a:prstGeom prst="rect">
             <a:avLst/>

--- a/slides/2026-10-02_研究進捗報告_claude.pptx
+++ b/slides/2026-10-02_研究進捗報告_claude.pptx
@@ -13,6 +13,7 @@
     <p:sldId id="258" r:id="rId4"/>
     <p:sldId id="259" r:id="rId5"/>
     <p:sldId id="260" r:id="rId6"/>
+    <p:sldId id="294" r:id="rId47"/>
     <p:sldId id="261" r:id="rId7"/>
     <p:sldId id="262" r:id="rId8"/>
     <p:sldId id="291" r:id="rId44"/>
@@ -3088,6 +3089,96 @@
           <a:p>
             <a:r>
               <a:t>数字は 10/2 に Totani と同じやり方で計算し直した結果 (クラウド、cloud_reports/2026-10-02_totani_mode/)。最良値が頂上に届いているかは、勾配法で頂上を求めて確認した (13 ビンすべてで ln L の差 0.6 以下、有意度の差 0.28σ 以下。確認のためだけで、結果には使っていない)。</a:t>
+            </a:r>
+          </a:p>
+        </p:txBody>
+      </p:sp>
+      <p:sp>
+        <p:nvSpPr>
+          <p:cNvPr id="4" name="Slide Number Placeholder 3"/>
+          <p:cNvSpPr>
+            <a:spLocks noGrp="1"/>
+          </p:cNvSpPr>
+          <p:nvPr>
+            <p:ph type="sldNum" idx="5" sz="quarter"/>
+          </p:nvPr>
+        </p:nvSpPr>
+        <p:spPr/>
+      </p:sp>
+    </p:spTree>
+  </p:cSld>
+  <p:clrMapOvr>
+    <a:masterClrMapping/>
+  </p:clrMapOvr>
+</p:notes>
+</file>
+
+<file path=ppt/notesSlides/notesSlide38.xml><?xml version="1.0" encoding="utf-8"?>
+<p:notes xmlns:a="http://schemas.openxmlformats.org/drawingml/2006/main" xmlns:p="http://schemas.openxmlformats.org/presentationml/2006/main" xmlns:r="http://schemas.openxmlformats.org/officeDocument/2006/relationships">
+  <p:cSld>
+    <p:spTree>
+      <p:nvGrpSpPr>
+        <p:cNvPr id="1" name=""/>
+        <p:cNvGrpSpPr/>
+        <p:nvPr/>
+      </p:nvGrpSpPr>
+      <p:grpSpPr>
+        <a:xfrm>
+          <a:off x="0" y="0"/>
+          <a:ext cx="0" cy="0"/>
+          <a:chOff x="0" y="0"/>
+          <a:chExt cx="0" cy="0"/>
+        </a:xfrm>
+      </p:grpSpPr>
+      <p:sp>
+        <p:nvSpPr>
+          <p:cNvPr id="2" name="Slide Image Placeholder 1"/>
+          <p:cNvSpPr>
+            <a:spLocks noGrp="1"/>
+          </p:cNvSpPr>
+          <p:nvPr>
+            <p:ph type="sldImg" idx="2"/>
+          </p:nvPr>
+        </p:nvSpPr>
+        <p:spPr/>
+      </p:sp>
+      <p:sp>
+        <p:nvSpPr>
+          <p:cNvPr id="3" name="Notes Placeholder 2"/>
+          <p:cNvSpPr>
+            <a:spLocks noGrp="1"/>
+          </p:cNvSpPr>
+          <p:nvPr>
+            <p:ph type="body" idx="3" sz="quarter"/>
+          </p:nvPr>
+        </p:nvSpPr>
+        <p:spPr/>
+        <p:txBody>
+          <a:bodyPr/>
+          <a:lstStyle/>
+          <a:p>
+            <a:r>
+              <a:t>たとえ: 霧で何も見えない山の上で、一番高い場所を探したい。手元には高度計 (尤度) しかない。</a:t>
+            </a:r>
+          </a:p>
+          <a:p>
+            <a:r>
+              <a:t>歩く人 (MCMC) は、一歩ずつ足を出して高度計を見る。上りなら必ずその方向へ進み、下りでもたまに進む。下りにも進むのは、山頂で止まらずに山の広がり (どこまでが十分高いか) も知るため。</a:t>
+            </a:r>
+          </a:p>
+          <a:p>
+            <a:r>
+              <a:t>歩き終わったら、記録の中で一番高かった地点が最良の倍率、よく歩き回った範囲の幅が誤差になる。</a:t>
+            </a:r>
+          </a:p>
+          <a:p>
+            <a:r>
+              <a:t>ここでの「山」は 9 次元 (倍率が 9 個)。紙に描けないので、歩いて調べるしかない。</a:t>
+            </a:r>
+          </a:p>
+          <a:p>
+            <a:r>
+              <a:t>Totani (2025) §2.2: 最良値と統計誤差を、尤度を MCMC で最大化して求める。本研究も同じ (10/2 に揃えた)。</a:t>
             </a:r>
           </a:p>
         </p:txBody>
@@ -11019,6 +11110,163 @@
               <a:rPr sz="1800"/>
               <a:t>中村和幸 (2017), 数理解析研究所講究録 2057, 59–66</a:t>
             </a:r>
+          </a:p>
+        </p:txBody>
+      </p:sp>
+    </p:spTree>
+  </p:cSld>
+  <p:clrMapOvr>
+    <a:masterClrMapping/>
+  </p:clrMapOvr>
+</p:sld>
+</file>
+
+<file path=ppt/slides/slide39.xml><?xml version="1.0" encoding="utf-8"?>
+<p:sld xmlns:a="http://schemas.openxmlformats.org/drawingml/2006/main" xmlns:p="http://schemas.openxmlformats.org/presentationml/2006/main" xmlns:r="http://schemas.openxmlformats.org/officeDocument/2006/relationships">
+  <p:cSld>
+    <p:spTree>
+      <p:nvGrpSpPr>
+        <p:cNvPr id="1" name=""/>
+        <p:cNvGrpSpPr/>
+        <p:nvPr/>
+      </p:nvGrpSpPr>
+      <p:grpSpPr/>
+      <p:sp>
+        <p:nvSpPr>
+          <p:cNvPr id="2" name="Title 1"/>
+          <p:cNvSpPr>
+            <a:spLocks noGrp="1"/>
+          </p:cNvSpPr>
+          <p:nvPr>
+            <p:ph type="title"/>
+          </p:nvPr>
+        </p:nvSpPr>
+        <p:spPr/>
+        <p:txBody>
+          <a:bodyPr/>
+          <a:lstStyle/>
+          <a:p>
+            <a:r>
+              <a:rPr sz="3400"/>
+              <a:t>尤度と MCMC の役割分担</a:t>
+            </a:r>
+          </a:p>
+        </p:txBody>
+      </p:sp>
+      <p:sp>
+        <p:nvSpPr>
+          <p:cNvPr id="3" name="Content Placeholder 2"/>
+          <p:cNvSpPr>
+            <a:spLocks noGrp="1"/>
+          </p:cNvSpPr>
+          <p:nvPr>
+            <p:ph idx="1"/>
+          </p:nvPr>
+        </p:nvSpPr>
+        <p:spPr>
+          <a:xfrm>
+            <a:off x="841248" y="1463040"/>
+            <a:ext cx="10515600" cy="4114800"/>
+          </a:xfrm>
+        </p:spPr>
+        <p:txBody>
+          <a:bodyPr/>
+          <a:lstStyle/>
+          <a:p>
+            <a:pPr/>
+            <a:r>
+              <a:rPr sz="2400"/>
+              <a:t>尤度 ＝ 点数をつける係（たとえ：高度計）</a:t>
+            </a:r>
+          </a:p>
+          <a:p>
+            <a:pPr lvl="1"/>
+            <a:r>
+              <a:rPr sz="2000"/>
+              <a:t>倍率の組（f_gas, f_ics, …, f_halo）を入れると、予測と観測の合い具合 ln L を返す</a:t>
+            </a:r>
+          </a:p>
+          <a:p>
+            <a:pPr/>
+            <a:r>
+              <a:rPr sz="2400"/>
+              <a:t>MCMC ＝ 倍率を探す係（たとえ：霧の山を歩く人）</a:t>
+            </a:r>
+          </a:p>
+          <a:p>
+            <a:pPr lvl="1"/>
+            <a:r>
+              <a:rPr sz="2000"/>
+              <a:t>倍率の組を少しずつ変えながら歩き、そのたびに尤度で点数をつける</a:t>
+            </a:r>
+          </a:p>
+          <a:p>
+            <a:pPr lvl="1"/>
+            <a:r>
+              <a:rPr sz="2000"/>
+              <a:t>点数が上がる方へは必ず進み、下がる方へもたまに進む</a:t>
+            </a:r>
+          </a:p>
+          <a:p>
+            <a:pPr/>
+            <a:r>
+              <a:rPr sz="2400"/>
+              <a:t>歩き終わったら</a:t>
+            </a:r>
+          </a:p>
+          <a:p>
+            <a:pPr lvl="1"/>
+            <a:r>
+              <a:rPr sz="2000"/>
+              <a:t>歩いた中で点数が一番高かった組 → 最良の倍率（Totani と同じ）</a:t>
+            </a:r>
+          </a:p>
+          <a:p>
+            <a:pPr lvl="1"/>
+            <a:r>
+              <a:rPr sz="2000"/>
+              <a:t>歩いた範囲の広さ → 倍率の誤差</a:t>
+            </a:r>
+          </a:p>
+        </p:txBody>
+      </p:sp>
+      <p:sp>
+        <p:nvSpPr>
+          <p:cNvPr id="8" name="TextBox 7">
+            <a:extLst>
+              <a:ext uri="{FF2B5EF4-FFF2-40B4-BE49-F238E27FC236}">
+                <a16:creationId xmlns:a16="http://schemas.microsoft.com/office/drawing/2014/main" id="{F85CD606-E3CE-F314-B3EE-F3D7028115CB}"/>
+              </a:ext>
+            </a:extLst>
+          </p:cNvPr>
+          <p:cNvSpPr txBox="1"/>
+          <p:nvPr/>
+        </p:nvSpPr>
+        <p:spPr>
+          <a:xfrm>
+            <a:off x="5837182" y="5663239"/>
+            <a:ext cx="6093372" cy="923330"/>
+          </a:xfrm>
+          <a:prstGeom prst="rect">
+            <a:avLst/>
+          </a:prstGeom>
+          <a:noFill/>
+        </p:spPr>
+        <p:txBody>
+          <a:bodyPr wrap="square">
+            <a:spAutoFit/>
+          </a:bodyPr>
+          <a:lstStyle/>
+          <a:p>
+            <a:r>
+              <a:rPr lang="en-US" sz="1400" b="1"/>
+              <a:t>Reference:</a:t>
+            </a:r>
+            <a:r>
+              <a:rPr lang="en-US" sz="1400"/>
+              <a:t> T. Totani (2025), arXiv:2507.07209 §2.2</a:t>
+            </a:r>
+            <a:endParaRPr lang="en-US"/>
           </a:p>
         </p:txBody>
       </p:sp>

--- a/slides/2026-10-02_研究進捗報告_claude.pptx
+++ b/slides/2026-10-02_研究進捗報告_claude.pptx
@@ -16,9 +16,12 @@
     <p:sldId id="294" r:id="rId47"/>
     <p:sldId id="261" r:id="rId7"/>
     <p:sldId id="262" r:id="rId8"/>
-    <p:sldId id="291" r:id="rId44"/>
-    <p:sldId id="292" r:id="rId45"/>
-    <p:sldId id="293" r:id="rId46"/>
+    <p:sldId id="295" r:id="rId48"/>
+    <p:sldId id="296" r:id="rId49"/>
+    <p:sldId id="297" r:id="rId50"/>
+    <p:sldId id="298" r:id="rId51"/>
+    <p:sldId id="299" r:id="rId52"/>
+    <p:sldId id="300" r:id="rId53"/>
     <p:sldId id="263" r:id="rId9"/>
     <p:sldId id="264" r:id="rId10"/>
     <p:sldId id="265" r:id="rId11"/>
@@ -2853,266 +2856,6 @@
 </p:notes>
 </file>
 
-<file path=ppt/notesSlides/notesSlide35.xml><?xml version="1.0" encoding="utf-8"?>
-<p:notes xmlns:a="http://schemas.openxmlformats.org/drawingml/2006/main" xmlns:p="http://schemas.openxmlformats.org/presentationml/2006/main" xmlns:r="http://schemas.openxmlformats.org/officeDocument/2006/relationships">
-  <p:cSld>
-    <p:spTree>
-      <p:nvGrpSpPr>
-        <p:cNvPr id="1" name=""/>
-        <p:cNvGrpSpPr/>
-        <p:nvPr/>
-      </p:nvGrpSpPr>
-      <p:grpSpPr>
-        <a:xfrm>
-          <a:off x="0" y="0"/>
-          <a:ext cx="0" cy="0"/>
-          <a:chOff x="0" y="0"/>
-          <a:chExt cx="0" cy="0"/>
-        </a:xfrm>
-      </p:grpSpPr>
-      <p:sp>
-        <p:nvSpPr>
-          <p:cNvPr id="2" name="Slide Image Placeholder 1"/>
-          <p:cNvSpPr>
-            <a:spLocks noGrp="1"/>
-          </p:cNvSpPr>
-          <p:nvPr>
-            <p:ph type="sldImg" idx="2"/>
-          </p:nvPr>
-        </p:nvSpPr>
-        <p:spPr/>
-      </p:sp>
-      <p:sp>
-        <p:nvSpPr>
-          <p:cNvPr id="3" name="Notes Placeholder 2"/>
-          <p:cNvSpPr>
-            <a:spLocks noGrp="1"/>
-          </p:cNvSpPr>
-          <p:nvPr>
-            <p:ph type="body" idx="3" sz="quarter"/>
-          </p:nvPr>
-        </p:nvSpPr>
-        <p:spPr/>
-        <p:txBody>
-          <a:bodyPr/>
-          <a:lstStyle/>
-          <a:p>
-            <a:r>
-              <a:t>ベイズの定理: 「データを見る前の考え (事前分布)」を「データの当てはまり (尤度)」で更新すると「データを見た後の考え (事後分布)」になる。</a:t>
-            </a:r>
-          </a:p>
-          <a:p>
-            <a:r>
-              <a:t>事前分布は一様: 倍率の符号の制約 (ハローとバブル負以外は 0 以上) と、|f| ≤ 10⁶ の広い制限だけ。だから事後分布の形は尤度の形とほぼ同じ。</a:t>
-            </a:r>
-          </a:p>
-          <a:p>
-            <a:r>
-              <a:t>P(D) (証拠) は全部の θ について足し合わせた値で、計算がとても大変。でも MCMC では「2 つの点の比」しか使わないので、割り算で消えて計算しなくてよい。</a:t>
-            </a:r>
-          </a:p>
-          <a:p>
-            <a:r>
-              <a:t>たとえ: 9 次元の山の地形図を全部描くのは無理なので、山の上を歩き回って「よく通った場所 = 高い場所」を記録する。</a:t>
-            </a:r>
-          </a:p>
-        </p:txBody>
-      </p:sp>
-      <p:sp>
-        <p:nvSpPr>
-          <p:cNvPr id="4" name="Slide Number Placeholder 3"/>
-          <p:cNvSpPr>
-            <a:spLocks noGrp="1"/>
-          </p:cNvSpPr>
-          <p:nvPr>
-            <p:ph type="sldNum" idx="5" sz="quarter"/>
-          </p:nvPr>
-        </p:nvSpPr>
-        <p:spPr/>
-      </p:sp>
-    </p:spTree>
-  </p:cSld>
-  <p:clrMapOvr>
-    <a:masterClrMapping/>
-  </p:clrMapOvr>
-</p:notes>
-</file>
-
-<file path=ppt/notesSlides/notesSlide36.xml><?xml version="1.0" encoding="utf-8"?>
-<p:notes xmlns:a="http://schemas.openxmlformats.org/drawingml/2006/main" xmlns:p="http://schemas.openxmlformats.org/presentationml/2006/main" xmlns:r="http://schemas.openxmlformats.org/officeDocument/2006/relationships">
-  <p:cSld>
-    <p:spTree>
-      <p:nvGrpSpPr>
-        <p:cNvPr id="1" name=""/>
-        <p:cNvGrpSpPr/>
-        <p:nvPr/>
-      </p:nvGrpSpPr>
-      <p:grpSpPr>
-        <a:xfrm>
-          <a:off x="0" y="0"/>
-          <a:ext cx="0" cy="0"/>
-          <a:chOff x="0" y="0"/>
-          <a:chExt cx="0" cy="0"/>
-        </a:xfrm>
-      </p:grpSpPr>
-      <p:sp>
-        <p:nvSpPr>
-          <p:cNvPr id="2" name="Slide Image Placeholder 1"/>
-          <p:cNvSpPr>
-            <a:spLocks noGrp="1"/>
-          </p:cNvSpPr>
-          <p:nvPr>
-            <p:ph type="sldImg" idx="2"/>
-          </p:nvPr>
-        </p:nvSpPr>
-        <p:spPr/>
-      </p:sp>
-      <p:sp>
-        <p:nvSpPr>
-          <p:cNvPr id="3" name="Notes Placeholder 2"/>
-          <p:cNvSpPr>
-            <a:spLocks noGrp="1"/>
-          </p:cNvSpPr>
-          <p:nvPr>
-            <p:ph type="body" idx="3" sz="quarter"/>
-          </p:nvPr>
-        </p:nvSpPr>
-        <p:spPr/>
-        <p:txBody>
-          <a:bodyPr/>
-          <a:lstStyle/>
-          <a:p>
-            <a:r>
-              <a:t>③ がポイント: 上り坂 (もっともらしさが上がる) には必ず進み、下り坂にも r の確率で進む。いつも上るだけだと山頂 (最尤推定) で止まってしまい、誤差が分からない。</a:t>
-            </a:r>
-          </a:p>
-          <a:p>
-            <a:r>
-              <a:t>このルールで歩くと、長い目で見て「各点にいる時間の割合」が事後分布 P(θ | D) に比例するようになる (詳細つり合い)。</a:t>
-            </a:r>
-          </a:p>
-          <a:p>
-            <a:r>
-              <a:t>図は説明用のおもちゃの例 (実データではない): 1 つの倍率 f の事後分布を平均 1.48・幅 0.075 の山と仮定して 3000 歩。わざと山から離れた 1.2 から出発させたので、最初の 200 歩は山にたどり着くまでの途中 → 捨てる (バーンイン)。残りのヒストグラムが本当の分布 (点線) と重なる。</a:t>
-            </a:r>
-          </a:p>
-          <a:p>
-            <a:r>
-              <a:t>図は slides/figs/plot_mcmc_toy.py で作った。</a:t>
-            </a:r>
-          </a:p>
-        </p:txBody>
-      </p:sp>
-      <p:sp>
-        <p:nvSpPr>
-          <p:cNvPr id="4" name="Slide Number Placeholder 3"/>
-          <p:cNvSpPr>
-            <a:spLocks noGrp="1"/>
-          </p:cNvSpPr>
-          <p:nvPr>
-            <p:ph type="sldNum" idx="5" sz="quarter"/>
-          </p:nvPr>
-        </p:nvSpPr>
-        <p:spPr/>
-      </p:sp>
-    </p:spTree>
-  </p:cSld>
-  <p:clrMapOvr>
-    <a:masterClrMapping/>
-  </p:clrMapOvr>
-</p:notes>
-</file>
-
-<file path=ppt/notesSlides/notesSlide37.xml><?xml version="1.0" encoding="utf-8"?>
-<p:notes xmlns:a="http://schemas.openxmlformats.org/drawingml/2006/main" xmlns:p="http://schemas.openxmlformats.org/presentationml/2006/main" xmlns:r="http://schemas.openxmlformats.org/officeDocument/2006/relationships">
-  <p:cSld>
-    <p:spTree>
-      <p:nvGrpSpPr>
-        <p:cNvPr id="1" name=""/>
-        <p:cNvGrpSpPr/>
-        <p:nvPr/>
-      </p:nvGrpSpPr>
-      <p:grpSpPr>
-        <a:xfrm>
-          <a:off x="0" y="0"/>
-          <a:ext cx="0" cy="0"/>
-          <a:chOff x="0" y="0"/>
-          <a:chExt cx="0" cy="0"/>
-        </a:xfrm>
-      </p:grpSpPr>
-      <p:sp>
-        <p:nvSpPr>
-          <p:cNvPr id="2" name="Slide Image Placeholder 1"/>
-          <p:cNvSpPr>
-            <a:spLocks noGrp="1"/>
-          </p:cNvSpPr>
-          <p:nvPr>
-            <p:ph type="sldImg" idx="2"/>
-          </p:nvPr>
-        </p:nvSpPr>
-        <p:spPr/>
-      </p:sp>
-      <p:sp>
-        <p:nvSpPr>
-          <p:cNvPr id="3" name="Notes Placeholder 2"/>
-          <p:cNvSpPr>
-            <a:spLocks noGrp="1"/>
-          </p:cNvSpPr>
-          <p:nvPr>
-            <p:ph type="body" idx="3" sz="quarter"/>
-          </p:nvPr>
-        </p:nvSpPr>
-        <p:spPr/>
-        <p:txBody>
-          <a:bodyPr/>
-          <a:lstStyle/>
-          <a:p>
-            <a:r>
-              <a:t>ストレッチ移動 (Goodman &amp; Weare 2010): 自分 X_k と、他の歩行者 X_j を結ぶ直線の上で、Z 倍だけ伸ばしたり縮めたりした点を候補にする。他の歩行者の散らばり方を使うので、細長い山 (パラメータ同士が強く相関している、例えばガスと ICS の縮退) でも効率よく歩ける。</a:t>
-            </a:r>
-          </a:p>
-          <a:p>
-            <a:r>
-              <a:t>Z⁸ の 8 は「パラメータの数 9 − 1」。直線上で伸び縮みさせた分の補正。Z の範囲 1/2〜2 は emcee の既定値 (a = 2)。</a:t>
-            </a:r>
-          </a:p>
-          <a:p>
-            <a:r>
-              <a:t>68% 区間 = 記録したサンプルの下から 16% と 84% の値。</a:t>
-            </a:r>
-          </a:p>
-          <a:p>
-            <a:r>
-              <a:t>自己相関時間 τ: 何歩離れたら前の位置を「忘れる」か。50τ 以上は emcee の推奨。足りない場合は最大 6000 歩まで自動で延ばしたが、それでも届かないビンが多い。</a:t>
-            </a:r>
-          </a:p>
-          <a:p>
-            <a:r>
-              <a:t>数字は 10/2 に Totani と同じやり方で計算し直した結果 (クラウド、cloud_reports/2026-10-02_totani_mode/)。最良値が頂上に届いているかは、勾配法で頂上を求めて確認した (13 ビンすべてで ln L の差 0.6 以下、有意度の差 0.28σ 以下。確認のためだけで、結果には使っていない)。</a:t>
-            </a:r>
-          </a:p>
-        </p:txBody>
-      </p:sp>
-      <p:sp>
-        <p:nvSpPr>
-          <p:cNvPr id="4" name="Slide Number Placeholder 3"/>
-          <p:cNvSpPr>
-            <a:spLocks noGrp="1"/>
-          </p:cNvSpPr>
-          <p:nvPr>
-            <p:ph type="sldNum" idx="5" sz="quarter"/>
-          </p:nvPr>
-        </p:nvSpPr>
-        <p:spPr/>
-      </p:sp>
-    </p:spTree>
-  </p:cSld>
-  <p:clrMapOvr>
-    <a:masterClrMapping/>
-  </p:clrMapOvr>
-</p:notes>
-</file>
-
 <file path=ppt/notesSlides/notesSlide38.xml><?xml version="1.0" encoding="utf-8"?>
 <p:notes xmlns:a="http://schemas.openxmlformats.org/drawingml/2006/main" xmlns:p="http://schemas.openxmlformats.org/presentationml/2006/main" xmlns:r="http://schemas.openxmlformats.org/officeDocument/2006/relationships">
   <p:cSld>
@@ -3179,6 +2922,86 @@
           <a:p>
             <a:r>
               <a:t>Totani (2025) §2.2: 最良値と統計誤差を、尤度を MCMC で最大化して求める。本研究も同じ (10/2 に揃えた)。</a:t>
+            </a:r>
+          </a:p>
+        </p:txBody>
+      </p:sp>
+      <p:sp>
+        <p:nvSpPr>
+          <p:cNvPr id="4" name="Slide Number Placeholder 3"/>
+          <p:cNvSpPr>
+            <a:spLocks noGrp="1"/>
+          </p:cNvSpPr>
+          <p:nvPr>
+            <p:ph type="sldNum" idx="5" sz="quarter"/>
+          </p:nvPr>
+        </p:nvSpPr>
+        <p:spPr/>
+      </p:sp>
+    </p:spTree>
+  </p:cSld>
+  <p:clrMapOvr>
+    <a:masterClrMapping/>
+  </p:clrMapOvr>
+</p:notes>
+</file>
+
+<file path=ppt/notesSlides/notesSlide39.xml><?xml version="1.0" encoding="utf-8"?>
+<p:notes xmlns:a="http://schemas.openxmlformats.org/drawingml/2006/main" xmlns:p="http://schemas.openxmlformats.org/presentationml/2006/main" xmlns:r="http://schemas.openxmlformats.org/officeDocument/2006/relationships">
+  <p:cSld>
+    <p:spTree>
+      <p:nvGrpSpPr>
+        <p:cNvPr id="1" name=""/>
+        <p:cNvGrpSpPr/>
+        <p:nvPr/>
+      </p:nvGrpSpPr>
+      <p:grpSpPr>
+        <a:xfrm>
+          <a:off x="0" y="0"/>
+          <a:ext cx="0" cy="0"/>
+          <a:chOff x="0" y="0"/>
+          <a:chExt cx="0" cy="0"/>
+        </a:xfrm>
+      </p:grpSpPr>
+      <p:sp>
+        <p:nvSpPr>
+          <p:cNvPr id="2" name="Slide Image Placeholder 1"/>
+          <p:cNvSpPr>
+            <a:spLocks noGrp="1"/>
+          </p:cNvSpPr>
+          <p:nvPr>
+            <p:ph type="sldImg" idx="2"/>
+          </p:nvPr>
+        </p:nvSpPr>
+        <p:spPr/>
+      </p:sp>
+      <p:sp>
+        <p:nvSpPr>
+          <p:cNvPr id="3" name="Notes Placeholder 2"/>
+          <p:cNvSpPr>
+            <a:spLocks noGrp="1"/>
+          </p:cNvSpPr>
+          <p:nvPr>
+            <p:ph type="body" idx="3" sz="quarter"/>
+          </p:nvPr>
+        </p:nvSpPr>
+        <p:spPr/>
+        <p:txBody>
+          <a:bodyPr/>
+          <a:lstStyle/>
+          <a:p>
+            <a:r>
+              <a:t>このスライドが「対応表」。この後のスライドは全部この言葉で説明する。</a:t>
+            </a:r>
+          </a:p>
+          <a:p>
+            <a:r>
+              <a:t>9 次元の山は紙に描けない。だから地図全体を調べるのではなく、歩いて足あとを残し、足あとから山の形を知る。</a:t>
+            </a:r>
+          </a:p>
+          <a:p>
+            <a:r>
+              <a:t>スクショ候補: 点数 (高さ) を計算する関数 log_probability (653〜659 行)。コードは code/mcmc_fit_all_bins.py (Totani 方式の修正 cloud_reports/2026-10-02_totani_bestfit.patch を当てた後の行番号)。</a:t>
             </a:r>
           </a:p>
         </p:txBody>
@@ -3271,6 +3094,441 @@
           </p:cNvSpPr>
           <p:nvPr>
             <p:ph type="sldNum" sz="quarter" idx="5"/>
+          </p:nvPr>
+        </p:nvSpPr>
+        <p:spPr/>
+      </p:sp>
+    </p:spTree>
+  </p:cSld>
+  <p:clrMapOvr>
+    <a:masterClrMapping/>
+  </p:clrMapOvr>
+</p:notes>
+</file>
+
+<file path=ppt/notesSlides/notesSlide40.xml><?xml version="1.0" encoding="utf-8"?>
+<p:notes xmlns:a="http://schemas.openxmlformats.org/drawingml/2006/main" xmlns:p="http://schemas.openxmlformats.org/presentationml/2006/main" xmlns:r="http://schemas.openxmlformats.org/officeDocument/2006/relationships">
+  <p:cSld>
+    <p:spTree>
+      <p:nvGrpSpPr>
+        <p:cNvPr id="1" name=""/>
+        <p:cNvGrpSpPr/>
+        <p:nvPr/>
+      </p:nvGrpSpPr>
+      <p:grpSpPr>
+        <a:xfrm>
+          <a:off x="0" y="0"/>
+          <a:ext cx="0" cy="0"/>
+          <a:chOff x="0" y="0"/>
+          <a:chExt cx="0" cy="0"/>
+        </a:xfrm>
+      </p:grpSpPr>
+      <p:sp>
+        <p:nvSpPr>
+          <p:cNvPr id="2" name="Slide Image Placeholder 1"/>
+          <p:cNvSpPr>
+            <a:spLocks noGrp="1"/>
+          </p:cNvSpPr>
+          <p:nvPr>
+            <p:ph type="sldImg" idx="2"/>
+          </p:nvPr>
+        </p:nvSpPr>
+        <p:spPr/>
+      </p:sp>
+      <p:sp>
+        <p:nvSpPr>
+          <p:cNvPr id="3" name="Notes Placeholder 2"/>
+          <p:cNvSpPr>
+            <a:spLocks noGrp="1"/>
+          </p:cNvSpPr>
+          <p:nvPr>
+            <p:ph type="body" idx="3" sz="quarter"/>
+          </p:nvPr>
+        </p:nvSpPr>
+        <p:spPr/>
+        <p:txBody>
+          <a:bodyPr/>
+          <a:lstStyle/>
+          <a:p>
+            <a:r>
+              <a:t>ベイズの定理の読み方: 「データを見る前の考え (π: どこに入ってよいか)」に「データの当てはまり (L: 高度計)」を掛けると「データを見た後の考え (高さ)」になる。</a:t>
+            </a:r>
+          </a:p>
+          <a:p>
+            <a:r>
+              <a:t>今回の π は一様: 入ってよい範囲 (ガス・ICS などは 0 以上、全部 |f| ≤ 10⁶) なら同じ値、外なら 0。だから高さの形は高度計の読み (尤度) と同じになる。</a:t>
+            </a:r>
+          </a:p>
+          <a:p>
+            <a:r>
+              <a:t>P(D) は「海抜何メートルから測るか」の基準のようなもの。2 地点の高さを比べるときは、どちらにも同じ基準が入っているので割り算で消える。MCMC は比べることしかしないので、P(D) を計算しなくてよい。</a:t>
+            </a:r>
+          </a:p>
+          <a:p>
+            <a:r>
+              <a:t>対数にするのは、数が大きすぎたり小さすぎたりしてコンピュータで扱えなくなるのを防ぐため。</a:t>
+            </a:r>
+          </a:p>
+          <a:p>
+            <a:r>
+              <a:t>スクショ候補: log_prior (630 行、立ち入り禁止のチェック)、log_likelihood (647〜650 行、高度計)、log_probability (653 行、両方を足す)。コードは code/mcmc_fit_all_bins.py (Totani 方式の修正 cloud_reports/2026-10-02_totani_bestfit.patch を当てた後の行番号)。</a:t>
+            </a:r>
+          </a:p>
+        </p:txBody>
+      </p:sp>
+      <p:sp>
+        <p:nvSpPr>
+          <p:cNvPr id="4" name="Slide Number Placeholder 3"/>
+          <p:cNvSpPr>
+            <a:spLocks noGrp="1"/>
+          </p:cNvSpPr>
+          <p:nvPr>
+            <p:ph type="sldNum" idx="5" sz="quarter"/>
+          </p:nvPr>
+        </p:nvSpPr>
+        <p:spPr/>
+      </p:sp>
+    </p:spTree>
+  </p:cSld>
+  <p:clrMapOvr>
+    <a:masterClrMapping/>
+  </p:clrMapOvr>
+</p:notes>
+</file>
+
+<file path=ppt/notesSlides/notesSlide41.xml><?xml version="1.0" encoding="utf-8"?>
+<p:notes xmlns:a="http://schemas.openxmlformats.org/drawingml/2006/main" xmlns:p="http://schemas.openxmlformats.org/presentationml/2006/main" xmlns:r="http://schemas.openxmlformats.org/officeDocument/2006/relationships">
+  <p:cSld>
+    <p:spTree>
+      <p:nvGrpSpPr>
+        <p:cNvPr id="1" name=""/>
+        <p:cNvGrpSpPr/>
+        <p:nvPr/>
+      </p:nvGrpSpPr>
+      <p:grpSpPr>
+        <a:xfrm>
+          <a:off x="0" y="0"/>
+          <a:ext cx="0" cy="0"/>
+          <a:chOff x="0" y="0"/>
+          <a:chExt cx="0" cy="0"/>
+        </a:xfrm>
+      </p:grpSpPr>
+      <p:sp>
+        <p:nvSpPr>
+          <p:cNvPr id="2" name="Slide Image Placeholder 1"/>
+          <p:cNvSpPr>
+            <a:spLocks noGrp="1"/>
+          </p:cNvSpPr>
+          <p:nvPr>
+            <p:ph type="sldImg" idx="2"/>
+          </p:nvPr>
+        </p:nvSpPr>
+        <p:spPr/>
+      </p:sp>
+      <p:sp>
+        <p:nvSpPr>
+          <p:cNvPr id="3" name="Notes Placeholder 2"/>
+          <p:cNvSpPr>
+            <a:spLocks noGrp="1"/>
+          </p:cNvSpPr>
+          <p:nvPr>
+            <p:ph type="body" idx="3" sz="quarter"/>
+          </p:nvPr>
+        </p:nvSpPr>
+        <p:spPr/>
+        <p:txBody>
+          <a:bodyPr/>
+          <a:lstStyle/>
+          <a:p>
+            <a:r>
+              <a:t>例: 今いる場所の高さが 100、足を出した先の高さが 80 なら r = 0.8。0〜1 の乱数を引いて 0.8 より小さければ (80% の確率で) 移る。高さが 10 なら r = 0.1 で、10% しか移らない。だから、低い場所にはめったに行かず、高い場所に長くいる。</a:t>
+            </a:r>
+          </a:p>
+          <a:p>
+            <a:r>
+              <a:t>長く歩くと「各場所にいた時間の割合」が「その場所の高さ」に比例するようになる (詳細つり合い)。だから足あとのヒストグラムが山の形 (事後分布) になる。</a:t>
+            </a:r>
+          </a:p>
+          <a:p>
+            <a:r>
+              <a:t>移らなかったときも今の場所をもう一度記録するのが大事。そうしないと、高い場所にとどまった回数が数えられない。</a:t>
+            </a:r>
+          </a:p>
+          <a:p>
+            <a:r>
+              <a:t>スクショ候補: 歩かせる部分 sampler.run_mcmc (877〜878 行)。メトロポリスの判定そのものは emcee の中にある。コードは code/mcmc_fit_all_bins.py (Totani 方式の修正 cloud_reports/2026-10-02_totani_bestfit.patch を当てた後の行番号)。</a:t>
+            </a:r>
+          </a:p>
+        </p:txBody>
+      </p:sp>
+      <p:sp>
+        <p:nvSpPr>
+          <p:cNvPr id="4" name="Slide Number Placeholder 3"/>
+          <p:cNvSpPr>
+            <a:spLocks noGrp="1"/>
+          </p:cNvSpPr>
+          <p:nvPr>
+            <p:ph type="sldNum" idx="5" sz="quarter"/>
+          </p:nvPr>
+        </p:nvSpPr>
+        <p:spPr/>
+      </p:sp>
+    </p:spTree>
+  </p:cSld>
+  <p:clrMapOvr>
+    <a:masterClrMapping/>
+  </p:clrMapOvr>
+</p:notes>
+</file>
+
+<file path=ppt/notesSlides/notesSlide42.xml><?xml version="1.0" encoding="utf-8"?>
+<p:notes xmlns:a="http://schemas.openxmlformats.org/drawingml/2006/main" xmlns:p="http://schemas.openxmlformats.org/presentationml/2006/main" xmlns:r="http://schemas.openxmlformats.org/officeDocument/2006/relationships">
+  <p:cSld>
+    <p:spTree>
+      <p:nvGrpSpPr>
+        <p:cNvPr id="1" name=""/>
+        <p:cNvGrpSpPr/>
+        <p:nvPr/>
+      </p:nvGrpSpPr>
+      <p:grpSpPr>
+        <a:xfrm>
+          <a:off x="0" y="0"/>
+          <a:ext cx="0" cy="0"/>
+          <a:chOff x="0" y="0"/>
+          <a:chExt cx="0" cy="0"/>
+        </a:xfrm>
+      </p:grpSpPr>
+      <p:sp>
+        <p:nvSpPr>
+          <p:cNvPr id="2" name="Slide Image Placeholder 1"/>
+          <p:cNvSpPr>
+            <a:spLocks noGrp="1"/>
+          </p:cNvSpPr>
+          <p:nvPr>
+            <p:ph type="sldImg" idx="2"/>
+          </p:nvPr>
+        </p:nvSpPr>
+        <p:spPr/>
+      </p:sp>
+      <p:sp>
+        <p:nvSpPr>
+          <p:cNvPr id="3" name="Notes Placeholder 2"/>
+          <p:cNvSpPr>
+            <a:spLocks noGrp="1"/>
+          </p:cNvSpPr>
+          <p:nvPr>
+            <p:ph type="body" idx="3" sz="quarter"/>
+          </p:nvPr>
+        </p:nvSpPr>
+        <p:spPr/>
+        <p:txBody>
+          <a:bodyPr/>
+          <a:lstStyle/>
+          <a:p>
+            <a:r>
+              <a:t>実データではない、説明用のおもちゃの例。倍率が 1 個だけの山 (1 次元) を、平均 1.48・幅 0.075 の形だと仮定して 3000 歩歩かせた。</a:t>
+            </a:r>
+          </a:p>
+          <a:p>
+            <a:r>
+              <a:t>わざと山から離れた 1.2 から出発させたので、最初はふもとから登っていく。この登っている途中 (最初の 200 歩) は山の形と関係ないので捨てる (バーンイン)。</a:t>
+            </a:r>
+          </a:p>
+          <a:p>
+            <a:r>
+              <a:t>そのあとは山の上を行ったり来たりしている。足あとのヒストグラム (右の灰色) が、本当の山の形 (点線) と重なっている = 足あとから山の形が分かる。</a:t>
+            </a:r>
+          </a:p>
+          <a:p>
+            <a:r>
+              <a:t>図は slides/figs/plot_mcmc_toy.py で作った (コメント付き)。</a:t>
+            </a:r>
+          </a:p>
+        </p:txBody>
+      </p:sp>
+      <p:sp>
+        <p:nvSpPr>
+          <p:cNvPr id="4" name="Slide Number Placeholder 3"/>
+          <p:cNvSpPr>
+            <a:spLocks noGrp="1"/>
+          </p:cNvSpPr>
+          <p:nvPr>
+            <p:ph type="sldNum" idx="5" sz="quarter"/>
+          </p:nvPr>
+        </p:nvSpPr>
+        <p:spPr/>
+      </p:sp>
+    </p:spTree>
+  </p:cSld>
+  <p:clrMapOvr>
+    <a:masterClrMapping/>
+  </p:clrMapOvr>
+</p:notes>
+</file>
+
+<file path=ppt/notesSlides/notesSlide43.xml><?xml version="1.0" encoding="utf-8"?>
+<p:notes xmlns:a="http://schemas.openxmlformats.org/drawingml/2006/main" xmlns:p="http://schemas.openxmlformats.org/presentationml/2006/main" xmlns:r="http://schemas.openxmlformats.org/officeDocument/2006/relationships">
+  <p:cSld>
+    <p:spTree>
+      <p:nvGrpSpPr>
+        <p:cNvPr id="1" name=""/>
+        <p:cNvGrpSpPr/>
+        <p:nvPr/>
+      </p:nvGrpSpPr>
+      <p:grpSpPr>
+        <a:xfrm>
+          <a:off x="0" y="0"/>
+          <a:ext cx="0" cy="0"/>
+          <a:chOff x="0" y="0"/>
+          <a:chExt cx="0" cy="0"/>
+        </a:xfrm>
+      </p:grpSpPr>
+      <p:sp>
+        <p:nvSpPr>
+          <p:cNvPr id="2" name="Slide Image Placeholder 1"/>
+          <p:cNvSpPr>
+            <a:spLocks noGrp="1"/>
+          </p:cNvSpPr>
+          <p:nvPr>
+            <p:ph type="sldImg" idx="2"/>
+          </p:nvPr>
+        </p:nvSpPr>
+        <p:spPr/>
+      </p:sp>
+      <p:sp>
+        <p:nvSpPr>
+          <p:cNvPr id="3" name="Notes Placeholder 2"/>
+          <p:cNvSpPr>
+            <a:spLocks noGrp="1"/>
+          </p:cNvSpPr>
+          <p:nvPr>
+            <p:ph type="body" idx="3" sz="quarter"/>
+          </p:nvPr>
+        </p:nvSpPr>
+        <p:spPr/>
+        <p:txBody>
+          <a:bodyPr/>
+          <a:lstStyle/>
+          <a:p>
+            <a:r>
+              <a:t>細長い山: 仲間たちの散らばり方自体が「山が細長い方向」を表している。仲間のいる方向に沿って一歩を出すので、細長い山でも効率よく歩ける。</a:t>
+            </a:r>
+          </a:p>
+          <a:p>
+            <a:r>
+              <a:t>Z⁸ の 8 は「倍率の数 9 − 1」。線の上で伸び縮みさせた分、足を出せる場所の広さが変わるので、それを補正する。Z の範囲 1/2〜2 は emcee の決まった値 (a = 2)。</a:t>
+            </a:r>
+          </a:p>
+          <a:p>
+            <a:r>
+              <a:t>Totani と同じ初期値: 点源・GALPROP (ガス・ICS) = 1 倍、等方 = E²dN/dE 1e-4 相当、Loop I・バブル・ハロー = 0 (Totani §2.3)。</a:t>
+            </a:r>
+          </a:p>
+          <a:p>
+            <a:r>
+              <a:t>スクショ候補: 出発点を決める行 (868 行)、32 人で歩かせる emcee.EnsembleSampler (877 行)。コードは code/mcmc_fit_all_bins.py (Totani 方式の修正 cloud_reports/2026-10-02_totani_bestfit.patch を当てた後の行番号)。</a:t>
+            </a:r>
+          </a:p>
+        </p:txBody>
+      </p:sp>
+      <p:sp>
+        <p:nvSpPr>
+          <p:cNvPr id="4" name="Slide Number Placeholder 3"/>
+          <p:cNvSpPr>
+            <a:spLocks noGrp="1"/>
+          </p:cNvSpPr>
+          <p:nvPr>
+            <p:ph type="sldNum" idx="5" sz="quarter"/>
+          </p:nvPr>
+        </p:nvSpPr>
+        <p:spPr/>
+      </p:sp>
+    </p:spTree>
+  </p:cSld>
+  <p:clrMapOvr>
+    <a:masterClrMapping/>
+  </p:clrMapOvr>
+</p:notes>
+</file>
+
+<file path=ppt/notesSlides/notesSlide44.xml><?xml version="1.0" encoding="utf-8"?>
+<p:notes xmlns:a="http://schemas.openxmlformats.org/drawingml/2006/main" xmlns:p="http://schemas.openxmlformats.org/presentationml/2006/main" xmlns:r="http://schemas.openxmlformats.org/officeDocument/2006/relationships">
+  <p:cSld>
+    <p:spTree>
+      <p:nvGrpSpPr>
+        <p:cNvPr id="1" name=""/>
+        <p:cNvGrpSpPr/>
+        <p:nvPr/>
+      </p:nvGrpSpPr>
+      <p:grpSpPr>
+        <a:xfrm>
+          <a:off x="0" y="0"/>
+          <a:ext cx="0" cy="0"/>
+          <a:chOff x="0" y="0"/>
+          <a:chExt cx="0" cy="0"/>
+        </a:xfrm>
+      </p:grpSpPr>
+      <p:sp>
+        <p:nvSpPr>
+          <p:cNvPr id="2" name="Slide Image Placeholder 1"/>
+          <p:cNvSpPr>
+            <a:spLocks noGrp="1"/>
+          </p:cNvSpPr>
+          <p:nvPr>
+            <p:ph type="sldImg" idx="2"/>
+          </p:nvPr>
+        </p:nvSpPr>
+        <p:spPr/>
+      </p:sp>
+      <p:sp>
+        <p:nvSpPr>
+          <p:cNvPr id="3" name="Notes Placeholder 2"/>
+          <p:cNvSpPr>
+            <a:spLocks noGrp="1"/>
+          </p:cNvSpPr>
+          <p:nvPr>
+            <p:ph type="body" idx="3" sz="quarter"/>
+          </p:nvPr>
+        </p:nvSpPr>
+        <p:spPr/>
+        <p:txBody>
+          <a:bodyPr/>
+          <a:lstStyle/>
+          <a:p>
+            <a:r>
+              <a:t>ハローなしの山: ハローの倍率を 0 に固定した 8 次元の山。ハローありの山 (9 次元) より低いか同じ。2 つの頂上の高さの差が Δln L。</a:t>
+            </a:r>
+          </a:p>
+          <a:p>
+            <a:r>
+              <a:t>頂上に届いているかの確認: 坂を登る方法 (勾配法) で頂上を求めて、一番高い足あととの差を調べた。13 ビンすべてで ln L の差 0.6 以下、有意度の差 0.28σ 以下。確認のためだけで、結果には使っていない。</a:t>
+            </a:r>
+          </a:p>
+          <a:p>
+            <a:r>
+              <a:t>長さの目安: 自己相関時間 τ (何歩離れたら前の場所を忘れるか) の 50 倍以上が推奨。20.8 GeV で τ ≈ 650 歩なので 3 万歩以上が理想だが、6000 歩。</a:t>
+            </a:r>
+          </a:p>
+          <a:p>
+            <a:r>
+              <a:t>数字はクラウドの計算機で、Totani と同じやり方で出した値 (cloud_reports/2026-10-02_totani_mode/)。</a:t>
+            </a:r>
+          </a:p>
+          <a:p>
+            <a:r>
+              <a:t>スクショ候補: 一番高い足あとを探す行 (879〜880 行)、誤差の 16〜84% (926 行)、有意度 (910 行)。コードは code/mcmc_fit_all_bins.py (Totani 方式の修正 cloud_reports/2026-10-02_totani_bestfit.patch を当てた後の行番号)。</a:t>
+            </a:r>
+          </a:p>
+        </p:txBody>
+      </p:sp>
+      <p:sp>
+        <p:nvSpPr>
+          <p:cNvPr id="4" name="Slide Number Placeholder 3"/>
+          <p:cNvSpPr>
+            <a:spLocks noGrp="1"/>
+          </p:cNvSpPr>
+          <p:nvPr>
+            <p:ph type="sldNum" idx="5" sz="quarter"/>
           </p:nvPr>
         </p:nvSpPr>
         <p:spPr/>
@@ -7001,164 +7259,7 @@
 </p:sld>
 </file>
 
-<file path=ppt/slides/slide10.xml><?xml version="1.0" encoding="utf-8"?>
-<p:sld xmlns:a="http://schemas.openxmlformats.org/drawingml/2006/main" xmlns:p="http://schemas.openxmlformats.org/presentationml/2006/main" xmlns:r="http://schemas.openxmlformats.org/officeDocument/2006/relationships">
-  <p:cSld>
-    <p:spTree>
-      <p:nvGrpSpPr>
-        <p:cNvPr id="1" name=""/>
-        <p:cNvGrpSpPr/>
-        <p:nvPr/>
-      </p:nvGrpSpPr>
-      <p:grpSpPr/>
-      <p:sp>
-        <p:nvSpPr>
-          <p:cNvPr id="2" name="Title 1"/>
-          <p:cNvSpPr>
-            <a:spLocks noGrp="1"/>
-          </p:cNvSpPr>
-          <p:nvPr>
-            <p:ph type="title"/>
-          </p:nvPr>
-        </p:nvSpPr>
-        <p:spPr/>
-        <p:txBody>
-          <a:bodyPr/>
-          <a:lstStyle/>
-          <a:p>
-            <a:r>
-              <a:rPr sz="3400"/>
-              <a:t>MCMC の中身③：今回の設定（emcee）</a:t>
-            </a:r>
-          </a:p>
-        </p:txBody>
-      </p:sp>
-      <p:sp>
-        <p:nvSpPr>
-          <p:cNvPr id="3" name="Content Placeholder 2"/>
-          <p:cNvSpPr>
-            <a:spLocks noGrp="1"/>
-          </p:cNvSpPr>
-          <p:nvPr>
-            <p:ph idx="1"/>
-          </p:nvPr>
-        </p:nvSpPr>
-        <p:spPr>
-          <a:xfrm>
-            <a:off x="841248" y="1463040"/>
-            <a:ext cx="10515600" cy="4114800"/>
-          </a:xfrm>
-        </p:spPr>
-        <p:txBody>
-          <a:bodyPr/>
-          <a:lstStyle/>
-          <a:p>
-            <a:pPr/>
-            <a:r>
-              <a:rPr sz="2000"/>
-              <a:t>32 人の歩行者が同時に歩く。次の一歩は、他の歩行者の位置を使って決める</a:t>
-            </a:r>
-          </a:p>
-          <a:p>
-            <a:pPr lvl="1"/>
-            <a:r>
-              <a:rPr sz="1600"/>
-              <a:t>候補：Y = X_j + Z (X_k − X_j)（X_k：自分、X_j：ランダムに選んだ他の歩行者）</a:t>
-            </a:r>
-          </a:p>
-          <a:p>
-            <a:pPr lvl="1"/>
-            <a:r>
-              <a:rPr sz="1600"/>
-              <a:t>Z は 1/2〜2 の乱数（確率 ∝ 1/√Z）、移る確率 = min(1, Z⁸ P(Y | D) / P(X_k | D))</a:t>
-            </a:r>
-          </a:p>
-          <a:p>
-            <a:pPr/>
-            <a:r>
-              <a:rPr sz="2000"/>
-              <a:t>出発点：Totani と同じ初期値。6000 歩歩き、尤度が最大の点を最良値にする</a:t>
-            </a:r>
-          </a:p>
-          <a:p>
-            <a:pPr/>
-            <a:r>
-              <a:rPr sz="2000"/>
-              <a:t>結果の例（20.8 GeV）：ハローの倍率 f_halo = 1.51（68% 区間 1.43–1.61）</a:t>
-            </a:r>
-          </a:p>
-          <a:p>
-            <a:pPr/>
-            <a:r>
-              <a:rPr sz="2000"/>
-              <a:t>注意：推奨の長さ（自己相関時間 τ の 50 倍）に届かないビンが多い</a:t>
-            </a:r>
-          </a:p>
-          <a:p>
-            <a:pPr lvl="1"/>
-            <a:r>
-              <a:rPr sz="1600"/>
-              <a:t>20.8 GeV で τ ≈ 650 歩、6000 歩 &lt; 50τ</a:t>
-            </a:r>
-          </a:p>
-          <a:p>
-            <a:pPr lvl="1"/>
-            <a:r>
-              <a:rPr sz="1600"/>
-              <a:t>→ 誤差棒は目安。ただし最良値は尤度の頂上に届いている（頂上との差は ln L で 0.6 以下）</a:t>
-            </a:r>
-          </a:p>
-        </p:txBody>
-      </p:sp>
-      <p:sp>
-        <p:nvSpPr>
-          <p:cNvPr id="8" name="TextBox 7">
-            <a:extLst>
-              <a:ext uri="{FF2B5EF4-FFF2-40B4-BE49-F238E27FC236}">
-                <a16:creationId xmlns:a16="http://schemas.microsoft.com/office/drawing/2014/main" id="{F85CD606-E3CE-F314-B3EE-F3D7028115CB}"/>
-              </a:ext>
-            </a:extLst>
-          </p:cNvPr>
-          <p:cNvSpPr txBox="1"/>
-          <p:nvPr/>
-        </p:nvSpPr>
-        <p:spPr>
-          <a:xfrm>
-            <a:off x="5837182" y="5663239"/>
-            <a:ext cx="6093372" cy="923330"/>
-          </a:xfrm>
-          <a:prstGeom prst="rect">
-            <a:avLst/>
-          </a:prstGeom>
-          <a:noFill/>
-        </p:spPr>
-        <p:txBody>
-          <a:bodyPr wrap="square">
-            <a:spAutoFit/>
-          </a:bodyPr>
-          <a:lstStyle/>
-          <a:p>
-            <a:r>
-              <a:rPr lang="en-US" sz="1400" b="1"/>
-              <a:t>Reference:</a:t>
-            </a:r>
-            <a:r>
-              <a:rPr lang="en-US" sz="1400"/>
-              <a:t> J. Goodman &amp; J. Weare (2010), Comm. App. Math. Comp. Sci. 5, 65</a:t>
-            </a:r>
-            <a:endParaRPr lang="en-US"/>
-          </a:p>
-        </p:txBody>
-      </p:sp>
-    </p:spTree>
-  </p:cSld>
-  <p:clrMapOvr>
-    <a:masterClrMapping/>
-  </p:clrMapOvr>
-</p:sld>
-</file>
-
-<file path=ppt/slides/slide11.xml><?xml version="1.0" encoding="utf-8"?>
+<file path=ppt/slides/slide12.xml><?xml version="1.0" encoding="utf-8"?>
 <p:sld xmlns:a="http://schemas.openxmlformats.org/drawingml/2006/main" xmlns:r="http://schemas.openxmlformats.org/officeDocument/2006/relationships" xmlns:p="http://schemas.openxmlformats.org/presentationml/2006/main">
   <p:cSld>
     <p:spTree>
@@ -7299,7 +7400,7 @@
 </p:sld>
 </file>
 
-<file path=ppt/slides/slide12.xml><?xml version="1.0" encoding="utf-8"?>
+<file path=ppt/slides/slide13.xml><?xml version="1.0" encoding="utf-8"?>
 <p:sld xmlns:a="http://schemas.openxmlformats.org/drawingml/2006/main" xmlns:r="http://schemas.openxmlformats.org/officeDocument/2006/relationships" xmlns:p="http://schemas.openxmlformats.org/presentationml/2006/main">
   <p:cSld>
     <p:spTree>
@@ -7424,119 +7525,6 @@
 </p:sld>
 </file>
 
-<file path=ppt/slides/slide13.xml><?xml version="1.0" encoding="utf-8"?>
-<p:sld xmlns:a="http://schemas.openxmlformats.org/drawingml/2006/main" xmlns:r="http://schemas.openxmlformats.org/officeDocument/2006/relationships" xmlns:p="http://schemas.openxmlformats.org/presentationml/2006/main">
-  <p:cSld>
-    <p:spTree>
-      <p:nvGrpSpPr>
-        <p:cNvPr id="1" name=""/>
-        <p:cNvGrpSpPr/>
-        <p:nvPr/>
-      </p:nvGrpSpPr>
-      <p:grpSpPr>
-        <a:xfrm>
-          <a:off x="0" y="0"/>
-          <a:ext cx="0" cy="0"/>
-          <a:chOff x="0" y="0"/>
-          <a:chExt cx="0" cy="0"/>
-        </a:xfrm>
-      </p:grpSpPr>
-      <p:sp>
-        <p:nvSpPr>
-          <p:cNvPr id="2" name="Title 1"/>
-          <p:cNvSpPr>
-            <a:spLocks noGrp="1"/>
-          </p:cNvSpPr>
-          <p:nvPr>
-            <p:ph type="title"/>
-          </p:nvPr>
-        </p:nvSpPr>
-        <p:spPr/>
-        <p:txBody>
-          <a:bodyPr/>
-          <a:lstStyle/>
-          <a:p>
-            <a:r>
-              <a:rPr sz="3400"/>
-              <a:t>縮退が引き起こした 3 つの疑問</a:t>
-            </a:r>
-          </a:p>
-        </p:txBody>
-      </p:sp>
-      <p:sp>
-        <p:nvSpPr>
-          <p:cNvPr id="3" name="Content Placeholder 2"/>
-          <p:cNvSpPr>
-            <a:spLocks noGrp="1"/>
-          </p:cNvSpPr>
-          <p:nvPr>
-            <p:ph idx="1"/>
-          </p:nvPr>
-        </p:nvSpPr>
-        <p:spPr>
-          <a:xfrm>
-            <a:off x="841248" y="1463040"/>
-            <a:ext cx="10515600" cy="4937760"/>
-          </a:xfrm>
-        </p:spPr>
-        <p:txBody>
-          <a:bodyPr/>
-          <a:lstStyle/>
-          <a:p>
-            <a:r>
-              <a:rPr sz="2400"/>
-              <a:t>① バブル領域を外すと 19.5σ → 5.0σ に落ちる</a:t>
-            </a:r>
-          </a:p>
-          <a:p>
-            <a:pPr lvl="1"/>
-            <a:r>
-              <a:rPr sz="2000"/>
-              <a:t>ハローは、本当は ICS やバブルの間違いでは？</a:t>
-            </a:r>
-          </a:p>
-          <a:p>
-            <a:r>
-              <a:rPr sz="2400"/>
-              <a:t>② 何も無い空でも、最大 4.5σ が出る</a:t>
-            </a:r>
-          </a:p>
-          <a:p>
-            <a:pPr lvl="1"/>
-            <a:r>
-              <a:rPr sz="2000"/>
-              <a:t>σ をそのまま信じてよいのか？</a:t>
-            </a:r>
-          </a:p>
-          <a:p>
-            <a:r>
-              <a:rPr sz="2400"/>
-              <a:t>③ 7/23 に出した 19.1σ が再現できない</a:t>
-            </a:r>
-          </a:p>
-          <a:p>
-            <a:pPr lvl="1"/>
-            <a:r>
-              <a:rPr sz="2000"/>
-              <a:t>結果そのものを信じてよいのか？</a:t>
-            </a:r>
-          </a:p>
-          <a:p>
-            <a:r>
-              <a:rPr sz="2400"/>
-              <a:t>→ 次から、1 つずつ調べた結果</a:t>
-            </a:r>
-          </a:p>
-        </p:txBody>
-      </p:sp>
-    </p:spTree>
-  </p:cSld>
-  <p:clrMapOvr>
-    <a:masterClrMapping/>
-  </p:clrMapOvr>
-</p:sld>
-</file>
-
 <file path=ppt/slides/slide14.xml><?xml version="1.0" encoding="utf-8"?>
 <p:sld xmlns:a="http://schemas.openxmlformats.org/drawingml/2006/main" xmlns:r="http://schemas.openxmlformats.org/officeDocument/2006/relationships" xmlns:p="http://schemas.openxmlformats.org/presentationml/2006/main">
   <p:cSld>
@@ -7571,7 +7559,7 @@
           <a:p>
             <a:r>
               <a:rPr sz="3400"/>
-              <a:t>① を調べる：手がかりはどこにあるか</a:t>
+              <a:t>縮退が引き起こした 3 つの疑問</a:t>
             </a:r>
           </a:p>
         </p:txBody>
@@ -7597,39 +7585,47 @@
           <a:lstStyle/>
           <a:p>
             <a:r>
-              <a:rPr sz="2200"/>
-              <a:t>フィッシャー情報：データがパラメータをどれだけ決められるか</a:t>
-            </a:r>
-          </a:p>
-          <a:p>
-            <a:r>
-              <a:rPr sz="2200"/>
-              <a:t>ICS など他の成分では説明できない「ハローだけの手がかり」を、空の場所ごとに計算</a:t>
+              <a:rPr sz="2400"/>
+              <a:t>① バブル領域を外すと 19.5σ → 5.0σ に落ちる</a:t>
             </a:r>
           </a:p>
           <a:p>
             <a:pPr lvl="1"/>
             <a:r>
-              <a:rPr sz="1800"/>
-              <a:t>その 54% がバブル領域（面積は 34%）に集中</a:t>
-            </a:r>
-          </a:p>
-          <a:p>
-            <a:r>
-              <a:rPr sz="2200"/>
-              <a:t>手がかりの減り方だけで予測すると 6.6σ、実測 5.0σ</a:t>
-            </a:r>
-          </a:p>
-          <a:p>
-            <a:r>
-              <a:rPr sz="2200"/>
-              <a:t>同じ形の領域を横にずらして外すと 15〜16σ</a:t>
-            </a:r>
-          </a:p>
-          <a:p>
-            <a:r>
-              <a:rPr sz="2200"/>
-              <a:t>→ 19 → 5σ は「手がかりを捨てた」から。汚染の証拠ではない</a:t>
+              <a:rPr sz="2000"/>
+              <a:t>ハローは、本当は ICS やバブルの間違いでは？</a:t>
+            </a:r>
+          </a:p>
+          <a:p>
+            <a:r>
+              <a:rPr sz="2400"/>
+              <a:t>② 何も無い空でも、最大 4.5σ が出る</a:t>
+            </a:r>
+          </a:p>
+          <a:p>
+            <a:pPr lvl="1"/>
+            <a:r>
+              <a:rPr sz="2000"/>
+              <a:t>σ をそのまま信じてよいのか？</a:t>
+            </a:r>
+          </a:p>
+          <a:p>
+            <a:r>
+              <a:rPr sz="2400"/>
+              <a:t>③ 7/23 に出した 19.1σ が再現できない</a:t>
+            </a:r>
+          </a:p>
+          <a:p>
+            <a:pPr lvl="1"/>
+            <a:r>
+              <a:rPr sz="2000"/>
+              <a:t>結果そのものを信じてよいのか？</a:t>
+            </a:r>
+          </a:p>
+          <a:p>
+            <a:r>
+              <a:rPr sz="2400"/>
+              <a:t>→ 次から、1 つずつ調べた結果</a:t>
             </a:r>
           </a:p>
         </p:txBody>
@@ -7676,7 +7672,7 @@
           <a:p>
             <a:r>
               <a:rPr sz="3400"/>
-              <a:t>① を調べる：ICS が犯人なら</a:t>
+              <a:t>① を調べる：手がかりはどこにあるか</a:t>
             </a:r>
           </a:p>
         </p:txBody>
@@ -7694,7 +7690,7 @@
         <p:spPr>
           <a:xfrm>
             <a:off x="841248" y="1463040"/>
-            <a:ext cx="10515600" cy="4114800"/>
+            <a:ext cx="10515600" cy="4937760"/>
           </a:xfrm>
         </p:spPr>
         <p:txBody>
@@ -7703,87 +7699,39 @@
           <a:p>
             <a:r>
               <a:rPr sz="2200"/>
-              <a:t>ICS をバブルの内と外で別々の明るさにして当てはめた</a:t>
+              <a:t>フィッシャー情報：データがパラメータをどれだけ決められるか</a:t>
+            </a:r>
+          </a:p>
+          <a:p>
+            <a:r>
+              <a:rPr sz="2200"/>
+              <a:t>ICS など他の成分では説明できない「ハローだけの手がかり」を、空の場所ごとに計算</a:t>
             </a:r>
           </a:p>
           <a:p>
             <a:pPr lvl="1"/>
             <a:r>
               <a:rPr sz="1800"/>
-              <a:t>内側が約 2.3 倍明るければ、ハローの改善の 92% を ICS が説明</a:t>
+              <a:t>その 54% がバブル領域（面積は 34%）に集中</a:t>
             </a:r>
           </a:p>
           <a:p>
             <a:r>
               <a:rPr sz="2200"/>
-              <a:t>ICS の計算の近似（等方近似）を直しても 1.1〜1.3 倍</a:t>
-            </a:r>
-          </a:p>
-          <a:p>
-            <a:pPr lvl="1"/>
-            <a:r>
-              <a:rPr sz="1800"/>
-              <a:t>しかも外側のほうが大きくなる → 2.3 倍には届かない</a:t>
+              <a:t>手がかりの減り方だけで予測すると 6.6σ、実測 5.0σ</a:t>
             </a:r>
           </a:p>
           <a:p>
             <a:r>
               <a:rPr sz="2200"/>
-              <a:t>ICS を 3 種類に分けて、それぞれ自由に動かしても</a:t>
-            </a:r>
-          </a:p>
-          <a:p>
-            <a:pPr lvl="1"/>
-            <a:r>
-              <a:rPr sz="1800"/>
-              <a:t>19.5σ → 18.4σ（約 1σ しか下がらない）</a:t>
+              <a:t>同じ形の領域を横にずらして外すと 15〜16σ</a:t>
             </a:r>
           </a:p>
           <a:p>
             <a:r>
               <a:rPr sz="2200"/>
-              <a:t>→ ICS の「明るさ」の間違いでは、ハローを説明できない</a:t>
-            </a:r>
-          </a:p>
-        </p:txBody>
-      </p:sp>
-      <p:sp>
-        <p:nvSpPr>
-          <p:cNvPr id="8" name="TextBox 7">
-            <a:extLst>
-              <a:ext uri="{FF2B5EF4-FFF2-40B4-BE49-F238E27FC236}">
-                <a16:creationId xmlns:a16="http://schemas.microsoft.com/office/drawing/2014/main" id="{F85CD606-E3CE-F314-B3EE-F3D7028115CB}"/>
-              </a:ext>
-            </a:extLst>
-          </p:cNvPr>
-          <p:cNvSpPr txBox="1"/>
-          <p:nvPr/>
-        </p:nvSpPr>
-        <p:spPr>
-          <a:xfrm>
-            <a:off x="5837182" y="5663239"/>
-            <a:ext cx="6093372" cy="923330"/>
-          </a:xfrm>
-          <a:prstGeom prst="rect">
-            <a:avLst/>
-          </a:prstGeom>
-          <a:noFill/>
-        </p:spPr>
-        <p:txBody>
-          <a:bodyPr wrap="square">
-            <a:spAutoFit/>
-          </a:bodyPr>
-          <a:lstStyle/>
-          <a:p>
-            <a:r>
-              <a:rPr lang="en-US" sz="1400" b="1"/>
-              <a:t>Reference:</a:t>
-            </a:r>
-            <a:r>
-              <a:rPr lang="en-US" sz="1400"/>
-              <a:t> I. V. Moskalenko &amp; A. W. Strong (2000), ApJ 528, 357</a:t>
-            </a:r>
-            <a:endParaRPr lang="en-US"/>
+              <a:t>→ 19 → 5σ は「手がかりを捨てた」から。汚染の証拠ではない</a:t>
+            </a:r>
           </a:p>
         </p:txBody>
       </p:sp>
@@ -7829,7 +7777,7 @@
           <a:p>
             <a:r>
               <a:rPr sz="3400"/>
-              <a:t>② を調べる：σ を信じてよいか</a:t>
+              <a:t>① を調べる：ICS が犯人なら</a:t>
             </a:r>
           </a:p>
         </p:txBody>
@@ -7856,39 +7804,46 @@
           <a:p>
             <a:r>
               <a:rPr sz="2200"/>
-              <a:t>何も無い空 23 か所で、天の川と同じ解析をした</a:t>
+              <a:t>ICS をバブルの内と外で別々の明るさにして当てはめた</a:t>
+            </a:r>
+          </a:p>
+          <a:p>
+            <a:pPr lvl="1"/>
+            <a:r>
+              <a:rPr sz="1800"/>
+              <a:t>内側が約 2.3 倍明るければ、ハローの改善の 92% を ICS が説明</a:t>
             </a:r>
           </a:p>
           <a:p>
             <a:r>
               <a:rPr sz="2200"/>
-              <a:t>本物の信号が無ければ、σ は「平均 0、ばらつき 1」になるはず</a:t>
+              <a:t>ICS の計算の近似（等方近似）を直しても 1.1〜1.3 倍</a:t>
             </a:r>
           </a:p>
           <a:p>
             <a:pPr lvl="1"/>
             <a:r>
               <a:rPr sz="1800"/>
-              <a:t>Wilks の定理が成り立っていれば</a:t>
+              <a:t>しかも外側のほうが大きくなる → 2.3 倍には届かない</a:t>
             </a:r>
           </a:p>
           <a:p>
             <a:r>
               <a:rPr sz="2200"/>
-              <a:t>実際のばらつき：1.26（95% 区間 1.14–1.39）</a:t>
+              <a:t>ICS を 3 種類に分けて、それぞれ自由に動かしても</a:t>
             </a:r>
           </a:p>
           <a:p>
             <a:pPr lvl="1"/>
             <a:r>
               <a:rPr sz="1800"/>
-              <a:t>σ は 1.26 倍大きく出ている</a:t>
+              <a:t>19.5σ → 18.4σ（約 1σ しか下がらない）</a:t>
             </a:r>
           </a:p>
           <a:p>
             <a:r>
               <a:rPr sz="2200"/>
-              <a:t>19.5σ を較正すると 19.5 ÷ 1.26 ≈ 15σ（14.0–17.0σ）</a:t>
+              <a:t>→ ICS の「明るさ」の間違いでは、ハローを説明できない</a:t>
             </a:r>
           </a:p>
         </p:txBody>
@@ -7927,7 +7882,7 @@
             </a:r>
             <a:r>
               <a:rPr lang="en-US" sz="1400"/>
-              <a:t> B. Efron &amp; R. J. Tibshirani (1993), An Introduction to the Bootstrap</a:t>
+              <a:t> I. V. Moskalenko &amp; A. W. Strong (2000), ApJ 528, 357</a:t>
             </a:r>
             <a:endParaRPr lang="en-US"/>
           </a:p>
@@ -7975,45 +7930,86 @@
           <a:p>
             <a:r>
               <a:rPr sz="3400"/>
-              <a:t>② の結果：エネルギーごとのばらつき</a:t>
-            </a:r>
-          </a:p>
-        </p:txBody>
-      </p:sp>
-      <p:pic>
-        <p:nvPicPr>
-          <p:cNvPr id="3" name="Picture 2" descr="fig_null_variance.png"/>
-          <p:cNvPicPr>
-            <a:picLocks noChangeAspect="1"/>
-          </p:cNvPicPr>
-          <p:nvPr/>
-        </p:nvPicPr>
-        <p:blipFill>
-          <a:blip r:embed="rId3"/>
-          <a:stretch>
-            <a:fillRect/>
-          </a:stretch>
-        </p:blipFill>
+              <a:t>② を調べる：σ を信じてよいか</a:t>
+            </a:r>
+          </a:p>
+        </p:txBody>
+      </p:sp>
+      <p:sp>
+        <p:nvSpPr>
+          <p:cNvPr id="3" name="Content Placeholder 2"/>
+          <p:cNvSpPr>
+            <a:spLocks noGrp="1"/>
+          </p:cNvSpPr>
+          <p:nvPr>
+            <p:ph idx="1"/>
+          </p:nvPr>
+        </p:nvSpPr>
         <p:spPr>
           <a:xfrm>
-            <a:off x="2103120" y="1234440"/>
-            <a:ext cx="7156174" cy="4114800"/>
+            <a:off x="841248" y="1463040"/>
+            <a:ext cx="10515600" cy="4114800"/>
           </a:xfrm>
-          <a:prstGeom prst="rect">
-            <a:avLst/>
-          </a:prstGeom>
         </p:spPr>
-      </p:pic>
-      <p:sp>
-        <p:nvSpPr>
-          <p:cNvPr id="4" name="TextBox 3"/>
+        <p:txBody>
+          <a:bodyPr/>
+          <a:lstStyle/>
+          <a:p>
+            <a:r>
+              <a:rPr sz="2200"/>
+              <a:t>何も無い空 23 か所で、天の川と同じ解析をした</a:t>
+            </a:r>
+          </a:p>
+          <a:p>
+            <a:r>
+              <a:rPr sz="2200"/>
+              <a:t>本物の信号が無ければ、σ は「平均 0、ばらつき 1」になるはず</a:t>
+            </a:r>
+          </a:p>
+          <a:p>
+            <a:pPr lvl="1"/>
+            <a:r>
+              <a:rPr sz="1800"/>
+              <a:t>Wilks の定理が成り立っていれば</a:t>
+            </a:r>
+          </a:p>
+          <a:p>
+            <a:r>
+              <a:rPr sz="2200"/>
+              <a:t>実際のばらつき：1.26（95% 区間 1.14–1.39）</a:t>
+            </a:r>
+          </a:p>
+          <a:p>
+            <a:pPr lvl="1"/>
+            <a:r>
+              <a:rPr sz="1800"/>
+              <a:t>σ は 1.26 倍大きく出ている</a:t>
+            </a:r>
+          </a:p>
+          <a:p>
+            <a:r>
+              <a:rPr sz="2200"/>
+              <a:t>19.5σ を較正すると 19.5 ÷ 1.26 ≈ 15σ（14.0–17.0σ）</a:t>
+            </a:r>
+          </a:p>
+        </p:txBody>
+      </p:sp>
+      <p:sp>
+        <p:nvSpPr>
+          <p:cNvPr id="8" name="TextBox 7">
+            <a:extLst>
+              <a:ext uri="{FF2B5EF4-FFF2-40B4-BE49-F238E27FC236}">
+                <a16:creationId xmlns:a16="http://schemas.microsoft.com/office/drawing/2014/main" id="{F85CD606-E3CE-F314-B3EE-F3D7028115CB}"/>
+              </a:ext>
+            </a:extLst>
+          </p:cNvPr>
           <p:cNvSpPr txBox="1"/>
           <p:nvPr/>
         </p:nvSpPr>
         <p:spPr>
           <a:xfrm>
-            <a:off x="457200" y="5486400"/>
-            <a:ext cx="11247120" cy="457200"/>
+            <a:off x="5837182" y="5663239"/>
+            <a:ext cx="6093372" cy="923330"/>
           </a:xfrm>
           <a:prstGeom prst="rect">
             <a:avLst/>
@@ -8027,9 +8023,14 @@
           <a:lstStyle/>
           <a:p>
             <a:r>
-              <a:rPr sz="2000"/>
-              <a:t>どのエネルギーでもばらつきは 1 より大きい（光子が十分ある範囲）</a:t>
-            </a:r>
+              <a:rPr lang="en-US" sz="1400" b="1"/>
+              <a:t>Reference:</a:t>
+            </a:r>
+            <a:r>
+              <a:rPr lang="en-US" sz="1400"/>
+              <a:t> B. Efron &amp; R. J. Tibshirani (1993), An Introduction to the Bootstrap</a:t>
+            </a:r>
+            <a:endParaRPr lang="en-US"/>
           </a:p>
         </p:txBody>
       </p:sp>
@@ -8075,52 +8076,60 @@
           <a:p>
             <a:r>
               <a:rPr sz="3400"/>
-              <a:t>③ を調べる：19.1σ が再現できない理由</a:t>
-            </a:r>
-          </a:p>
-        </p:txBody>
-      </p:sp>
-      <p:sp>
-        <p:nvSpPr>
-          <p:cNvPr id="3" name="Content Placeholder 2"/>
-          <p:cNvSpPr>
-            <a:spLocks noGrp="1"/>
-          </p:cNvSpPr>
-          <p:nvPr>
-            <p:ph idx="1"/>
-          </p:nvPr>
-        </p:nvSpPr>
+              <a:t>② の結果：エネルギーごとのばらつき</a:t>
+            </a:r>
+          </a:p>
+        </p:txBody>
+      </p:sp>
+      <p:pic>
+        <p:nvPicPr>
+          <p:cNvPr id="3" name="Picture 2" descr="fig_null_variance.png"/>
+          <p:cNvPicPr>
+            <a:picLocks noChangeAspect="1"/>
+          </p:cNvPicPr>
+          <p:nvPr/>
+        </p:nvPicPr>
+        <p:blipFill>
+          <a:blip r:embed="rId3"/>
+          <a:stretch>
+            <a:fillRect/>
+          </a:stretch>
+        </p:blipFill>
         <p:spPr>
           <a:xfrm>
-            <a:off x="841248" y="1463040"/>
-            <a:ext cx="10515600" cy="4937760"/>
+            <a:off x="2103120" y="1234440"/>
+            <a:ext cx="7156174" cy="4114800"/>
           </a:xfrm>
+          <a:prstGeom prst="rect">
+            <a:avLst/>
+          </a:prstGeom>
         </p:spPr>
-        <p:txBody>
-          <a:bodyPr/>
-          <a:lstStyle/>
-          <a:p>
-            <a:r>
-              <a:rPr sz="2400"/>
-              <a:t>7/23 の計算の直後にコードを直していて、当時の状態が残っていなかった</a:t>
-            </a:r>
-          </a:p>
-          <a:p>
-            <a:r>
-              <a:rPr sz="2400"/>
-              <a:t>今のコードは、何度計算しても同じ答えになる（10/1 に確認）</a:t>
-            </a:r>
-          </a:p>
-          <a:p>
-            <a:r>
-              <a:rPr sz="2400"/>
-              <a:t>結果ファイルに、コードの版と設定を自動で記録するようにした</a:t>
-            </a:r>
-          </a:p>
-          <a:p>
-            <a:r>
-              <a:rPr sz="2400"/>
-              <a:t>→ 10/2 に Totani と同じやり方で計算し直し、主結果は 19.5σ</a:t>
+      </p:pic>
+      <p:sp>
+        <p:nvSpPr>
+          <p:cNvPr id="4" name="TextBox 3"/>
+          <p:cNvSpPr txBox="1"/>
+          <p:nvPr/>
+        </p:nvSpPr>
+        <p:spPr>
+          <a:xfrm>
+            <a:off x="457200" y="5486400"/>
+            <a:ext cx="11247120" cy="457200"/>
+          </a:xfrm>
+          <a:prstGeom prst="rect">
+            <a:avLst/>
+          </a:prstGeom>
+          <a:noFill/>
+        </p:spPr>
+        <p:txBody>
+          <a:bodyPr wrap="square">
+            <a:spAutoFit/>
+          </a:bodyPr>
+          <a:lstStyle/>
+          <a:p>
+            <a:r>
+              <a:rPr sz="2000"/>
+              <a:t>どのエネルギーでもばらつきは 1 より大きい（光子が十分ある範囲）</a:t>
             </a:r>
           </a:p>
         </p:txBody>
@@ -8167,7 +8176,7 @@
           <a:p>
             <a:r>
               <a:rPr sz="3400"/>
-              <a:t>ここまでのまとめ</a:t>
+              <a:t>③ を調べる：19.1σ が再現できない理由</a:t>
             </a:r>
           </a:p>
         </p:txBody>
@@ -8194,32 +8203,25 @@
           <a:p>
             <a:r>
               <a:rPr sz="2400"/>
-              <a:t>ICS の明るさ・バブル・計算の近似の間違いでは、超過を説明できない</a:t>
+              <a:t>7/23 の計算の直後にコードを直していて、当時の状態が残っていなかった</a:t>
             </a:r>
           </a:p>
           <a:p>
             <a:r>
               <a:rPr sz="2400"/>
-              <a:t>σ は 1.26 倍の過大評価 → 較正すると約 15σ</a:t>
+              <a:t>今のコードは、何度計算しても同じ答えになる（10/1 に確認）</a:t>
             </a:r>
           </a:p>
           <a:p>
             <a:r>
               <a:rPr sz="2400"/>
-              <a:t>ただし、暗黒物質の証拠ではない</a:t>
-            </a:r>
-          </a:p>
-          <a:p>
-            <a:pPr lvl="1"/>
-            <a:r>
-              <a:rPr sz="2000"/>
-              <a:t>ICS の「空間の形」の間違いは否定できていない</a:t>
+              <a:t>結果ファイルに、コードの版と設定を自動で記録するようにした</a:t>
             </a:r>
           </a:p>
           <a:p>
             <a:r>
               <a:rPr sz="2400"/>
-              <a:t>→ 独立な確認として、矮小銀河を見る</a:t>
+              <a:t>→ 10/2 に Totani と同じやり方で計算し直し、主結果は 19.5σ</a:t>
             </a:r>
           </a:p>
         </p:txBody>
@@ -8443,7 +8445,7 @@
           <a:p>
             <a:r>
               <a:rPr sz="3400"/>
-              <a:t>矮小銀河で確かめる</a:t>
+              <a:t>ここまでのまとめ</a:t>
             </a:r>
           </a:p>
         </p:txBody>
@@ -8461,7 +8463,7 @@
         <p:spPr>
           <a:xfrm>
             <a:off x="841248" y="1463040"/>
-            <a:ext cx="10515600" cy="4114800"/>
+            <a:ext cx="10515600" cy="4937760"/>
           </a:xfrm>
         </p:spPr>
         <p:txBody>
@@ -8470,80 +8472,33 @@
           <a:p>
             <a:r>
               <a:rPr sz="2400"/>
-              <a:t>矮小銀河：天の川のまわりの小さな銀河</a:t>
+              <a:t>ICS の明るさ・バブル・計算の近似の間違いでは、超過を説明できない</a:t>
+            </a:r>
+          </a:p>
+          <a:p>
+            <a:r>
+              <a:rPr sz="2400"/>
+              <a:t>σ は 1.26 倍の過大評価 → 較正すると約 15σ</a:t>
+            </a:r>
+          </a:p>
+          <a:p>
+            <a:r>
+              <a:rPr sz="2400"/>
+              <a:t>ただし、暗黒物質の証拠ではない</a:t>
             </a:r>
           </a:p>
           <a:p>
             <a:pPr lvl="1"/>
             <a:r>
               <a:rPr sz="2000"/>
-              <a:t>暗黒物質が多く、ガスや星形成が少ない（雑音が少ない）</a:t>
+              <a:t>ICS の「空間の形」の間違いは否定できていない</a:t>
             </a:r>
           </a:p>
           <a:p>
             <a:r>
               <a:rPr sz="2400"/>
-              <a:t>暗黒物質なら、矮小銀河からも同じ 20 GeV の光が来るはず</a:t>
-            </a:r>
-          </a:p>
-          <a:p>
-            <a:r>
-              <a:rPr sz="2400"/>
-              <a:t>同じ手法を、各天体のまわり半径 10° に使った</a:t>
-            </a:r>
-          </a:p>
-          <a:p>
-            <a:pPr lvl="1"/>
-            <a:r>
-              <a:rPr sz="2000"/>
-              <a:t>矮小銀河 54 ＋ M31・M33 ＋ 何も無い空 23 か所</a:t>
-            </a:r>
-          </a:p>
-          <a:p>
-            <a:r>
-              <a:rPr sz="2400"/>
-              <a:t>矮小銀河は小さい（0.2〜0.4°）ので、広がった ICS とは縮退しない</a:t>
-            </a:r>
-          </a:p>
-        </p:txBody>
-      </p:sp>
-      <p:sp>
-        <p:nvSpPr>
-          <p:cNvPr id="8" name="TextBox 7">
-            <a:extLst>
-              <a:ext uri="{FF2B5EF4-FFF2-40B4-BE49-F238E27FC236}">
-                <a16:creationId xmlns:a16="http://schemas.microsoft.com/office/drawing/2014/main" id="{F85CD606-E3CE-F314-B3EE-F3D7028115CB}"/>
-              </a:ext>
-            </a:extLst>
-          </p:cNvPr>
-          <p:cNvSpPr txBox="1"/>
-          <p:nvPr/>
-        </p:nvSpPr>
-        <p:spPr>
-          <a:xfrm>
-            <a:off x="5837182" y="5663239"/>
-            <a:ext cx="6093372" cy="923330"/>
-          </a:xfrm>
-          <a:prstGeom prst="rect">
-            <a:avLst/>
-          </a:prstGeom>
-          <a:noFill/>
-        </p:spPr>
-        <p:txBody>
-          <a:bodyPr wrap="square">
-            <a:spAutoFit/>
-          </a:bodyPr>
-          <a:lstStyle/>
-          <a:p>
-            <a:r>
-              <a:rPr lang="en-US" sz="1400" b="1"/>
-              <a:t>Reference:</a:t>
-            </a:r>
-            <a:r>
-              <a:rPr lang="en-US" sz="1400"/>
-              <a:t> A. B. Pace (2025), Open J. Astrophys. 8, 142</a:t>
-            </a:r>
-            <a:endParaRPr lang="en-US"/>
+              <a:t>→ 独立な確認として、矮小銀河を見る</a:t>
+            </a:r>
           </a:p>
         </p:txBody>
       </p:sp>
@@ -8589,7 +8544,7 @@
           <a:p>
             <a:r>
               <a:rPr sz="3400"/>
-              <a:t>予測の立て方：J ファクター</a:t>
+              <a:t>矮小銀河で確かめる</a:t>
             </a:r>
           </a:p>
         </p:txBody>
@@ -8616,38 +8571,39 @@
           <a:p>
             <a:r>
               <a:rPr sz="2400"/>
-              <a:t>対消滅の明るさ：F = ⟨σv⟩ / (8π m²) × dN/dE × J</a:t>
+              <a:t>矮小銀河：天の川のまわりの小さな銀河</a:t>
+            </a:r>
+          </a:p>
+          <a:p>
+            <a:pPr lvl="1"/>
+            <a:r>
+              <a:rPr sz="2000"/>
+              <a:t>暗黒物質が多く、ガスや星形成が少ない（雑音が少ない）</a:t>
             </a:r>
           </a:p>
           <a:p>
             <a:r>
               <a:rPr sz="2400"/>
-              <a:t>J ファクター = 暗黒物質の密度の 2 乗を、視線方向に足し合わせた量</a:t>
+              <a:t>暗黒物質なら、矮小銀河からも同じ 20 GeV の光が来るはず</a:t>
             </a:r>
           </a:p>
           <a:p>
             <a:r>
               <a:rPr sz="2400"/>
-              <a:t>天の川と矮小銀河で粒子は同じ → 比をとると J の比だけが残る</a:t>
+              <a:t>同じ手法を、各天体のまわり半径 10° に使った</a:t>
             </a:r>
           </a:p>
           <a:p>
             <a:pPr lvl="1"/>
             <a:r>
               <a:rPr sz="2000"/>
-              <a:t>F_矮小 = F_天の川 × J_矮小 / J_天の川</a:t>
+              <a:t>矮小銀河 54 ＋ M31・M33 ＋ 何も無い空 23 か所</a:t>
             </a:r>
           </a:p>
           <a:p>
             <a:r>
               <a:rPr sz="2400"/>
-              <a:t>粒子の質量などを仮定せずに「何σ見えるはずか」が出る</a:t>
-            </a:r>
-          </a:p>
-          <a:p>
-            <a:r>
-              <a:rPr sz="2400"/>
-              <a:t>矮小銀河の J は、星の動きから推定する</a:t>
+              <a:t>矮小銀河は小さい（0.2〜0.4°）ので、広がった ICS とは縮退しない</a:t>
             </a:r>
           </a:p>
         </p:txBody>
@@ -8686,7 +8642,7 @@
             </a:r>
             <a:r>
               <a:rPr lang="en-US" sz="1400"/>
-              <a:t> A. B. Pace &amp; L. E. Strigari (2019), MNRAS 482, 3480</a:t>
+              <a:t> A. B. Pace (2025), Open J. Astrophys. 8, 142</a:t>
             </a:r>
             <a:endParaRPr lang="en-US"/>
           </a:p>
@@ -8734,45 +8690,85 @@
           <a:p>
             <a:r>
               <a:rPr sz="3400"/>
-              <a:t>結果：どこにも信号は見えなかった</a:t>
-            </a:r>
-          </a:p>
-        </p:txBody>
-      </p:sp>
-      <p:pic>
-        <p:nvPicPr>
-          <p:cNvPr id="3" name="Picture 2" descr="fig_dwarf_results.png"/>
-          <p:cNvPicPr>
-            <a:picLocks noChangeAspect="1"/>
-          </p:cNvPicPr>
-          <p:nvPr/>
-        </p:nvPicPr>
-        <p:blipFill>
-          <a:blip r:embed="rId3"/>
-          <a:stretch>
-            <a:fillRect/>
-          </a:stretch>
-        </p:blipFill>
+              <a:t>予測の立て方：J ファクター</a:t>
+            </a:r>
+          </a:p>
+        </p:txBody>
+      </p:sp>
+      <p:sp>
+        <p:nvSpPr>
+          <p:cNvPr id="3" name="Content Placeholder 2"/>
+          <p:cNvSpPr>
+            <a:spLocks noGrp="1"/>
+          </p:cNvSpPr>
+          <p:nvPr>
+            <p:ph idx="1"/>
+          </p:nvPr>
+        </p:nvSpPr>
         <p:spPr>
           <a:xfrm>
-            <a:off x="2194560" y="1234440"/>
-            <a:ext cx="7156174" cy="4114800"/>
+            <a:off x="841248" y="1463040"/>
+            <a:ext cx="10515600" cy="4114800"/>
           </a:xfrm>
-          <a:prstGeom prst="rect">
-            <a:avLst/>
-          </a:prstGeom>
         </p:spPr>
-      </p:pic>
-      <p:sp>
-        <p:nvSpPr>
-          <p:cNvPr id="4" name="TextBox 3"/>
+        <p:txBody>
+          <a:bodyPr/>
+          <a:lstStyle/>
+          <a:p>
+            <a:r>
+              <a:rPr sz="2400"/>
+              <a:t>対消滅の明るさ：F = ⟨σv⟩ / (8π m²) × dN/dE × J</a:t>
+            </a:r>
+          </a:p>
+          <a:p>
+            <a:r>
+              <a:rPr sz="2400"/>
+              <a:t>J ファクター = 暗黒物質の密度の 2 乗を、視線方向に足し合わせた量</a:t>
+            </a:r>
+          </a:p>
+          <a:p>
+            <a:r>
+              <a:rPr sz="2400"/>
+              <a:t>天の川と矮小銀河で粒子は同じ → 比をとると J の比だけが残る</a:t>
+            </a:r>
+          </a:p>
+          <a:p>
+            <a:pPr lvl="1"/>
+            <a:r>
+              <a:rPr sz="2000"/>
+              <a:t>F_矮小 = F_天の川 × J_矮小 / J_天の川</a:t>
+            </a:r>
+          </a:p>
+          <a:p>
+            <a:r>
+              <a:rPr sz="2400"/>
+              <a:t>粒子の質量などを仮定せずに「何σ見えるはずか」が出る</a:t>
+            </a:r>
+          </a:p>
+          <a:p>
+            <a:r>
+              <a:rPr sz="2400"/>
+              <a:t>矮小銀河の J は、星の動きから推定する</a:t>
+            </a:r>
+          </a:p>
+        </p:txBody>
+      </p:sp>
+      <p:sp>
+        <p:nvSpPr>
+          <p:cNvPr id="8" name="TextBox 7">
+            <a:extLst>
+              <a:ext uri="{FF2B5EF4-FFF2-40B4-BE49-F238E27FC236}">
+                <a16:creationId xmlns:a16="http://schemas.microsoft.com/office/drawing/2014/main" id="{F85CD606-E3CE-F314-B3EE-F3D7028115CB}"/>
+              </a:ext>
+            </a:extLst>
+          </p:cNvPr>
           <p:cNvSpPr txBox="1"/>
           <p:nvPr/>
         </p:nvSpPr>
         <p:spPr>
           <a:xfrm>
-            <a:off x="457200" y="5486400"/>
-            <a:ext cx="11247120" cy="457200"/>
+            <a:off x="5837182" y="5663239"/>
+            <a:ext cx="6093372" cy="923330"/>
           </a:xfrm>
           <a:prstGeom prst="rect">
             <a:avLst/>
@@ -8786,9 +8782,14 @@
           <a:lstStyle/>
           <a:p>
             <a:r>
-              <a:rPr sz="2000"/>
-              <a:t>どの天体・どのエネルギーでも最大 +3.46σ（何も無い空でも 4.50σ）</a:t>
-            </a:r>
+              <a:rPr lang="en-US" sz="1400" b="1"/>
+              <a:t>Reference:</a:t>
+            </a:r>
+            <a:r>
+              <a:rPr lang="en-US" sz="1400"/>
+              <a:t> A. B. Pace &amp; L. E. Strigari (2019), MNRAS 482, 3480</a:t>
+            </a:r>
+            <a:endParaRPr lang="en-US"/>
           </a:p>
         </p:txBody>
       </p:sp>
@@ -8834,71 +8835,60 @@
           <a:p>
             <a:r>
               <a:rPr sz="3400"/>
-              <a:t>天体をまとめて比べる</a:t>
-            </a:r>
-          </a:p>
-        </p:txBody>
-      </p:sp>
-      <p:sp>
-        <p:nvSpPr>
-          <p:cNvPr id="3" name="Content Placeholder 2"/>
-          <p:cNvSpPr>
-            <a:spLocks noGrp="1"/>
-          </p:cNvSpPr>
-          <p:nvPr>
-            <p:ph idx="1"/>
-          </p:nvPr>
-        </p:nvSpPr>
+              <a:t>結果：どこにも信号は見えなかった</a:t>
+            </a:r>
+          </a:p>
+        </p:txBody>
+      </p:sp>
+      <p:pic>
+        <p:nvPicPr>
+          <p:cNvPr id="3" name="Picture 2" descr="fig_dwarf_results.png"/>
+          <p:cNvPicPr>
+            <a:picLocks noChangeAspect="1"/>
+          </p:cNvPicPr>
+          <p:nvPr/>
+        </p:nvPicPr>
+        <p:blipFill>
+          <a:blip r:embed="rId3"/>
+          <a:stretch>
+            <a:fillRect/>
+          </a:stretch>
+        </p:blipFill>
         <p:spPr>
           <a:xfrm>
-            <a:off x="841248" y="1463040"/>
-            <a:ext cx="10515600" cy="4937760"/>
+            <a:off x="2194560" y="1234440"/>
+            <a:ext cx="7156174" cy="4114800"/>
           </a:xfrm>
+          <a:prstGeom prst="rect">
+            <a:avLst/>
+          </a:prstGeom>
         </p:spPr>
-        <p:txBody>
-          <a:bodyPr/>
-          <a:lstStyle/>
-          <a:p>
-            <a:r>
-              <a:rPr sz="2400"/>
-              <a:t>1 個ずつでは弱いので、J が求まる 43 天体をまとめる</a:t>
-            </a:r>
-          </a:p>
-          <a:p>
-            <a:r>
-              <a:rPr sz="2400"/>
-              <a:t>T = Σ w_i z_i / √( Σ w_i² )、重み w_i = 天体 i の予測 σ</a:t>
-            </a:r>
-          </a:p>
-          <a:p>
-            <a:pPr lvl="1"/>
+      </p:pic>
+      <p:sp>
+        <p:nvSpPr>
+          <p:cNvPr id="4" name="TextBox 3"/>
+          <p:cNvSpPr txBox="1"/>
+          <p:nvPr/>
+        </p:nvSpPr>
+        <p:spPr>
+          <a:xfrm>
+            <a:off x="457200" y="5486400"/>
+            <a:ext cx="11247120" cy="457200"/>
+          </a:xfrm>
+          <a:prstGeom prst="rect">
+            <a:avLst/>
+          </a:prstGeom>
+          <a:noFill/>
+        </p:spPr>
+        <p:txBody>
+          <a:bodyPr wrap="square">
+            <a:spAutoFit/>
+          </a:bodyPr>
+          <a:lstStyle/>
+          <a:p>
             <a:r>
               <a:rPr sz="2000"/>
-              <a:t>z_i：天体 i の実測の σ（20 GeV）</a:t>
-            </a:r>
-          </a:p>
-          <a:p>
-            <a:r>
-              <a:rPr sz="2400"/>
-              <a:t>暗黒物質が無ければ：T は平均 0、ばらつき 1</a:t>
-            </a:r>
-          </a:p>
-          <a:p>
-            <a:r>
-              <a:rPr sz="2400"/>
-              <a:t>暗黒物質があれば：T の平均 = √( Σ pred_i² ) = 1.77</a:t>
-            </a:r>
-          </a:p>
-          <a:p>
-            <a:r>
-              <a:rPr sz="2400"/>
-              <a:t>実測 T = 0.39 → ずれ 1.4σ</a:t>
-            </a:r>
-          </a:p>
-          <a:p>
-            <a:r>
-              <a:rPr sz="2400"/>
-              <a:t>ただし、ここでは J に誤差は無いとしていた</a:t>
+              <a:t>どの天体・どのエネルギーでも最大 +3.46σ（何も無い空でも 4.50σ）</a:t>
             </a:r>
           </a:p>
         </p:txBody>
@@ -8945,7 +8935,7 @@
           <a:p>
             <a:r>
               <a:rPr sz="3400"/>
-              <a:t>ここで論文：J の誤差は小さく見積もられている</a:t>
+              <a:t>天体をまとめて比べる</a:t>
             </a:r>
           </a:p>
         </p:txBody>
@@ -8963,7 +8953,7 @@
         <p:spPr>
           <a:xfrm>
             <a:off x="841248" y="1463040"/>
-            <a:ext cx="10515600" cy="4114800"/>
+            <a:ext cx="10515600" cy="4937760"/>
           </a:xfrm>
         </p:spPr>
         <p:txBody>
@@ -8972,81 +8962,45 @@
           <a:p>
             <a:r>
               <a:rPr sz="2400"/>
-              <a:t>文献ごとの J の値は、書かれた誤差よりも大きくばらつく</a:t>
+              <a:t>1 個ずつでは弱いので、J が求まる 43 天体をまとめる</a:t>
             </a:r>
           </a:p>
           <a:p>
             <a:r>
               <a:rPr sz="2400"/>
-              <a:t>見落とされがちな誤差の原因（8 つ）</a:t>
+              <a:t>T = Σ w_i z_i / √( Σ w_i² )、重み w_i = 天体 i の予測 σ</a:t>
             </a:r>
           </a:p>
           <a:p>
             <a:pPr lvl="1"/>
             <a:r>
               <a:rPr sz="2000"/>
-              <a:t>点として扱う・ハローの形・星の分布の形の仮定</a:t>
-            </a:r>
-          </a:p>
-          <a:p>
-            <a:pPr lvl="1"/>
-            <a:r>
-              <a:rPr sz="2000"/>
-              <a:t>非球対称（最大 0.4 dex）・非平衡（〜0.1）・連星（Ret II で〜0.3）</a:t>
-            </a:r>
-          </a:p>
-          <a:p>
-            <a:pPr lvl="1"/>
-            <a:r>
-              <a:rPr sz="2000"/>
-              <a:t>前景の星の混入・誤差の分布が正規分布でない</a:t>
+              <a:t>z_i：天体 i の実測の σ（20 GeV）</a:t>
             </a:r>
           </a:p>
           <a:p>
             <a:r>
               <a:rPr sz="2400"/>
-              <a:t>Δlog₁₀J ≈ 0.5（約 3 倍）以上の誤差を見込むべき</a:t>
-            </a:r>
-          </a:p>
-        </p:txBody>
-      </p:sp>
-      <p:sp>
-        <p:nvSpPr>
-          <p:cNvPr id="8" name="TextBox 7">
-            <a:extLst>
-              <a:ext uri="{FF2B5EF4-FFF2-40B4-BE49-F238E27FC236}">
-                <a16:creationId xmlns:a16="http://schemas.microsoft.com/office/drawing/2014/main" id="{F85CD606-E3CE-F314-B3EE-F3D7028115CB}"/>
-              </a:ext>
-            </a:extLst>
-          </p:cNvPr>
-          <p:cNvSpPr txBox="1"/>
-          <p:nvPr/>
-        </p:nvSpPr>
-        <p:spPr>
-          <a:xfrm>
-            <a:off x="5837182" y="5663239"/>
-            <a:ext cx="6093372" cy="923330"/>
-          </a:xfrm>
-          <a:prstGeom prst="rect">
-            <a:avLst/>
-          </a:prstGeom>
-          <a:noFill/>
-        </p:spPr>
-        <p:txBody>
-          <a:bodyPr wrap="square">
-            <a:spAutoFit/>
-          </a:bodyPr>
-          <a:lstStyle/>
-          <a:p>
-            <a:r>
-              <a:rPr lang="en-US" sz="1400" b="1"/>
-              <a:t>Reference:</a:t>
-            </a:r>
-            <a:r>
-              <a:rPr lang="en-US" sz="1400"/>
-              <a:t> Bertólez-Martínez, Hooper &amp; Khatee Zathul (2026), arXiv:2609.20944 §II</a:t>
-            </a:r>
-            <a:endParaRPr lang="en-US"/>
+              <a:t>暗黒物質が無ければ：T は平均 0、ばらつき 1</a:t>
+            </a:r>
+          </a:p>
+          <a:p>
+            <a:r>
+              <a:rPr sz="2400"/>
+              <a:t>暗黒物質があれば：T の平均 = √( Σ pred_i² ) = 1.77</a:t>
+            </a:r>
+          </a:p>
+          <a:p>
+            <a:r>
+              <a:rPr sz="2400"/>
+              <a:t>実測 T = 0.39 → ずれ 1.4σ</a:t>
+            </a:r>
+          </a:p>
+          <a:p>
+            <a:r>
+              <a:rPr sz="2400"/>
+              <a:t>ただし、ここでは J に誤差は無いとしていた</a:t>
+            </a:r>
           </a:p>
         </p:txBody>
       </p:sp>
@@ -9092,7 +9046,7 @@
           <a:p>
             <a:r>
               <a:rPr sz="3400"/>
-              <a:t>詳細なmethodについて①：仮想データの作り方</a:t>
+              <a:t>ここで論文：J の誤差は小さく見積もられている</a:t>
             </a:r>
           </a:p>
         </p:txBody>
@@ -9118,47 +9072,41 @@
           <a:lstStyle/>
           <a:p>
             <a:r>
-              <a:rPr sz="2200"/>
-              <a:t>Fermi-LAT の観測を計算機の中で作る（FermiTools、fermipy）</a:t>
+              <a:rPr sz="2400"/>
+              <a:t>文献ごとの J の値は、書かれた誤差よりも大きくばらつく</a:t>
+            </a:r>
+          </a:p>
+          <a:p>
+            <a:r>
+              <a:rPr sz="2400"/>
+              <a:t>見落とされがちな誤差の原因（8 つ）</a:t>
             </a:r>
           </a:p>
           <a:p>
             <a:pPr lvl="1"/>
             <a:r>
-              <a:rPr sz="1800"/>
-              <a:t>17.4 年分、0.5 GeV〜1 TeV、10° × 10° の領域、0.08° の画素</a:t>
-            </a:r>
-          </a:p>
-          <a:p>
-            <a:r>
-              <a:rPr sz="2200"/>
-              <a:t>背景：銀河の拡散光＋等方の光から、ポアソン乱数で光子を作る</a:t>
-            </a:r>
-          </a:p>
-          <a:p>
-            <a:r>
-              <a:rPr sz="2200"/>
-              <a:t>暗黒物質の信号を入れる</a:t>
+              <a:rPr sz="2000"/>
+              <a:t>点として扱う・ハローの形・星の分布の形の仮定</a:t>
             </a:r>
           </a:p>
           <a:p>
             <a:pPr lvl="1"/>
             <a:r>
-              <a:rPr sz="1800"/>
-              <a:t>質量 42 GeV、b クォーク対、⟨σv⟩ = 1.4 × 10⁻²⁶ cm³/s</a:t>
+              <a:rPr sz="2000"/>
+              <a:t>非球対称（最大 0.4 dex）・非平衡（〜0.1）・連星（Ret II で〜0.3）</a:t>
             </a:r>
           </a:p>
           <a:p>
             <a:pPr lvl="1"/>
             <a:r>
-              <a:rPr sz="1800"/>
-              <a:t>銀河中心 GeV 超過（GCE）に合う値</a:t>
-            </a:r>
-          </a:p>
-          <a:p>
-            <a:r>
-              <a:rPr sz="2200"/>
-              <a:t>対象：Ursa Minor 1 個と、27 個の矮小銀河</a:t>
+              <a:rPr sz="2000"/>
+              <a:t>前景の星の混入・誤差の分布が正規分布でない</a:t>
+            </a:r>
+          </a:p>
+          <a:p>
+            <a:r>
+              <a:rPr sz="2400"/>
+              <a:t>Δlog₁₀J ≈ 0.5（約 3 倍）以上の誤差を見込むべき</a:t>
             </a:r>
           </a:p>
         </p:txBody>
@@ -9197,7 +9145,7 @@
             </a:r>
             <a:r>
               <a:rPr lang="en-US" sz="1400"/>
-              <a:t> Bertólez-Martínez, Hooper &amp; Khatee Zathul (2026), arXiv:2609.20944 §III</a:t>
+              <a:t> Bertólez-Martínez, Hooper &amp; Khatee Zathul (2026), arXiv:2609.20944 §II</a:t>
             </a:r>
             <a:endParaRPr lang="en-US"/>
           </a:p>
@@ -9245,7 +9193,7 @@
           <a:p>
             <a:r>
               <a:rPr sz="3400"/>
-              <a:t>詳細なmethodについて②：尤度と 2 つの誤差</a:t>
+              <a:t>詳細なmethodについて①：仮想データの作り方</a:t>
             </a:r>
           </a:p>
         </p:txBody>
@@ -9272,46 +9220,46 @@
           <a:p>
             <a:r>
               <a:rPr sz="2200"/>
-              <a:t>各天体の尤度 = 光子のポアソン尤度 × J の尤度</a:t>
+              <a:t>Fermi-LAT の観測を計算機の中で作る（FermiTools、fermipy）</a:t>
             </a:r>
           </a:p>
           <a:p>
             <a:pPr lvl="1"/>
             <a:r>
               <a:rPr sz="1800"/>
-              <a:t>L_J ∝ exp[ −(log₁₀J − log₁₀J_obs)² / 2σ_L² ]</a:t>
+              <a:t>17.4 年分、0.5 GeV〜1 TeV、10° × 10° の領域、0.08° の画素</a:t>
             </a:r>
           </a:p>
           <a:p>
             <a:r>
               <a:rPr sz="2200"/>
-              <a:t>27 個は尤度の積でまとめる（⟨σv⟩ は共通、J は天体ごと）</a:t>
+              <a:t>背景：銀河の拡散光＋等方の光から、ポアソン乱数で光子を作る</a:t>
             </a:r>
           </a:p>
           <a:p>
             <a:r>
               <a:rPr sz="2200"/>
-              <a:t>2 つの誤差を分けて動かす</a:t>
+              <a:t>暗黒物質の信号を入れる</a:t>
             </a:r>
           </a:p>
           <a:p>
             <a:pPr lvl="1"/>
             <a:r>
               <a:rPr sz="1800"/>
-              <a:t>σ：J の本当のばらつき（J_obs を J_true のまわりに σ でばらつかせる）</a:t>
+              <a:t>質量 42 GeV、b クォーク対、⟨σv⟩ = 1.4 × 10⁻²⁶ cm³/s</a:t>
             </a:r>
           </a:p>
           <a:p>
             <a:pPr lvl="1"/>
             <a:r>
               <a:rPr sz="1800"/>
-              <a:t>σ_L：解析で仮定する幅</a:t>
+              <a:t>銀河中心 GeV 超過（GCE）に合う値</a:t>
             </a:r>
           </a:p>
           <a:p>
             <a:r>
               <a:rPr sz="2200"/>
-              <a:t>95% 上限：TS が最大値から 2.71 下がる点（Wilks の定理を仮定）</a:t>
+              <a:t>対象：Ursa Minor 1 個と、27 個の矮小銀河</a:t>
             </a:r>
           </a:p>
         </p:txBody>
@@ -9350,7 +9298,7 @@
             </a:r>
             <a:r>
               <a:rPr lang="en-US" sz="1400"/>
-              <a:t> Bertólez-Martínez, Hooper &amp; Khatee Zathul (2026), arXiv:2609.20944 式 (6)–(10)</a:t>
+              <a:t> Bertólez-Martínez, Hooper &amp; Khatee Zathul (2026), arXiv:2609.20944 §III</a:t>
             </a:r>
             <a:endParaRPr lang="en-US"/>
           </a:p>
@@ -9398,7 +9346,7 @@
           <a:p>
             <a:r>
               <a:rPr sz="3400"/>
-              <a:t>詳細なmethodについて③：何を数えたか</a:t>
+              <a:t>詳細なmethodについて②：尤度と 2 つの誤差</a:t>
             </a:r>
           </a:p>
         </p:txBody>
@@ -9424,40 +9372,47 @@
           <a:lstStyle/>
           <a:p>
             <a:r>
-              <a:rPr sz="2400"/>
-              <a:t>本物の信号を入れた仮想データを何度も作る</a:t>
+              <a:rPr sz="2200"/>
+              <a:t>各天体の尤度 = 光子のポアソン尤度 × J の尤度</a:t>
             </a:r>
           </a:p>
           <a:p>
             <a:pPr lvl="1"/>
             <a:r>
-              <a:rPr sz="2000"/>
-              <a:t>Ursa Minor で 1000 回（基準の設定では 1 万回）</a:t>
-            </a:r>
-          </a:p>
-          <a:p>
-            <a:r>
-              <a:rPr sz="2400"/>
-              <a:t>それぞれで 95% 上限を出す</a:t>
-            </a:r>
-          </a:p>
-          <a:p>
-            <a:r>
-              <a:rPr sz="2400"/>
-              <a:t>上限が本物の ⟨σv⟩ より下 =「本物を無いと間違えた」</a:t>
-            </a:r>
-          </a:p>
-          <a:p>
-            <a:r>
-              <a:rPr sz="2400"/>
-              <a:t>95% 上限なら、間違いは 5% 以下のはず</a:t>
+              <a:rPr sz="1800"/>
+              <a:t>L_J ∝ exp[ −(log₁₀J − log₁₀J_obs)² / 2σ_L² ]</a:t>
+            </a:r>
+          </a:p>
+          <a:p>
+            <a:r>
+              <a:rPr sz="2200"/>
+              <a:t>27 個は尤度の積でまとめる（⟨σv⟩ は共通、J は天体ごと）</a:t>
+            </a:r>
+          </a:p>
+          <a:p>
+            <a:r>
+              <a:rPr sz="2200"/>
+              <a:t>2 つの誤差を分けて動かす</a:t>
             </a:r>
           </a:p>
           <a:p>
             <a:pPr lvl="1"/>
             <a:r>
-              <a:rPr sz="2000"/>
-              <a:t>これが守られているか（カバレッジ）を調べる</a:t>
+              <a:rPr sz="1800"/>
+              <a:t>σ：J の本当のばらつき（J_obs を J_true のまわりに σ でばらつかせる）</a:t>
+            </a:r>
+          </a:p>
+          <a:p>
+            <a:pPr lvl="1"/>
+            <a:r>
+              <a:rPr sz="1800"/>
+              <a:t>σ_L：解析で仮定する幅</a:t>
+            </a:r>
+          </a:p>
+          <a:p>
+            <a:r>
+              <a:rPr sz="2200"/>
+              <a:t>95% 上限：TS が最大値から 2.71 下がる点（Wilks の定理を仮定）</a:t>
             </a:r>
           </a:p>
         </p:txBody>
@@ -9496,7 +9451,7 @@
             </a:r>
             <a:r>
               <a:rPr lang="en-US" sz="1400"/>
-              <a:t> Bertólez-Martínez, Hooper &amp; Khatee Zathul (2026), arXiv:2609.20944 §IV</a:t>
+              <a:t> Bertólez-Martínez, Hooper &amp; Khatee Zathul (2026), arXiv:2609.20944 式 (6)–(10)</a:t>
             </a:r>
             <a:endParaRPr lang="en-US"/>
           </a:p>
@@ -9544,7 +9499,7 @@
           <a:p>
             <a:r>
               <a:rPr sz="3400"/>
-              <a:t>論文の結果①：Ursa Minor 1 個</a:t>
+              <a:t>詳細なmethodについて③：何を数えたか</a:t>
             </a:r>
           </a:p>
         </p:txBody>
@@ -9571,47 +9526,39 @@
           <a:p>
             <a:r>
               <a:rPr sz="2400"/>
-              <a:t>σ_L を 0.3 / 0.5 / 1.0 だけ大きくすると</a:t>
+              <a:t>本物の信号を入れた仮想データを何度も作る</a:t>
             </a:r>
           </a:p>
           <a:p>
             <a:pPr lvl="1"/>
             <a:r>
               <a:rPr sz="2000"/>
-              <a:t>上限が 1.5 / 2.5 / 11 倍ゆるくなる</a:t>
+              <a:t>Ursa Minor で 1000 回（基準の設定では 1 万回）</a:t>
             </a:r>
           </a:p>
           <a:p>
             <a:r>
               <a:rPr sz="2400"/>
-              <a:t>本当の誤差 σ だけ大きく、σ_L は小さいままだと</a:t>
+              <a:t>それぞれで 95% 上限を出す</a:t>
+            </a:r>
+          </a:p>
+          <a:p>
+            <a:r>
+              <a:rPr sz="2400"/>
+              <a:t>上限が本物の ⟨σv⟩ より下 =「本物を無いと間違えた」</a:t>
+            </a:r>
+          </a:p>
+          <a:p>
+            <a:r>
+              <a:rPr sz="2400"/>
+              <a:t>95% 上限なら、間違いは 5% 以下のはず</a:t>
             </a:r>
           </a:p>
           <a:p>
             <a:pPr lvl="1"/>
             <a:r>
               <a:rPr sz="2000"/>
-              <a:t>本物を除外する割合 1.7% / 8.0% / 22%</a:t>
-            </a:r>
-          </a:p>
-          <a:p>
-            <a:pPr lvl="1"/>
-            <a:r>
-              <a:rPr sz="2000"/>
-              <a:t>σ_L を σ に合わせれば 5% 以下に戻る</a:t>
-            </a:r>
-          </a:p>
-          <a:p>
-            <a:r>
-              <a:rPr sz="2400"/>
-              <a:t>形の間違い：球対称 NFW で解析 → 上限 2.4 倍厳しく</a:t>
-            </a:r>
-          </a:p>
-          <a:p>
-            <a:pPr lvl="1"/>
-            <a:r>
-              <a:rPr sz="2000"/>
-              <a:t>点として扱う → 1.4 倍厳しく</a:t>
+              <a:t>これが守られているか（カバレッジ）を調べる</a:t>
             </a:r>
           </a:p>
         </p:txBody>
@@ -9650,7 +9597,7 @@
             </a:r>
             <a:r>
               <a:rPr lang="en-US" sz="1400"/>
-              <a:t> Bertólez-Martínez, Hooper &amp; Khatee Zathul (2026), arXiv:2609.20944 §IV, Fig. 2–4</a:t>
+              <a:t> Bertólez-Martínez, Hooper &amp; Khatee Zathul (2026), arXiv:2609.20944 §IV</a:t>
             </a:r>
             <a:endParaRPr lang="en-US"/>
           </a:p>
@@ -9698,7 +9645,7 @@
           <a:p>
             <a:r>
               <a:rPr sz="3400"/>
-              <a:t>論文の結果②：27 個をまとめると</a:t>
+              <a:t>論文の結果①：Ursa Minor 1 個</a:t>
             </a:r>
           </a:p>
         </p:txBody>
@@ -9724,46 +9671,48 @@
           <a:lstStyle/>
           <a:p>
             <a:r>
-              <a:rPr sz="2200"/>
-              <a:t>σ_L を 0.3 / 0.5 / 1.0 → 上限 1.14 / 1.44 / 3.23 倍ゆるく</a:t>
-            </a:r>
-          </a:p>
-          <a:p>
-            <a:r>
-              <a:rPr sz="2200"/>
-              <a:t>誤差を正しく入れても、本物を除外する割合 21%（5% のはず）</a:t>
+              <a:rPr sz="2400"/>
+              <a:t>σ_L を 0.3 / 0.5 / 1.0 だけ大きくすると</a:t>
             </a:r>
           </a:p>
           <a:p>
             <a:pPr lvl="1"/>
             <a:r>
-              <a:rPr sz="1800"/>
-              <a:t>J の数が天体の数と一緒に増え、Wilks の定理の前提が崩れる</a:t>
-            </a:r>
-          </a:p>
-          <a:p>
-            <a:r>
-              <a:rPr sz="2200"/>
-              <a:t>本当の誤差を 0.3 / 0.5 / 1.0 大きくすると 31% / 49% / 88%</a:t>
+              <a:rPr sz="2000"/>
+              <a:t>上限が 1.5 / 2.5 / 11 倍ゆるくなる</a:t>
+            </a:r>
+          </a:p>
+          <a:p>
+            <a:r>
+              <a:rPr sz="2400"/>
+              <a:t>本当の誤差 σ だけ大きく、σ_L は小さいままだと</a:t>
             </a:r>
           </a:p>
           <a:p>
             <a:pPr lvl="1"/>
             <a:r>
-              <a:rPr sz="1800"/>
-              <a:t>σ_L を合わせても 23% / 28% / 38%</a:t>
-            </a:r>
-          </a:p>
-          <a:p>
-            <a:r>
-              <a:rPr sz="2200"/>
-              <a:t>原因：J が上に振れた天体が、上限を決めてしまう</a:t>
-            </a:r>
-          </a:p>
-          <a:p>
-            <a:r>
-              <a:rPr sz="2200"/>
-              <a:t>対策の一つ：何も無い領域で較正する</a:t>
+              <a:rPr sz="2000"/>
+              <a:t>本物を除外する割合 1.7% / 8.0% / 22%</a:t>
+            </a:r>
+          </a:p>
+          <a:p>
+            <a:pPr lvl="1"/>
+            <a:r>
+              <a:rPr sz="2000"/>
+              <a:t>σ_L を σ に合わせれば 5% 以下に戻る</a:t>
+            </a:r>
+          </a:p>
+          <a:p>
+            <a:r>
+              <a:rPr sz="2400"/>
+              <a:t>形の間違い：球対称 NFW で解析 → 上限 2.4 倍厳しく</a:t>
+            </a:r>
+          </a:p>
+          <a:p>
+            <a:pPr lvl="1"/>
+            <a:r>
+              <a:rPr sz="2000"/>
+              <a:t>点として扱う → 1.4 倍厳しく</a:t>
             </a:r>
           </a:p>
         </p:txBody>
@@ -9802,7 +9751,7 @@
             </a:r>
             <a:r>
               <a:rPr lang="en-US" sz="1400"/>
-              <a:t> Bertólez-Martínez, Hooper &amp; Khatee Zathul (2026), arXiv:2609.20944 §V, Fig. 5–7</a:t>
+              <a:t> Bertólez-Martínez, Hooper &amp; Khatee Zathul (2026), arXiv:2609.20944 §IV, Fig. 2–4</a:t>
             </a:r>
             <a:endParaRPr lang="en-US"/>
           </a:p>
@@ -10086,7 +10035,7 @@
           <a:p>
             <a:r>
               <a:rPr sz="3400"/>
-              <a:t>論文のまとめ</a:t>
+              <a:t>論文の結果②：27 個をまとめると</a:t>
             </a:r>
           </a:p>
         </p:txBody>
@@ -10112,20 +10061,46 @@
           <a:lstStyle/>
           <a:p>
             <a:r>
-              <a:rPr sz="2400"/>
-              <a:t>J の誤差や形を雑に扱うと、上限は厳しく出すぎ、本物の信号を除外しやすい</a:t>
-            </a:r>
-          </a:p>
-          <a:p>
-            <a:r>
-              <a:rPr sz="2400"/>
-              <a:t>「銀河中心と矮小銀河が矛盾する」とは、まだ言えない</a:t>
-            </a:r>
-          </a:p>
-          <a:p>
-            <a:r>
-              <a:rPr sz="2400"/>
-              <a:t>Δlog₁₀J ≈ 0.5 程度の誤差を見込むべき</a:t>
+              <a:rPr sz="2200"/>
+              <a:t>σ_L を 0.3 / 0.5 / 1.0 → 上限 1.14 / 1.44 / 3.23 倍ゆるく</a:t>
+            </a:r>
+          </a:p>
+          <a:p>
+            <a:r>
+              <a:rPr sz="2200"/>
+              <a:t>誤差を正しく入れても、本物を除外する割合 21%（5% のはず）</a:t>
+            </a:r>
+          </a:p>
+          <a:p>
+            <a:pPr lvl="1"/>
+            <a:r>
+              <a:rPr sz="1800"/>
+              <a:t>J の数が天体の数と一緒に増え、Wilks の定理の前提が崩れる</a:t>
+            </a:r>
+          </a:p>
+          <a:p>
+            <a:r>
+              <a:rPr sz="2200"/>
+              <a:t>本当の誤差を 0.3 / 0.5 / 1.0 大きくすると 31% / 49% / 88%</a:t>
+            </a:r>
+          </a:p>
+          <a:p>
+            <a:pPr lvl="1"/>
+            <a:r>
+              <a:rPr sz="1800"/>
+              <a:t>σ_L を合わせても 23% / 28% / 38%</a:t>
+            </a:r>
+          </a:p>
+          <a:p>
+            <a:r>
+              <a:rPr sz="2200"/>
+              <a:t>原因：J が上に振れた天体が、上限を決めてしまう</a:t>
+            </a:r>
+          </a:p>
+          <a:p>
+            <a:r>
+              <a:rPr sz="2200"/>
+              <a:t>対策の一つ：何も無い領域で較正する</a:t>
             </a:r>
           </a:p>
         </p:txBody>
@@ -10164,7 +10139,7 @@
             </a:r>
             <a:r>
               <a:rPr lang="en-US" sz="1400"/>
-              <a:t> Bertólez-Martínez, Hooper &amp; Khatee Zathul (2026), arXiv:2609.20944 §VI</a:t>
+              <a:t> Bertólez-Martínez, Hooper &amp; Khatee Zathul (2026), arXiv:2609.20944 §V, Fig. 5–7</a:t>
             </a:r>
             <a:endParaRPr lang="en-US"/>
           </a:p>
@@ -10212,7 +10187,7 @@
           <a:p>
             <a:r>
               <a:rPr sz="3400"/>
-              <a:t>論文の考え方を、僕の結果に当てはめる</a:t>
+              <a:t>論文のまとめ</a:t>
             </a:r>
           </a:p>
         </p:txBody>
@@ -10239,39 +10214,19 @@
           <a:p>
             <a:r>
               <a:rPr sz="2400"/>
-              <a:t>これまで：J の誤差 = 0（J は推定値そのまま）</a:t>
+              <a:t>J の誤差や形を雑に扱うと、上限は厳しく出すぎ、本物の信号を除外しやすい</a:t>
             </a:r>
           </a:p>
           <a:p>
             <a:r>
               <a:rPr sz="2400"/>
-              <a:t>今回：各天体の本当の J = 推定値 × 10^δ_i</a:t>
-            </a:r>
-          </a:p>
-          <a:p>
-            <a:pPr lvl="1"/>
-            <a:r>
-              <a:rPr sz="2000"/>
-              <a:t>δ_i は平均 0、幅 0.5 の正規分布（天体ごとに独立）</a:t>
-            </a:r>
-          </a:p>
-          <a:p>
-            <a:pPr lvl="1"/>
-            <a:r>
-              <a:rPr sz="2000"/>
-              <a:t>→ J がおよそ 1/3 倍〜3 倍の範囲でずれる</a:t>
+              <a:t>「銀河中心と矮小銀河が矛盾する」とは、まだ言えない</a:t>
             </a:r>
           </a:p>
           <a:p>
             <a:r>
               <a:rPr sz="2400"/>
-              <a:t>予測 σ は J に比例 → pred_i × 10^δ_i</a:t>
-            </a:r>
-          </a:p>
-          <a:p>
-            <a:r>
-              <a:rPr sz="2400"/>
-              <a:t>論文と同じく「J をずらした世界」をたくさん作る（20 万回）</a:t>
+              <a:t>Δlog₁₀J ≈ 0.5 程度の誤差を見込むべき</a:t>
             </a:r>
           </a:p>
         </p:txBody>
@@ -10310,7 +10265,7 @@
             </a:r>
             <a:r>
               <a:rPr lang="en-US" sz="1400"/>
-              <a:t> Bertólez-Martínez, Hooper &amp; Khatee Zathul (2026), arXiv:2609.20944 §IV</a:t>
+              <a:t> Bertólez-Martínez, Hooper &amp; Khatee Zathul (2026), arXiv:2609.20944 §VI</a:t>
             </a:r>
             <a:endParaRPr lang="en-US"/>
           </a:p>
@@ -10358,7 +10313,7 @@
           <a:p>
             <a:r>
               <a:rPr sz="3400"/>
-              <a:t>有意度の計算式のどこに誤差が入るか</a:t>
+              <a:t>論文の考え方を、僕の結果に当てはめる</a:t>
             </a:r>
           </a:p>
         </p:txBody>
@@ -10376,7 +10331,7 @@
         <p:spPr>
           <a:xfrm>
             <a:off x="841248" y="1463040"/>
-            <a:ext cx="10515600" cy="4937760"/>
+            <a:ext cx="10515600" cy="4114800"/>
           </a:xfrm>
         </p:spPr>
         <p:txBody>
@@ -10385,47 +10340,80 @@
           <a:p>
             <a:r>
               <a:rPr sz="2400"/>
-              <a:t>暗黒物質ありで期待される T</a:t>
+              <a:t>これまで：J の誤差 = 0（J は推定値そのまま）</a:t>
+            </a:r>
+          </a:p>
+          <a:p>
+            <a:r>
+              <a:rPr sz="2400"/>
+              <a:t>今回：各天体の本当の J = 推定値 × 10^δ_i</a:t>
             </a:r>
           </a:p>
           <a:p>
             <a:pPr lvl="1"/>
             <a:r>
               <a:rPr sz="2000"/>
-              <a:t>誤差なし：E[T] = Σ w_i pred_i / √Σ w_i² = 1.77</a:t>
+              <a:t>δ_i は平均 0、幅 0.5 の正規分布（天体ごとに独立）</a:t>
             </a:r>
           </a:p>
           <a:p>
             <a:pPr lvl="1"/>
             <a:r>
               <a:rPr sz="2000"/>
-              <a:t>誤差あり：E[T] = Σ w_i pred_i 10^δ_i / √Σ w_i²  ← δ でばらつく</a:t>
+              <a:t>→ J がおよそ 1/3 倍〜3 倍の範囲でずれる</a:t>
             </a:r>
           </a:p>
           <a:p>
             <a:r>
               <a:rPr sz="2400"/>
-              <a:t>実測 T にも測定の揺れ s がある（s = 1、または空で測った 1.26）</a:t>
+              <a:t>予測 σ は J に比例 → pred_i × 10^δ_i</a:t>
             </a:r>
           </a:p>
           <a:p>
             <a:r>
               <a:rPr sz="2400"/>
-              <a:t>暗黒物質ありで、実測 0.39 以下になる確率</a:t>
-            </a:r>
-          </a:p>
-          <a:p>
-            <a:pPr lvl="1"/>
-            <a:r>
-              <a:rPr sz="2000"/>
-              <a:t>p = （δ について平均）Φ( (0.39 − E[T]) / s )</a:t>
-            </a:r>
-          </a:p>
-          <a:p>
-            <a:r>
-              <a:rPr sz="2400"/>
-              <a:t>p を σ に直したもの =「ずれ」</a:t>
-            </a:r>
+              <a:t>論文と同じく「J をずらした世界」をたくさん作る（20 万回）</a:t>
+            </a:r>
+          </a:p>
+        </p:txBody>
+      </p:sp>
+      <p:sp>
+        <p:nvSpPr>
+          <p:cNvPr id="8" name="TextBox 7">
+            <a:extLst>
+              <a:ext uri="{FF2B5EF4-FFF2-40B4-BE49-F238E27FC236}">
+                <a16:creationId xmlns:a16="http://schemas.microsoft.com/office/drawing/2014/main" id="{F85CD606-E3CE-F314-B3EE-F3D7028115CB}"/>
+              </a:ext>
+            </a:extLst>
+          </p:cNvPr>
+          <p:cNvSpPr txBox="1"/>
+          <p:nvPr/>
+        </p:nvSpPr>
+        <p:spPr>
+          <a:xfrm>
+            <a:off x="5837182" y="5663239"/>
+            <a:ext cx="6093372" cy="923330"/>
+          </a:xfrm>
+          <a:prstGeom prst="rect">
+            <a:avLst/>
+          </a:prstGeom>
+          <a:noFill/>
+        </p:spPr>
+        <p:txBody>
+          <a:bodyPr wrap="square">
+            <a:spAutoFit/>
+          </a:bodyPr>
+          <a:lstStyle/>
+          <a:p>
+            <a:r>
+              <a:rPr lang="en-US" sz="1400" b="1"/>
+              <a:t>Reference:</a:t>
+            </a:r>
+            <a:r>
+              <a:rPr lang="en-US" sz="1400"/>
+              <a:t> Bertólez-Martínez, Hooper &amp; Khatee Zathul (2026), arXiv:2609.20944 §IV</a:t>
+            </a:r>
+            <a:endParaRPr lang="en-US"/>
           </a:p>
         </p:txBody>
       </p:sp>
@@ -10471,6 +10459,119 @@
           <a:p>
             <a:r>
               <a:rPr sz="3400"/>
+              <a:t>有意度の計算式のどこに誤差が入るか</a:t>
+            </a:r>
+          </a:p>
+        </p:txBody>
+      </p:sp>
+      <p:sp>
+        <p:nvSpPr>
+          <p:cNvPr id="3" name="Content Placeholder 2"/>
+          <p:cNvSpPr>
+            <a:spLocks noGrp="1"/>
+          </p:cNvSpPr>
+          <p:nvPr>
+            <p:ph idx="1"/>
+          </p:nvPr>
+        </p:nvSpPr>
+        <p:spPr>
+          <a:xfrm>
+            <a:off x="841248" y="1463040"/>
+            <a:ext cx="10515600" cy="4937760"/>
+          </a:xfrm>
+        </p:spPr>
+        <p:txBody>
+          <a:bodyPr/>
+          <a:lstStyle/>
+          <a:p>
+            <a:r>
+              <a:rPr sz="2400"/>
+              <a:t>暗黒物質ありで期待される T</a:t>
+            </a:r>
+          </a:p>
+          <a:p>
+            <a:pPr lvl="1"/>
+            <a:r>
+              <a:rPr sz="2000"/>
+              <a:t>誤差なし：E[T] = Σ w_i pred_i / √Σ w_i² = 1.77</a:t>
+            </a:r>
+          </a:p>
+          <a:p>
+            <a:pPr lvl="1"/>
+            <a:r>
+              <a:rPr sz="2000"/>
+              <a:t>誤差あり：E[T] = Σ w_i pred_i 10^δ_i / √Σ w_i²  ← δ でばらつく</a:t>
+            </a:r>
+          </a:p>
+          <a:p>
+            <a:r>
+              <a:rPr sz="2400"/>
+              <a:t>実測 T にも測定の揺れ s がある（s = 1、または空で測った 1.26）</a:t>
+            </a:r>
+          </a:p>
+          <a:p>
+            <a:r>
+              <a:rPr sz="2400"/>
+              <a:t>暗黒物質ありで、実測 0.39 以下になる確率</a:t>
+            </a:r>
+          </a:p>
+          <a:p>
+            <a:pPr lvl="1"/>
+            <a:r>
+              <a:rPr sz="2000"/>
+              <a:t>p = （δ について平均）Φ( (0.39 − E[T]) / s )</a:t>
+            </a:r>
+          </a:p>
+          <a:p>
+            <a:r>
+              <a:rPr sz="2400"/>
+              <a:t>p を σ に直したもの =「ずれ」</a:t>
+            </a:r>
+          </a:p>
+        </p:txBody>
+      </p:sp>
+    </p:spTree>
+  </p:cSld>
+  <p:clrMapOvr>
+    <a:masterClrMapping/>
+  </p:clrMapOvr>
+</p:sld>
+</file>
+
+<file path=ppt/slides/slide34.xml><?xml version="1.0" encoding="utf-8"?>
+<p:sld xmlns:a="http://schemas.openxmlformats.org/drawingml/2006/main" xmlns:r="http://schemas.openxmlformats.org/officeDocument/2006/relationships" xmlns:p="http://schemas.openxmlformats.org/presentationml/2006/main">
+  <p:cSld>
+    <p:spTree>
+      <p:nvGrpSpPr>
+        <p:cNvPr id="1" name=""/>
+        <p:cNvGrpSpPr/>
+        <p:nvPr/>
+      </p:nvGrpSpPr>
+      <p:grpSpPr>
+        <a:xfrm>
+          <a:off x="0" y="0"/>
+          <a:ext cx="0" cy="0"/>
+          <a:chOff x="0" y="0"/>
+          <a:chExt cx="0" cy="0"/>
+        </a:xfrm>
+      </p:grpSpPr>
+      <p:sp>
+        <p:nvSpPr>
+          <p:cNvPr id="2" name="Title 1"/>
+          <p:cNvSpPr>
+            <a:spLocks noGrp="1"/>
+          </p:cNvSpPr>
+          <p:nvPr>
+            <p:ph type="title"/>
+          </p:nvPr>
+        </p:nvSpPr>
+        <p:spPr/>
+        <p:txBody>
+          <a:bodyPr/>
+          <a:lstStyle/>
+          <a:p>
+            <a:r>
+              <a:rPr sz="3400"/>
               <a:t>結果：予測の幅と実測</a:t>
             </a:r>
           </a:p>
@@ -10538,113 +10639,6 @@
 </p:sld>
 </file>
 
-<file path=ppt/slides/slide34.xml><?xml version="1.0" encoding="utf-8"?>
-<p:sld xmlns:a="http://schemas.openxmlformats.org/drawingml/2006/main" xmlns:r="http://schemas.openxmlformats.org/officeDocument/2006/relationships" xmlns:p="http://schemas.openxmlformats.org/presentationml/2006/main">
-  <p:cSld>
-    <p:spTree>
-      <p:nvGrpSpPr>
-        <p:cNvPr id="1" name=""/>
-        <p:cNvGrpSpPr/>
-        <p:nvPr/>
-      </p:nvGrpSpPr>
-      <p:grpSpPr>
-        <a:xfrm>
-          <a:off x="0" y="0"/>
-          <a:ext cx="0" cy="0"/>
-          <a:chOff x="0" y="0"/>
-          <a:chExt cx="0" cy="0"/>
-        </a:xfrm>
-      </p:grpSpPr>
-      <p:sp>
-        <p:nvSpPr>
-          <p:cNvPr id="2" name="Title 1"/>
-          <p:cNvSpPr>
-            <a:spLocks noGrp="1"/>
-          </p:cNvSpPr>
-          <p:nvPr>
-            <p:ph type="title"/>
-          </p:nvPr>
-        </p:nvSpPr>
-        <p:spPr/>
-        <p:txBody>
-          <a:bodyPr/>
-          <a:lstStyle/>
-          <a:p>
-            <a:r>
-              <a:rPr sz="3400"/>
-              <a:t>結果の数字</a:t>
-            </a:r>
-          </a:p>
-        </p:txBody>
-      </p:sp>
-      <p:sp>
-        <p:nvSpPr>
-          <p:cNvPr id="3" name="Content Placeholder 2"/>
-          <p:cNvSpPr>
-            <a:spLocks noGrp="1"/>
-          </p:cNvSpPr>
-          <p:nvPr>
-            <p:ph idx="1"/>
-          </p:nvPr>
-        </p:nvSpPr>
-        <p:spPr>
-          <a:xfrm>
-            <a:off x="841248" y="1463040"/>
-            <a:ext cx="10515600" cy="4937760"/>
-          </a:xfrm>
-        </p:spPr>
-        <p:txBody>
-          <a:bodyPr/>
-          <a:lstStyle/>
-          <a:p>
-            <a:r>
-              <a:rPr sz="2400"/>
-              <a:t>局所密度 0.42 GeV/cm³ の場合（43 天体、20 GeV）</a:t>
-            </a:r>
-          </a:p>
-          <a:p>
-            <a:pPr lvl="1"/>
-            <a:r>
-              <a:rPr sz="2000"/>
-              <a:t>J の誤差なし：期待 1.77、ずれ 1.4σ（s = 1.26 なら 1.1σ）</a:t>
-            </a:r>
-          </a:p>
-          <a:p>
-            <a:pPr lvl="1"/>
-            <a:r>
-              <a:rPr sz="2000"/>
-              <a:t>J の誤差あり：期待 2.5（68% で 1.4–5.1）、ずれ 1.5σ（1.3σ）</a:t>
-            </a:r>
-          </a:p>
-          <a:p>
-            <a:r>
-              <a:rPr sz="2400"/>
-              <a:t>天の川側の局所密度を 0.3〜0.6 GeV/cm³ で動かしても</a:t>
-            </a:r>
-          </a:p>
-          <a:p>
-            <a:pPr lvl="1"/>
-            <a:r>
-              <a:rPr sz="2000"/>
-              <a:t>ずれは較正後 2.4σ 以下</a:t>
-            </a:r>
-          </a:p>
-          <a:p>
-            <a:r>
-              <a:rPr sz="2400"/>
-              <a:t>→ 暗黒物質と矛盾はしないが、確認もできない（判定できない）</a:t>
-            </a:r>
-          </a:p>
-        </p:txBody>
-      </p:sp>
-    </p:spTree>
-  </p:cSld>
-  <p:clrMapOvr>
-    <a:masterClrMapping/>
-  </p:clrMapOvr>
-</p:sld>
-</file>
-
 <file path=ppt/slides/slide35.xml><?xml version="1.0" encoding="utf-8"?>
 <p:sld xmlns:a="http://schemas.openxmlformats.org/drawingml/2006/main" xmlns:r="http://schemas.openxmlformats.org/officeDocument/2006/relationships" xmlns:p="http://schemas.openxmlformats.org/presentationml/2006/main">
   <p:cSld>
@@ -10679,7 +10673,7 @@
           <a:p>
             <a:r>
               <a:rPr sz="3400"/>
-              <a:t>2 つの数字の違い：15σ と 1.3σ</a:t>
+              <a:t>結果の数字</a:t>
             </a:r>
           </a:p>
         </p:txBody>
@@ -10706,40 +10700,40 @@
           <a:p>
             <a:r>
               <a:rPr sz="2400"/>
-              <a:t>約 15σ：天の川のハロー超過の強さ</a:t>
+              <a:t>局所密度 0.42 GeV/cm³ の場合（43 天体、20 GeV）</a:t>
             </a:r>
           </a:p>
           <a:p>
             <a:pPr lvl="1"/>
             <a:r>
               <a:rPr sz="2000"/>
-              <a:t>19.5σ を、何も無い空でのばらつき 1.26 で割ったもの</a:t>
+              <a:t>J の誤差なし：期待 1.77、ずれ 1.4σ（s = 1.26 なら 1.1σ）</a:t>
             </a:r>
           </a:p>
           <a:p>
             <a:pPr lvl="1"/>
             <a:r>
               <a:rPr sz="2000"/>
-              <a:t>「天の川に、背景では説明しにくい何かがある」</a:t>
+              <a:t>J の誤差あり：期待 2.5（68% で 1.4–5.1）、ずれ 1.5σ（1.3σ）</a:t>
             </a:r>
           </a:p>
           <a:p>
             <a:r>
               <a:rPr sz="2400"/>
-              <a:t>1.3σ：矮小銀河での「予測と実測のずれ」</a:t>
+              <a:t>天の川側の局所密度を 0.3〜0.6 GeV/cm³ で動かしても</a:t>
             </a:r>
           </a:p>
           <a:p>
             <a:pPr lvl="1"/>
             <a:r>
               <a:rPr sz="2000"/>
-              <a:t>「天の川の超過が暗黒物質だとしても、矮小銀河の結果と矛盾しない」</a:t>
+              <a:t>ずれは較正後 2.4σ 以下</a:t>
             </a:r>
           </a:p>
           <a:p>
             <a:r>
               <a:rPr sz="2400"/>
-              <a:t>別のものを測った、別の数字</a:t>
+              <a:t>→ 暗黒物質と矛盾はしないが、確認もできない（判定できない）</a:t>
             </a:r>
           </a:p>
         </p:txBody>
@@ -10786,7 +10780,7 @@
           <a:p>
             <a:r>
               <a:rPr sz="3400"/>
-              <a:t>結論</a:t>
+              <a:t>2 つの数字の違い：15σ と 1.3σ</a:t>
             </a:r>
           </a:p>
         </p:txBody>
@@ -10813,33 +10807,40 @@
           <a:p>
             <a:r>
               <a:rPr sz="2400"/>
-              <a:t>Totani の超過を再現（名目 19.5σ、較正後 約 15σ）</a:t>
+              <a:t>約 15σ：天の川のハロー超過の強さ</a:t>
+            </a:r>
+          </a:p>
+          <a:p>
+            <a:pPr lvl="1"/>
+            <a:r>
+              <a:rPr sz="2000"/>
+              <a:t>19.5σ を、何も無い空でのばらつき 1.26 で割ったもの</a:t>
+            </a:r>
+          </a:p>
+          <a:p>
+            <a:pPr lvl="1"/>
+            <a:r>
+              <a:rPr sz="2000"/>
+              <a:t>「天の川に、背景では説明しにくい何かがある」</a:t>
             </a:r>
           </a:p>
           <a:p>
             <a:r>
               <a:rPr sz="2400"/>
-              <a:t>ICS の明るさ・バブル・計算の近似の間違いでは説明できない</a:t>
+              <a:t>1.3σ：矮小銀河での「予測と実測のずれ」</a:t>
             </a:r>
           </a:p>
           <a:p>
             <a:pPr lvl="1"/>
             <a:r>
               <a:rPr sz="2000"/>
-              <a:t>暗黒物質の証拠ではない（ICS の空間の形は未確認）</a:t>
+              <a:t>「天の川の超過が暗黒物質だとしても、矮小銀河の結果と矛盾しない」</a:t>
             </a:r>
           </a:p>
           <a:p>
             <a:r>
               <a:rPr sz="2400"/>
-              <a:t>矮小銀河では非検出</a:t>
-            </a:r>
-          </a:p>
-          <a:p>
-            <a:pPr lvl="1"/>
-            <a:r>
-              <a:rPr sz="2000"/>
-              <a:t>J の誤差（約 3 倍）を入れると、予測とのずれは 1.3σ → 判定できない</a:t>
+              <a:t>別のものを測った、別の数字</a:t>
             </a:r>
           </a:p>
         </p:txBody>
@@ -10886,7 +10887,7 @@
           <a:p>
             <a:r>
               <a:rPr sz="3400"/>
-              <a:t>統計の視点から：この研究に足りなかったもの</a:t>
+              <a:t>結論</a:t>
             </a:r>
           </a:p>
         </p:txBody>
@@ -10904,7 +10905,7 @@
         <p:spPr>
           <a:xfrm>
             <a:off x="841248" y="1463040"/>
-            <a:ext cx="10515600" cy="4114800"/>
+            <a:ext cx="10515600" cy="4937760"/>
           </a:xfrm>
         </p:spPr>
         <p:txBody>
@@ -10913,81 +10914,34 @@
           <a:p>
             <a:r>
               <a:rPr sz="2400"/>
-              <a:t>σ が 1.26 倍に膨らんだ原因</a:t>
+              <a:t>Totani の超過を再現（名目 19.5σ、較正後 約 15σ）</a:t>
+            </a:r>
+          </a:p>
+          <a:p>
+            <a:r>
+              <a:rPr sz="2400"/>
+              <a:t>ICS の明るさ・バブル・計算の近似の間違いでは説明できない</a:t>
             </a:r>
           </a:p>
           <a:p>
             <a:pPr lvl="1"/>
             <a:r>
               <a:rPr sz="2000"/>
-              <a:t>尤度は「型紙（GALPROP）は完璧、誤差は光子の数のばらつきだけ」と仮定</a:t>
+              <a:t>暗黒物質の証拠ではない（ICS の空間の形は未確認）</a:t>
+            </a:r>
+          </a:p>
+          <a:p>
+            <a:r>
+              <a:rPr sz="2400"/>
+              <a:t>矮小銀河では非検出</a:t>
             </a:r>
           </a:p>
           <a:p>
             <a:pPr lvl="1"/>
             <a:r>
               <a:rPr sz="2000"/>
-              <a:t>型紙そのものの誤差が、統計モデルに入っていない</a:t>
-            </a:r>
-          </a:p>
-          <a:p>
-            <a:r>
-              <a:rPr sz="2400"/>
-              <a:t>データ同化：シミュレーションの誤差と観測の誤差を分けて、統計モデルに入れる枠組み</a:t>
-            </a:r>
-          </a:p>
-          <a:p>
-            <a:r>
-              <a:rPr sz="2400"/>
-              <a:t>J をずらして何度も計算したのも、分布をたくさんのサンプルで表すという同じ発想</a:t>
-            </a:r>
-          </a:p>
-          <a:p>
-            <a:pPr lvl="1"/>
-            <a:r>
-              <a:rPr sz="2000"/>
-              <a:t>（アンサンブル・粒子フィルタ）</a:t>
-            </a:r>
-          </a:p>
-        </p:txBody>
-      </p:sp>
-      <p:sp>
-        <p:nvSpPr>
-          <p:cNvPr id="8" name="TextBox 7">
-            <a:extLst>
-              <a:ext uri="{FF2B5EF4-FFF2-40B4-BE49-F238E27FC236}">
-                <a16:creationId xmlns:a16="http://schemas.microsoft.com/office/drawing/2014/main" id="{F85CD606-E3CE-F314-B3EE-F3D7028115CB}"/>
-              </a:ext>
-            </a:extLst>
-          </p:cNvPr>
-          <p:cNvSpPr txBox="1"/>
-          <p:nvPr/>
-        </p:nvSpPr>
-        <p:spPr>
-          <a:xfrm>
-            <a:off x="5837182" y="5663239"/>
-            <a:ext cx="6093372" cy="923330"/>
-          </a:xfrm>
-          <a:prstGeom prst="rect">
-            <a:avLst/>
-          </a:prstGeom>
-          <a:noFill/>
-        </p:spPr>
-        <p:txBody>
-          <a:bodyPr wrap="square">
-            <a:spAutoFit/>
-          </a:bodyPr>
-          <a:lstStyle/>
-          <a:p>
-            <a:r>
-              <a:rPr lang="en-US" sz="1400" b="1"/>
-              <a:t>Reference:</a:t>
-            </a:r>
-            <a:r>
-              <a:rPr lang="en-US" sz="1400"/>
-              <a:t> 中村和幸 (2017), 数理解析研究所講究録 2057, 59–66</a:t>
-            </a:r>
-            <a:endParaRPr lang="en-US"/>
+              <a:t>J の誤差（約 3 倍）を入れると、予測とのずれは 1.3σ → 判定できない</a:t>
+            </a:r>
           </a:p>
         </p:txBody>
       </p:sp>
@@ -11033,122 +10987,7 @@
           <a:p>
             <a:r>
               <a:rPr sz="3400"/>
-              <a:t>参考文献</a:t>
-            </a:r>
-          </a:p>
-        </p:txBody>
-      </p:sp>
-      <p:sp>
-        <p:nvSpPr>
-          <p:cNvPr id="3" name="Content Placeholder 2"/>
-          <p:cNvSpPr>
-            <a:spLocks noGrp="1"/>
-          </p:cNvSpPr>
-          <p:nvPr>
-            <p:ph idx="1"/>
-          </p:nvPr>
-        </p:nvSpPr>
-        <p:spPr>
-          <a:xfrm>
-            <a:off x="841248" y="1463040"/>
-            <a:ext cx="10515600" cy="4937760"/>
-          </a:xfrm>
-        </p:spPr>
-        <p:txBody>
-          <a:bodyPr/>
-          <a:lstStyle/>
-          <a:p>
-            <a:r>
-              <a:rPr sz="1800"/>
-              <a:t>T. Totani (2025), arXiv:2507.07209</a:t>
-            </a:r>
-          </a:p>
-          <a:p>
-            <a:r>
-              <a:rPr sz="1800"/>
-              <a:t>Bertólez-Martínez, Hooper &amp; Khatee Zathul (2026), arXiv:2609.20944</a:t>
-            </a:r>
-          </a:p>
-          <a:p>
-            <a:r>
-              <a:rPr sz="1800"/>
-              <a:t>S. S. Wilks (1938), Ann. Math. Stat. 9, 60</a:t>
-            </a:r>
-          </a:p>
-          <a:p>
-            <a:r>
-              <a:rPr sz="1800"/>
-              <a:t>D. Foreman-Mackey et al. (2013), PASP 125, 306</a:t>
-            </a:r>
-          </a:p>
-          <a:p>
-            <a:r>
-              <a:rPr sz="1800"/>
-              <a:t>I. V. Moskalenko &amp; A. W. Strong (2000), ApJ 528, 357</a:t>
-            </a:r>
-          </a:p>
-          <a:p>
-            <a:r>
-              <a:rPr sz="1800"/>
-              <a:t>B. Efron &amp; R. J. Tibshirani (1993), An Introduction to the Bootstrap</a:t>
-            </a:r>
-          </a:p>
-          <a:p>
-            <a:r>
-              <a:rPr sz="1800"/>
-              <a:t>A. B. Pace (2025), Open J. Astrophys. 8, 142</a:t>
-            </a:r>
-          </a:p>
-          <a:p>
-            <a:r>
-              <a:rPr sz="1800"/>
-              <a:t>A. B. Pace &amp; L. E. Strigari (2019), MNRAS 482, 3480</a:t>
-            </a:r>
-          </a:p>
-          <a:p>
-            <a:r>
-              <a:rPr sz="1800"/>
-              <a:t>中村和幸 (2017), 数理解析研究所講究録 2057, 59–66</a:t>
-            </a:r>
-          </a:p>
-        </p:txBody>
-      </p:sp>
-    </p:spTree>
-  </p:cSld>
-  <p:clrMapOvr>
-    <a:masterClrMapping/>
-  </p:clrMapOvr>
-</p:sld>
-</file>
-
-<file path=ppt/slides/slide39.xml><?xml version="1.0" encoding="utf-8"?>
-<p:sld xmlns:a="http://schemas.openxmlformats.org/drawingml/2006/main" xmlns:p="http://schemas.openxmlformats.org/presentationml/2006/main" xmlns:r="http://schemas.openxmlformats.org/officeDocument/2006/relationships">
-  <p:cSld>
-    <p:spTree>
-      <p:nvGrpSpPr>
-        <p:cNvPr id="1" name=""/>
-        <p:cNvGrpSpPr/>
-        <p:nvPr/>
-      </p:nvGrpSpPr>
-      <p:grpSpPr/>
-      <p:sp>
-        <p:nvSpPr>
-          <p:cNvPr id="2" name="Title 1"/>
-          <p:cNvSpPr>
-            <a:spLocks noGrp="1"/>
-          </p:cNvSpPr>
-          <p:nvPr>
-            <p:ph type="title"/>
-          </p:nvPr>
-        </p:nvSpPr>
-        <p:spPr/>
-        <p:txBody>
-          <a:bodyPr/>
-          <a:lstStyle/>
-          <a:p>
-            <a:r>
-              <a:rPr sz="3400"/>
-              <a:t>尤度と MCMC の役割分担</a:t>
+              <a:t>統計の視点から：この研究に足りなかったもの</a:t>
             </a:r>
           </a:p>
         </p:txBody>
@@ -11173,59 +11012,42 @@
           <a:bodyPr/>
           <a:lstStyle/>
           <a:p>
-            <a:pPr/>
             <a:r>
               <a:rPr sz="2400"/>
-              <a:t>尤度 ＝ 点数をつける係（たとえ：高度計）</a:t>
+              <a:t>σ が 1.26 倍に膨らんだ原因</a:t>
             </a:r>
           </a:p>
           <a:p>
             <a:pPr lvl="1"/>
             <a:r>
               <a:rPr sz="2000"/>
-              <a:t>倍率の組（f_gas, f_ics, …, f_halo）を入れると、予測と観測の合い具合 ln L を返す</a:t>
-            </a:r>
-          </a:p>
-          <a:p>
-            <a:pPr/>
+              <a:t>尤度は「型紙（GALPROP）は完璧、誤差は光子の数のばらつきだけ」と仮定</a:t>
+            </a:r>
+          </a:p>
+          <a:p>
+            <a:pPr lvl="1"/>
+            <a:r>
+              <a:rPr sz="2000"/>
+              <a:t>型紙そのものの誤差が、統計モデルに入っていない</a:t>
+            </a:r>
+          </a:p>
+          <a:p>
             <a:r>
               <a:rPr sz="2400"/>
-              <a:t>MCMC ＝ 倍率を探す係（たとえ：霧の山を歩く人）</a:t>
+              <a:t>データ同化：シミュレーションの誤差と観測の誤差を分けて、統計モデルに入れる枠組み</a:t>
+            </a:r>
+          </a:p>
+          <a:p>
+            <a:r>
+              <a:rPr sz="2400"/>
+              <a:t>J をずらして何度も計算したのも、分布をたくさんのサンプルで表すという同じ発想</a:t>
             </a:r>
           </a:p>
           <a:p>
             <a:pPr lvl="1"/>
             <a:r>
               <a:rPr sz="2000"/>
-              <a:t>倍率の組を少しずつ変えながら歩き、そのたびに尤度で点数をつける</a:t>
-            </a:r>
-          </a:p>
-          <a:p>
-            <a:pPr lvl="1"/>
-            <a:r>
-              <a:rPr sz="2000"/>
-              <a:t>点数が上がる方へは必ず進み、下がる方へもたまに進む</a:t>
-            </a:r>
-          </a:p>
-          <a:p>
-            <a:pPr/>
-            <a:r>
-              <a:rPr sz="2400"/>
-              <a:t>歩き終わったら</a:t>
-            </a:r>
-          </a:p>
-          <a:p>
-            <a:pPr lvl="1"/>
-            <a:r>
-              <a:rPr sz="2000"/>
-              <a:t>歩いた中で点数が一番高かった組 → 最良の倍率（Totani と同じ）</a:t>
-            </a:r>
-          </a:p>
-          <a:p>
-            <a:pPr lvl="1"/>
-            <a:r>
-              <a:rPr sz="2000"/>
-              <a:t>歩いた範囲の広さ → 倍率の誤差</a:t>
+              <a:t>（アンサンブル・粒子フィルタ）</a:t>
             </a:r>
           </a:p>
         </p:txBody>
@@ -11264,9 +11086,131 @@
             </a:r>
             <a:r>
               <a:rPr lang="en-US" sz="1400"/>
-              <a:t> T. Totani (2025), arXiv:2507.07209 §2.2</a:t>
+              <a:t> 中村和幸 (2017), 数理解析研究所講究録 2057, 59–66</a:t>
             </a:r>
             <a:endParaRPr lang="en-US"/>
+          </a:p>
+        </p:txBody>
+      </p:sp>
+    </p:spTree>
+  </p:cSld>
+  <p:clrMapOvr>
+    <a:masterClrMapping/>
+  </p:clrMapOvr>
+</p:sld>
+</file>
+
+<file path=ppt/slides/slide39.xml><?xml version="1.0" encoding="utf-8"?>
+<p:sld xmlns:a="http://schemas.openxmlformats.org/drawingml/2006/main" xmlns:r="http://schemas.openxmlformats.org/officeDocument/2006/relationships" xmlns:p="http://schemas.openxmlformats.org/presentationml/2006/main">
+  <p:cSld>
+    <p:spTree>
+      <p:nvGrpSpPr>
+        <p:cNvPr id="1" name=""/>
+        <p:cNvGrpSpPr/>
+        <p:nvPr/>
+      </p:nvGrpSpPr>
+      <p:grpSpPr>
+        <a:xfrm>
+          <a:off x="0" y="0"/>
+          <a:ext cx="0" cy="0"/>
+          <a:chOff x="0" y="0"/>
+          <a:chExt cx="0" cy="0"/>
+        </a:xfrm>
+      </p:grpSpPr>
+      <p:sp>
+        <p:nvSpPr>
+          <p:cNvPr id="2" name="Title 1"/>
+          <p:cNvSpPr>
+            <a:spLocks noGrp="1"/>
+          </p:cNvSpPr>
+          <p:nvPr>
+            <p:ph type="title"/>
+          </p:nvPr>
+        </p:nvSpPr>
+        <p:spPr/>
+        <p:txBody>
+          <a:bodyPr/>
+          <a:lstStyle/>
+          <a:p>
+            <a:r>
+              <a:rPr sz="3400"/>
+              <a:t>参考文献</a:t>
+            </a:r>
+          </a:p>
+        </p:txBody>
+      </p:sp>
+      <p:sp>
+        <p:nvSpPr>
+          <p:cNvPr id="3" name="Content Placeholder 2"/>
+          <p:cNvSpPr>
+            <a:spLocks noGrp="1"/>
+          </p:cNvSpPr>
+          <p:nvPr>
+            <p:ph idx="1"/>
+          </p:nvPr>
+        </p:nvSpPr>
+        <p:spPr>
+          <a:xfrm>
+            <a:off x="841248" y="1463040"/>
+            <a:ext cx="10515600" cy="4937760"/>
+          </a:xfrm>
+        </p:spPr>
+        <p:txBody>
+          <a:bodyPr/>
+          <a:lstStyle/>
+          <a:p>
+            <a:r>
+              <a:rPr sz="1800"/>
+              <a:t>T. Totani (2025), arXiv:2507.07209</a:t>
+            </a:r>
+          </a:p>
+          <a:p>
+            <a:r>
+              <a:rPr sz="1800"/>
+              <a:t>Bertólez-Martínez, Hooper &amp; Khatee Zathul (2026), arXiv:2609.20944</a:t>
+            </a:r>
+          </a:p>
+          <a:p>
+            <a:r>
+              <a:rPr sz="1800"/>
+              <a:t>S. S. Wilks (1938), Ann. Math. Stat. 9, 60</a:t>
+            </a:r>
+          </a:p>
+          <a:p>
+            <a:r>
+              <a:rPr sz="1800"/>
+              <a:t>D. Foreman-Mackey et al. (2013), PASP 125, 306</a:t>
+            </a:r>
+          </a:p>
+          <a:p>
+            <a:r>
+              <a:rPr sz="1800"/>
+              <a:t>I. V. Moskalenko &amp; A. W. Strong (2000), ApJ 528, 357</a:t>
+            </a:r>
+          </a:p>
+          <a:p>
+            <a:r>
+              <a:rPr sz="1800"/>
+              <a:t>B. Efron &amp; R. J. Tibshirani (1993), An Introduction to the Bootstrap</a:t>
+            </a:r>
+          </a:p>
+          <a:p>
+            <a:r>
+              <a:rPr sz="1800"/>
+              <a:t>A. B. Pace (2025), Open J. Astrophys. 8, 142</a:t>
+            </a:r>
+          </a:p>
+          <a:p>
+            <a:r>
+              <a:rPr sz="1800"/>
+              <a:t>A. B. Pace &amp; L. E. Strigari (2019), MNRAS 482, 3480</a:t>
+            </a:r>
+          </a:p>
+          <a:p>
+            <a:r>
+              <a:rPr sz="1800"/>
+              <a:t>中村和幸 (2017), 数理解析研究所講究録 2057, 59–66</a:t>
+            </a:r>
           </a:p>
         </p:txBody>
       </p:sp>
@@ -11433,6 +11377,907 @@
               <a:rPr sz="2400"/>
               <a:t>倍率 f_l をデータに合うように決める</a:t>
             </a:r>
+          </a:p>
+        </p:txBody>
+      </p:sp>
+    </p:spTree>
+  </p:cSld>
+  <p:clrMapOvr>
+    <a:masterClrMapping/>
+  </p:clrMapOvr>
+</p:sld>
+</file>
+
+<file path=ppt/slides/slide40.xml><?xml version="1.0" encoding="utf-8"?>
+<p:sld xmlns:a="http://schemas.openxmlformats.org/drawingml/2006/main" xmlns:p="http://schemas.openxmlformats.org/presentationml/2006/main" xmlns:r="http://schemas.openxmlformats.org/officeDocument/2006/relationships">
+  <p:cSld>
+    <p:spTree>
+      <p:nvGrpSpPr>
+        <p:cNvPr id="1" name=""/>
+        <p:cNvGrpSpPr/>
+        <p:nvPr/>
+      </p:nvGrpSpPr>
+      <p:grpSpPr/>
+      <p:sp>
+        <p:nvSpPr>
+          <p:cNvPr id="2" name="Title 1"/>
+          <p:cNvSpPr>
+            <a:spLocks noGrp="1"/>
+          </p:cNvSpPr>
+          <p:nvPr>
+            <p:ph type="title"/>
+          </p:nvPr>
+        </p:nvSpPr>
+        <p:spPr/>
+        <p:txBody>
+          <a:bodyPr/>
+          <a:lstStyle/>
+          <a:p>
+            <a:r>
+              <a:rPr sz="3000"/>
+              <a:t>MCMC をたとえで見る：霧の山を歩く</a:t>
+            </a:r>
+          </a:p>
+        </p:txBody>
+      </p:sp>
+      <p:sp>
+        <p:nvSpPr>
+          <p:cNvPr id="3" name="Content Placeholder 2"/>
+          <p:cNvSpPr>
+            <a:spLocks noGrp="1"/>
+          </p:cNvSpPr>
+          <p:nvPr>
+            <p:ph idx="1"/>
+          </p:nvPr>
+        </p:nvSpPr>
+        <p:spPr>
+          <a:xfrm>
+            <a:off x="548640" y="1371600"/>
+            <a:ext cx="5669280" cy="4297680"/>
+          </a:xfrm>
+        </p:spPr>
+        <p:txBody>
+          <a:bodyPr/>
+          <a:lstStyle/>
+          <a:p>
+            <a:pPr/>
+            <a:r>
+              <a:rPr sz="1800"/>
+              <a:t>山の上の「場所」 → 倍率の組 θ</a:t>
+            </a:r>
+          </a:p>
+          <a:p>
+            <a:pPr lvl="1"/>
+            <a:r>
+              <a:rPr sz="1500"/>
+              <a:t>θ = (f_iso, f_gas, f_ics, …, f_halo)。9 個あるので 9 次元の山</a:t>
+            </a:r>
+          </a:p>
+          <a:p>
+            <a:pPr/>
+            <a:r>
+              <a:rPr sz="1800"/>
+              <a:t>その場所の「高さ」 → 点数（事後分布）</a:t>
+            </a:r>
+          </a:p>
+          <a:p>
+            <a:pPr/>
+            <a:r>
+              <a:rPr sz="1800"/>
+              <a:t>「高度計」 → 尤度の計算（手法② の ln L）</a:t>
+            </a:r>
+          </a:p>
+          <a:p>
+            <a:pPr/>
+            <a:r>
+              <a:rPr sz="1800"/>
+              <a:t>「立ち入り禁止の場所」 → 事前分布</a:t>
+            </a:r>
+          </a:p>
+          <a:p>
+            <a:pPr lvl="1"/>
+            <a:r>
+              <a:rPr sz="1500"/>
+              <a:t>例：ガスや ICS の倍率は負にならない</a:t>
+            </a:r>
+          </a:p>
+          <a:p>
+            <a:pPr/>
+            <a:r>
+              <a:rPr sz="1800"/>
+              <a:t>「歩く人」 → 歩行者（walker）。今回は 32 人</a:t>
+            </a:r>
+          </a:p>
+          <a:p>
+            <a:pPr/>
+            <a:r>
+              <a:rPr sz="1800"/>
+              <a:t>「足あとの記録」 → チェーン（サンプル）</a:t>
+            </a:r>
+          </a:p>
+          <a:p>
+            <a:pPr/>
+            <a:r>
+              <a:rPr sz="1800"/>
+              <a:t>「一番高い足あと」 → 最良値</a:t>
+            </a:r>
+          </a:p>
+          <a:p>
+            <a:pPr/>
+            <a:r>
+              <a:rPr sz="1800"/>
+              <a:t>「足あとの広がり」 → 誤差</a:t>
+            </a:r>
+          </a:p>
+        </p:txBody>
+      </p:sp>
+    </p:spTree>
+  </p:cSld>
+  <p:clrMapOvr>
+    <a:masterClrMapping/>
+  </p:clrMapOvr>
+</p:sld>
+</file>
+
+<file path=ppt/slides/slide41.xml><?xml version="1.0" encoding="utf-8"?>
+<p:sld xmlns:a="http://schemas.openxmlformats.org/drawingml/2006/main" xmlns:p="http://schemas.openxmlformats.org/presentationml/2006/main" xmlns:r="http://schemas.openxmlformats.org/officeDocument/2006/relationships">
+  <p:cSld>
+    <p:spTree>
+      <p:nvGrpSpPr>
+        <p:cNvPr id="1" name=""/>
+        <p:cNvGrpSpPr/>
+        <p:nvPr/>
+      </p:nvGrpSpPr>
+      <p:grpSpPr/>
+      <p:sp>
+        <p:nvSpPr>
+          <p:cNvPr id="2" name="Title 1"/>
+          <p:cNvSpPr>
+            <a:spLocks noGrp="1"/>
+          </p:cNvSpPr>
+          <p:nvPr>
+            <p:ph type="title"/>
+          </p:nvPr>
+        </p:nvSpPr>
+        <p:spPr/>
+        <p:txBody>
+          <a:bodyPr/>
+          <a:lstStyle/>
+          <a:p>
+            <a:r>
+              <a:rPr sz="3000"/>
+              <a:t>① 高さ＝点数の決め方（ベイズの定理）</a:t>
+            </a:r>
+          </a:p>
+        </p:txBody>
+      </p:sp>
+      <p:sp>
+        <p:nvSpPr>
+          <p:cNvPr id="3" name="Content Placeholder 2"/>
+          <p:cNvSpPr>
+            <a:spLocks noGrp="1"/>
+          </p:cNvSpPr>
+          <p:nvPr>
+            <p:ph idx="1"/>
+          </p:nvPr>
+        </p:nvSpPr>
+        <p:spPr>
+          <a:xfrm>
+            <a:off x="548640" y="1371600"/>
+            <a:ext cx="5669280" cy="4297680"/>
+          </a:xfrm>
+        </p:spPr>
+        <p:txBody>
+          <a:bodyPr/>
+          <a:lstStyle/>
+          <a:p>
+            <a:pPr/>
+            <a:r>
+              <a:rPr sz="1800"/>
+              <a:t>P(θ | D) = L(D | θ) × π(θ) ÷ P(D)</a:t>
+            </a:r>
+          </a:p>
+          <a:p>
+            <a:pPr/>
+            <a:r>
+              <a:rPr sz="1800"/>
+              <a:t>P(θ | D)：場所 θ の「高さ」（＝点数）</a:t>
+            </a:r>
+          </a:p>
+          <a:p>
+            <a:pPr lvl="1"/>
+            <a:r>
+              <a:rPr sz="1500"/>
+              <a:t>データ D を見た後で、θ がどれくらいもっともらしいか</a:t>
+            </a:r>
+          </a:p>
+          <a:p>
+            <a:pPr/>
+            <a:r>
+              <a:rPr sz="1800"/>
+              <a:t>L(D | θ)：「高度計」の読み（尤度）</a:t>
+            </a:r>
+          </a:p>
+          <a:p>
+            <a:pPr lvl="1"/>
+            <a:r>
+              <a:rPr sz="1500"/>
+              <a:t>倍率が θ のとき、観測した光子の地図 D がどれくらい出やすいか</a:t>
+            </a:r>
+          </a:p>
+          <a:p>
+            <a:pPr/>
+            <a:r>
+              <a:rPr sz="1800"/>
+              <a:t>π(θ)：入ってよい場所か（事前分布）</a:t>
+            </a:r>
+          </a:p>
+          <a:p>
+            <a:pPr lvl="1"/>
+            <a:r>
+              <a:rPr sz="1500"/>
+              <a:t>入れる場所は全部同じ値、立ち入り禁止なら 0</a:t>
+            </a:r>
+          </a:p>
+          <a:p>
+            <a:pPr/>
+            <a:r>
+              <a:rPr sz="1800"/>
+              <a:t>P(D)：海抜の基準。どの場所でも同じ数</a:t>
+            </a:r>
+          </a:p>
+          <a:p>
+            <a:pPr lvl="1"/>
+            <a:r>
+              <a:rPr sz="1500"/>
+              <a:t>「どちらが高いか」を比べるだけなら消える → 計算しなくてよい</a:t>
+            </a:r>
+          </a:p>
+          <a:p>
+            <a:pPr/>
+            <a:r>
+              <a:rPr sz="1800"/>
+              <a:t>計算では対数で：ln(高さ) = ln L + ln π</a:t>
+            </a:r>
+          </a:p>
+        </p:txBody>
+      </p:sp>
+      <p:sp>
+        <p:nvSpPr>
+          <p:cNvPr id="8" name="TextBox 7">
+            <a:extLst>
+              <a:ext uri="{FF2B5EF4-FFF2-40B4-BE49-F238E27FC236}">
+                <a16:creationId xmlns:a16="http://schemas.microsoft.com/office/drawing/2014/main" id="{F85CD606-E3CE-F314-B3EE-F3D7028115CB}"/>
+              </a:ext>
+            </a:extLst>
+          </p:cNvPr>
+          <p:cNvSpPr txBox="1"/>
+          <p:nvPr/>
+        </p:nvSpPr>
+        <p:spPr>
+          <a:xfrm>
+            <a:off x="5837182" y="5663239"/>
+            <a:ext cx="6093372" cy="923330"/>
+          </a:xfrm>
+          <a:prstGeom prst="rect">
+            <a:avLst/>
+          </a:prstGeom>
+          <a:noFill/>
+        </p:spPr>
+        <p:txBody>
+          <a:bodyPr wrap="square">
+            <a:spAutoFit/>
+          </a:bodyPr>
+          <a:lstStyle/>
+          <a:p>
+            <a:r>
+              <a:rPr lang="en-US" sz="1400" b="1"/>
+              <a:t>Reference:</a:t>
+            </a:r>
+            <a:r>
+              <a:rPr lang="en-US" sz="1400"/>
+              <a:t> D. Foreman-Mackey et al. (2013), PASP 125, 306</a:t>
+            </a:r>
+            <a:endParaRPr lang="en-US"/>
+          </a:p>
+        </p:txBody>
+      </p:sp>
+    </p:spTree>
+  </p:cSld>
+  <p:clrMapOvr>
+    <a:masterClrMapping/>
+  </p:clrMapOvr>
+</p:sld>
+</file>
+
+<file path=ppt/slides/slide42.xml><?xml version="1.0" encoding="utf-8"?>
+<p:sld xmlns:a="http://schemas.openxmlformats.org/drawingml/2006/main" xmlns:p="http://schemas.openxmlformats.org/presentationml/2006/main" xmlns:r="http://schemas.openxmlformats.org/officeDocument/2006/relationships">
+  <p:cSld>
+    <p:spTree>
+      <p:nvGrpSpPr>
+        <p:cNvPr id="1" name=""/>
+        <p:cNvGrpSpPr/>
+        <p:nvPr/>
+      </p:nvGrpSpPr>
+      <p:grpSpPr/>
+      <p:sp>
+        <p:nvSpPr>
+          <p:cNvPr id="2" name="Title 1"/>
+          <p:cNvSpPr>
+            <a:spLocks noGrp="1"/>
+          </p:cNvSpPr>
+          <p:nvPr>
+            <p:ph type="title"/>
+          </p:nvPr>
+        </p:nvSpPr>
+        <p:spPr/>
+        <p:txBody>
+          <a:bodyPr/>
+          <a:lstStyle/>
+          <a:p>
+            <a:r>
+              <a:rPr sz="3000"/>
+              <a:t>② 一歩の進み方（メトロポリス法）</a:t>
+            </a:r>
+          </a:p>
+        </p:txBody>
+      </p:sp>
+      <p:sp>
+        <p:nvSpPr>
+          <p:cNvPr id="3" name="Content Placeholder 2"/>
+          <p:cNvSpPr>
+            <a:spLocks noGrp="1"/>
+          </p:cNvSpPr>
+          <p:nvPr>
+            <p:ph idx="1"/>
+          </p:nvPr>
+        </p:nvSpPr>
+        <p:spPr>
+          <a:xfrm>
+            <a:off x="548640" y="1371600"/>
+            <a:ext cx="5669280" cy="4297680"/>
+          </a:xfrm>
+        </p:spPr>
+        <p:txBody>
+          <a:bodyPr/>
+          <a:lstStyle/>
+          <a:p>
+            <a:pPr/>
+            <a:r>
+              <a:rPr sz="1800"/>
+              <a:t>1. 今いる場所 θ から、少しずれた場所 θ′ に足を出す</a:t>
+            </a:r>
+          </a:p>
+          <a:p>
+            <a:pPr lvl="1"/>
+            <a:r>
+              <a:rPr sz="1500"/>
+              <a:t>どれだけずらすかは乱数で決める</a:t>
+            </a:r>
+          </a:p>
+          <a:p>
+            <a:pPr/>
+            <a:r>
+              <a:rPr sz="1800"/>
+              <a:t>2. 高度計で両方を読み、比 r = 高さ(θ′) ÷ 高さ(θ)</a:t>
+            </a:r>
+          </a:p>
+          <a:p>
+            <a:pPr/>
+            <a:r>
+              <a:rPr sz="1800"/>
+              <a:t>3. r ≥ 1（上り）なら、必ず θ′ に移る</a:t>
+            </a:r>
+          </a:p>
+          <a:p>
+            <a:pPr/>
+            <a:r>
+              <a:rPr sz="1800"/>
+              <a:t>4. r &lt; 1（下り）なら、確率 r で移る</a:t>
+            </a:r>
+          </a:p>
+          <a:p>
+            <a:pPr lvl="1"/>
+            <a:r>
+              <a:rPr sz="1500"/>
+              <a:t>0〜1 の乱数を引き、r より小さければ移る</a:t>
+            </a:r>
+          </a:p>
+          <a:p>
+            <a:pPr/>
+            <a:r>
+              <a:rPr sz="1800"/>
+              <a:t>5. 移っても移らなくても、今いる場所を足あとに記録</a:t>
+            </a:r>
+          </a:p>
+          <a:p>
+            <a:pPr/>
+            <a:r>
+              <a:rPr sz="1800"/>
+              <a:t>6. 1〜5 を何千回もくり返す</a:t>
+            </a:r>
+          </a:p>
+          <a:p>
+            <a:pPr/>
+            <a:r>
+              <a:rPr sz="1800"/>
+              <a:t>なぜ下りにも進む？</a:t>
+            </a:r>
+          </a:p>
+          <a:p>
+            <a:pPr lvl="1"/>
+            <a:r>
+              <a:rPr sz="1500"/>
+              <a:t>上りだけだと頂上で止まり、山の広がり（誤差）が分からないから</a:t>
+            </a:r>
+          </a:p>
+        </p:txBody>
+      </p:sp>
+      <p:sp>
+        <p:nvSpPr>
+          <p:cNvPr id="8" name="TextBox 7">
+            <a:extLst>
+              <a:ext uri="{FF2B5EF4-FFF2-40B4-BE49-F238E27FC236}">
+                <a16:creationId xmlns:a16="http://schemas.microsoft.com/office/drawing/2014/main" id="{F85CD606-E3CE-F314-B3EE-F3D7028115CB}"/>
+              </a:ext>
+            </a:extLst>
+          </p:cNvPr>
+          <p:cNvSpPr txBox="1"/>
+          <p:nvPr/>
+        </p:nvSpPr>
+        <p:spPr>
+          <a:xfrm>
+            <a:off x="5837182" y="5663239"/>
+            <a:ext cx="6093372" cy="923330"/>
+          </a:xfrm>
+          <a:prstGeom prst="rect">
+            <a:avLst/>
+          </a:prstGeom>
+          <a:noFill/>
+        </p:spPr>
+        <p:txBody>
+          <a:bodyPr wrap="square">
+            <a:spAutoFit/>
+          </a:bodyPr>
+          <a:lstStyle/>
+          <a:p>
+            <a:r>
+              <a:rPr lang="en-US" sz="1400" b="1"/>
+              <a:t>Reference:</a:t>
+            </a:r>
+            <a:r>
+              <a:rPr lang="en-US" sz="1400"/>
+              <a:t> N. Metropolis et al. (1953), J. Chem. Phys. 21, 1087</a:t>
+            </a:r>
+            <a:endParaRPr lang="en-US"/>
+          </a:p>
+        </p:txBody>
+      </p:sp>
+    </p:spTree>
+  </p:cSld>
+  <p:clrMapOvr>
+    <a:masterClrMapping/>
+  </p:clrMapOvr>
+</p:sld>
+</file>
+
+<file path=ppt/slides/slide43.xml><?xml version="1.0" encoding="utf-8"?>
+<p:sld xmlns:a="http://schemas.openxmlformats.org/drawingml/2006/main" xmlns:p="http://schemas.openxmlformats.org/presentationml/2006/main" xmlns:r="http://schemas.openxmlformats.org/officeDocument/2006/relationships">
+  <p:cSld>
+    <p:spTree>
+      <p:nvGrpSpPr>
+        <p:cNvPr id="1" name=""/>
+        <p:cNvGrpSpPr/>
+        <p:nvPr/>
+      </p:nvGrpSpPr>
+      <p:grpSpPr/>
+      <p:sp>
+        <p:nvSpPr>
+          <p:cNvPr id="2" name="Title 1"/>
+          <p:cNvSpPr>
+            <a:spLocks noGrp="1"/>
+          </p:cNvSpPr>
+          <p:nvPr>
+            <p:ph type="title"/>
+          </p:nvPr>
+        </p:nvSpPr>
+        <p:spPr/>
+        <p:txBody>
+          <a:bodyPr/>
+          <a:lstStyle/>
+          <a:p>
+            <a:r>
+              <a:rPr sz="3000"/>
+              <a:t>③ 足あとはこうなる（説明用の例）</a:t>
+            </a:r>
+          </a:p>
+        </p:txBody>
+      </p:sp>
+      <p:pic>
+        <p:nvPicPr>
+          <p:cNvPr id="3" name="Picture 2" descr="image.png"/>
+          <p:cNvPicPr>
+            <a:picLocks noChangeAspect="1"/>
+          </p:cNvPicPr>
+          <p:nvPr/>
+        </p:nvPicPr>
+        <p:blipFill>
+          <a:blip r:embed="rId2"/>
+          <a:stretch>
+            <a:fillRect/>
+          </a:stretch>
+        </p:blipFill>
+        <p:spPr>
+          <a:xfrm>
+            <a:off x="731520" y="1280160"/>
+            <a:ext cx="10698480" cy="4279392"/>
+          </a:xfrm>
+          <a:prstGeom prst="rect">
+            <a:avLst/>
+          </a:prstGeom>
+        </p:spPr>
+      </p:pic>
+      <p:sp>
+        <p:nvSpPr>
+          <p:cNvPr id="4" name="TextBox 3"/>
+          <p:cNvSpPr txBox="1"/>
+          <p:nvPr/>
+        </p:nvSpPr>
+        <p:spPr>
+          <a:xfrm>
+            <a:off x="548640" y="5669280"/>
+            <a:ext cx="11155680" cy="822960"/>
+          </a:xfrm>
+          <a:prstGeom prst="rect">
+            <a:avLst/>
+          </a:prstGeom>
+          <a:noFill/>
+        </p:spPr>
+        <p:txBody>
+          <a:bodyPr wrap="square">
+            <a:spAutoFit/>
+          </a:bodyPr>
+          <a:lstStyle/>
+          <a:p>
+            <a:r>
+              <a:rPr sz="1800"/>
+              <a:t>左：足あと（縦＝倍率、横＝歩数）。最初の 200 歩は山にたどり着く途中なので捨てる。右：足あとのヒストグラム ＝ 山の形</a:t>
+            </a:r>
+          </a:p>
+        </p:txBody>
+      </p:sp>
+    </p:spTree>
+  </p:cSld>
+  <p:clrMapOvr>
+    <a:masterClrMapping/>
+  </p:clrMapOvr>
+</p:sld>
+</file>
+
+<file path=ppt/slides/slide44.xml><?xml version="1.0" encoding="utf-8"?>
+<p:sld xmlns:a="http://schemas.openxmlformats.org/drawingml/2006/main" xmlns:p="http://schemas.openxmlformats.org/presentationml/2006/main" xmlns:r="http://schemas.openxmlformats.org/officeDocument/2006/relationships">
+  <p:cSld>
+    <p:spTree>
+      <p:nvGrpSpPr>
+        <p:cNvPr id="1" name=""/>
+        <p:cNvGrpSpPr/>
+        <p:nvPr/>
+      </p:nvGrpSpPr>
+      <p:grpSpPr/>
+      <p:sp>
+        <p:nvSpPr>
+          <p:cNvPr id="2" name="Title 1"/>
+          <p:cNvSpPr>
+            <a:spLocks noGrp="1"/>
+          </p:cNvSpPr>
+          <p:nvPr>
+            <p:ph type="title"/>
+          </p:nvPr>
+        </p:nvSpPr>
+        <p:spPr/>
+        <p:txBody>
+          <a:bodyPr/>
+          <a:lstStyle/>
+          <a:p>
+            <a:r>
+              <a:rPr sz="3000"/>
+              <a:t>④ 32 人で歩く（emcee）</a:t>
+            </a:r>
+          </a:p>
+        </p:txBody>
+      </p:sp>
+      <p:sp>
+        <p:nvSpPr>
+          <p:cNvPr id="3" name="Content Placeholder 2"/>
+          <p:cNvSpPr>
+            <a:spLocks noGrp="1"/>
+          </p:cNvSpPr>
+          <p:nvPr>
+            <p:ph idx="1"/>
+          </p:nvPr>
+        </p:nvSpPr>
+        <p:spPr>
+          <a:xfrm>
+            <a:off x="548640" y="1371600"/>
+            <a:ext cx="5669280" cy="4297680"/>
+          </a:xfrm>
+        </p:spPr>
+        <p:txBody>
+          <a:bodyPr/>
+          <a:lstStyle/>
+          <a:p>
+            <a:pPr/>
+            <a:r>
+              <a:rPr sz="1800"/>
+              <a:t>1 人だと、細長い山で迷いやすい</a:t>
+            </a:r>
+          </a:p>
+          <a:p>
+            <a:pPr lvl="1"/>
+            <a:r>
+              <a:rPr sz="1500"/>
+              <a:t>例：ガスと ICS の縮退。片方を上げて片方を下げても高さがほぼ同じ</a:t>
+            </a:r>
+          </a:p>
+          <a:p>
+            <a:pPr/>
+            <a:r>
+              <a:rPr sz="1800"/>
+              <a:t>そこで 32 人が同時に歩き、仲間の位置を見て一歩を決める</a:t>
+            </a:r>
+          </a:p>
+          <a:p>
+            <a:pPr/>
+            <a:r>
+              <a:rPr sz="1800"/>
+              <a:t>一歩の出し方（ストレッチ移動）</a:t>
+            </a:r>
+          </a:p>
+          <a:p>
+            <a:pPr lvl="1"/>
+            <a:r>
+              <a:rPr sz="1500"/>
+              <a:t>自分 X_k から、ランダムに選んだ仲間 X_j への線を引く</a:t>
+            </a:r>
+          </a:p>
+          <a:p>
+            <a:pPr lvl="1"/>
+            <a:r>
+              <a:rPr sz="1500"/>
+              <a:t>その線の上で、Z 倍（1/2〜2 の乱数）伸ばした点に足を出す</a:t>
+            </a:r>
+          </a:p>
+          <a:p>
+            <a:pPr lvl="1"/>
+            <a:r>
+              <a:rPr sz="1500"/>
+              <a:t>Y = X_j + Z (X_k − X_j)</a:t>
+            </a:r>
+          </a:p>
+          <a:p>
+            <a:pPr/>
+            <a:r>
+              <a:rPr sz="1800"/>
+              <a:t>移るかどうかは ② と同じ考え（Z⁸ を掛けて補正）</a:t>
+            </a:r>
+          </a:p>
+          <a:p>
+            <a:pPr/>
+            <a:r>
+              <a:rPr sz="1800"/>
+              <a:t>出発点：全員、Totani と同じ初期値の近く。6000 歩</a:t>
+            </a:r>
+          </a:p>
+        </p:txBody>
+      </p:sp>
+      <p:sp>
+        <p:nvSpPr>
+          <p:cNvPr id="8" name="TextBox 7">
+            <a:extLst>
+              <a:ext uri="{FF2B5EF4-FFF2-40B4-BE49-F238E27FC236}">
+                <a16:creationId xmlns:a16="http://schemas.microsoft.com/office/drawing/2014/main" id="{F85CD606-E3CE-F314-B3EE-F3D7028115CB}"/>
+              </a:ext>
+            </a:extLst>
+          </p:cNvPr>
+          <p:cNvSpPr txBox="1"/>
+          <p:nvPr/>
+        </p:nvSpPr>
+        <p:spPr>
+          <a:xfrm>
+            <a:off x="5837182" y="5663239"/>
+            <a:ext cx="6093372" cy="923330"/>
+          </a:xfrm>
+          <a:prstGeom prst="rect">
+            <a:avLst/>
+          </a:prstGeom>
+          <a:noFill/>
+        </p:spPr>
+        <p:txBody>
+          <a:bodyPr wrap="square">
+            <a:spAutoFit/>
+          </a:bodyPr>
+          <a:lstStyle/>
+          <a:p>
+            <a:r>
+              <a:rPr lang="en-US" sz="1400" b="1"/>
+              <a:t>Reference:</a:t>
+            </a:r>
+            <a:r>
+              <a:rPr lang="en-US" sz="1400"/>
+              <a:t> J. Goodman &amp; J. Weare (2010), Comm. App. Math. Comp. Sci. 5, 65</a:t>
+            </a:r>
+            <a:endParaRPr lang="en-US"/>
+          </a:p>
+        </p:txBody>
+      </p:sp>
+    </p:spTree>
+  </p:cSld>
+  <p:clrMapOvr>
+    <a:masterClrMapping/>
+  </p:clrMapOvr>
+</p:sld>
+</file>
+
+<file path=ppt/slides/slide45.xml><?xml version="1.0" encoding="utf-8"?>
+<p:sld xmlns:a="http://schemas.openxmlformats.org/drawingml/2006/main" xmlns:p="http://schemas.openxmlformats.org/presentationml/2006/main" xmlns:r="http://schemas.openxmlformats.org/officeDocument/2006/relationships">
+  <p:cSld>
+    <p:spTree>
+      <p:nvGrpSpPr>
+        <p:cNvPr id="1" name=""/>
+        <p:cNvGrpSpPr/>
+        <p:nvPr/>
+      </p:nvGrpSpPr>
+      <p:grpSpPr/>
+      <p:sp>
+        <p:nvSpPr>
+          <p:cNvPr id="2" name="Title 1"/>
+          <p:cNvSpPr>
+            <a:spLocks noGrp="1"/>
+          </p:cNvSpPr>
+          <p:nvPr>
+            <p:ph type="title"/>
+          </p:nvPr>
+        </p:nvSpPr>
+        <p:spPr/>
+        <p:txBody>
+          <a:bodyPr/>
+          <a:lstStyle/>
+          <a:p>
+            <a:r>
+              <a:rPr sz="3000"/>
+              <a:t>⑤ 歩き終わったら：最良値と誤差</a:t>
+            </a:r>
+          </a:p>
+        </p:txBody>
+      </p:sp>
+      <p:sp>
+        <p:nvSpPr>
+          <p:cNvPr id="3" name="Content Placeholder 2"/>
+          <p:cNvSpPr>
+            <a:spLocks noGrp="1"/>
+          </p:cNvSpPr>
+          <p:nvPr>
+            <p:ph idx="1"/>
+          </p:nvPr>
+        </p:nvSpPr>
+        <p:spPr>
+          <a:xfrm>
+            <a:off x="548640" y="1371600"/>
+            <a:ext cx="5669280" cy="4297680"/>
+          </a:xfrm>
+        </p:spPr>
+        <p:txBody>
+          <a:bodyPr/>
+          <a:lstStyle/>
+          <a:p>
+            <a:pPr/>
+            <a:r>
+              <a:rPr sz="1800"/>
+              <a:t>一番高い足あと → 最良の倍率（Totani と同じ）</a:t>
+            </a:r>
+          </a:p>
+          <a:p>
+            <a:pPr lvl="1"/>
+            <a:r>
+              <a:rPr sz="1500"/>
+              <a:t>20.8 GeV：ハローの倍率 1.51</a:t>
+            </a:r>
+          </a:p>
+          <a:p>
+            <a:pPr/>
+            <a:r>
+              <a:rPr sz="1800"/>
+              <a:t>足あとの広がり → 誤差</a:t>
+            </a:r>
+          </a:p>
+          <a:p>
+            <a:pPr lvl="1"/>
+            <a:r>
+              <a:rPr sz="1500"/>
+              <a:t>最初の 400 歩は捨て、下から 16%〜84% の範囲</a:t>
+            </a:r>
+          </a:p>
+          <a:p>
+            <a:pPr lvl="1"/>
+            <a:r>
+              <a:rPr sz="1500"/>
+              <a:t>20.8 GeV：1.43〜1.61</a:t>
+            </a:r>
+          </a:p>
+          <a:p>
+            <a:pPr/>
+            <a:r>
+              <a:rPr sz="1800"/>
+              <a:t>有意度：ハローあり・なしの山を別々に歩く</a:t>
+            </a:r>
+          </a:p>
+          <a:p>
+            <a:pPr lvl="1"/>
+            <a:r>
+              <a:rPr sz="1500"/>
+              <a:t>それぞれの一番高い足あとの高さの差 Δln L → σ = √(2Δln L)</a:t>
+            </a:r>
+          </a:p>
+          <a:p>
+            <a:pPr lvl="1"/>
+            <a:r>
+              <a:rPr sz="1500"/>
+              <a:t>20.8 GeV：19.5σ</a:t>
+            </a:r>
+          </a:p>
+          <a:p>
+            <a:pPr/>
+            <a:r>
+              <a:rPr sz="1800"/>
+              <a:t>注意：山の端まで歩き回るには、もっと長く歩くのが理想</a:t>
+            </a:r>
+          </a:p>
+          <a:p>
+            <a:pPr lvl="1"/>
+            <a:r>
+              <a:rPr sz="1500"/>
+              <a:t>誤差は目安。一番高い足あとは頂上に届いている</a:t>
+            </a:r>
+          </a:p>
+        </p:txBody>
+      </p:sp>
+      <p:sp>
+        <p:nvSpPr>
+          <p:cNvPr id="8" name="TextBox 7">
+            <a:extLst>
+              <a:ext uri="{FF2B5EF4-FFF2-40B4-BE49-F238E27FC236}">
+                <a16:creationId xmlns:a16="http://schemas.microsoft.com/office/drawing/2014/main" id="{F85CD606-E3CE-F314-B3EE-F3D7028115CB}"/>
+              </a:ext>
+            </a:extLst>
+          </p:cNvPr>
+          <p:cNvSpPr txBox="1"/>
+          <p:nvPr/>
+        </p:nvSpPr>
+        <p:spPr>
+          <a:xfrm>
+            <a:off x="5837182" y="5663239"/>
+            <a:ext cx="6093372" cy="923330"/>
+          </a:xfrm>
+          <a:prstGeom prst="rect">
+            <a:avLst/>
+          </a:prstGeom>
+          <a:noFill/>
+        </p:spPr>
+        <p:txBody>
+          <a:bodyPr wrap="square">
+            <a:spAutoFit/>
+          </a:bodyPr>
+          <a:lstStyle/>
+          <a:p>
+            <a:r>
+              <a:rPr lang="en-US" sz="1400" b="1"/>
+              <a:t>Reference:</a:t>
+            </a:r>
+            <a:r>
+              <a:rPr lang="en-US" sz="1400"/>
+              <a:t> T. Totani (2025), arXiv:2507.07209 §2.2</a:t>
+            </a:r>
+            <a:endParaRPr lang="en-US"/>
           </a:p>
         </p:txBody>
       </p:sp>
@@ -11570,7 +12415,7 @@
 </file>
 
 <file path=ppt/slides/slide6.xml><?xml version="1.0" encoding="utf-8"?>
-<p:sld xmlns:a="http://schemas.openxmlformats.org/drawingml/2006/main" xmlns:r="http://schemas.openxmlformats.org/officeDocument/2006/relationships" xmlns:p="http://schemas.openxmlformats.org/presentationml/2006/main">
+<p:sld xmlns:a="http://schemas.openxmlformats.org/drawingml/2006/main" xmlns:p="http://schemas.openxmlformats.org/presentationml/2006/main" xmlns:r="http://schemas.openxmlformats.org/officeDocument/2006/relationships">
   <p:cSld>
     <p:spTree>
       <p:nvGrpSpPr>
@@ -11578,14 +12423,7 @@
         <p:cNvGrpSpPr/>
         <p:nvPr/>
       </p:nvGrpSpPr>
-      <p:grpSpPr>
-        <a:xfrm>
-          <a:off x="0" y="0"/>
-          <a:ext cx="0" cy="0"/>
-          <a:chOff x="0" y="0"/>
-          <a:chExt cx="0" cy="0"/>
-        </a:xfrm>
-      </p:grpSpPr>
+      <p:grpSpPr/>
       <p:sp>
         <p:nvSpPr>
           <p:cNvPr id="2" name="Title 1"/>
@@ -11603,7 +12441,7 @@
           <a:p>
             <a:r>
               <a:rPr sz="3400"/>
-              <a:t>手法③：有意度 σ の出し方</a:t>
+              <a:t>尤度と MCMC の役割分担</a:t>
             </a:r>
           </a:p>
         </p:txBody>
@@ -11628,40 +12466,59 @@
           <a:bodyPr/>
           <a:lstStyle/>
           <a:p>
+            <a:pPr/>
             <a:r>
               <a:rPr sz="2400"/>
-              <a:t>ハロー「あり」と「なし」の 2 通りで当てはめる</a:t>
-            </a:r>
-          </a:p>
-          <a:p>
+              <a:t>尤度 ＝ 点数をつける係（たとえ：高度計）</a:t>
+            </a:r>
+          </a:p>
+          <a:p>
+            <a:pPr lvl="1"/>
+            <a:r>
+              <a:rPr sz="2000"/>
+              <a:t>倍率の組（f_gas, f_ics, …, f_halo）を入れると、予測と観測の合い具合 ln L を返す</a:t>
+            </a:r>
+          </a:p>
+          <a:p>
+            <a:pPr/>
             <a:r>
               <a:rPr sz="2400"/>
-              <a:t>差 Δln L = ln L(あり) − ln L(なし)</a:t>
-            </a:r>
-          </a:p>
-          <a:p>
+              <a:t>MCMC ＝ 倍率を探す係（たとえ：霧の山を歩く人）</a:t>
+            </a:r>
+          </a:p>
+          <a:p>
+            <a:pPr lvl="1"/>
+            <a:r>
+              <a:rPr sz="2000"/>
+              <a:t>倍率の組を少しずつ変えながら歩き、そのたびに尤度で点数をつける</a:t>
+            </a:r>
+          </a:p>
+          <a:p>
+            <a:pPr lvl="1"/>
+            <a:r>
+              <a:rPr sz="2000"/>
+              <a:t>点数が上がる方へは必ず進み、下がる方へもたまに進む</a:t>
+            </a:r>
+          </a:p>
+          <a:p>
+            <a:pPr/>
             <a:r>
               <a:rPr sz="2400"/>
-              <a:t>有意度 σ = √( 2 Δln L )</a:t>
-            </a:r>
-          </a:p>
-          <a:p>
-            <a:r>
-              <a:rPr sz="2400"/>
-              <a:t>根拠：Wilks の定理</a:t>
+              <a:t>歩き終わったら</a:t>
             </a:r>
           </a:p>
           <a:p>
             <a:pPr lvl="1"/>
             <a:r>
               <a:rPr sz="2000"/>
-              <a:t>データが十分多いと、2Δln L は自由度 1 の χ² 分布に従う</a:t>
-            </a:r>
-          </a:p>
-          <a:p>
-            <a:r>
-              <a:rPr sz="2400"/>
-              <a:t>→ この定理が本当に成り立つかが、後で問題になる</a:t>
+              <a:t>歩いた中で点数が一番高かった組 → 最良の倍率（Totani と同じ）</a:t>
+            </a:r>
+          </a:p>
+          <a:p>
+            <a:pPr lvl="1"/>
+            <a:r>
+              <a:rPr sz="2000"/>
+              <a:t>歩いた範囲の広さ → 倍率の誤差</a:t>
             </a:r>
           </a:p>
         </p:txBody>
@@ -11700,7 +12557,7 @@
             </a:r>
             <a:r>
               <a:rPr lang="en-US" sz="1400"/>
-              <a:t> S. S. Wilks (1938), Ann. Math. Stat. 9, 60</a:t>
+              <a:t> T. Totani (2025), arXiv:2507.07209 §2.2</a:t>
             </a:r>
             <a:endParaRPr lang="en-US"/>
           </a:p>
@@ -11748,7 +12605,7 @@
           <a:p>
             <a:r>
               <a:rPr sz="3400"/>
-              <a:t>手法④：MCMC（最良値と誤差）</a:t>
+              <a:t>手法③：有意度 σ の出し方</a:t>
             </a:r>
           </a:p>
         </p:txBody>
@@ -11775,39 +12632,38 @@
           <a:p>
             <a:r>
               <a:rPr sz="2400"/>
-              <a:t>MCMC で、最良の倍率 f と、その誤差の両方を求める（Totani と同じ）</a:t>
+              <a:t>ハロー「あり」と「なし」の 2 通りで当てはめる</a:t>
             </a:r>
           </a:p>
           <a:p>
             <a:r>
               <a:rPr sz="2400"/>
-              <a:t>MCMC：尤度に比例する確率で、パラメータの空間を歩き回る</a:t>
+              <a:t>差 Δln L = ln L(あり) − ln L(なし)</a:t>
+            </a:r>
+          </a:p>
+          <a:p>
+            <a:r>
+              <a:rPr sz="2400"/>
+              <a:t>有意度 σ = √( 2 Δln L )</a:t>
+            </a:r>
+          </a:p>
+          <a:p>
+            <a:r>
+              <a:rPr sz="2400"/>
+              <a:t>根拠：Wilks の定理</a:t>
             </a:r>
           </a:p>
           <a:p>
             <a:pPr lvl="1"/>
             <a:r>
               <a:rPr sz="2000"/>
-              <a:t>歩いた中で尤度が最大の点 = 最良値、歩いた跡の分布 → 誤差棒</a:t>
+              <a:t>データが十分多いと、2Δln L は自由度 1 の χ² 分布に従う</a:t>
             </a:r>
           </a:p>
           <a:p>
             <a:r>
               <a:rPr sz="2400"/>
-              <a:t>emcee を使用：32 本の歩行者 × 6000 歩</a:t>
-            </a:r>
-          </a:p>
-          <a:p>
-            <a:pPr lvl="1"/>
-            <a:r>
-              <a:rPr sz="2000"/>
-              <a:t>出発点は Totani と同じ初期値（点源・GALPROP = 1、他 = 0 など）</a:t>
-            </a:r>
-          </a:p>
-          <a:p>
-            <a:r>
-              <a:rPr sz="2400"/>
-              <a:t>有意度 σ も、ハローあり・なしそれぞれの MCMC で見つけた最大 ln L の差から出す</a:t>
+              <a:t>→ この定理が本当に成り立つかが、後で問題になる</a:t>
             </a:r>
           </a:p>
         </p:txBody>
@@ -11846,7 +12702,7 @@
             </a:r>
             <a:r>
               <a:rPr lang="en-US" sz="1400"/>
-              <a:t> D. Foreman-Mackey et al. (2013), PASP 125, 306</a:t>
+              <a:t> S. S. Wilks (1938), Ann. Math. Stat. 9, 60</a:t>
             </a:r>
             <a:endParaRPr lang="en-US"/>
           </a:p>
@@ -11861,7 +12717,7 @@
 </file>
 
 <file path=ppt/slides/slide8.xml><?xml version="1.0" encoding="utf-8"?>
-<p:sld xmlns:a="http://schemas.openxmlformats.org/drawingml/2006/main" xmlns:p="http://schemas.openxmlformats.org/presentationml/2006/main" xmlns:r="http://schemas.openxmlformats.org/officeDocument/2006/relationships">
+<p:sld xmlns:a="http://schemas.openxmlformats.org/drawingml/2006/main" xmlns:r="http://schemas.openxmlformats.org/officeDocument/2006/relationships" xmlns:p="http://schemas.openxmlformats.org/presentationml/2006/main">
   <p:cSld>
     <p:spTree>
       <p:nvGrpSpPr>
@@ -11869,7 +12725,14 @@
         <p:cNvGrpSpPr/>
         <p:nvPr/>
       </p:nvGrpSpPr>
-      <p:grpSpPr/>
+      <p:grpSpPr>
+        <a:xfrm>
+          <a:off x="0" y="0"/>
+          <a:ext cx="0" cy="0"/>
+          <a:chOff x="0" y="0"/>
+          <a:chExt cx="0" cy="0"/>
+        </a:xfrm>
+      </p:grpSpPr>
       <p:sp>
         <p:nvSpPr>
           <p:cNvPr id="2" name="Title 1"/>
@@ -11887,7 +12750,7 @@
           <a:p>
             <a:r>
               <a:rPr sz="3400"/>
-              <a:t>MCMC の中身①：何を求めているか</a:t>
+              <a:t>手法④：MCMC（最良値と誤差）</a:t>
             </a:r>
           </a:p>
         </p:txBody>
@@ -11912,59 +12775,41 @@
           <a:bodyPr/>
           <a:lstStyle/>
           <a:p>
-            <a:pPr/>
-            <a:r>
-              <a:rPr sz="2200"/>
-              <a:t>知りたいもの：データ D を見たあと、倍率 θ = (f₁, …, f₉) がどの値をとりうるか</a:t>
-            </a:r>
-          </a:p>
-          <a:p>
-            <a:pPr/>
-            <a:r>
-              <a:rPr sz="2200"/>
-              <a:t>ベイズの定理：P(θ | D) = L(D | θ) π(θ) / P(D)</a:t>
+            <a:r>
+              <a:rPr sz="2400"/>
+              <a:t>MCMC で、最良の倍率 f と、その誤差の両方を求める（Totani と同じ）</a:t>
+            </a:r>
+          </a:p>
+          <a:p>
+            <a:r>
+              <a:rPr sz="2400"/>
+              <a:t>MCMC：尤度に比例する確率で、パラメータの空間を歩き回る</a:t>
             </a:r>
           </a:p>
           <a:p>
             <a:pPr lvl="1"/>
             <a:r>
-              <a:rPr sz="1800"/>
-              <a:t>P(θ | D)：事後分布（データを見た後の、θ のもっともらしさ）</a:t>
+              <a:rPr sz="2000"/>
+              <a:t>歩いた中で尤度が最大の点 = 最良値、歩いた跡の分布 → 誤差棒</a:t>
+            </a:r>
+          </a:p>
+          <a:p>
+            <a:r>
+              <a:rPr sz="2400"/>
+              <a:t>emcee を使用：32 本の歩行者 × 6000 歩</a:t>
             </a:r>
           </a:p>
           <a:p>
             <a:pPr lvl="1"/>
             <a:r>
-              <a:rPr sz="1800"/>
-              <a:t>L(D | θ)：尤度（手法② の L）　π(θ)：事前分布（今回は一様）</a:t>
-            </a:r>
-          </a:p>
-          <a:p>
-            <a:pPr lvl="1"/>
-            <a:r>
-              <a:rPr sz="1800"/>
-              <a:t>P(D)：θ によらない定数 → 計算しなくてよい</a:t>
-            </a:r>
-          </a:p>
-          <a:p>
-            <a:pPr/>
-            <a:r>
-              <a:rPr sz="2200"/>
-              <a:t>つまり P(θ | D) ∝ L(D | θ) × π(θ)</a:t>
-            </a:r>
-          </a:p>
-          <a:p>
-            <a:pPr/>
-            <a:r>
-              <a:rPr sz="2200"/>
-              <a:t>ただし θ は 9 次元。1 次元を 100 点に区切っても 100⁹ = 10¹⁸ 通り → 全部は計算できない</a:t>
-            </a:r>
-          </a:p>
-          <a:p>
-            <a:pPr/>
-            <a:r>
-              <a:rPr sz="2200"/>
-              <a:t>→ 事後分布から「サンプルを取り出す」方法が MCMC</a:t>
+              <a:rPr sz="2000"/>
+              <a:t>出発点は Totani と同じ初期値（点源・GALPROP = 1、他 = 0 など）</a:t>
+            </a:r>
+          </a:p>
+          <a:p>
+            <a:r>
+              <a:rPr sz="2400"/>
+              <a:t>有意度 σ も、ハローあり・なしそれぞれの MCMC で見つけた最大 ln L の差から出す</a:t>
             </a:r>
           </a:p>
         </p:txBody>
@@ -12009,187 +12854,6 @@
           </a:p>
         </p:txBody>
       </p:sp>
-    </p:spTree>
-  </p:cSld>
-  <p:clrMapOvr>
-    <a:masterClrMapping/>
-  </p:clrMapOvr>
-</p:sld>
-</file>
-
-<file path=ppt/slides/slide9.xml><?xml version="1.0" encoding="utf-8"?>
-<p:sld xmlns:a="http://schemas.openxmlformats.org/drawingml/2006/main" xmlns:p="http://schemas.openxmlformats.org/presentationml/2006/main" xmlns:r="http://schemas.openxmlformats.org/officeDocument/2006/relationships">
-  <p:cSld>
-    <p:spTree>
-      <p:nvGrpSpPr>
-        <p:cNvPr id="1" name=""/>
-        <p:cNvGrpSpPr/>
-        <p:nvPr/>
-      </p:nvGrpSpPr>
-      <p:grpSpPr/>
-      <p:sp>
-        <p:nvSpPr>
-          <p:cNvPr id="2" name="Title 1"/>
-          <p:cNvSpPr>
-            <a:spLocks noGrp="1"/>
-          </p:cNvSpPr>
-          <p:nvPr>
-            <p:ph type="title"/>
-          </p:nvPr>
-        </p:nvSpPr>
-        <p:spPr/>
-        <p:txBody>
-          <a:bodyPr/>
-          <a:lstStyle/>
-          <a:p>
-            <a:r>
-              <a:rPr sz="3400"/>
-              <a:t>MCMC の中身②：歩き方（メトロポリス法）</a:t>
-            </a:r>
-          </a:p>
-        </p:txBody>
-      </p:sp>
-      <p:sp>
-        <p:nvSpPr>
-          <p:cNvPr id="3" name="Content Placeholder 2"/>
-          <p:cNvSpPr>
-            <a:spLocks noGrp="1"/>
-          </p:cNvSpPr>
-          <p:nvPr>
-            <p:ph idx="1"/>
-          </p:nvPr>
-        </p:nvSpPr>
-        <p:spPr>
-          <a:xfrm>
-            <a:off x="841248" y="1463040"/>
-            <a:ext cx="5394960" cy="4114800"/>
-          </a:xfrm>
-        </p:spPr>
-        <p:txBody>
-          <a:bodyPr/>
-          <a:lstStyle/>
-          <a:p>
-            <a:pPr/>
-            <a:r>
-              <a:rPr sz="2000"/>
-              <a:t>① 今の点 θ から、少しずらした候補 θ′ を作る</a:t>
-            </a:r>
-          </a:p>
-          <a:p>
-            <a:pPr/>
-            <a:r>
-              <a:rPr sz="2000"/>
-              <a:t>② 比 r = P(θ′ | D) / P(θ | D) を計算</a:t>
-            </a:r>
-          </a:p>
-          <a:p>
-            <a:pPr lvl="1"/>
-            <a:r>
-              <a:rPr sz="1600"/>
-              <a:t>P(D) は分母分子で消える</a:t>
-            </a:r>
-          </a:p>
-          <a:p>
-            <a:pPr/>
-            <a:r>
-              <a:rPr sz="2000"/>
-              <a:t>③ r ≥ 1 なら移る。r &lt; 1 なら確率 r で移る</a:t>
-            </a:r>
-          </a:p>
-          <a:p>
-            <a:pPr lvl="1"/>
-            <a:r>
-              <a:rPr sz="1600"/>
-              <a:t>移らなければ、同じ点をもう一度記録</a:t>
-            </a:r>
-          </a:p>
-          <a:p>
-            <a:pPr/>
-            <a:r>
-              <a:rPr sz="2000"/>
-              <a:t>④ ①〜③ を何千回もくり返す</a:t>
-            </a:r>
-          </a:p>
-          <a:p>
-            <a:pPr/>
-            <a:r>
-              <a:rPr sz="2000"/>
-              <a:t>歩いた跡のヒストグラム = 事後分布</a:t>
-            </a:r>
-          </a:p>
-          <a:p>
-            <a:pPr lvl="1"/>
-            <a:r>
-              <a:rPr sz="1600"/>
-              <a:t>下がる方向にも確率的に進むので、山の広がり（誤差）まで分かる</a:t>
-            </a:r>
-          </a:p>
-        </p:txBody>
-      </p:sp>
-      <p:sp>
-        <p:nvSpPr>
-          <p:cNvPr id="8" name="TextBox 7">
-            <a:extLst>
-              <a:ext uri="{FF2B5EF4-FFF2-40B4-BE49-F238E27FC236}">
-                <a16:creationId xmlns:a16="http://schemas.microsoft.com/office/drawing/2014/main" id="{F85CD606-E3CE-F314-B3EE-F3D7028115CB}"/>
-              </a:ext>
-            </a:extLst>
-          </p:cNvPr>
-          <p:cNvSpPr txBox="1"/>
-          <p:nvPr/>
-        </p:nvSpPr>
-        <p:spPr>
-          <a:xfrm>
-            <a:off x="5837182" y="5663239"/>
-            <a:ext cx="6093372" cy="923330"/>
-          </a:xfrm>
-          <a:prstGeom prst="rect">
-            <a:avLst/>
-          </a:prstGeom>
-          <a:noFill/>
-        </p:spPr>
-        <p:txBody>
-          <a:bodyPr wrap="square">
-            <a:spAutoFit/>
-          </a:bodyPr>
-          <a:lstStyle/>
-          <a:p>
-            <a:r>
-              <a:rPr lang="en-US" sz="1400" b="1"/>
-              <a:t>Reference:</a:t>
-            </a:r>
-            <a:r>
-              <a:rPr lang="en-US" sz="1400"/>
-              <a:t> N. Metropolis et al. (1953), J. Chem. Phys. 21, 1087</a:t>
-            </a:r>
-            <a:endParaRPr lang="en-US"/>
-          </a:p>
-        </p:txBody>
-      </p:sp>
-      <p:pic>
-        <p:nvPicPr>
-          <p:cNvPr id="9" name="Picture 8" descr="fig_mcmc_toy.png"/>
-          <p:cNvPicPr>
-            <a:picLocks noChangeAspect="1"/>
-          </p:cNvPicPr>
-          <p:nvPr/>
-        </p:nvPicPr>
-        <p:blipFill>
-          <a:blip r:embed="rId3"/>
-          <a:stretch>
-            <a:fillRect/>
-          </a:stretch>
-        </p:blipFill>
-        <p:spPr>
-          <a:xfrm>
-            <a:off x="6309360" y="1828800"/>
-            <a:ext cx="5669280" cy="2267712"/>
-          </a:xfrm>
-          <a:prstGeom prst="rect">
-            <a:avLst/>
-          </a:prstGeom>
-        </p:spPr>
-      </p:pic>
     </p:spTree>
   </p:cSld>
   <p:clrMapOvr>

--- a/slides/2026-10-02_研究進捗報告_claude.pptx
+++ b/slides/2026-10-02_研究進捗報告_claude.pptx
@@ -12,6 +12,13 @@
     <p:sldId id="257" r:id="rId3"/>
     <p:sldId id="258" r:id="rId4"/>
     <p:sldId id="259" r:id="rId5"/>
+    <p:sldId id="301" r:id="rId46"/>
+    <p:sldId id="302" r:id="rId45"/>
+    <p:sldId id="303" r:id="rId44"/>
+    <p:sldId id="304" r:id="rId54"/>
+    <p:sldId id="305" r:id="rId55"/>
+    <p:sldId id="306" r:id="rId56"/>
+    <p:sldId id="307" r:id="rId57"/>
     <p:sldId id="260" r:id="rId6"/>
     <p:sldId id="294" r:id="rId47"/>
     <p:sldId id="261" r:id="rId7"/>
@@ -2856,6 +2863,261 @@
 </p:notes>
 </file>
 
+<file path=ppt/notesSlides/notesSlide35.xml><?xml version="1.0" encoding="utf-8"?>
+<p:notes xmlns:a="http://schemas.openxmlformats.org/drawingml/2006/main" xmlns:p="http://schemas.openxmlformats.org/presentationml/2006/main" xmlns:r="http://schemas.openxmlformats.org/officeDocument/2006/relationships">
+  <p:cSld>
+    <p:spTree>
+      <p:nvGrpSpPr>
+        <p:cNvPr id="1" name=""/>
+        <p:cNvGrpSpPr/>
+        <p:nvPr/>
+      </p:nvGrpSpPr>
+      <p:grpSpPr>
+        <a:xfrm>
+          <a:off x="0" y="0"/>
+          <a:ext cx="0" cy="0"/>
+          <a:chOff x="0" y="0"/>
+          <a:chExt cx="0" cy="0"/>
+        </a:xfrm>
+      </p:grpSpPr>
+      <p:sp>
+        <p:nvSpPr>
+          <p:cNvPr id="2" name="Slide Image Placeholder 1"/>
+          <p:cNvSpPr>
+            <a:spLocks noGrp="1"/>
+          </p:cNvSpPr>
+          <p:nvPr>
+            <p:ph type="sldImg" idx="2"/>
+          </p:nvPr>
+        </p:nvSpPr>
+        <p:spPr/>
+      </p:sp>
+      <p:sp>
+        <p:nvSpPr>
+          <p:cNvPr id="3" name="Notes Placeholder 2"/>
+          <p:cNvSpPr>
+            <a:spLocks noGrp="1"/>
+          </p:cNvSpPr>
+          <p:nvPr>
+            <p:ph type="body" idx="3" sz="quarter"/>
+          </p:nvPr>
+        </p:nvSpPr>
+        <p:spPr/>
+        <p:txBody>
+          <a:bodyPr/>
+          <a:lstStyle/>
+          <a:p>
+            <a:r>
+              <a:t>逆コンプトン散乱: 普通のコンプトン散乱は光が電子をはね飛ばす。ここでは逆で、とても速い電子が、低いエネルギーの光にエネルギーを渡して、ガンマ線にする。</a:t>
+            </a:r>
+          </a:p>
+          <a:p>
+            <a:r>
+              <a:t>ガスの型紙と違って雲の模様が無く、なめらか。ハローもなめらかで中心に向かって明るいので、2 つの形が似ている (問題のスライドで説明する縮退)。</a:t>
+            </a:r>
+          </a:p>
+          <a:p>
+            <a:r>
+              <a:t>GALPROP の設定は IC_anisotropic = 0 (等方近似)。</a:t>
+            </a:r>
+          </a:p>
+          <a:p>
+            <a:r>
+              <a:t>右の地図: 20.8 GeV の型紙 (倍率は掛けていない。形だけを見る図)。cloud_reports/2026-10-02_plot_templates.py で作成。</a:t>
+            </a:r>
+          </a:p>
+        </p:txBody>
+      </p:sp>
+      <p:sp>
+        <p:nvSpPr>
+          <p:cNvPr id="4" name="Slide Number Placeholder 3"/>
+          <p:cNvSpPr>
+            <a:spLocks noGrp="1"/>
+          </p:cNvSpPr>
+          <p:nvPr>
+            <p:ph type="sldNum" idx="5" sz="quarter"/>
+          </p:nvPr>
+        </p:nvSpPr>
+        <p:spPr/>
+      </p:sp>
+    </p:spTree>
+  </p:cSld>
+  <p:clrMapOvr>
+    <a:masterClrMapping/>
+  </p:clrMapOvr>
+</p:notes>
+</file>
+
+<file path=ppt/notesSlides/notesSlide36.xml><?xml version="1.0" encoding="utf-8"?>
+<p:notes xmlns:a="http://schemas.openxmlformats.org/drawingml/2006/main" xmlns:p="http://schemas.openxmlformats.org/presentationml/2006/main" xmlns:r="http://schemas.openxmlformats.org/officeDocument/2006/relationships">
+  <p:cSld>
+    <p:spTree>
+      <p:nvGrpSpPr>
+        <p:cNvPr id="1" name=""/>
+        <p:cNvGrpSpPr/>
+        <p:nvPr/>
+      </p:nvGrpSpPr>
+      <p:grpSpPr>
+        <a:xfrm>
+          <a:off x="0" y="0"/>
+          <a:ext cx="0" cy="0"/>
+          <a:chOff x="0" y="0"/>
+          <a:chExt cx="0" cy="0"/>
+        </a:xfrm>
+      </p:grpSpPr>
+      <p:sp>
+        <p:nvSpPr>
+          <p:cNvPr id="2" name="Slide Image Placeholder 1"/>
+          <p:cNvSpPr>
+            <a:spLocks noGrp="1"/>
+          </p:cNvSpPr>
+          <p:nvPr>
+            <p:ph type="sldImg" idx="2"/>
+          </p:nvPr>
+        </p:nvSpPr>
+        <p:spPr/>
+      </p:sp>
+      <p:sp>
+        <p:nvSpPr>
+          <p:cNvPr id="3" name="Notes Placeholder 2"/>
+          <p:cNvSpPr>
+            <a:spLocks noGrp="1"/>
+          </p:cNvSpPr>
+          <p:nvPr>
+            <p:ph type="body" idx="3" sz="quarter"/>
+          </p:nvPr>
+        </p:nvSpPr>
+        <p:spPr/>
+        <p:txBody>
+          <a:bodyPr/>
+          <a:lstStyle/>
+          <a:p>
+            <a:r>
+              <a:t>GALPROP: 宇宙線が銀河の中でどう生まれ、どう広がるかを計算し、そこから出るガンマ線の地図を作るシミュレーション (ver. 54、設定 SLZ6R30T150C2。Fermi-LAT チームの銀河拡散モデルでも使われている設定)。</a:t>
+            </a:r>
+          </a:p>
+          <a:p>
+            <a:r>
+              <a:t>π⁰ は電気を持たない中間子で、できるとすぐ (10⁻¹⁶ 秒ほど) 光子 2 個に壊れる。</a:t>
+            </a:r>
+          </a:p>
+          <a:p>
+            <a:r>
+              <a:t>ガス雲の模様は、電波 (水素の 21 cm 線) や、ちりによる星の光の赤み (E(B−V)) から作ったガスの地図に由来する。</a:t>
+            </a:r>
+          </a:p>
+          <a:p>
+            <a:r>
+              <a:t>右の地図: 20.8 GeV の型紙 (倍率は掛けていない。形だけを見る図)。cloud_reports/2026-10-02_plot_templates.py で作成。</a:t>
+            </a:r>
+          </a:p>
+        </p:txBody>
+      </p:sp>
+      <p:sp>
+        <p:nvSpPr>
+          <p:cNvPr id="4" name="Slide Number Placeholder 3"/>
+          <p:cNvSpPr>
+            <a:spLocks noGrp="1"/>
+          </p:cNvSpPr>
+          <p:nvPr>
+            <p:ph type="sldNum" idx="5" sz="quarter"/>
+          </p:nvPr>
+        </p:nvSpPr>
+        <p:spPr/>
+      </p:sp>
+    </p:spTree>
+  </p:cSld>
+  <p:clrMapOvr>
+    <a:masterClrMapping/>
+  </p:clrMapOvr>
+</p:notes>
+</file>
+
+<file path=ppt/notesSlides/notesSlide37.xml><?xml version="1.0" encoding="utf-8"?>
+<p:notes xmlns:a="http://schemas.openxmlformats.org/drawingml/2006/main" xmlns:p="http://schemas.openxmlformats.org/presentationml/2006/main" xmlns:r="http://schemas.openxmlformats.org/officeDocument/2006/relationships">
+  <p:cSld>
+    <p:spTree>
+      <p:nvGrpSpPr>
+        <p:cNvPr id="1" name=""/>
+        <p:cNvGrpSpPr/>
+        <p:nvPr/>
+      </p:nvGrpSpPr>
+      <p:grpSpPr>
+        <a:xfrm>
+          <a:off x="0" y="0"/>
+          <a:ext cx="0" cy="0"/>
+          <a:chOff x="0" y="0"/>
+          <a:chExt cx="0" cy="0"/>
+        </a:xfrm>
+      </p:grpSpPr>
+      <p:sp>
+        <p:nvSpPr>
+          <p:cNvPr id="2" name="Slide Image Placeholder 1"/>
+          <p:cNvSpPr>
+            <a:spLocks noGrp="1"/>
+          </p:cNvSpPr>
+          <p:nvPr>
+            <p:ph type="sldImg" idx="2"/>
+          </p:nvPr>
+        </p:nvSpPr>
+        <p:spPr/>
+      </p:sp>
+      <p:sp>
+        <p:nvSpPr>
+          <p:cNvPr id="3" name="Notes Placeholder 2"/>
+          <p:cNvSpPr>
+            <a:spLocks noGrp="1"/>
+          </p:cNvSpPr>
+          <p:nvPr>
+            <p:ph type="body" idx="3" sz="quarter"/>
+          </p:nvPr>
+        </p:nvSpPr>
+        <p:spPr/>
+        <p:txBody>
+          <a:bodyPr/>
+          <a:lstStyle/>
+          <a:p>
+            <a:r>
+              <a:t>たとえ: 部屋の壁全体がぼんやり同じ明るさで光っている、その「底上げ」の明るさ。</a:t>
+            </a:r>
+          </a:p>
+          <a:p>
+            <a:r>
+              <a:t>最初の値 10⁻⁴ は、これまでに測られた「銀河の外から来るガンマ線の背景」の典型的な明るさ (Totani §2.3)。</a:t>
+            </a:r>
+          </a:p>
+          <a:p>
+            <a:r>
+              <a:t>Loop I との区別: 殻 1 は太陽が殻の壁の中にあるため空のほぼ全体を覆い、明るさの変化が等方背景と同じくらい平ら。データからは 2 つの分け方が決まらず、合計だけが決まる (.dev/TOTANI_SPEC.md 3.7a)。</a:t>
+            </a:r>
+          </a:p>
+          <a:p>
+            <a:r>
+              <a:t>右の地図: 20.8 GeV の型紙 (倍率は掛けていない。形だけを見る図)。cloud_reports/2026-10-02_plot_templates.py で作成。</a:t>
+            </a:r>
+          </a:p>
+        </p:txBody>
+      </p:sp>
+      <p:sp>
+        <p:nvSpPr>
+          <p:cNvPr id="4" name="Slide Number Placeholder 3"/>
+          <p:cNvSpPr>
+            <a:spLocks noGrp="1"/>
+          </p:cNvSpPr>
+          <p:nvPr>
+            <p:ph type="sldNum" idx="5" sz="quarter"/>
+          </p:nvPr>
+        </p:nvSpPr>
+        <p:spPr/>
+      </p:sp>
+    </p:spTree>
+  </p:cSld>
+  <p:clrMapOvr>
+    <a:masterClrMapping/>
+  </p:clrMapOvr>
+</p:notes>
+</file>
+
 <file path=ppt/notesSlides/notesSlide38.xml><?xml version="1.0" encoding="utf-8"?>
 <p:notes xmlns:a="http://schemas.openxmlformats.org/drawingml/2006/main" xmlns:p="http://schemas.openxmlformats.org/presentationml/2006/main" xmlns:r="http://schemas.openxmlformats.org/officeDocument/2006/relationships">
   <p:cSld>
@@ -3517,6 +3779,351 @@
           <a:p>
             <a:r>
               <a:t>スクショ候補: 一番高い足あとを探す行 (879〜880 行)、誤差の 16〜84% (926 行)、有意度 (910 行)。コードは code/mcmc_fit_all_bins.py (Totani 方式の修正 cloud_reports/2026-10-02_totani_bestfit.patch を当てた後の行番号)。</a:t>
+            </a:r>
+          </a:p>
+        </p:txBody>
+      </p:sp>
+      <p:sp>
+        <p:nvSpPr>
+          <p:cNvPr id="4" name="Slide Number Placeholder 3"/>
+          <p:cNvSpPr>
+            <a:spLocks noGrp="1"/>
+          </p:cNvSpPr>
+          <p:nvPr>
+            <p:ph type="sldNum" idx="5" sz="quarter"/>
+          </p:nvPr>
+        </p:nvSpPr>
+        <p:spPr/>
+      </p:sp>
+    </p:spTree>
+  </p:cSld>
+  <p:clrMapOvr>
+    <a:masterClrMapping/>
+  </p:clrMapOvr>
+</p:notes>
+</file>
+
+<file path=ppt/notesSlides/notesSlide45.xml><?xml version="1.0" encoding="utf-8"?>
+<p:notes xmlns:a="http://schemas.openxmlformats.org/drawingml/2006/main" xmlns:p="http://schemas.openxmlformats.org/presentationml/2006/main" xmlns:r="http://schemas.openxmlformats.org/officeDocument/2006/relationships">
+  <p:cSld>
+    <p:spTree>
+      <p:nvGrpSpPr>
+        <p:cNvPr id="1" name=""/>
+        <p:cNvGrpSpPr/>
+        <p:nvPr/>
+      </p:nvGrpSpPr>
+      <p:grpSpPr>
+        <a:xfrm>
+          <a:off x="0" y="0"/>
+          <a:ext cx="0" cy="0"/>
+          <a:chOff x="0" y="0"/>
+          <a:chExt cx="0" cy="0"/>
+        </a:xfrm>
+      </p:grpSpPr>
+      <p:sp>
+        <p:nvSpPr>
+          <p:cNvPr id="2" name="Slide Image Placeholder 1"/>
+          <p:cNvSpPr>
+            <a:spLocks noGrp="1"/>
+          </p:cNvSpPr>
+          <p:nvPr>
+            <p:ph type="sldImg" idx="2"/>
+          </p:nvPr>
+        </p:nvSpPr>
+        <p:spPr/>
+      </p:sp>
+      <p:sp>
+        <p:nvSpPr>
+          <p:cNvPr id="3" name="Notes Placeholder 2"/>
+          <p:cNvSpPr>
+            <a:spLocks noGrp="1"/>
+          </p:cNvSpPr>
+          <p:nvPr>
+            <p:ph type="body" idx="3" sz="quarter"/>
+          </p:nvPr>
+        </p:nvSpPr>
+        <p:spPr/>
+        <p:txBody>
+          <a:bodyPr/>
+          <a:lstStyle/>
+          <a:p>
+            <a:r>
+              <a:t>4FGL-DR4: Fermi-LAT の 14 年分のデータで見つかった天体のカタログ (gll_psc_v35.fit)。</a:t>
+            </a:r>
+          </a:p>
+          <a:p>
+            <a:r>
+              <a:t>PSF (点広がり関数): 望遠鏡で点を撮っても少しぼやけて写る、そのぼやけ方。エネルギーが低いほど大きくぼやける (1 GeV で約 0.85°、10 GeV で約 0.16°)。</a:t>
+            </a:r>
+          </a:p>
+          <a:p>
+            <a:r>
+              <a:t>拡張源: 大マゼラン雲や Cen A のローブのように、点ではなく広がって見える天体。Totani §2.3 と同じく、長半径の 2 倍の円を外す。</a:t>
+            </a:r>
+          </a:p>
+          <a:p>
+            <a:r>
+              <a:t>右の地図: 20.8 GeV の型紙 (倍率は掛けていない。形だけを見る図)。cloud_reports/2026-10-02_plot_templates.py で作成。</a:t>
+            </a:r>
+          </a:p>
+        </p:txBody>
+      </p:sp>
+      <p:sp>
+        <p:nvSpPr>
+          <p:cNvPr id="4" name="Slide Number Placeholder 3"/>
+          <p:cNvSpPr>
+            <a:spLocks noGrp="1"/>
+          </p:cNvSpPr>
+          <p:nvPr>
+            <p:ph type="sldNum" idx="5" sz="quarter"/>
+          </p:nvPr>
+        </p:nvSpPr>
+        <p:spPr/>
+      </p:sp>
+    </p:spTree>
+  </p:cSld>
+  <p:clrMapOvr>
+    <a:masterClrMapping/>
+  </p:clrMapOvr>
+</p:notes>
+</file>
+
+<file path=ppt/notesSlides/notesSlide46.xml><?xml version="1.0" encoding="utf-8"?>
+<p:notes xmlns:a="http://schemas.openxmlformats.org/drawingml/2006/main" xmlns:p="http://schemas.openxmlformats.org/presentationml/2006/main" xmlns:r="http://schemas.openxmlformats.org/officeDocument/2006/relationships">
+  <p:cSld>
+    <p:spTree>
+      <p:nvGrpSpPr>
+        <p:cNvPr id="1" name=""/>
+        <p:cNvGrpSpPr/>
+        <p:nvPr/>
+      </p:nvGrpSpPr>
+      <p:grpSpPr>
+        <a:xfrm>
+          <a:off x="0" y="0"/>
+          <a:ext cx="0" cy="0"/>
+          <a:chOff x="0" y="0"/>
+          <a:chExt cx="0" cy="0"/>
+        </a:xfrm>
+      </p:grpSpPr>
+      <p:sp>
+        <p:nvSpPr>
+          <p:cNvPr id="2" name="Slide Image Placeholder 1"/>
+          <p:cNvSpPr>
+            <a:spLocks noGrp="1"/>
+          </p:cNvSpPr>
+          <p:nvPr>
+            <p:ph type="sldImg" idx="2"/>
+          </p:nvPr>
+        </p:nvSpPr>
+        <p:spPr/>
+      </p:sp>
+      <p:sp>
+        <p:nvSpPr>
+          <p:cNvPr id="3" name="Notes Placeholder 2"/>
+          <p:cNvSpPr>
+            <a:spLocks noGrp="1"/>
+          </p:cNvSpPr>
+          <p:nvPr>
+            <p:ph type="body" idx="3" sz="quarter"/>
+          </p:nvPr>
+        </p:nvSpPr>
+        <p:spPr/>
+        <p:txBody>
+          <a:bodyPr/>
+          <a:lstStyle/>
+          <a:p>
+            <a:r>
+              <a:t>pc (パーセク) は距離の単位で、1 pc ≈ 3.26 光年。太陽から殻の中心までは 78 pc と 95 pc。</a:t>
+            </a:r>
+          </a:p>
+          <a:p>
+            <a:r>
+              <a:t>殻 1 は太陽が殻の壁の中にあるので、空のほぼ全体を覆う (左の地図)。そのため等方背景と区別しにくい。</a:t>
+            </a:r>
+          </a:p>
+          <a:p>
+            <a:r>
+              <a:t>超新星の残骸: 星が爆発したときに吹き飛んだガスが、泡のように広がったもの。</a:t>
+            </a:r>
+          </a:p>
+          <a:p>
+            <a:r>
+              <a:t>右の地図: 20.8 GeV の型紙 (倍率は掛けていない。形だけを見る図)。cloud_reports/2026-10-02_plot_templates.py で作成。</a:t>
+            </a:r>
+          </a:p>
+        </p:txBody>
+      </p:sp>
+      <p:sp>
+        <p:nvSpPr>
+          <p:cNvPr id="4" name="Slide Number Placeholder 3"/>
+          <p:cNvSpPr>
+            <a:spLocks noGrp="1"/>
+          </p:cNvSpPr>
+          <p:nvPr>
+            <p:ph type="sldNum" idx="5" sz="quarter"/>
+          </p:nvPr>
+        </p:nvSpPr>
+        <p:spPr/>
+      </p:sp>
+    </p:spTree>
+  </p:cSld>
+  <p:clrMapOvr>
+    <a:masterClrMapping/>
+  </p:clrMapOvr>
+</p:notes>
+</file>
+
+<file path=ppt/notesSlides/notesSlide47.xml><?xml version="1.0" encoding="utf-8"?>
+<p:notes xmlns:a="http://schemas.openxmlformats.org/drawingml/2006/main" xmlns:p="http://schemas.openxmlformats.org/presentationml/2006/main" xmlns:r="http://schemas.openxmlformats.org/officeDocument/2006/relationships">
+  <p:cSld>
+    <p:spTree>
+      <p:nvGrpSpPr>
+        <p:cNvPr id="1" name=""/>
+        <p:cNvGrpSpPr/>
+        <p:nvPr/>
+      </p:nvGrpSpPr>
+      <p:grpSpPr>
+        <a:xfrm>
+          <a:off x="0" y="0"/>
+          <a:ext cx="0" cy="0"/>
+          <a:chOff x="0" y="0"/>
+          <a:chExt cx="0" cy="0"/>
+        </a:xfrm>
+      </p:grpSpPr>
+      <p:sp>
+        <p:nvSpPr>
+          <p:cNvPr id="2" name="Slide Image Placeholder 1"/>
+          <p:cNvSpPr>
+            <a:spLocks noGrp="1"/>
+          </p:cNvSpPr>
+          <p:nvPr>
+            <p:ph type="sldImg" idx="2"/>
+          </p:nvPr>
+        </p:nvSpPr>
+        <p:spPr/>
+      </p:sp>
+      <p:sp>
+        <p:nvSpPr>
+          <p:cNvPr id="3" name="Notes Placeholder 2"/>
+          <p:cNvSpPr>
+            <a:spLocks noGrp="1"/>
+          </p:cNvSpPr>
+          <p:nvPr>
+            <p:ph type="body" idx="3" sz="quarter"/>
+          </p:nvPr>
+        </p:nvSpPr>
+        <p:spPr/>
+        <p:txBody>
+          <a:bodyPr/>
+          <a:lstStyle/>
+          <a:p>
+            <a:r>
+              <a:t>なぜデータから作るか: バブルの正確な形を予言する理論が無いため。Totani は Fermi-LAT チームのやり方にならい、当てはめの残りから形を作った。</a:t>
+            </a:r>
+          </a:p>
+          <a:p>
+            <a:r>
+              <a:t>4.3 GeV の地図を使うのは、バブルがはっきり見えるため (Totani §3.1)。形はエネルギーで変えず、明るさ (倍率) だけを各エネルギーで決める。</a:t>
+            </a:r>
+          </a:p>
+          <a:p>
+            <a:r>
+              <a:t>負の型紙: 当てはめで光が余らなかった (予測が多すぎた) 場所。主に GALPROP の予測とデータのずれ。符号自由の倍率を掛けて補正に使う。</a:t>
+            </a:r>
+          </a:p>
+          <a:p>
+            <a:r>
+              <a:t>左の地図が正、右が負 (負の残差の大きさ)。</a:t>
+            </a:r>
+          </a:p>
+          <a:p>
+            <a:r>
+              <a:t>右の地図: 20.8 GeV の型紙 (倍率は掛けていない。形だけを見る図)。cloud_reports/2026-10-02_plot_templates.py で作成。</a:t>
+            </a:r>
+          </a:p>
+        </p:txBody>
+      </p:sp>
+      <p:sp>
+        <p:nvSpPr>
+          <p:cNvPr id="4" name="Slide Number Placeholder 3"/>
+          <p:cNvSpPr>
+            <a:spLocks noGrp="1"/>
+          </p:cNvSpPr>
+          <p:nvPr>
+            <p:ph type="sldNum" idx="5" sz="quarter"/>
+          </p:nvPr>
+        </p:nvSpPr>
+        <p:spPr/>
+      </p:sp>
+    </p:spTree>
+  </p:cSld>
+  <p:clrMapOvr>
+    <a:masterClrMapping/>
+  </p:clrMapOvr>
+</p:notes>
+</file>
+
+<file path=ppt/notesSlides/notesSlide48.xml><?xml version="1.0" encoding="utf-8"?>
+<p:notes xmlns:a="http://schemas.openxmlformats.org/drawingml/2006/main" xmlns:p="http://schemas.openxmlformats.org/presentationml/2006/main" xmlns:r="http://schemas.openxmlformats.org/officeDocument/2006/relationships">
+  <p:cSld>
+    <p:spTree>
+      <p:nvGrpSpPr>
+        <p:cNvPr id="1" name=""/>
+        <p:cNvGrpSpPr/>
+        <p:nvPr/>
+      </p:nvGrpSpPr>
+      <p:grpSpPr>
+        <a:xfrm>
+          <a:off x="0" y="0"/>
+          <a:ext cx="0" cy="0"/>
+          <a:chOff x="0" y="0"/>
+          <a:chExt cx="0" cy="0"/>
+        </a:xfrm>
+      </p:grpSpPr>
+      <p:sp>
+        <p:nvSpPr>
+          <p:cNvPr id="2" name="Slide Image Placeholder 1"/>
+          <p:cNvSpPr>
+            <a:spLocks noGrp="1"/>
+          </p:cNvSpPr>
+          <p:nvPr>
+            <p:ph type="sldImg" idx="2"/>
+          </p:nvPr>
+        </p:nvSpPr>
+        <p:spPr/>
+      </p:sp>
+      <p:sp>
+        <p:nvSpPr>
+          <p:cNvPr id="3" name="Notes Placeholder 2"/>
+          <p:cNvSpPr>
+            <a:spLocks noGrp="1"/>
+          </p:cNvSpPr>
+          <p:nvPr>
+            <p:ph type="body" idx="3" sz="quarter"/>
+          </p:nvPr>
+        </p:nvSpPr>
+        <p:spPr/>
+        <p:txBody>
+          <a:bodyPr/>
+          <a:lstStyle/>
+          <a:p>
+            <a:r>
+              <a:t>NFW: シミュレーションで得られる暗黒物質ハローの典型的な密度の形。中心付近では距離に反比例、外側では距離の 3 乗に反比例して薄くなる。</a:t>
+            </a:r>
+          </a:p>
+          <a:p>
+            <a:r>
+              <a:t>形はエネルギーで変わらない (どのエネルギーでも同じ地図)。明るさ (倍率) だけを各エネルギーで決める。だから「どのエネルギーでハローが必要か」が有意度のスペクトルになる。</a:t>
+            </a:r>
+          </a:p>
+          <a:p>
+            <a:r>
+              <a:t>ICS と同じく、なめらかで中心に向かって明るい。違いは、ハローのほうが中心に強く集まっていること。</a:t>
+            </a:r>
+          </a:p>
+          <a:p>
+            <a:r>
+              <a:t>右の地図: 20.8 GeV の型紙 (倍率は掛けていない。形だけを見る図)。cloud_reports/2026-10-02_plot_templates.py で作成。</a:t>
             </a:r>
           </a:p>
         </p:txBody>
@@ -7259,7 +7866,2037 @@
 </p:sld>
 </file>
 
+<file path=ppt/slides/slide10.xml><?xml version="1.0" encoding="utf-8"?>
+<p:sld xmlns:a="http://schemas.openxmlformats.org/drawingml/2006/main" xmlns:p="http://schemas.openxmlformats.org/presentationml/2006/main" xmlns:r="http://schemas.openxmlformats.org/officeDocument/2006/relationships">
+  <p:cSld>
+    <p:spTree>
+      <p:nvGrpSpPr>
+        <p:cNvPr id="1" name=""/>
+        <p:cNvGrpSpPr/>
+        <p:nvPr/>
+      </p:nvGrpSpPr>
+      <p:grpSpPr/>
+      <p:sp>
+        <p:nvSpPr>
+          <p:cNvPr id="2" name="Title 1"/>
+          <p:cNvSpPr>
+            <a:spLocks noGrp="1"/>
+          </p:cNvSpPr>
+          <p:nvPr>
+            <p:ph type="title"/>
+          </p:nvPr>
+        </p:nvSpPr>
+        <p:spPr/>
+        <p:txBody>
+          <a:bodyPr/>
+          <a:lstStyle/>
+          <a:p>
+            <a:r>
+              <a:rPr sz="3000"/>
+              <a:t>成分⑥：フェルミバブル（正・負）</a:t>
+            </a:r>
+          </a:p>
+        </p:txBody>
+      </p:sp>
+      <p:sp>
+        <p:nvSpPr>
+          <p:cNvPr id="3" name="Content Placeholder 2"/>
+          <p:cNvSpPr>
+            <a:spLocks noGrp="1"/>
+          </p:cNvSpPr>
+          <p:nvPr>
+            <p:ph idx="1"/>
+          </p:nvPr>
+        </p:nvSpPr>
+        <p:spPr>
+          <a:xfrm>
+            <a:off x="548640" y="1371600"/>
+            <a:ext cx="6400800" cy="4297680"/>
+          </a:xfrm>
+        </p:spPr>
+        <p:txBody>
+          <a:bodyPr/>
+          <a:lstStyle/>
+          <a:p>
+            <a:pPr/>
+            <a:r>
+              <a:rPr sz="1800"/>
+              <a:t>銀河中心の上下に、それぞれ約 50° 広がる巨大な泡</a:t>
+            </a:r>
+          </a:p>
+          <a:p>
+            <a:pPr lvl="1"/>
+            <a:r>
+              <a:rPr sz="1500"/>
+              <a:t>過去の銀河中心の活動（ブラックホールや爆発的な星形成）の名残と考えられている</a:t>
+            </a:r>
+          </a:p>
+          <a:p>
+            <a:pPr/>
+            <a:r>
+              <a:rPr sz="1800"/>
+              <a:t>型紙はデータから作る（Totani §3.1）</a:t>
+            </a:r>
+          </a:p>
+          <a:p>
+            <a:pPr lvl="1"/>
+            <a:r>
+              <a:rPr sz="1500"/>
+              <a:t>まず平らな泡の形で当てはめ、残った光（4.3 GeV）を 1° でぼかす</a:t>
+            </a:r>
+          </a:p>
+          <a:p>
+            <a:pPr lvl="1"/>
+            <a:r>
+              <a:rPr sz="1500"/>
+              <a:t>残りが正の所 → 正の型紙（バブル本体）</a:t>
+            </a:r>
+          </a:p>
+          <a:p>
+            <a:pPr lvl="1"/>
+            <a:r>
+              <a:rPr sz="1500"/>
+              <a:t>残りが負の所 → 負の型紙（GALPROP とデータのずれの補正）</a:t>
+            </a:r>
+          </a:p>
+          <a:p>
+            <a:pPr/>
+            <a:r>
+              <a:rPr sz="1800"/>
+              <a:t>倍率：正は 0 以上、負は符号自由。最初は 0</a:t>
+            </a:r>
+          </a:p>
+        </p:txBody>
+      </p:sp>
+      <p:pic>
+        <p:nvPicPr>
+          <p:cNvPr id="4" name="Picture 3" descr="template_fb.png"/>
+          <p:cNvPicPr>
+            <a:picLocks noChangeAspect="1"/>
+          </p:cNvPicPr>
+          <p:nvPr/>
+        </p:nvPicPr>
+        <p:blipFill>
+          <a:blip r:embed="rId2"/>
+          <a:stretch>
+            <a:fillRect/>
+          </a:stretch>
+        </p:blipFill>
+        <p:spPr>
+          <a:xfrm>
+            <a:off x="7086600" y="1828800"/>
+            <a:ext cx="2468880" cy="2563837"/>
+          </a:xfrm>
+          <a:prstGeom prst="rect">
+            <a:avLst/>
+          </a:prstGeom>
+        </p:spPr>
+      </p:pic>
+      <p:pic>
+        <p:nvPicPr>
+          <p:cNvPr id="5" name="Picture 4" descr="template_fb_neg.png"/>
+          <p:cNvPicPr>
+            <a:picLocks noChangeAspect="1"/>
+          </p:cNvPicPr>
+          <p:nvPr/>
+        </p:nvPicPr>
+        <p:blipFill>
+          <a:blip r:embed="rId3"/>
+          <a:stretch>
+            <a:fillRect/>
+          </a:stretch>
+        </p:blipFill>
+        <p:spPr>
+          <a:xfrm>
+            <a:off x="9601200" y="1828800"/>
+            <a:ext cx="2468880" cy="2563837"/>
+          </a:xfrm>
+          <a:prstGeom prst="rect">
+            <a:avLst/>
+          </a:prstGeom>
+        </p:spPr>
+      </p:pic>
+      <p:sp>
+        <p:nvSpPr>
+          <p:cNvPr id="8" name="TextBox 7">
+            <a:extLst>
+              <a:ext uri="{FF2B5EF4-FFF2-40B4-BE49-F238E27FC236}">
+                <a16:creationId xmlns:a16="http://schemas.microsoft.com/office/drawing/2014/main" id="{F85CD606-E3CE-F314-B3EE-F3D7028115CB}"/>
+              </a:ext>
+            </a:extLst>
+          </p:cNvPr>
+          <p:cNvSpPr txBox="1"/>
+          <p:nvPr/>
+        </p:nvSpPr>
+        <p:spPr>
+          <a:xfrm>
+            <a:off x="5837182" y="5663239"/>
+            <a:ext cx="6093372" cy="923330"/>
+          </a:xfrm>
+          <a:prstGeom prst="rect">
+            <a:avLst/>
+          </a:prstGeom>
+          <a:noFill/>
+        </p:spPr>
+        <p:txBody>
+          <a:bodyPr wrap="square">
+            <a:spAutoFit/>
+          </a:bodyPr>
+          <a:lstStyle/>
+          <a:p>
+            <a:r>
+              <a:rPr lang="en-US" sz="1400" b="1"/>
+              <a:t>Reference:</a:t>
+            </a:r>
+            <a:r>
+              <a:rPr lang="en-US" sz="1400"/>
+              <a:t> T. Totani (2025), arXiv:2507.07209 §3.1</a:t>
+            </a:r>
+            <a:endParaRPr lang="en-US"/>
+          </a:p>
+        </p:txBody>
+      </p:sp>
+    </p:spTree>
+  </p:cSld>
+  <p:clrMapOvr>
+    <a:masterClrMapping/>
+  </p:clrMapOvr>
+</p:sld>
+</file>
+
+<file path=ppt/slides/slide11.xml><?xml version="1.0" encoding="utf-8"?>
+<p:sld xmlns:a="http://schemas.openxmlformats.org/drawingml/2006/main" xmlns:p="http://schemas.openxmlformats.org/presentationml/2006/main" xmlns:r="http://schemas.openxmlformats.org/officeDocument/2006/relationships">
+  <p:cSld>
+    <p:spTree>
+      <p:nvGrpSpPr>
+        <p:cNvPr id="1" name=""/>
+        <p:cNvGrpSpPr/>
+        <p:nvPr/>
+      </p:nvGrpSpPr>
+      <p:grpSpPr/>
+      <p:sp>
+        <p:nvSpPr>
+          <p:cNvPr id="2" name="Title 1"/>
+          <p:cNvSpPr>
+            <a:spLocks noGrp="1"/>
+          </p:cNvSpPr>
+          <p:nvPr>
+            <p:ph type="title"/>
+          </p:nvPr>
+        </p:nvSpPr>
+        <p:spPr/>
+        <p:txBody>
+          <a:bodyPr/>
+          <a:lstStyle/>
+          <a:p>
+            <a:r>
+              <a:rPr sz="3000"/>
+              <a:t>成分⑦：ハロー（探しているもの）</a:t>
+            </a:r>
+          </a:p>
+        </p:txBody>
+      </p:sp>
+      <p:sp>
+        <p:nvSpPr>
+          <p:cNvPr id="3" name="Content Placeholder 2"/>
+          <p:cNvSpPr>
+            <a:spLocks noGrp="1"/>
+          </p:cNvSpPr>
+          <p:nvPr>
+            <p:ph idx="1"/>
+          </p:nvPr>
+        </p:nvSpPr>
+        <p:spPr>
+          <a:xfrm>
+            <a:off x="548640" y="1371600"/>
+            <a:ext cx="6400800" cy="4297680"/>
+          </a:xfrm>
+        </p:spPr>
+        <p:txBody>
+          <a:bodyPr/>
+          <a:lstStyle/>
+          <a:p>
+            <a:pPr/>
+            <a:r>
+              <a:rPr sz="1800"/>
+              <a:t>暗黒物質の粒子どうしがぶつかって消え（対消滅）、ガンマ線を出す</a:t>
+            </a:r>
+          </a:p>
+          <a:p>
+            <a:pPr/>
+            <a:r>
+              <a:rPr sz="1800"/>
+              <a:t>明るさ ∝ 密度の 2 乗（粒子が 2 つ要るため）</a:t>
+            </a:r>
+          </a:p>
+          <a:p>
+            <a:pPr lvl="1"/>
+            <a:r>
+              <a:rPr sz="1500"/>
+              <a:t>それを視線方向に足し合わせたもの = J ファクター</a:t>
+            </a:r>
+          </a:p>
+          <a:p>
+            <a:pPr/>
+            <a:r>
+              <a:rPr sz="1800"/>
+              <a:t>密度の形：NFW（Via Lactea II のシミュレーション）</a:t>
+            </a:r>
+          </a:p>
+          <a:p>
+            <a:pPr lvl="1"/>
+            <a:r>
+              <a:rPr sz="1500"/>
+              <a:t>rs = 21 kpc、太陽の位置で 0.42 GeV/cm³</a:t>
+            </a:r>
+          </a:p>
+          <a:p>
+            <a:pPr/>
+            <a:r>
+              <a:rPr sz="1800"/>
+              <a:t>形：銀河中心に向かって明るく、なめらかに広がる</a:t>
+            </a:r>
+          </a:p>
+          <a:p>
+            <a:pPr/>
+            <a:r>
+              <a:rPr sz="1800"/>
+              <a:t>倍率：符号自由（負も許す）、最初は 0</a:t>
+            </a:r>
+          </a:p>
+          <a:p>
+            <a:pPr lvl="1"/>
+            <a:r>
+              <a:rPr sz="1500"/>
+              <a:t>あるか分からないものを探すので、偏りを作らないため</a:t>
+            </a:r>
+          </a:p>
+        </p:txBody>
+      </p:sp>
+      <p:pic>
+        <p:nvPicPr>
+          <p:cNvPr id="4" name="Picture 3" descr="template_halo.png"/>
+          <p:cNvPicPr>
+            <a:picLocks noChangeAspect="1"/>
+          </p:cNvPicPr>
+          <p:nvPr/>
+        </p:nvPicPr>
+        <p:blipFill>
+          <a:blip r:embed="rId2"/>
+          <a:stretch>
+            <a:fillRect/>
+          </a:stretch>
+        </p:blipFill>
+        <p:spPr>
+          <a:xfrm>
+            <a:off x="7223760" y="1188720"/>
+            <a:ext cx="4314613" cy="4480560"/>
+          </a:xfrm>
+          <a:prstGeom prst="rect">
+            <a:avLst/>
+          </a:prstGeom>
+        </p:spPr>
+      </p:pic>
+      <p:sp>
+        <p:nvSpPr>
+          <p:cNvPr id="8" name="TextBox 7">
+            <a:extLst>
+              <a:ext uri="{FF2B5EF4-FFF2-40B4-BE49-F238E27FC236}">
+                <a16:creationId xmlns:a16="http://schemas.microsoft.com/office/drawing/2014/main" id="{F85CD606-E3CE-F314-B3EE-F3D7028115CB}"/>
+              </a:ext>
+            </a:extLst>
+          </p:cNvPr>
+          <p:cNvSpPr txBox="1"/>
+          <p:nvPr/>
+        </p:nvSpPr>
+        <p:spPr>
+          <a:xfrm>
+            <a:off x="5837182" y="5663239"/>
+            <a:ext cx="6093372" cy="923330"/>
+          </a:xfrm>
+          <a:prstGeom prst="rect">
+            <a:avLst/>
+          </a:prstGeom>
+          <a:noFill/>
+        </p:spPr>
+        <p:txBody>
+          <a:bodyPr wrap="square">
+            <a:spAutoFit/>
+          </a:bodyPr>
+          <a:lstStyle/>
+          <a:p>
+            <a:r>
+              <a:rPr lang="en-US" sz="1400" b="1"/>
+              <a:t>Reference:</a:t>
+            </a:r>
+            <a:r>
+              <a:rPr lang="en-US" sz="1400"/>
+              <a:t> T. Totani (2025), arXiv:2507.07209 §2.3</a:t>
+            </a:r>
+            <a:endParaRPr lang="en-US"/>
+          </a:p>
+        </p:txBody>
+      </p:sp>
+    </p:spTree>
+  </p:cSld>
+  <p:clrMapOvr>
+    <a:masterClrMapping/>
+  </p:clrMapOvr>
+</p:sld>
+</file>
+
 <file path=ppt/slides/slide12.xml><?xml version="1.0" encoding="utf-8"?>
+<p:sld xmlns:a="http://schemas.openxmlformats.org/drawingml/2006/main" xmlns:r="http://schemas.openxmlformats.org/officeDocument/2006/relationships" xmlns:p="http://schemas.openxmlformats.org/presentationml/2006/main">
+  <p:cSld>
+    <p:spTree>
+      <p:nvGrpSpPr>
+        <p:cNvPr id="1" name=""/>
+        <p:cNvGrpSpPr/>
+        <p:nvPr/>
+      </p:nvGrpSpPr>
+      <p:grpSpPr>
+        <a:xfrm>
+          <a:off x="0" y="0"/>
+          <a:ext cx="0" cy="0"/>
+          <a:chOff x="0" y="0"/>
+          <a:chExt cx="0" cy="0"/>
+        </a:xfrm>
+      </p:grpSpPr>
+      <p:sp>
+        <p:nvSpPr>
+          <p:cNvPr id="2" name="Title 1"/>
+          <p:cNvSpPr>
+            <a:spLocks noGrp="1"/>
+          </p:cNvSpPr>
+          <p:nvPr>
+            <p:ph type="title"/>
+          </p:nvPr>
+        </p:nvSpPr>
+        <p:spPr/>
+        <p:txBody>
+          <a:bodyPr/>
+          <a:lstStyle/>
+          <a:p>
+            <a:r>
+              <a:rPr sz="3400"/>
+              <a:t>手法②：尤度（どれだけ合っているか）</a:t>
+            </a:r>
+          </a:p>
+        </p:txBody>
+      </p:sp>
+      <p:sp>
+        <p:nvSpPr>
+          <p:cNvPr id="3" name="Content Placeholder 2"/>
+          <p:cNvSpPr>
+            <a:spLocks noGrp="1"/>
+          </p:cNvSpPr>
+          <p:nvPr>
+            <p:ph idx="1"/>
+          </p:nvPr>
+        </p:nvSpPr>
+        <p:spPr>
+          <a:xfrm>
+            <a:off x="841248" y="1463040"/>
+            <a:ext cx="10515600" cy="4114800"/>
+          </a:xfrm>
+        </p:spPr>
+        <p:txBody>
+          <a:bodyPr/>
+          <a:lstStyle/>
+          <a:p>
+            <a:r>
+              <a:rPr sz="2400"/>
+              <a:t>光子の数はポアソン分布でばらつく</a:t>
+            </a:r>
+          </a:p>
+          <a:p>
+            <a:r>
+              <a:rPr sz="2400"/>
+              <a:t>尤度：ln L = Σ_i [ C_obs,i ln C_exp,i − C_exp,i ]</a:t>
+            </a:r>
+          </a:p>
+          <a:p>
+            <a:pPr lvl="1"/>
+            <a:r>
+              <a:rPr sz="2000"/>
+              <a:t>C_obs：観測した光子数、C_exp：予測した光子数</a:t>
+            </a:r>
+          </a:p>
+          <a:p>
+            <a:pPr lvl="1"/>
+            <a:r>
+              <a:rPr sz="2000"/>
+              <a:t>i：10° × 10° のセル（空をマス目に分ける）</a:t>
+            </a:r>
+          </a:p>
+          <a:p>
+            <a:r>
+              <a:rPr sz="2400"/>
+              <a:t>ln L が最大になる倍率 f を探す（最尤推定）</a:t>
+            </a:r>
+          </a:p>
+        </p:txBody>
+      </p:sp>
+      <p:pic>
+        <p:nvPicPr>
+          <p:cNvPr id="6" name="Picture 5" descr="fig_bin6_before_after_totani.png"/>
+          <p:cNvPicPr>
+            <a:picLocks noChangeAspect="1"/>
+          </p:cNvPicPr>
+          <p:nvPr/>
+        </p:nvPicPr>
+        <p:blipFill>
+          <a:blip r:embed="rId4"/>
+          <a:srcRect/>
+          <a:stretch>
+            <a:fillRect/>
+          </a:stretch>
+        </p:blipFill>
+        <p:spPr>
+          <a:xfrm>
+            <a:off x="2551565" y="3749403"/>
+            <a:ext cx="5751094" cy="3014367"/>
+          </a:xfrm>
+          <a:prstGeom prst="rect">
+            <a:avLst/>
+          </a:prstGeom>
+        </p:spPr>
+      </p:pic>
+    </p:spTree>
+  </p:cSld>
+  <p:clrMapOvr>
+    <a:masterClrMapping/>
+  </p:clrMapOvr>
+</p:sld>
+</file>
+
+<file path=ppt/slides/slide13.xml><?xml version="1.0" encoding="utf-8"?>
+<p:sld xmlns:a="http://schemas.openxmlformats.org/drawingml/2006/main" xmlns:p="http://schemas.openxmlformats.org/presentationml/2006/main" xmlns:r="http://schemas.openxmlformats.org/officeDocument/2006/relationships">
+  <p:cSld>
+    <p:spTree>
+      <p:nvGrpSpPr>
+        <p:cNvPr id="1" name=""/>
+        <p:cNvGrpSpPr/>
+        <p:nvPr/>
+      </p:nvGrpSpPr>
+      <p:grpSpPr/>
+      <p:sp>
+        <p:nvSpPr>
+          <p:cNvPr id="2" name="Title 1"/>
+          <p:cNvSpPr>
+            <a:spLocks noGrp="1"/>
+          </p:cNvSpPr>
+          <p:nvPr>
+            <p:ph type="title"/>
+          </p:nvPr>
+        </p:nvSpPr>
+        <p:spPr/>
+        <p:txBody>
+          <a:bodyPr/>
+          <a:lstStyle/>
+          <a:p>
+            <a:r>
+              <a:rPr sz="3400"/>
+              <a:t>尤度と MCMC の役割分担</a:t>
+            </a:r>
+          </a:p>
+        </p:txBody>
+      </p:sp>
+      <p:sp>
+        <p:nvSpPr>
+          <p:cNvPr id="3" name="Content Placeholder 2"/>
+          <p:cNvSpPr>
+            <a:spLocks noGrp="1"/>
+          </p:cNvSpPr>
+          <p:nvPr>
+            <p:ph idx="1"/>
+          </p:nvPr>
+        </p:nvSpPr>
+        <p:spPr>
+          <a:xfrm>
+            <a:off x="841248" y="1463040"/>
+            <a:ext cx="10515600" cy="4114800"/>
+          </a:xfrm>
+        </p:spPr>
+        <p:txBody>
+          <a:bodyPr/>
+          <a:lstStyle/>
+          <a:p>
+            <a:pPr/>
+            <a:r>
+              <a:rPr sz="2400"/>
+              <a:t>尤度 ＝ 点数をつける係（たとえ：高度計）</a:t>
+            </a:r>
+          </a:p>
+          <a:p>
+            <a:pPr lvl="1"/>
+            <a:r>
+              <a:rPr sz="2000"/>
+              <a:t>倍率の組（f_gas, f_ics, …, f_halo）を入れると、予測と観測の合い具合 ln L を返す</a:t>
+            </a:r>
+          </a:p>
+          <a:p>
+            <a:pPr/>
+            <a:r>
+              <a:rPr sz="2400"/>
+              <a:t>MCMC ＝ 倍率を探す係（たとえ：霧の山を歩く人）</a:t>
+            </a:r>
+          </a:p>
+          <a:p>
+            <a:pPr lvl="1"/>
+            <a:r>
+              <a:rPr sz="2000"/>
+              <a:t>倍率の組を少しずつ変えながら歩き、そのたびに尤度で点数をつける</a:t>
+            </a:r>
+          </a:p>
+          <a:p>
+            <a:pPr lvl="1"/>
+            <a:r>
+              <a:rPr sz="2000"/>
+              <a:t>点数が上がる方へは必ず進み、下がる方へもたまに進む</a:t>
+            </a:r>
+          </a:p>
+          <a:p>
+            <a:pPr/>
+            <a:r>
+              <a:rPr sz="2400"/>
+              <a:t>歩き終わったら</a:t>
+            </a:r>
+          </a:p>
+          <a:p>
+            <a:pPr lvl="1"/>
+            <a:r>
+              <a:rPr sz="2000"/>
+              <a:t>歩いた中で点数が一番高かった組 → 最良の倍率（Totani と同じ）</a:t>
+            </a:r>
+          </a:p>
+          <a:p>
+            <a:pPr lvl="1"/>
+            <a:r>
+              <a:rPr sz="2000"/>
+              <a:t>歩いた範囲の広さ → 倍率の誤差</a:t>
+            </a:r>
+          </a:p>
+        </p:txBody>
+      </p:sp>
+      <p:sp>
+        <p:nvSpPr>
+          <p:cNvPr id="8" name="TextBox 7">
+            <a:extLst>
+              <a:ext uri="{FF2B5EF4-FFF2-40B4-BE49-F238E27FC236}">
+                <a16:creationId xmlns:a16="http://schemas.microsoft.com/office/drawing/2014/main" id="{F85CD606-E3CE-F314-B3EE-F3D7028115CB}"/>
+              </a:ext>
+            </a:extLst>
+          </p:cNvPr>
+          <p:cNvSpPr txBox="1"/>
+          <p:nvPr/>
+        </p:nvSpPr>
+        <p:spPr>
+          <a:xfrm>
+            <a:off x="5837182" y="5663239"/>
+            <a:ext cx="6093372" cy="923330"/>
+          </a:xfrm>
+          <a:prstGeom prst="rect">
+            <a:avLst/>
+          </a:prstGeom>
+          <a:noFill/>
+        </p:spPr>
+        <p:txBody>
+          <a:bodyPr wrap="square">
+            <a:spAutoFit/>
+          </a:bodyPr>
+          <a:lstStyle/>
+          <a:p>
+            <a:r>
+              <a:rPr lang="en-US" sz="1400" b="1"/>
+              <a:t>Reference:</a:t>
+            </a:r>
+            <a:r>
+              <a:rPr lang="en-US" sz="1400"/>
+              <a:t> T. Totani (2025), arXiv:2507.07209 §2.2</a:t>
+            </a:r>
+            <a:endParaRPr lang="en-US"/>
+          </a:p>
+        </p:txBody>
+      </p:sp>
+    </p:spTree>
+  </p:cSld>
+  <p:clrMapOvr>
+    <a:masterClrMapping/>
+  </p:clrMapOvr>
+</p:sld>
+</file>
+
+<file path=ppt/slides/slide14.xml><?xml version="1.0" encoding="utf-8"?>
+<p:sld xmlns:a="http://schemas.openxmlformats.org/drawingml/2006/main" xmlns:r="http://schemas.openxmlformats.org/officeDocument/2006/relationships" xmlns:p="http://schemas.openxmlformats.org/presentationml/2006/main">
+  <p:cSld>
+    <p:spTree>
+      <p:nvGrpSpPr>
+        <p:cNvPr id="1" name=""/>
+        <p:cNvGrpSpPr/>
+        <p:nvPr/>
+      </p:nvGrpSpPr>
+      <p:grpSpPr>
+        <a:xfrm>
+          <a:off x="0" y="0"/>
+          <a:ext cx="0" cy="0"/>
+          <a:chOff x="0" y="0"/>
+          <a:chExt cx="0" cy="0"/>
+        </a:xfrm>
+      </p:grpSpPr>
+      <p:sp>
+        <p:nvSpPr>
+          <p:cNvPr id="2" name="Title 1"/>
+          <p:cNvSpPr>
+            <a:spLocks noGrp="1"/>
+          </p:cNvSpPr>
+          <p:nvPr>
+            <p:ph type="title"/>
+          </p:nvPr>
+        </p:nvSpPr>
+        <p:spPr/>
+        <p:txBody>
+          <a:bodyPr/>
+          <a:lstStyle/>
+          <a:p>
+            <a:r>
+              <a:rPr sz="3400"/>
+              <a:t>手法③：有意度 σ の出し方</a:t>
+            </a:r>
+          </a:p>
+        </p:txBody>
+      </p:sp>
+      <p:sp>
+        <p:nvSpPr>
+          <p:cNvPr id="3" name="Content Placeholder 2"/>
+          <p:cNvSpPr>
+            <a:spLocks noGrp="1"/>
+          </p:cNvSpPr>
+          <p:nvPr>
+            <p:ph idx="1"/>
+          </p:nvPr>
+        </p:nvSpPr>
+        <p:spPr>
+          <a:xfrm>
+            <a:off x="841248" y="1463040"/>
+            <a:ext cx="10515600" cy="4114800"/>
+          </a:xfrm>
+        </p:spPr>
+        <p:txBody>
+          <a:bodyPr/>
+          <a:lstStyle/>
+          <a:p>
+            <a:r>
+              <a:rPr sz="2400"/>
+              <a:t>ハロー「あり」と「なし」の 2 通りで当てはめる</a:t>
+            </a:r>
+          </a:p>
+          <a:p>
+            <a:r>
+              <a:rPr sz="2400"/>
+              <a:t>差 Δln L = ln L(あり) − ln L(なし)</a:t>
+            </a:r>
+          </a:p>
+          <a:p>
+            <a:r>
+              <a:rPr sz="2400"/>
+              <a:t>有意度 σ = √( 2 Δln L )</a:t>
+            </a:r>
+          </a:p>
+          <a:p>
+            <a:r>
+              <a:rPr sz="2400"/>
+              <a:t>根拠：Wilks の定理</a:t>
+            </a:r>
+          </a:p>
+          <a:p>
+            <a:pPr lvl="1"/>
+            <a:r>
+              <a:rPr sz="2000"/>
+              <a:t>データが十分多いと、2Δln L は自由度 1 の χ² 分布に従う</a:t>
+            </a:r>
+          </a:p>
+          <a:p>
+            <a:r>
+              <a:rPr sz="2400"/>
+              <a:t>→ この定理が本当に成り立つかが、後で問題になる</a:t>
+            </a:r>
+          </a:p>
+        </p:txBody>
+      </p:sp>
+      <p:sp>
+        <p:nvSpPr>
+          <p:cNvPr id="8" name="TextBox 7">
+            <a:extLst>
+              <a:ext uri="{FF2B5EF4-FFF2-40B4-BE49-F238E27FC236}">
+                <a16:creationId xmlns:a16="http://schemas.microsoft.com/office/drawing/2014/main" id="{F85CD606-E3CE-F314-B3EE-F3D7028115CB}"/>
+              </a:ext>
+            </a:extLst>
+          </p:cNvPr>
+          <p:cNvSpPr txBox="1"/>
+          <p:nvPr/>
+        </p:nvSpPr>
+        <p:spPr>
+          <a:xfrm>
+            <a:off x="5837182" y="5663239"/>
+            <a:ext cx="6093372" cy="923330"/>
+          </a:xfrm>
+          <a:prstGeom prst="rect">
+            <a:avLst/>
+          </a:prstGeom>
+          <a:noFill/>
+        </p:spPr>
+        <p:txBody>
+          <a:bodyPr wrap="square">
+            <a:spAutoFit/>
+          </a:bodyPr>
+          <a:lstStyle/>
+          <a:p>
+            <a:r>
+              <a:rPr lang="en-US" sz="1400" b="1"/>
+              <a:t>Reference:</a:t>
+            </a:r>
+            <a:r>
+              <a:rPr lang="en-US" sz="1400"/>
+              <a:t> S. S. Wilks (1938), Ann. Math. Stat. 9, 60</a:t>
+            </a:r>
+            <a:endParaRPr lang="en-US"/>
+          </a:p>
+        </p:txBody>
+      </p:sp>
+    </p:spTree>
+  </p:cSld>
+  <p:clrMapOvr>
+    <a:masterClrMapping/>
+  </p:clrMapOvr>
+</p:sld>
+</file>
+
+<file path=ppt/slides/slide15.xml><?xml version="1.0" encoding="utf-8"?>
+<p:sld xmlns:a="http://schemas.openxmlformats.org/drawingml/2006/main" xmlns:r="http://schemas.openxmlformats.org/officeDocument/2006/relationships" xmlns:p="http://schemas.openxmlformats.org/presentationml/2006/main">
+  <p:cSld>
+    <p:spTree>
+      <p:nvGrpSpPr>
+        <p:cNvPr id="1" name=""/>
+        <p:cNvGrpSpPr/>
+        <p:nvPr/>
+      </p:nvGrpSpPr>
+      <p:grpSpPr>
+        <a:xfrm>
+          <a:off x="0" y="0"/>
+          <a:ext cx="0" cy="0"/>
+          <a:chOff x="0" y="0"/>
+          <a:chExt cx="0" cy="0"/>
+        </a:xfrm>
+      </p:grpSpPr>
+      <p:sp>
+        <p:nvSpPr>
+          <p:cNvPr id="2" name="Title 1"/>
+          <p:cNvSpPr>
+            <a:spLocks noGrp="1"/>
+          </p:cNvSpPr>
+          <p:nvPr>
+            <p:ph type="title"/>
+          </p:nvPr>
+        </p:nvSpPr>
+        <p:spPr/>
+        <p:txBody>
+          <a:bodyPr/>
+          <a:lstStyle/>
+          <a:p>
+            <a:r>
+              <a:rPr sz="3400"/>
+              <a:t>手法④：MCMC（最良値と誤差）</a:t>
+            </a:r>
+          </a:p>
+        </p:txBody>
+      </p:sp>
+      <p:sp>
+        <p:nvSpPr>
+          <p:cNvPr id="3" name="Content Placeholder 2"/>
+          <p:cNvSpPr>
+            <a:spLocks noGrp="1"/>
+          </p:cNvSpPr>
+          <p:nvPr>
+            <p:ph idx="1"/>
+          </p:nvPr>
+        </p:nvSpPr>
+        <p:spPr>
+          <a:xfrm>
+            <a:off x="841248" y="1463040"/>
+            <a:ext cx="10515600" cy="4114800"/>
+          </a:xfrm>
+        </p:spPr>
+        <p:txBody>
+          <a:bodyPr/>
+          <a:lstStyle/>
+          <a:p>
+            <a:r>
+              <a:rPr sz="2400"/>
+              <a:t>MCMC で、最良の倍率 f と、その誤差の両方を求める（Totani と同じ）</a:t>
+            </a:r>
+          </a:p>
+          <a:p>
+            <a:r>
+              <a:rPr sz="2400"/>
+              <a:t>MCMC：尤度に比例する確率で、パラメータの空間を歩き回る</a:t>
+            </a:r>
+          </a:p>
+          <a:p>
+            <a:pPr lvl="1"/>
+            <a:r>
+              <a:rPr sz="2000"/>
+              <a:t>歩いた中で尤度が最大の点 = 最良値、歩いた跡の分布 → 誤差棒</a:t>
+            </a:r>
+          </a:p>
+          <a:p>
+            <a:r>
+              <a:rPr sz="2400"/>
+              <a:t>emcee を使用：32 本の歩行者 × 6000 歩</a:t>
+            </a:r>
+          </a:p>
+          <a:p>
+            <a:pPr lvl="1"/>
+            <a:r>
+              <a:rPr sz="2000"/>
+              <a:t>出発点は Totani と同じ初期値（点源・GALPROP = 1、他 = 0 など）</a:t>
+            </a:r>
+          </a:p>
+          <a:p>
+            <a:r>
+              <a:rPr sz="2400"/>
+              <a:t>有意度 σ も、ハローあり・なしそれぞれの MCMC で見つけた最大 ln L の差から出す</a:t>
+            </a:r>
+          </a:p>
+        </p:txBody>
+      </p:sp>
+      <p:sp>
+        <p:nvSpPr>
+          <p:cNvPr id="8" name="TextBox 7">
+            <a:extLst>
+              <a:ext uri="{FF2B5EF4-FFF2-40B4-BE49-F238E27FC236}">
+                <a16:creationId xmlns:a16="http://schemas.microsoft.com/office/drawing/2014/main" id="{F85CD606-E3CE-F314-B3EE-F3D7028115CB}"/>
+              </a:ext>
+            </a:extLst>
+          </p:cNvPr>
+          <p:cNvSpPr txBox="1"/>
+          <p:nvPr/>
+        </p:nvSpPr>
+        <p:spPr>
+          <a:xfrm>
+            <a:off x="5837182" y="5663239"/>
+            <a:ext cx="6093372" cy="923330"/>
+          </a:xfrm>
+          <a:prstGeom prst="rect">
+            <a:avLst/>
+          </a:prstGeom>
+          <a:noFill/>
+        </p:spPr>
+        <p:txBody>
+          <a:bodyPr wrap="square">
+            <a:spAutoFit/>
+          </a:bodyPr>
+          <a:lstStyle/>
+          <a:p>
+            <a:r>
+              <a:rPr lang="en-US" sz="1400" b="1"/>
+              <a:t>Reference:</a:t>
+            </a:r>
+            <a:r>
+              <a:rPr lang="en-US" sz="1400"/>
+              <a:t> D. Foreman-Mackey et al. (2013), PASP 125, 306</a:t>
+            </a:r>
+            <a:endParaRPr lang="en-US"/>
+          </a:p>
+        </p:txBody>
+      </p:sp>
+    </p:spTree>
+  </p:cSld>
+  <p:clrMapOvr>
+    <a:masterClrMapping/>
+  </p:clrMapOvr>
+</p:sld>
+</file>
+
+<file path=ppt/slides/slide16.xml><?xml version="1.0" encoding="utf-8"?>
+<p:sld xmlns:a="http://schemas.openxmlformats.org/drawingml/2006/main" xmlns:p="http://schemas.openxmlformats.org/presentationml/2006/main" xmlns:r="http://schemas.openxmlformats.org/officeDocument/2006/relationships">
+  <p:cSld>
+    <p:spTree>
+      <p:nvGrpSpPr>
+        <p:cNvPr id="1" name=""/>
+        <p:cNvGrpSpPr/>
+        <p:nvPr/>
+      </p:nvGrpSpPr>
+      <p:grpSpPr/>
+      <p:sp>
+        <p:nvSpPr>
+          <p:cNvPr id="2" name="Title 1"/>
+          <p:cNvSpPr>
+            <a:spLocks noGrp="1"/>
+          </p:cNvSpPr>
+          <p:nvPr>
+            <p:ph type="title"/>
+          </p:nvPr>
+        </p:nvSpPr>
+        <p:spPr/>
+        <p:txBody>
+          <a:bodyPr/>
+          <a:lstStyle/>
+          <a:p>
+            <a:r>
+              <a:rPr sz="3000"/>
+              <a:t>MCMC をたとえで見る：霧の山を歩く</a:t>
+            </a:r>
+          </a:p>
+        </p:txBody>
+      </p:sp>
+      <p:sp>
+        <p:nvSpPr>
+          <p:cNvPr id="3" name="Content Placeholder 2"/>
+          <p:cNvSpPr>
+            <a:spLocks noGrp="1"/>
+          </p:cNvSpPr>
+          <p:nvPr>
+            <p:ph idx="1"/>
+          </p:nvPr>
+        </p:nvSpPr>
+        <p:spPr>
+          <a:xfrm>
+            <a:off x="548640" y="1371600"/>
+            <a:ext cx="5669280" cy="4297680"/>
+          </a:xfrm>
+        </p:spPr>
+        <p:txBody>
+          <a:bodyPr/>
+          <a:lstStyle/>
+          <a:p>
+            <a:pPr/>
+            <a:r>
+              <a:rPr sz="1800"/>
+              <a:t>山の上の「場所」 → 倍率の組 θ</a:t>
+            </a:r>
+          </a:p>
+          <a:p>
+            <a:pPr lvl="1"/>
+            <a:r>
+              <a:rPr sz="1500"/>
+              <a:t>θ = (f_iso, f_gas, f_ics, …, f_halo)。9 個あるので 9 次元の山</a:t>
+            </a:r>
+          </a:p>
+          <a:p>
+            <a:pPr/>
+            <a:r>
+              <a:rPr sz="1800"/>
+              <a:t>その場所の「高さ」 → 点数（事後分布）</a:t>
+            </a:r>
+          </a:p>
+          <a:p>
+            <a:pPr/>
+            <a:r>
+              <a:rPr sz="1800"/>
+              <a:t>「高度計」 → 尤度の計算（手法② の ln L）</a:t>
+            </a:r>
+          </a:p>
+          <a:p>
+            <a:pPr/>
+            <a:r>
+              <a:rPr sz="1800"/>
+              <a:t>「立ち入り禁止の場所」 → 事前分布</a:t>
+            </a:r>
+          </a:p>
+          <a:p>
+            <a:pPr lvl="1"/>
+            <a:r>
+              <a:rPr sz="1500"/>
+              <a:t>例：ガスや ICS の倍率は負にならない</a:t>
+            </a:r>
+          </a:p>
+          <a:p>
+            <a:pPr/>
+            <a:r>
+              <a:rPr sz="1800"/>
+              <a:t>「歩く人」 → 歩行者（walker）。今回は 32 人</a:t>
+            </a:r>
+          </a:p>
+          <a:p>
+            <a:pPr/>
+            <a:r>
+              <a:rPr sz="1800"/>
+              <a:t>「足あとの記録」 → チェーン（サンプル）</a:t>
+            </a:r>
+          </a:p>
+          <a:p>
+            <a:pPr/>
+            <a:r>
+              <a:rPr sz="1800"/>
+              <a:t>「一番高い足あと」 → 最良値</a:t>
+            </a:r>
+          </a:p>
+          <a:p>
+            <a:pPr/>
+            <a:r>
+              <a:rPr sz="1800"/>
+              <a:t>「足あとの広がり」 → 誤差</a:t>
+            </a:r>
+          </a:p>
+        </p:txBody>
+      </p:sp>
+    </p:spTree>
+  </p:cSld>
+  <p:clrMapOvr>
+    <a:masterClrMapping/>
+  </p:clrMapOvr>
+</p:sld>
+</file>
+
+<file path=ppt/slides/slide17.xml><?xml version="1.0" encoding="utf-8"?>
+<p:sld xmlns:a="http://schemas.openxmlformats.org/drawingml/2006/main" xmlns:p="http://schemas.openxmlformats.org/presentationml/2006/main" xmlns:r="http://schemas.openxmlformats.org/officeDocument/2006/relationships">
+  <p:cSld>
+    <p:spTree>
+      <p:nvGrpSpPr>
+        <p:cNvPr id="1" name=""/>
+        <p:cNvGrpSpPr/>
+        <p:nvPr/>
+      </p:nvGrpSpPr>
+      <p:grpSpPr/>
+      <p:sp>
+        <p:nvSpPr>
+          <p:cNvPr id="2" name="Title 1"/>
+          <p:cNvSpPr>
+            <a:spLocks noGrp="1"/>
+          </p:cNvSpPr>
+          <p:nvPr>
+            <p:ph type="title"/>
+          </p:nvPr>
+        </p:nvSpPr>
+        <p:spPr/>
+        <p:txBody>
+          <a:bodyPr/>
+          <a:lstStyle/>
+          <a:p>
+            <a:r>
+              <a:rPr sz="3000"/>
+              <a:t>① 高さ＝点数の決め方（ベイズの定理）</a:t>
+            </a:r>
+          </a:p>
+        </p:txBody>
+      </p:sp>
+      <p:sp>
+        <p:nvSpPr>
+          <p:cNvPr id="3" name="Content Placeholder 2"/>
+          <p:cNvSpPr>
+            <a:spLocks noGrp="1"/>
+          </p:cNvSpPr>
+          <p:nvPr>
+            <p:ph idx="1"/>
+          </p:nvPr>
+        </p:nvSpPr>
+        <p:spPr>
+          <a:xfrm>
+            <a:off x="548640" y="1371600"/>
+            <a:ext cx="5669280" cy="4297680"/>
+          </a:xfrm>
+        </p:spPr>
+        <p:txBody>
+          <a:bodyPr/>
+          <a:lstStyle/>
+          <a:p>
+            <a:pPr/>
+            <a:r>
+              <a:rPr sz="1800"/>
+              <a:t>P(θ | D) = L(D | θ) × π(θ) ÷ P(D)</a:t>
+            </a:r>
+          </a:p>
+          <a:p>
+            <a:pPr/>
+            <a:r>
+              <a:rPr sz="1800"/>
+              <a:t>P(θ | D)：場所 θ の「高さ」（＝点数）</a:t>
+            </a:r>
+          </a:p>
+          <a:p>
+            <a:pPr lvl="1"/>
+            <a:r>
+              <a:rPr sz="1500"/>
+              <a:t>データ D を見た後で、θ がどれくらいもっともらしいか</a:t>
+            </a:r>
+          </a:p>
+          <a:p>
+            <a:pPr/>
+            <a:r>
+              <a:rPr sz="1800"/>
+              <a:t>L(D | θ)：「高度計」の読み（尤度）</a:t>
+            </a:r>
+          </a:p>
+          <a:p>
+            <a:pPr lvl="1"/>
+            <a:r>
+              <a:rPr sz="1500"/>
+              <a:t>倍率が θ のとき、観測した光子の地図 D がどれくらい出やすいか</a:t>
+            </a:r>
+          </a:p>
+          <a:p>
+            <a:pPr/>
+            <a:r>
+              <a:rPr sz="1800"/>
+              <a:t>π(θ)：入ってよい場所か（事前分布）</a:t>
+            </a:r>
+          </a:p>
+          <a:p>
+            <a:pPr lvl="1"/>
+            <a:r>
+              <a:rPr sz="1500"/>
+              <a:t>入れる場所は全部同じ値、立ち入り禁止なら 0</a:t>
+            </a:r>
+          </a:p>
+          <a:p>
+            <a:pPr/>
+            <a:r>
+              <a:rPr sz="1800"/>
+              <a:t>P(D)：海抜の基準。どの場所でも同じ数</a:t>
+            </a:r>
+          </a:p>
+          <a:p>
+            <a:pPr lvl="1"/>
+            <a:r>
+              <a:rPr sz="1500"/>
+              <a:t>「どちらが高いか」を比べるだけなら消える → 計算しなくてよい</a:t>
+            </a:r>
+          </a:p>
+          <a:p>
+            <a:pPr/>
+            <a:r>
+              <a:rPr sz="1800"/>
+              <a:t>計算では対数で：ln(高さ) = ln L + ln π</a:t>
+            </a:r>
+          </a:p>
+        </p:txBody>
+      </p:sp>
+      <p:sp>
+        <p:nvSpPr>
+          <p:cNvPr id="8" name="TextBox 7">
+            <a:extLst>
+              <a:ext uri="{FF2B5EF4-FFF2-40B4-BE49-F238E27FC236}">
+                <a16:creationId xmlns:a16="http://schemas.microsoft.com/office/drawing/2014/main" id="{F85CD606-E3CE-F314-B3EE-F3D7028115CB}"/>
+              </a:ext>
+            </a:extLst>
+          </p:cNvPr>
+          <p:cNvSpPr txBox="1"/>
+          <p:nvPr/>
+        </p:nvSpPr>
+        <p:spPr>
+          <a:xfrm>
+            <a:off x="5837182" y="5663239"/>
+            <a:ext cx="6093372" cy="923330"/>
+          </a:xfrm>
+          <a:prstGeom prst="rect">
+            <a:avLst/>
+          </a:prstGeom>
+          <a:noFill/>
+        </p:spPr>
+        <p:txBody>
+          <a:bodyPr wrap="square">
+            <a:spAutoFit/>
+          </a:bodyPr>
+          <a:lstStyle/>
+          <a:p>
+            <a:r>
+              <a:rPr lang="en-US" sz="1400" b="1"/>
+              <a:t>Reference:</a:t>
+            </a:r>
+            <a:r>
+              <a:rPr lang="en-US" sz="1400"/>
+              <a:t> D. Foreman-Mackey et al. (2013), PASP 125, 306</a:t>
+            </a:r>
+            <a:endParaRPr lang="en-US"/>
+          </a:p>
+        </p:txBody>
+      </p:sp>
+    </p:spTree>
+  </p:cSld>
+  <p:clrMapOvr>
+    <a:masterClrMapping/>
+  </p:clrMapOvr>
+</p:sld>
+</file>
+
+<file path=ppt/slides/slide18.xml><?xml version="1.0" encoding="utf-8"?>
+<p:sld xmlns:a="http://schemas.openxmlformats.org/drawingml/2006/main" xmlns:p="http://schemas.openxmlformats.org/presentationml/2006/main" xmlns:r="http://schemas.openxmlformats.org/officeDocument/2006/relationships">
+  <p:cSld>
+    <p:spTree>
+      <p:nvGrpSpPr>
+        <p:cNvPr id="1" name=""/>
+        <p:cNvGrpSpPr/>
+        <p:nvPr/>
+      </p:nvGrpSpPr>
+      <p:grpSpPr/>
+      <p:sp>
+        <p:nvSpPr>
+          <p:cNvPr id="2" name="Title 1"/>
+          <p:cNvSpPr>
+            <a:spLocks noGrp="1"/>
+          </p:cNvSpPr>
+          <p:nvPr>
+            <p:ph type="title"/>
+          </p:nvPr>
+        </p:nvSpPr>
+        <p:spPr/>
+        <p:txBody>
+          <a:bodyPr/>
+          <a:lstStyle/>
+          <a:p>
+            <a:r>
+              <a:rPr sz="3000"/>
+              <a:t>② 一歩の進み方（メトロポリス法）</a:t>
+            </a:r>
+          </a:p>
+        </p:txBody>
+      </p:sp>
+      <p:sp>
+        <p:nvSpPr>
+          <p:cNvPr id="3" name="Content Placeholder 2"/>
+          <p:cNvSpPr>
+            <a:spLocks noGrp="1"/>
+          </p:cNvSpPr>
+          <p:nvPr>
+            <p:ph idx="1"/>
+          </p:nvPr>
+        </p:nvSpPr>
+        <p:spPr>
+          <a:xfrm>
+            <a:off x="548640" y="1371600"/>
+            <a:ext cx="5669280" cy="4297680"/>
+          </a:xfrm>
+        </p:spPr>
+        <p:txBody>
+          <a:bodyPr/>
+          <a:lstStyle/>
+          <a:p>
+            <a:pPr/>
+            <a:r>
+              <a:rPr sz="1800"/>
+              <a:t>1. 今いる場所 θ から、少しずれた場所 θ′ に足を出す</a:t>
+            </a:r>
+          </a:p>
+          <a:p>
+            <a:pPr lvl="1"/>
+            <a:r>
+              <a:rPr sz="1500"/>
+              <a:t>どれだけずらすかは乱数で決める</a:t>
+            </a:r>
+          </a:p>
+          <a:p>
+            <a:pPr/>
+            <a:r>
+              <a:rPr sz="1800"/>
+              <a:t>2. 高度計で両方を読み、比 r = 高さ(θ′) ÷ 高さ(θ)</a:t>
+            </a:r>
+          </a:p>
+          <a:p>
+            <a:pPr/>
+            <a:r>
+              <a:rPr sz="1800"/>
+              <a:t>3. r ≥ 1（上り）なら、必ず θ′ に移る</a:t>
+            </a:r>
+          </a:p>
+          <a:p>
+            <a:pPr/>
+            <a:r>
+              <a:rPr sz="1800"/>
+              <a:t>4. r &lt; 1（下り）なら、確率 r で移る</a:t>
+            </a:r>
+          </a:p>
+          <a:p>
+            <a:pPr lvl="1"/>
+            <a:r>
+              <a:rPr sz="1500"/>
+              <a:t>0〜1 の乱数を引き、r より小さければ移る</a:t>
+            </a:r>
+          </a:p>
+          <a:p>
+            <a:pPr/>
+            <a:r>
+              <a:rPr sz="1800"/>
+              <a:t>5. 移っても移らなくても、今いる場所を足あとに記録</a:t>
+            </a:r>
+          </a:p>
+          <a:p>
+            <a:pPr/>
+            <a:r>
+              <a:rPr sz="1800"/>
+              <a:t>6. 1〜5 を何千回もくり返す</a:t>
+            </a:r>
+          </a:p>
+          <a:p>
+            <a:pPr/>
+            <a:r>
+              <a:rPr sz="1800"/>
+              <a:t>なぜ下りにも進む？</a:t>
+            </a:r>
+          </a:p>
+          <a:p>
+            <a:pPr lvl="1"/>
+            <a:r>
+              <a:rPr sz="1500"/>
+              <a:t>上りだけだと頂上で止まり、山の広がり（誤差）が分からないから</a:t>
+            </a:r>
+          </a:p>
+        </p:txBody>
+      </p:sp>
+      <p:sp>
+        <p:nvSpPr>
+          <p:cNvPr id="8" name="TextBox 7">
+            <a:extLst>
+              <a:ext uri="{FF2B5EF4-FFF2-40B4-BE49-F238E27FC236}">
+                <a16:creationId xmlns:a16="http://schemas.microsoft.com/office/drawing/2014/main" id="{F85CD606-E3CE-F314-B3EE-F3D7028115CB}"/>
+              </a:ext>
+            </a:extLst>
+          </p:cNvPr>
+          <p:cNvSpPr txBox="1"/>
+          <p:nvPr/>
+        </p:nvSpPr>
+        <p:spPr>
+          <a:xfrm>
+            <a:off x="5837182" y="5663239"/>
+            <a:ext cx="6093372" cy="923330"/>
+          </a:xfrm>
+          <a:prstGeom prst="rect">
+            <a:avLst/>
+          </a:prstGeom>
+          <a:noFill/>
+        </p:spPr>
+        <p:txBody>
+          <a:bodyPr wrap="square">
+            <a:spAutoFit/>
+          </a:bodyPr>
+          <a:lstStyle/>
+          <a:p>
+            <a:r>
+              <a:rPr lang="en-US" sz="1400" b="1"/>
+              <a:t>Reference:</a:t>
+            </a:r>
+            <a:r>
+              <a:rPr lang="en-US" sz="1400"/>
+              <a:t> N. Metropolis et al. (1953), J. Chem. Phys. 21, 1087</a:t>
+            </a:r>
+            <a:endParaRPr lang="en-US"/>
+          </a:p>
+        </p:txBody>
+      </p:sp>
+    </p:spTree>
+  </p:cSld>
+  <p:clrMapOvr>
+    <a:masterClrMapping/>
+  </p:clrMapOvr>
+</p:sld>
+</file>
+
+<file path=ppt/slides/slide19.xml><?xml version="1.0" encoding="utf-8"?>
+<p:sld xmlns:a="http://schemas.openxmlformats.org/drawingml/2006/main" xmlns:p="http://schemas.openxmlformats.org/presentationml/2006/main" xmlns:r="http://schemas.openxmlformats.org/officeDocument/2006/relationships">
+  <p:cSld>
+    <p:spTree>
+      <p:nvGrpSpPr>
+        <p:cNvPr id="1" name=""/>
+        <p:cNvGrpSpPr/>
+        <p:nvPr/>
+      </p:nvGrpSpPr>
+      <p:grpSpPr/>
+      <p:sp>
+        <p:nvSpPr>
+          <p:cNvPr id="2" name="Title 1"/>
+          <p:cNvSpPr>
+            <a:spLocks noGrp="1"/>
+          </p:cNvSpPr>
+          <p:nvPr>
+            <p:ph type="title"/>
+          </p:nvPr>
+        </p:nvSpPr>
+        <p:spPr/>
+        <p:txBody>
+          <a:bodyPr/>
+          <a:lstStyle/>
+          <a:p>
+            <a:r>
+              <a:rPr sz="3000"/>
+              <a:t>③ 足あとはこうなる（説明用の例）</a:t>
+            </a:r>
+          </a:p>
+        </p:txBody>
+      </p:sp>
+      <p:pic>
+        <p:nvPicPr>
+          <p:cNvPr id="3" name="Picture 2" descr="image.png"/>
+          <p:cNvPicPr>
+            <a:picLocks noChangeAspect="1"/>
+          </p:cNvPicPr>
+          <p:nvPr/>
+        </p:nvPicPr>
+        <p:blipFill>
+          <a:blip r:embed="rId2"/>
+          <a:stretch>
+            <a:fillRect/>
+          </a:stretch>
+        </p:blipFill>
+        <p:spPr>
+          <a:xfrm>
+            <a:off x="731520" y="1280160"/>
+            <a:ext cx="10698480" cy="4279392"/>
+          </a:xfrm>
+          <a:prstGeom prst="rect">
+            <a:avLst/>
+          </a:prstGeom>
+        </p:spPr>
+      </p:pic>
+      <p:sp>
+        <p:nvSpPr>
+          <p:cNvPr id="4" name="TextBox 3"/>
+          <p:cNvSpPr txBox="1"/>
+          <p:nvPr/>
+        </p:nvSpPr>
+        <p:spPr>
+          <a:xfrm>
+            <a:off x="548640" y="5669280"/>
+            <a:ext cx="11155680" cy="822960"/>
+          </a:xfrm>
+          <a:prstGeom prst="rect">
+            <a:avLst/>
+          </a:prstGeom>
+          <a:noFill/>
+        </p:spPr>
+        <p:txBody>
+          <a:bodyPr wrap="square">
+            <a:spAutoFit/>
+          </a:bodyPr>
+          <a:lstStyle/>
+          <a:p>
+            <a:r>
+              <a:rPr sz="1800"/>
+              <a:t>左：足あと（縦＝倍率、横＝歩数）。最初の 200 歩は山にたどり着く途中なので捨てる。右：足あとのヒストグラム ＝ 山の形</a:t>
+            </a:r>
+          </a:p>
+        </p:txBody>
+      </p:sp>
+    </p:spTree>
+  </p:cSld>
+  <p:clrMapOvr>
+    <a:masterClrMapping/>
+  </p:clrMapOvr>
+</p:sld>
+</file>
+
+<file path=ppt/slides/slide2.xml><?xml version="1.0" encoding="utf-8"?>
+<p:sld xmlns:a="http://schemas.openxmlformats.org/drawingml/2006/main" xmlns:r="http://schemas.openxmlformats.org/officeDocument/2006/relationships" xmlns:p="http://schemas.openxmlformats.org/presentationml/2006/main">
+  <p:cSld>
+    <p:spTree>
+      <p:nvGrpSpPr>
+        <p:cNvPr id="1" name=""/>
+        <p:cNvGrpSpPr/>
+        <p:nvPr/>
+      </p:nvGrpSpPr>
+      <p:grpSpPr>
+        <a:xfrm>
+          <a:off x="0" y="0"/>
+          <a:ext cx="0" cy="0"/>
+          <a:chOff x="0" y="0"/>
+          <a:chExt cx="0" cy="0"/>
+        </a:xfrm>
+      </p:grpSpPr>
+      <p:sp>
+        <p:nvSpPr>
+          <p:cNvPr id="2" name="Title 1"/>
+          <p:cNvSpPr>
+            <a:spLocks noGrp="1"/>
+          </p:cNvSpPr>
+          <p:nvPr>
+            <p:ph type="title"/>
+          </p:nvPr>
+        </p:nvSpPr>
+        <p:spPr/>
+        <p:txBody>
+          <a:bodyPr/>
+          <a:lstStyle/>
+          <a:p>
+            <a:r>
+              <a:rPr lang="ja-JP" altLang="en-US" sz="3400" b="1"/>
+              <a:t>卒業研究の目的</a:t>
+            </a:r>
+            <a:endParaRPr sz="3400" b="1"/>
+          </a:p>
+        </p:txBody>
+      </p:sp>
+      <p:sp>
+        <p:nvSpPr>
+          <p:cNvPr id="3" name="Content Placeholder 2"/>
+          <p:cNvSpPr>
+            <a:spLocks noGrp="1"/>
+          </p:cNvSpPr>
+          <p:nvPr>
+            <p:ph idx="1"/>
+          </p:nvPr>
+        </p:nvSpPr>
+        <p:spPr>
+          <a:xfrm>
+            <a:off x="841248" y="1463040"/>
+            <a:ext cx="11089306" cy="3076876"/>
+          </a:xfrm>
+        </p:spPr>
+        <p:txBody>
+          <a:bodyPr>
+            <a:normAutofit/>
+          </a:bodyPr>
+          <a:lstStyle/>
+          <a:p>
+            <a:r>
+              <a:rPr sz="2400"/>
+              <a:t>暗黒物質どうしがぶつかると消えて、ガンマ線を出すと考えられている</a:t>
+            </a:r>
+            <a:endParaRPr lang="en-US" sz="2400"/>
+          </a:p>
+          <a:p>
+            <a:pPr marL="0" indent="0">
+              <a:buNone/>
+            </a:pPr>
+            <a:r>
+              <a:rPr sz="2400"/>
+              <a:t>（対消滅）</a:t>
+            </a:r>
+          </a:p>
+          <a:p>
+            <a:r>
+              <a:rPr sz="2400"/>
+              <a:t>天の川は暗黒物質の「ハロー」に包まれている</a:t>
+            </a:r>
+            <a:r>
+              <a:rPr lang="ja-JP" altLang="en-US" sz="2400"/>
+              <a:t>のではないか→（</a:t>
+            </a:r>
+            <a:r>
+              <a:rPr lang="en-US" altLang="ja-JP" sz="2400"/>
+              <a:t>NFW</a:t>
+            </a:r>
+            <a:r>
+              <a:rPr lang="ja-JP" altLang="en-US" sz="2400"/>
+              <a:t>）</a:t>
+            </a:r>
+            <a:endParaRPr sz="2400"/>
+          </a:p>
+          <a:p>
+            <a:pPr lvl="1"/>
+            <a:r>
+              <a:rPr sz="2000"/>
+              <a:t>→ 空全体から、かすかなガンマ線が来るはず</a:t>
+            </a:r>
+          </a:p>
+          <a:p>
+            <a:r>
+              <a:rPr sz="2400"/>
+              <a:t>Totani (2025)：20 GeV 付近にハロー型の超過を報告（13–19σ）</a:t>
+            </a:r>
+          </a:p>
+          <a:p>
+            <a:r>
+              <a:rPr lang="ja-JP" altLang="en-US" sz="2400" b="1"/>
+              <a:t>卒業</a:t>
+            </a:r>
+            <a:r>
+              <a:rPr sz="2400" b="1"/>
+              <a:t>研究：これを自分で再現し、本物かどうか確かめる</a:t>
+            </a:r>
+            <a:endParaRPr lang="en-US" sz="2400" b="1"/>
+          </a:p>
+          <a:p>
+            <a:r>
+              <a:rPr lang="ja-JP" altLang="en-US" sz="2400" b="1"/>
+              <a:t>　　　→矮小銀河やほかの銀河にも適用したらどうなるか（拡張要素の原案）</a:t>
+            </a:r>
+            <a:endParaRPr sz="2400" b="1"/>
+          </a:p>
+        </p:txBody>
+      </p:sp>
+      <p:sp>
+        <p:nvSpPr>
+          <p:cNvPr id="8" name="TextBox 7">
+            <a:extLst>
+              <a:ext uri="{FF2B5EF4-FFF2-40B4-BE49-F238E27FC236}">
+                <a16:creationId xmlns:a16="http://schemas.microsoft.com/office/drawing/2014/main" id="{F85CD606-E3CE-F314-B3EE-F3D7028115CB}"/>
+              </a:ext>
+            </a:extLst>
+          </p:cNvPr>
+          <p:cNvSpPr txBox="1"/>
+          <p:nvPr/>
+        </p:nvSpPr>
+        <p:spPr>
+          <a:xfrm>
+            <a:off x="5837182" y="5663239"/>
+            <a:ext cx="6093372" cy="923330"/>
+          </a:xfrm>
+          <a:prstGeom prst="rect">
+            <a:avLst/>
+          </a:prstGeom>
+          <a:noFill/>
+        </p:spPr>
+        <p:txBody>
+          <a:bodyPr wrap="square">
+            <a:spAutoFit/>
+          </a:bodyPr>
+          <a:lstStyle/>
+          <a:p>
+            <a:r>
+              <a:rPr lang="en-US" sz="1400" b="1"/>
+              <a:t>Reference:</a:t>
+            </a:r>
+            <a:r>
+              <a:rPr lang="en-US" sz="1400"/>
+              <a:t> T. Totani (2025), arXiv:2507.07209</a:t>
+            </a:r>
+            <a:endParaRPr lang="en-US"/>
+          </a:p>
+        </p:txBody>
+      </p:sp>
+    </p:spTree>
+  </p:cSld>
+  <p:clrMapOvr>
+    <a:masterClrMapping/>
+  </p:clrMapOvr>
+</p:sld>
+</file>
+
+<file path=ppt/slides/slide20.xml><?xml version="1.0" encoding="utf-8"?>
+<p:sld xmlns:a="http://schemas.openxmlformats.org/drawingml/2006/main" xmlns:p="http://schemas.openxmlformats.org/presentationml/2006/main" xmlns:r="http://schemas.openxmlformats.org/officeDocument/2006/relationships">
+  <p:cSld>
+    <p:spTree>
+      <p:nvGrpSpPr>
+        <p:cNvPr id="1" name=""/>
+        <p:cNvGrpSpPr/>
+        <p:nvPr/>
+      </p:nvGrpSpPr>
+      <p:grpSpPr/>
+      <p:sp>
+        <p:nvSpPr>
+          <p:cNvPr id="2" name="Title 1"/>
+          <p:cNvSpPr>
+            <a:spLocks noGrp="1"/>
+          </p:cNvSpPr>
+          <p:nvPr>
+            <p:ph type="title"/>
+          </p:nvPr>
+        </p:nvSpPr>
+        <p:spPr/>
+        <p:txBody>
+          <a:bodyPr/>
+          <a:lstStyle/>
+          <a:p>
+            <a:r>
+              <a:rPr sz="3000"/>
+              <a:t>④ 32 人で歩く（emcee）</a:t>
+            </a:r>
+          </a:p>
+        </p:txBody>
+      </p:sp>
+      <p:sp>
+        <p:nvSpPr>
+          <p:cNvPr id="3" name="Content Placeholder 2"/>
+          <p:cNvSpPr>
+            <a:spLocks noGrp="1"/>
+          </p:cNvSpPr>
+          <p:nvPr>
+            <p:ph idx="1"/>
+          </p:nvPr>
+        </p:nvSpPr>
+        <p:spPr>
+          <a:xfrm>
+            <a:off x="548640" y="1371600"/>
+            <a:ext cx="5669280" cy="4297680"/>
+          </a:xfrm>
+        </p:spPr>
+        <p:txBody>
+          <a:bodyPr/>
+          <a:lstStyle/>
+          <a:p>
+            <a:pPr/>
+            <a:r>
+              <a:rPr sz="1800"/>
+              <a:t>1 人だと、細長い山で迷いやすい</a:t>
+            </a:r>
+          </a:p>
+          <a:p>
+            <a:pPr lvl="1"/>
+            <a:r>
+              <a:rPr sz="1500"/>
+              <a:t>例：ガスと ICS の縮退。片方を上げて片方を下げても高さがほぼ同じ</a:t>
+            </a:r>
+          </a:p>
+          <a:p>
+            <a:pPr/>
+            <a:r>
+              <a:rPr sz="1800"/>
+              <a:t>そこで 32 人が同時に歩き、仲間の位置を見て一歩を決める</a:t>
+            </a:r>
+          </a:p>
+          <a:p>
+            <a:pPr/>
+            <a:r>
+              <a:rPr sz="1800"/>
+              <a:t>一歩の出し方（ストレッチ移動）</a:t>
+            </a:r>
+          </a:p>
+          <a:p>
+            <a:pPr lvl="1"/>
+            <a:r>
+              <a:rPr sz="1500"/>
+              <a:t>自分 X_k から、ランダムに選んだ仲間 X_j への線を引く</a:t>
+            </a:r>
+          </a:p>
+          <a:p>
+            <a:pPr lvl="1"/>
+            <a:r>
+              <a:rPr sz="1500"/>
+              <a:t>その線の上で、Z 倍（1/2〜2 の乱数）伸ばした点に足を出す</a:t>
+            </a:r>
+          </a:p>
+          <a:p>
+            <a:pPr lvl="1"/>
+            <a:r>
+              <a:rPr sz="1500"/>
+              <a:t>Y = X_j + Z (X_k − X_j)</a:t>
+            </a:r>
+          </a:p>
+          <a:p>
+            <a:pPr/>
+            <a:r>
+              <a:rPr sz="1800"/>
+              <a:t>移るかどうかは ② と同じ考え（Z⁸ を掛けて補正）</a:t>
+            </a:r>
+          </a:p>
+          <a:p>
+            <a:pPr/>
+            <a:r>
+              <a:rPr sz="1800"/>
+              <a:t>出発点：全員、Totani と同じ初期値の近く。6000 歩</a:t>
+            </a:r>
+          </a:p>
+        </p:txBody>
+      </p:sp>
+      <p:sp>
+        <p:nvSpPr>
+          <p:cNvPr id="8" name="TextBox 7">
+            <a:extLst>
+              <a:ext uri="{FF2B5EF4-FFF2-40B4-BE49-F238E27FC236}">
+                <a16:creationId xmlns:a16="http://schemas.microsoft.com/office/drawing/2014/main" id="{F85CD606-E3CE-F314-B3EE-F3D7028115CB}"/>
+              </a:ext>
+            </a:extLst>
+          </p:cNvPr>
+          <p:cNvSpPr txBox="1"/>
+          <p:nvPr/>
+        </p:nvSpPr>
+        <p:spPr>
+          <a:xfrm>
+            <a:off x="5837182" y="5663239"/>
+            <a:ext cx="6093372" cy="923330"/>
+          </a:xfrm>
+          <a:prstGeom prst="rect">
+            <a:avLst/>
+          </a:prstGeom>
+          <a:noFill/>
+        </p:spPr>
+        <p:txBody>
+          <a:bodyPr wrap="square">
+            <a:spAutoFit/>
+          </a:bodyPr>
+          <a:lstStyle/>
+          <a:p>
+            <a:r>
+              <a:rPr lang="en-US" sz="1400" b="1"/>
+              <a:t>Reference:</a:t>
+            </a:r>
+            <a:r>
+              <a:rPr lang="en-US" sz="1400"/>
+              <a:t> J. Goodman &amp; J. Weare (2010), Comm. App. Math. Comp. Sci. 5, 65</a:t>
+            </a:r>
+            <a:endParaRPr lang="en-US"/>
+          </a:p>
+        </p:txBody>
+      </p:sp>
+    </p:spTree>
+  </p:cSld>
+  <p:clrMapOvr>
+    <a:masterClrMapping/>
+  </p:clrMapOvr>
+</p:sld>
+</file>
+
+<file path=ppt/slides/slide21.xml><?xml version="1.0" encoding="utf-8"?>
+<p:sld xmlns:a="http://schemas.openxmlformats.org/drawingml/2006/main" xmlns:p="http://schemas.openxmlformats.org/presentationml/2006/main" xmlns:r="http://schemas.openxmlformats.org/officeDocument/2006/relationships">
+  <p:cSld>
+    <p:spTree>
+      <p:nvGrpSpPr>
+        <p:cNvPr id="1" name=""/>
+        <p:cNvGrpSpPr/>
+        <p:nvPr/>
+      </p:nvGrpSpPr>
+      <p:grpSpPr/>
+      <p:sp>
+        <p:nvSpPr>
+          <p:cNvPr id="2" name="Title 1"/>
+          <p:cNvSpPr>
+            <a:spLocks noGrp="1"/>
+          </p:cNvSpPr>
+          <p:nvPr>
+            <p:ph type="title"/>
+          </p:nvPr>
+        </p:nvSpPr>
+        <p:spPr/>
+        <p:txBody>
+          <a:bodyPr/>
+          <a:lstStyle/>
+          <a:p>
+            <a:r>
+              <a:rPr sz="3000"/>
+              <a:t>⑤ 歩き終わったら：最良値と誤差</a:t>
+            </a:r>
+          </a:p>
+        </p:txBody>
+      </p:sp>
+      <p:sp>
+        <p:nvSpPr>
+          <p:cNvPr id="3" name="Content Placeholder 2"/>
+          <p:cNvSpPr>
+            <a:spLocks noGrp="1"/>
+          </p:cNvSpPr>
+          <p:nvPr>
+            <p:ph idx="1"/>
+          </p:nvPr>
+        </p:nvSpPr>
+        <p:spPr>
+          <a:xfrm>
+            <a:off x="548640" y="1371600"/>
+            <a:ext cx="5669280" cy="4297680"/>
+          </a:xfrm>
+        </p:spPr>
+        <p:txBody>
+          <a:bodyPr/>
+          <a:lstStyle/>
+          <a:p>
+            <a:pPr/>
+            <a:r>
+              <a:rPr sz="1800"/>
+              <a:t>一番高い足あと → 最良の倍率（Totani と同じ）</a:t>
+            </a:r>
+          </a:p>
+          <a:p>
+            <a:pPr lvl="1"/>
+            <a:r>
+              <a:rPr sz="1500"/>
+              <a:t>20.8 GeV：ハローの倍率 1.51</a:t>
+            </a:r>
+          </a:p>
+          <a:p>
+            <a:pPr/>
+            <a:r>
+              <a:rPr sz="1800"/>
+              <a:t>足あとの広がり → 誤差</a:t>
+            </a:r>
+          </a:p>
+          <a:p>
+            <a:pPr lvl="1"/>
+            <a:r>
+              <a:rPr sz="1500"/>
+              <a:t>最初の 400 歩は捨て、下から 16%〜84% の範囲</a:t>
+            </a:r>
+          </a:p>
+          <a:p>
+            <a:pPr lvl="1"/>
+            <a:r>
+              <a:rPr sz="1500"/>
+              <a:t>20.8 GeV：1.43〜1.61</a:t>
+            </a:r>
+          </a:p>
+          <a:p>
+            <a:pPr/>
+            <a:r>
+              <a:rPr sz="1800"/>
+              <a:t>有意度：ハローあり・なしの山を別々に歩く</a:t>
+            </a:r>
+          </a:p>
+          <a:p>
+            <a:pPr lvl="1"/>
+            <a:r>
+              <a:rPr sz="1500"/>
+              <a:t>それぞれの一番高い足あとの高さの差 Δln L → σ = √(2Δln L)</a:t>
+            </a:r>
+          </a:p>
+          <a:p>
+            <a:pPr lvl="1"/>
+            <a:r>
+              <a:rPr sz="1500"/>
+              <a:t>20.8 GeV：19.5σ</a:t>
+            </a:r>
+          </a:p>
+          <a:p>
+            <a:pPr/>
+            <a:r>
+              <a:rPr sz="1800"/>
+              <a:t>注意：山の端まで歩き回るには、もっと長く歩くのが理想</a:t>
+            </a:r>
+          </a:p>
+          <a:p>
+            <a:pPr lvl="1"/>
+            <a:r>
+              <a:rPr sz="1500"/>
+              <a:t>誤差は目安。一番高い足あとは頂上に届いている</a:t>
+            </a:r>
+          </a:p>
+        </p:txBody>
+      </p:sp>
+      <p:sp>
+        <p:nvSpPr>
+          <p:cNvPr id="8" name="TextBox 7">
+            <a:extLst>
+              <a:ext uri="{FF2B5EF4-FFF2-40B4-BE49-F238E27FC236}">
+                <a16:creationId xmlns:a16="http://schemas.microsoft.com/office/drawing/2014/main" id="{F85CD606-E3CE-F314-B3EE-F3D7028115CB}"/>
+              </a:ext>
+            </a:extLst>
+          </p:cNvPr>
+          <p:cNvSpPr txBox="1"/>
+          <p:nvPr/>
+        </p:nvSpPr>
+        <p:spPr>
+          <a:xfrm>
+            <a:off x="5837182" y="5663239"/>
+            <a:ext cx="6093372" cy="923330"/>
+          </a:xfrm>
+          <a:prstGeom prst="rect">
+            <a:avLst/>
+          </a:prstGeom>
+          <a:noFill/>
+        </p:spPr>
+        <p:txBody>
+          <a:bodyPr wrap="square">
+            <a:spAutoFit/>
+          </a:bodyPr>
+          <a:lstStyle/>
+          <a:p>
+            <a:r>
+              <a:rPr lang="en-US" sz="1400" b="1"/>
+              <a:t>Reference:</a:t>
+            </a:r>
+            <a:r>
+              <a:rPr lang="en-US" sz="1400"/>
+              <a:t> T. Totani (2025), arXiv:2507.07209 §2.2</a:t>
+            </a:r>
+            <a:endParaRPr lang="en-US"/>
+          </a:p>
+        </p:txBody>
+      </p:sp>
+    </p:spTree>
+  </p:cSld>
+  <p:clrMapOvr>
+    <a:masterClrMapping/>
+  </p:clrMapOvr>
+</p:sld>
+</file>
+
+<file path=ppt/slides/slide22.xml><?xml version="1.0" encoding="utf-8"?>
 <p:sld xmlns:a="http://schemas.openxmlformats.org/drawingml/2006/main" xmlns:r="http://schemas.openxmlformats.org/officeDocument/2006/relationships" xmlns:p="http://schemas.openxmlformats.org/presentationml/2006/main">
   <p:cSld>
     <p:spTree>
@@ -7400,7 +10037,7 @@
 </p:sld>
 </file>
 
-<file path=ppt/slides/slide13.xml><?xml version="1.0" encoding="utf-8"?>
+<file path=ppt/slides/slide23.xml><?xml version="1.0" encoding="utf-8"?>
 <p:sld xmlns:a="http://schemas.openxmlformats.org/drawingml/2006/main" xmlns:r="http://schemas.openxmlformats.org/officeDocument/2006/relationships" xmlns:p="http://schemas.openxmlformats.org/presentationml/2006/main">
   <p:cSld>
     <p:spTree>
@@ -7525,1382 +10162,6 @@
 </p:sld>
 </file>
 
-<file path=ppt/slides/slide14.xml><?xml version="1.0" encoding="utf-8"?>
-<p:sld xmlns:a="http://schemas.openxmlformats.org/drawingml/2006/main" xmlns:r="http://schemas.openxmlformats.org/officeDocument/2006/relationships" xmlns:p="http://schemas.openxmlformats.org/presentationml/2006/main">
-  <p:cSld>
-    <p:spTree>
-      <p:nvGrpSpPr>
-        <p:cNvPr id="1" name=""/>
-        <p:cNvGrpSpPr/>
-        <p:nvPr/>
-      </p:nvGrpSpPr>
-      <p:grpSpPr>
-        <a:xfrm>
-          <a:off x="0" y="0"/>
-          <a:ext cx="0" cy="0"/>
-          <a:chOff x="0" y="0"/>
-          <a:chExt cx="0" cy="0"/>
-        </a:xfrm>
-      </p:grpSpPr>
-      <p:sp>
-        <p:nvSpPr>
-          <p:cNvPr id="2" name="Title 1"/>
-          <p:cNvSpPr>
-            <a:spLocks noGrp="1"/>
-          </p:cNvSpPr>
-          <p:nvPr>
-            <p:ph type="title"/>
-          </p:nvPr>
-        </p:nvSpPr>
-        <p:spPr/>
-        <p:txBody>
-          <a:bodyPr/>
-          <a:lstStyle/>
-          <a:p>
-            <a:r>
-              <a:rPr sz="3400"/>
-              <a:t>縮退が引き起こした 3 つの疑問</a:t>
-            </a:r>
-          </a:p>
-        </p:txBody>
-      </p:sp>
-      <p:sp>
-        <p:nvSpPr>
-          <p:cNvPr id="3" name="Content Placeholder 2"/>
-          <p:cNvSpPr>
-            <a:spLocks noGrp="1"/>
-          </p:cNvSpPr>
-          <p:nvPr>
-            <p:ph idx="1"/>
-          </p:nvPr>
-        </p:nvSpPr>
-        <p:spPr>
-          <a:xfrm>
-            <a:off x="841248" y="1463040"/>
-            <a:ext cx="10515600" cy="4937760"/>
-          </a:xfrm>
-        </p:spPr>
-        <p:txBody>
-          <a:bodyPr/>
-          <a:lstStyle/>
-          <a:p>
-            <a:r>
-              <a:rPr sz="2400"/>
-              <a:t>① バブル領域を外すと 19.5σ → 5.0σ に落ちる</a:t>
-            </a:r>
-          </a:p>
-          <a:p>
-            <a:pPr lvl="1"/>
-            <a:r>
-              <a:rPr sz="2000"/>
-              <a:t>ハローは、本当は ICS やバブルの間違いでは？</a:t>
-            </a:r>
-          </a:p>
-          <a:p>
-            <a:r>
-              <a:rPr sz="2400"/>
-              <a:t>② 何も無い空でも、最大 4.5σ が出る</a:t>
-            </a:r>
-          </a:p>
-          <a:p>
-            <a:pPr lvl="1"/>
-            <a:r>
-              <a:rPr sz="2000"/>
-              <a:t>σ をそのまま信じてよいのか？</a:t>
-            </a:r>
-          </a:p>
-          <a:p>
-            <a:r>
-              <a:rPr sz="2400"/>
-              <a:t>③ 7/23 に出した 19.1σ が再現できない</a:t>
-            </a:r>
-          </a:p>
-          <a:p>
-            <a:pPr lvl="1"/>
-            <a:r>
-              <a:rPr sz="2000"/>
-              <a:t>結果そのものを信じてよいのか？</a:t>
-            </a:r>
-          </a:p>
-          <a:p>
-            <a:r>
-              <a:rPr sz="2400"/>
-              <a:t>→ 次から、1 つずつ調べた結果</a:t>
-            </a:r>
-          </a:p>
-        </p:txBody>
-      </p:sp>
-    </p:spTree>
-  </p:cSld>
-  <p:clrMapOvr>
-    <a:masterClrMapping/>
-  </p:clrMapOvr>
-</p:sld>
-</file>
-
-<file path=ppt/slides/slide15.xml><?xml version="1.0" encoding="utf-8"?>
-<p:sld xmlns:a="http://schemas.openxmlformats.org/drawingml/2006/main" xmlns:r="http://schemas.openxmlformats.org/officeDocument/2006/relationships" xmlns:p="http://schemas.openxmlformats.org/presentationml/2006/main">
-  <p:cSld>
-    <p:spTree>
-      <p:nvGrpSpPr>
-        <p:cNvPr id="1" name=""/>
-        <p:cNvGrpSpPr/>
-        <p:nvPr/>
-      </p:nvGrpSpPr>
-      <p:grpSpPr>
-        <a:xfrm>
-          <a:off x="0" y="0"/>
-          <a:ext cx="0" cy="0"/>
-          <a:chOff x="0" y="0"/>
-          <a:chExt cx="0" cy="0"/>
-        </a:xfrm>
-      </p:grpSpPr>
-      <p:sp>
-        <p:nvSpPr>
-          <p:cNvPr id="2" name="Title 1"/>
-          <p:cNvSpPr>
-            <a:spLocks noGrp="1"/>
-          </p:cNvSpPr>
-          <p:nvPr>
-            <p:ph type="title"/>
-          </p:nvPr>
-        </p:nvSpPr>
-        <p:spPr/>
-        <p:txBody>
-          <a:bodyPr/>
-          <a:lstStyle/>
-          <a:p>
-            <a:r>
-              <a:rPr sz="3400"/>
-              <a:t>① を調べる：手がかりはどこにあるか</a:t>
-            </a:r>
-          </a:p>
-        </p:txBody>
-      </p:sp>
-      <p:sp>
-        <p:nvSpPr>
-          <p:cNvPr id="3" name="Content Placeholder 2"/>
-          <p:cNvSpPr>
-            <a:spLocks noGrp="1"/>
-          </p:cNvSpPr>
-          <p:nvPr>
-            <p:ph idx="1"/>
-          </p:nvPr>
-        </p:nvSpPr>
-        <p:spPr>
-          <a:xfrm>
-            <a:off x="841248" y="1463040"/>
-            <a:ext cx="10515600" cy="4937760"/>
-          </a:xfrm>
-        </p:spPr>
-        <p:txBody>
-          <a:bodyPr/>
-          <a:lstStyle/>
-          <a:p>
-            <a:r>
-              <a:rPr sz="2200"/>
-              <a:t>フィッシャー情報：データがパラメータをどれだけ決められるか</a:t>
-            </a:r>
-          </a:p>
-          <a:p>
-            <a:r>
-              <a:rPr sz="2200"/>
-              <a:t>ICS など他の成分では説明できない「ハローだけの手がかり」を、空の場所ごとに計算</a:t>
-            </a:r>
-          </a:p>
-          <a:p>
-            <a:pPr lvl="1"/>
-            <a:r>
-              <a:rPr sz="1800"/>
-              <a:t>その 54% がバブル領域（面積は 34%）に集中</a:t>
-            </a:r>
-          </a:p>
-          <a:p>
-            <a:r>
-              <a:rPr sz="2200"/>
-              <a:t>手がかりの減り方だけで予測すると 6.6σ、実測 5.0σ</a:t>
-            </a:r>
-          </a:p>
-          <a:p>
-            <a:r>
-              <a:rPr sz="2200"/>
-              <a:t>同じ形の領域を横にずらして外すと 15〜16σ</a:t>
-            </a:r>
-          </a:p>
-          <a:p>
-            <a:r>
-              <a:rPr sz="2200"/>
-              <a:t>→ 19 → 5σ は「手がかりを捨てた」から。汚染の証拠ではない</a:t>
-            </a:r>
-          </a:p>
-        </p:txBody>
-      </p:sp>
-    </p:spTree>
-  </p:cSld>
-  <p:clrMapOvr>
-    <a:masterClrMapping/>
-  </p:clrMapOvr>
-</p:sld>
-</file>
-
-<file path=ppt/slides/slide16.xml><?xml version="1.0" encoding="utf-8"?>
-<p:sld xmlns:a="http://schemas.openxmlformats.org/drawingml/2006/main" xmlns:r="http://schemas.openxmlformats.org/officeDocument/2006/relationships" xmlns:p="http://schemas.openxmlformats.org/presentationml/2006/main">
-  <p:cSld>
-    <p:spTree>
-      <p:nvGrpSpPr>
-        <p:cNvPr id="1" name=""/>
-        <p:cNvGrpSpPr/>
-        <p:nvPr/>
-      </p:nvGrpSpPr>
-      <p:grpSpPr>
-        <a:xfrm>
-          <a:off x="0" y="0"/>
-          <a:ext cx="0" cy="0"/>
-          <a:chOff x="0" y="0"/>
-          <a:chExt cx="0" cy="0"/>
-        </a:xfrm>
-      </p:grpSpPr>
-      <p:sp>
-        <p:nvSpPr>
-          <p:cNvPr id="2" name="Title 1"/>
-          <p:cNvSpPr>
-            <a:spLocks noGrp="1"/>
-          </p:cNvSpPr>
-          <p:nvPr>
-            <p:ph type="title"/>
-          </p:nvPr>
-        </p:nvSpPr>
-        <p:spPr/>
-        <p:txBody>
-          <a:bodyPr/>
-          <a:lstStyle/>
-          <a:p>
-            <a:r>
-              <a:rPr sz="3400"/>
-              <a:t>① を調べる：ICS が犯人なら</a:t>
-            </a:r>
-          </a:p>
-        </p:txBody>
-      </p:sp>
-      <p:sp>
-        <p:nvSpPr>
-          <p:cNvPr id="3" name="Content Placeholder 2"/>
-          <p:cNvSpPr>
-            <a:spLocks noGrp="1"/>
-          </p:cNvSpPr>
-          <p:nvPr>
-            <p:ph idx="1"/>
-          </p:nvPr>
-        </p:nvSpPr>
-        <p:spPr>
-          <a:xfrm>
-            <a:off x="841248" y="1463040"/>
-            <a:ext cx="10515600" cy="4114800"/>
-          </a:xfrm>
-        </p:spPr>
-        <p:txBody>
-          <a:bodyPr/>
-          <a:lstStyle/>
-          <a:p>
-            <a:r>
-              <a:rPr sz="2200"/>
-              <a:t>ICS をバブルの内と外で別々の明るさにして当てはめた</a:t>
-            </a:r>
-          </a:p>
-          <a:p>
-            <a:pPr lvl="1"/>
-            <a:r>
-              <a:rPr sz="1800"/>
-              <a:t>内側が約 2.3 倍明るければ、ハローの改善の 92% を ICS が説明</a:t>
-            </a:r>
-          </a:p>
-          <a:p>
-            <a:r>
-              <a:rPr sz="2200"/>
-              <a:t>ICS の計算の近似（等方近似）を直しても 1.1〜1.3 倍</a:t>
-            </a:r>
-          </a:p>
-          <a:p>
-            <a:pPr lvl="1"/>
-            <a:r>
-              <a:rPr sz="1800"/>
-              <a:t>しかも外側のほうが大きくなる → 2.3 倍には届かない</a:t>
-            </a:r>
-          </a:p>
-          <a:p>
-            <a:r>
-              <a:rPr sz="2200"/>
-              <a:t>ICS を 3 種類に分けて、それぞれ自由に動かしても</a:t>
-            </a:r>
-          </a:p>
-          <a:p>
-            <a:pPr lvl="1"/>
-            <a:r>
-              <a:rPr sz="1800"/>
-              <a:t>19.5σ → 18.4σ（約 1σ しか下がらない）</a:t>
-            </a:r>
-          </a:p>
-          <a:p>
-            <a:r>
-              <a:rPr sz="2200"/>
-              <a:t>→ ICS の「明るさ」の間違いでは、ハローを説明できない</a:t>
-            </a:r>
-          </a:p>
-        </p:txBody>
-      </p:sp>
-      <p:sp>
-        <p:nvSpPr>
-          <p:cNvPr id="8" name="TextBox 7">
-            <a:extLst>
-              <a:ext uri="{FF2B5EF4-FFF2-40B4-BE49-F238E27FC236}">
-                <a16:creationId xmlns:a16="http://schemas.microsoft.com/office/drawing/2014/main" id="{F85CD606-E3CE-F314-B3EE-F3D7028115CB}"/>
-              </a:ext>
-            </a:extLst>
-          </p:cNvPr>
-          <p:cNvSpPr txBox="1"/>
-          <p:nvPr/>
-        </p:nvSpPr>
-        <p:spPr>
-          <a:xfrm>
-            <a:off x="5837182" y="5663239"/>
-            <a:ext cx="6093372" cy="923330"/>
-          </a:xfrm>
-          <a:prstGeom prst="rect">
-            <a:avLst/>
-          </a:prstGeom>
-          <a:noFill/>
-        </p:spPr>
-        <p:txBody>
-          <a:bodyPr wrap="square">
-            <a:spAutoFit/>
-          </a:bodyPr>
-          <a:lstStyle/>
-          <a:p>
-            <a:r>
-              <a:rPr lang="en-US" sz="1400" b="1"/>
-              <a:t>Reference:</a:t>
-            </a:r>
-            <a:r>
-              <a:rPr lang="en-US" sz="1400"/>
-              <a:t> I. V. Moskalenko &amp; A. W. Strong (2000), ApJ 528, 357</a:t>
-            </a:r>
-            <a:endParaRPr lang="en-US"/>
-          </a:p>
-        </p:txBody>
-      </p:sp>
-    </p:spTree>
-  </p:cSld>
-  <p:clrMapOvr>
-    <a:masterClrMapping/>
-  </p:clrMapOvr>
-</p:sld>
-</file>
-
-<file path=ppt/slides/slide17.xml><?xml version="1.0" encoding="utf-8"?>
-<p:sld xmlns:a="http://schemas.openxmlformats.org/drawingml/2006/main" xmlns:r="http://schemas.openxmlformats.org/officeDocument/2006/relationships" xmlns:p="http://schemas.openxmlformats.org/presentationml/2006/main">
-  <p:cSld>
-    <p:spTree>
-      <p:nvGrpSpPr>
-        <p:cNvPr id="1" name=""/>
-        <p:cNvGrpSpPr/>
-        <p:nvPr/>
-      </p:nvGrpSpPr>
-      <p:grpSpPr>
-        <a:xfrm>
-          <a:off x="0" y="0"/>
-          <a:ext cx="0" cy="0"/>
-          <a:chOff x="0" y="0"/>
-          <a:chExt cx="0" cy="0"/>
-        </a:xfrm>
-      </p:grpSpPr>
-      <p:sp>
-        <p:nvSpPr>
-          <p:cNvPr id="2" name="Title 1"/>
-          <p:cNvSpPr>
-            <a:spLocks noGrp="1"/>
-          </p:cNvSpPr>
-          <p:nvPr>
-            <p:ph type="title"/>
-          </p:nvPr>
-        </p:nvSpPr>
-        <p:spPr/>
-        <p:txBody>
-          <a:bodyPr/>
-          <a:lstStyle/>
-          <a:p>
-            <a:r>
-              <a:rPr sz="3400"/>
-              <a:t>② を調べる：σ を信じてよいか</a:t>
-            </a:r>
-          </a:p>
-        </p:txBody>
-      </p:sp>
-      <p:sp>
-        <p:nvSpPr>
-          <p:cNvPr id="3" name="Content Placeholder 2"/>
-          <p:cNvSpPr>
-            <a:spLocks noGrp="1"/>
-          </p:cNvSpPr>
-          <p:nvPr>
-            <p:ph idx="1"/>
-          </p:nvPr>
-        </p:nvSpPr>
-        <p:spPr>
-          <a:xfrm>
-            <a:off x="841248" y="1463040"/>
-            <a:ext cx="10515600" cy="4114800"/>
-          </a:xfrm>
-        </p:spPr>
-        <p:txBody>
-          <a:bodyPr/>
-          <a:lstStyle/>
-          <a:p>
-            <a:r>
-              <a:rPr sz="2200"/>
-              <a:t>何も無い空 23 か所で、天の川と同じ解析をした</a:t>
-            </a:r>
-          </a:p>
-          <a:p>
-            <a:r>
-              <a:rPr sz="2200"/>
-              <a:t>本物の信号が無ければ、σ は「平均 0、ばらつき 1」になるはず</a:t>
-            </a:r>
-          </a:p>
-          <a:p>
-            <a:pPr lvl="1"/>
-            <a:r>
-              <a:rPr sz="1800"/>
-              <a:t>Wilks の定理が成り立っていれば</a:t>
-            </a:r>
-          </a:p>
-          <a:p>
-            <a:r>
-              <a:rPr sz="2200"/>
-              <a:t>実際のばらつき：1.26（95% 区間 1.14–1.39）</a:t>
-            </a:r>
-          </a:p>
-          <a:p>
-            <a:pPr lvl="1"/>
-            <a:r>
-              <a:rPr sz="1800"/>
-              <a:t>σ は 1.26 倍大きく出ている</a:t>
-            </a:r>
-          </a:p>
-          <a:p>
-            <a:r>
-              <a:rPr sz="2200"/>
-              <a:t>19.5σ を較正すると 19.5 ÷ 1.26 ≈ 15σ（14.0–17.0σ）</a:t>
-            </a:r>
-          </a:p>
-        </p:txBody>
-      </p:sp>
-      <p:sp>
-        <p:nvSpPr>
-          <p:cNvPr id="8" name="TextBox 7">
-            <a:extLst>
-              <a:ext uri="{FF2B5EF4-FFF2-40B4-BE49-F238E27FC236}">
-                <a16:creationId xmlns:a16="http://schemas.microsoft.com/office/drawing/2014/main" id="{F85CD606-E3CE-F314-B3EE-F3D7028115CB}"/>
-              </a:ext>
-            </a:extLst>
-          </p:cNvPr>
-          <p:cNvSpPr txBox="1"/>
-          <p:nvPr/>
-        </p:nvSpPr>
-        <p:spPr>
-          <a:xfrm>
-            <a:off x="5837182" y="5663239"/>
-            <a:ext cx="6093372" cy="923330"/>
-          </a:xfrm>
-          <a:prstGeom prst="rect">
-            <a:avLst/>
-          </a:prstGeom>
-          <a:noFill/>
-        </p:spPr>
-        <p:txBody>
-          <a:bodyPr wrap="square">
-            <a:spAutoFit/>
-          </a:bodyPr>
-          <a:lstStyle/>
-          <a:p>
-            <a:r>
-              <a:rPr lang="en-US" sz="1400" b="1"/>
-              <a:t>Reference:</a:t>
-            </a:r>
-            <a:r>
-              <a:rPr lang="en-US" sz="1400"/>
-              <a:t> B. Efron &amp; R. J. Tibshirani (1993), An Introduction to the Bootstrap</a:t>
-            </a:r>
-            <a:endParaRPr lang="en-US"/>
-          </a:p>
-        </p:txBody>
-      </p:sp>
-    </p:spTree>
-  </p:cSld>
-  <p:clrMapOvr>
-    <a:masterClrMapping/>
-  </p:clrMapOvr>
-</p:sld>
-</file>
-
-<file path=ppt/slides/slide18.xml><?xml version="1.0" encoding="utf-8"?>
-<p:sld xmlns:a="http://schemas.openxmlformats.org/drawingml/2006/main" xmlns:r="http://schemas.openxmlformats.org/officeDocument/2006/relationships" xmlns:p="http://schemas.openxmlformats.org/presentationml/2006/main">
-  <p:cSld>
-    <p:spTree>
-      <p:nvGrpSpPr>
-        <p:cNvPr id="1" name=""/>
-        <p:cNvGrpSpPr/>
-        <p:nvPr/>
-      </p:nvGrpSpPr>
-      <p:grpSpPr>
-        <a:xfrm>
-          <a:off x="0" y="0"/>
-          <a:ext cx="0" cy="0"/>
-          <a:chOff x="0" y="0"/>
-          <a:chExt cx="0" cy="0"/>
-        </a:xfrm>
-      </p:grpSpPr>
-      <p:sp>
-        <p:nvSpPr>
-          <p:cNvPr id="2" name="Title 1"/>
-          <p:cNvSpPr>
-            <a:spLocks noGrp="1"/>
-          </p:cNvSpPr>
-          <p:nvPr>
-            <p:ph type="title"/>
-          </p:nvPr>
-        </p:nvSpPr>
-        <p:spPr/>
-        <p:txBody>
-          <a:bodyPr/>
-          <a:lstStyle/>
-          <a:p>
-            <a:r>
-              <a:rPr sz="3400"/>
-              <a:t>② の結果：エネルギーごとのばらつき</a:t>
-            </a:r>
-          </a:p>
-        </p:txBody>
-      </p:sp>
-      <p:pic>
-        <p:nvPicPr>
-          <p:cNvPr id="3" name="Picture 2" descr="fig_null_variance.png"/>
-          <p:cNvPicPr>
-            <a:picLocks noChangeAspect="1"/>
-          </p:cNvPicPr>
-          <p:nvPr/>
-        </p:nvPicPr>
-        <p:blipFill>
-          <a:blip r:embed="rId3"/>
-          <a:stretch>
-            <a:fillRect/>
-          </a:stretch>
-        </p:blipFill>
-        <p:spPr>
-          <a:xfrm>
-            <a:off x="2103120" y="1234440"/>
-            <a:ext cx="7156174" cy="4114800"/>
-          </a:xfrm>
-          <a:prstGeom prst="rect">
-            <a:avLst/>
-          </a:prstGeom>
-        </p:spPr>
-      </p:pic>
-      <p:sp>
-        <p:nvSpPr>
-          <p:cNvPr id="4" name="TextBox 3"/>
-          <p:cNvSpPr txBox="1"/>
-          <p:nvPr/>
-        </p:nvSpPr>
-        <p:spPr>
-          <a:xfrm>
-            <a:off x="457200" y="5486400"/>
-            <a:ext cx="11247120" cy="457200"/>
-          </a:xfrm>
-          <a:prstGeom prst="rect">
-            <a:avLst/>
-          </a:prstGeom>
-          <a:noFill/>
-        </p:spPr>
-        <p:txBody>
-          <a:bodyPr wrap="square">
-            <a:spAutoFit/>
-          </a:bodyPr>
-          <a:lstStyle/>
-          <a:p>
-            <a:r>
-              <a:rPr sz="2000"/>
-              <a:t>どのエネルギーでもばらつきは 1 より大きい（光子が十分ある範囲）</a:t>
-            </a:r>
-          </a:p>
-        </p:txBody>
-      </p:sp>
-    </p:spTree>
-  </p:cSld>
-  <p:clrMapOvr>
-    <a:masterClrMapping/>
-  </p:clrMapOvr>
-</p:sld>
-</file>
-
-<file path=ppt/slides/slide19.xml><?xml version="1.0" encoding="utf-8"?>
-<p:sld xmlns:a="http://schemas.openxmlformats.org/drawingml/2006/main" xmlns:r="http://schemas.openxmlformats.org/officeDocument/2006/relationships" xmlns:p="http://schemas.openxmlformats.org/presentationml/2006/main">
-  <p:cSld>
-    <p:spTree>
-      <p:nvGrpSpPr>
-        <p:cNvPr id="1" name=""/>
-        <p:cNvGrpSpPr/>
-        <p:nvPr/>
-      </p:nvGrpSpPr>
-      <p:grpSpPr>
-        <a:xfrm>
-          <a:off x="0" y="0"/>
-          <a:ext cx="0" cy="0"/>
-          <a:chOff x="0" y="0"/>
-          <a:chExt cx="0" cy="0"/>
-        </a:xfrm>
-      </p:grpSpPr>
-      <p:sp>
-        <p:nvSpPr>
-          <p:cNvPr id="2" name="Title 1"/>
-          <p:cNvSpPr>
-            <a:spLocks noGrp="1"/>
-          </p:cNvSpPr>
-          <p:nvPr>
-            <p:ph type="title"/>
-          </p:nvPr>
-        </p:nvSpPr>
-        <p:spPr/>
-        <p:txBody>
-          <a:bodyPr/>
-          <a:lstStyle/>
-          <a:p>
-            <a:r>
-              <a:rPr sz="3400"/>
-              <a:t>③ を調べる：19.1σ が再現できない理由</a:t>
-            </a:r>
-          </a:p>
-        </p:txBody>
-      </p:sp>
-      <p:sp>
-        <p:nvSpPr>
-          <p:cNvPr id="3" name="Content Placeholder 2"/>
-          <p:cNvSpPr>
-            <a:spLocks noGrp="1"/>
-          </p:cNvSpPr>
-          <p:nvPr>
-            <p:ph idx="1"/>
-          </p:nvPr>
-        </p:nvSpPr>
-        <p:spPr>
-          <a:xfrm>
-            <a:off x="841248" y="1463040"/>
-            <a:ext cx="10515600" cy="4937760"/>
-          </a:xfrm>
-        </p:spPr>
-        <p:txBody>
-          <a:bodyPr/>
-          <a:lstStyle/>
-          <a:p>
-            <a:r>
-              <a:rPr sz="2400"/>
-              <a:t>7/23 の計算の直後にコードを直していて、当時の状態が残っていなかった</a:t>
-            </a:r>
-          </a:p>
-          <a:p>
-            <a:r>
-              <a:rPr sz="2400"/>
-              <a:t>今のコードは、何度計算しても同じ答えになる（10/1 に確認）</a:t>
-            </a:r>
-          </a:p>
-          <a:p>
-            <a:r>
-              <a:rPr sz="2400"/>
-              <a:t>結果ファイルに、コードの版と設定を自動で記録するようにした</a:t>
-            </a:r>
-          </a:p>
-          <a:p>
-            <a:r>
-              <a:rPr sz="2400"/>
-              <a:t>→ 10/2 に Totani と同じやり方で計算し直し、主結果は 19.5σ</a:t>
-            </a:r>
-          </a:p>
-        </p:txBody>
-      </p:sp>
-    </p:spTree>
-  </p:cSld>
-  <p:clrMapOvr>
-    <a:masterClrMapping/>
-  </p:clrMapOvr>
-</p:sld>
-</file>
-
-<file path=ppt/slides/slide2.xml><?xml version="1.0" encoding="utf-8"?>
-<p:sld xmlns:a="http://schemas.openxmlformats.org/drawingml/2006/main" xmlns:r="http://schemas.openxmlformats.org/officeDocument/2006/relationships" xmlns:p="http://schemas.openxmlformats.org/presentationml/2006/main">
-  <p:cSld>
-    <p:spTree>
-      <p:nvGrpSpPr>
-        <p:cNvPr id="1" name=""/>
-        <p:cNvGrpSpPr/>
-        <p:nvPr/>
-      </p:nvGrpSpPr>
-      <p:grpSpPr>
-        <a:xfrm>
-          <a:off x="0" y="0"/>
-          <a:ext cx="0" cy="0"/>
-          <a:chOff x="0" y="0"/>
-          <a:chExt cx="0" cy="0"/>
-        </a:xfrm>
-      </p:grpSpPr>
-      <p:sp>
-        <p:nvSpPr>
-          <p:cNvPr id="2" name="Title 1"/>
-          <p:cNvSpPr>
-            <a:spLocks noGrp="1"/>
-          </p:cNvSpPr>
-          <p:nvPr>
-            <p:ph type="title"/>
-          </p:nvPr>
-        </p:nvSpPr>
-        <p:spPr/>
-        <p:txBody>
-          <a:bodyPr/>
-          <a:lstStyle/>
-          <a:p>
-            <a:r>
-              <a:rPr lang="ja-JP" altLang="en-US" sz="3400" b="1"/>
-              <a:t>卒業研究の目的</a:t>
-            </a:r>
-            <a:endParaRPr sz="3400" b="1"/>
-          </a:p>
-        </p:txBody>
-      </p:sp>
-      <p:sp>
-        <p:nvSpPr>
-          <p:cNvPr id="3" name="Content Placeholder 2"/>
-          <p:cNvSpPr>
-            <a:spLocks noGrp="1"/>
-          </p:cNvSpPr>
-          <p:nvPr>
-            <p:ph idx="1"/>
-          </p:nvPr>
-        </p:nvSpPr>
-        <p:spPr>
-          <a:xfrm>
-            <a:off x="841248" y="1463040"/>
-            <a:ext cx="11089306" cy="3076876"/>
-          </a:xfrm>
-        </p:spPr>
-        <p:txBody>
-          <a:bodyPr>
-            <a:normAutofit/>
-          </a:bodyPr>
-          <a:lstStyle/>
-          <a:p>
-            <a:r>
-              <a:rPr sz="2400"/>
-              <a:t>暗黒物質どうしがぶつかると消えて、ガンマ線を出すと考えられている</a:t>
-            </a:r>
-            <a:endParaRPr lang="en-US" sz="2400"/>
-          </a:p>
-          <a:p>
-            <a:pPr marL="0" indent="0">
-              <a:buNone/>
-            </a:pPr>
-            <a:r>
-              <a:rPr sz="2400"/>
-              <a:t>（対消滅）</a:t>
-            </a:r>
-          </a:p>
-          <a:p>
-            <a:r>
-              <a:rPr sz="2400"/>
-              <a:t>天の川は暗黒物質の「ハロー」に包まれている</a:t>
-            </a:r>
-            <a:r>
-              <a:rPr lang="ja-JP" altLang="en-US" sz="2400"/>
-              <a:t>のではないか→（</a:t>
-            </a:r>
-            <a:r>
-              <a:rPr lang="en-US" altLang="ja-JP" sz="2400"/>
-              <a:t>NFW</a:t>
-            </a:r>
-            <a:r>
-              <a:rPr lang="ja-JP" altLang="en-US" sz="2400"/>
-              <a:t>）</a:t>
-            </a:r>
-            <a:endParaRPr sz="2400"/>
-          </a:p>
-          <a:p>
-            <a:pPr lvl="1"/>
-            <a:r>
-              <a:rPr sz="2000"/>
-              <a:t>→ 空全体から、かすかなガンマ線が来るはず</a:t>
-            </a:r>
-          </a:p>
-          <a:p>
-            <a:r>
-              <a:rPr sz="2400"/>
-              <a:t>Totani (2025)：20 GeV 付近にハロー型の超過を報告（13–19σ）</a:t>
-            </a:r>
-          </a:p>
-          <a:p>
-            <a:r>
-              <a:rPr lang="ja-JP" altLang="en-US" sz="2400" b="1"/>
-              <a:t>卒業</a:t>
-            </a:r>
-            <a:r>
-              <a:rPr sz="2400" b="1"/>
-              <a:t>研究：これを自分で再現し、本物かどうか確かめる</a:t>
-            </a:r>
-            <a:endParaRPr lang="en-US" sz="2400" b="1"/>
-          </a:p>
-          <a:p>
-            <a:r>
-              <a:rPr lang="ja-JP" altLang="en-US" sz="2400" b="1"/>
-              <a:t>　　　→矮小銀河やほかの銀河にも適用したらどうなるか（拡張要素の原案）</a:t>
-            </a:r>
-            <a:endParaRPr sz="2400" b="1"/>
-          </a:p>
-        </p:txBody>
-      </p:sp>
-      <p:sp>
-        <p:nvSpPr>
-          <p:cNvPr id="8" name="TextBox 7">
-            <a:extLst>
-              <a:ext uri="{FF2B5EF4-FFF2-40B4-BE49-F238E27FC236}">
-                <a16:creationId xmlns:a16="http://schemas.microsoft.com/office/drawing/2014/main" id="{F85CD606-E3CE-F314-B3EE-F3D7028115CB}"/>
-              </a:ext>
-            </a:extLst>
-          </p:cNvPr>
-          <p:cNvSpPr txBox="1"/>
-          <p:nvPr/>
-        </p:nvSpPr>
-        <p:spPr>
-          <a:xfrm>
-            <a:off x="5837182" y="5663239"/>
-            <a:ext cx="6093372" cy="923330"/>
-          </a:xfrm>
-          <a:prstGeom prst="rect">
-            <a:avLst/>
-          </a:prstGeom>
-          <a:noFill/>
-        </p:spPr>
-        <p:txBody>
-          <a:bodyPr wrap="square">
-            <a:spAutoFit/>
-          </a:bodyPr>
-          <a:lstStyle/>
-          <a:p>
-            <a:r>
-              <a:rPr lang="en-US" sz="1400" b="1"/>
-              <a:t>Reference:</a:t>
-            </a:r>
-            <a:r>
-              <a:rPr lang="en-US" sz="1400"/>
-              <a:t> T. Totani (2025), arXiv:2507.07209</a:t>
-            </a:r>
-            <a:endParaRPr lang="en-US"/>
-          </a:p>
-        </p:txBody>
-      </p:sp>
-    </p:spTree>
-  </p:cSld>
-  <p:clrMapOvr>
-    <a:masterClrMapping/>
-  </p:clrMapOvr>
-</p:sld>
-</file>
-
-<file path=ppt/slides/slide20.xml><?xml version="1.0" encoding="utf-8"?>
-<p:sld xmlns:a="http://schemas.openxmlformats.org/drawingml/2006/main" xmlns:r="http://schemas.openxmlformats.org/officeDocument/2006/relationships" xmlns:p="http://schemas.openxmlformats.org/presentationml/2006/main">
-  <p:cSld>
-    <p:spTree>
-      <p:nvGrpSpPr>
-        <p:cNvPr id="1" name=""/>
-        <p:cNvGrpSpPr/>
-        <p:nvPr/>
-      </p:nvGrpSpPr>
-      <p:grpSpPr>
-        <a:xfrm>
-          <a:off x="0" y="0"/>
-          <a:ext cx="0" cy="0"/>
-          <a:chOff x="0" y="0"/>
-          <a:chExt cx="0" cy="0"/>
-        </a:xfrm>
-      </p:grpSpPr>
-      <p:sp>
-        <p:nvSpPr>
-          <p:cNvPr id="2" name="Title 1"/>
-          <p:cNvSpPr>
-            <a:spLocks noGrp="1"/>
-          </p:cNvSpPr>
-          <p:nvPr>
-            <p:ph type="title"/>
-          </p:nvPr>
-        </p:nvSpPr>
-        <p:spPr/>
-        <p:txBody>
-          <a:bodyPr/>
-          <a:lstStyle/>
-          <a:p>
-            <a:r>
-              <a:rPr sz="3400"/>
-              <a:t>ここまでのまとめ</a:t>
-            </a:r>
-          </a:p>
-        </p:txBody>
-      </p:sp>
-      <p:sp>
-        <p:nvSpPr>
-          <p:cNvPr id="3" name="Content Placeholder 2"/>
-          <p:cNvSpPr>
-            <a:spLocks noGrp="1"/>
-          </p:cNvSpPr>
-          <p:nvPr>
-            <p:ph idx="1"/>
-          </p:nvPr>
-        </p:nvSpPr>
-        <p:spPr>
-          <a:xfrm>
-            <a:off x="841248" y="1463040"/>
-            <a:ext cx="10515600" cy="4937760"/>
-          </a:xfrm>
-        </p:spPr>
-        <p:txBody>
-          <a:bodyPr/>
-          <a:lstStyle/>
-          <a:p>
-            <a:r>
-              <a:rPr sz="2400"/>
-              <a:t>ICS の明るさ・バブル・計算の近似の間違いでは、超過を説明できない</a:t>
-            </a:r>
-          </a:p>
-          <a:p>
-            <a:r>
-              <a:rPr sz="2400"/>
-              <a:t>σ は 1.26 倍の過大評価 → 較正すると約 15σ</a:t>
-            </a:r>
-          </a:p>
-          <a:p>
-            <a:r>
-              <a:rPr sz="2400"/>
-              <a:t>ただし、暗黒物質の証拠ではない</a:t>
-            </a:r>
-          </a:p>
-          <a:p>
-            <a:pPr lvl="1"/>
-            <a:r>
-              <a:rPr sz="2000"/>
-              <a:t>ICS の「空間の形」の間違いは否定できていない</a:t>
-            </a:r>
-          </a:p>
-          <a:p>
-            <a:r>
-              <a:rPr sz="2400"/>
-              <a:t>→ 独立な確認として、矮小銀河を見る</a:t>
-            </a:r>
-          </a:p>
-        </p:txBody>
-      </p:sp>
-    </p:spTree>
-  </p:cSld>
-  <p:clrMapOvr>
-    <a:masterClrMapping/>
-  </p:clrMapOvr>
-</p:sld>
-</file>
-
-<file path=ppt/slides/slide21.xml><?xml version="1.0" encoding="utf-8"?>
-<p:sld xmlns:a="http://schemas.openxmlformats.org/drawingml/2006/main" xmlns:r="http://schemas.openxmlformats.org/officeDocument/2006/relationships" xmlns:p="http://schemas.openxmlformats.org/presentationml/2006/main">
-  <p:cSld>
-    <p:spTree>
-      <p:nvGrpSpPr>
-        <p:cNvPr id="1" name=""/>
-        <p:cNvGrpSpPr/>
-        <p:nvPr/>
-      </p:nvGrpSpPr>
-      <p:grpSpPr>
-        <a:xfrm>
-          <a:off x="0" y="0"/>
-          <a:ext cx="0" cy="0"/>
-          <a:chOff x="0" y="0"/>
-          <a:chExt cx="0" cy="0"/>
-        </a:xfrm>
-      </p:grpSpPr>
-      <p:sp>
-        <p:nvSpPr>
-          <p:cNvPr id="2" name="Title 1"/>
-          <p:cNvSpPr>
-            <a:spLocks noGrp="1"/>
-          </p:cNvSpPr>
-          <p:nvPr>
-            <p:ph type="title"/>
-          </p:nvPr>
-        </p:nvSpPr>
-        <p:spPr/>
-        <p:txBody>
-          <a:bodyPr/>
-          <a:lstStyle/>
-          <a:p>
-            <a:r>
-              <a:rPr sz="3400"/>
-              <a:t>矮小銀河で確かめる</a:t>
-            </a:r>
-          </a:p>
-        </p:txBody>
-      </p:sp>
-      <p:sp>
-        <p:nvSpPr>
-          <p:cNvPr id="3" name="Content Placeholder 2"/>
-          <p:cNvSpPr>
-            <a:spLocks noGrp="1"/>
-          </p:cNvSpPr>
-          <p:nvPr>
-            <p:ph idx="1"/>
-          </p:nvPr>
-        </p:nvSpPr>
-        <p:spPr>
-          <a:xfrm>
-            <a:off x="841248" y="1463040"/>
-            <a:ext cx="10515600" cy="4114800"/>
-          </a:xfrm>
-        </p:spPr>
-        <p:txBody>
-          <a:bodyPr/>
-          <a:lstStyle/>
-          <a:p>
-            <a:r>
-              <a:rPr sz="2400"/>
-              <a:t>矮小銀河：天の川のまわりの小さな銀河</a:t>
-            </a:r>
-          </a:p>
-          <a:p>
-            <a:pPr lvl="1"/>
-            <a:r>
-              <a:rPr sz="2000"/>
-              <a:t>暗黒物質が多く、ガスや星形成が少ない（雑音が少ない）</a:t>
-            </a:r>
-          </a:p>
-          <a:p>
-            <a:r>
-              <a:rPr sz="2400"/>
-              <a:t>暗黒物質なら、矮小銀河からも同じ 20 GeV の光が来るはず</a:t>
-            </a:r>
-          </a:p>
-          <a:p>
-            <a:r>
-              <a:rPr sz="2400"/>
-              <a:t>同じ手法を、各天体のまわり半径 10° に使った</a:t>
-            </a:r>
-          </a:p>
-          <a:p>
-            <a:pPr lvl="1"/>
-            <a:r>
-              <a:rPr sz="2000"/>
-              <a:t>矮小銀河 54 ＋ M31・M33 ＋ 何も無い空 23 か所</a:t>
-            </a:r>
-          </a:p>
-          <a:p>
-            <a:r>
-              <a:rPr sz="2400"/>
-              <a:t>矮小銀河は小さい（0.2〜0.4°）ので、広がった ICS とは縮退しない</a:t>
-            </a:r>
-          </a:p>
-        </p:txBody>
-      </p:sp>
-      <p:sp>
-        <p:nvSpPr>
-          <p:cNvPr id="8" name="TextBox 7">
-            <a:extLst>
-              <a:ext uri="{FF2B5EF4-FFF2-40B4-BE49-F238E27FC236}">
-                <a16:creationId xmlns:a16="http://schemas.microsoft.com/office/drawing/2014/main" id="{F85CD606-E3CE-F314-B3EE-F3D7028115CB}"/>
-              </a:ext>
-            </a:extLst>
-          </p:cNvPr>
-          <p:cNvSpPr txBox="1"/>
-          <p:nvPr/>
-        </p:nvSpPr>
-        <p:spPr>
-          <a:xfrm>
-            <a:off x="5837182" y="5663239"/>
-            <a:ext cx="6093372" cy="923330"/>
-          </a:xfrm>
-          <a:prstGeom prst="rect">
-            <a:avLst/>
-          </a:prstGeom>
-          <a:noFill/>
-        </p:spPr>
-        <p:txBody>
-          <a:bodyPr wrap="square">
-            <a:spAutoFit/>
-          </a:bodyPr>
-          <a:lstStyle/>
-          <a:p>
-            <a:r>
-              <a:rPr lang="en-US" sz="1400" b="1"/>
-              <a:t>Reference:</a:t>
-            </a:r>
-            <a:r>
-              <a:rPr lang="en-US" sz="1400"/>
-              <a:t> A. B. Pace (2025), Open J. Astrophys. 8, 142</a:t>
-            </a:r>
-            <a:endParaRPr lang="en-US"/>
-          </a:p>
-        </p:txBody>
-      </p:sp>
-    </p:spTree>
-  </p:cSld>
-  <p:clrMapOvr>
-    <a:masterClrMapping/>
-  </p:clrMapOvr>
-</p:sld>
-</file>
-
-<file path=ppt/slides/slide22.xml><?xml version="1.0" encoding="utf-8"?>
-<p:sld xmlns:a="http://schemas.openxmlformats.org/drawingml/2006/main" xmlns:r="http://schemas.openxmlformats.org/officeDocument/2006/relationships" xmlns:p="http://schemas.openxmlformats.org/presentationml/2006/main">
-  <p:cSld>
-    <p:spTree>
-      <p:nvGrpSpPr>
-        <p:cNvPr id="1" name=""/>
-        <p:cNvGrpSpPr/>
-        <p:nvPr/>
-      </p:nvGrpSpPr>
-      <p:grpSpPr>
-        <a:xfrm>
-          <a:off x="0" y="0"/>
-          <a:ext cx="0" cy="0"/>
-          <a:chOff x="0" y="0"/>
-          <a:chExt cx="0" cy="0"/>
-        </a:xfrm>
-      </p:grpSpPr>
-      <p:sp>
-        <p:nvSpPr>
-          <p:cNvPr id="2" name="Title 1"/>
-          <p:cNvSpPr>
-            <a:spLocks noGrp="1"/>
-          </p:cNvSpPr>
-          <p:nvPr>
-            <p:ph type="title"/>
-          </p:nvPr>
-        </p:nvSpPr>
-        <p:spPr/>
-        <p:txBody>
-          <a:bodyPr/>
-          <a:lstStyle/>
-          <a:p>
-            <a:r>
-              <a:rPr sz="3400"/>
-              <a:t>予測の立て方：J ファクター</a:t>
-            </a:r>
-          </a:p>
-        </p:txBody>
-      </p:sp>
-      <p:sp>
-        <p:nvSpPr>
-          <p:cNvPr id="3" name="Content Placeholder 2"/>
-          <p:cNvSpPr>
-            <a:spLocks noGrp="1"/>
-          </p:cNvSpPr>
-          <p:nvPr>
-            <p:ph idx="1"/>
-          </p:nvPr>
-        </p:nvSpPr>
-        <p:spPr>
-          <a:xfrm>
-            <a:off x="841248" y="1463040"/>
-            <a:ext cx="10515600" cy="4114800"/>
-          </a:xfrm>
-        </p:spPr>
-        <p:txBody>
-          <a:bodyPr/>
-          <a:lstStyle/>
-          <a:p>
-            <a:r>
-              <a:rPr sz="2400"/>
-              <a:t>対消滅の明るさ：F = ⟨σv⟩ / (8π m²) × dN/dE × J</a:t>
-            </a:r>
-          </a:p>
-          <a:p>
-            <a:r>
-              <a:rPr sz="2400"/>
-              <a:t>J ファクター = 暗黒物質の密度の 2 乗を、視線方向に足し合わせた量</a:t>
-            </a:r>
-          </a:p>
-          <a:p>
-            <a:r>
-              <a:rPr sz="2400"/>
-              <a:t>天の川と矮小銀河で粒子は同じ → 比をとると J の比だけが残る</a:t>
-            </a:r>
-          </a:p>
-          <a:p>
-            <a:pPr lvl="1"/>
-            <a:r>
-              <a:rPr sz="2000"/>
-              <a:t>F_矮小 = F_天の川 × J_矮小 / J_天の川</a:t>
-            </a:r>
-          </a:p>
-          <a:p>
-            <a:r>
-              <a:rPr sz="2400"/>
-              <a:t>粒子の質量などを仮定せずに「何σ見えるはずか」が出る</a:t>
-            </a:r>
-          </a:p>
-          <a:p>
-            <a:r>
-              <a:rPr sz="2400"/>
-              <a:t>矮小銀河の J は、星の動きから推定する</a:t>
-            </a:r>
-          </a:p>
-        </p:txBody>
-      </p:sp>
-      <p:sp>
-        <p:nvSpPr>
-          <p:cNvPr id="8" name="TextBox 7">
-            <a:extLst>
-              <a:ext uri="{FF2B5EF4-FFF2-40B4-BE49-F238E27FC236}">
-                <a16:creationId xmlns:a16="http://schemas.microsoft.com/office/drawing/2014/main" id="{F85CD606-E3CE-F314-B3EE-F3D7028115CB}"/>
-              </a:ext>
-            </a:extLst>
-          </p:cNvPr>
-          <p:cNvSpPr txBox="1"/>
-          <p:nvPr/>
-        </p:nvSpPr>
-        <p:spPr>
-          <a:xfrm>
-            <a:off x="5837182" y="5663239"/>
-            <a:ext cx="6093372" cy="923330"/>
-          </a:xfrm>
-          <a:prstGeom prst="rect">
-            <a:avLst/>
-          </a:prstGeom>
-          <a:noFill/>
-        </p:spPr>
-        <p:txBody>
-          <a:bodyPr wrap="square">
-            <a:spAutoFit/>
-          </a:bodyPr>
-          <a:lstStyle/>
-          <a:p>
-            <a:r>
-              <a:rPr lang="en-US" sz="1400" b="1"/>
-              <a:t>Reference:</a:t>
-            </a:r>
-            <a:r>
-              <a:rPr lang="en-US" sz="1400"/>
-              <a:t> A. B. Pace &amp; L. E. Strigari (2019), MNRAS 482, 3480</a:t>
-            </a:r>
-            <a:endParaRPr lang="en-US"/>
-          </a:p>
-        </p:txBody>
-      </p:sp>
-    </p:spTree>
-  </p:cSld>
-  <p:clrMapOvr>
-    <a:masterClrMapping/>
-  </p:clrMapOvr>
-</p:sld>
-</file>
-
-<file path=ppt/slides/slide23.xml><?xml version="1.0" encoding="utf-8"?>
-<p:sld xmlns:a="http://schemas.openxmlformats.org/drawingml/2006/main" xmlns:r="http://schemas.openxmlformats.org/officeDocument/2006/relationships" xmlns:p="http://schemas.openxmlformats.org/presentationml/2006/main">
-  <p:cSld>
-    <p:spTree>
-      <p:nvGrpSpPr>
-        <p:cNvPr id="1" name=""/>
-        <p:cNvGrpSpPr/>
-        <p:nvPr/>
-      </p:nvGrpSpPr>
-      <p:grpSpPr>
-        <a:xfrm>
-          <a:off x="0" y="0"/>
-          <a:ext cx="0" cy="0"/>
-          <a:chOff x="0" y="0"/>
-          <a:chExt cx="0" cy="0"/>
-        </a:xfrm>
-      </p:grpSpPr>
-      <p:sp>
-        <p:nvSpPr>
-          <p:cNvPr id="2" name="Title 1"/>
-          <p:cNvSpPr>
-            <a:spLocks noGrp="1"/>
-          </p:cNvSpPr>
-          <p:nvPr>
-            <p:ph type="title"/>
-          </p:nvPr>
-        </p:nvSpPr>
-        <p:spPr/>
-        <p:txBody>
-          <a:bodyPr/>
-          <a:lstStyle/>
-          <a:p>
-            <a:r>
-              <a:rPr sz="3400"/>
-              <a:t>結果：どこにも信号は見えなかった</a:t>
-            </a:r>
-          </a:p>
-        </p:txBody>
-      </p:sp>
-      <p:pic>
-        <p:nvPicPr>
-          <p:cNvPr id="3" name="Picture 2" descr="fig_dwarf_results.png"/>
-          <p:cNvPicPr>
-            <a:picLocks noChangeAspect="1"/>
-          </p:cNvPicPr>
-          <p:nvPr/>
-        </p:nvPicPr>
-        <p:blipFill>
-          <a:blip r:embed="rId3"/>
-          <a:stretch>
-            <a:fillRect/>
-          </a:stretch>
-        </p:blipFill>
-        <p:spPr>
-          <a:xfrm>
-            <a:off x="2194560" y="1234440"/>
-            <a:ext cx="7156174" cy="4114800"/>
-          </a:xfrm>
-          <a:prstGeom prst="rect">
-            <a:avLst/>
-          </a:prstGeom>
-        </p:spPr>
-      </p:pic>
-      <p:sp>
-        <p:nvSpPr>
-          <p:cNvPr id="4" name="TextBox 3"/>
-          <p:cNvSpPr txBox="1"/>
-          <p:nvPr/>
-        </p:nvSpPr>
-        <p:spPr>
-          <a:xfrm>
-            <a:off x="457200" y="5486400"/>
-            <a:ext cx="11247120" cy="457200"/>
-          </a:xfrm>
-          <a:prstGeom prst="rect">
-            <a:avLst/>
-          </a:prstGeom>
-          <a:noFill/>
-        </p:spPr>
-        <p:txBody>
-          <a:bodyPr wrap="square">
-            <a:spAutoFit/>
-          </a:bodyPr>
-          <a:lstStyle/>
-          <a:p>
-            <a:r>
-              <a:rPr sz="2000"/>
-              <a:t>どの天体・どのエネルギーでも最大 +3.46σ（何も無い空でも 4.50σ）</a:t>
-            </a:r>
-          </a:p>
-        </p:txBody>
-      </p:sp>
-    </p:spTree>
-  </p:cSld>
-  <p:clrMapOvr>
-    <a:masterClrMapping/>
-  </p:clrMapOvr>
-</p:sld>
-</file>
-
 <file path=ppt/slides/slide24.xml><?xml version="1.0" encoding="utf-8"?>
 <p:sld xmlns:a="http://schemas.openxmlformats.org/drawingml/2006/main" xmlns:r="http://schemas.openxmlformats.org/officeDocument/2006/relationships" xmlns:p="http://schemas.openxmlformats.org/presentationml/2006/main">
   <p:cSld>
@@ -8935,7 +10196,7 @@
           <a:p>
             <a:r>
               <a:rPr sz="3400"/>
-              <a:t>天体をまとめて比べる</a:t>
+              <a:t>縮退が引き起こした 3 つの疑問</a:t>
             </a:r>
           </a:p>
         </p:txBody>
@@ -8962,44 +10223,46 @@
           <a:p>
             <a:r>
               <a:rPr sz="2400"/>
-              <a:t>1 個ずつでは弱いので、J が求まる 43 天体をまとめる</a:t>
+              <a:t>① バブル領域を外すと 19.5σ → 5.0σ に落ちる</a:t>
+            </a:r>
+          </a:p>
+          <a:p>
+            <a:pPr lvl="1"/>
+            <a:r>
+              <a:rPr sz="2000"/>
+              <a:t>ハローは、本当は ICS やバブルの間違いでは？</a:t>
             </a:r>
           </a:p>
           <a:p>
             <a:r>
               <a:rPr sz="2400"/>
-              <a:t>T = Σ w_i z_i / √( Σ w_i² )、重み w_i = 天体 i の予測 σ</a:t>
+              <a:t>② 何も無い空でも、最大 4.5σ が出る</a:t>
             </a:r>
           </a:p>
           <a:p>
             <a:pPr lvl="1"/>
             <a:r>
               <a:rPr sz="2000"/>
-              <a:t>z_i：天体 i の実測の σ（20 GeV）</a:t>
+              <a:t>σ をそのまま信じてよいのか？</a:t>
             </a:r>
           </a:p>
           <a:p>
             <a:r>
               <a:rPr sz="2400"/>
-              <a:t>暗黒物質が無ければ：T は平均 0、ばらつき 1</a:t>
+              <a:t>③ 7/23 に出した 19.1σ が再現できない</a:t>
+            </a:r>
+          </a:p>
+          <a:p>
+            <a:pPr lvl="1"/>
+            <a:r>
+              <a:rPr sz="2000"/>
+              <a:t>結果そのものを信じてよいのか？</a:t>
             </a:r>
           </a:p>
           <a:p>
             <a:r>
               <a:rPr sz="2400"/>
-              <a:t>暗黒物質があれば：T の平均 = √( Σ pred_i² ) = 1.77</a:t>
-            </a:r>
-          </a:p>
-          <a:p>
-            <a:r>
-              <a:rPr sz="2400"/>
-              <a:t>実測 T = 0.39 → ずれ 1.4σ</a:t>
-            </a:r>
-          </a:p>
-          <a:p>
-            <a:r>
-              <a:rPr sz="2400"/>
-              <a:t>ただし、ここでは J に誤差は無いとしていた</a:t>
+              <a:t>→ 次から、1 つずつ調べた結果</a:t>
             </a:r>
           </a:p>
         </p:txBody>
@@ -9046,7 +10309,7 @@
           <a:p>
             <a:r>
               <a:rPr sz="3400"/>
-              <a:t>ここで論文：J の誤差は小さく見積もられている</a:t>
+              <a:t>① を調べる：手がかりはどこにあるか</a:t>
             </a:r>
           </a:p>
         </p:txBody>
@@ -9064,7 +10327,7 @@
         <p:spPr>
           <a:xfrm>
             <a:off x="841248" y="1463040"/>
-            <a:ext cx="10515600" cy="4114800"/>
+            <a:ext cx="10515600" cy="4937760"/>
           </a:xfrm>
         </p:spPr>
         <p:txBody>
@@ -9072,82 +10335,40 @@
           <a:lstStyle/>
           <a:p>
             <a:r>
-              <a:rPr sz="2400"/>
-              <a:t>文献ごとの J の値は、書かれた誤差よりも大きくばらつく</a:t>
-            </a:r>
-          </a:p>
-          <a:p>
-            <a:r>
-              <a:rPr sz="2400"/>
-              <a:t>見落とされがちな誤差の原因（8 つ）</a:t>
+              <a:rPr sz="2200"/>
+              <a:t>フィッシャー情報：データがパラメータをどれだけ決められるか</a:t>
+            </a:r>
+          </a:p>
+          <a:p>
+            <a:r>
+              <a:rPr sz="2200"/>
+              <a:t>ICS など他の成分では説明できない「ハローだけの手がかり」を、空の場所ごとに計算</a:t>
             </a:r>
           </a:p>
           <a:p>
             <a:pPr lvl="1"/>
             <a:r>
-              <a:rPr sz="2000"/>
-              <a:t>点として扱う・ハローの形・星の分布の形の仮定</a:t>
-            </a:r>
-          </a:p>
-          <a:p>
-            <a:pPr lvl="1"/>
-            <a:r>
-              <a:rPr sz="2000"/>
-              <a:t>非球対称（最大 0.4 dex）・非平衡（〜0.1）・連星（Ret II で〜0.3）</a:t>
-            </a:r>
-          </a:p>
-          <a:p>
-            <a:pPr lvl="1"/>
-            <a:r>
-              <a:rPr sz="2000"/>
-              <a:t>前景の星の混入・誤差の分布が正規分布でない</a:t>
-            </a:r>
-          </a:p>
-          <a:p>
-            <a:r>
-              <a:rPr sz="2400"/>
-              <a:t>Δlog₁₀J ≈ 0.5（約 3 倍）以上の誤差を見込むべき</a:t>
-            </a:r>
-          </a:p>
-        </p:txBody>
-      </p:sp>
-      <p:sp>
-        <p:nvSpPr>
-          <p:cNvPr id="8" name="TextBox 7">
-            <a:extLst>
-              <a:ext uri="{FF2B5EF4-FFF2-40B4-BE49-F238E27FC236}">
-                <a16:creationId xmlns:a16="http://schemas.microsoft.com/office/drawing/2014/main" id="{F85CD606-E3CE-F314-B3EE-F3D7028115CB}"/>
-              </a:ext>
-            </a:extLst>
-          </p:cNvPr>
-          <p:cNvSpPr txBox="1"/>
-          <p:nvPr/>
-        </p:nvSpPr>
-        <p:spPr>
-          <a:xfrm>
-            <a:off x="5837182" y="5663239"/>
-            <a:ext cx="6093372" cy="923330"/>
-          </a:xfrm>
-          <a:prstGeom prst="rect">
-            <a:avLst/>
-          </a:prstGeom>
-          <a:noFill/>
-        </p:spPr>
-        <p:txBody>
-          <a:bodyPr wrap="square">
-            <a:spAutoFit/>
-          </a:bodyPr>
-          <a:lstStyle/>
-          <a:p>
-            <a:r>
-              <a:rPr lang="en-US" sz="1400" b="1"/>
-              <a:t>Reference:</a:t>
-            </a:r>
-            <a:r>
-              <a:rPr lang="en-US" sz="1400"/>
-              <a:t> Bertólez-Martínez, Hooper &amp; Khatee Zathul (2026), arXiv:2609.20944 §II</a:t>
-            </a:r>
-            <a:endParaRPr lang="en-US"/>
+              <a:rPr sz="1800"/>
+              <a:t>その 54% がバブル領域（面積は 34%）に集中</a:t>
+            </a:r>
+          </a:p>
+          <a:p>
+            <a:r>
+              <a:rPr sz="2200"/>
+              <a:t>手がかりの減り方だけで予測すると 6.6σ、実測 5.0σ</a:t>
+            </a:r>
+          </a:p>
+          <a:p>
+            <a:r>
+              <a:rPr sz="2200"/>
+              <a:t>同じ形の領域を横にずらして外すと 15〜16σ</a:t>
+            </a:r>
+          </a:p>
+          <a:p>
+            <a:r>
+              <a:rPr sz="2200"/>
+              <a:t>→ 19 → 5σ は「手がかりを捨てた」から。汚染の証拠ではない</a:t>
+            </a:r>
           </a:p>
         </p:txBody>
       </p:sp>
@@ -9193,7 +10414,7 @@
           <a:p>
             <a:r>
               <a:rPr sz="3400"/>
-              <a:t>詳細なmethodについて①：仮想データの作り方</a:t>
+              <a:t>① を調べる：ICS が犯人なら</a:t>
             </a:r>
           </a:p>
         </p:txBody>
@@ -9220,46 +10441,46 @@
           <a:p>
             <a:r>
               <a:rPr sz="2200"/>
-              <a:t>Fermi-LAT の観測を計算機の中で作る（FermiTools、fermipy）</a:t>
+              <a:t>ICS をバブルの内と外で別々の明るさにして当てはめた</a:t>
             </a:r>
           </a:p>
           <a:p>
             <a:pPr lvl="1"/>
             <a:r>
               <a:rPr sz="1800"/>
-              <a:t>17.4 年分、0.5 GeV〜1 TeV、10° × 10° の領域、0.08° の画素</a:t>
+              <a:t>内側が約 2.3 倍明るければ、ハローの改善の 92% を ICS が説明</a:t>
             </a:r>
           </a:p>
           <a:p>
             <a:r>
               <a:rPr sz="2200"/>
-              <a:t>背景：銀河の拡散光＋等方の光から、ポアソン乱数で光子を作る</a:t>
+              <a:t>ICS の計算の近似（等方近似）を直しても 1.1〜1.3 倍</a:t>
+            </a:r>
+          </a:p>
+          <a:p>
+            <a:pPr lvl="1"/>
+            <a:r>
+              <a:rPr sz="1800"/>
+              <a:t>しかも外側のほうが大きくなる → 2.3 倍には届かない</a:t>
             </a:r>
           </a:p>
           <a:p>
             <a:r>
               <a:rPr sz="2200"/>
-              <a:t>暗黒物質の信号を入れる</a:t>
+              <a:t>ICS を 3 種類に分けて、それぞれ自由に動かしても</a:t>
             </a:r>
           </a:p>
           <a:p>
             <a:pPr lvl="1"/>
             <a:r>
               <a:rPr sz="1800"/>
-              <a:t>質量 42 GeV、b クォーク対、⟨σv⟩ = 1.4 × 10⁻²⁶ cm³/s</a:t>
-            </a:r>
-          </a:p>
-          <a:p>
-            <a:pPr lvl="1"/>
-            <a:r>
-              <a:rPr sz="1800"/>
-              <a:t>銀河中心 GeV 超過（GCE）に合う値</a:t>
+              <a:t>19.5σ → 18.4σ（約 1σ しか下がらない）</a:t>
             </a:r>
           </a:p>
           <a:p>
             <a:r>
               <a:rPr sz="2200"/>
-              <a:t>対象：Ursa Minor 1 個と、27 個の矮小銀河</a:t>
+              <a:t>→ ICS の「明るさ」の間違いでは、ハローを説明できない</a:t>
             </a:r>
           </a:p>
         </p:txBody>
@@ -9298,7 +10519,7 @@
             </a:r>
             <a:r>
               <a:rPr lang="en-US" sz="1400"/>
-              <a:t> Bertólez-Martínez, Hooper &amp; Khatee Zathul (2026), arXiv:2609.20944 §III</a:t>
+              <a:t> I. V. Moskalenko &amp; A. W. Strong (2000), ApJ 528, 357</a:t>
             </a:r>
             <a:endParaRPr lang="en-US"/>
           </a:p>
@@ -9346,7 +10567,7 @@
           <a:p>
             <a:r>
               <a:rPr sz="3400"/>
-              <a:t>詳細なmethodについて②：尤度と 2 つの誤差</a:t>
+              <a:t>② を調べる：σ を信じてよいか</a:t>
             </a:r>
           </a:p>
         </p:txBody>
@@ -9373,46 +10594,39 @@
           <a:p>
             <a:r>
               <a:rPr sz="2200"/>
-              <a:t>各天体の尤度 = 光子のポアソン尤度 × J の尤度</a:t>
+              <a:t>何も無い空 23 か所で、天の川と同じ解析をした</a:t>
+            </a:r>
+          </a:p>
+          <a:p>
+            <a:r>
+              <a:rPr sz="2200"/>
+              <a:t>本物の信号が無ければ、σ は「平均 0、ばらつき 1」になるはず</a:t>
             </a:r>
           </a:p>
           <a:p>
             <a:pPr lvl="1"/>
             <a:r>
               <a:rPr sz="1800"/>
-              <a:t>L_J ∝ exp[ −(log₁₀J − log₁₀J_obs)² / 2σ_L² ]</a:t>
+              <a:t>Wilks の定理が成り立っていれば</a:t>
             </a:r>
           </a:p>
           <a:p>
             <a:r>
               <a:rPr sz="2200"/>
-              <a:t>27 個は尤度の積でまとめる（⟨σv⟩ は共通、J は天体ごと）</a:t>
+              <a:t>実際のばらつき：1.26（95% 区間 1.14–1.39）</a:t>
+            </a:r>
+          </a:p>
+          <a:p>
+            <a:pPr lvl="1"/>
+            <a:r>
+              <a:rPr sz="1800"/>
+              <a:t>σ は 1.26 倍大きく出ている</a:t>
             </a:r>
           </a:p>
           <a:p>
             <a:r>
               <a:rPr sz="2200"/>
-              <a:t>2 つの誤差を分けて動かす</a:t>
-            </a:r>
-          </a:p>
-          <a:p>
-            <a:pPr lvl="1"/>
-            <a:r>
-              <a:rPr sz="1800"/>
-              <a:t>σ：J の本当のばらつき（J_obs を J_true のまわりに σ でばらつかせる）</a:t>
-            </a:r>
-          </a:p>
-          <a:p>
-            <a:pPr lvl="1"/>
-            <a:r>
-              <a:rPr sz="1800"/>
-              <a:t>σ_L：解析で仮定する幅</a:t>
-            </a:r>
-          </a:p>
-          <a:p>
-            <a:r>
-              <a:rPr sz="2200"/>
-              <a:t>95% 上限：TS が最大値から 2.71 下がる点（Wilks の定理を仮定）</a:t>
+              <a:t>19.5σ を較正すると 19.5 ÷ 1.26 ≈ 15σ（14.0–17.0σ）</a:t>
             </a:r>
           </a:p>
         </p:txBody>
@@ -9451,7 +10665,7 @@
             </a:r>
             <a:r>
               <a:rPr lang="en-US" sz="1400"/>
-              <a:t> Bertólez-Martínez, Hooper &amp; Khatee Zathul (2026), arXiv:2609.20944 式 (6)–(10)</a:t>
+              <a:t> B. Efron &amp; R. J. Tibshirani (1993), An Introduction to the Bootstrap</a:t>
             </a:r>
             <a:endParaRPr lang="en-US"/>
           </a:p>
@@ -9499,86 +10713,45 @@
           <a:p>
             <a:r>
               <a:rPr sz="3400"/>
-              <a:t>詳細なmethodについて③：何を数えたか</a:t>
-            </a:r>
-          </a:p>
-        </p:txBody>
-      </p:sp>
-      <p:sp>
-        <p:nvSpPr>
-          <p:cNvPr id="3" name="Content Placeholder 2"/>
-          <p:cNvSpPr>
-            <a:spLocks noGrp="1"/>
-          </p:cNvSpPr>
-          <p:nvPr>
-            <p:ph idx="1"/>
-          </p:nvPr>
-        </p:nvSpPr>
+              <a:t>② の結果：エネルギーごとのばらつき</a:t>
+            </a:r>
+          </a:p>
+        </p:txBody>
+      </p:sp>
+      <p:pic>
+        <p:nvPicPr>
+          <p:cNvPr id="3" name="Picture 2" descr="fig_null_variance.png"/>
+          <p:cNvPicPr>
+            <a:picLocks noChangeAspect="1"/>
+          </p:cNvPicPr>
+          <p:nvPr/>
+        </p:nvPicPr>
+        <p:blipFill>
+          <a:blip r:embed="rId3"/>
+          <a:stretch>
+            <a:fillRect/>
+          </a:stretch>
+        </p:blipFill>
         <p:spPr>
           <a:xfrm>
-            <a:off x="841248" y="1463040"/>
-            <a:ext cx="10515600" cy="4114800"/>
+            <a:off x="2103120" y="1234440"/>
+            <a:ext cx="7156174" cy="4114800"/>
           </a:xfrm>
+          <a:prstGeom prst="rect">
+            <a:avLst/>
+          </a:prstGeom>
         </p:spPr>
-        <p:txBody>
-          <a:bodyPr/>
-          <a:lstStyle/>
-          <a:p>
-            <a:r>
-              <a:rPr sz="2400"/>
-              <a:t>本物の信号を入れた仮想データを何度も作る</a:t>
-            </a:r>
-          </a:p>
-          <a:p>
-            <a:pPr lvl="1"/>
-            <a:r>
-              <a:rPr sz="2000"/>
-              <a:t>Ursa Minor で 1000 回（基準の設定では 1 万回）</a:t>
-            </a:r>
-          </a:p>
-          <a:p>
-            <a:r>
-              <a:rPr sz="2400"/>
-              <a:t>それぞれで 95% 上限を出す</a:t>
-            </a:r>
-          </a:p>
-          <a:p>
-            <a:r>
-              <a:rPr sz="2400"/>
-              <a:t>上限が本物の ⟨σv⟩ より下 =「本物を無いと間違えた」</a:t>
-            </a:r>
-          </a:p>
-          <a:p>
-            <a:r>
-              <a:rPr sz="2400"/>
-              <a:t>95% 上限なら、間違いは 5% 以下のはず</a:t>
-            </a:r>
-          </a:p>
-          <a:p>
-            <a:pPr lvl="1"/>
-            <a:r>
-              <a:rPr sz="2000"/>
-              <a:t>これが守られているか（カバレッジ）を調べる</a:t>
-            </a:r>
-          </a:p>
-        </p:txBody>
-      </p:sp>
-      <p:sp>
-        <p:nvSpPr>
-          <p:cNvPr id="8" name="TextBox 7">
-            <a:extLst>
-              <a:ext uri="{FF2B5EF4-FFF2-40B4-BE49-F238E27FC236}">
-                <a16:creationId xmlns:a16="http://schemas.microsoft.com/office/drawing/2014/main" id="{F85CD606-E3CE-F314-B3EE-F3D7028115CB}"/>
-              </a:ext>
-            </a:extLst>
-          </p:cNvPr>
+      </p:pic>
+      <p:sp>
+        <p:nvSpPr>
+          <p:cNvPr id="4" name="TextBox 3"/>
           <p:cNvSpPr txBox="1"/>
           <p:nvPr/>
         </p:nvSpPr>
         <p:spPr>
           <a:xfrm>
-            <a:off x="5837182" y="5663239"/>
-            <a:ext cx="6093372" cy="923330"/>
+            <a:off x="457200" y="5486400"/>
+            <a:ext cx="11247120" cy="457200"/>
           </a:xfrm>
           <a:prstGeom prst="rect">
             <a:avLst/>
@@ -9592,14 +10765,9 @@
           <a:lstStyle/>
           <a:p>
             <a:r>
-              <a:rPr lang="en-US" sz="1400" b="1"/>
-              <a:t>Reference:</a:t>
-            </a:r>
-            <a:r>
-              <a:rPr lang="en-US" sz="1400"/>
-              <a:t> Bertólez-Martínez, Hooper &amp; Khatee Zathul (2026), arXiv:2609.20944 §IV</a:t>
-            </a:r>
-            <a:endParaRPr lang="en-US"/>
+              <a:rPr sz="2000"/>
+              <a:t>どのエネルギーでもばらつきは 1 より大きい（光子が十分ある範囲）</a:t>
+            </a:r>
           </a:p>
         </p:txBody>
       </p:sp>
@@ -9645,7 +10813,7 @@
           <a:p>
             <a:r>
               <a:rPr sz="3400"/>
-              <a:t>論文の結果①：Ursa Minor 1 個</a:t>
+              <a:t>③ を調べる：19.1σ が再現できない理由</a:t>
             </a:r>
           </a:p>
         </p:txBody>
@@ -9663,7 +10831,7 @@
         <p:spPr>
           <a:xfrm>
             <a:off x="841248" y="1463040"/>
-            <a:ext cx="10515600" cy="4114800"/>
+            <a:ext cx="10515600" cy="4937760"/>
           </a:xfrm>
         </p:spPr>
         <p:txBody>
@@ -9672,88 +10840,26 @@
           <a:p>
             <a:r>
               <a:rPr sz="2400"/>
-              <a:t>σ_L を 0.3 / 0.5 / 1.0 だけ大きくすると</a:t>
-            </a:r>
-          </a:p>
-          <a:p>
-            <a:pPr lvl="1"/>
-            <a:r>
-              <a:rPr sz="2000"/>
-              <a:t>上限が 1.5 / 2.5 / 11 倍ゆるくなる</a:t>
+              <a:t>7/23 の計算の直後にコードを直していて、当時の状態が残っていなかった</a:t>
             </a:r>
           </a:p>
           <a:p>
             <a:r>
               <a:rPr sz="2400"/>
-              <a:t>本当の誤差 σ だけ大きく、σ_L は小さいままだと</a:t>
-            </a:r>
-          </a:p>
-          <a:p>
-            <a:pPr lvl="1"/>
-            <a:r>
-              <a:rPr sz="2000"/>
-              <a:t>本物を除外する割合 1.7% / 8.0% / 22%</a:t>
-            </a:r>
-          </a:p>
-          <a:p>
-            <a:pPr lvl="1"/>
-            <a:r>
-              <a:rPr sz="2000"/>
-              <a:t>σ_L を σ に合わせれば 5% 以下に戻る</a:t>
+              <a:t>今のコードは、何度計算しても同じ答えになる（10/1 に確認）</a:t>
             </a:r>
           </a:p>
           <a:p>
             <a:r>
               <a:rPr sz="2400"/>
-              <a:t>形の間違い：球対称 NFW で解析 → 上限 2.4 倍厳しく</a:t>
-            </a:r>
-          </a:p>
-          <a:p>
-            <a:pPr lvl="1"/>
-            <a:r>
-              <a:rPr sz="2000"/>
-              <a:t>点として扱う → 1.4 倍厳しく</a:t>
-            </a:r>
-          </a:p>
-        </p:txBody>
-      </p:sp>
-      <p:sp>
-        <p:nvSpPr>
-          <p:cNvPr id="8" name="TextBox 7">
-            <a:extLst>
-              <a:ext uri="{FF2B5EF4-FFF2-40B4-BE49-F238E27FC236}">
-                <a16:creationId xmlns:a16="http://schemas.microsoft.com/office/drawing/2014/main" id="{F85CD606-E3CE-F314-B3EE-F3D7028115CB}"/>
-              </a:ext>
-            </a:extLst>
-          </p:cNvPr>
-          <p:cNvSpPr txBox="1"/>
-          <p:nvPr/>
-        </p:nvSpPr>
-        <p:spPr>
-          <a:xfrm>
-            <a:off x="5837182" y="5663239"/>
-            <a:ext cx="6093372" cy="923330"/>
-          </a:xfrm>
-          <a:prstGeom prst="rect">
-            <a:avLst/>
-          </a:prstGeom>
-          <a:noFill/>
-        </p:spPr>
-        <p:txBody>
-          <a:bodyPr wrap="square">
-            <a:spAutoFit/>
-          </a:bodyPr>
-          <a:lstStyle/>
-          <a:p>
-            <a:r>
-              <a:rPr lang="en-US" sz="1400" b="1"/>
-              <a:t>Reference:</a:t>
-            </a:r>
-            <a:r>
-              <a:rPr lang="en-US" sz="1400"/>
-              <a:t> Bertólez-Martínez, Hooper &amp; Khatee Zathul (2026), arXiv:2609.20944 §IV, Fig. 2–4</a:t>
-            </a:r>
-            <a:endParaRPr lang="en-US"/>
+              <a:t>結果ファイルに、コードの版と設定を自動で記録するようにした</a:t>
+            </a:r>
+          </a:p>
+          <a:p>
+            <a:r>
+              <a:rPr sz="2400"/>
+              <a:t>→ 10/2 に Totani と同じやり方で計算し直し、主結果は 19.5σ</a:t>
+            </a:r>
           </a:p>
         </p:txBody>
       </p:sp>
@@ -10035,7 +11141,7 @@
           <a:p>
             <a:r>
               <a:rPr sz="3400"/>
-              <a:t>論文の結果②：27 個をまとめると</a:t>
+              <a:t>ここまでのまとめ</a:t>
             </a:r>
           </a:p>
         </p:txBody>
@@ -10053,7 +11159,7 @@
         <p:spPr>
           <a:xfrm>
             <a:off x="841248" y="1463040"/>
-            <a:ext cx="10515600" cy="4114800"/>
+            <a:ext cx="10515600" cy="4937760"/>
           </a:xfrm>
         </p:spPr>
         <p:txBody>
@@ -10061,87 +11167,34 @@
           <a:lstStyle/>
           <a:p>
             <a:r>
-              <a:rPr sz="2200"/>
-              <a:t>σ_L を 0.3 / 0.5 / 1.0 → 上限 1.14 / 1.44 / 3.23 倍ゆるく</a:t>
-            </a:r>
-          </a:p>
-          <a:p>
-            <a:r>
-              <a:rPr sz="2200"/>
-              <a:t>誤差を正しく入れても、本物を除外する割合 21%（5% のはず）</a:t>
+              <a:rPr sz="2400"/>
+              <a:t>ICS の明るさ・バブル・計算の近似の間違いでは、超過を説明できない</a:t>
+            </a:r>
+          </a:p>
+          <a:p>
+            <a:r>
+              <a:rPr sz="2400"/>
+              <a:t>σ は 1.26 倍の過大評価 → 較正すると約 15σ</a:t>
+            </a:r>
+          </a:p>
+          <a:p>
+            <a:r>
+              <a:rPr sz="2400"/>
+              <a:t>ただし、暗黒物質の証拠ではない</a:t>
             </a:r>
           </a:p>
           <a:p>
             <a:pPr lvl="1"/>
             <a:r>
-              <a:rPr sz="1800"/>
-              <a:t>J の数が天体の数と一緒に増え、Wilks の定理の前提が崩れる</a:t>
-            </a:r>
-          </a:p>
-          <a:p>
-            <a:r>
-              <a:rPr sz="2200"/>
-              <a:t>本当の誤差を 0.3 / 0.5 / 1.0 大きくすると 31% / 49% / 88%</a:t>
-            </a:r>
-          </a:p>
-          <a:p>
-            <a:pPr lvl="1"/>
-            <a:r>
-              <a:rPr sz="1800"/>
-              <a:t>σ_L を合わせても 23% / 28% / 38%</a:t>
-            </a:r>
-          </a:p>
-          <a:p>
-            <a:r>
-              <a:rPr sz="2200"/>
-              <a:t>原因：J が上に振れた天体が、上限を決めてしまう</a:t>
-            </a:r>
-          </a:p>
-          <a:p>
-            <a:r>
-              <a:rPr sz="2200"/>
-              <a:t>対策の一つ：何も無い領域で較正する</a:t>
-            </a:r>
-          </a:p>
-        </p:txBody>
-      </p:sp>
-      <p:sp>
-        <p:nvSpPr>
-          <p:cNvPr id="8" name="TextBox 7">
-            <a:extLst>
-              <a:ext uri="{FF2B5EF4-FFF2-40B4-BE49-F238E27FC236}">
-                <a16:creationId xmlns:a16="http://schemas.microsoft.com/office/drawing/2014/main" id="{F85CD606-E3CE-F314-B3EE-F3D7028115CB}"/>
-              </a:ext>
-            </a:extLst>
-          </p:cNvPr>
-          <p:cNvSpPr txBox="1"/>
-          <p:nvPr/>
-        </p:nvSpPr>
-        <p:spPr>
-          <a:xfrm>
-            <a:off x="5837182" y="5663239"/>
-            <a:ext cx="6093372" cy="923330"/>
-          </a:xfrm>
-          <a:prstGeom prst="rect">
-            <a:avLst/>
-          </a:prstGeom>
-          <a:noFill/>
-        </p:spPr>
-        <p:txBody>
-          <a:bodyPr wrap="square">
-            <a:spAutoFit/>
-          </a:bodyPr>
-          <a:lstStyle/>
-          <a:p>
-            <a:r>
-              <a:rPr lang="en-US" sz="1400" b="1"/>
-              <a:t>Reference:</a:t>
-            </a:r>
-            <a:r>
-              <a:rPr lang="en-US" sz="1400"/>
-              <a:t> Bertólez-Martínez, Hooper &amp; Khatee Zathul (2026), arXiv:2609.20944 §V, Fig. 5–7</a:t>
-            </a:r>
-            <a:endParaRPr lang="en-US"/>
+              <a:rPr sz="2000"/>
+              <a:t>ICS の「空間の形」の間違いは否定できていない</a:t>
+            </a:r>
+          </a:p>
+          <a:p>
+            <a:r>
+              <a:rPr sz="2400"/>
+              <a:t>→ 独立な確認として、矮小銀河を見る</a:t>
+            </a:r>
           </a:p>
         </p:txBody>
       </p:sp>
@@ -10187,7 +11240,7 @@
           <a:p>
             <a:r>
               <a:rPr sz="3400"/>
-              <a:t>論文のまとめ</a:t>
+              <a:t>矮小銀河で確かめる</a:t>
             </a:r>
           </a:p>
         </p:txBody>
@@ -10214,19 +11267,39 @@
           <a:p>
             <a:r>
               <a:rPr sz="2400"/>
-              <a:t>J の誤差や形を雑に扱うと、上限は厳しく出すぎ、本物の信号を除外しやすい</a:t>
+              <a:t>矮小銀河：天の川のまわりの小さな銀河</a:t>
+            </a:r>
+          </a:p>
+          <a:p>
+            <a:pPr lvl="1"/>
+            <a:r>
+              <a:rPr sz="2000"/>
+              <a:t>暗黒物質が多く、ガスや星形成が少ない（雑音が少ない）</a:t>
             </a:r>
           </a:p>
           <a:p>
             <a:r>
               <a:rPr sz="2400"/>
-              <a:t>「銀河中心と矮小銀河が矛盾する」とは、まだ言えない</a:t>
+              <a:t>暗黒物質なら、矮小銀河からも同じ 20 GeV の光が来るはず</a:t>
             </a:r>
           </a:p>
           <a:p>
             <a:r>
               <a:rPr sz="2400"/>
-              <a:t>Δlog₁₀J ≈ 0.5 程度の誤差を見込むべき</a:t>
+              <a:t>同じ手法を、各天体のまわり半径 10° に使った</a:t>
+            </a:r>
+          </a:p>
+          <a:p>
+            <a:pPr lvl="1"/>
+            <a:r>
+              <a:rPr sz="2000"/>
+              <a:t>矮小銀河 54 ＋ M31・M33 ＋ 何も無い空 23 か所</a:t>
+            </a:r>
+          </a:p>
+          <a:p>
+            <a:r>
+              <a:rPr sz="2400"/>
+              <a:t>矮小銀河は小さい（0.2〜0.4°）ので、広がった ICS とは縮退しない</a:t>
             </a:r>
           </a:p>
         </p:txBody>
@@ -10265,7 +11338,7 @@
             </a:r>
             <a:r>
               <a:rPr lang="en-US" sz="1400"/>
-              <a:t> Bertólez-Martínez, Hooper &amp; Khatee Zathul (2026), arXiv:2609.20944 §VI</a:t>
+              <a:t> A. B. Pace (2025), Open J. Astrophys. 8, 142</a:t>
             </a:r>
             <a:endParaRPr lang="en-US"/>
           </a:p>
@@ -10313,7 +11386,7 @@
           <a:p>
             <a:r>
               <a:rPr sz="3400"/>
-              <a:t>論文の考え方を、僕の結果に当てはめる</a:t>
+              <a:t>予測の立て方：J ファクター</a:t>
             </a:r>
           </a:p>
         </p:txBody>
@@ -10340,39 +11413,38 @@
           <a:p>
             <a:r>
               <a:rPr sz="2400"/>
-              <a:t>これまで：J の誤差 = 0（J は推定値そのまま）</a:t>
+              <a:t>対消滅の明るさ：F = ⟨σv⟩ / (8π m²) × dN/dE × J</a:t>
             </a:r>
           </a:p>
           <a:p>
             <a:r>
               <a:rPr sz="2400"/>
-              <a:t>今回：各天体の本当の J = 推定値 × 10^δ_i</a:t>
+              <a:t>J ファクター = 暗黒物質の密度の 2 乗を、視線方向に足し合わせた量</a:t>
+            </a:r>
+          </a:p>
+          <a:p>
+            <a:r>
+              <a:rPr sz="2400"/>
+              <a:t>天の川と矮小銀河で粒子は同じ → 比をとると J の比だけが残る</a:t>
             </a:r>
           </a:p>
           <a:p>
             <a:pPr lvl="1"/>
             <a:r>
               <a:rPr sz="2000"/>
-              <a:t>δ_i は平均 0、幅 0.5 の正規分布（天体ごとに独立）</a:t>
-            </a:r>
-          </a:p>
-          <a:p>
-            <a:pPr lvl="1"/>
-            <a:r>
-              <a:rPr sz="2000"/>
-              <a:t>→ J がおよそ 1/3 倍〜3 倍の範囲でずれる</a:t>
+              <a:t>F_矮小 = F_天の川 × J_矮小 / J_天の川</a:t>
             </a:r>
           </a:p>
           <a:p>
             <a:r>
               <a:rPr sz="2400"/>
-              <a:t>予測 σ は J に比例 → pred_i × 10^δ_i</a:t>
+              <a:t>粒子の質量などを仮定せずに「何σ見えるはずか」が出る</a:t>
             </a:r>
           </a:p>
           <a:p>
             <a:r>
               <a:rPr sz="2400"/>
-              <a:t>論文と同じく「J をずらした世界」をたくさん作る（20 万回）</a:t>
+              <a:t>矮小銀河の J は、星の動きから推定する</a:t>
             </a:r>
           </a:p>
         </p:txBody>
@@ -10411,7 +11483,7 @@
             </a:r>
             <a:r>
               <a:rPr lang="en-US" sz="1400"/>
-              <a:t> Bertólez-Martínez, Hooper &amp; Khatee Zathul (2026), arXiv:2609.20944 §IV</a:t>
+              <a:t> A. B. Pace &amp; L. E. Strigari (2019), MNRAS 482, 3480</a:t>
             </a:r>
             <a:endParaRPr lang="en-US"/>
           </a:p>
@@ -10459,73 +11531,60 @@
           <a:p>
             <a:r>
               <a:rPr sz="3400"/>
-              <a:t>有意度の計算式のどこに誤差が入るか</a:t>
-            </a:r>
-          </a:p>
-        </p:txBody>
-      </p:sp>
-      <p:sp>
-        <p:nvSpPr>
-          <p:cNvPr id="3" name="Content Placeholder 2"/>
-          <p:cNvSpPr>
-            <a:spLocks noGrp="1"/>
-          </p:cNvSpPr>
-          <p:nvPr>
-            <p:ph idx="1"/>
-          </p:nvPr>
-        </p:nvSpPr>
+              <a:t>結果：どこにも信号は見えなかった</a:t>
+            </a:r>
+          </a:p>
+        </p:txBody>
+      </p:sp>
+      <p:pic>
+        <p:nvPicPr>
+          <p:cNvPr id="3" name="Picture 2" descr="fig_dwarf_results.png"/>
+          <p:cNvPicPr>
+            <a:picLocks noChangeAspect="1"/>
+          </p:cNvPicPr>
+          <p:nvPr/>
+        </p:nvPicPr>
+        <p:blipFill>
+          <a:blip r:embed="rId3"/>
+          <a:stretch>
+            <a:fillRect/>
+          </a:stretch>
+        </p:blipFill>
         <p:spPr>
           <a:xfrm>
-            <a:off x="841248" y="1463040"/>
-            <a:ext cx="10515600" cy="4937760"/>
+            <a:off x="2194560" y="1234440"/>
+            <a:ext cx="7156174" cy="4114800"/>
           </a:xfrm>
+          <a:prstGeom prst="rect">
+            <a:avLst/>
+          </a:prstGeom>
         </p:spPr>
-        <p:txBody>
-          <a:bodyPr/>
-          <a:lstStyle/>
-          <a:p>
-            <a:r>
-              <a:rPr sz="2400"/>
-              <a:t>暗黒物質ありで期待される T</a:t>
-            </a:r>
-          </a:p>
-          <a:p>
-            <a:pPr lvl="1"/>
+      </p:pic>
+      <p:sp>
+        <p:nvSpPr>
+          <p:cNvPr id="4" name="TextBox 3"/>
+          <p:cNvSpPr txBox="1"/>
+          <p:nvPr/>
+        </p:nvSpPr>
+        <p:spPr>
+          <a:xfrm>
+            <a:off x="457200" y="5486400"/>
+            <a:ext cx="11247120" cy="457200"/>
+          </a:xfrm>
+          <a:prstGeom prst="rect">
+            <a:avLst/>
+          </a:prstGeom>
+          <a:noFill/>
+        </p:spPr>
+        <p:txBody>
+          <a:bodyPr wrap="square">
+            <a:spAutoFit/>
+          </a:bodyPr>
+          <a:lstStyle/>
+          <a:p>
             <a:r>
               <a:rPr sz="2000"/>
-              <a:t>誤差なし：E[T] = Σ w_i pred_i / √Σ w_i² = 1.77</a:t>
-            </a:r>
-          </a:p>
-          <a:p>
-            <a:pPr lvl="1"/>
-            <a:r>
-              <a:rPr sz="2000"/>
-              <a:t>誤差あり：E[T] = Σ w_i pred_i 10^δ_i / √Σ w_i²  ← δ でばらつく</a:t>
-            </a:r>
-          </a:p>
-          <a:p>
-            <a:r>
-              <a:rPr sz="2400"/>
-              <a:t>実測 T にも測定の揺れ s がある（s = 1、または空で測った 1.26）</a:t>
-            </a:r>
-          </a:p>
-          <a:p>
-            <a:r>
-              <a:rPr sz="2400"/>
-              <a:t>暗黒物質ありで、実測 0.39 以下になる確率</a:t>
-            </a:r>
-          </a:p>
-          <a:p>
-            <a:pPr lvl="1"/>
-            <a:r>
-              <a:rPr sz="2000"/>
-              <a:t>p = （δ について平均）Φ( (0.39 − E[T]) / s )</a:t>
-            </a:r>
-          </a:p>
-          <a:p>
-            <a:r>
-              <a:rPr sz="2400"/>
-              <a:t>p を σ に直したもの =「ずれ」</a:t>
+              <a:t>どの天体・どのエネルギーでも最大 +3.46σ（何も無い空でも 4.50σ）</a:t>
             </a:r>
           </a:p>
         </p:txBody>
@@ -10572,6 +11631,1573 @@
           <a:p>
             <a:r>
               <a:rPr sz="3400"/>
+              <a:t>天体をまとめて比べる</a:t>
+            </a:r>
+          </a:p>
+        </p:txBody>
+      </p:sp>
+      <p:sp>
+        <p:nvSpPr>
+          <p:cNvPr id="3" name="Content Placeholder 2"/>
+          <p:cNvSpPr>
+            <a:spLocks noGrp="1"/>
+          </p:cNvSpPr>
+          <p:nvPr>
+            <p:ph idx="1"/>
+          </p:nvPr>
+        </p:nvSpPr>
+        <p:spPr>
+          <a:xfrm>
+            <a:off x="841248" y="1463040"/>
+            <a:ext cx="10515600" cy="4937760"/>
+          </a:xfrm>
+        </p:spPr>
+        <p:txBody>
+          <a:bodyPr/>
+          <a:lstStyle/>
+          <a:p>
+            <a:r>
+              <a:rPr sz="2400"/>
+              <a:t>1 個ずつでは弱いので、J が求まる 43 天体をまとめる</a:t>
+            </a:r>
+          </a:p>
+          <a:p>
+            <a:r>
+              <a:rPr sz="2400"/>
+              <a:t>T = Σ w_i z_i / √( Σ w_i² )、重み w_i = 天体 i の予測 σ</a:t>
+            </a:r>
+          </a:p>
+          <a:p>
+            <a:pPr lvl="1"/>
+            <a:r>
+              <a:rPr sz="2000"/>
+              <a:t>z_i：天体 i の実測の σ（20 GeV）</a:t>
+            </a:r>
+          </a:p>
+          <a:p>
+            <a:r>
+              <a:rPr sz="2400"/>
+              <a:t>暗黒物質が無ければ：T は平均 0、ばらつき 1</a:t>
+            </a:r>
+          </a:p>
+          <a:p>
+            <a:r>
+              <a:rPr sz="2400"/>
+              <a:t>暗黒物質があれば：T の平均 = √( Σ pred_i² ) = 1.77</a:t>
+            </a:r>
+          </a:p>
+          <a:p>
+            <a:r>
+              <a:rPr sz="2400"/>
+              <a:t>実測 T = 0.39 → ずれ 1.4σ</a:t>
+            </a:r>
+          </a:p>
+          <a:p>
+            <a:r>
+              <a:rPr sz="2400"/>
+              <a:t>ただし、ここでは J に誤差は無いとしていた</a:t>
+            </a:r>
+          </a:p>
+        </p:txBody>
+      </p:sp>
+    </p:spTree>
+  </p:cSld>
+  <p:clrMapOvr>
+    <a:masterClrMapping/>
+  </p:clrMapOvr>
+</p:sld>
+</file>
+
+<file path=ppt/slides/slide35.xml><?xml version="1.0" encoding="utf-8"?>
+<p:sld xmlns:a="http://schemas.openxmlformats.org/drawingml/2006/main" xmlns:r="http://schemas.openxmlformats.org/officeDocument/2006/relationships" xmlns:p="http://schemas.openxmlformats.org/presentationml/2006/main">
+  <p:cSld>
+    <p:spTree>
+      <p:nvGrpSpPr>
+        <p:cNvPr id="1" name=""/>
+        <p:cNvGrpSpPr/>
+        <p:nvPr/>
+      </p:nvGrpSpPr>
+      <p:grpSpPr>
+        <a:xfrm>
+          <a:off x="0" y="0"/>
+          <a:ext cx="0" cy="0"/>
+          <a:chOff x="0" y="0"/>
+          <a:chExt cx="0" cy="0"/>
+        </a:xfrm>
+      </p:grpSpPr>
+      <p:sp>
+        <p:nvSpPr>
+          <p:cNvPr id="2" name="Title 1"/>
+          <p:cNvSpPr>
+            <a:spLocks noGrp="1"/>
+          </p:cNvSpPr>
+          <p:nvPr>
+            <p:ph type="title"/>
+          </p:nvPr>
+        </p:nvSpPr>
+        <p:spPr/>
+        <p:txBody>
+          <a:bodyPr/>
+          <a:lstStyle/>
+          <a:p>
+            <a:r>
+              <a:rPr sz="3400"/>
+              <a:t>ここで論文：J の誤差は小さく見積もられている</a:t>
+            </a:r>
+          </a:p>
+        </p:txBody>
+      </p:sp>
+      <p:sp>
+        <p:nvSpPr>
+          <p:cNvPr id="3" name="Content Placeholder 2"/>
+          <p:cNvSpPr>
+            <a:spLocks noGrp="1"/>
+          </p:cNvSpPr>
+          <p:nvPr>
+            <p:ph idx="1"/>
+          </p:nvPr>
+        </p:nvSpPr>
+        <p:spPr>
+          <a:xfrm>
+            <a:off x="841248" y="1463040"/>
+            <a:ext cx="10515600" cy="4114800"/>
+          </a:xfrm>
+        </p:spPr>
+        <p:txBody>
+          <a:bodyPr/>
+          <a:lstStyle/>
+          <a:p>
+            <a:r>
+              <a:rPr sz="2400"/>
+              <a:t>文献ごとの J の値は、書かれた誤差よりも大きくばらつく</a:t>
+            </a:r>
+          </a:p>
+          <a:p>
+            <a:r>
+              <a:rPr sz="2400"/>
+              <a:t>見落とされがちな誤差の原因（8 つ）</a:t>
+            </a:r>
+          </a:p>
+          <a:p>
+            <a:pPr lvl="1"/>
+            <a:r>
+              <a:rPr sz="2000"/>
+              <a:t>点として扱う・ハローの形・星の分布の形の仮定</a:t>
+            </a:r>
+          </a:p>
+          <a:p>
+            <a:pPr lvl="1"/>
+            <a:r>
+              <a:rPr sz="2000"/>
+              <a:t>非球対称（最大 0.4 dex）・非平衡（〜0.1）・連星（Ret II で〜0.3）</a:t>
+            </a:r>
+          </a:p>
+          <a:p>
+            <a:pPr lvl="1"/>
+            <a:r>
+              <a:rPr sz="2000"/>
+              <a:t>前景の星の混入・誤差の分布が正規分布でない</a:t>
+            </a:r>
+          </a:p>
+          <a:p>
+            <a:r>
+              <a:rPr sz="2400"/>
+              <a:t>Δlog₁₀J ≈ 0.5（約 3 倍）以上の誤差を見込むべき</a:t>
+            </a:r>
+          </a:p>
+        </p:txBody>
+      </p:sp>
+      <p:sp>
+        <p:nvSpPr>
+          <p:cNvPr id="8" name="TextBox 7">
+            <a:extLst>
+              <a:ext uri="{FF2B5EF4-FFF2-40B4-BE49-F238E27FC236}">
+                <a16:creationId xmlns:a16="http://schemas.microsoft.com/office/drawing/2014/main" id="{F85CD606-E3CE-F314-B3EE-F3D7028115CB}"/>
+              </a:ext>
+            </a:extLst>
+          </p:cNvPr>
+          <p:cNvSpPr txBox="1"/>
+          <p:nvPr/>
+        </p:nvSpPr>
+        <p:spPr>
+          <a:xfrm>
+            <a:off x="5837182" y="5663239"/>
+            <a:ext cx="6093372" cy="923330"/>
+          </a:xfrm>
+          <a:prstGeom prst="rect">
+            <a:avLst/>
+          </a:prstGeom>
+          <a:noFill/>
+        </p:spPr>
+        <p:txBody>
+          <a:bodyPr wrap="square">
+            <a:spAutoFit/>
+          </a:bodyPr>
+          <a:lstStyle/>
+          <a:p>
+            <a:r>
+              <a:rPr lang="en-US" sz="1400" b="1"/>
+              <a:t>Reference:</a:t>
+            </a:r>
+            <a:r>
+              <a:rPr lang="en-US" sz="1400"/>
+              <a:t> Bertólez-Martínez, Hooper &amp; Khatee Zathul (2026), arXiv:2609.20944 §II</a:t>
+            </a:r>
+            <a:endParaRPr lang="en-US"/>
+          </a:p>
+        </p:txBody>
+      </p:sp>
+    </p:spTree>
+  </p:cSld>
+  <p:clrMapOvr>
+    <a:masterClrMapping/>
+  </p:clrMapOvr>
+</p:sld>
+</file>
+
+<file path=ppt/slides/slide36.xml><?xml version="1.0" encoding="utf-8"?>
+<p:sld xmlns:a="http://schemas.openxmlformats.org/drawingml/2006/main" xmlns:r="http://schemas.openxmlformats.org/officeDocument/2006/relationships" xmlns:p="http://schemas.openxmlformats.org/presentationml/2006/main">
+  <p:cSld>
+    <p:spTree>
+      <p:nvGrpSpPr>
+        <p:cNvPr id="1" name=""/>
+        <p:cNvGrpSpPr/>
+        <p:nvPr/>
+      </p:nvGrpSpPr>
+      <p:grpSpPr>
+        <a:xfrm>
+          <a:off x="0" y="0"/>
+          <a:ext cx="0" cy="0"/>
+          <a:chOff x="0" y="0"/>
+          <a:chExt cx="0" cy="0"/>
+        </a:xfrm>
+      </p:grpSpPr>
+      <p:sp>
+        <p:nvSpPr>
+          <p:cNvPr id="2" name="Title 1"/>
+          <p:cNvSpPr>
+            <a:spLocks noGrp="1"/>
+          </p:cNvSpPr>
+          <p:nvPr>
+            <p:ph type="title"/>
+          </p:nvPr>
+        </p:nvSpPr>
+        <p:spPr/>
+        <p:txBody>
+          <a:bodyPr/>
+          <a:lstStyle/>
+          <a:p>
+            <a:r>
+              <a:rPr sz="3400"/>
+              <a:t>詳細なmethodについて①：仮想データの作り方</a:t>
+            </a:r>
+          </a:p>
+        </p:txBody>
+      </p:sp>
+      <p:sp>
+        <p:nvSpPr>
+          <p:cNvPr id="3" name="Content Placeholder 2"/>
+          <p:cNvSpPr>
+            <a:spLocks noGrp="1"/>
+          </p:cNvSpPr>
+          <p:nvPr>
+            <p:ph idx="1"/>
+          </p:nvPr>
+        </p:nvSpPr>
+        <p:spPr>
+          <a:xfrm>
+            <a:off x="841248" y="1463040"/>
+            <a:ext cx="10515600" cy="4114800"/>
+          </a:xfrm>
+        </p:spPr>
+        <p:txBody>
+          <a:bodyPr/>
+          <a:lstStyle/>
+          <a:p>
+            <a:r>
+              <a:rPr sz="2200"/>
+              <a:t>Fermi-LAT の観測を計算機の中で作る（FermiTools、fermipy）</a:t>
+            </a:r>
+          </a:p>
+          <a:p>
+            <a:pPr lvl="1"/>
+            <a:r>
+              <a:rPr sz="1800"/>
+              <a:t>17.4 年分、0.5 GeV〜1 TeV、10° × 10° の領域、0.08° の画素</a:t>
+            </a:r>
+          </a:p>
+          <a:p>
+            <a:r>
+              <a:rPr sz="2200"/>
+              <a:t>背景：銀河の拡散光＋等方の光から、ポアソン乱数で光子を作る</a:t>
+            </a:r>
+          </a:p>
+          <a:p>
+            <a:r>
+              <a:rPr sz="2200"/>
+              <a:t>暗黒物質の信号を入れる</a:t>
+            </a:r>
+          </a:p>
+          <a:p>
+            <a:pPr lvl="1"/>
+            <a:r>
+              <a:rPr sz="1800"/>
+              <a:t>質量 42 GeV、b クォーク対、⟨σv⟩ = 1.4 × 10⁻²⁶ cm³/s</a:t>
+            </a:r>
+          </a:p>
+          <a:p>
+            <a:pPr lvl="1"/>
+            <a:r>
+              <a:rPr sz="1800"/>
+              <a:t>銀河中心 GeV 超過（GCE）に合う値</a:t>
+            </a:r>
+          </a:p>
+          <a:p>
+            <a:r>
+              <a:rPr sz="2200"/>
+              <a:t>対象：Ursa Minor 1 個と、27 個の矮小銀河</a:t>
+            </a:r>
+          </a:p>
+        </p:txBody>
+      </p:sp>
+      <p:sp>
+        <p:nvSpPr>
+          <p:cNvPr id="8" name="TextBox 7">
+            <a:extLst>
+              <a:ext uri="{FF2B5EF4-FFF2-40B4-BE49-F238E27FC236}">
+                <a16:creationId xmlns:a16="http://schemas.microsoft.com/office/drawing/2014/main" id="{F85CD606-E3CE-F314-B3EE-F3D7028115CB}"/>
+              </a:ext>
+            </a:extLst>
+          </p:cNvPr>
+          <p:cNvSpPr txBox="1"/>
+          <p:nvPr/>
+        </p:nvSpPr>
+        <p:spPr>
+          <a:xfrm>
+            <a:off x="5837182" y="5663239"/>
+            <a:ext cx="6093372" cy="923330"/>
+          </a:xfrm>
+          <a:prstGeom prst="rect">
+            <a:avLst/>
+          </a:prstGeom>
+          <a:noFill/>
+        </p:spPr>
+        <p:txBody>
+          <a:bodyPr wrap="square">
+            <a:spAutoFit/>
+          </a:bodyPr>
+          <a:lstStyle/>
+          <a:p>
+            <a:r>
+              <a:rPr lang="en-US" sz="1400" b="1"/>
+              <a:t>Reference:</a:t>
+            </a:r>
+            <a:r>
+              <a:rPr lang="en-US" sz="1400"/>
+              <a:t> Bertólez-Martínez, Hooper &amp; Khatee Zathul (2026), arXiv:2609.20944 §III</a:t>
+            </a:r>
+            <a:endParaRPr lang="en-US"/>
+          </a:p>
+        </p:txBody>
+      </p:sp>
+    </p:spTree>
+  </p:cSld>
+  <p:clrMapOvr>
+    <a:masterClrMapping/>
+  </p:clrMapOvr>
+</p:sld>
+</file>
+
+<file path=ppt/slides/slide37.xml><?xml version="1.0" encoding="utf-8"?>
+<p:sld xmlns:a="http://schemas.openxmlformats.org/drawingml/2006/main" xmlns:r="http://schemas.openxmlformats.org/officeDocument/2006/relationships" xmlns:p="http://schemas.openxmlformats.org/presentationml/2006/main">
+  <p:cSld>
+    <p:spTree>
+      <p:nvGrpSpPr>
+        <p:cNvPr id="1" name=""/>
+        <p:cNvGrpSpPr/>
+        <p:nvPr/>
+      </p:nvGrpSpPr>
+      <p:grpSpPr>
+        <a:xfrm>
+          <a:off x="0" y="0"/>
+          <a:ext cx="0" cy="0"/>
+          <a:chOff x="0" y="0"/>
+          <a:chExt cx="0" cy="0"/>
+        </a:xfrm>
+      </p:grpSpPr>
+      <p:sp>
+        <p:nvSpPr>
+          <p:cNvPr id="2" name="Title 1"/>
+          <p:cNvSpPr>
+            <a:spLocks noGrp="1"/>
+          </p:cNvSpPr>
+          <p:nvPr>
+            <p:ph type="title"/>
+          </p:nvPr>
+        </p:nvSpPr>
+        <p:spPr/>
+        <p:txBody>
+          <a:bodyPr/>
+          <a:lstStyle/>
+          <a:p>
+            <a:r>
+              <a:rPr sz="3400"/>
+              <a:t>詳細なmethodについて②：尤度と 2 つの誤差</a:t>
+            </a:r>
+          </a:p>
+        </p:txBody>
+      </p:sp>
+      <p:sp>
+        <p:nvSpPr>
+          <p:cNvPr id="3" name="Content Placeholder 2"/>
+          <p:cNvSpPr>
+            <a:spLocks noGrp="1"/>
+          </p:cNvSpPr>
+          <p:nvPr>
+            <p:ph idx="1"/>
+          </p:nvPr>
+        </p:nvSpPr>
+        <p:spPr>
+          <a:xfrm>
+            <a:off x="841248" y="1463040"/>
+            <a:ext cx="10515600" cy="4114800"/>
+          </a:xfrm>
+        </p:spPr>
+        <p:txBody>
+          <a:bodyPr/>
+          <a:lstStyle/>
+          <a:p>
+            <a:r>
+              <a:rPr sz="2200"/>
+              <a:t>各天体の尤度 = 光子のポアソン尤度 × J の尤度</a:t>
+            </a:r>
+          </a:p>
+          <a:p>
+            <a:pPr lvl="1"/>
+            <a:r>
+              <a:rPr sz="1800"/>
+              <a:t>L_J ∝ exp[ −(log₁₀J − log₁₀J_obs)² / 2σ_L² ]</a:t>
+            </a:r>
+          </a:p>
+          <a:p>
+            <a:r>
+              <a:rPr sz="2200"/>
+              <a:t>27 個は尤度の積でまとめる（⟨σv⟩ は共通、J は天体ごと）</a:t>
+            </a:r>
+          </a:p>
+          <a:p>
+            <a:r>
+              <a:rPr sz="2200"/>
+              <a:t>2 つの誤差を分けて動かす</a:t>
+            </a:r>
+          </a:p>
+          <a:p>
+            <a:pPr lvl="1"/>
+            <a:r>
+              <a:rPr sz="1800"/>
+              <a:t>σ：J の本当のばらつき（J_obs を J_true のまわりに σ でばらつかせる）</a:t>
+            </a:r>
+          </a:p>
+          <a:p>
+            <a:pPr lvl="1"/>
+            <a:r>
+              <a:rPr sz="1800"/>
+              <a:t>σ_L：解析で仮定する幅</a:t>
+            </a:r>
+          </a:p>
+          <a:p>
+            <a:r>
+              <a:rPr sz="2200"/>
+              <a:t>95% 上限：TS が最大値から 2.71 下がる点（Wilks の定理を仮定）</a:t>
+            </a:r>
+          </a:p>
+        </p:txBody>
+      </p:sp>
+      <p:sp>
+        <p:nvSpPr>
+          <p:cNvPr id="8" name="TextBox 7">
+            <a:extLst>
+              <a:ext uri="{FF2B5EF4-FFF2-40B4-BE49-F238E27FC236}">
+                <a16:creationId xmlns:a16="http://schemas.microsoft.com/office/drawing/2014/main" id="{F85CD606-E3CE-F314-B3EE-F3D7028115CB}"/>
+              </a:ext>
+            </a:extLst>
+          </p:cNvPr>
+          <p:cNvSpPr txBox="1"/>
+          <p:nvPr/>
+        </p:nvSpPr>
+        <p:spPr>
+          <a:xfrm>
+            <a:off x="5837182" y="5663239"/>
+            <a:ext cx="6093372" cy="923330"/>
+          </a:xfrm>
+          <a:prstGeom prst="rect">
+            <a:avLst/>
+          </a:prstGeom>
+          <a:noFill/>
+        </p:spPr>
+        <p:txBody>
+          <a:bodyPr wrap="square">
+            <a:spAutoFit/>
+          </a:bodyPr>
+          <a:lstStyle/>
+          <a:p>
+            <a:r>
+              <a:rPr lang="en-US" sz="1400" b="1"/>
+              <a:t>Reference:</a:t>
+            </a:r>
+            <a:r>
+              <a:rPr lang="en-US" sz="1400"/>
+              <a:t> Bertólez-Martínez, Hooper &amp; Khatee Zathul (2026), arXiv:2609.20944 式 (6)–(10)</a:t>
+            </a:r>
+            <a:endParaRPr lang="en-US"/>
+          </a:p>
+        </p:txBody>
+      </p:sp>
+    </p:spTree>
+  </p:cSld>
+  <p:clrMapOvr>
+    <a:masterClrMapping/>
+  </p:clrMapOvr>
+</p:sld>
+</file>
+
+<file path=ppt/slides/slide38.xml><?xml version="1.0" encoding="utf-8"?>
+<p:sld xmlns:a="http://schemas.openxmlformats.org/drawingml/2006/main" xmlns:r="http://schemas.openxmlformats.org/officeDocument/2006/relationships" xmlns:p="http://schemas.openxmlformats.org/presentationml/2006/main">
+  <p:cSld>
+    <p:spTree>
+      <p:nvGrpSpPr>
+        <p:cNvPr id="1" name=""/>
+        <p:cNvGrpSpPr/>
+        <p:nvPr/>
+      </p:nvGrpSpPr>
+      <p:grpSpPr>
+        <a:xfrm>
+          <a:off x="0" y="0"/>
+          <a:ext cx="0" cy="0"/>
+          <a:chOff x="0" y="0"/>
+          <a:chExt cx="0" cy="0"/>
+        </a:xfrm>
+      </p:grpSpPr>
+      <p:sp>
+        <p:nvSpPr>
+          <p:cNvPr id="2" name="Title 1"/>
+          <p:cNvSpPr>
+            <a:spLocks noGrp="1"/>
+          </p:cNvSpPr>
+          <p:nvPr>
+            <p:ph type="title"/>
+          </p:nvPr>
+        </p:nvSpPr>
+        <p:spPr/>
+        <p:txBody>
+          <a:bodyPr/>
+          <a:lstStyle/>
+          <a:p>
+            <a:r>
+              <a:rPr sz="3400"/>
+              <a:t>詳細なmethodについて③：何を数えたか</a:t>
+            </a:r>
+          </a:p>
+        </p:txBody>
+      </p:sp>
+      <p:sp>
+        <p:nvSpPr>
+          <p:cNvPr id="3" name="Content Placeholder 2"/>
+          <p:cNvSpPr>
+            <a:spLocks noGrp="1"/>
+          </p:cNvSpPr>
+          <p:nvPr>
+            <p:ph idx="1"/>
+          </p:nvPr>
+        </p:nvSpPr>
+        <p:spPr>
+          <a:xfrm>
+            <a:off x="841248" y="1463040"/>
+            <a:ext cx="10515600" cy="4114800"/>
+          </a:xfrm>
+        </p:spPr>
+        <p:txBody>
+          <a:bodyPr/>
+          <a:lstStyle/>
+          <a:p>
+            <a:r>
+              <a:rPr sz="2400"/>
+              <a:t>本物の信号を入れた仮想データを何度も作る</a:t>
+            </a:r>
+          </a:p>
+          <a:p>
+            <a:pPr lvl="1"/>
+            <a:r>
+              <a:rPr sz="2000"/>
+              <a:t>Ursa Minor で 1000 回（基準の設定では 1 万回）</a:t>
+            </a:r>
+          </a:p>
+          <a:p>
+            <a:r>
+              <a:rPr sz="2400"/>
+              <a:t>それぞれで 95% 上限を出す</a:t>
+            </a:r>
+          </a:p>
+          <a:p>
+            <a:r>
+              <a:rPr sz="2400"/>
+              <a:t>上限が本物の ⟨σv⟩ より下 =「本物を無いと間違えた」</a:t>
+            </a:r>
+          </a:p>
+          <a:p>
+            <a:r>
+              <a:rPr sz="2400"/>
+              <a:t>95% 上限なら、間違いは 5% 以下のはず</a:t>
+            </a:r>
+          </a:p>
+          <a:p>
+            <a:pPr lvl="1"/>
+            <a:r>
+              <a:rPr sz="2000"/>
+              <a:t>これが守られているか（カバレッジ）を調べる</a:t>
+            </a:r>
+          </a:p>
+        </p:txBody>
+      </p:sp>
+      <p:sp>
+        <p:nvSpPr>
+          <p:cNvPr id="8" name="TextBox 7">
+            <a:extLst>
+              <a:ext uri="{FF2B5EF4-FFF2-40B4-BE49-F238E27FC236}">
+                <a16:creationId xmlns:a16="http://schemas.microsoft.com/office/drawing/2014/main" id="{F85CD606-E3CE-F314-B3EE-F3D7028115CB}"/>
+              </a:ext>
+            </a:extLst>
+          </p:cNvPr>
+          <p:cNvSpPr txBox="1"/>
+          <p:nvPr/>
+        </p:nvSpPr>
+        <p:spPr>
+          <a:xfrm>
+            <a:off x="5837182" y="5663239"/>
+            <a:ext cx="6093372" cy="923330"/>
+          </a:xfrm>
+          <a:prstGeom prst="rect">
+            <a:avLst/>
+          </a:prstGeom>
+          <a:noFill/>
+        </p:spPr>
+        <p:txBody>
+          <a:bodyPr wrap="square">
+            <a:spAutoFit/>
+          </a:bodyPr>
+          <a:lstStyle/>
+          <a:p>
+            <a:r>
+              <a:rPr lang="en-US" sz="1400" b="1"/>
+              <a:t>Reference:</a:t>
+            </a:r>
+            <a:r>
+              <a:rPr lang="en-US" sz="1400"/>
+              <a:t> Bertólez-Martínez, Hooper &amp; Khatee Zathul (2026), arXiv:2609.20944 §IV</a:t>
+            </a:r>
+            <a:endParaRPr lang="en-US"/>
+          </a:p>
+        </p:txBody>
+      </p:sp>
+    </p:spTree>
+  </p:cSld>
+  <p:clrMapOvr>
+    <a:masterClrMapping/>
+  </p:clrMapOvr>
+</p:sld>
+</file>
+
+<file path=ppt/slides/slide39.xml><?xml version="1.0" encoding="utf-8"?>
+<p:sld xmlns:a="http://schemas.openxmlformats.org/drawingml/2006/main" xmlns:r="http://schemas.openxmlformats.org/officeDocument/2006/relationships" xmlns:p="http://schemas.openxmlformats.org/presentationml/2006/main">
+  <p:cSld>
+    <p:spTree>
+      <p:nvGrpSpPr>
+        <p:cNvPr id="1" name=""/>
+        <p:cNvGrpSpPr/>
+        <p:nvPr/>
+      </p:nvGrpSpPr>
+      <p:grpSpPr>
+        <a:xfrm>
+          <a:off x="0" y="0"/>
+          <a:ext cx="0" cy="0"/>
+          <a:chOff x="0" y="0"/>
+          <a:chExt cx="0" cy="0"/>
+        </a:xfrm>
+      </p:grpSpPr>
+      <p:sp>
+        <p:nvSpPr>
+          <p:cNvPr id="2" name="Title 1"/>
+          <p:cNvSpPr>
+            <a:spLocks noGrp="1"/>
+          </p:cNvSpPr>
+          <p:nvPr>
+            <p:ph type="title"/>
+          </p:nvPr>
+        </p:nvSpPr>
+        <p:spPr/>
+        <p:txBody>
+          <a:bodyPr/>
+          <a:lstStyle/>
+          <a:p>
+            <a:r>
+              <a:rPr sz="3400"/>
+              <a:t>論文の結果①：Ursa Minor 1 個</a:t>
+            </a:r>
+          </a:p>
+        </p:txBody>
+      </p:sp>
+      <p:sp>
+        <p:nvSpPr>
+          <p:cNvPr id="3" name="Content Placeholder 2"/>
+          <p:cNvSpPr>
+            <a:spLocks noGrp="1"/>
+          </p:cNvSpPr>
+          <p:nvPr>
+            <p:ph idx="1"/>
+          </p:nvPr>
+        </p:nvSpPr>
+        <p:spPr>
+          <a:xfrm>
+            <a:off x="841248" y="1463040"/>
+            <a:ext cx="10515600" cy="4114800"/>
+          </a:xfrm>
+        </p:spPr>
+        <p:txBody>
+          <a:bodyPr/>
+          <a:lstStyle/>
+          <a:p>
+            <a:r>
+              <a:rPr sz="2400"/>
+              <a:t>σ_L を 0.3 / 0.5 / 1.0 だけ大きくすると</a:t>
+            </a:r>
+          </a:p>
+          <a:p>
+            <a:pPr lvl="1"/>
+            <a:r>
+              <a:rPr sz="2000"/>
+              <a:t>上限が 1.5 / 2.5 / 11 倍ゆるくなる</a:t>
+            </a:r>
+          </a:p>
+          <a:p>
+            <a:r>
+              <a:rPr sz="2400"/>
+              <a:t>本当の誤差 σ だけ大きく、σ_L は小さいままだと</a:t>
+            </a:r>
+          </a:p>
+          <a:p>
+            <a:pPr lvl="1"/>
+            <a:r>
+              <a:rPr sz="2000"/>
+              <a:t>本物を除外する割合 1.7% / 8.0% / 22%</a:t>
+            </a:r>
+          </a:p>
+          <a:p>
+            <a:pPr lvl="1"/>
+            <a:r>
+              <a:rPr sz="2000"/>
+              <a:t>σ_L を σ に合わせれば 5% 以下に戻る</a:t>
+            </a:r>
+          </a:p>
+          <a:p>
+            <a:r>
+              <a:rPr sz="2400"/>
+              <a:t>形の間違い：球対称 NFW で解析 → 上限 2.4 倍厳しく</a:t>
+            </a:r>
+          </a:p>
+          <a:p>
+            <a:pPr lvl="1"/>
+            <a:r>
+              <a:rPr sz="2000"/>
+              <a:t>点として扱う → 1.4 倍厳しく</a:t>
+            </a:r>
+          </a:p>
+        </p:txBody>
+      </p:sp>
+      <p:sp>
+        <p:nvSpPr>
+          <p:cNvPr id="8" name="TextBox 7">
+            <a:extLst>
+              <a:ext uri="{FF2B5EF4-FFF2-40B4-BE49-F238E27FC236}">
+                <a16:creationId xmlns:a16="http://schemas.microsoft.com/office/drawing/2014/main" id="{F85CD606-E3CE-F314-B3EE-F3D7028115CB}"/>
+              </a:ext>
+            </a:extLst>
+          </p:cNvPr>
+          <p:cNvSpPr txBox="1"/>
+          <p:nvPr/>
+        </p:nvSpPr>
+        <p:spPr>
+          <a:xfrm>
+            <a:off x="5837182" y="5663239"/>
+            <a:ext cx="6093372" cy="923330"/>
+          </a:xfrm>
+          <a:prstGeom prst="rect">
+            <a:avLst/>
+          </a:prstGeom>
+          <a:noFill/>
+        </p:spPr>
+        <p:txBody>
+          <a:bodyPr wrap="square">
+            <a:spAutoFit/>
+          </a:bodyPr>
+          <a:lstStyle/>
+          <a:p>
+            <a:r>
+              <a:rPr lang="en-US" sz="1400" b="1"/>
+              <a:t>Reference:</a:t>
+            </a:r>
+            <a:r>
+              <a:rPr lang="en-US" sz="1400"/>
+              <a:t> Bertólez-Martínez, Hooper &amp; Khatee Zathul (2026), arXiv:2609.20944 §IV, Fig. 2–4</a:t>
+            </a:r>
+            <a:endParaRPr lang="en-US"/>
+          </a:p>
+        </p:txBody>
+      </p:sp>
+    </p:spTree>
+  </p:cSld>
+  <p:clrMapOvr>
+    <a:masterClrMapping/>
+  </p:clrMapOvr>
+</p:sld>
+</file>
+
+<file path=ppt/slides/slide4.xml><?xml version="1.0" encoding="utf-8"?>
+<p:sld xmlns:a="http://schemas.openxmlformats.org/drawingml/2006/main" xmlns:r="http://schemas.openxmlformats.org/officeDocument/2006/relationships" xmlns:p="http://schemas.openxmlformats.org/presentationml/2006/main">
+  <p:cSld>
+    <p:spTree>
+      <p:nvGrpSpPr>
+        <p:cNvPr id="1" name=""/>
+        <p:cNvGrpSpPr/>
+        <p:nvPr/>
+      </p:nvGrpSpPr>
+      <p:grpSpPr>
+        <a:xfrm>
+          <a:off x="0" y="0"/>
+          <a:ext cx="0" cy="0"/>
+          <a:chOff x="0" y="0"/>
+          <a:chExt cx="0" cy="0"/>
+        </a:xfrm>
+      </p:grpSpPr>
+      <p:sp>
+        <p:nvSpPr>
+          <p:cNvPr id="2" name="Title 1"/>
+          <p:cNvSpPr>
+            <a:spLocks noGrp="1"/>
+          </p:cNvSpPr>
+          <p:nvPr>
+            <p:ph type="title"/>
+          </p:nvPr>
+        </p:nvSpPr>
+        <p:spPr>
+          <a:xfrm>
+            <a:off x="148389" y="0"/>
+            <a:ext cx="10515600" cy="1325563"/>
+          </a:xfrm>
+        </p:spPr>
+        <p:txBody>
+          <a:bodyPr/>
+          <a:lstStyle/>
+          <a:p>
+            <a:r>
+              <a:rPr sz="3400"/>
+              <a:t>手法①：テンプレートフィット</a:t>
+            </a:r>
+          </a:p>
+        </p:txBody>
+      </p:sp>
+      <p:sp>
+        <p:nvSpPr>
+          <p:cNvPr id="3" name="Content Placeholder 2"/>
+          <p:cNvSpPr>
+            <a:spLocks noGrp="1"/>
+          </p:cNvSpPr>
+          <p:nvPr>
+            <p:ph idx="1"/>
+          </p:nvPr>
+        </p:nvSpPr>
+        <p:spPr>
+          <a:xfrm>
+            <a:off x="440194" y="1371599"/>
+            <a:ext cx="11490359" cy="4716379"/>
+          </a:xfrm>
+        </p:spPr>
+        <p:txBody>
+          <a:bodyPr/>
+          <a:lstStyle/>
+          <a:p>
+            <a:r>
+              <a:rPr sz="2400"/>
+              <a:t>空の光を「</a:t>
+            </a:r>
+            <a:r>
+              <a:rPr lang="ja-JP" altLang="en-US" sz="2400"/>
+              <a:t>既知の要素</a:t>
+            </a:r>
+            <a:r>
+              <a:rPr sz="2400"/>
+              <a:t>の足し算」で表す</a:t>
+            </a:r>
+          </a:p>
+          <a:p>
+            <a:pPr lvl="1"/>
+            <a:r>
+              <a:rPr sz="2000"/>
+              <a:t>予測 = Σ（倍率 f_l）×（</a:t>
+            </a:r>
+            <a:r>
+              <a:rPr lang="ja-JP" altLang="en-US" sz="2000"/>
+              <a:t>要素</a:t>
+            </a:r>
+            <a:r>
+              <a:rPr sz="2000"/>
+              <a:t> l）</a:t>
+            </a:r>
+          </a:p>
+          <a:p>
+            <a:r>
+              <a:rPr lang="ja-JP" altLang="en-US" sz="2400"/>
+              <a:t>要素</a:t>
+            </a:r>
+            <a:r>
+              <a:rPr sz="2400"/>
+              <a:t>は 9 枚</a:t>
+            </a:r>
+          </a:p>
+          <a:p>
+            <a:r>
+              <a:rPr sz="2000"/>
+              <a:t>等方背景、ガス（π⁰ 崩壊＋制動放射）</a:t>
+            </a:r>
+            <a:r>
+              <a:rPr lang="en-US" sz="2000"/>
+              <a:t>(</a:t>
+            </a:r>
+            <a:r>
+              <a:rPr lang="en-US" sz="2400"/>
+              <a:t>GALPROP)</a:t>
+            </a:r>
+            <a:r>
+              <a:rPr lang="en-US" sz="2000"/>
+              <a:t>、ICS</a:t>
+            </a:r>
+            <a:r>
+              <a:rPr lang="en-US" sz="1800"/>
+              <a:t> (</a:t>
+            </a:r>
+            <a:r>
+              <a:rPr lang="en-US" sz="2000"/>
+              <a:t>GALPROP)</a:t>
+            </a:r>
+            <a:r>
+              <a:rPr lang="en-US" sz="1800"/>
+              <a:t>、 </a:t>
+            </a:r>
+            <a:r>
+              <a:rPr lang="en-US" sz="2000"/>
+              <a:t>、</a:t>
+            </a:r>
+            <a:r>
+              <a:rPr lang="ja-JP" altLang="en-US" sz="2000"/>
+              <a:t>点源</a:t>
+            </a:r>
+          </a:p>
+          <a:p>
+            <a:pPr lvl="1"/>
+            <a:r>
+              <a:rPr sz="2000"/>
+              <a:t>Loop I（2 枚）、フェルミバブル（正・負）、ハロー</a:t>
+            </a:r>
+          </a:p>
+          <a:p>
+            <a:pPr marL="0" indent="0">
+              <a:buNone/>
+            </a:pPr>
+            <a:r>
+              <a:rPr sz="2400"/>
+              <a:t>倍率 f_l をデータに合うように決める</a:t>
+            </a:r>
+          </a:p>
+        </p:txBody>
+      </p:sp>
+    </p:spTree>
+  </p:cSld>
+  <p:clrMapOvr>
+    <a:masterClrMapping/>
+  </p:clrMapOvr>
+</p:sld>
+</file>
+
+<file path=ppt/slides/slide40.xml><?xml version="1.0" encoding="utf-8"?>
+<p:sld xmlns:a="http://schemas.openxmlformats.org/drawingml/2006/main" xmlns:r="http://schemas.openxmlformats.org/officeDocument/2006/relationships" xmlns:p="http://schemas.openxmlformats.org/presentationml/2006/main">
+  <p:cSld>
+    <p:spTree>
+      <p:nvGrpSpPr>
+        <p:cNvPr id="1" name=""/>
+        <p:cNvGrpSpPr/>
+        <p:nvPr/>
+      </p:nvGrpSpPr>
+      <p:grpSpPr>
+        <a:xfrm>
+          <a:off x="0" y="0"/>
+          <a:ext cx="0" cy="0"/>
+          <a:chOff x="0" y="0"/>
+          <a:chExt cx="0" cy="0"/>
+        </a:xfrm>
+      </p:grpSpPr>
+      <p:sp>
+        <p:nvSpPr>
+          <p:cNvPr id="2" name="Title 1"/>
+          <p:cNvSpPr>
+            <a:spLocks noGrp="1"/>
+          </p:cNvSpPr>
+          <p:nvPr>
+            <p:ph type="title"/>
+          </p:nvPr>
+        </p:nvSpPr>
+        <p:spPr/>
+        <p:txBody>
+          <a:bodyPr/>
+          <a:lstStyle/>
+          <a:p>
+            <a:r>
+              <a:rPr sz="3400"/>
+              <a:t>論文の結果②：27 個をまとめると</a:t>
+            </a:r>
+          </a:p>
+        </p:txBody>
+      </p:sp>
+      <p:sp>
+        <p:nvSpPr>
+          <p:cNvPr id="3" name="Content Placeholder 2"/>
+          <p:cNvSpPr>
+            <a:spLocks noGrp="1"/>
+          </p:cNvSpPr>
+          <p:nvPr>
+            <p:ph idx="1"/>
+          </p:nvPr>
+        </p:nvSpPr>
+        <p:spPr>
+          <a:xfrm>
+            <a:off x="841248" y="1463040"/>
+            <a:ext cx="10515600" cy="4114800"/>
+          </a:xfrm>
+        </p:spPr>
+        <p:txBody>
+          <a:bodyPr/>
+          <a:lstStyle/>
+          <a:p>
+            <a:r>
+              <a:rPr sz="2200"/>
+              <a:t>σ_L を 0.3 / 0.5 / 1.0 → 上限 1.14 / 1.44 / 3.23 倍ゆるく</a:t>
+            </a:r>
+          </a:p>
+          <a:p>
+            <a:r>
+              <a:rPr sz="2200"/>
+              <a:t>誤差を正しく入れても、本物を除外する割合 21%（5% のはず）</a:t>
+            </a:r>
+          </a:p>
+          <a:p>
+            <a:pPr lvl="1"/>
+            <a:r>
+              <a:rPr sz="1800"/>
+              <a:t>J の数が天体の数と一緒に増え、Wilks の定理の前提が崩れる</a:t>
+            </a:r>
+          </a:p>
+          <a:p>
+            <a:r>
+              <a:rPr sz="2200"/>
+              <a:t>本当の誤差を 0.3 / 0.5 / 1.0 大きくすると 31% / 49% / 88%</a:t>
+            </a:r>
+          </a:p>
+          <a:p>
+            <a:pPr lvl="1"/>
+            <a:r>
+              <a:rPr sz="1800"/>
+              <a:t>σ_L を合わせても 23% / 28% / 38%</a:t>
+            </a:r>
+          </a:p>
+          <a:p>
+            <a:r>
+              <a:rPr sz="2200"/>
+              <a:t>原因：J が上に振れた天体が、上限を決めてしまう</a:t>
+            </a:r>
+          </a:p>
+          <a:p>
+            <a:r>
+              <a:rPr sz="2200"/>
+              <a:t>対策の一つ：何も無い領域で較正する</a:t>
+            </a:r>
+          </a:p>
+        </p:txBody>
+      </p:sp>
+      <p:sp>
+        <p:nvSpPr>
+          <p:cNvPr id="8" name="TextBox 7">
+            <a:extLst>
+              <a:ext uri="{FF2B5EF4-FFF2-40B4-BE49-F238E27FC236}">
+                <a16:creationId xmlns:a16="http://schemas.microsoft.com/office/drawing/2014/main" id="{F85CD606-E3CE-F314-B3EE-F3D7028115CB}"/>
+              </a:ext>
+            </a:extLst>
+          </p:cNvPr>
+          <p:cNvSpPr txBox="1"/>
+          <p:nvPr/>
+        </p:nvSpPr>
+        <p:spPr>
+          <a:xfrm>
+            <a:off x="5837182" y="5663239"/>
+            <a:ext cx="6093372" cy="923330"/>
+          </a:xfrm>
+          <a:prstGeom prst="rect">
+            <a:avLst/>
+          </a:prstGeom>
+          <a:noFill/>
+        </p:spPr>
+        <p:txBody>
+          <a:bodyPr wrap="square">
+            <a:spAutoFit/>
+          </a:bodyPr>
+          <a:lstStyle/>
+          <a:p>
+            <a:r>
+              <a:rPr lang="en-US" sz="1400" b="1"/>
+              <a:t>Reference:</a:t>
+            </a:r>
+            <a:r>
+              <a:rPr lang="en-US" sz="1400"/>
+              <a:t> Bertólez-Martínez, Hooper &amp; Khatee Zathul (2026), arXiv:2609.20944 §V, Fig. 5–7</a:t>
+            </a:r>
+            <a:endParaRPr lang="en-US"/>
+          </a:p>
+        </p:txBody>
+      </p:sp>
+    </p:spTree>
+  </p:cSld>
+  <p:clrMapOvr>
+    <a:masterClrMapping/>
+  </p:clrMapOvr>
+</p:sld>
+</file>
+
+<file path=ppt/slides/slide41.xml><?xml version="1.0" encoding="utf-8"?>
+<p:sld xmlns:a="http://schemas.openxmlformats.org/drawingml/2006/main" xmlns:r="http://schemas.openxmlformats.org/officeDocument/2006/relationships" xmlns:p="http://schemas.openxmlformats.org/presentationml/2006/main">
+  <p:cSld>
+    <p:spTree>
+      <p:nvGrpSpPr>
+        <p:cNvPr id="1" name=""/>
+        <p:cNvGrpSpPr/>
+        <p:nvPr/>
+      </p:nvGrpSpPr>
+      <p:grpSpPr>
+        <a:xfrm>
+          <a:off x="0" y="0"/>
+          <a:ext cx="0" cy="0"/>
+          <a:chOff x="0" y="0"/>
+          <a:chExt cx="0" cy="0"/>
+        </a:xfrm>
+      </p:grpSpPr>
+      <p:sp>
+        <p:nvSpPr>
+          <p:cNvPr id="2" name="Title 1"/>
+          <p:cNvSpPr>
+            <a:spLocks noGrp="1"/>
+          </p:cNvSpPr>
+          <p:nvPr>
+            <p:ph type="title"/>
+          </p:nvPr>
+        </p:nvSpPr>
+        <p:spPr/>
+        <p:txBody>
+          <a:bodyPr/>
+          <a:lstStyle/>
+          <a:p>
+            <a:r>
+              <a:rPr sz="3400"/>
+              <a:t>論文のまとめ</a:t>
+            </a:r>
+          </a:p>
+        </p:txBody>
+      </p:sp>
+      <p:sp>
+        <p:nvSpPr>
+          <p:cNvPr id="3" name="Content Placeholder 2"/>
+          <p:cNvSpPr>
+            <a:spLocks noGrp="1"/>
+          </p:cNvSpPr>
+          <p:nvPr>
+            <p:ph idx="1"/>
+          </p:nvPr>
+        </p:nvSpPr>
+        <p:spPr>
+          <a:xfrm>
+            <a:off x="841248" y="1463040"/>
+            <a:ext cx="10515600" cy="4114800"/>
+          </a:xfrm>
+        </p:spPr>
+        <p:txBody>
+          <a:bodyPr/>
+          <a:lstStyle/>
+          <a:p>
+            <a:r>
+              <a:rPr sz="2400"/>
+              <a:t>J の誤差や形を雑に扱うと、上限は厳しく出すぎ、本物の信号を除外しやすい</a:t>
+            </a:r>
+          </a:p>
+          <a:p>
+            <a:r>
+              <a:rPr sz="2400"/>
+              <a:t>「銀河中心と矮小銀河が矛盾する」とは、まだ言えない</a:t>
+            </a:r>
+          </a:p>
+          <a:p>
+            <a:r>
+              <a:rPr sz="2400"/>
+              <a:t>Δlog₁₀J ≈ 0.5 程度の誤差を見込むべき</a:t>
+            </a:r>
+          </a:p>
+        </p:txBody>
+      </p:sp>
+      <p:sp>
+        <p:nvSpPr>
+          <p:cNvPr id="8" name="TextBox 7">
+            <a:extLst>
+              <a:ext uri="{FF2B5EF4-FFF2-40B4-BE49-F238E27FC236}">
+                <a16:creationId xmlns:a16="http://schemas.microsoft.com/office/drawing/2014/main" id="{F85CD606-E3CE-F314-B3EE-F3D7028115CB}"/>
+              </a:ext>
+            </a:extLst>
+          </p:cNvPr>
+          <p:cNvSpPr txBox="1"/>
+          <p:nvPr/>
+        </p:nvSpPr>
+        <p:spPr>
+          <a:xfrm>
+            <a:off x="5837182" y="5663239"/>
+            <a:ext cx="6093372" cy="923330"/>
+          </a:xfrm>
+          <a:prstGeom prst="rect">
+            <a:avLst/>
+          </a:prstGeom>
+          <a:noFill/>
+        </p:spPr>
+        <p:txBody>
+          <a:bodyPr wrap="square">
+            <a:spAutoFit/>
+          </a:bodyPr>
+          <a:lstStyle/>
+          <a:p>
+            <a:r>
+              <a:rPr lang="en-US" sz="1400" b="1"/>
+              <a:t>Reference:</a:t>
+            </a:r>
+            <a:r>
+              <a:rPr lang="en-US" sz="1400"/>
+              <a:t> Bertólez-Martínez, Hooper &amp; Khatee Zathul (2026), arXiv:2609.20944 §VI</a:t>
+            </a:r>
+            <a:endParaRPr lang="en-US"/>
+          </a:p>
+        </p:txBody>
+      </p:sp>
+    </p:spTree>
+  </p:cSld>
+  <p:clrMapOvr>
+    <a:masterClrMapping/>
+  </p:clrMapOvr>
+</p:sld>
+</file>
+
+<file path=ppt/slides/slide42.xml><?xml version="1.0" encoding="utf-8"?>
+<p:sld xmlns:a="http://schemas.openxmlformats.org/drawingml/2006/main" xmlns:r="http://schemas.openxmlformats.org/officeDocument/2006/relationships" xmlns:p="http://schemas.openxmlformats.org/presentationml/2006/main">
+  <p:cSld>
+    <p:spTree>
+      <p:nvGrpSpPr>
+        <p:cNvPr id="1" name=""/>
+        <p:cNvGrpSpPr/>
+        <p:nvPr/>
+      </p:nvGrpSpPr>
+      <p:grpSpPr>
+        <a:xfrm>
+          <a:off x="0" y="0"/>
+          <a:ext cx="0" cy="0"/>
+          <a:chOff x="0" y="0"/>
+          <a:chExt cx="0" cy="0"/>
+        </a:xfrm>
+      </p:grpSpPr>
+      <p:sp>
+        <p:nvSpPr>
+          <p:cNvPr id="2" name="Title 1"/>
+          <p:cNvSpPr>
+            <a:spLocks noGrp="1"/>
+          </p:cNvSpPr>
+          <p:nvPr>
+            <p:ph type="title"/>
+          </p:nvPr>
+        </p:nvSpPr>
+        <p:spPr/>
+        <p:txBody>
+          <a:bodyPr/>
+          <a:lstStyle/>
+          <a:p>
+            <a:r>
+              <a:rPr sz="3400"/>
+              <a:t>論文の考え方を、僕の結果に当てはめる</a:t>
+            </a:r>
+          </a:p>
+        </p:txBody>
+      </p:sp>
+      <p:sp>
+        <p:nvSpPr>
+          <p:cNvPr id="3" name="Content Placeholder 2"/>
+          <p:cNvSpPr>
+            <a:spLocks noGrp="1"/>
+          </p:cNvSpPr>
+          <p:nvPr>
+            <p:ph idx="1"/>
+          </p:nvPr>
+        </p:nvSpPr>
+        <p:spPr>
+          <a:xfrm>
+            <a:off x="841248" y="1463040"/>
+            <a:ext cx="10515600" cy="4114800"/>
+          </a:xfrm>
+        </p:spPr>
+        <p:txBody>
+          <a:bodyPr/>
+          <a:lstStyle/>
+          <a:p>
+            <a:r>
+              <a:rPr sz="2400"/>
+              <a:t>これまで：J の誤差 = 0（J は推定値そのまま）</a:t>
+            </a:r>
+          </a:p>
+          <a:p>
+            <a:r>
+              <a:rPr sz="2400"/>
+              <a:t>今回：各天体の本当の J = 推定値 × 10^δ_i</a:t>
+            </a:r>
+          </a:p>
+          <a:p>
+            <a:pPr lvl="1"/>
+            <a:r>
+              <a:rPr sz="2000"/>
+              <a:t>δ_i は平均 0、幅 0.5 の正規分布（天体ごとに独立）</a:t>
+            </a:r>
+          </a:p>
+          <a:p>
+            <a:pPr lvl="1"/>
+            <a:r>
+              <a:rPr sz="2000"/>
+              <a:t>→ J がおよそ 1/3 倍〜3 倍の範囲でずれる</a:t>
+            </a:r>
+          </a:p>
+          <a:p>
+            <a:r>
+              <a:rPr sz="2400"/>
+              <a:t>予測 σ は J に比例 → pred_i × 10^δ_i</a:t>
+            </a:r>
+          </a:p>
+          <a:p>
+            <a:r>
+              <a:rPr sz="2400"/>
+              <a:t>論文と同じく「J をずらした世界」をたくさん作る（20 万回）</a:t>
+            </a:r>
+          </a:p>
+        </p:txBody>
+      </p:sp>
+      <p:sp>
+        <p:nvSpPr>
+          <p:cNvPr id="8" name="TextBox 7">
+            <a:extLst>
+              <a:ext uri="{FF2B5EF4-FFF2-40B4-BE49-F238E27FC236}">
+                <a16:creationId xmlns:a16="http://schemas.microsoft.com/office/drawing/2014/main" id="{F85CD606-E3CE-F314-B3EE-F3D7028115CB}"/>
+              </a:ext>
+            </a:extLst>
+          </p:cNvPr>
+          <p:cNvSpPr txBox="1"/>
+          <p:nvPr/>
+        </p:nvSpPr>
+        <p:spPr>
+          <a:xfrm>
+            <a:off x="5837182" y="5663239"/>
+            <a:ext cx="6093372" cy="923330"/>
+          </a:xfrm>
+          <a:prstGeom prst="rect">
+            <a:avLst/>
+          </a:prstGeom>
+          <a:noFill/>
+        </p:spPr>
+        <p:txBody>
+          <a:bodyPr wrap="square">
+            <a:spAutoFit/>
+          </a:bodyPr>
+          <a:lstStyle/>
+          <a:p>
+            <a:r>
+              <a:rPr lang="en-US" sz="1400" b="1"/>
+              <a:t>Reference:</a:t>
+            </a:r>
+            <a:r>
+              <a:rPr lang="en-US" sz="1400"/>
+              <a:t> Bertólez-Martínez, Hooper &amp; Khatee Zathul (2026), arXiv:2609.20944 §IV</a:t>
+            </a:r>
+            <a:endParaRPr lang="en-US"/>
+          </a:p>
+        </p:txBody>
+      </p:sp>
+    </p:spTree>
+  </p:cSld>
+  <p:clrMapOvr>
+    <a:masterClrMapping/>
+  </p:clrMapOvr>
+</p:sld>
+</file>
+
+<file path=ppt/slides/slide43.xml><?xml version="1.0" encoding="utf-8"?>
+<p:sld xmlns:a="http://schemas.openxmlformats.org/drawingml/2006/main" xmlns:r="http://schemas.openxmlformats.org/officeDocument/2006/relationships" xmlns:p="http://schemas.openxmlformats.org/presentationml/2006/main">
+  <p:cSld>
+    <p:spTree>
+      <p:nvGrpSpPr>
+        <p:cNvPr id="1" name=""/>
+        <p:cNvGrpSpPr/>
+        <p:nvPr/>
+      </p:nvGrpSpPr>
+      <p:grpSpPr>
+        <a:xfrm>
+          <a:off x="0" y="0"/>
+          <a:ext cx="0" cy="0"/>
+          <a:chOff x="0" y="0"/>
+          <a:chExt cx="0" cy="0"/>
+        </a:xfrm>
+      </p:grpSpPr>
+      <p:sp>
+        <p:nvSpPr>
+          <p:cNvPr id="2" name="Title 1"/>
+          <p:cNvSpPr>
+            <a:spLocks noGrp="1"/>
+          </p:cNvSpPr>
+          <p:nvPr>
+            <p:ph type="title"/>
+          </p:nvPr>
+        </p:nvSpPr>
+        <p:spPr/>
+        <p:txBody>
+          <a:bodyPr/>
+          <a:lstStyle/>
+          <a:p>
+            <a:r>
+              <a:rPr sz="3400"/>
+              <a:t>有意度の計算式のどこに誤差が入るか</a:t>
+            </a:r>
+          </a:p>
+        </p:txBody>
+      </p:sp>
+      <p:sp>
+        <p:nvSpPr>
+          <p:cNvPr id="3" name="Content Placeholder 2"/>
+          <p:cNvSpPr>
+            <a:spLocks noGrp="1"/>
+          </p:cNvSpPr>
+          <p:nvPr>
+            <p:ph idx="1"/>
+          </p:nvPr>
+        </p:nvSpPr>
+        <p:spPr>
+          <a:xfrm>
+            <a:off x="841248" y="1463040"/>
+            <a:ext cx="10515600" cy="4937760"/>
+          </a:xfrm>
+        </p:spPr>
+        <p:txBody>
+          <a:bodyPr/>
+          <a:lstStyle/>
+          <a:p>
+            <a:r>
+              <a:rPr sz="2400"/>
+              <a:t>暗黒物質ありで期待される T</a:t>
+            </a:r>
+          </a:p>
+          <a:p>
+            <a:pPr lvl="1"/>
+            <a:r>
+              <a:rPr sz="2000"/>
+              <a:t>誤差なし：E[T] = Σ w_i pred_i / √Σ w_i² = 1.77</a:t>
+            </a:r>
+          </a:p>
+          <a:p>
+            <a:pPr lvl="1"/>
+            <a:r>
+              <a:rPr sz="2000"/>
+              <a:t>誤差あり：E[T] = Σ w_i pred_i 10^δ_i / √Σ w_i²  ← δ でばらつく</a:t>
+            </a:r>
+          </a:p>
+          <a:p>
+            <a:r>
+              <a:rPr sz="2400"/>
+              <a:t>実測 T にも測定の揺れ s がある（s = 1、または空で測った 1.26）</a:t>
+            </a:r>
+          </a:p>
+          <a:p>
+            <a:r>
+              <a:rPr sz="2400"/>
+              <a:t>暗黒物質ありで、実測 0.39 以下になる確率</a:t>
+            </a:r>
+          </a:p>
+          <a:p>
+            <a:pPr lvl="1"/>
+            <a:r>
+              <a:rPr sz="2000"/>
+              <a:t>p = （δ について平均）Φ( (0.39 − E[T]) / s )</a:t>
+            </a:r>
+          </a:p>
+          <a:p>
+            <a:r>
+              <a:rPr sz="2400"/>
+              <a:t>p を σ に直したもの =「ずれ」</a:t>
+            </a:r>
+          </a:p>
+        </p:txBody>
+      </p:sp>
+    </p:spTree>
+  </p:cSld>
+  <p:clrMapOvr>
+    <a:masterClrMapping/>
+  </p:clrMapOvr>
+</p:sld>
+</file>
+
+<file path=ppt/slides/slide44.xml><?xml version="1.0" encoding="utf-8"?>
+<p:sld xmlns:a="http://schemas.openxmlformats.org/drawingml/2006/main" xmlns:r="http://schemas.openxmlformats.org/officeDocument/2006/relationships" xmlns:p="http://schemas.openxmlformats.org/presentationml/2006/main">
+  <p:cSld>
+    <p:spTree>
+      <p:nvGrpSpPr>
+        <p:cNvPr id="1" name=""/>
+        <p:cNvGrpSpPr/>
+        <p:nvPr/>
+      </p:nvGrpSpPr>
+      <p:grpSpPr>
+        <a:xfrm>
+          <a:off x="0" y="0"/>
+          <a:ext cx="0" cy="0"/>
+          <a:chOff x="0" y="0"/>
+          <a:chExt cx="0" cy="0"/>
+        </a:xfrm>
+      </p:grpSpPr>
+      <p:sp>
+        <p:nvSpPr>
+          <p:cNvPr id="2" name="Title 1"/>
+          <p:cNvSpPr>
+            <a:spLocks noGrp="1"/>
+          </p:cNvSpPr>
+          <p:nvPr>
+            <p:ph type="title"/>
+          </p:nvPr>
+        </p:nvSpPr>
+        <p:spPr/>
+        <p:txBody>
+          <a:bodyPr/>
+          <a:lstStyle/>
+          <a:p>
+            <a:r>
+              <a:rPr sz="3400"/>
               <a:t>結果：予測の幅と実測</a:t>
             </a:r>
           </a:p>
@@ -10639,7 +13265,7 @@
 </p:sld>
 </file>
 
-<file path=ppt/slides/slide35.xml><?xml version="1.0" encoding="utf-8"?>
+<file path=ppt/slides/slide45.xml><?xml version="1.0" encoding="utf-8"?>
 <p:sld xmlns:a="http://schemas.openxmlformats.org/drawingml/2006/main" xmlns:r="http://schemas.openxmlformats.org/officeDocument/2006/relationships" xmlns:p="http://schemas.openxmlformats.org/presentationml/2006/main">
   <p:cSld>
     <p:spTree>
@@ -10746,7 +13372,7 @@
 </p:sld>
 </file>
 
-<file path=ppt/slides/slide36.xml><?xml version="1.0" encoding="utf-8"?>
+<file path=ppt/slides/slide46.xml><?xml version="1.0" encoding="utf-8"?>
 <p:sld xmlns:a="http://schemas.openxmlformats.org/drawingml/2006/main" xmlns:r="http://schemas.openxmlformats.org/officeDocument/2006/relationships" xmlns:p="http://schemas.openxmlformats.org/presentationml/2006/main">
   <p:cSld>
     <p:spTree>
@@ -10853,7 +13479,7 @@
 </p:sld>
 </file>
 
-<file path=ppt/slides/slide37.xml><?xml version="1.0" encoding="utf-8"?>
+<file path=ppt/slides/slide47.xml><?xml version="1.0" encoding="utf-8"?>
 <p:sld xmlns:a="http://schemas.openxmlformats.org/drawingml/2006/main" xmlns:r="http://schemas.openxmlformats.org/officeDocument/2006/relationships" xmlns:p="http://schemas.openxmlformats.org/presentationml/2006/main">
   <p:cSld>
     <p:spTree>
@@ -10953,7 +13579,7 @@
 </p:sld>
 </file>
 
-<file path=ppt/slides/slide38.xml><?xml version="1.0" encoding="utf-8"?>
+<file path=ppt/slides/slide48.xml><?xml version="1.0" encoding="utf-8"?>
 <p:sld xmlns:a="http://schemas.openxmlformats.org/drawingml/2006/main" xmlns:r="http://schemas.openxmlformats.org/officeDocument/2006/relationships" xmlns:p="http://schemas.openxmlformats.org/presentationml/2006/main">
   <p:cSld>
     <p:spTree>
@@ -11100,7 +13726,7 @@
 </p:sld>
 </file>
 
-<file path=ppt/slides/slide39.xml><?xml version="1.0" encoding="utf-8"?>
+<file path=ppt/slides/slide49.xml><?xml version="1.0" encoding="utf-8"?>
 <p:sld xmlns:a="http://schemas.openxmlformats.org/drawingml/2006/main" xmlns:r="http://schemas.openxmlformats.org/officeDocument/2006/relationships" xmlns:p="http://schemas.openxmlformats.org/presentationml/2006/main">
   <p:cSld>
     <p:spTree>
@@ -11222,173 +13848,7 @@
 </p:sld>
 </file>
 
-<file path=ppt/slides/slide4.xml><?xml version="1.0" encoding="utf-8"?>
-<p:sld xmlns:a="http://schemas.openxmlformats.org/drawingml/2006/main" xmlns:r="http://schemas.openxmlformats.org/officeDocument/2006/relationships" xmlns:p="http://schemas.openxmlformats.org/presentationml/2006/main">
-  <p:cSld>
-    <p:spTree>
-      <p:nvGrpSpPr>
-        <p:cNvPr id="1" name=""/>
-        <p:cNvGrpSpPr/>
-        <p:nvPr/>
-      </p:nvGrpSpPr>
-      <p:grpSpPr>
-        <a:xfrm>
-          <a:off x="0" y="0"/>
-          <a:ext cx="0" cy="0"/>
-          <a:chOff x="0" y="0"/>
-          <a:chExt cx="0" cy="0"/>
-        </a:xfrm>
-      </p:grpSpPr>
-      <p:sp>
-        <p:nvSpPr>
-          <p:cNvPr id="2" name="Title 1"/>
-          <p:cNvSpPr>
-            <a:spLocks noGrp="1"/>
-          </p:cNvSpPr>
-          <p:nvPr>
-            <p:ph type="title"/>
-          </p:nvPr>
-        </p:nvSpPr>
-        <p:spPr>
-          <a:xfrm>
-            <a:off x="148389" y="0"/>
-            <a:ext cx="10515600" cy="1325563"/>
-          </a:xfrm>
-        </p:spPr>
-        <p:txBody>
-          <a:bodyPr/>
-          <a:lstStyle/>
-          <a:p>
-            <a:r>
-              <a:rPr sz="3400"/>
-              <a:t>手法①：テンプレートフィット</a:t>
-            </a:r>
-          </a:p>
-        </p:txBody>
-      </p:sp>
-      <p:sp>
-        <p:nvSpPr>
-          <p:cNvPr id="3" name="Content Placeholder 2"/>
-          <p:cNvSpPr>
-            <a:spLocks noGrp="1"/>
-          </p:cNvSpPr>
-          <p:nvPr>
-            <p:ph idx="1"/>
-          </p:nvPr>
-        </p:nvSpPr>
-        <p:spPr>
-          <a:xfrm>
-            <a:off x="440194" y="1371599"/>
-            <a:ext cx="11490359" cy="4716379"/>
-          </a:xfrm>
-        </p:spPr>
-        <p:txBody>
-          <a:bodyPr/>
-          <a:lstStyle/>
-          <a:p>
-            <a:r>
-              <a:rPr sz="2400"/>
-              <a:t>空の光を「</a:t>
-            </a:r>
-            <a:r>
-              <a:rPr lang="ja-JP" altLang="en-US" sz="2400"/>
-              <a:t>既知の要素</a:t>
-            </a:r>
-            <a:r>
-              <a:rPr sz="2400"/>
-              <a:t>の足し算」で表す</a:t>
-            </a:r>
-          </a:p>
-          <a:p>
-            <a:pPr lvl="1"/>
-            <a:r>
-              <a:rPr sz="2000"/>
-              <a:t>予測 = Σ（倍率 f_l）×（</a:t>
-            </a:r>
-            <a:r>
-              <a:rPr lang="ja-JP" altLang="en-US" sz="2000"/>
-              <a:t>要素</a:t>
-            </a:r>
-            <a:r>
-              <a:rPr sz="2000"/>
-              <a:t> l）</a:t>
-            </a:r>
-          </a:p>
-          <a:p>
-            <a:r>
-              <a:rPr lang="ja-JP" altLang="en-US" sz="2400"/>
-              <a:t>要素</a:t>
-            </a:r>
-            <a:r>
-              <a:rPr sz="2400"/>
-              <a:t>は 9 枚</a:t>
-            </a:r>
-          </a:p>
-          <a:p>
-            <a:r>
-              <a:rPr sz="2000"/>
-              <a:t>等方背景、ガス（π⁰ 崩壊＋制動放射）</a:t>
-            </a:r>
-            <a:r>
-              <a:rPr lang="en-US" sz="2000"/>
-              <a:t>(</a:t>
-            </a:r>
-            <a:r>
-              <a:rPr lang="en-US" sz="2400"/>
-              <a:t>GALPROP)</a:t>
-            </a:r>
-            <a:r>
-              <a:rPr lang="en-US" sz="2000"/>
-              <a:t>、ICS</a:t>
-            </a:r>
-            <a:r>
-              <a:rPr lang="en-US" sz="1800"/>
-              <a:t> (</a:t>
-            </a:r>
-            <a:r>
-              <a:rPr lang="en-US" sz="2000"/>
-              <a:t>GALPROP)</a:t>
-            </a:r>
-            <a:r>
-              <a:rPr lang="en-US" sz="1800"/>
-              <a:t>、 </a:t>
-            </a:r>
-            <a:r>
-              <a:rPr lang="en-US" sz="2000"/>
-              <a:t>、</a:t>
-            </a:r>
-            <a:r>
-              <a:rPr lang="ja-JP" altLang="en-US" sz="2000"/>
-              <a:t>点源</a:t>
-            </a:r>
-          </a:p>
-          <a:p>
-            <a:pPr lvl="1"/>
-            <a:r>
-              <a:rPr sz="2000"/>
-              <a:t>Loop I（2 枚）、フェルミバブル（正・負）、ハロー</a:t>
-            </a:r>
-          </a:p>
-          <a:p>
-            <a:pPr marL="0" indent="0">
-              <a:buNone/>
-            </a:pPr>
-            <a:r>
-              <a:rPr sz="2400"/>
-              <a:t>倍率 f_l をデータに合うように決める</a:t>
-            </a:r>
-          </a:p>
-        </p:txBody>
-      </p:sp>
-    </p:spTree>
-  </p:cSld>
-  <p:clrMapOvr>
-    <a:masterClrMapping/>
-  </p:clrMapOvr>
-</p:sld>
-</file>
-
-<file path=ppt/slides/slide40.xml><?xml version="1.0" encoding="utf-8"?>
+<file path=ppt/slides/slide5.xml><?xml version="1.0" encoding="utf-8"?>
 <p:sld xmlns:a="http://schemas.openxmlformats.org/drawingml/2006/main" xmlns:p="http://schemas.openxmlformats.org/presentationml/2006/main" xmlns:r="http://schemas.openxmlformats.org/officeDocument/2006/relationships">
   <p:cSld>
     <p:spTree>
@@ -11415,7 +13875,7 @@
           <a:p>
             <a:r>
               <a:rPr sz="3000"/>
-              <a:t>MCMC をたとえで見る：霧の山を歩く</a:t>
+              <a:t>成分①：等方背景</a:t>
             </a:r>
           </a:p>
         </p:txBody>
@@ -11433,7 +13893,7 @@
         <p:spPr>
           <a:xfrm>
             <a:off x="548640" y="1371600"/>
-            <a:ext cx="5669280" cy="4297680"/>
+            <a:ext cx="6400800" cy="4297680"/>
           </a:xfrm>
         </p:spPr>
         <p:txBody>
@@ -11443,459 +13903,56 @@
             <a:pPr/>
             <a:r>
               <a:rPr sz="1800"/>
-              <a:t>山の上の「場所」 → 倍率の組 θ</a:t>
+              <a:t>空のどの方向からも、同じ明るさで来るガンマ線</a:t>
+            </a:r>
+          </a:p>
+          <a:p>
+            <a:pPr/>
+            <a:r>
+              <a:rPr sz="1800"/>
+              <a:t>出どころ：天の川の外の遠い銀河（ブレーザーなど）</a:t>
             </a:r>
           </a:p>
           <a:p>
             <a:pPr lvl="1"/>
             <a:r>
               <a:rPr sz="1500"/>
-              <a:t>θ = (f_iso, f_gas, f_ics, …, f_halo)。9 個あるので 9 次元の山</a:t>
+              <a:t>一つ一つは見分けられないほど暗い光が、たくさん重なったもの</a:t>
             </a:r>
           </a:p>
           <a:p>
             <a:pPr/>
             <a:r>
               <a:rPr sz="1800"/>
-              <a:t>その場所の「高さ」 → 点数（事後分布）</a:t>
+              <a:t>型紙：空全体で一様（どこも同じ明るさ）</a:t>
             </a:r>
           </a:p>
           <a:p>
             <a:pPr/>
             <a:r>
               <a:rPr sz="1800"/>
-              <a:t>「高度計」 → 尤度の計算（手法② の ln L）</a:t>
+              <a:t>倍率：0 以上</a:t>
+            </a:r>
+          </a:p>
+          <a:p>
+            <a:pPr lvl="1"/>
+            <a:r>
+              <a:rPr sz="1500"/>
+              <a:t>最初の値は E²dN/dE = 10⁻⁴ MeV cm⁻² s⁻¹ sr⁻¹ 相当</a:t>
             </a:r>
           </a:p>
           <a:p>
             <a:pPr/>
             <a:r>
               <a:rPr sz="1800"/>
-              <a:t>「立ち入り禁止の場所」 → 事前分布</a:t>
-            </a:r>
-          </a:p>
-          <a:p>
-            <a:pPr lvl="1"/>
-            <a:r>
-              <a:rPr sz="1500"/>
-              <a:t>例：ガスや ICS の倍率は負にならない</a:t>
-            </a:r>
-          </a:p>
-          <a:p>
-            <a:pPr/>
-            <a:r>
-              <a:rPr sz="1800"/>
-              <a:t>「歩く人」 → 歩行者（walker）。今回は 32 人</a:t>
-            </a:r>
-          </a:p>
-          <a:p>
-            <a:pPr/>
-            <a:r>
-              <a:rPr sz="1800"/>
-              <a:t>「足あとの記録」 → チェーン（サンプル）</a:t>
-            </a:r>
-          </a:p>
-          <a:p>
-            <a:pPr/>
-            <a:r>
-              <a:rPr sz="1800"/>
-              <a:t>「一番高い足あと」 → 最良値</a:t>
-            </a:r>
-          </a:p>
-          <a:p>
-            <a:pPr/>
-            <a:r>
-              <a:rPr sz="1800"/>
-              <a:t>「足あとの広がり」 → 誤差</a:t>
-            </a:r>
-          </a:p>
-        </p:txBody>
-      </p:sp>
-    </p:spTree>
-  </p:cSld>
-  <p:clrMapOvr>
-    <a:masterClrMapping/>
-  </p:clrMapOvr>
-</p:sld>
-</file>
-
-<file path=ppt/slides/slide41.xml><?xml version="1.0" encoding="utf-8"?>
-<p:sld xmlns:a="http://schemas.openxmlformats.org/drawingml/2006/main" xmlns:p="http://schemas.openxmlformats.org/presentationml/2006/main" xmlns:r="http://schemas.openxmlformats.org/officeDocument/2006/relationships">
-  <p:cSld>
-    <p:spTree>
-      <p:nvGrpSpPr>
-        <p:cNvPr id="1" name=""/>
-        <p:cNvGrpSpPr/>
-        <p:nvPr/>
-      </p:nvGrpSpPr>
-      <p:grpSpPr/>
-      <p:sp>
-        <p:nvSpPr>
-          <p:cNvPr id="2" name="Title 1"/>
-          <p:cNvSpPr>
-            <a:spLocks noGrp="1"/>
-          </p:cNvSpPr>
-          <p:nvPr>
-            <p:ph type="title"/>
-          </p:nvPr>
-        </p:nvSpPr>
-        <p:spPr/>
-        <p:txBody>
-          <a:bodyPr/>
-          <a:lstStyle/>
-          <a:p>
-            <a:r>
-              <a:rPr sz="3000"/>
-              <a:t>① 高さ＝点数の決め方（ベイズの定理）</a:t>
-            </a:r>
-          </a:p>
-        </p:txBody>
-      </p:sp>
-      <p:sp>
-        <p:nvSpPr>
-          <p:cNvPr id="3" name="Content Placeholder 2"/>
-          <p:cNvSpPr>
-            <a:spLocks noGrp="1"/>
-          </p:cNvSpPr>
-          <p:nvPr>
-            <p:ph idx="1"/>
-          </p:nvPr>
-        </p:nvSpPr>
-        <p:spPr>
-          <a:xfrm>
-            <a:off x="548640" y="1371600"/>
-            <a:ext cx="5669280" cy="4297680"/>
-          </a:xfrm>
-        </p:spPr>
-        <p:txBody>
-          <a:bodyPr/>
-          <a:lstStyle/>
-          <a:p>
-            <a:pPr/>
-            <a:r>
-              <a:rPr sz="1800"/>
-              <a:t>P(θ | D) = L(D | θ) × π(θ) ÷ P(D)</a:t>
-            </a:r>
-          </a:p>
-          <a:p>
-            <a:pPr/>
-            <a:r>
-              <a:rPr sz="1800"/>
-              <a:t>P(θ | D)：場所 θ の「高さ」（＝点数）</a:t>
-            </a:r>
-          </a:p>
-          <a:p>
-            <a:pPr lvl="1"/>
-            <a:r>
-              <a:rPr sz="1500"/>
-              <a:t>データ D を見た後で、θ がどれくらいもっともらしいか</a:t>
-            </a:r>
-          </a:p>
-          <a:p>
-            <a:pPr/>
-            <a:r>
-              <a:rPr sz="1800"/>
-              <a:t>L(D | θ)：「高度計」の読み（尤度）</a:t>
-            </a:r>
-          </a:p>
-          <a:p>
-            <a:pPr lvl="1"/>
-            <a:r>
-              <a:rPr sz="1500"/>
-              <a:t>倍率が θ のとき、観測した光子の地図 D がどれくらい出やすいか</a:t>
-            </a:r>
-          </a:p>
-          <a:p>
-            <a:pPr/>
-            <a:r>
-              <a:rPr sz="1800"/>
-              <a:t>π(θ)：入ってよい場所か（事前分布）</a:t>
-            </a:r>
-          </a:p>
-          <a:p>
-            <a:pPr lvl="1"/>
-            <a:r>
-              <a:rPr sz="1500"/>
-              <a:t>入れる場所は全部同じ値、立ち入り禁止なら 0</a:t>
-            </a:r>
-          </a:p>
-          <a:p>
-            <a:pPr/>
-            <a:r>
-              <a:rPr sz="1800"/>
-              <a:t>P(D)：海抜の基準。どの場所でも同じ数</a:t>
-            </a:r>
-          </a:p>
-          <a:p>
-            <a:pPr lvl="1"/>
-            <a:r>
-              <a:rPr sz="1500"/>
-              <a:t>「どちらが高いか」を比べるだけなら消える → 計算しなくてよい</a:t>
-            </a:r>
-          </a:p>
-          <a:p>
-            <a:pPr/>
-            <a:r>
-              <a:rPr sz="1800"/>
-              <a:t>計算では対数で：ln(高さ) = ln L + ln π</a:t>
-            </a:r>
-          </a:p>
-        </p:txBody>
-      </p:sp>
-      <p:sp>
-        <p:nvSpPr>
-          <p:cNvPr id="8" name="TextBox 7">
-            <a:extLst>
-              <a:ext uri="{FF2B5EF4-FFF2-40B4-BE49-F238E27FC236}">
-                <a16:creationId xmlns:a16="http://schemas.microsoft.com/office/drawing/2014/main" id="{F85CD606-E3CE-F314-B3EE-F3D7028115CB}"/>
-              </a:ext>
-            </a:extLst>
-          </p:cNvPr>
-          <p:cNvSpPr txBox="1"/>
-          <p:nvPr/>
-        </p:nvSpPr>
-        <p:spPr>
-          <a:xfrm>
-            <a:off x="5837182" y="5663239"/>
-            <a:ext cx="6093372" cy="923330"/>
-          </a:xfrm>
-          <a:prstGeom prst="rect">
-            <a:avLst/>
-          </a:prstGeom>
-          <a:noFill/>
-        </p:spPr>
-        <p:txBody>
-          <a:bodyPr wrap="square">
-            <a:spAutoFit/>
-          </a:bodyPr>
-          <a:lstStyle/>
-          <a:p>
-            <a:r>
-              <a:rPr lang="en-US" sz="1400" b="1"/>
-              <a:t>Reference:</a:t>
-            </a:r>
-            <a:r>
-              <a:rPr lang="en-US" sz="1400"/>
-              <a:t> D. Foreman-Mackey et al. (2013), PASP 125, 306</a:t>
-            </a:r>
-            <a:endParaRPr lang="en-US"/>
-          </a:p>
-        </p:txBody>
-      </p:sp>
-    </p:spTree>
-  </p:cSld>
-  <p:clrMapOvr>
-    <a:masterClrMapping/>
-  </p:clrMapOvr>
-</p:sld>
-</file>
-
-<file path=ppt/slides/slide42.xml><?xml version="1.0" encoding="utf-8"?>
-<p:sld xmlns:a="http://schemas.openxmlformats.org/drawingml/2006/main" xmlns:p="http://schemas.openxmlformats.org/presentationml/2006/main" xmlns:r="http://schemas.openxmlformats.org/officeDocument/2006/relationships">
-  <p:cSld>
-    <p:spTree>
-      <p:nvGrpSpPr>
-        <p:cNvPr id="1" name=""/>
-        <p:cNvGrpSpPr/>
-        <p:nvPr/>
-      </p:nvGrpSpPr>
-      <p:grpSpPr/>
-      <p:sp>
-        <p:nvSpPr>
-          <p:cNvPr id="2" name="Title 1"/>
-          <p:cNvSpPr>
-            <a:spLocks noGrp="1"/>
-          </p:cNvSpPr>
-          <p:nvPr>
-            <p:ph type="title"/>
-          </p:nvPr>
-        </p:nvSpPr>
-        <p:spPr/>
-        <p:txBody>
-          <a:bodyPr/>
-          <a:lstStyle/>
-          <a:p>
-            <a:r>
-              <a:rPr sz="3000"/>
-              <a:t>② 一歩の進み方（メトロポリス法）</a:t>
-            </a:r>
-          </a:p>
-        </p:txBody>
-      </p:sp>
-      <p:sp>
-        <p:nvSpPr>
-          <p:cNvPr id="3" name="Content Placeholder 2"/>
-          <p:cNvSpPr>
-            <a:spLocks noGrp="1"/>
-          </p:cNvSpPr>
-          <p:nvPr>
-            <p:ph idx="1"/>
-          </p:nvPr>
-        </p:nvSpPr>
-        <p:spPr>
-          <a:xfrm>
-            <a:off x="548640" y="1371600"/>
-            <a:ext cx="5669280" cy="4297680"/>
-          </a:xfrm>
-        </p:spPr>
-        <p:txBody>
-          <a:bodyPr/>
-          <a:lstStyle/>
-          <a:p>
-            <a:pPr/>
-            <a:r>
-              <a:rPr sz="1800"/>
-              <a:t>1. 今いる場所 θ から、少しずれた場所 θ′ に足を出す</a:t>
-            </a:r>
-          </a:p>
-          <a:p>
-            <a:pPr lvl="1"/>
-            <a:r>
-              <a:rPr sz="1500"/>
-              <a:t>どれだけずらすかは乱数で決める</a:t>
-            </a:r>
-          </a:p>
-          <a:p>
-            <a:pPr/>
-            <a:r>
-              <a:rPr sz="1800"/>
-              <a:t>2. 高度計で両方を読み、比 r = 高さ(θ′) ÷ 高さ(θ)</a:t>
-            </a:r>
-          </a:p>
-          <a:p>
-            <a:pPr/>
-            <a:r>
-              <a:rPr sz="1800"/>
-              <a:t>3. r ≥ 1（上り）なら、必ず θ′ に移る</a:t>
-            </a:r>
-          </a:p>
-          <a:p>
-            <a:pPr/>
-            <a:r>
-              <a:rPr sz="1800"/>
-              <a:t>4. r &lt; 1（下り）なら、確率 r で移る</a:t>
-            </a:r>
-          </a:p>
-          <a:p>
-            <a:pPr lvl="1"/>
-            <a:r>
-              <a:rPr sz="1500"/>
-              <a:t>0〜1 の乱数を引き、r より小さければ移る</a:t>
-            </a:r>
-          </a:p>
-          <a:p>
-            <a:pPr/>
-            <a:r>
-              <a:rPr sz="1800"/>
-              <a:t>5. 移っても移らなくても、今いる場所を足あとに記録</a:t>
-            </a:r>
-          </a:p>
-          <a:p>
-            <a:pPr/>
-            <a:r>
-              <a:rPr sz="1800"/>
-              <a:t>6. 1〜5 を何千回もくり返す</a:t>
-            </a:r>
-          </a:p>
-          <a:p>
-            <a:pPr/>
-            <a:r>
-              <a:rPr sz="1800"/>
-              <a:t>なぜ下りにも進む？</a:t>
-            </a:r>
-          </a:p>
-          <a:p>
-            <a:pPr lvl="1"/>
-            <a:r>
-              <a:rPr sz="1500"/>
-              <a:t>上りだけだと頂上で止まり、山の広がり（誤差）が分からないから</a:t>
-            </a:r>
-          </a:p>
-        </p:txBody>
-      </p:sp>
-      <p:sp>
-        <p:nvSpPr>
-          <p:cNvPr id="8" name="TextBox 7">
-            <a:extLst>
-              <a:ext uri="{FF2B5EF4-FFF2-40B4-BE49-F238E27FC236}">
-                <a16:creationId xmlns:a16="http://schemas.microsoft.com/office/drawing/2014/main" id="{F85CD606-E3CE-F314-B3EE-F3D7028115CB}"/>
-              </a:ext>
-            </a:extLst>
-          </p:cNvPr>
-          <p:cNvSpPr txBox="1"/>
-          <p:nvPr/>
-        </p:nvSpPr>
-        <p:spPr>
-          <a:xfrm>
-            <a:off x="5837182" y="5663239"/>
-            <a:ext cx="6093372" cy="923330"/>
-          </a:xfrm>
-          <a:prstGeom prst="rect">
-            <a:avLst/>
-          </a:prstGeom>
-          <a:noFill/>
-        </p:spPr>
-        <p:txBody>
-          <a:bodyPr wrap="square">
-            <a:spAutoFit/>
-          </a:bodyPr>
-          <a:lstStyle/>
-          <a:p>
-            <a:r>
-              <a:rPr lang="en-US" sz="1400" b="1"/>
-              <a:t>Reference:</a:t>
-            </a:r>
-            <a:r>
-              <a:rPr lang="en-US" sz="1400"/>
-              <a:t> N. Metropolis et al. (1953), J. Chem. Phys. 21, 1087</a:t>
-            </a:r>
-            <a:endParaRPr lang="en-US"/>
-          </a:p>
-        </p:txBody>
-      </p:sp>
-    </p:spTree>
-  </p:cSld>
-  <p:clrMapOvr>
-    <a:masterClrMapping/>
-  </p:clrMapOvr>
-</p:sld>
-</file>
-
-<file path=ppt/slides/slide43.xml><?xml version="1.0" encoding="utf-8"?>
-<p:sld xmlns:a="http://schemas.openxmlformats.org/drawingml/2006/main" xmlns:p="http://schemas.openxmlformats.org/presentationml/2006/main" xmlns:r="http://schemas.openxmlformats.org/officeDocument/2006/relationships">
-  <p:cSld>
-    <p:spTree>
-      <p:nvGrpSpPr>
-        <p:cNvPr id="1" name=""/>
-        <p:cNvGrpSpPr/>
-        <p:nvPr/>
-      </p:nvGrpSpPr>
-      <p:grpSpPr/>
-      <p:sp>
-        <p:nvSpPr>
-          <p:cNvPr id="2" name="Title 1"/>
-          <p:cNvSpPr>
-            <a:spLocks noGrp="1"/>
-          </p:cNvSpPr>
-          <p:nvPr>
-            <p:ph type="title"/>
-          </p:nvPr>
-        </p:nvSpPr>
-        <p:spPr/>
-        <p:txBody>
-          <a:bodyPr/>
-          <a:lstStyle/>
-          <a:p>
-            <a:r>
-              <a:rPr sz="3000"/>
-              <a:t>③ 足あとはこうなる（説明用の例）</a:t>
+              <a:t>注意：Loop I の殻 1 と形がほぼ同じで、区別しにくい</a:t>
             </a:r>
           </a:p>
         </p:txBody>
       </p:sp>
       <p:pic>
         <p:nvPicPr>
-          <p:cNvPr id="3" name="Picture 2" descr="image.png"/>
+          <p:cNvPr id="4" name="Picture 3" descr="template_iso_counts.png"/>
           <p:cNvPicPr>
             <a:picLocks noChangeAspect="1"/>
           </p:cNvPicPr>
@@ -11909,167 +13966,14 @@
         </p:blipFill>
         <p:spPr>
           <a:xfrm>
-            <a:off x="731520" y="1280160"/>
-            <a:ext cx="10698480" cy="4279392"/>
+            <a:off x="7223760" y="1188720"/>
+            <a:ext cx="4314613" cy="4480560"/>
           </a:xfrm>
           <a:prstGeom prst="rect">
             <a:avLst/>
           </a:prstGeom>
         </p:spPr>
       </p:pic>
-      <p:sp>
-        <p:nvSpPr>
-          <p:cNvPr id="4" name="TextBox 3"/>
-          <p:cNvSpPr txBox="1"/>
-          <p:nvPr/>
-        </p:nvSpPr>
-        <p:spPr>
-          <a:xfrm>
-            <a:off x="548640" y="5669280"/>
-            <a:ext cx="11155680" cy="822960"/>
-          </a:xfrm>
-          <a:prstGeom prst="rect">
-            <a:avLst/>
-          </a:prstGeom>
-          <a:noFill/>
-        </p:spPr>
-        <p:txBody>
-          <a:bodyPr wrap="square">
-            <a:spAutoFit/>
-          </a:bodyPr>
-          <a:lstStyle/>
-          <a:p>
-            <a:r>
-              <a:rPr sz="1800"/>
-              <a:t>左：足あと（縦＝倍率、横＝歩数）。最初の 200 歩は山にたどり着く途中なので捨てる。右：足あとのヒストグラム ＝ 山の形</a:t>
-            </a:r>
-          </a:p>
-        </p:txBody>
-      </p:sp>
-    </p:spTree>
-  </p:cSld>
-  <p:clrMapOvr>
-    <a:masterClrMapping/>
-  </p:clrMapOvr>
-</p:sld>
-</file>
-
-<file path=ppt/slides/slide44.xml><?xml version="1.0" encoding="utf-8"?>
-<p:sld xmlns:a="http://schemas.openxmlformats.org/drawingml/2006/main" xmlns:p="http://schemas.openxmlformats.org/presentationml/2006/main" xmlns:r="http://schemas.openxmlformats.org/officeDocument/2006/relationships">
-  <p:cSld>
-    <p:spTree>
-      <p:nvGrpSpPr>
-        <p:cNvPr id="1" name=""/>
-        <p:cNvGrpSpPr/>
-        <p:nvPr/>
-      </p:nvGrpSpPr>
-      <p:grpSpPr/>
-      <p:sp>
-        <p:nvSpPr>
-          <p:cNvPr id="2" name="Title 1"/>
-          <p:cNvSpPr>
-            <a:spLocks noGrp="1"/>
-          </p:cNvSpPr>
-          <p:nvPr>
-            <p:ph type="title"/>
-          </p:nvPr>
-        </p:nvSpPr>
-        <p:spPr/>
-        <p:txBody>
-          <a:bodyPr/>
-          <a:lstStyle/>
-          <a:p>
-            <a:r>
-              <a:rPr sz="3000"/>
-              <a:t>④ 32 人で歩く（emcee）</a:t>
-            </a:r>
-          </a:p>
-        </p:txBody>
-      </p:sp>
-      <p:sp>
-        <p:nvSpPr>
-          <p:cNvPr id="3" name="Content Placeholder 2"/>
-          <p:cNvSpPr>
-            <a:spLocks noGrp="1"/>
-          </p:cNvSpPr>
-          <p:nvPr>
-            <p:ph idx="1"/>
-          </p:nvPr>
-        </p:nvSpPr>
-        <p:spPr>
-          <a:xfrm>
-            <a:off x="548640" y="1371600"/>
-            <a:ext cx="5669280" cy="4297680"/>
-          </a:xfrm>
-        </p:spPr>
-        <p:txBody>
-          <a:bodyPr/>
-          <a:lstStyle/>
-          <a:p>
-            <a:pPr/>
-            <a:r>
-              <a:rPr sz="1800"/>
-              <a:t>1 人だと、細長い山で迷いやすい</a:t>
-            </a:r>
-          </a:p>
-          <a:p>
-            <a:pPr lvl="1"/>
-            <a:r>
-              <a:rPr sz="1500"/>
-              <a:t>例：ガスと ICS の縮退。片方を上げて片方を下げても高さがほぼ同じ</a:t>
-            </a:r>
-          </a:p>
-          <a:p>
-            <a:pPr/>
-            <a:r>
-              <a:rPr sz="1800"/>
-              <a:t>そこで 32 人が同時に歩き、仲間の位置を見て一歩を決める</a:t>
-            </a:r>
-          </a:p>
-          <a:p>
-            <a:pPr/>
-            <a:r>
-              <a:rPr sz="1800"/>
-              <a:t>一歩の出し方（ストレッチ移動）</a:t>
-            </a:r>
-          </a:p>
-          <a:p>
-            <a:pPr lvl="1"/>
-            <a:r>
-              <a:rPr sz="1500"/>
-              <a:t>自分 X_k から、ランダムに選んだ仲間 X_j への線を引く</a:t>
-            </a:r>
-          </a:p>
-          <a:p>
-            <a:pPr lvl="1"/>
-            <a:r>
-              <a:rPr sz="1500"/>
-              <a:t>その線の上で、Z 倍（1/2〜2 の乱数）伸ばした点に足を出す</a:t>
-            </a:r>
-          </a:p>
-          <a:p>
-            <a:pPr lvl="1"/>
-            <a:r>
-              <a:rPr sz="1500"/>
-              <a:t>Y = X_j + Z (X_k − X_j)</a:t>
-            </a:r>
-          </a:p>
-          <a:p>
-            <a:pPr/>
-            <a:r>
-              <a:rPr sz="1800"/>
-              <a:t>移るかどうかは ② と同じ考え（Z⁸ を掛けて補正）</a:t>
-            </a:r>
-          </a:p>
-          <a:p>
-            <a:pPr/>
-            <a:r>
-              <a:rPr sz="1800"/>
-              <a:t>出発点：全員、Totani と同じ初期値の近く。6000 歩</a:t>
-            </a:r>
-          </a:p>
-        </p:txBody>
-      </p:sp>
       <p:sp>
         <p:nvSpPr>
           <p:cNvPr id="8" name="TextBox 7">
@@ -12104,308 +14008,12 @@
             </a:r>
             <a:r>
               <a:rPr lang="en-US" sz="1400"/>
-              <a:t> J. Goodman &amp; J. Weare (2010), Comm. App. Math. Comp. Sci. 5, 65</a:t>
+              <a:t> T. Totani (2025), arXiv:2507.07209 §2.3</a:t>
             </a:r>
             <a:endParaRPr lang="en-US"/>
           </a:p>
         </p:txBody>
       </p:sp>
-    </p:spTree>
-  </p:cSld>
-  <p:clrMapOvr>
-    <a:masterClrMapping/>
-  </p:clrMapOvr>
-</p:sld>
-</file>
-
-<file path=ppt/slides/slide45.xml><?xml version="1.0" encoding="utf-8"?>
-<p:sld xmlns:a="http://schemas.openxmlformats.org/drawingml/2006/main" xmlns:p="http://schemas.openxmlformats.org/presentationml/2006/main" xmlns:r="http://schemas.openxmlformats.org/officeDocument/2006/relationships">
-  <p:cSld>
-    <p:spTree>
-      <p:nvGrpSpPr>
-        <p:cNvPr id="1" name=""/>
-        <p:cNvGrpSpPr/>
-        <p:nvPr/>
-      </p:nvGrpSpPr>
-      <p:grpSpPr/>
-      <p:sp>
-        <p:nvSpPr>
-          <p:cNvPr id="2" name="Title 1"/>
-          <p:cNvSpPr>
-            <a:spLocks noGrp="1"/>
-          </p:cNvSpPr>
-          <p:nvPr>
-            <p:ph type="title"/>
-          </p:nvPr>
-        </p:nvSpPr>
-        <p:spPr/>
-        <p:txBody>
-          <a:bodyPr/>
-          <a:lstStyle/>
-          <a:p>
-            <a:r>
-              <a:rPr sz="3000"/>
-              <a:t>⑤ 歩き終わったら：最良値と誤差</a:t>
-            </a:r>
-          </a:p>
-        </p:txBody>
-      </p:sp>
-      <p:sp>
-        <p:nvSpPr>
-          <p:cNvPr id="3" name="Content Placeholder 2"/>
-          <p:cNvSpPr>
-            <a:spLocks noGrp="1"/>
-          </p:cNvSpPr>
-          <p:nvPr>
-            <p:ph idx="1"/>
-          </p:nvPr>
-        </p:nvSpPr>
-        <p:spPr>
-          <a:xfrm>
-            <a:off x="548640" y="1371600"/>
-            <a:ext cx="5669280" cy="4297680"/>
-          </a:xfrm>
-        </p:spPr>
-        <p:txBody>
-          <a:bodyPr/>
-          <a:lstStyle/>
-          <a:p>
-            <a:pPr/>
-            <a:r>
-              <a:rPr sz="1800"/>
-              <a:t>一番高い足あと → 最良の倍率（Totani と同じ）</a:t>
-            </a:r>
-          </a:p>
-          <a:p>
-            <a:pPr lvl="1"/>
-            <a:r>
-              <a:rPr sz="1500"/>
-              <a:t>20.8 GeV：ハローの倍率 1.51</a:t>
-            </a:r>
-          </a:p>
-          <a:p>
-            <a:pPr/>
-            <a:r>
-              <a:rPr sz="1800"/>
-              <a:t>足あとの広がり → 誤差</a:t>
-            </a:r>
-          </a:p>
-          <a:p>
-            <a:pPr lvl="1"/>
-            <a:r>
-              <a:rPr sz="1500"/>
-              <a:t>最初の 400 歩は捨て、下から 16%〜84% の範囲</a:t>
-            </a:r>
-          </a:p>
-          <a:p>
-            <a:pPr lvl="1"/>
-            <a:r>
-              <a:rPr sz="1500"/>
-              <a:t>20.8 GeV：1.43〜1.61</a:t>
-            </a:r>
-          </a:p>
-          <a:p>
-            <a:pPr/>
-            <a:r>
-              <a:rPr sz="1800"/>
-              <a:t>有意度：ハローあり・なしの山を別々に歩く</a:t>
-            </a:r>
-          </a:p>
-          <a:p>
-            <a:pPr lvl="1"/>
-            <a:r>
-              <a:rPr sz="1500"/>
-              <a:t>それぞれの一番高い足あとの高さの差 Δln L → σ = √(2Δln L)</a:t>
-            </a:r>
-          </a:p>
-          <a:p>
-            <a:pPr lvl="1"/>
-            <a:r>
-              <a:rPr sz="1500"/>
-              <a:t>20.8 GeV：19.5σ</a:t>
-            </a:r>
-          </a:p>
-          <a:p>
-            <a:pPr/>
-            <a:r>
-              <a:rPr sz="1800"/>
-              <a:t>注意：山の端まで歩き回るには、もっと長く歩くのが理想</a:t>
-            </a:r>
-          </a:p>
-          <a:p>
-            <a:pPr lvl="1"/>
-            <a:r>
-              <a:rPr sz="1500"/>
-              <a:t>誤差は目安。一番高い足あとは頂上に届いている</a:t>
-            </a:r>
-          </a:p>
-        </p:txBody>
-      </p:sp>
-      <p:sp>
-        <p:nvSpPr>
-          <p:cNvPr id="8" name="TextBox 7">
-            <a:extLst>
-              <a:ext uri="{FF2B5EF4-FFF2-40B4-BE49-F238E27FC236}">
-                <a16:creationId xmlns:a16="http://schemas.microsoft.com/office/drawing/2014/main" id="{F85CD606-E3CE-F314-B3EE-F3D7028115CB}"/>
-              </a:ext>
-            </a:extLst>
-          </p:cNvPr>
-          <p:cNvSpPr txBox="1"/>
-          <p:nvPr/>
-        </p:nvSpPr>
-        <p:spPr>
-          <a:xfrm>
-            <a:off x="5837182" y="5663239"/>
-            <a:ext cx="6093372" cy="923330"/>
-          </a:xfrm>
-          <a:prstGeom prst="rect">
-            <a:avLst/>
-          </a:prstGeom>
-          <a:noFill/>
-        </p:spPr>
-        <p:txBody>
-          <a:bodyPr wrap="square">
-            <a:spAutoFit/>
-          </a:bodyPr>
-          <a:lstStyle/>
-          <a:p>
-            <a:r>
-              <a:rPr lang="en-US" sz="1400" b="1"/>
-              <a:t>Reference:</a:t>
-            </a:r>
-            <a:r>
-              <a:rPr lang="en-US" sz="1400"/>
-              <a:t> T. Totani (2025), arXiv:2507.07209 §2.2</a:t>
-            </a:r>
-            <a:endParaRPr lang="en-US"/>
-          </a:p>
-        </p:txBody>
-      </p:sp>
-    </p:spTree>
-  </p:cSld>
-  <p:clrMapOvr>
-    <a:masterClrMapping/>
-  </p:clrMapOvr>
-</p:sld>
-</file>
-
-<file path=ppt/slides/slide5.xml><?xml version="1.0" encoding="utf-8"?>
-<p:sld xmlns:a="http://schemas.openxmlformats.org/drawingml/2006/main" xmlns:r="http://schemas.openxmlformats.org/officeDocument/2006/relationships" xmlns:p="http://schemas.openxmlformats.org/presentationml/2006/main">
-  <p:cSld>
-    <p:spTree>
-      <p:nvGrpSpPr>
-        <p:cNvPr id="1" name=""/>
-        <p:cNvGrpSpPr/>
-        <p:nvPr/>
-      </p:nvGrpSpPr>
-      <p:grpSpPr>
-        <a:xfrm>
-          <a:off x="0" y="0"/>
-          <a:ext cx="0" cy="0"/>
-          <a:chOff x="0" y="0"/>
-          <a:chExt cx="0" cy="0"/>
-        </a:xfrm>
-      </p:grpSpPr>
-      <p:sp>
-        <p:nvSpPr>
-          <p:cNvPr id="2" name="Title 1"/>
-          <p:cNvSpPr>
-            <a:spLocks noGrp="1"/>
-          </p:cNvSpPr>
-          <p:nvPr>
-            <p:ph type="title"/>
-          </p:nvPr>
-        </p:nvSpPr>
-        <p:spPr/>
-        <p:txBody>
-          <a:bodyPr/>
-          <a:lstStyle/>
-          <a:p>
-            <a:r>
-              <a:rPr sz="3400"/>
-              <a:t>手法②：尤度（どれだけ合っているか）</a:t>
-            </a:r>
-          </a:p>
-        </p:txBody>
-      </p:sp>
-      <p:sp>
-        <p:nvSpPr>
-          <p:cNvPr id="3" name="Content Placeholder 2"/>
-          <p:cNvSpPr>
-            <a:spLocks noGrp="1"/>
-          </p:cNvSpPr>
-          <p:nvPr>
-            <p:ph idx="1"/>
-          </p:nvPr>
-        </p:nvSpPr>
-        <p:spPr>
-          <a:xfrm>
-            <a:off x="841248" y="1463040"/>
-            <a:ext cx="10515600" cy="4114800"/>
-          </a:xfrm>
-        </p:spPr>
-        <p:txBody>
-          <a:bodyPr/>
-          <a:lstStyle/>
-          <a:p>
-            <a:r>
-              <a:rPr sz="2400"/>
-              <a:t>光子の数はポアソン分布でばらつく</a:t>
-            </a:r>
-          </a:p>
-          <a:p>
-            <a:r>
-              <a:rPr sz="2400"/>
-              <a:t>尤度：ln L = Σ_i [ C_obs,i ln C_exp,i − C_exp,i ]</a:t>
-            </a:r>
-          </a:p>
-          <a:p>
-            <a:pPr lvl="1"/>
-            <a:r>
-              <a:rPr sz="2000"/>
-              <a:t>C_obs：観測した光子数、C_exp：予測した光子数</a:t>
-            </a:r>
-          </a:p>
-          <a:p>
-            <a:pPr lvl="1"/>
-            <a:r>
-              <a:rPr sz="2000"/>
-              <a:t>i：10° × 10° のセル（空をマス目に分ける）</a:t>
-            </a:r>
-          </a:p>
-          <a:p>
-            <a:r>
-              <a:rPr sz="2400"/>
-              <a:t>ln L が最大になる倍率 f を探す（最尤推定）</a:t>
-            </a:r>
-          </a:p>
-        </p:txBody>
-      </p:sp>
-      <p:pic>
-        <p:nvPicPr>
-          <p:cNvPr id="6" name="Picture 5" descr="fig_bin6_before_after_totani.png"/>
-          <p:cNvPicPr>
-            <a:picLocks noChangeAspect="1"/>
-          </p:cNvPicPr>
-          <p:nvPr/>
-        </p:nvPicPr>
-        <p:blipFill>
-          <a:blip r:embed="rId4"/>
-          <a:srcRect/>
-          <a:stretch>
-            <a:fillRect/>
-          </a:stretch>
-        </p:blipFill>
-        <p:spPr>
-          <a:xfrm>
-            <a:off x="2551565" y="3749403"/>
-            <a:ext cx="5751094" cy="3014367"/>
-          </a:xfrm>
-          <a:prstGeom prst="rect">
-            <a:avLst/>
-          </a:prstGeom>
-        </p:spPr>
-      </p:pic>
     </p:spTree>
   </p:cSld>
   <p:clrMapOvr>
@@ -12440,8 +14048,8 @@
           <a:lstStyle/>
           <a:p>
             <a:r>
-              <a:rPr sz="3400"/>
-              <a:t>尤度と MCMC の役割分担</a:t>
+              <a:rPr sz="3000"/>
+              <a:t>成分②：ガス（π⁰ 崩壊＋制動放射）</a:t>
             </a:r>
           </a:p>
         </p:txBody>
@@ -12458,8 +14066,8 @@
         </p:nvSpPr>
         <p:spPr>
           <a:xfrm>
-            <a:off x="841248" y="1463040"/>
-            <a:ext cx="10515600" cy="4114800"/>
+            <a:off x="548640" y="1371600"/>
+            <a:ext cx="6400800" cy="4297680"/>
           </a:xfrm>
         </p:spPr>
         <p:txBody>
@@ -12468,61 +14076,85 @@
           <a:p>
             <a:pPr/>
             <a:r>
-              <a:rPr sz="2400"/>
-              <a:t>尤度 ＝ 点数をつける係（たとえ：高度計）</a:t>
+              <a:rPr sz="1800"/>
+              <a:t>宇宙線が、星と星の間のガス（主に水素）にぶつかって出すガンマ線</a:t>
+            </a:r>
+          </a:p>
+          <a:p>
+            <a:pPr/>
+            <a:r>
+              <a:rPr sz="1800"/>
+              <a:t>π⁰ 崩壊</a:t>
             </a:r>
           </a:p>
           <a:p>
             <a:pPr lvl="1"/>
             <a:r>
-              <a:rPr sz="2000"/>
-              <a:t>倍率の組（f_gas, f_ics, …, f_halo）を入れると、予測と観測の合い具合 ln L を返す</a:t>
+              <a:rPr sz="1500"/>
+              <a:t>宇宙線の陽子が水素の原子核にぶつかる → π⁰ という粒子ができる → すぐ光子 2 個に壊れる</a:t>
             </a:r>
           </a:p>
           <a:p>
             <a:pPr/>
             <a:r>
-              <a:rPr sz="2400"/>
-              <a:t>MCMC ＝ 倍率を探す係（たとえ：霧の山を歩く人）</a:t>
+              <a:rPr sz="1800"/>
+              <a:t>制動放射</a:t>
             </a:r>
           </a:p>
           <a:p>
             <a:pPr lvl="1"/>
             <a:r>
-              <a:rPr sz="2000"/>
-              <a:t>倍率の組を少しずつ変えながら歩き、そのたびに尤度で点数をつける</a:t>
+              <a:rPr sz="1500"/>
+              <a:t>宇宙線の電子がガスのそばを通るときに曲げられ、ブレーキがかかって光を出す</a:t>
+            </a:r>
+          </a:p>
+          <a:p>
+            <a:pPr/>
+            <a:r>
+              <a:rPr sz="1800"/>
+              <a:t>型紙：GALPROP で計算。2 つの比は GALPROP の値に固定して 1 枚</a:t>
             </a:r>
           </a:p>
           <a:p>
             <a:pPr lvl="1"/>
             <a:r>
-              <a:rPr sz="2000"/>
-              <a:t>点数が上がる方へは必ず進み、下がる方へもたまに進む</a:t>
+              <a:rPr sz="1500"/>
+              <a:t>ガスの多い銀河面の近くと、ガス雲の模様が明るい</a:t>
             </a:r>
           </a:p>
           <a:p>
             <a:pPr/>
             <a:r>
-              <a:rPr sz="2400"/>
-              <a:t>歩き終わったら</a:t>
-            </a:r>
-          </a:p>
-          <a:p>
-            <a:pPr lvl="1"/>
-            <a:r>
-              <a:rPr sz="2000"/>
-              <a:t>歩いた中で点数が一番高かった組 → 最良の倍率（Totani と同じ）</a:t>
-            </a:r>
-          </a:p>
-          <a:p>
-            <a:pPr lvl="1"/>
-            <a:r>
-              <a:rPr sz="2000"/>
-              <a:t>歩いた範囲の広さ → 倍率の誤差</a:t>
-            </a:r>
-          </a:p>
-        </p:txBody>
-      </p:sp>
+              <a:rPr sz="1800"/>
+              <a:t>倍率：0 以上、最初は 1</a:t>
+            </a:r>
+          </a:p>
+        </p:txBody>
+      </p:sp>
+      <p:pic>
+        <p:nvPicPr>
+          <p:cNvPr id="4" name="Picture 3" descr="template_gas.png"/>
+          <p:cNvPicPr>
+            <a:picLocks noChangeAspect="1"/>
+          </p:cNvPicPr>
+          <p:nvPr/>
+        </p:nvPicPr>
+        <p:blipFill>
+          <a:blip r:embed="rId2"/>
+          <a:stretch>
+            <a:fillRect/>
+          </a:stretch>
+        </p:blipFill>
+        <p:spPr>
+          <a:xfrm>
+            <a:off x="7223760" y="1188720"/>
+            <a:ext cx="4314613" cy="4480560"/>
+          </a:xfrm>
+          <a:prstGeom prst="rect">
+            <a:avLst/>
+          </a:prstGeom>
+        </p:spPr>
+      </p:pic>
       <p:sp>
         <p:nvSpPr>
           <p:cNvPr id="8" name="TextBox 7">
@@ -12557,7 +14189,7 @@
             </a:r>
             <a:r>
               <a:rPr lang="en-US" sz="1400"/>
-              <a:t> T. Totani (2025), arXiv:2507.07209 §2.2</a:t>
+              <a:t> T. Totani (2025), arXiv:2507.07209 §2.3; GALPROP v54</a:t>
             </a:r>
             <a:endParaRPr lang="en-US"/>
           </a:p>
@@ -12572,7 +14204,7 @@
 </file>
 
 <file path=ppt/slides/slide7.xml><?xml version="1.0" encoding="utf-8"?>
-<p:sld xmlns:a="http://schemas.openxmlformats.org/drawingml/2006/main" xmlns:r="http://schemas.openxmlformats.org/officeDocument/2006/relationships" xmlns:p="http://schemas.openxmlformats.org/presentationml/2006/main">
+<p:sld xmlns:a="http://schemas.openxmlformats.org/drawingml/2006/main" xmlns:p="http://schemas.openxmlformats.org/presentationml/2006/main" xmlns:r="http://schemas.openxmlformats.org/officeDocument/2006/relationships">
   <p:cSld>
     <p:spTree>
       <p:nvGrpSpPr>
@@ -12580,14 +14212,7 @@
         <p:cNvGrpSpPr/>
         <p:nvPr/>
       </p:nvGrpSpPr>
-      <p:grpSpPr>
-        <a:xfrm>
-          <a:off x="0" y="0"/>
-          <a:ext cx="0" cy="0"/>
-          <a:chOff x="0" y="0"/>
-          <a:chExt cx="0" cy="0"/>
-        </a:xfrm>
-      </p:grpSpPr>
+      <p:grpSpPr/>
       <p:sp>
         <p:nvSpPr>
           <p:cNvPr id="2" name="Title 1"/>
@@ -12604,8 +14229,8 @@
           <a:lstStyle/>
           <a:p>
             <a:r>
-              <a:rPr sz="3400"/>
-              <a:t>手法③：有意度 σ の出し方</a:t>
+              <a:rPr sz="3000"/>
+              <a:t>成分③：ICS（逆コンプトン散乱）</a:t>
             </a:r>
           </a:p>
         </p:txBody>
@@ -12622,52 +14247,102 @@
         </p:nvSpPr>
         <p:spPr>
           <a:xfrm>
-            <a:off x="841248" y="1463040"/>
-            <a:ext cx="10515600" cy="4114800"/>
+            <a:off x="548640" y="1371600"/>
+            <a:ext cx="6400800" cy="4297680"/>
           </a:xfrm>
         </p:spPr>
         <p:txBody>
           <a:bodyPr/>
           <a:lstStyle/>
           <a:p>
-            <a:r>
-              <a:rPr sz="2400"/>
-              <a:t>ハロー「あり」と「なし」の 2 通りで当てはめる</a:t>
-            </a:r>
-          </a:p>
-          <a:p>
-            <a:r>
-              <a:rPr sz="2400"/>
-              <a:t>差 Δln L = ln L(あり) − ln L(なし)</a:t>
-            </a:r>
-          </a:p>
-          <a:p>
-            <a:r>
-              <a:rPr sz="2400"/>
-              <a:t>有意度 σ = √( 2 Δln L )</a:t>
-            </a:r>
-          </a:p>
-          <a:p>
-            <a:r>
-              <a:rPr sz="2400"/>
-              <a:t>根拠：Wilks の定理</a:t>
+            <a:pPr/>
+            <a:r>
+              <a:rPr sz="1800"/>
+              <a:t>宇宙線の電子が、まわりの光にぶつかってガンマ線に変える</a:t>
             </a:r>
           </a:p>
           <a:p>
             <a:pPr lvl="1"/>
             <a:r>
-              <a:rPr sz="2000"/>
-              <a:t>データが十分多いと、2Δln L は自由度 1 の χ² 分布に従う</a:t>
-            </a:r>
-          </a:p>
-          <a:p>
-            <a:r>
-              <a:rPr sz="2400"/>
-              <a:t>→ この定理が本当に成り立つかが、後で問題になる</a:t>
-            </a:r>
-          </a:p>
-        </p:txBody>
-      </p:sp>
+              <a:rPr sz="1500"/>
+              <a:t>ぶつかる光：星の光、ちりが出す赤外線、宇宙背景放射</a:t>
+            </a:r>
+          </a:p>
+          <a:p>
+            <a:pPr/>
+            <a:r>
+              <a:rPr sz="1800"/>
+              <a:t>たとえ：速いボール（電子）が軽いピンポン玉（光）をはね飛ばす</a:t>
+            </a:r>
+          </a:p>
+          <a:p>
+            <a:pPr lvl="1"/>
+            <a:r>
+              <a:rPr sz="1500"/>
+              <a:t>はね飛ばされたピンポン玉がガンマ線になる</a:t>
+            </a:r>
+          </a:p>
+          <a:p>
+            <a:pPr/>
+            <a:r>
+              <a:rPr sz="1800"/>
+              <a:t>星の光は銀河の中心ほど多い</a:t>
+            </a:r>
+          </a:p>
+          <a:p>
+            <a:pPr lvl="1"/>
+            <a:r>
+              <a:rPr sz="1500"/>
+              <a:t>→ 形は、銀河面と中心付近が明るく、なめらかに広がる</a:t>
+            </a:r>
+          </a:p>
+          <a:p>
+            <a:pPr/>
+            <a:r>
+              <a:rPr sz="1800"/>
+              <a:t>型紙：GALPROP で計算</a:t>
+            </a:r>
+          </a:p>
+          <a:p>
+            <a:pPr/>
+            <a:r>
+              <a:rPr sz="1800"/>
+              <a:t>倍率：0 以上、最初は 1</a:t>
+            </a:r>
+          </a:p>
+          <a:p>
+            <a:pPr/>
+            <a:r>
+              <a:rPr sz="1800"/>
+              <a:t>ハローと形が似ている（縮退の原因）</a:t>
+            </a:r>
+          </a:p>
+        </p:txBody>
+      </p:sp>
+      <p:pic>
+        <p:nvPicPr>
+          <p:cNvPr id="4" name="Picture 3" descr="template_ics.png"/>
+          <p:cNvPicPr>
+            <a:picLocks noChangeAspect="1"/>
+          </p:cNvPicPr>
+          <p:nvPr/>
+        </p:nvPicPr>
+        <p:blipFill>
+          <a:blip r:embed="rId2"/>
+          <a:stretch>
+            <a:fillRect/>
+          </a:stretch>
+        </p:blipFill>
+        <p:spPr>
+          <a:xfrm>
+            <a:off x="7223760" y="1188720"/>
+            <a:ext cx="4314613" cy="4480560"/>
+          </a:xfrm>
+          <a:prstGeom prst="rect">
+            <a:avLst/>
+          </a:prstGeom>
+        </p:spPr>
+      </p:pic>
       <p:sp>
         <p:nvSpPr>
           <p:cNvPr id="8" name="TextBox 7">
@@ -12702,7 +14377,7 @@
             </a:r>
             <a:r>
               <a:rPr lang="en-US" sz="1400"/>
-              <a:t> S. S. Wilks (1938), Ann. Math. Stat. 9, 60</a:t>
+              <a:t> T. Totani (2025), arXiv:2507.07209 §2.3; GALPROP v54</a:t>
             </a:r>
             <a:endParaRPr lang="en-US"/>
           </a:p>
@@ -12717,7 +14392,7 @@
 </file>
 
 <file path=ppt/slides/slide8.xml><?xml version="1.0" encoding="utf-8"?>
-<p:sld xmlns:a="http://schemas.openxmlformats.org/drawingml/2006/main" xmlns:r="http://schemas.openxmlformats.org/officeDocument/2006/relationships" xmlns:p="http://schemas.openxmlformats.org/presentationml/2006/main">
+<p:sld xmlns:a="http://schemas.openxmlformats.org/drawingml/2006/main" xmlns:p="http://schemas.openxmlformats.org/presentationml/2006/main" xmlns:r="http://schemas.openxmlformats.org/officeDocument/2006/relationships">
   <p:cSld>
     <p:spTree>
       <p:nvGrpSpPr>
@@ -12725,14 +14400,7 @@
         <p:cNvGrpSpPr/>
         <p:nvPr/>
       </p:nvGrpSpPr>
-      <p:grpSpPr>
-        <a:xfrm>
-          <a:off x="0" y="0"/>
-          <a:ext cx="0" cy="0"/>
-          <a:chOff x="0" y="0"/>
-          <a:chExt cx="0" cy="0"/>
-        </a:xfrm>
-      </p:grpSpPr>
+      <p:grpSpPr/>
       <p:sp>
         <p:nvSpPr>
           <p:cNvPr id="2" name="Title 1"/>
@@ -12749,8 +14417,8 @@
           <a:lstStyle/>
           <a:p>
             <a:r>
-              <a:rPr sz="3400"/>
-              <a:t>手法④：MCMC（最良値と誤差）</a:t>
+              <a:rPr sz="3000"/>
+              <a:t>成分④：点源</a:t>
             </a:r>
           </a:p>
         </p:txBody>
@@ -12767,53 +14435,102 @@
         </p:nvSpPr>
         <p:spPr>
           <a:xfrm>
-            <a:off x="841248" y="1463040"/>
-            <a:ext cx="10515600" cy="4114800"/>
+            <a:off x="548640" y="1371600"/>
+            <a:ext cx="6400800" cy="4297680"/>
           </a:xfrm>
         </p:spPr>
         <p:txBody>
           <a:bodyPr/>
           <a:lstStyle/>
           <a:p>
-            <a:r>
-              <a:rPr sz="2400"/>
-              <a:t>MCMC で、最良の倍率 f と、その誤差の両方を求める（Totani と同じ）</a:t>
-            </a:r>
-          </a:p>
-          <a:p>
-            <a:r>
-              <a:rPr sz="2400"/>
-              <a:t>MCMC：尤度に比例する確率で、パラメータの空間を歩き回る</a:t>
+            <a:pPr/>
+            <a:r>
+              <a:rPr sz="1800"/>
+              <a:t>一つ一つ位置が分かっている天体</a:t>
             </a:r>
           </a:p>
           <a:p>
             <a:pPr lvl="1"/>
             <a:r>
-              <a:rPr sz="2000"/>
-              <a:t>歩いた中で尤度が最大の点 = 最良値、歩いた跡の分布 → 誤差棒</a:t>
-            </a:r>
-          </a:p>
-          <a:p>
-            <a:r>
-              <a:rPr sz="2400"/>
-              <a:t>emcee を使用：32 本の歩行者 × 6000 歩</a:t>
+              <a:rPr sz="1500"/>
+              <a:t>パルサー（回転する中性子星）、ブレーザー（遠い銀河の中心）など</a:t>
+            </a:r>
+          </a:p>
+          <a:p>
+            <a:pPr/>
+            <a:r>
+              <a:rPr sz="1800"/>
+              <a:t>型紙：Fermi-LAT の天体カタログ（4FGL-DR4）から作る</a:t>
             </a:r>
           </a:p>
           <a:p>
             <a:pPr lvl="1"/>
             <a:r>
-              <a:rPr sz="2000"/>
-              <a:t>出発点は Totani と同じ初期値（点源・GALPROP = 1、他 = 0 など）</a:t>
-            </a:r>
-          </a:p>
-          <a:p>
-            <a:r>
-              <a:rPr sz="2400"/>
-              <a:t>有意度 σ も、ハローあり・なしそれぞれの MCMC で見つけた最大 ln L の差から出す</a:t>
-            </a:r>
-          </a:p>
-        </p:txBody>
-      </p:sp>
+              <a:rPr sz="1500"/>
+              <a:t>位置と、カタログに書かれた明るさのエネルギー変化</a:t>
+            </a:r>
+          </a:p>
+          <a:p>
+            <a:pPr lvl="1"/>
+            <a:r>
+              <a:rPr sz="1500"/>
+              <a:t>望遠鏡のぼやけ（PSF）で点を広げる。ぼやけはエネルギーで変わる</a:t>
+            </a:r>
+          </a:p>
+          <a:p>
+            <a:pPr/>
+            <a:r>
+              <a:rPr sz="1800"/>
+              <a:t>全部の点源をまとめて 1 枚、倍率 1 個</a:t>
+            </a:r>
+          </a:p>
+          <a:p>
+            <a:pPr/>
+            <a:r>
+              <a:rPr sz="1800"/>
+              <a:t>倍率：0 以上、最初は 1</a:t>
+            </a:r>
+          </a:p>
+          <a:p>
+            <a:pPr/>
+            <a:r>
+              <a:rPr sz="1800"/>
+              <a:t>大きく広がった天体（拡張源）は解析から外す</a:t>
+            </a:r>
+          </a:p>
+          <a:p>
+            <a:pPr lvl="1"/>
+            <a:r>
+              <a:rPr sz="1500"/>
+              <a:t>長半径の 2 倍の円（地図の白い丸）</a:t>
+            </a:r>
+          </a:p>
+        </p:txBody>
+      </p:sp>
+      <p:pic>
+        <p:nvPicPr>
+          <p:cNvPr id="4" name="Picture 3" descr="template_ps.png"/>
+          <p:cNvPicPr>
+            <a:picLocks noChangeAspect="1"/>
+          </p:cNvPicPr>
+          <p:nvPr/>
+        </p:nvPicPr>
+        <p:blipFill>
+          <a:blip r:embed="rId2"/>
+          <a:stretch>
+            <a:fillRect/>
+          </a:stretch>
+        </p:blipFill>
+        <p:spPr>
+          <a:xfrm>
+            <a:off x="7223760" y="1188720"/>
+            <a:ext cx="4314613" cy="4480560"/>
+          </a:xfrm>
+          <a:prstGeom prst="rect">
+            <a:avLst/>
+          </a:prstGeom>
+        </p:spPr>
+      </p:pic>
       <p:sp>
         <p:nvSpPr>
           <p:cNvPr id="8" name="TextBox 7">
@@ -12848,7 +14565,212 @@
             </a:r>
             <a:r>
               <a:rPr lang="en-US" sz="1400"/>
-              <a:t> D. Foreman-Mackey et al. (2013), PASP 125, 306</a:t>
+              <a:t> T. Totani (2025), arXiv:2507.07209 §2.3</a:t>
+            </a:r>
+            <a:endParaRPr lang="en-US"/>
+          </a:p>
+        </p:txBody>
+      </p:sp>
+    </p:spTree>
+  </p:cSld>
+  <p:clrMapOvr>
+    <a:masterClrMapping/>
+  </p:clrMapOvr>
+</p:sld>
+</file>
+
+<file path=ppt/slides/slide9.xml><?xml version="1.0" encoding="utf-8"?>
+<p:sld xmlns:a="http://schemas.openxmlformats.org/drawingml/2006/main" xmlns:p="http://schemas.openxmlformats.org/presentationml/2006/main" xmlns:r="http://schemas.openxmlformats.org/officeDocument/2006/relationships">
+  <p:cSld>
+    <p:spTree>
+      <p:nvGrpSpPr>
+        <p:cNvPr id="1" name=""/>
+        <p:cNvGrpSpPr/>
+        <p:nvPr/>
+      </p:nvGrpSpPr>
+      <p:grpSpPr/>
+      <p:sp>
+        <p:nvSpPr>
+          <p:cNvPr id="2" name="Title 1"/>
+          <p:cNvSpPr>
+            <a:spLocks noGrp="1"/>
+          </p:cNvSpPr>
+          <p:nvPr>
+            <p:ph type="title"/>
+          </p:nvPr>
+        </p:nvSpPr>
+        <p:spPr/>
+        <p:txBody>
+          <a:bodyPr/>
+          <a:lstStyle/>
+          <a:p>
+            <a:r>
+              <a:rPr sz="3000"/>
+              <a:t>成分⑤：Loop I</a:t>
+            </a:r>
+          </a:p>
+        </p:txBody>
+      </p:sp>
+      <p:sp>
+        <p:nvSpPr>
+          <p:cNvPr id="3" name="Content Placeholder 2"/>
+          <p:cNvSpPr>
+            <a:spLocks noGrp="1"/>
+          </p:cNvSpPr>
+          <p:nvPr>
+            <p:ph idx="1"/>
+          </p:nvPr>
+        </p:nvSpPr>
+        <p:spPr>
+          <a:xfrm>
+            <a:off x="548640" y="1371600"/>
+            <a:ext cx="6400800" cy="4297680"/>
+          </a:xfrm>
+        </p:spPr>
+        <p:txBody>
+          <a:bodyPr/>
+          <a:lstStyle/>
+          <a:p>
+            <a:pPr/>
+            <a:r>
+              <a:rPr sz="1800"/>
+              <a:t>電波で見える、空の 100° 以上に広がる巨大な輪っか</a:t>
+            </a:r>
+          </a:p>
+          <a:p>
+            <a:pPr lvl="1"/>
+            <a:r>
+              <a:rPr sz="1500"/>
+              <a:t>ガンマ線でも見えている</a:t>
+            </a:r>
+          </a:p>
+          <a:p>
+            <a:pPr/>
+            <a:r>
+              <a:rPr sz="1800"/>
+              <a:t>正体は未確定</a:t>
+            </a:r>
+          </a:p>
+          <a:p>
+            <a:pPr lvl="1"/>
+            <a:r>
+              <a:rPr sz="1500"/>
+              <a:t>近くの超新星の残骸か、銀河中心から吹き出したものか</a:t>
+            </a:r>
+          </a:p>
+          <a:p>
+            <a:pPr/>
+            <a:r>
+              <a:rPr sz="1800"/>
+              <a:t>型紙：近くの超新星の残骸とみなした形</a:t>
+            </a:r>
+          </a:p>
+          <a:p>
+            <a:pPr lvl="1"/>
+            <a:r>
+              <a:rPr sz="1500"/>
+              <a:t>半径 50〜100 pc の殻 2 つが、一様に光る</a:t>
+            </a:r>
+          </a:p>
+          <a:p>
+            <a:pPr lvl="1"/>
+            <a:r>
+              <a:rPr sz="1500"/>
+              <a:t>殻の位置と大きさは Fermi-LAT チームの値</a:t>
+            </a:r>
+          </a:p>
+          <a:p>
+            <a:pPr/>
+            <a:r>
+              <a:rPr sz="1800"/>
+              <a:t>2 つの殻に、別々の倍率（0 以上、最初は 0）</a:t>
+            </a:r>
+          </a:p>
+        </p:txBody>
+      </p:sp>
+      <p:pic>
+        <p:nvPicPr>
+          <p:cNvPr id="4" name="Picture 3" descr="template_loopI_a.png"/>
+          <p:cNvPicPr>
+            <a:picLocks noChangeAspect="1"/>
+          </p:cNvPicPr>
+          <p:nvPr/>
+        </p:nvPicPr>
+        <p:blipFill>
+          <a:blip r:embed="rId2"/>
+          <a:stretch>
+            <a:fillRect/>
+          </a:stretch>
+        </p:blipFill>
+        <p:spPr>
+          <a:xfrm>
+            <a:off x="7086600" y="1828800"/>
+            <a:ext cx="2468880" cy="2563837"/>
+          </a:xfrm>
+          <a:prstGeom prst="rect">
+            <a:avLst/>
+          </a:prstGeom>
+        </p:spPr>
+      </p:pic>
+      <p:pic>
+        <p:nvPicPr>
+          <p:cNvPr id="5" name="Picture 4" descr="template_loopI_b.png"/>
+          <p:cNvPicPr>
+            <a:picLocks noChangeAspect="1"/>
+          </p:cNvPicPr>
+          <p:nvPr/>
+        </p:nvPicPr>
+        <p:blipFill>
+          <a:blip r:embed="rId3"/>
+          <a:stretch>
+            <a:fillRect/>
+          </a:stretch>
+        </p:blipFill>
+        <p:spPr>
+          <a:xfrm>
+            <a:off x="9601200" y="1828800"/>
+            <a:ext cx="2468880" cy="2563837"/>
+          </a:xfrm>
+          <a:prstGeom prst="rect">
+            <a:avLst/>
+          </a:prstGeom>
+        </p:spPr>
+      </p:pic>
+      <p:sp>
+        <p:nvSpPr>
+          <p:cNvPr id="8" name="TextBox 7">
+            <a:extLst>
+              <a:ext uri="{FF2B5EF4-FFF2-40B4-BE49-F238E27FC236}">
+                <a16:creationId xmlns:a16="http://schemas.microsoft.com/office/drawing/2014/main" id="{F85CD606-E3CE-F314-B3EE-F3D7028115CB}"/>
+              </a:ext>
+            </a:extLst>
+          </p:cNvPr>
+          <p:cNvSpPr txBox="1"/>
+          <p:nvPr/>
+        </p:nvSpPr>
+        <p:spPr>
+          <a:xfrm>
+            <a:off x="5837182" y="5663239"/>
+            <a:ext cx="6093372" cy="923330"/>
+          </a:xfrm>
+          <a:prstGeom prst="rect">
+            <a:avLst/>
+          </a:prstGeom>
+          <a:noFill/>
+        </p:spPr>
+        <p:txBody>
+          <a:bodyPr wrap="square">
+            <a:spAutoFit/>
+          </a:bodyPr>
+          <a:lstStyle/>
+          <a:p>
+            <a:r>
+              <a:rPr lang="en-US" sz="1400" b="1"/>
+              <a:t>Reference:</a:t>
+            </a:r>
+            <a:r>
+              <a:rPr lang="en-US" sz="1400"/>
+              <a:t> T. Totani (2025), arXiv:2507.07209 §2.3 (殻の値は Fermi-LAT チームの論文)</a:t>
             </a:r>
             <a:endParaRPr lang="en-US"/>
           </a:p>

--- a/slides/2026-10-02_研究進捗報告_claude.pptx
+++ b/slides/2026-10-02_研究進捗報告_claude.pptx
@@ -19,6 +19,7 @@
     <p:sldId id="305" r:id="rId55"/>
     <p:sldId id="306" r:id="rId56"/>
     <p:sldId id="307" r:id="rId57"/>
+    <p:sldId id="308" r:id="rId58"/>
     <p:sldId id="260" r:id="rId6"/>
     <p:sldId id="294" r:id="rId47"/>
     <p:sldId id="261" r:id="rId7"/>
@@ -27,6 +28,7 @@
     <p:sldId id="296" r:id="rId49"/>
     <p:sldId id="297" r:id="rId50"/>
     <p:sldId id="298" r:id="rId51"/>
+    <p:sldId id="309" r:id="rId59"/>
     <p:sldId id="299" r:id="rId52"/>
     <p:sldId id="300" r:id="rId53"/>
     <p:sldId id="263" r:id="rId9"/>
@@ -36,7 +38,6 @@
     <p:sldId id="267" r:id="rId13"/>
     <p:sldId id="268" r:id="rId14"/>
     <p:sldId id="269" r:id="rId15"/>
-    <p:sldId id="270" r:id="rId16"/>
     <p:sldId id="271" r:id="rId17"/>
     <p:sldId id="272" r:id="rId18"/>
     <p:sldId id="273" r:id="rId19"/>
@@ -1010,86 +1011,6 @@
 </p:notes>
 </file>
 
-<file path=ppt/notesSlides/notesSlide14.xml><?xml version="1.0" encoding="utf-8"?>
-<p:notes xmlns:a="http://schemas.openxmlformats.org/drawingml/2006/main" xmlns:r="http://schemas.openxmlformats.org/officeDocument/2006/relationships" xmlns:p="http://schemas.openxmlformats.org/presentationml/2006/main">
-  <p:cSld>
-    <p:spTree>
-      <p:nvGrpSpPr>
-        <p:cNvPr id="1" name=""/>
-        <p:cNvGrpSpPr/>
-        <p:nvPr/>
-      </p:nvGrpSpPr>
-      <p:grpSpPr>
-        <a:xfrm>
-          <a:off x="0" y="0"/>
-          <a:ext cx="0" cy="0"/>
-          <a:chOff x="0" y="0"/>
-          <a:chExt cx="0" cy="0"/>
-        </a:xfrm>
-      </p:grpSpPr>
-      <p:sp>
-        <p:nvSpPr>
-          <p:cNvPr id="2" name="Slide Image Placeholder 1"/>
-          <p:cNvSpPr>
-            <a:spLocks noGrp="1" noRot="1" noChangeAspect="1"/>
-          </p:cNvSpPr>
-          <p:nvPr>
-            <p:ph type="sldImg" idx="2"/>
-          </p:nvPr>
-        </p:nvSpPr>
-        <p:spPr/>
-      </p:sp>
-      <p:sp>
-        <p:nvSpPr>
-          <p:cNvPr id="3" name="Notes Placeholder 2"/>
-          <p:cNvSpPr>
-            <a:spLocks noGrp="1"/>
-          </p:cNvSpPr>
-          <p:nvPr>
-            <p:ph type="body" sz="quarter" idx="3"/>
-          </p:nvPr>
-        </p:nvSpPr>
-        <p:spPr/>
-        <p:txBody>
-          <a:bodyPr/>
-          <a:lstStyle/>
-          <a:p>
-            <a:r>
-              <a:t>結果ファイルに「どの状態のコードで計算したか」の記録が無かった。</a:t>
-            </a:r>
-          </a:p>
-          <a:p>
-            <a:r>
-              <a:t>10/1 に同じ計算を 2 回して、テンプレート・尤度・全パラメータが一致することを確認。</a:t>
-            </a:r>
-          </a:p>
-          <a:p>
-            <a:r>
-              <a:t>有意度は 19.1σ → 19.0σ でほぼ同じ。10/2 に最良値の求め方を Totani と同じ (MCMC) に直して計算し直し、19.5σ (クラウド)。全 13 ビンで差は 1σ 未満。</a:t>
-            </a:r>
-          </a:p>
-        </p:txBody>
-      </p:sp>
-      <p:sp>
-        <p:nvSpPr>
-          <p:cNvPr id="4" name="Slide Number Placeholder 3"/>
-          <p:cNvSpPr>
-            <a:spLocks noGrp="1"/>
-          </p:cNvSpPr>
-          <p:nvPr>
-            <p:ph type="sldNum" sz="quarter" idx="5"/>
-          </p:nvPr>
-        </p:nvSpPr>
-        <p:spPr/>
-      </p:sp>
-    </p:spTree>
-  </p:cSld>
-  <p:clrMapOvr>
-    <a:masterClrMapping/>
-  </p:clrMapOvr>
-</p:notes>
-</file>
-
 <file path=ppt/notesSlides/notesSlide15.xml><?xml version="1.0" encoding="utf-8"?>
 <p:notes xmlns:a="http://schemas.openxmlformats.org/drawingml/2006/main" xmlns:r="http://schemas.openxmlformats.org/officeDocument/2006/relationships" xmlns:p="http://schemas.openxmlformats.org/presentationml/2006/main">
   <p:cSld>
@@ -3781,6 +3702,16 @@
               <a:t>スクショ候補: 一番高い足あとを探す行 (879〜880 行)、誤差の 16〜84% (926 行)、有意度 (910 行)。コードは code/mcmc_fit_all_bins.py (Totani 方式の修正 cloud_reports/2026-10-02_totani_bestfit.patch を当てた後の行番号)。</a:t>
             </a:r>
           </a:p>
+          <a:p>
+            <a:r>
+              <a:t>なぜ最初を捨てるか: 出発点は Totani と同じ初期値で、山のふもとにある。最初のうちは頂上へ登っている途中なので、その足あとは「山の形」を表していない。だから誤差の計算からは外す (バーンイン)。一番高い足あと (最良値) は、捨てた分も含めて全部の中から探している。</a:t>
+            </a:r>
+          </a:p>
+          <a:p>
+            <a:r>
+              <a:t>400 歩は本研究のコードで決めた値 (Totani の論文には書かれていない)。自己相関時間 τ ≈ 650 歩より短いので、誤差を出すには捨てる歩数を増やすほうが安全。最良値と有意度には影響しない。</a:t>
+            </a:r>
+          </a:p>
         </p:txBody>
       </p:sp>
       <p:sp>
@@ -4148,6 +4079,81 @@
 </p:notes>
 </file>
 
+<file path=ppt/notesSlides/notesSlide49.xml><?xml version="1.0" encoding="utf-8"?>
+<p:notes xmlns:a="http://schemas.openxmlformats.org/drawingml/2006/main" xmlns:p="http://schemas.openxmlformats.org/presentationml/2006/main" xmlns:r="http://schemas.openxmlformats.org/officeDocument/2006/relationships">
+  <p:cSld>
+    <p:spTree>
+      <p:nvGrpSpPr>
+        <p:cNvPr id="1" name=""/>
+        <p:cNvGrpSpPr/>
+        <p:nvPr/>
+      </p:nvGrpSpPr>
+      <p:grpSpPr>
+        <a:xfrm>
+          <a:off x="0" y="0"/>
+          <a:ext cx="0" cy="0"/>
+          <a:chOff x="0" y="0"/>
+          <a:chExt cx="0" cy="0"/>
+        </a:xfrm>
+      </p:grpSpPr>
+      <p:sp>
+        <p:nvSpPr>
+          <p:cNvPr id="2" name="Slide Image Placeholder 1"/>
+          <p:cNvSpPr>
+            <a:spLocks noGrp="1"/>
+          </p:cNvSpPr>
+          <p:nvPr>
+            <p:ph type="sldImg" idx="2"/>
+          </p:nvPr>
+        </p:nvSpPr>
+        <p:spPr/>
+      </p:sp>
+      <p:sp>
+        <p:nvSpPr>
+          <p:cNvPr id="3" name="Notes Placeholder 2"/>
+          <p:cNvSpPr>
+            <a:spLocks noGrp="1"/>
+          </p:cNvSpPr>
+          <p:nvPr>
+            <p:ph type="body" idx="3" sz="quarter"/>
+          </p:nvPr>
+        </p:nvSpPr>
+        <p:spPr/>
+        <p:txBody>
+          <a:bodyPr/>
+          <a:lstStyle/>
+          <a:p>
+            <a:r>
+              <a:t>この後の尤度・有意度・MCMC のスライドは、全部「係数 9 個の決め方」の説明。難しい言葉が出てきたら、このスライドに戻って「今どの行の話か」を確認する。</a:t>
+            </a:r>
+          </a:p>
+          <a:p>
+            <a:r>
+              <a:t>型紙 = 前の 7 枚で見た地図。係数 = その地図を何倍して足すか。</a:t>
+            </a:r>
+          </a:p>
+        </p:txBody>
+      </p:sp>
+      <p:sp>
+        <p:nvSpPr>
+          <p:cNvPr id="4" name="Slide Number Placeholder 3"/>
+          <p:cNvSpPr>
+            <a:spLocks noGrp="1"/>
+          </p:cNvSpPr>
+          <p:nvPr>
+            <p:ph type="sldNum" idx="5" sz="quarter"/>
+          </p:nvPr>
+        </p:nvSpPr>
+        <p:spPr/>
+      </p:sp>
+    </p:spTree>
+  </p:cSld>
+  <p:clrMapOvr>
+    <a:masterClrMapping/>
+  </p:clrMapOvr>
+</p:notes>
+</file>
+
 <file path=ppt/notesSlides/notesSlide5.xml><?xml version="1.0" encoding="utf-8"?>
 <p:notes xmlns:a="http://schemas.openxmlformats.org/drawingml/2006/main" xmlns:r="http://schemas.openxmlformats.org/officeDocument/2006/relationships" xmlns:p="http://schemas.openxmlformats.org/presentationml/2006/main">
   <p:cSld>
@@ -4206,6 +4212,11 @@
               <a:t>定理の前提: データが多い (漸近的)、モデルが正しい、など。モデル (型紙) が間違っていると成り立たない。</a:t>
             </a:r>
           </a:p>
+          <a:p>
+            <a:r>
+              <a:t>Totani との関係: Totani (2025) Fig. 9 はハローあり・なしの ln L の差 (Δln L) を示しており、本文の 13–19σ はそれを σ = √(2Δln L) で σ に直した値。Totani は「Wilks の定理」という言葉は書いていないが、この換算はガンマ線天文学で標準 (2Δln L は TS = test statistic と呼ばれ、EGRET の解析 Mattox et al. 1996, ApJ 461, 396 から使われている)。本研究は Totani と同じ換算を使っている。</a:t>
+            </a:r>
+          </a:p>
         </p:txBody>
       </p:sp>
       <p:sp>
@@ -4216,6 +4227,101 @@
           </p:cNvSpPr>
           <p:nvPr>
             <p:ph type="sldNum" sz="quarter" idx="5"/>
+          </p:nvPr>
+        </p:nvSpPr>
+        <p:spPr/>
+      </p:sp>
+    </p:spTree>
+  </p:cSld>
+  <p:clrMapOvr>
+    <a:masterClrMapping/>
+  </p:clrMapOvr>
+</p:notes>
+</file>
+
+<file path=ppt/notesSlides/notesSlide50.xml><?xml version="1.0" encoding="utf-8"?>
+<p:notes xmlns:a="http://schemas.openxmlformats.org/drawingml/2006/main" xmlns:p="http://schemas.openxmlformats.org/presentationml/2006/main" xmlns:r="http://schemas.openxmlformats.org/officeDocument/2006/relationships">
+  <p:cSld>
+    <p:spTree>
+      <p:nvGrpSpPr>
+        <p:cNvPr id="1" name=""/>
+        <p:cNvGrpSpPr/>
+        <p:nvPr/>
+      </p:nvGrpSpPr>
+      <p:grpSpPr>
+        <a:xfrm>
+          <a:off x="0" y="0"/>
+          <a:ext cx="0" cy="0"/>
+          <a:chOff x="0" y="0"/>
+          <a:chExt cx="0" cy="0"/>
+        </a:xfrm>
+      </p:grpSpPr>
+      <p:sp>
+        <p:nvSpPr>
+          <p:cNvPr id="2" name="Slide Image Placeholder 1"/>
+          <p:cNvSpPr>
+            <a:spLocks noGrp="1"/>
+          </p:cNvSpPr>
+          <p:nvPr>
+            <p:ph type="sldImg" idx="2"/>
+          </p:nvPr>
+        </p:nvSpPr>
+        <p:spPr/>
+      </p:sp>
+      <p:sp>
+        <p:nvSpPr>
+          <p:cNvPr id="3" name="Notes Placeholder 2"/>
+          <p:cNvSpPr>
+            <a:spLocks noGrp="1"/>
+          </p:cNvSpPr>
+          <p:nvPr>
+            <p:ph type="body" idx="3" sz="quarter"/>
+          </p:nvPr>
+        </p:nvSpPr>
+        <p:spPr/>
+        <p:txBody>
+          <a:bodyPr/>
+          <a:lstStyle/>
+          <a:p>
+            <a:r>
+              <a:t>どの歩き方でも、正しく長く歩けば足あとの分布は同じ山の形 (事後分布) になる。違うのは、歩く速さ (効率) と、どんな山が得意か。</a:t>
+            </a:r>
+          </a:p>
+          <a:p>
+            <a:r>
+              <a:t>ギブス法: 9 個の倍率のうち 1 個だけを動かし、残り 8 個は止めておく。これを順番にくり返す。</a:t>
+            </a:r>
+          </a:p>
+          <a:p>
+            <a:r>
+              <a:t>ハミルトニアン MC (HMC): 山の傾き (尤度の微分) を使って、遠くまで一気に動く。パラメータが多いときに強い。</a:t>
+            </a:r>
+          </a:p>
+          <a:p>
+            <a:r>
+              <a:t>焼きなまし法: 金属をゆっくり冷やす「焼きなまし」が名前の由来。最初は下りにもよく進み、だんだん進みにくくして、最後は頂上で止まる。最良値を探す道具で、誤差は出ない。</a:t>
+            </a:r>
+          </a:p>
+          <a:p>
+            <a:r>
+              <a:t>歩けているかの確認 (歩き方の種類ではない): 受理率 (足を出したうち、実際に移った割合。emcee では 0.2〜0.5 くらいが目安。今回の 20.8 GeV は 0.42)、自己相関時間 τ (何歩で前の場所を忘れるか)。</a:t>
+            </a:r>
+          </a:p>
+          <a:p>
+            <a:r>
+              <a:t>emcee: Foreman-Mackey et al. (2013) の Python ライブラリ。中身は Goodman &amp; Weare (2010) のアンサンブル法 (ストレッチ移動)。歩く人数・歩数・捨てる歩数は Totani の論文に書かれていないので、本研究で決めた (32 人・6000 歩・400 歩)。</a:t>
+            </a:r>
+          </a:p>
+        </p:txBody>
+      </p:sp>
+      <p:sp>
+        <p:nvSpPr>
+          <p:cNvPr id="4" name="Slide Number Placeholder 3"/>
+          <p:cNvSpPr>
+            <a:spLocks noGrp="1"/>
+          </p:cNvSpPr>
+          <p:nvPr>
+            <p:ph type="sldNum" idx="5" sz="quarter"/>
           </p:nvPr>
         </p:nvSpPr>
         <p:spPr/>
@@ -4519,11 +4625,6 @@
           <a:p>
             <a:r>
               <a:t>② 何も無い空 23 か所で同じ解析をした (2026-07-31)。</a:t>
-            </a:r>
-          </a:p>
-          <a:p>
-            <a:r>
-              <a:t>③ 同じ設定で計算し直しても一致しなかった。</a:t>
             </a:r>
           </a:p>
         </p:txBody>
@@ -8246,6 +8347,109 @@
 </file>
 
 <file path=ppt/slides/slide12.xml><?xml version="1.0" encoding="utf-8"?>
+<p:sld xmlns:a="http://schemas.openxmlformats.org/drawingml/2006/main" xmlns:p="http://schemas.openxmlformats.org/presentationml/2006/main" xmlns:r="http://schemas.openxmlformats.org/officeDocument/2006/relationships">
+  <p:cSld>
+    <p:spTree>
+      <p:nvGrpSpPr>
+        <p:cNvPr id="1" name=""/>
+        <p:cNvGrpSpPr/>
+        <p:nvPr/>
+      </p:nvGrpSpPr>
+      <p:grpSpPr/>
+      <p:sp>
+        <p:nvSpPr>
+          <p:cNvPr id="2" name="Title 1"/>
+          <p:cNvSpPr>
+            <a:spLocks noGrp="1"/>
+          </p:cNvSpPr>
+          <p:nvPr>
+            <p:ph type="title"/>
+          </p:nvPr>
+        </p:nvSpPr>
+        <p:spPr/>
+        <p:txBody>
+          <a:bodyPr/>
+          <a:lstStyle/>
+          <a:p>
+            <a:r>
+              <a:rPr sz="3000"/>
+              <a:t>ここからやること：係数 9 個を決めるだけ</a:t>
+            </a:r>
+          </a:p>
+        </p:txBody>
+      </p:sp>
+      <p:sp>
+        <p:nvSpPr>
+          <p:cNvPr id="3" name="Content Placeholder 2"/>
+          <p:cNvSpPr>
+            <a:spLocks noGrp="1"/>
+          </p:cNvSpPr>
+          <p:nvPr>
+            <p:ph idx="1"/>
+          </p:nvPr>
+        </p:nvSpPr>
+        <p:spPr>
+          <a:xfrm>
+            <a:off x="548640" y="1371600"/>
+            <a:ext cx="10789920" cy="4297680"/>
+          </a:xfrm>
+        </p:spPr>
+        <p:txBody>
+          <a:bodyPr/>
+          <a:lstStyle/>
+          <a:p>
+            <a:pPr/>
+            <a:r>
+              <a:rPr sz="2600"/>
+              <a:t>予測 ＝ f₁ × 型紙₁ ＋ f₂ × 型紙₂ ＋ … ＋ f₉ × 型紙₉</a:t>
+            </a:r>
+          </a:p>
+          <a:p>
+            <a:pPr lvl="1"/>
+            <a:r>
+              <a:rPr sz="2200"/>
+              <a:t>型紙は固定。動かすのは係数（倍率）9 個だけ</a:t>
+            </a:r>
+          </a:p>
+          <a:p>
+            <a:pPr/>
+            <a:r>
+              <a:rPr sz="2600"/>
+              <a:t>尤度：その係数 9 個が「どれだけ良いか」の点数</a:t>
+            </a:r>
+          </a:p>
+          <a:p>
+            <a:pPr/>
+            <a:r>
+              <a:rPr sz="2600"/>
+              <a:t>MCMC：良い係数 9 個を探す方法</a:t>
+            </a:r>
+          </a:p>
+          <a:p>
+            <a:pPr/>
+            <a:r>
+              <a:rPr sz="2600"/>
+              <a:t>最良値：見つかった一番良い係数 9 個</a:t>
+            </a:r>
+          </a:p>
+          <a:p>
+            <a:pPr/>
+            <a:r>
+              <a:rPr sz="2600"/>
+              <a:t>誤差：その係数が「どこまでずれても十分良いか」</a:t>
+            </a:r>
+          </a:p>
+        </p:txBody>
+      </p:sp>
+    </p:spTree>
+  </p:cSld>
+  <p:clrMapOvr>
+    <a:masterClrMapping/>
+  </p:clrMapOvr>
+</p:sld>
+</file>
+
+<file path=ppt/slides/slide13.xml><?xml version="1.0" encoding="utf-8"?>
 <p:sld xmlns:a="http://schemas.openxmlformats.org/drawingml/2006/main" xmlns:r="http://schemas.openxmlformats.org/officeDocument/2006/relationships" xmlns:p="http://schemas.openxmlformats.org/presentationml/2006/main">
   <p:cSld>
     <p:spTree>
@@ -8370,7 +8574,7 @@
 </p:sld>
 </file>
 
-<file path=ppt/slides/slide13.xml><?xml version="1.0" encoding="utf-8"?>
+<file path=ppt/slides/slide14.xml><?xml version="1.0" encoding="utf-8"?>
 <p:sld xmlns:a="http://schemas.openxmlformats.org/drawingml/2006/main" xmlns:p="http://schemas.openxmlformats.org/presentationml/2006/main" xmlns:r="http://schemas.openxmlformats.org/officeDocument/2006/relationships">
   <p:cSld>
     <p:spTree>
@@ -8514,151 +8718,6 @@
             <a:r>
               <a:rPr lang="en-US" sz="1400"/>
               <a:t> T. Totani (2025), arXiv:2507.07209 §2.2</a:t>
-            </a:r>
-            <a:endParaRPr lang="en-US"/>
-          </a:p>
-        </p:txBody>
-      </p:sp>
-    </p:spTree>
-  </p:cSld>
-  <p:clrMapOvr>
-    <a:masterClrMapping/>
-  </p:clrMapOvr>
-</p:sld>
-</file>
-
-<file path=ppt/slides/slide14.xml><?xml version="1.0" encoding="utf-8"?>
-<p:sld xmlns:a="http://schemas.openxmlformats.org/drawingml/2006/main" xmlns:r="http://schemas.openxmlformats.org/officeDocument/2006/relationships" xmlns:p="http://schemas.openxmlformats.org/presentationml/2006/main">
-  <p:cSld>
-    <p:spTree>
-      <p:nvGrpSpPr>
-        <p:cNvPr id="1" name=""/>
-        <p:cNvGrpSpPr/>
-        <p:nvPr/>
-      </p:nvGrpSpPr>
-      <p:grpSpPr>
-        <a:xfrm>
-          <a:off x="0" y="0"/>
-          <a:ext cx="0" cy="0"/>
-          <a:chOff x="0" y="0"/>
-          <a:chExt cx="0" cy="0"/>
-        </a:xfrm>
-      </p:grpSpPr>
-      <p:sp>
-        <p:nvSpPr>
-          <p:cNvPr id="2" name="Title 1"/>
-          <p:cNvSpPr>
-            <a:spLocks noGrp="1"/>
-          </p:cNvSpPr>
-          <p:nvPr>
-            <p:ph type="title"/>
-          </p:nvPr>
-        </p:nvSpPr>
-        <p:spPr/>
-        <p:txBody>
-          <a:bodyPr/>
-          <a:lstStyle/>
-          <a:p>
-            <a:r>
-              <a:rPr sz="3400"/>
-              <a:t>手法③：有意度 σ の出し方</a:t>
-            </a:r>
-          </a:p>
-        </p:txBody>
-      </p:sp>
-      <p:sp>
-        <p:nvSpPr>
-          <p:cNvPr id="3" name="Content Placeholder 2"/>
-          <p:cNvSpPr>
-            <a:spLocks noGrp="1"/>
-          </p:cNvSpPr>
-          <p:nvPr>
-            <p:ph idx="1"/>
-          </p:nvPr>
-        </p:nvSpPr>
-        <p:spPr>
-          <a:xfrm>
-            <a:off x="841248" y="1463040"/>
-            <a:ext cx="10515600" cy="4114800"/>
-          </a:xfrm>
-        </p:spPr>
-        <p:txBody>
-          <a:bodyPr/>
-          <a:lstStyle/>
-          <a:p>
-            <a:r>
-              <a:rPr sz="2400"/>
-              <a:t>ハロー「あり」と「なし」の 2 通りで当てはめる</a:t>
-            </a:r>
-          </a:p>
-          <a:p>
-            <a:r>
-              <a:rPr sz="2400"/>
-              <a:t>差 Δln L = ln L(あり) − ln L(なし)</a:t>
-            </a:r>
-          </a:p>
-          <a:p>
-            <a:r>
-              <a:rPr sz="2400"/>
-              <a:t>有意度 σ = √( 2 Δln L )</a:t>
-            </a:r>
-          </a:p>
-          <a:p>
-            <a:r>
-              <a:rPr sz="2400"/>
-              <a:t>根拠：Wilks の定理</a:t>
-            </a:r>
-          </a:p>
-          <a:p>
-            <a:pPr lvl="1"/>
-            <a:r>
-              <a:rPr sz="2000"/>
-              <a:t>データが十分多いと、2Δln L は自由度 1 の χ² 分布に従う</a:t>
-            </a:r>
-          </a:p>
-          <a:p>
-            <a:r>
-              <a:rPr sz="2400"/>
-              <a:t>→ この定理が本当に成り立つかが、後で問題になる</a:t>
-            </a:r>
-          </a:p>
-        </p:txBody>
-      </p:sp>
-      <p:sp>
-        <p:nvSpPr>
-          <p:cNvPr id="8" name="TextBox 7">
-            <a:extLst>
-              <a:ext uri="{FF2B5EF4-FFF2-40B4-BE49-F238E27FC236}">
-                <a16:creationId xmlns:a16="http://schemas.microsoft.com/office/drawing/2014/main" id="{F85CD606-E3CE-F314-B3EE-F3D7028115CB}"/>
-              </a:ext>
-            </a:extLst>
-          </p:cNvPr>
-          <p:cNvSpPr txBox="1"/>
-          <p:nvPr/>
-        </p:nvSpPr>
-        <p:spPr>
-          <a:xfrm>
-            <a:off x="5837182" y="5663239"/>
-            <a:ext cx="6093372" cy="923330"/>
-          </a:xfrm>
-          <a:prstGeom prst="rect">
-            <a:avLst/>
-          </a:prstGeom>
-          <a:noFill/>
-        </p:spPr>
-        <p:txBody>
-          <a:bodyPr wrap="square">
-            <a:spAutoFit/>
-          </a:bodyPr>
-          <a:lstStyle/>
-          <a:p>
-            <a:r>
-              <a:rPr lang="en-US" sz="1400" b="1"/>
-              <a:t>Reference:</a:t>
-            </a:r>
-            <a:r>
-              <a:rPr lang="en-US" sz="1400"/>
-              <a:t> S. S. Wilks (1938), Ann. Math. Stat. 9, 60</a:t>
             </a:r>
             <a:endParaRPr lang="en-US"/>
           </a:p>
@@ -8706,7 +8765,7 @@
           <a:p>
             <a:r>
               <a:rPr sz="3400"/>
-              <a:t>手法④：MCMC（最良値と誤差）</a:t>
+              <a:t>手法③：有意度 σ の出し方</a:t>
             </a:r>
           </a:p>
         </p:txBody>
@@ -8733,39 +8792,38 @@
           <a:p>
             <a:r>
               <a:rPr sz="2400"/>
-              <a:t>MCMC で、最良の倍率 f と、その誤差の両方を求める（Totani と同じ）</a:t>
+              <a:t>ハロー「あり」と「なし」の 2 通りで当てはめる</a:t>
             </a:r>
           </a:p>
           <a:p>
             <a:r>
               <a:rPr sz="2400"/>
-              <a:t>MCMC：尤度に比例する確率で、パラメータの空間を歩き回る</a:t>
+              <a:t>差 Δln L = ln L(あり) − ln L(なし)</a:t>
+            </a:r>
+          </a:p>
+          <a:p>
+            <a:r>
+              <a:rPr sz="2400"/>
+              <a:t>有意度 σ = √( 2 Δln L )</a:t>
+            </a:r>
+          </a:p>
+          <a:p>
+            <a:r>
+              <a:rPr sz="2400"/>
+              <a:t>根拠：Wilks の定理（ガンマ線天文学の標準の換算。Totani の 13–19σ も同じ）</a:t>
             </a:r>
           </a:p>
           <a:p>
             <a:pPr lvl="1"/>
             <a:r>
               <a:rPr sz="2000"/>
-              <a:t>歩いた中で尤度が最大の点 = 最良値、歩いた跡の分布 → 誤差棒</a:t>
+              <a:t>データが十分多いと、2Δln L は自由度 1 の χ² 分布に従う</a:t>
             </a:r>
           </a:p>
           <a:p>
             <a:r>
               <a:rPr sz="2400"/>
-              <a:t>emcee を使用：32 本の歩行者 × 6000 歩</a:t>
-            </a:r>
-          </a:p>
-          <a:p>
-            <a:pPr lvl="1"/>
-            <a:r>
-              <a:rPr sz="2000"/>
-              <a:t>出発点は Totani と同じ初期値（点源・GALPROP = 1、他 = 0 など）</a:t>
-            </a:r>
-          </a:p>
-          <a:p>
-            <a:r>
-              <a:rPr sz="2400"/>
-              <a:t>有意度 σ も、ハローあり・なしそれぞれの MCMC で見つけた最大 ln L の差から出す</a:t>
+              <a:t>→ この定理が本当に成り立つかが、後で問題になる</a:t>
             </a:r>
           </a:p>
         </p:txBody>
@@ -8804,7 +8862,7 @@
             </a:r>
             <a:r>
               <a:rPr lang="en-US" sz="1400"/>
-              <a:t> D. Foreman-Mackey et al. (2013), PASP 125, 306</a:t>
+              <a:t> S. S. Wilks (1938), Ann. Math. Stat. 9, 60</a:t>
             </a:r>
             <a:endParaRPr lang="en-US"/>
           </a:p>
@@ -8819,7 +8877,7 @@
 </file>
 
 <file path=ppt/slides/slide16.xml><?xml version="1.0" encoding="utf-8"?>
-<p:sld xmlns:a="http://schemas.openxmlformats.org/drawingml/2006/main" xmlns:p="http://schemas.openxmlformats.org/presentationml/2006/main" xmlns:r="http://schemas.openxmlformats.org/officeDocument/2006/relationships">
+<p:sld xmlns:a="http://schemas.openxmlformats.org/drawingml/2006/main" xmlns:r="http://schemas.openxmlformats.org/officeDocument/2006/relationships" xmlns:p="http://schemas.openxmlformats.org/presentationml/2006/main">
   <p:cSld>
     <p:spTree>
       <p:nvGrpSpPr>
@@ -8827,7 +8885,14 @@
         <p:cNvGrpSpPr/>
         <p:nvPr/>
       </p:nvGrpSpPr>
-      <p:grpSpPr/>
+      <p:grpSpPr>
+        <a:xfrm>
+          <a:off x="0" y="0"/>
+          <a:ext cx="0" cy="0"/>
+          <a:chOff x="0" y="0"/>
+          <a:chExt cx="0" cy="0"/>
+        </a:xfrm>
+      </p:grpSpPr>
       <p:sp>
         <p:nvSpPr>
           <p:cNvPr id="2" name="Title 1"/>
@@ -8844,8 +8909,8 @@
           <a:lstStyle/>
           <a:p>
             <a:r>
-              <a:rPr sz="3000"/>
-              <a:t>MCMC をたとえで見る：霧の山を歩く</a:t>
+              <a:rPr sz="3400"/>
+              <a:t>手法④：MCMC（最良値と誤差）</a:t>
             </a:r>
           </a:p>
         </p:txBody>
@@ -8862,82 +8927,90 @@
         </p:nvSpPr>
         <p:spPr>
           <a:xfrm>
-            <a:off x="548640" y="1371600"/>
-            <a:ext cx="5669280" cy="4297680"/>
+            <a:off x="841248" y="1463040"/>
+            <a:ext cx="10515600" cy="4114800"/>
           </a:xfrm>
         </p:spPr>
         <p:txBody>
           <a:bodyPr/>
           <a:lstStyle/>
           <a:p>
-            <a:pPr/>
-            <a:r>
-              <a:rPr sz="1800"/>
-              <a:t>山の上の「場所」 → 倍率の組 θ</a:t>
+            <a:r>
+              <a:rPr sz="2400"/>
+              <a:t>MCMC で、最良の倍率 f と、その誤差の両方を求める（Totani と同じ）</a:t>
+            </a:r>
+          </a:p>
+          <a:p>
+            <a:r>
+              <a:rPr sz="2400"/>
+              <a:t>MCMC：尤度に比例する確率で、パラメータの空間を歩き回る</a:t>
             </a:r>
           </a:p>
           <a:p>
             <a:pPr lvl="1"/>
             <a:r>
-              <a:rPr sz="1500"/>
-              <a:t>θ = (f_iso, f_gas, f_ics, …, f_halo)。9 個あるので 9 次元の山</a:t>
-            </a:r>
-          </a:p>
-          <a:p>
-            <a:pPr/>
-            <a:r>
-              <a:rPr sz="1800"/>
-              <a:t>その場所の「高さ」 → 点数（事後分布）</a:t>
-            </a:r>
-          </a:p>
-          <a:p>
-            <a:pPr/>
-            <a:r>
-              <a:rPr sz="1800"/>
-              <a:t>「高度計」 → 尤度の計算（手法② の ln L）</a:t>
-            </a:r>
-          </a:p>
-          <a:p>
-            <a:pPr/>
-            <a:r>
-              <a:rPr sz="1800"/>
-              <a:t>「立ち入り禁止の場所」 → 事前分布</a:t>
+              <a:rPr sz="2000"/>
+              <a:t>歩いた中で尤度が最大の点 = 最良値、歩いた跡の分布 → 誤差棒</a:t>
+            </a:r>
+          </a:p>
+          <a:p>
+            <a:r>
+              <a:rPr sz="2400"/>
+              <a:t>emcee を使用：32 本の歩行者 × 6000 歩</a:t>
             </a:r>
           </a:p>
           <a:p>
             <a:pPr lvl="1"/>
             <a:r>
-              <a:rPr sz="1500"/>
-              <a:t>例：ガスや ICS の倍率は負にならない</a:t>
-            </a:r>
-          </a:p>
-          <a:p>
-            <a:pPr/>
-            <a:r>
-              <a:rPr sz="1800"/>
-              <a:t>「歩く人」 → 歩行者（walker）。今回は 32 人</a:t>
-            </a:r>
-          </a:p>
-          <a:p>
-            <a:pPr/>
-            <a:r>
-              <a:rPr sz="1800"/>
-              <a:t>「足あとの記録」 → チェーン（サンプル）</a:t>
-            </a:r>
-          </a:p>
-          <a:p>
-            <a:pPr/>
-            <a:r>
-              <a:rPr sz="1800"/>
-              <a:t>「一番高い足あと」 → 最良値</a:t>
-            </a:r>
-          </a:p>
-          <a:p>
-            <a:pPr/>
-            <a:r>
-              <a:rPr sz="1800"/>
-              <a:t>「足あとの広がり」 → 誤差</a:t>
-            </a:r>
+              <a:rPr sz="2000"/>
+              <a:t>出発点は Totani と同じ初期値（点源・GALPROP = 1、他 = 0 など）</a:t>
+            </a:r>
+          </a:p>
+          <a:p>
+            <a:r>
+              <a:rPr sz="2400"/>
+              <a:t>有意度 σ も、ハローあり・なしそれぞれの MCMC で見つけた最大 ln L の差から出す</a:t>
+            </a:r>
+          </a:p>
+        </p:txBody>
+      </p:sp>
+      <p:sp>
+        <p:nvSpPr>
+          <p:cNvPr id="8" name="TextBox 7">
+            <a:extLst>
+              <a:ext uri="{FF2B5EF4-FFF2-40B4-BE49-F238E27FC236}">
+                <a16:creationId xmlns:a16="http://schemas.microsoft.com/office/drawing/2014/main" id="{F85CD606-E3CE-F314-B3EE-F3D7028115CB}"/>
+              </a:ext>
+            </a:extLst>
+          </p:cNvPr>
+          <p:cNvSpPr txBox="1"/>
+          <p:nvPr/>
+        </p:nvSpPr>
+        <p:spPr>
+          <a:xfrm>
+            <a:off x="5837182" y="5663239"/>
+            <a:ext cx="6093372" cy="923330"/>
+          </a:xfrm>
+          <a:prstGeom prst="rect">
+            <a:avLst/>
+          </a:prstGeom>
+          <a:noFill/>
+        </p:spPr>
+        <p:txBody>
+          <a:bodyPr wrap="square">
+            <a:spAutoFit/>
+          </a:bodyPr>
+          <a:lstStyle/>
+          <a:p>
+            <a:r>
+              <a:rPr lang="en-US" sz="1400" b="1"/>
+              <a:t>Reference:</a:t>
+            </a:r>
+            <a:r>
+              <a:rPr lang="en-US" sz="1400"/>
+              <a:t> D. Foreman-Mackey et al. (2013), PASP 125, 306</a:t>
+            </a:r>
+            <a:endParaRPr lang="en-US"/>
           </a:p>
         </p:txBody>
       </p:sp>
@@ -8976,7 +9049,7 @@
           <a:p>
             <a:r>
               <a:rPr sz="3000"/>
-              <a:t>① 高さ＝点数の決め方（ベイズの定理）</a:t>
+              <a:t>MCMC をたとえで見る：霧の山を歩く</a:t>
             </a:r>
           </a:p>
         </p:txBody>
@@ -9004,111 +9077,71 @@
             <a:pPr/>
             <a:r>
               <a:rPr sz="1800"/>
-              <a:t>P(θ | D) = L(D | θ) × π(θ) ÷ P(D)</a:t>
+              <a:t>山の上の「場所」 → 倍率の組 θ</a:t>
+            </a:r>
+          </a:p>
+          <a:p>
+            <a:pPr lvl="1"/>
+            <a:r>
+              <a:rPr sz="1500"/>
+              <a:t>θ = (f_iso, f_gas, f_ics, …, f_halo)。9 個あるので 9 次元の山</a:t>
             </a:r>
           </a:p>
           <a:p>
             <a:pPr/>
             <a:r>
               <a:rPr sz="1800"/>
-              <a:t>P(θ | D)：場所 θ の「高さ」（＝点数）</a:t>
+              <a:t>その場所の「高さ」 → 点数（事後分布）</a:t>
+            </a:r>
+          </a:p>
+          <a:p>
+            <a:pPr/>
+            <a:r>
+              <a:rPr sz="1800"/>
+              <a:t>「高度計」 → 尤度の計算（手法② の ln L）</a:t>
+            </a:r>
+          </a:p>
+          <a:p>
+            <a:pPr/>
+            <a:r>
+              <a:rPr sz="1800"/>
+              <a:t>「立ち入り禁止の場所」 → 事前分布</a:t>
             </a:r>
           </a:p>
           <a:p>
             <a:pPr lvl="1"/>
             <a:r>
               <a:rPr sz="1500"/>
-              <a:t>データ D を見た後で、θ がどれくらいもっともらしいか</a:t>
+              <a:t>例：ガスや ICS の倍率は負にならない</a:t>
             </a:r>
           </a:p>
           <a:p>
             <a:pPr/>
             <a:r>
               <a:rPr sz="1800"/>
-              <a:t>L(D | θ)：「高度計」の読み（尤度）</a:t>
-            </a:r>
-          </a:p>
-          <a:p>
-            <a:pPr lvl="1"/>
-            <a:r>
-              <a:rPr sz="1500"/>
-              <a:t>倍率が θ のとき、観測した光子の地図 D がどれくらい出やすいか</a:t>
+              <a:t>「歩く人」 → 歩行者（walker）。今回は 32 人</a:t>
             </a:r>
           </a:p>
           <a:p>
             <a:pPr/>
             <a:r>
               <a:rPr sz="1800"/>
-              <a:t>π(θ)：入ってよい場所か（事前分布）</a:t>
-            </a:r>
-          </a:p>
-          <a:p>
-            <a:pPr lvl="1"/>
-            <a:r>
-              <a:rPr sz="1500"/>
-              <a:t>入れる場所は全部同じ値、立ち入り禁止なら 0</a:t>
+              <a:t>「足あとの記録」 → チェーン（サンプル）</a:t>
             </a:r>
           </a:p>
           <a:p>
             <a:pPr/>
             <a:r>
               <a:rPr sz="1800"/>
-              <a:t>P(D)：海抜の基準。どの場所でも同じ数</a:t>
-            </a:r>
-          </a:p>
-          <a:p>
-            <a:pPr lvl="1"/>
-            <a:r>
-              <a:rPr sz="1500"/>
-              <a:t>「どちらが高いか」を比べるだけなら消える → 計算しなくてよい</a:t>
+              <a:t>「一番高い足あと」 → 最良値</a:t>
             </a:r>
           </a:p>
           <a:p>
             <a:pPr/>
             <a:r>
               <a:rPr sz="1800"/>
-              <a:t>計算では対数で：ln(高さ) = ln L + ln π</a:t>
-            </a:r>
-          </a:p>
-        </p:txBody>
-      </p:sp>
-      <p:sp>
-        <p:nvSpPr>
-          <p:cNvPr id="8" name="TextBox 7">
-            <a:extLst>
-              <a:ext uri="{FF2B5EF4-FFF2-40B4-BE49-F238E27FC236}">
-                <a16:creationId xmlns:a16="http://schemas.microsoft.com/office/drawing/2014/main" id="{F85CD606-E3CE-F314-B3EE-F3D7028115CB}"/>
-              </a:ext>
-            </a:extLst>
-          </p:cNvPr>
-          <p:cNvSpPr txBox="1"/>
-          <p:nvPr/>
-        </p:nvSpPr>
-        <p:spPr>
-          <a:xfrm>
-            <a:off x="5837182" y="5663239"/>
-            <a:ext cx="6093372" cy="923330"/>
-          </a:xfrm>
-          <a:prstGeom prst="rect">
-            <a:avLst/>
-          </a:prstGeom>
-          <a:noFill/>
-        </p:spPr>
-        <p:txBody>
-          <a:bodyPr wrap="square">
-            <a:spAutoFit/>
-          </a:bodyPr>
-          <a:lstStyle/>
-          <a:p>
-            <a:r>
-              <a:rPr lang="en-US" sz="1400" b="1"/>
-              <a:t>Reference:</a:t>
-            </a:r>
-            <a:r>
-              <a:rPr lang="en-US" sz="1400"/>
-              <a:t> D. Foreman-Mackey et al. (2013), PASP 125, 306</a:t>
-            </a:r>
-            <a:endParaRPr lang="en-US"/>
+              <a:t>「足あとの広がり」 → 誤差</a:t>
+            </a:r>
           </a:p>
         </p:txBody>
       </p:sp>
@@ -9147,7 +9180,7 @@
           <a:p>
             <a:r>
               <a:rPr sz="3000"/>
-              <a:t>② 一歩の進み方（メトロポリス法）</a:t>
+              <a:t>① 高さ＝点数の決め方（ベイズの定理）</a:t>
             </a:r>
           </a:p>
         </p:txBody>
@@ -9175,70 +9208,70 @@
             <a:pPr/>
             <a:r>
               <a:rPr sz="1800"/>
-              <a:t>1. 今いる場所 θ から、少しずれた場所 θ′ に足を出す</a:t>
+              <a:t>P(θ | D) = L(D | θ) × π(θ) ÷ P(D)</a:t>
+            </a:r>
+          </a:p>
+          <a:p>
+            <a:pPr/>
+            <a:r>
+              <a:rPr sz="1800"/>
+              <a:t>P(θ | D)：場所 θ の「高さ」（＝点数）</a:t>
             </a:r>
           </a:p>
           <a:p>
             <a:pPr lvl="1"/>
             <a:r>
               <a:rPr sz="1500"/>
-              <a:t>どれだけずらすかは乱数で決める</a:t>
+              <a:t>データ D を見た後で、θ がどれくらいもっともらしいか</a:t>
             </a:r>
           </a:p>
           <a:p>
             <a:pPr/>
             <a:r>
               <a:rPr sz="1800"/>
-              <a:t>2. 高度計で両方を読み、比 r = 高さ(θ′) ÷ 高さ(θ)</a:t>
+              <a:t>L(D | θ)：「高度計」の読み（尤度）</a:t>
+            </a:r>
+          </a:p>
+          <a:p>
+            <a:pPr lvl="1"/>
+            <a:r>
+              <a:rPr sz="1500"/>
+              <a:t>倍率が θ のとき、観測した光子の地図 D がどれくらい出やすいか</a:t>
             </a:r>
           </a:p>
           <a:p>
             <a:pPr/>
             <a:r>
               <a:rPr sz="1800"/>
-              <a:t>3. r ≥ 1（上り）なら、必ず θ′ に移る</a:t>
+              <a:t>π(θ)：入ってよい場所か（事前分布）</a:t>
+            </a:r>
+          </a:p>
+          <a:p>
+            <a:pPr lvl="1"/>
+            <a:r>
+              <a:rPr sz="1500"/>
+              <a:t>入れる場所は全部同じ値、立ち入り禁止なら 0</a:t>
             </a:r>
           </a:p>
           <a:p>
             <a:pPr/>
             <a:r>
               <a:rPr sz="1800"/>
-              <a:t>4. r &lt; 1（下り）なら、確率 r で移る</a:t>
+              <a:t>P(D)：海抜の基準。どの場所でも同じ数</a:t>
             </a:r>
           </a:p>
           <a:p>
             <a:pPr lvl="1"/>
             <a:r>
               <a:rPr sz="1500"/>
-              <a:t>0〜1 の乱数を引き、r より小さければ移る</a:t>
+              <a:t>「どちらが高いか」を比べるだけなら消える → 計算しなくてよい</a:t>
             </a:r>
           </a:p>
           <a:p>
             <a:pPr/>
             <a:r>
               <a:rPr sz="1800"/>
-              <a:t>5. 移っても移らなくても、今いる場所を足あとに記録</a:t>
-            </a:r>
-          </a:p>
-          <a:p>
-            <a:pPr/>
-            <a:r>
-              <a:rPr sz="1800"/>
-              <a:t>6. 1〜5 を何千回もくり返す</a:t>
-            </a:r>
-          </a:p>
-          <a:p>
-            <a:pPr/>
-            <a:r>
-              <a:rPr sz="1800"/>
-              <a:t>なぜ下りにも進む？</a:t>
-            </a:r>
-          </a:p>
-          <a:p>
-            <a:pPr lvl="1"/>
-            <a:r>
-              <a:rPr sz="1500"/>
-              <a:t>上りだけだと頂上で止まり、山の広がり（誤差）が分からないから</a:t>
+              <a:t>計算では対数で：ln(高さ) = ln L + ln π</a:t>
             </a:r>
           </a:p>
         </p:txBody>
@@ -9277,7 +9310,7 @@
             </a:r>
             <a:r>
               <a:rPr lang="en-US" sz="1400"/>
-              <a:t> N. Metropolis et al. (1953), J. Chem. Phys. 21, 1087</a:t>
+              <a:t> D. Foreman-Mackey et al. (2013), PASP 125, 306</a:t>
             </a:r>
             <a:endParaRPr lang="en-US"/>
           </a:p>
@@ -9318,45 +9351,118 @@
           <a:p>
             <a:r>
               <a:rPr sz="3000"/>
-              <a:t>③ 足あとはこうなる（説明用の例）</a:t>
-            </a:r>
-          </a:p>
-        </p:txBody>
-      </p:sp>
-      <p:pic>
-        <p:nvPicPr>
-          <p:cNvPr id="3" name="Picture 2" descr="image.png"/>
-          <p:cNvPicPr>
-            <a:picLocks noChangeAspect="1"/>
-          </p:cNvPicPr>
-          <p:nvPr/>
-        </p:nvPicPr>
-        <p:blipFill>
-          <a:blip r:embed="rId2"/>
-          <a:stretch>
-            <a:fillRect/>
-          </a:stretch>
-        </p:blipFill>
+              <a:t>② 一歩の進み方（メトロポリス法）</a:t>
+            </a:r>
+          </a:p>
+        </p:txBody>
+      </p:sp>
+      <p:sp>
+        <p:nvSpPr>
+          <p:cNvPr id="3" name="Content Placeholder 2"/>
+          <p:cNvSpPr>
+            <a:spLocks noGrp="1"/>
+          </p:cNvSpPr>
+          <p:nvPr>
+            <p:ph idx="1"/>
+          </p:nvPr>
+        </p:nvSpPr>
         <p:spPr>
           <a:xfrm>
-            <a:off x="731520" y="1280160"/>
-            <a:ext cx="10698480" cy="4279392"/>
+            <a:off x="548640" y="1371600"/>
+            <a:ext cx="5669280" cy="4297680"/>
           </a:xfrm>
-          <a:prstGeom prst="rect">
-            <a:avLst/>
-          </a:prstGeom>
         </p:spPr>
-      </p:pic>
-      <p:sp>
-        <p:nvSpPr>
-          <p:cNvPr id="4" name="TextBox 3"/>
+        <p:txBody>
+          <a:bodyPr/>
+          <a:lstStyle/>
+          <a:p>
+            <a:pPr/>
+            <a:r>
+              <a:rPr sz="1800"/>
+              <a:t>1. 今いる場所 θ から、少しずれた場所 θ′ に足を出す</a:t>
+            </a:r>
+          </a:p>
+          <a:p>
+            <a:pPr lvl="1"/>
+            <a:r>
+              <a:rPr sz="1500"/>
+              <a:t>どれだけずらすかは乱数で決める</a:t>
+            </a:r>
+          </a:p>
+          <a:p>
+            <a:pPr/>
+            <a:r>
+              <a:rPr sz="1800"/>
+              <a:t>2. 高度計で両方を読み、比 r = 高さ(θ′) ÷ 高さ(θ)</a:t>
+            </a:r>
+          </a:p>
+          <a:p>
+            <a:pPr/>
+            <a:r>
+              <a:rPr sz="1800"/>
+              <a:t>3. r ≥ 1（上り）なら、必ず θ′ に移る</a:t>
+            </a:r>
+          </a:p>
+          <a:p>
+            <a:pPr/>
+            <a:r>
+              <a:rPr sz="1800"/>
+              <a:t>4. r &lt; 1（下り）なら、確率 r で移る</a:t>
+            </a:r>
+          </a:p>
+          <a:p>
+            <a:pPr lvl="1"/>
+            <a:r>
+              <a:rPr sz="1500"/>
+              <a:t>0〜1 の乱数を引き、r より小さければ移る</a:t>
+            </a:r>
+          </a:p>
+          <a:p>
+            <a:pPr/>
+            <a:r>
+              <a:rPr sz="1800"/>
+              <a:t>5. 移っても移らなくても、今いる場所を足あとに記録</a:t>
+            </a:r>
+          </a:p>
+          <a:p>
+            <a:pPr/>
+            <a:r>
+              <a:rPr sz="1800"/>
+              <a:t>6. 1〜5 を何千回もくり返す</a:t>
+            </a:r>
+          </a:p>
+          <a:p>
+            <a:pPr/>
+            <a:r>
+              <a:rPr sz="1800"/>
+              <a:t>なぜ下りにも進む？</a:t>
+            </a:r>
+          </a:p>
+          <a:p>
+            <a:pPr lvl="1"/>
+            <a:r>
+              <a:rPr sz="1500"/>
+              <a:t>上りだけだと頂上で止まり、山の広がり（誤差）が分からないから</a:t>
+            </a:r>
+          </a:p>
+        </p:txBody>
+      </p:sp>
+      <p:sp>
+        <p:nvSpPr>
+          <p:cNvPr id="8" name="TextBox 7">
+            <a:extLst>
+              <a:ext uri="{FF2B5EF4-FFF2-40B4-BE49-F238E27FC236}">
+                <a16:creationId xmlns:a16="http://schemas.microsoft.com/office/drawing/2014/main" id="{F85CD606-E3CE-F314-B3EE-F3D7028115CB}"/>
+              </a:ext>
+            </a:extLst>
+          </p:cNvPr>
           <p:cNvSpPr txBox="1"/>
           <p:nvPr/>
         </p:nvSpPr>
         <p:spPr>
           <a:xfrm>
-            <a:off x="548640" y="5669280"/>
-            <a:ext cx="11155680" cy="822960"/>
+            <a:off x="5837182" y="5663239"/>
+            <a:ext cx="6093372" cy="923330"/>
           </a:xfrm>
           <a:prstGeom prst="rect">
             <a:avLst/>
@@ -9370,9 +9476,14 @@
           <a:lstStyle/>
           <a:p>
             <a:r>
-              <a:rPr sz="1800"/>
-              <a:t>左：足あと（縦＝倍率、横＝歩数）。最初の 200 歩は山にたどり着く途中なので捨てる。右：足あとのヒストグラム ＝ 山の形</a:t>
-            </a:r>
+              <a:rPr lang="en-US" sz="1400" b="1"/>
+              <a:t>Reference:</a:t>
+            </a:r>
+            <a:r>
+              <a:rPr lang="en-US" sz="1400"/>
+              <a:t> N. Metropolis et al. (1953), J. Chem. Phys. 21, 1087</a:t>
+            </a:r>
+            <a:endParaRPr lang="en-US"/>
           </a:p>
         </p:txBody>
       </p:sp>
@@ -9588,111 +9699,45 @@
           <a:p>
             <a:r>
               <a:rPr sz="3000"/>
-              <a:t>④ 32 人で歩く（emcee）</a:t>
-            </a:r>
-          </a:p>
-        </p:txBody>
-      </p:sp>
-      <p:sp>
-        <p:nvSpPr>
-          <p:cNvPr id="3" name="Content Placeholder 2"/>
-          <p:cNvSpPr>
-            <a:spLocks noGrp="1"/>
-          </p:cNvSpPr>
-          <p:nvPr>
-            <p:ph idx="1"/>
-          </p:nvPr>
-        </p:nvSpPr>
+              <a:t>③ 足あとはこうなる（説明用の例）</a:t>
+            </a:r>
+          </a:p>
+        </p:txBody>
+      </p:sp>
+      <p:pic>
+        <p:nvPicPr>
+          <p:cNvPr id="3" name="Picture 2" descr="image.png"/>
+          <p:cNvPicPr>
+            <a:picLocks noChangeAspect="1"/>
+          </p:cNvPicPr>
+          <p:nvPr/>
+        </p:nvPicPr>
+        <p:blipFill>
+          <a:blip r:embed="rId2"/>
+          <a:stretch>
+            <a:fillRect/>
+          </a:stretch>
+        </p:blipFill>
         <p:spPr>
           <a:xfrm>
-            <a:off x="548640" y="1371600"/>
-            <a:ext cx="5669280" cy="4297680"/>
+            <a:off x="731520" y="1280160"/>
+            <a:ext cx="10698480" cy="4279392"/>
           </a:xfrm>
+          <a:prstGeom prst="rect">
+            <a:avLst/>
+          </a:prstGeom>
         </p:spPr>
-        <p:txBody>
-          <a:bodyPr/>
-          <a:lstStyle/>
-          <a:p>
-            <a:pPr/>
-            <a:r>
-              <a:rPr sz="1800"/>
-              <a:t>1 人だと、細長い山で迷いやすい</a:t>
-            </a:r>
-          </a:p>
-          <a:p>
-            <a:pPr lvl="1"/>
-            <a:r>
-              <a:rPr sz="1500"/>
-              <a:t>例：ガスと ICS の縮退。片方を上げて片方を下げても高さがほぼ同じ</a:t>
-            </a:r>
-          </a:p>
-          <a:p>
-            <a:pPr/>
-            <a:r>
-              <a:rPr sz="1800"/>
-              <a:t>そこで 32 人が同時に歩き、仲間の位置を見て一歩を決める</a:t>
-            </a:r>
-          </a:p>
-          <a:p>
-            <a:pPr/>
-            <a:r>
-              <a:rPr sz="1800"/>
-              <a:t>一歩の出し方（ストレッチ移動）</a:t>
-            </a:r>
-          </a:p>
-          <a:p>
-            <a:pPr lvl="1"/>
-            <a:r>
-              <a:rPr sz="1500"/>
-              <a:t>自分 X_k から、ランダムに選んだ仲間 X_j への線を引く</a:t>
-            </a:r>
-          </a:p>
-          <a:p>
-            <a:pPr lvl="1"/>
-            <a:r>
-              <a:rPr sz="1500"/>
-              <a:t>その線の上で、Z 倍（1/2〜2 の乱数）伸ばした点に足を出す</a:t>
-            </a:r>
-          </a:p>
-          <a:p>
-            <a:pPr lvl="1"/>
-            <a:r>
-              <a:rPr sz="1500"/>
-              <a:t>Y = X_j + Z (X_k − X_j)</a:t>
-            </a:r>
-          </a:p>
-          <a:p>
-            <a:pPr/>
-            <a:r>
-              <a:rPr sz="1800"/>
-              <a:t>移るかどうかは ② と同じ考え（Z⁸ を掛けて補正）</a:t>
-            </a:r>
-          </a:p>
-          <a:p>
-            <a:pPr/>
-            <a:r>
-              <a:rPr sz="1800"/>
-              <a:t>出発点：全員、Totani と同じ初期値の近く。6000 歩</a:t>
-            </a:r>
-          </a:p>
-        </p:txBody>
-      </p:sp>
-      <p:sp>
-        <p:nvSpPr>
-          <p:cNvPr id="8" name="TextBox 7">
-            <a:extLst>
-              <a:ext uri="{FF2B5EF4-FFF2-40B4-BE49-F238E27FC236}">
-                <a16:creationId xmlns:a16="http://schemas.microsoft.com/office/drawing/2014/main" id="{F85CD606-E3CE-F314-B3EE-F3D7028115CB}"/>
-              </a:ext>
-            </a:extLst>
-          </p:cNvPr>
+      </p:pic>
+      <p:sp>
+        <p:nvSpPr>
+          <p:cNvPr id="4" name="TextBox 3"/>
           <p:cNvSpPr txBox="1"/>
           <p:nvPr/>
         </p:nvSpPr>
         <p:spPr>
           <a:xfrm>
-            <a:off x="5837182" y="5663239"/>
-            <a:ext cx="6093372" cy="923330"/>
+            <a:off x="548640" y="5669280"/>
+            <a:ext cx="11155680" cy="822960"/>
           </a:xfrm>
           <a:prstGeom prst="rect">
             <a:avLst/>
@@ -9706,14 +9751,9 @@
           <a:lstStyle/>
           <a:p>
             <a:r>
-              <a:rPr lang="en-US" sz="1400" b="1"/>
-              <a:t>Reference:</a:t>
-            </a:r>
-            <a:r>
-              <a:rPr lang="en-US" sz="1400"/>
-              <a:t> J. Goodman &amp; J. Weare (2010), Comm. App. Math. Comp. Sci. 5, 65</a:t>
-            </a:r>
-            <a:endParaRPr lang="en-US"/>
+              <a:rPr sz="1800"/>
+              <a:t>左：足あと（縦＝倍率、横＝歩数）。最初の 200 歩は山にたどり着く途中なので捨てる。右：足あとのヒストグラム ＝ 山の形</a:t>
+            </a:r>
           </a:p>
         </p:txBody>
       </p:sp>
@@ -9752,7 +9792,7 @@
           <a:p>
             <a:r>
               <a:rPr sz="3000"/>
-              <a:t>⑤ 歩き終わったら：最良値と誤差</a:t>
+              <a:t>MCMC の歩き方はいろいろある</a:t>
             </a:r>
           </a:p>
         </p:txBody>
@@ -9770,7 +9810,7 @@
         <p:spPr>
           <a:xfrm>
             <a:off x="548640" y="1371600"/>
-            <a:ext cx="5669280" cy="4297680"/>
+            <a:ext cx="10789920" cy="4297680"/>
           </a:xfrm>
         </p:spPr>
         <p:txBody>
@@ -9779,71 +9819,64 @@
           <a:p>
             <a:pPr/>
             <a:r>
-              <a:rPr sz="1800"/>
-              <a:t>一番高い足あと → 最良の倍率（Totani と同じ）</a:t>
+              <a:rPr sz="2000"/>
+              <a:t>メトロポリス法（1953）：一番基本。少しずらして、比 r で移るか決める（②）</a:t>
+            </a:r>
+          </a:p>
+          <a:p>
+            <a:pPr/>
+            <a:r>
+              <a:rPr sz="2000"/>
+              <a:t>ギブス法：倍率を 1 個ずつ順番に動かす</a:t>
+            </a:r>
+          </a:p>
+          <a:p>
+            <a:pPr/>
+            <a:r>
+              <a:rPr sz="2000"/>
+              <a:t>ハミルトニアン MC：坂の傾きを使って、ボールを転がすように大きく動く</a:t>
+            </a:r>
+          </a:p>
+          <a:p>
+            <a:pPr/>
+            <a:r>
+              <a:rPr sz="2000"/>
+              <a:t>アンサンブル法（2010）：何人も同時に歩き、仲間の位置で一歩を決める（④）</a:t>
             </a:r>
           </a:p>
           <a:p>
             <a:pPr lvl="1"/>
             <a:r>
-              <a:rPr sz="1500"/>
-              <a:t>20.8 GeV：ハローの倍率 1.51</a:t>
+              <a:rPr sz="1600"/>
+              <a:t>Python の道具 emcee がこれ。本研究はこれを使った</a:t>
             </a:r>
           </a:p>
           <a:p>
             <a:pPr/>
             <a:r>
-              <a:rPr sz="1800"/>
-              <a:t>足あとの広がり → 誤差</a:t>
+              <a:rPr sz="2000"/>
+              <a:t>似ているが別物：焼きなまし法</a:t>
             </a:r>
           </a:p>
           <a:p>
             <a:pPr lvl="1"/>
             <a:r>
-              <a:rPr sz="1500"/>
-              <a:t>最初の 400 歩は捨て、下から 16%〜84% の範囲</a:t>
+              <a:rPr sz="1600"/>
+              <a:t>下りに進む確率をだんだん小さくして、頂上だけを探す。誤差は出ない</a:t>
+            </a:r>
+          </a:p>
+          <a:p>
+            <a:pPr/>
+            <a:r>
+              <a:rPr sz="2000"/>
+              <a:t>Totani は「MCMC」とだけ書いていて、どの歩き方かは書いていない</a:t>
             </a:r>
           </a:p>
           <a:p>
             <a:pPr lvl="1"/>
             <a:r>
-              <a:rPr sz="1500"/>
-              <a:t>20.8 GeV：1.43〜1.61</a:t>
-            </a:r>
-          </a:p>
-          <a:p>
-            <a:pPr/>
-            <a:r>
-              <a:rPr sz="1800"/>
-              <a:t>有意度：ハローあり・なしの山を別々に歩く</a:t>
-            </a:r>
-          </a:p>
-          <a:p>
-            <a:pPr lvl="1"/>
-            <a:r>
-              <a:rPr sz="1500"/>
-              <a:t>それぞれの一番高い足あとの高さの差 Δln L → σ = √(2Δln L)</a:t>
-            </a:r>
-          </a:p>
-          <a:p>
-            <a:pPr lvl="1"/>
-            <a:r>
-              <a:rPr sz="1500"/>
-              <a:t>20.8 GeV：19.5σ</a:t>
-            </a:r>
-          </a:p>
-          <a:p>
-            <a:pPr/>
-            <a:r>
-              <a:rPr sz="1800"/>
-              <a:t>注意：山の端まで歩き回るには、もっと長く歩くのが理想</a:t>
-            </a:r>
-          </a:p>
-          <a:p>
-            <a:pPr lvl="1"/>
-            <a:r>
-              <a:rPr sz="1500"/>
-              <a:t>誤差は目安。一番高い足あとは頂上に届いている</a:t>
+              <a:rPr sz="1600"/>
+              <a:t>本研究は、天文学で広く使われ、細長い山（ガスと ICS の縮退）に強い emcee を選んだ</a:t>
             </a:r>
           </a:p>
         </p:txBody>
@@ -9882,7 +9915,7 @@
             </a:r>
             <a:r>
               <a:rPr lang="en-US" sz="1400"/>
-              <a:t> T. Totani (2025), arXiv:2507.07209 §2.2</a:t>
+              <a:t> D. Foreman-Mackey et al. (2013), PASP 125, 306</a:t>
             </a:r>
             <a:endParaRPr lang="en-US"/>
           </a:p>
@@ -9897,6 +9930,348 @@
 </file>
 
 <file path=ppt/slides/slide22.xml><?xml version="1.0" encoding="utf-8"?>
+<p:sld xmlns:a="http://schemas.openxmlformats.org/drawingml/2006/main" xmlns:p="http://schemas.openxmlformats.org/presentationml/2006/main" xmlns:r="http://schemas.openxmlformats.org/officeDocument/2006/relationships">
+  <p:cSld>
+    <p:spTree>
+      <p:nvGrpSpPr>
+        <p:cNvPr id="1" name=""/>
+        <p:cNvGrpSpPr/>
+        <p:nvPr/>
+      </p:nvGrpSpPr>
+      <p:grpSpPr/>
+      <p:sp>
+        <p:nvSpPr>
+          <p:cNvPr id="2" name="Title 1"/>
+          <p:cNvSpPr>
+            <a:spLocks noGrp="1"/>
+          </p:cNvSpPr>
+          <p:nvPr>
+            <p:ph type="title"/>
+          </p:nvPr>
+        </p:nvSpPr>
+        <p:spPr/>
+        <p:txBody>
+          <a:bodyPr/>
+          <a:lstStyle/>
+          <a:p>
+            <a:r>
+              <a:rPr sz="3000"/>
+              <a:t>④ 32 人で歩く（emcee）</a:t>
+            </a:r>
+          </a:p>
+        </p:txBody>
+      </p:sp>
+      <p:sp>
+        <p:nvSpPr>
+          <p:cNvPr id="3" name="Content Placeholder 2"/>
+          <p:cNvSpPr>
+            <a:spLocks noGrp="1"/>
+          </p:cNvSpPr>
+          <p:nvPr>
+            <p:ph idx="1"/>
+          </p:nvPr>
+        </p:nvSpPr>
+        <p:spPr>
+          <a:xfrm>
+            <a:off x="548640" y="1371600"/>
+            <a:ext cx="5669280" cy="4297680"/>
+          </a:xfrm>
+        </p:spPr>
+        <p:txBody>
+          <a:bodyPr/>
+          <a:lstStyle/>
+          <a:p>
+            <a:pPr/>
+            <a:r>
+              <a:rPr sz="1600"/>
+              <a:t>1 人だと、細長い山で迷いやすい</a:t>
+            </a:r>
+          </a:p>
+          <a:p>
+            <a:pPr lvl="1"/>
+            <a:r>
+              <a:rPr sz="1400"/>
+              <a:t>例：ガスと ICS の縮退。片方を上げて片方を下げても高さがほぼ同じ</a:t>
+            </a:r>
+          </a:p>
+          <a:p>
+            <a:pPr/>
+            <a:r>
+              <a:rPr sz="1600"/>
+              <a:t>そこで 32 人が同時に歩き、仲間の位置を見て一歩を決める</a:t>
+            </a:r>
+          </a:p>
+          <a:p>
+            <a:pPr/>
+            <a:r>
+              <a:rPr sz="1600"/>
+              <a:t>一歩の出し方（ストレッチ移動）</a:t>
+            </a:r>
+          </a:p>
+          <a:p>
+            <a:pPr lvl="1"/>
+            <a:r>
+              <a:rPr sz="1400"/>
+              <a:t>自分 X_k から、ランダムに選んだ仲間 X_j への線を引く</a:t>
+            </a:r>
+          </a:p>
+          <a:p>
+            <a:pPr lvl="1"/>
+            <a:r>
+              <a:rPr sz="1400"/>
+              <a:t>その線の上で、Z 倍（1/2〜2 の乱数）伸ばした点に足を出す</a:t>
+            </a:r>
+          </a:p>
+          <a:p>
+            <a:pPr lvl="1"/>
+            <a:r>
+              <a:rPr sz="1400"/>
+              <a:t>Y = X_j + Z (X_k − X_j)</a:t>
+            </a:r>
+          </a:p>
+          <a:p>
+            <a:pPr/>
+            <a:r>
+              <a:rPr sz="1600"/>
+              <a:t>移るかどうかは ② と同じ考え（Z⁸ を掛けて補正）</a:t>
+            </a:r>
+          </a:p>
+          <a:p>
+            <a:pPr/>
+            <a:r>
+              <a:rPr sz="1600"/>
+              <a:t>出発点：全員、Totani と同じ初期値の近く。6000 歩</a:t>
+            </a:r>
+          </a:p>
+          <a:p>
+            <a:pPr/>
+            <a:r>
+              <a:rPr sz="1600"/>
+              <a:t>emcee はこの歩き方の Python の道具の名前。32 人・6000 歩は本研究の設定</a:t>
+            </a:r>
+          </a:p>
+        </p:txBody>
+      </p:sp>
+      <p:sp>
+        <p:nvSpPr>
+          <p:cNvPr id="8" name="TextBox 7">
+            <a:extLst>
+              <a:ext uri="{FF2B5EF4-FFF2-40B4-BE49-F238E27FC236}">
+                <a16:creationId xmlns:a16="http://schemas.microsoft.com/office/drawing/2014/main" id="{F85CD606-E3CE-F314-B3EE-F3D7028115CB}"/>
+              </a:ext>
+            </a:extLst>
+          </p:cNvPr>
+          <p:cNvSpPr txBox="1"/>
+          <p:nvPr/>
+        </p:nvSpPr>
+        <p:spPr>
+          <a:xfrm>
+            <a:off x="5837182" y="5663239"/>
+            <a:ext cx="6093372" cy="923330"/>
+          </a:xfrm>
+          <a:prstGeom prst="rect">
+            <a:avLst/>
+          </a:prstGeom>
+          <a:noFill/>
+        </p:spPr>
+        <p:txBody>
+          <a:bodyPr wrap="square">
+            <a:spAutoFit/>
+          </a:bodyPr>
+          <a:lstStyle/>
+          <a:p>
+            <a:r>
+              <a:rPr lang="en-US" sz="1400" b="1"/>
+              <a:t>Reference:</a:t>
+            </a:r>
+            <a:r>
+              <a:rPr lang="en-US" sz="1400"/>
+              <a:t> J. Goodman &amp; J. Weare (2010), Comm. App. Math. Comp. Sci. 5, 65</a:t>
+            </a:r>
+            <a:endParaRPr lang="en-US"/>
+          </a:p>
+        </p:txBody>
+      </p:sp>
+    </p:spTree>
+  </p:cSld>
+  <p:clrMapOvr>
+    <a:masterClrMapping/>
+  </p:clrMapOvr>
+</p:sld>
+</file>
+
+<file path=ppt/slides/slide23.xml><?xml version="1.0" encoding="utf-8"?>
+<p:sld xmlns:a="http://schemas.openxmlformats.org/drawingml/2006/main" xmlns:p="http://schemas.openxmlformats.org/presentationml/2006/main" xmlns:r="http://schemas.openxmlformats.org/officeDocument/2006/relationships">
+  <p:cSld>
+    <p:spTree>
+      <p:nvGrpSpPr>
+        <p:cNvPr id="1" name=""/>
+        <p:cNvGrpSpPr/>
+        <p:nvPr/>
+      </p:nvGrpSpPr>
+      <p:grpSpPr/>
+      <p:sp>
+        <p:nvSpPr>
+          <p:cNvPr id="2" name="Title 1"/>
+          <p:cNvSpPr>
+            <a:spLocks noGrp="1"/>
+          </p:cNvSpPr>
+          <p:nvPr>
+            <p:ph type="title"/>
+          </p:nvPr>
+        </p:nvSpPr>
+        <p:spPr/>
+        <p:txBody>
+          <a:bodyPr/>
+          <a:lstStyle/>
+          <a:p>
+            <a:r>
+              <a:rPr sz="3000"/>
+              <a:t>⑤ 歩き終わったら：最良値と誤差</a:t>
+            </a:r>
+          </a:p>
+        </p:txBody>
+      </p:sp>
+      <p:sp>
+        <p:nvSpPr>
+          <p:cNvPr id="3" name="Content Placeholder 2"/>
+          <p:cNvSpPr>
+            <a:spLocks noGrp="1"/>
+          </p:cNvSpPr>
+          <p:nvPr>
+            <p:ph idx="1"/>
+          </p:nvPr>
+        </p:nvSpPr>
+        <p:spPr>
+          <a:xfrm>
+            <a:off x="548640" y="1371600"/>
+            <a:ext cx="5669280" cy="4297680"/>
+          </a:xfrm>
+        </p:spPr>
+        <p:txBody>
+          <a:bodyPr/>
+          <a:lstStyle/>
+          <a:p>
+            <a:pPr/>
+            <a:r>
+              <a:rPr sz="1800"/>
+              <a:t>一番高い足あと → 最良の倍率（Totani と同じ）</a:t>
+            </a:r>
+          </a:p>
+          <a:p>
+            <a:pPr lvl="1"/>
+            <a:r>
+              <a:rPr sz="1500"/>
+              <a:t>20.8 GeV：ハローの倍率 1.51</a:t>
+            </a:r>
+          </a:p>
+          <a:p>
+            <a:pPr/>
+            <a:r>
+              <a:rPr sz="1800"/>
+              <a:t>足あとの広がり → 誤差</a:t>
+            </a:r>
+          </a:p>
+          <a:p>
+            <a:pPr lvl="1"/>
+            <a:r>
+              <a:rPr sz="1500"/>
+              <a:t>最初の 400 歩（ふもとから登っている途中）は捨て、残りの下から 16%〜84%</a:t>
+            </a:r>
+          </a:p>
+          <a:p>
+            <a:pPr lvl="1"/>
+            <a:r>
+              <a:rPr sz="1500"/>
+              <a:t>20.8 GeV：1.43〜1.61</a:t>
+            </a:r>
+          </a:p>
+          <a:p>
+            <a:pPr/>
+            <a:r>
+              <a:rPr sz="1800"/>
+              <a:t>有意度：ハローあり・なしの山を別々に歩く</a:t>
+            </a:r>
+          </a:p>
+          <a:p>
+            <a:pPr lvl="1"/>
+            <a:r>
+              <a:rPr sz="1500"/>
+              <a:t>それぞれの一番高い足あとの高さの差 Δln L → σ = √(2Δln L)</a:t>
+            </a:r>
+          </a:p>
+          <a:p>
+            <a:pPr lvl="1"/>
+            <a:r>
+              <a:rPr sz="1500"/>
+              <a:t>20.8 GeV：19.5σ</a:t>
+            </a:r>
+          </a:p>
+          <a:p>
+            <a:pPr/>
+            <a:r>
+              <a:rPr sz="1800"/>
+              <a:t>注意：山の端まで歩き回るには、もっと長く歩くのが理想</a:t>
+            </a:r>
+          </a:p>
+          <a:p>
+            <a:pPr lvl="1"/>
+            <a:r>
+              <a:rPr sz="1500"/>
+              <a:t>誤差は目安。一番高い足あとは頂上に届いている</a:t>
+            </a:r>
+          </a:p>
+        </p:txBody>
+      </p:sp>
+      <p:sp>
+        <p:nvSpPr>
+          <p:cNvPr id="8" name="TextBox 7">
+            <a:extLst>
+              <a:ext uri="{FF2B5EF4-FFF2-40B4-BE49-F238E27FC236}">
+                <a16:creationId xmlns:a16="http://schemas.microsoft.com/office/drawing/2014/main" id="{F85CD606-E3CE-F314-B3EE-F3D7028115CB}"/>
+              </a:ext>
+            </a:extLst>
+          </p:cNvPr>
+          <p:cNvSpPr txBox="1"/>
+          <p:nvPr/>
+        </p:nvSpPr>
+        <p:spPr>
+          <a:xfrm>
+            <a:off x="5837182" y="5663239"/>
+            <a:ext cx="6093372" cy="923330"/>
+          </a:xfrm>
+          <a:prstGeom prst="rect">
+            <a:avLst/>
+          </a:prstGeom>
+          <a:noFill/>
+        </p:spPr>
+        <p:txBody>
+          <a:bodyPr wrap="square">
+            <a:spAutoFit/>
+          </a:bodyPr>
+          <a:lstStyle/>
+          <a:p>
+            <a:r>
+              <a:rPr lang="en-US" sz="1400" b="1"/>
+              <a:t>Reference:</a:t>
+            </a:r>
+            <a:r>
+              <a:rPr lang="en-US" sz="1400"/>
+              <a:t> T. Totani (2025), arXiv:2507.07209 §2.2</a:t>
+            </a:r>
+            <a:endParaRPr lang="en-US"/>
+          </a:p>
+        </p:txBody>
+      </p:sp>
+    </p:spTree>
+  </p:cSld>
+  <p:clrMapOvr>
+    <a:masterClrMapping/>
+  </p:clrMapOvr>
+</p:sld>
+</file>
+
+<file path=ppt/slides/slide24.xml><?xml version="1.0" encoding="utf-8"?>
 <p:sld xmlns:a="http://schemas.openxmlformats.org/drawingml/2006/main" xmlns:r="http://schemas.openxmlformats.org/officeDocument/2006/relationships" xmlns:p="http://schemas.openxmlformats.org/presentationml/2006/main">
   <p:cSld>
     <p:spTree>
@@ -10037,7 +10412,7 @@
 </p:sld>
 </file>
 
-<file path=ppt/slides/slide23.xml><?xml version="1.0" encoding="utf-8"?>
+<file path=ppt/slides/slide25.xml><?xml version="1.0" encoding="utf-8"?>
 <p:sld xmlns:a="http://schemas.openxmlformats.org/drawingml/2006/main" xmlns:r="http://schemas.openxmlformats.org/officeDocument/2006/relationships" xmlns:p="http://schemas.openxmlformats.org/presentationml/2006/main">
   <p:cSld>
     <p:spTree>
@@ -10125,6 +10500,13 @@
             <a:r>
               <a:rPr sz="1800"/>
               <a:t>ICS の倍率 1.39 → 0.48（20.8 GeV）</a:t>
+            </a:r>
+          </a:p>
+          <a:p>
+            <a:pPr/>
+            <a:r>
+              <a:rPr sz="1800"/>
+              <a:t>たとえ：部屋の電球（ICS）と探している光（ハロー）が、写真ではほぼ同じ形 → 余った明るさがどちらのものか決めにくい</a:t>
             </a:r>
           </a:p>
         </p:txBody>
@@ -10162,224 +10544,6 @@
 </p:sld>
 </file>
 
-<file path=ppt/slides/slide24.xml><?xml version="1.0" encoding="utf-8"?>
-<p:sld xmlns:a="http://schemas.openxmlformats.org/drawingml/2006/main" xmlns:r="http://schemas.openxmlformats.org/officeDocument/2006/relationships" xmlns:p="http://schemas.openxmlformats.org/presentationml/2006/main">
-  <p:cSld>
-    <p:spTree>
-      <p:nvGrpSpPr>
-        <p:cNvPr id="1" name=""/>
-        <p:cNvGrpSpPr/>
-        <p:nvPr/>
-      </p:nvGrpSpPr>
-      <p:grpSpPr>
-        <a:xfrm>
-          <a:off x="0" y="0"/>
-          <a:ext cx="0" cy="0"/>
-          <a:chOff x="0" y="0"/>
-          <a:chExt cx="0" cy="0"/>
-        </a:xfrm>
-      </p:grpSpPr>
-      <p:sp>
-        <p:nvSpPr>
-          <p:cNvPr id="2" name="Title 1"/>
-          <p:cNvSpPr>
-            <a:spLocks noGrp="1"/>
-          </p:cNvSpPr>
-          <p:nvPr>
-            <p:ph type="title"/>
-          </p:nvPr>
-        </p:nvSpPr>
-        <p:spPr/>
-        <p:txBody>
-          <a:bodyPr/>
-          <a:lstStyle/>
-          <a:p>
-            <a:r>
-              <a:rPr sz="3400"/>
-              <a:t>縮退が引き起こした 3 つの疑問</a:t>
-            </a:r>
-          </a:p>
-        </p:txBody>
-      </p:sp>
-      <p:sp>
-        <p:nvSpPr>
-          <p:cNvPr id="3" name="Content Placeholder 2"/>
-          <p:cNvSpPr>
-            <a:spLocks noGrp="1"/>
-          </p:cNvSpPr>
-          <p:nvPr>
-            <p:ph idx="1"/>
-          </p:nvPr>
-        </p:nvSpPr>
-        <p:spPr>
-          <a:xfrm>
-            <a:off x="841248" y="1463040"/>
-            <a:ext cx="10515600" cy="4937760"/>
-          </a:xfrm>
-        </p:spPr>
-        <p:txBody>
-          <a:bodyPr/>
-          <a:lstStyle/>
-          <a:p>
-            <a:r>
-              <a:rPr sz="2400"/>
-              <a:t>① バブル領域を外すと 19.5σ → 5.0σ に落ちる</a:t>
-            </a:r>
-          </a:p>
-          <a:p>
-            <a:pPr lvl="1"/>
-            <a:r>
-              <a:rPr sz="2000"/>
-              <a:t>ハローは、本当は ICS やバブルの間違いでは？</a:t>
-            </a:r>
-          </a:p>
-          <a:p>
-            <a:r>
-              <a:rPr sz="2400"/>
-              <a:t>② 何も無い空でも、最大 4.5σ が出る</a:t>
-            </a:r>
-          </a:p>
-          <a:p>
-            <a:pPr lvl="1"/>
-            <a:r>
-              <a:rPr sz="2000"/>
-              <a:t>σ をそのまま信じてよいのか？</a:t>
-            </a:r>
-          </a:p>
-          <a:p>
-            <a:r>
-              <a:rPr sz="2400"/>
-              <a:t>③ 7/23 に出した 19.1σ が再現できない</a:t>
-            </a:r>
-          </a:p>
-          <a:p>
-            <a:pPr lvl="1"/>
-            <a:r>
-              <a:rPr sz="2000"/>
-              <a:t>結果そのものを信じてよいのか？</a:t>
-            </a:r>
-          </a:p>
-          <a:p>
-            <a:r>
-              <a:rPr sz="2400"/>
-              <a:t>→ 次から、1 つずつ調べた結果</a:t>
-            </a:r>
-          </a:p>
-        </p:txBody>
-      </p:sp>
-    </p:spTree>
-  </p:cSld>
-  <p:clrMapOvr>
-    <a:masterClrMapping/>
-  </p:clrMapOvr>
-</p:sld>
-</file>
-
-<file path=ppt/slides/slide25.xml><?xml version="1.0" encoding="utf-8"?>
-<p:sld xmlns:a="http://schemas.openxmlformats.org/drawingml/2006/main" xmlns:r="http://schemas.openxmlformats.org/officeDocument/2006/relationships" xmlns:p="http://schemas.openxmlformats.org/presentationml/2006/main">
-  <p:cSld>
-    <p:spTree>
-      <p:nvGrpSpPr>
-        <p:cNvPr id="1" name=""/>
-        <p:cNvGrpSpPr/>
-        <p:nvPr/>
-      </p:nvGrpSpPr>
-      <p:grpSpPr>
-        <a:xfrm>
-          <a:off x="0" y="0"/>
-          <a:ext cx="0" cy="0"/>
-          <a:chOff x="0" y="0"/>
-          <a:chExt cx="0" cy="0"/>
-        </a:xfrm>
-      </p:grpSpPr>
-      <p:sp>
-        <p:nvSpPr>
-          <p:cNvPr id="2" name="Title 1"/>
-          <p:cNvSpPr>
-            <a:spLocks noGrp="1"/>
-          </p:cNvSpPr>
-          <p:nvPr>
-            <p:ph type="title"/>
-          </p:nvPr>
-        </p:nvSpPr>
-        <p:spPr/>
-        <p:txBody>
-          <a:bodyPr/>
-          <a:lstStyle/>
-          <a:p>
-            <a:r>
-              <a:rPr sz="3400"/>
-              <a:t>① を調べる：手がかりはどこにあるか</a:t>
-            </a:r>
-          </a:p>
-        </p:txBody>
-      </p:sp>
-      <p:sp>
-        <p:nvSpPr>
-          <p:cNvPr id="3" name="Content Placeholder 2"/>
-          <p:cNvSpPr>
-            <a:spLocks noGrp="1"/>
-          </p:cNvSpPr>
-          <p:nvPr>
-            <p:ph idx="1"/>
-          </p:nvPr>
-        </p:nvSpPr>
-        <p:spPr>
-          <a:xfrm>
-            <a:off x="841248" y="1463040"/>
-            <a:ext cx="10515600" cy="4937760"/>
-          </a:xfrm>
-        </p:spPr>
-        <p:txBody>
-          <a:bodyPr/>
-          <a:lstStyle/>
-          <a:p>
-            <a:r>
-              <a:rPr sz="2200"/>
-              <a:t>フィッシャー情報：データがパラメータをどれだけ決められるか</a:t>
-            </a:r>
-          </a:p>
-          <a:p>
-            <a:r>
-              <a:rPr sz="2200"/>
-              <a:t>ICS など他の成分では説明できない「ハローだけの手がかり」を、空の場所ごとに計算</a:t>
-            </a:r>
-          </a:p>
-          <a:p>
-            <a:pPr lvl="1"/>
-            <a:r>
-              <a:rPr sz="1800"/>
-              <a:t>その 54% がバブル領域（面積は 34%）に集中</a:t>
-            </a:r>
-          </a:p>
-          <a:p>
-            <a:r>
-              <a:rPr sz="2200"/>
-              <a:t>手がかりの減り方だけで予測すると 6.6σ、実測 5.0σ</a:t>
-            </a:r>
-          </a:p>
-          <a:p>
-            <a:r>
-              <a:rPr sz="2200"/>
-              <a:t>同じ形の領域を横にずらして外すと 15〜16σ</a:t>
-            </a:r>
-          </a:p>
-          <a:p>
-            <a:r>
-              <a:rPr sz="2200"/>
-              <a:t>→ 19 → 5σ は「手がかりを捨てた」から。汚染の証拠ではない</a:t>
-            </a:r>
-          </a:p>
-        </p:txBody>
-      </p:sp>
-    </p:spTree>
-  </p:cSld>
-  <p:clrMapOvr>
-    <a:masterClrMapping/>
-  </p:clrMapOvr>
-</p:sld>
-</file>
-
 <file path=ppt/slides/slide26.xml><?xml version="1.0" encoding="utf-8"?>
 <p:sld xmlns:a="http://schemas.openxmlformats.org/drawingml/2006/main" xmlns:r="http://schemas.openxmlformats.org/officeDocument/2006/relationships" xmlns:p="http://schemas.openxmlformats.org/presentationml/2006/main">
   <p:cSld>
@@ -10413,8 +10577,8 @@
           <a:lstStyle/>
           <a:p>
             <a:r>
-              <a:rPr sz="3400"/>
-              <a:t>① を調べる：ICS が犯人なら</a:t>
+              <a:rPr sz="3000"/>
+              <a:t>縮退が引き起こした 2 つの疑問</a:t>
             </a:r>
           </a:p>
         </p:txBody>
@@ -10432,7 +10596,7 @@
         <p:spPr>
           <a:xfrm>
             <a:off x="841248" y="1463040"/>
-            <a:ext cx="10515600" cy="4114800"/>
+            <a:ext cx="10515600" cy="4937760"/>
           </a:xfrm>
         </p:spPr>
         <p:txBody>
@@ -10440,88 +10604,35 @@
           <a:lstStyle/>
           <a:p>
             <a:r>
-              <a:rPr sz="2200"/>
-              <a:t>ICS をバブルの内と外で別々の明るさにして当てはめた</a:t>
+              <a:rPr sz="2400"/>
+              <a:t>① バブル領域を外すと 19.5σ → 5.0σ に落ちる</a:t>
             </a:r>
           </a:p>
           <a:p>
             <a:pPr lvl="1"/>
             <a:r>
-              <a:rPr sz="1800"/>
-              <a:t>内側が約 2.3 倍明るければ、ハローの改善の 92% を ICS が説明</a:t>
-            </a:r>
-          </a:p>
-          <a:p>
-            <a:r>
-              <a:rPr sz="2200"/>
-              <a:t>ICS の計算の近似（等方近似）を直しても 1.1〜1.3 倍</a:t>
+              <a:rPr sz="2000"/>
+              <a:t>ハローは、本当は ICS やバブルの間違いでは？</a:t>
+            </a:r>
+          </a:p>
+          <a:p>
+            <a:r>
+              <a:rPr sz="2400"/>
+              <a:t>② 何も無い空でも、最大 4.5σ が出る</a:t>
             </a:r>
           </a:p>
           <a:p>
             <a:pPr lvl="1"/>
             <a:r>
-              <a:rPr sz="1800"/>
-              <a:t>しかも外側のほうが大きくなる → 2.3 倍には届かない</a:t>
-            </a:r>
-          </a:p>
-          <a:p>
-            <a:r>
-              <a:rPr sz="2200"/>
-              <a:t>ICS を 3 種類に分けて、それぞれ自由に動かしても</a:t>
-            </a:r>
-          </a:p>
-          <a:p>
-            <a:pPr lvl="1"/>
-            <a:r>
-              <a:rPr sz="1800"/>
-              <a:t>19.5σ → 18.4σ（約 1σ しか下がらない）</a:t>
-            </a:r>
-          </a:p>
-          <a:p>
-            <a:r>
-              <a:rPr sz="2200"/>
-              <a:t>→ ICS の「明るさ」の間違いでは、ハローを説明できない</a:t>
-            </a:r>
-          </a:p>
-        </p:txBody>
-      </p:sp>
-      <p:sp>
-        <p:nvSpPr>
-          <p:cNvPr id="8" name="TextBox 7">
-            <a:extLst>
-              <a:ext uri="{FF2B5EF4-FFF2-40B4-BE49-F238E27FC236}">
-                <a16:creationId xmlns:a16="http://schemas.microsoft.com/office/drawing/2014/main" id="{F85CD606-E3CE-F314-B3EE-F3D7028115CB}"/>
-              </a:ext>
-            </a:extLst>
-          </p:cNvPr>
-          <p:cNvSpPr txBox="1"/>
-          <p:nvPr/>
-        </p:nvSpPr>
-        <p:spPr>
-          <a:xfrm>
-            <a:off x="5837182" y="5663239"/>
-            <a:ext cx="6093372" cy="923330"/>
-          </a:xfrm>
-          <a:prstGeom prst="rect">
-            <a:avLst/>
-          </a:prstGeom>
-          <a:noFill/>
-        </p:spPr>
-        <p:txBody>
-          <a:bodyPr wrap="square">
-            <a:spAutoFit/>
-          </a:bodyPr>
-          <a:lstStyle/>
-          <a:p>
-            <a:r>
-              <a:rPr lang="en-US" sz="1400" b="1"/>
-              <a:t>Reference:</a:t>
-            </a:r>
-            <a:r>
-              <a:rPr lang="en-US" sz="1400"/>
-              <a:t> I. V. Moskalenko &amp; A. W. Strong (2000), ApJ 528, 357</a:t>
-            </a:r>
-            <a:endParaRPr lang="en-US"/>
+              <a:rPr sz="2000"/>
+              <a:t>σ をそのまま信じてよいのか？</a:t>
+            </a:r>
+          </a:p>
+          <a:p>
+            <a:r>
+              <a:rPr sz="2400"/>
+              <a:t>→ 次から、1 つずつ調べた結果</a:t>
+            </a:r>
           </a:p>
         </p:txBody>
       </p:sp>
@@ -10567,7 +10678,7 @@
           <a:p>
             <a:r>
               <a:rPr sz="3400"/>
-              <a:t>② を調べる：σ を信じてよいか</a:t>
+              <a:t>① を調べる：手がかりはどこにあるか</a:t>
             </a:r>
           </a:p>
         </p:txBody>
@@ -10585,7 +10696,7 @@
         <p:spPr>
           <a:xfrm>
             <a:off x="841248" y="1463040"/>
-            <a:ext cx="10515600" cy="4114800"/>
+            <a:ext cx="10515600" cy="4937760"/>
           </a:xfrm>
         </p:spPr>
         <p:txBody>
@@ -10594,80 +10705,46 @@
           <a:p>
             <a:r>
               <a:rPr sz="2200"/>
-              <a:t>何も無い空 23 か所で、天の川と同じ解析をした</a:t>
+              <a:t>フィッシャー情報：データがパラメータをどれだけ決められるか</a:t>
             </a:r>
           </a:p>
           <a:p>
             <a:r>
               <a:rPr sz="2200"/>
-              <a:t>本物の信号が無ければ、σ は「平均 0、ばらつき 1」になるはず</a:t>
+              <a:t>ICS など他の成分では説明できない「ハローだけの手がかり」を、空の場所ごとに計算</a:t>
             </a:r>
           </a:p>
           <a:p>
             <a:pPr lvl="1"/>
             <a:r>
               <a:rPr sz="1800"/>
-              <a:t>Wilks の定理が成り立っていれば</a:t>
+              <a:t>その 54% がバブル領域（面積は 34%）に集中</a:t>
             </a:r>
           </a:p>
           <a:p>
             <a:r>
               <a:rPr sz="2200"/>
-              <a:t>実際のばらつき：1.26（95% 区間 1.14–1.39）</a:t>
-            </a:r>
-          </a:p>
-          <a:p>
-            <a:pPr lvl="1"/>
-            <a:r>
-              <a:rPr sz="1800"/>
-              <a:t>σ は 1.26 倍大きく出ている</a:t>
+              <a:t>手がかりの減り方だけで予測すると 6.6σ、実測 5.0σ</a:t>
             </a:r>
           </a:p>
           <a:p>
             <a:r>
               <a:rPr sz="2200"/>
-              <a:t>19.5σ を較正すると 19.5 ÷ 1.26 ≈ 15σ（14.0–17.0σ）</a:t>
-            </a:r>
-          </a:p>
-        </p:txBody>
-      </p:sp>
-      <p:sp>
-        <p:nvSpPr>
-          <p:cNvPr id="8" name="TextBox 7">
-            <a:extLst>
-              <a:ext uri="{FF2B5EF4-FFF2-40B4-BE49-F238E27FC236}">
-                <a16:creationId xmlns:a16="http://schemas.microsoft.com/office/drawing/2014/main" id="{F85CD606-E3CE-F314-B3EE-F3D7028115CB}"/>
-              </a:ext>
-            </a:extLst>
-          </p:cNvPr>
-          <p:cNvSpPr txBox="1"/>
-          <p:nvPr/>
-        </p:nvSpPr>
-        <p:spPr>
-          <a:xfrm>
-            <a:off x="5837182" y="5663239"/>
-            <a:ext cx="6093372" cy="923330"/>
-          </a:xfrm>
-          <a:prstGeom prst="rect">
-            <a:avLst/>
-          </a:prstGeom>
-          <a:noFill/>
-        </p:spPr>
-        <p:txBody>
-          <a:bodyPr wrap="square">
-            <a:spAutoFit/>
-          </a:bodyPr>
-          <a:lstStyle/>
-          <a:p>
-            <a:r>
-              <a:rPr lang="en-US" sz="1400" b="1"/>
-              <a:t>Reference:</a:t>
-            </a:r>
-            <a:r>
-              <a:rPr lang="en-US" sz="1400"/>
-              <a:t> B. Efron &amp; R. J. Tibshirani (1993), An Introduction to the Bootstrap</a:t>
-            </a:r>
-            <a:endParaRPr lang="en-US"/>
+              <a:t>同じ形の領域を横にずらして外すと 15〜16σ</a:t>
+            </a:r>
+          </a:p>
+          <a:p>
+            <a:r>
+              <a:rPr sz="2200"/>
+              <a:t>→ 19 → 5σ は「手がかりを捨てた」から。汚染の証拠ではない</a:t>
+            </a:r>
+          </a:p>
+          <a:p>
+            <a:pPr/>
+            <a:r>
+              <a:rPr sz="2000"/>
+              <a:t>たとえ：写真の真ん中を隠すと、2 つの光を見分けるヒントが減って自信が下がる</a:t>
+            </a:r>
           </a:p>
         </p:txBody>
       </p:sp>
@@ -10713,45 +10790,93 @@
           <a:p>
             <a:r>
               <a:rPr sz="3400"/>
-              <a:t>② の結果：エネルギーごとのばらつき</a:t>
-            </a:r>
-          </a:p>
-        </p:txBody>
-      </p:sp>
-      <p:pic>
-        <p:nvPicPr>
-          <p:cNvPr id="3" name="Picture 2" descr="fig_null_variance.png"/>
-          <p:cNvPicPr>
-            <a:picLocks noChangeAspect="1"/>
-          </p:cNvPicPr>
-          <p:nvPr/>
-        </p:nvPicPr>
-        <p:blipFill>
-          <a:blip r:embed="rId3"/>
-          <a:stretch>
-            <a:fillRect/>
-          </a:stretch>
-        </p:blipFill>
+              <a:t>① を調べる：ICS が犯人なら</a:t>
+            </a:r>
+          </a:p>
+        </p:txBody>
+      </p:sp>
+      <p:sp>
+        <p:nvSpPr>
+          <p:cNvPr id="3" name="Content Placeholder 2"/>
+          <p:cNvSpPr>
+            <a:spLocks noGrp="1"/>
+          </p:cNvSpPr>
+          <p:nvPr>
+            <p:ph idx="1"/>
+          </p:nvPr>
+        </p:nvSpPr>
         <p:spPr>
           <a:xfrm>
-            <a:off x="2103120" y="1234440"/>
-            <a:ext cx="7156174" cy="4114800"/>
+            <a:off x="841248" y="1463040"/>
+            <a:ext cx="10515600" cy="4114800"/>
           </a:xfrm>
-          <a:prstGeom prst="rect">
-            <a:avLst/>
-          </a:prstGeom>
         </p:spPr>
-      </p:pic>
-      <p:sp>
-        <p:nvSpPr>
-          <p:cNvPr id="4" name="TextBox 3"/>
+        <p:txBody>
+          <a:bodyPr/>
+          <a:lstStyle/>
+          <a:p>
+            <a:r>
+              <a:rPr sz="2200"/>
+              <a:t>ICS をバブルの内と外で別々の明るさにして当てはめた</a:t>
+            </a:r>
+          </a:p>
+          <a:p>
+            <a:pPr lvl="1"/>
+            <a:r>
+              <a:rPr sz="1800"/>
+              <a:t>内側が約 2.3 倍明るければ、ハローの改善の 92% を ICS が説明</a:t>
+            </a:r>
+          </a:p>
+          <a:p>
+            <a:r>
+              <a:rPr sz="2200"/>
+              <a:t>ICS の計算の近似（等方近似）を直しても 1.1〜1.3 倍</a:t>
+            </a:r>
+          </a:p>
+          <a:p>
+            <a:pPr lvl="1"/>
+            <a:r>
+              <a:rPr sz="1800"/>
+              <a:t>しかも外側のほうが大きくなる → 2.3 倍には届かない</a:t>
+            </a:r>
+          </a:p>
+          <a:p>
+            <a:r>
+              <a:rPr sz="2200"/>
+              <a:t>ICS を 3 種類に分けて、それぞれ自由に動かしても</a:t>
+            </a:r>
+          </a:p>
+          <a:p>
+            <a:pPr lvl="1"/>
+            <a:r>
+              <a:rPr sz="1800"/>
+              <a:t>19.5σ → 18.4σ（約 1σ しか下がらない）</a:t>
+            </a:r>
+          </a:p>
+          <a:p>
+            <a:r>
+              <a:rPr sz="2200"/>
+              <a:t>→ ICS の「明るさ」の間違いでは、ハローを説明できない</a:t>
+            </a:r>
+          </a:p>
+        </p:txBody>
+      </p:sp>
+      <p:sp>
+        <p:nvSpPr>
+          <p:cNvPr id="8" name="TextBox 7">
+            <a:extLst>
+              <a:ext uri="{FF2B5EF4-FFF2-40B4-BE49-F238E27FC236}">
+                <a16:creationId xmlns:a16="http://schemas.microsoft.com/office/drawing/2014/main" id="{F85CD606-E3CE-F314-B3EE-F3D7028115CB}"/>
+              </a:ext>
+            </a:extLst>
+          </p:cNvPr>
           <p:cNvSpPr txBox="1"/>
           <p:nvPr/>
         </p:nvSpPr>
         <p:spPr>
           <a:xfrm>
-            <a:off x="457200" y="5486400"/>
-            <a:ext cx="11247120" cy="457200"/>
+            <a:off x="5837182" y="5663239"/>
+            <a:ext cx="6093372" cy="923330"/>
           </a:xfrm>
           <a:prstGeom prst="rect">
             <a:avLst/>
@@ -10765,9 +10890,14 @@
           <a:lstStyle/>
           <a:p>
             <a:r>
-              <a:rPr sz="2000"/>
-              <a:t>どのエネルギーでもばらつきは 1 より大きい（光子が十分ある範囲）</a:t>
-            </a:r>
+              <a:rPr lang="en-US" sz="1400" b="1"/>
+              <a:t>Reference:</a:t>
+            </a:r>
+            <a:r>
+              <a:rPr lang="en-US" sz="1400"/>
+              <a:t> I. V. Moskalenko &amp; A. W. Strong (2000), ApJ 528, 357</a:t>
+            </a:r>
+            <a:endParaRPr lang="en-US"/>
           </a:p>
         </p:txBody>
       </p:sp>
@@ -10813,7 +10943,7 @@
           <a:p>
             <a:r>
               <a:rPr sz="3400"/>
-              <a:t>③ を調べる：19.1σ が再現できない理由</a:t>
+              <a:t>② を調べる：σ を信じてよいか</a:t>
             </a:r>
           </a:p>
         </p:txBody>
@@ -10831,7 +10961,7 @@
         <p:spPr>
           <a:xfrm>
             <a:off x="841248" y="1463040"/>
-            <a:ext cx="10515600" cy="4937760"/>
+            <a:ext cx="10515600" cy="4114800"/>
           </a:xfrm>
         </p:spPr>
         <p:txBody>
@@ -10839,27 +10969,88 @@
           <a:lstStyle/>
           <a:p>
             <a:r>
-              <a:rPr sz="2400"/>
-              <a:t>7/23 の計算の直後にコードを直していて、当時の状態が残っていなかった</a:t>
-            </a:r>
-          </a:p>
-          <a:p>
-            <a:r>
-              <a:rPr sz="2400"/>
-              <a:t>今のコードは、何度計算しても同じ答えになる（10/1 に確認）</a:t>
-            </a:r>
-          </a:p>
-          <a:p>
-            <a:r>
-              <a:rPr sz="2400"/>
-              <a:t>結果ファイルに、コードの版と設定を自動で記録するようにした</a:t>
-            </a:r>
-          </a:p>
-          <a:p>
-            <a:r>
-              <a:rPr sz="2400"/>
-              <a:t>→ 10/2 に Totani と同じやり方で計算し直し、主結果は 19.5σ</a:t>
-            </a:r>
+              <a:rPr sz="2200"/>
+              <a:t>何も無い空 23 か所で、天の川と同じ解析をした</a:t>
+            </a:r>
+          </a:p>
+          <a:p>
+            <a:pPr lvl="1"/>
+            <a:r>
+              <a:rPr sz="1700"/>
+              <a:t>たとえ：真っ暗な所を写したのに「明かりがある」と出てしまう（誤検出）が、どれくらい起きるか</a:t>
+            </a:r>
+          </a:p>
+          <a:p>
+            <a:r>
+              <a:rPr sz="2200"/>
+              <a:t>本物の信号が無ければ、σ は「平均 0、ばらつき 1」になるはず</a:t>
+            </a:r>
+          </a:p>
+          <a:p>
+            <a:pPr lvl="1"/>
+            <a:r>
+              <a:rPr sz="1800"/>
+              <a:t>Wilks の定理が成り立っていれば</a:t>
+            </a:r>
+          </a:p>
+          <a:p>
+            <a:r>
+              <a:rPr sz="2200"/>
+              <a:t>実際のばらつき：1.26（95% 区間 1.14–1.39）</a:t>
+            </a:r>
+          </a:p>
+          <a:p>
+            <a:pPr lvl="1"/>
+            <a:r>
+              <a:rPr sz="1800"/>
+              <a:t>σ は 1.26 倍大きく出ている</a:t>
+            </a:r>
+          </a:p>
+          <a:p>
+            <a:r>
+              <a:rPr sz="2200"/>
+              <a:t>19.5σ を較正すると 19.5 ÷ 1.26 ≈ 15σ（14.0–17.0σ）</a:t>
+            </a:r>
+          </a:p>
+        </p:txBody>
+      </p:sp>
+      <p:sp>
+        <p:nvSpPr>
+          <p:cNvPr id="8" name="TextBox 7">
+            <a:extLst>
+              <a:ext uri="{FF2B5EF4-FFF2-40B4-BE49-F238E27FC236}">
+                <a16:creationId xmlns:a16="http://schemas.microsoft.com/office/drawing/2014/main" id="{F85CD606-E3CE-F314-B3EE-F3D7028115CB}"/>
+              </a:ext>
+            </a:extLst>
+          </p:cNvPr>
+          <p:cNvSpPr txBox="1"/>
+          <p:nvPr/>
+        </p:nvSpPr>
+        <p:spPr>
+          <a:xfrm>
+            <a:off x="5837182" y="5663239"/>
+            <a:ext cx="6093372" cy="923330"/>
+          </a:xfrm>
+          <a:prstGeom prst="rect">
+            <a:avLst/>
+          </a:prstGeom>
+          <a:noFill/>
+        </p:spPr>
+        <p:txBody>
+          <a:bodyPr wrap="square">
+            <a:spAutoFit/>
+          </a:bodyPr>
+          <a:lstStyle/>
+          <a:p>
+            <a:r>
+              <a:rPr lang="en-US" sz="1400" b="1"/>
+              <a:t>Reference:</a:t>
+            </a:r>
+            <a:r>
+              <a:rPr lang="en-US" sz="1400"/>
+              <a:t> B. Efron &amp; R. J. Tibshirani (1993), An Introduction to the Bootstrap</a:t>
+            </a:r>
+            <a:endParaRPr lang="en-US"/>
           </a:p>
         </p:txBody>
       </p:sp>
@@ -11141,59 +11332,60 @@
           <a:p>
             <a:r>
               <a:rPr sz="3400"/>
-              <a:t>ここまでのまとめ</a:t>
-            </a:r>
-          </a:p>
-        </p:txBody>
-      </p:sp>
-      <p:sp>
-        <p:nvSpPr>
-          <p:cNvPr id="3" name="Content Placeholder 2"/>
-          <p:cNvSpPr>
-            <a:spLocks noGrp="1"/>
-          </p:cNvSpPr>
-          <p:nvPr>
-            <p:ph idx="1"/>
-          </p:nvPr>
-        </p:nvSpPr>
+              <a:t>② の結果：エネルギーごとのばらつき</a:t>
+            </a:r>
+          </a:p>
+        </p:txBody>
+      </p:sp>
+      <p:pic>
+        <p:nvPicPr>
+          <p:cNvPr id="3" name="Picture 2" descr="fig_null_variance.png"/>
+          <p:cNvPicPr>
+            <a:picLocks noChangeAspect="1"/>
+          </p:cNvPicPr>
+          <p:nvPr/>
+        </p:nvPicPr>
+        <p:blipFill>
+          <a:blip r:embed="rId3"/>
+          <a:stretch>
+            <a:fillRect/>
+          </a:stretch>
+        </p:blipFill>
         <p:spPr>
           <a:xfrm>
-            <a:off x="841248" y="1463040"/>
-            <a:ext cx="10515600" cy="4937760"/>
+            <a:off x="2103120" y="1234440"/>
+            <a:ext cx="7156174" cy="4114800"/>
           </a:xfrm>
+          <a:prstGeom prst="rect">
+            <a:avLst/>
+          </a:prstGeom>
         </p:spPr>
-        <p:txBody>
-          <a:bodyPr/>
-          <a:lstStyle/>
-          <a:p>
-            <a:r>
-              <a:rPr sz="2400"/>
-              <a:t>ICS の明るさ・バブル・計算の近似の間違いでは、超過を説明できない</a:t>
-            </a:r>
-          </a:p>
-          <a:p>
-            <a:r>
-              <a:rPr sz="2400"/>
-              <a:t>σ は 1.26 倍の過大評価 → 較正すると約 15σ</a:t>
-            </a:r>
-          </a:p>
-          <a:p>
-            <a:r>
-              <a:rPr sz="2400"/>
-              <a:t>ただし、暗黒物質の証拠ではない</a:t>
-            </a:r>
-          </a:p>
-          <a:p>
-            <a:pPr lvl="1"/>
+      </p:pic>
+      <p:sp>
+        <p:nvSpPr>
+          <p:cNvPr id="4" name="TextBox 3"/>
+          <p:cNvSpPr txBox="1"/>
+          <p:nvPr/>
+        </p:nvSpPr>
+        <p:spPr>
+          <a:xfrm>
+            <a:off x="457200" y="5486400"/>
+            <a:ext cx="11247120" cy="457200"/>
+          </a:xfrm>
+          <a:prstGeom prst="rect">
+            <a:avLst/>
+          </a:prstGeom>
+          <a:noFill/>
+        </p:spPr>
+        <p:txBody>
+          <a:bodyPr wrap="square">
+            <a:spAutoFit/>
+          </a:bodyPr>
+          <a:lstStyle/>
+          <a:p>
             <a:r>
               <a:rPr sz="2000"/>
-              <a:t>ICS の「空間の形」の間違いは否定できていない</a:t>
-            </a:r>
-          </a:p>
-          <a:p>
-            <a:r>
-              <a:rPr sz="2400"/>
-              <a:t>→ 独立な確認として、矮小銀河を見る</a:t>
+              <a:t>どのエネルギーでもばらつきは 1 より大きい（光子が十分ある範囲）</a:t>
             </a:r>
           </a:p>
         </p:txBody>
@@ -11240,7 +11432,7 @@
           <a:p>
             <a:r>
               <a:rPr sz="3400"/>
-              <a:t>矮小銀河で確かめる</a:t>
+              <a:t>ここまでのまとめ</a:t>
             </a:r>
           </a:p>
         </p:txBody>
@@ -11258,7 +11450,7 @@
         <p:spPr>
           <a:xfrm>
             <a:off x="841248" y="1463040"/>
-            <a:ext cx="10515600" cy="4114800"/>
+            <a:ext cx="10515600" cy="4937760"/>
           </a:xfrm>
         </p:spPr>
         <p:txBody>
@@ -11267,80 +11459,33 @@
           <a:p>
             <a:r>
               <a:rPr sz="2400"/>
-              <a:t>矮小銀河：天の川のまわりの小さな銀河</a:t>
+              <a:t>ICS の明るさ・バブル・計算の近似の間違いでは、超過を説明できない</a:t>
+            </a:r>
+          </a:p>
+          <a:p>
+            <a:r>
+              <a:rPr sz="2400"/>
+              <a:t>σ は 1.26 倍の過大評価 → 較正すると約 15σ</a:t>
+            </a:r>
+          </a:p>
+          <a:p>
+            <a:r>
+              <a:rPr sz="2400"/>
+              <a:t>ただし、暗黒物質の証拠ではない</a:t>
             </a:r>
           </a:p>
           <a:p>
             <a:pPr lvl="1"/>
             <a:r>
               <a:rPr sz="2000"/>
-              <a:t>暗黒物質が多く、ガスや星形成が少ない（雑音が少ない）</a:t>
+              <a:t>ICS の「空間の形」の間違いは否定できていない</a:t>
             </a:r>
           </a:p>
           <a:p>
             <a:r>
               <a:rPr sz="2400"/>
-              <a:t>暗黒物質なら、矮小銀河からも同じ 20 GeV の光が来るはず</a:t>
-            </a:r>
-          </a:p>
-          <a:p>
-            <a:r>
-              <a:rPr sz="2400"/>
-              <a:t>同じ手法を、各天体のまわり半径 10° に使った</a:t>
-            </a:r>
-          </a:p>
-          <a:p>
-            <a:pPr lvl="1"/>
-            <a:r>
-              <a:rPr sz="2000"/>
-              <a:t>矮小銀河 54 ＋ M31・M33 ＋ 何も無い空 23 か所</a:t>
-            </a:r>
-          </a:p>
-          <a:p>
-            <a:r>
-              <a:rPr sz="2400"/>
-              <a:t>矮小銀河は小さい（0.2〜0.4°）ので、広がった ICS とは縮退しない</a:t>
-            </a:r>
-          </a:p>
-        </p:txBody>
-      </p:sp>
-      <p:sp>
-        <p:nvSpPr>
-          <p:cNvPr id="8" name="TextBox 7">
-            <a:extLst>
-              <a:ext uri="{FF2B5EF4-FFF2-40B4-BE49-F238E27FC236}">
-                <a16:creationId xmlns:a16="http://schemas.microsoft.com/office/drawing/2014/main" id="{F85CD606-E3CE-F314-B3EE-F3D7028115CB}"/>
-              </a:ext>
-            </a:extLst>
-          </p:cNvPr>
-          <p:cNvSpPr txBox="1"/>
-          <p:nvPr/>
-        </p:nvSpPr>
-        <p:spPr>
-          <a:xfrm>
-            <a:off x="5837182" y="5663239"/>
-            <a:ext cx="6093372" cy="923330"/>
-          </a:xfrm>
-          <a:prstGeom prst="rect">
-            <a:avLst/>
-          </a:prstGeom>
-          <a:noFill/>
-        </p:spPr>
-        <p:txBody>
-          <a:bodyPr wrap="square">
-            <a:spAutoFit/>
-          </a:bodyPr>
-          <a:lstStyle/>
-          <a:p>
-            <a:r>
-              <a:rPr lang="en-US" sz="1400" b="1"/>
-              <a:t>Reference:</a:t>
-            </a:r>
-            <a:r>
-              <a:rPr lang="en-US" sz="1400"/>
-              <a:t> A. B. Pace (2025), Open J. Astrophys. 8, 142</a:t>
-            </a:r>
-            <a:endParaRPr lang="en-US"/>
+              <a:t>→ 独立な確認として、矮小銀河を見る</a:t>
+            </a:r>
           </a:p>
         </p:txBody>
       </p:sp>
@@ -11386,7 +11531,7 @@
           <a:p>
             <a:r>
               <a:rPr sz="3400"/>
-              <a:t>予測の立て方：J ファクター</a:t>
+              <a:t>矮小銀河で確かめる</a:t>
             </a:r>
           </a:p>
         </p:txBody>
@@ -11413,38 +11558,39 @@
           <a:p>
             <a:r>
               <a:rPr sz="2400"/>
-              <a:t>対消滅の明るさ：F = ⟨σv⟩ / (8π m²) × dN/dE × J</a:t>
+              <a:t>矮小銀河：天の川のまわりの小さな銀河</a:t>
+            </a:r>
+          </a:p>
+          <a:p>
+            <a:pPr lvl="1"/>
+            <a:r>
+              <a:rPr sz="2000"/>
+              <a:t>暗黒物質が多く、ガスや星形成が少ない（雑音が少ない）</a:t>
             </a:r>
           </a:p>
           <a:p>
             <a:r>
               <a:rPr sz="2400"/>
-              <a:t>J ファクター = 暗黒物質の密度の 2 乗を、視線方向に足し合わせた量</a:t>
+              <a:t>暗黒物質なら、矮小銀河からも同じ 20 GeV の光が来るはず</a:t>
             </a:r>
           </a:p>
           <a:p>
             <a:r>
               <a:rPr sz="2400"/>
-              <a:t>天の川と矮小銀河で粒子は同じ → 比をとると J の比だけが残る</a:t>
+              <a:t>同じ手法を、各天体のまわり半径 10° に使った</a:t>
             </a:r>
           </a:p>
           <a:p>
             <a:pPr lvl="1"/>
             <a:r>
               <a:rPr sz="2000"/>
-              <a:t>F_矮小 = F_天の川 × J_矮小 / J_天の川</a:t>
+              <a:t>矮小銀河 54 ＋ M31・M33 ＋ 何も無い空 23 か所</a:t>
             </a:r>
           </a:p>
           <a:p>
             <a:r>
               <a:rPr sz="2400"/>
-              <a:t>粒子の質量などを仮定せずに「何σ見えるはずか」が出る</a:t>
-            </a:r>
-          </a:p>
-          <a:p>
-            <a:r>
-              <a:rPr sz="2400"/>
-              <a:t>矮小銀河の J は、星の動きから推定する</a:t>
+              <a:t>矮小銀河は小さい（0.2〜0.4°）ので、広がった ICS とは縮退しない</a:t>
             </a:r>
           </a:p>
         </p:txBody>
@@ -11483,7 +11629,7 @@
             </a:r>
             <a:r>
               <a:rPr lang="en-US" sz="1400"/>
-              <a:t> A. B. Pace &amp; L. E. Strigari (2019), MNRAS 482, 3480</a:t>
+              <a:t> A. B. Pace (2025), Open J. Astrophys. 8, 142</a:t>
             </a:r>
             <a:endParaRPr lang="en-US"/>
           </a:p>
@@ -11531,45 +11677,85 @@
           <a:p>
             <a:r>
               <a:rPr sz="3400"/>
-              <a:t>結果：どこにも信号は見えなかった</a:t>
-            </a:r>
-          </a:p>
-        </p:txBody>
-      </p:sp>
-      <p:pic>
-        <p:nvPicPr>
-          <p:cNvPr id="3" name="Picture 2" descr="fig_dwarf_results.png"/>
-          <p:cNvPicPr>
-            <a:picLocks noChangeAspect="1"/>
-          </p:cNvPicPr>
-          <p:nvPr/>
-        </p:nvPicPr>
-        <p:blipFill>
-          <a:blip r:embed="rId3"/>
-          <a:stretch>
-            <a:fillRect/>
-          </a:stretch>
-        </p:blipFill>
+              <a:t>予測の立て方：J ファクター</a:t>
+            </a:r>
+          </a:p>
+        </p:txBody>
+      </p:sp>
+      <p:sp>
+        <p:nvSpPr>
+          <p:cNvPr id="3" name="Content Placeholder 2"/>
+          <p:cNvSpPr>
+            <a:spLocks noGrp="1"/>
+          </p:cNvSpPr>
+          <p:nvPr>
+            <p:ph idx="1"/>
+          </p:nvPr>
+        </p:nvSpPr>
         <p:spPr>
           <a:xfrm>
-            <a:off x="2194560" y="1234440"/>
-            <a:ext cx="7156174" cy="4114800"/>
+            <a:off x="841248" y="1463040"/>
+            <a:ext cx="10515600" cy="4114800"/>
           </a:xfrm>
-          <a:prstGeom prst="rect">
-            <a:avLst/>
-          </a:prstGeom>
         </p:spPr>
-      </p:pic>
-      <p:sp>
-        <p:nvSpPr>
-          <p:cNvPr id="4" name="TextBox 3"/>
+        <p:txBody>
+          <a:bodyPr/>
+          <a:lstStyle/>
+          <a:p>
+            <a:r>
+              <a:rPr sz="2400"/>
+              <a:t>対消滅の明るさ：F = ⟨σv⟩ / (8π m²) × dN/dE × J</a:t>
+            </a:r>
+          </a:p>
+          <a:p>
+            <a:r>
+              <a:rPr sz="2400"/>
+              <a:t>J ファクター = 暗黒物質の密度の 2 乗を、視線方向に足し合わせた量</a:t>
+            </a:r>
+          </a:p>
+          <a:p>
+            <a:r>
+              <a:rPr sz="2400"/>
+              <a:t>天の川と矮小銀河で粒子は同じ → 比をとると J の比だけが残る</a:t>
+            </a:r>
+          </a:p>
+          <a:p>
+            <a:pPr lvl="1"/>
+            <a:r>
+              <a:rPr sz="2000"/>
+              <a:t>F_矮小 = F_天の川 × J_矮小 / J_天の川</a:t>
+            </a:r>
+          </a:p>
+          <a:p>
+            <a:r>
+              <a:rPr sz="2400"/>
+              <a:t>粒子の質量などを仮定せずに「何σ見えるはずか」が出る</a:t>
+            </a:r>
+          </a:p>
+          <a:p>
+            <a:r>
+              <a:rPr sz="2400"/>
+              <a:t>矮小銀河の J は、星の動きから推定する</a:t>
+            </a:r>
+          </a:p>
+        </p:txBody>
+      </p:sp>
+      <p:sp>
+        <p:nvSpPr>
+          <p:cNvPr id="8" name="TextBox 7">
+            <a:extLst>
+              <a:ext uri="{FF2B5EF4-FFF2-40B4-BE49-F238E27FC236}">
+                <a16:creationId xmlns:a16="http://schemas.microsoft.com/office/drawing/2014/main" id="{F85CD606-E3CE-F314-B3EE-F3D7028115CB}"/>
+              </a:ext>
+            </a:extLst>
+          </p:cNvPr>
           <p:cNvSpPr txBox="1"/>
           <p:nvPr/>
         </p:nvSpPr>
         <p:spPr>
           <a:xfrm>
-            <a:off x="457200" y="5486400"/>
-            <a:ext cx="11247120" cy="457200"/>
+            <a:off x="5837182" y="5663239"/>
+            <a:ext cx="6093372" cy="923330"/>
           </a:xfrm>
           <a:prstGeom prst="rect">
             <a:avLst/>
@@ -11583,9 +11769,14 @@
           <a:lstStyle/>
           <a:p>
             <a:r>
-              <a:rPr sz="2000"/>
-              <a:t>どの天体・どのエネルギーでも最大 +3.46σ（何も無い空でも 4.50σ）</a:t>
-            </a:r>
+              <a:rPr lang="en-US" sz="1400" b="1"/>
+              <a:t>Reference:</a:t>
+            </a:r>
+            <a:r>
+              <a:rPr lang="en-US" sz="1400"/>
+              <a:t> A. B. Pace &amp; L. E. Strigari (2019), MNRAS 482, 3480</a:t>
+            </a:r>
+            <a:endParaRPr lang="en-US"/>
           </a:p>
         </p:txBody>
       </p:sp>
@@ -11631,71 +11822,60 @@
           <a:p>
             <a:r>
               <a:rPr sz="3400"/>
-              <a:t>天体をまとめて比べる</a:t>
-            </a:r>
-          </a:p>
-        </p:txBody>
-      </p:sp>
-      <p:sp>
-        <p:nvSpPr>
-          <p:cNvPr id="3" name="Content Placeholder 2"/>
-          <p:cNvSpPr>
-            <a:spLocks noGrp="1"/>
-          </p:cNvSpPr>
-          <p:nvPr>
-            <p:ph idx="1"/>
-          </p:nvPr>
-        </p:nvSpPr>
+              <a:t>結果：どこにも信号は見えなかった</a:t>
+            </a:r>
+          </a:p>
+        </p:txBody>
+      </p:sp>
+      <p:pic>
+        <p:nvPicPr>
+          <p:cNvPr id="3" name="Picture 2" descr="fig_dwarf_results.png"/>
+          <p:cNvPicPr>
+            <a:picLocks noChangeAspect="1"/>
+          </p:cNvPicPr>
+          <p:nvPr/>
+        </p:nvPicPr>
+        <p:blipFill>
+          <a:blip r:embed="rId3"/>
+          <a:stretch>
+            <a:fillRect/>
+          </a:stretch>
+        </p:blipFill>
         <p:spPr>
           <a:xfrm>
-            <a:off x="841248" y="1463040"/>
-            <a:ext cx="10515600" cy="4937760"/>
+            <a:off x="2194560" y="1234440"/>
+            <a:ext cx="7156174" cy="4114800"/>
           </a:xfrm>
+          <a:prstGeom prst="rect">
+            <a:avLst/>
+          </a:prstGeom>
         </p:spPr>
-        <p:txBody>
-          <a:bodyPr/>
-          <a:lstStyle/>
-          <a:p>
-            <a:r>
-              <a:rPr sz="2400"/>
-              <a:t>1 個ずつでは弱いので、J が求まる 43 天体をまとめる</a:t>
-            </a:r>
-          </a:p>
-          <a:p>
-            <a:r>
-              <a:rPr sz="2400"/>
-              <a:t>T = Σ w_i z_i / √( Σ w_i² )、重み w_i = 天体 i の予測 σ</a:t>
-            </a:r>
-          </a:p>
-          <a:p>
-            <a:pPr lvl="1"/>
+      </p:pic>
+      <p:sp>
+        <p:nvSpPr>
+          <p:cNvPr id="4" name="TextBox 3"/>
+          <p:cNvSpPr txBox="1"/>
+          <p:nvPr/>
+        </p:nvSpPr>
+        <p:spPr>
+          <a:xfrm>
+            <a:off x="457200" y="5486400"/>
+            <a:ext cx="11247120" cy="457200"/>
+          </a:xfrm>
+          <a:prstGeom prst="rect">
+            <a:avLst/>
+          </a:prstGeom>
+          <a:noFill/>
+        </p:spPr>
+        <p:txBody>
+          <a:bodyPr wrap="square">
+            <a:spAutoFit/>
+          </a:bodyPr>
+          <a:lstStyle/>
+          <a:p>
             <a:r>
               <a:rPr sz="2000"/>
-              <a:t>z_i：天体 i の実測の σ（20 GeV）</a:t>
-            </a:r>
-          </a:p>
-          <a:p>
-            <a:r>
-              <a:rPr sz="2400"/>
-              <a:t>暗黒物質が無ければ：T は平均 0、ばらつき 1</a:t>
-            </a:r>
-          </a:p>
-          <a:p>
-            <a:r>
-              <a:rPr sz="2400"/>
-              <a:t>暗黒物質があれば：T の平均 = √( Σ pred_i² ) = 1.77</a:t>
-            </a:r>
-          </a:p>
-          <a:p>
-            <a:r>
-              <a:rPr sz="2400"/>
-              <a:t>実測 T = 0.39 → ずれ 1.4σ</a:t>
-            </a:r>
-          </a:p>
-          <a:p>
-            <a:r>
-              <a:rPr sz="2400"/>
-              <a:t>ただし、ここでは J に誤差は無いとしていた</a:t>
+              <a:t>どの天体・どのエネルギーでも最大 +3.46σ（何も無い空でも 4.50σ）</a:t>
             </a:r>
           </a:p>
         </p:txBody>
@@ -11742,7 +11922,7 @@
           <a:p>
             <a:r>
               <a:rPr sz="3400"/>
-              <a:t>ここで論文：J の誤差は小さく見積もられている</a:t>
+              <a:t>天体をまとめて比べる</a:t>
             </a:r>
           </a:p>
         </p:txBody>
@@ -11760,7 +11940,7 @@
         <p:spPr>
           <a:xfrm>
             <a:off x="841248" y="1463040"/>
-            <a:ext cx="10515600" cy="4114800"/>
+            <a:ext cx="10515600" cy="4937760"/>
           </a:xfrm>
         </p:spPr>
         <p:txBody>
@@ -11769,81 +11949,45 @@
           <a:p>
             <a:r>
               <a:rPr sz="2400"/>
-              <a:t>文献ごとの J の値は、書かれた誤差よりも大きくばらつく</a:t>
+              <a:t>1 個ずつでは弱いので、J が求まる 43 天体をまとめる</a:t>
             </a:r>
           </a:p>
           <a:p>
             <a:r>
               <a:rPr sz="2400"/>
-              <a:t>見落とされがちな誤差の原因（8 つ）</a:t>
+              <a:t>T = Σ w_i z_i / √( Σ w_i² )、重み w_i = 天体 i の予測 σ</a:t>
             </a:r>
           </a:p>
           <a:p>
             <a:pPr lvl="1"/>
             <a:r>
               <a:rPr sz="2000"/>
-              <a:t>点として扱う・ハローの形・星の分布の形の仮定</a:t>
-            </a:r>
-          </a:p>
-          <a:p>
-            <a:pPr lvl="1"/>
-            <a:r>
-              <a:rPr sz="2000"/>
-              <a:t>非球対称（最大 0.4 dex）・非平衡（〜0.1）・連星（Ret II で〜0.3）</a:t>
-            </a:r>
-          </a:p>
-          <a:p>
-            <a:pPr lvl="1"/>
-            <a:r>
-              <a:rPr sz="2000"/>
-              <a:t>前景の星の混入・誤差の分布が正規分布でない</a:t>
+              <a:t>z_i：天体 i の実測の σ（20 GeV）</a:t>
             </a:r>
           </a:p>
           <a:p>
             <a:r>
               <a:rPr sz="2400"/>
-              <a:t>Δlog₁₀J ≈ 0.5（約 3 倍）以上の誤差を見込むべき</a:t>
-            </a:r>
-          </a:p>
-        </p:txBody>
-      </p:sp>
-      <p:sp>
-        <p:nvSpPr>
-          <p:cNvPr id="8" name="TextBox 7">
-            <a:extLst>
-              <a:ext uri="{FF2B5EF4-FFF2-40B4-BE49-F238E27FC236}">
-                <a16:creationId xmlns:a16="http://schemas.microsoft.com/office/drawing/2014/main" id="{F85CD606-E3CE-F314-B3EE-F3D7028115CB}"/>
-              </a:ext>
-            </a:extLst>
-          </p:cNvPr>
-          <p:cNvSpPr txBox="1"/>
-          <p:nvPr/>
-        </p:nvSpPr>
-        <p:spPr>
-          <a:xfrm>
-            <a:off x="5837182" y="5663239"/>
-            <a:ext cx="6093372" cy="923330"/>
-          </a:xfrm>
-          <a:prstGeom prst="rect">
-            <a:avLst/>
-          </a:prstGeom>
-          <a:noFill/>
-        </p:spPr>
-        <p:txBody>
-          <a:bodyPr wrap="square">
-            <a:spAutoFit/>
-          </a:bodyPr>
-          <a:lstStyle/>
-          <a:p>
-            <a:r>
-              <a:rPr lang="en-US" sz="1400" b="1"/>
-              <a:t>Reference:</a:t>
-            </a:r>
-            <a:r>
-              <a:rPr lang="en-US" sz="1400"/>
-              <a:t> Bertólez-Martínez, Hooper &amp; Khatee Zathul (2026), arXiv:2609.20944 §II</a:t>
-            </a:r>
-            <a:endParaRPr lang="en-US"/>
+              <a:t>暗黒物質が無ければ：T は平均 0、ばらつき 1</a:t>
+            </a:r>
+          </a:p>
+          <a:p>
+            <a:r>
+              <a:rPr sz="2400"/>
+              <a:t>暗黒物質があれば：T の平均 = √( Σ pred_i² ) = 1.77</a:t>
+            </a:r>
+          </a:p>
+          <a:p>
+            <a:r>
+              <a:rPr sz="2400"/>
+              <a:t>実測 T = 0.39 → ずれ 1.4σ</a:t>
+            </a:r>
+          </a:p>
+          <a:p>
+            <a:r>
+              <a:rPr sz="2400"/>
+              <a:t>ただし、ここでは J に誤差は無いとしていた</a:t>
+            </a:r>
           </a:p>
         </p:txBody>
       </p:sp>
@@ -11889,7 +12033,7 @@
           <a:p>
             <a:r>
               <a:rPr sz="3400"/>
-              <a:t>詳細なmethodについて①：仮想データの作り方</a:t>
+              <a:t>ここで論文：J の誤差は小さく見積もられている</a:t>
             </a:r>
           </a:p>
         </p:txBody>
@@ -11915,47 +12059,41 @@
           <a:lstStyle/>
           <a:p>
             <a:r>
-              <a:rPr sz="2200"/>
-              <a:t>Fermi-LAT の観測を計算機の中で作る（FermiTools、fermipy）</a:t>
+              <a:rPr sz="2400"/>
+              <a:t>文献ごとの J の値は、書かれた誤差よりも大きくばらつく</a:t>
+            </a:r>
+          </a:p>
+          <a:p>
+            <a:r>
+              <a:rPr sz="2400"/>
+              <a:t>見落とされがちな誤差の原因（8 つ）</a:t>
             </a:r>
           </a:p>
           <a:p>
             <a:pPr lvl="1"/>
             <a:r>
-              <a:rPr sz="1800"/>
-              <a:t>17.4 年分、0.5 GeV〜1 TeV、10° × 10° の領域、0.08° の画素</a:t>
-            </a:r>
-          </a:p>
-          <a:p>
-            <a:r>
-              <a:rPr sz="2200"/>
-              <a:t>背景：銀河の拡散光＋等方の光から、ポアソン乱数で光子を作る</a:t>
-            </a:r>
-          </a:p>
-          <a:p>
-            <a:r>
-              <a:rPr sz="2200"/>
-              <a:t>暗黒物質の信号を入れる</a:t>
+              <a:rPr sz="2000"/>
+              <a:t>点として扱う・ハローの形・星の分布の形の仮定</a:t>
             </a:r>
           </a:p>
           <a:p>
             <a:pPr lvl="1"/>
             <a:r>
-              <a:rPr sz="1800"/>
-              <a:t>質量 42 GeV、b クォーク対、⟨σv⟩ = 1.4 × 10⁻²⁶ cm³/s</a:t>
+              <a:rPr sz="2000"/>
+              <a:t>非球対称（最大 0.4 dex）・非平衡（〜0.1）・連星（Ret II で〜0.3）</a:t>
             </a:r>
           </a:p>
           <a:p>
             <a:pPr lvl="1"/>
             <a:r>
-              <a:rPr sz="1800"/>
-              <a:t>銀河中心 GeV 超過（GCE）に合う値</a:t>
-            </a:r>
-          </a:p>
-          <a:p>
-            <a:r>
-              <a:rPr sz="2200"/>
-              <a:t>対象：Ursa Minor 1 個と、27 個の矮小銀河</a:t>
+              <a:rPr sz="2000"/>
+              <a:t>前景の星の混入・誤差の分布が正規分布でない</a:t>
+            </a:r>
+          </a:p>
+          <a:p>
+            <a:r>
+              <a:rPr sz="2400"/>
+              <a:t>Δlog₁₀J ≈ 0.5（約 3 倍）以上の誤差を見込むべき</a:t>
             </a:r>
           </a:p>
         </p:txBody>
@@ -11994,7 +12132,7 @@
             </a:r>
             <a:r>
               <a:rPr lang="en-US" sz="1400"/>
-              <a:t> Bertólez-Martínez, Hooper &amp; Khatee Zathul (2026), arXiv:2609.20944 §III</a:t>
+              <a:t> Bertólez-Martínez, Hooper &amp; Khatee Zathul (2026), arXiv:2609.20944 §II</a:t>
             </a:r>
             <a:endParaRPr lang="en-US"/>
           </a:p>
@@ -12042,7 +12180,7 @@
           <a:p>
             <a:r>
               <a:rPr sz="3400"/>
-              <a:t>詳細なmethodについて②：尤度と 2 つの誤差</a:t>
+              <a:t>詳細なmethodについて①：仮想データの作り方</a:t>
             </a:r>
           </a:p>
         </p:txBody>
@@ -12069,46 +12207,46 @@
           <a:p>
             <a:r>
               <a:rPr sz="2200"/>
-              <a:t>各天体の尤度 = 光子のポアソン尤度 × J の尤度</a:t>
+              <a:t>Fermi-LAT の観測を計算機の中で作る（FermiTools、fermipy）</a:t>
             </a:r>
           </a:p>
           <a:p>
             <a:pPr lvl="1"/>
             <a:r>
               <a:rPr sz="1800"/>
-              <a:t>L_J ∝ exp[ −(log₁₀J − log₁₀J_obs)² / 2σ_L² ]</a:t>
+              <a:t>17.4 年分、0.5 GeV〜1 TeV、10° × 10° の領域、0.08° の画素</a:t>
             </a:r>
           </a:p>
           <a:p>
             <a:r>
               <a:rPr sz="2200"/>
-              <a:t>27 個は尤度の積でまとめる（⟨σv⟩ は共通、J は天体ごと）</a:t>
+              <a:t>背景：銀河の拡散光＋等方の光から、ポアソン乱数で光子を作る</a:t>
             </a:r>
           </a:p>
           <a:p>
             <a:r>
               <a:rPr sz="2200"/>
-              <a:t>2 つの誤差を分けて動かす</a:t>
+              <a:t>暗黒物質の信号を入れる</a:t>
             </a:r>
           </a:p>
           <a:p>
             <a:pPr lvl="1"/>
             <a:r>
               <a:rPr sz="1800"/>
-              <a:t>σ：J の本当のばらつき（J_obs を J_true のまわりに σ でばらつかせる）</a:t>
+              <a:t>質量 42 GeV、b クォーク対、⟨σv⟩ = 1.4 × 10⁻²⁶ cm³/s</a:t>
             </a:r>
           </a:p>
           <a:p>
             <a:pPr lvl="1"/>
             <a:r>
               <a:rPr sz="1800"/>
-              <a:t>σ_L：解析で仮定する幅</a:t>
+              <a:t>銀河中心 GeV 超過（GCE）に合う値</a:t>
             </a:r>
           </a:p>
           <a:p>
             <a:r>
               <a:rPr sz="2200"/>
-              <a:t>95% 上限：TS が最大値から 2.71 下がる点（Wilks の定理を仮定）</a:t>
+              <a:t>対象：Ursa Minor 1 個と、27 個の矮小銀河</a:t>
             </a:r>
           </a:p>
         </p:txBody>
@@ -12147,7 +12285,7 @@
             </a:r>
             <a:r>
               <a:rPr lang="en-US" sz="1400"/>
-              <a:t> Bertólez-Martínez, Hooper &amp; Khatee Zathul (2026), arXiv:2609.20944 式 (6)–(10)</a:t>
+              <a:t> Bertólez-Martínez, Hooper &amp; Khatee Zathul (2026), arXiv:2609.20944 §III</a:t>
             </a:r>
             <a:endParaRPr lang="en-US"/>
           </a:p>
@@ -12195,7 +12333,7 @@
           <a:p>
             <a:r>
               <a:rPr sz="3400"/>
-              <a:t>詳細なmethodについて③：何を数えたか</a:t>
+              <a:t>詳細なmethodについて②：尤度と 2 つの誤差</a:t>
             </a:r>
           </a:p>
         </p:txBody>
@@ -12221,40 +12359,47 @@
           <a:lstStyle/>
           <a:p>
             <a:r>
-              <a:rPr sz="2400"/>
-              <a:t>本物の信号を入れた仮想データを何度も作る</a:t>
+              <a:rPr sz="2200"/>
+              <a:t>各天体の尤度 = 光子のポアソン尤度 × J の尤度</a:t>
             </a:r>
           </a:p>
           <a:p>
             <a:pPr lvl="1"/>
             <a:r>
-              <a:rPr sz="2000"/>
-              <a:t>Ursa Minor で 1000 回（基準の設定では 1 万回）</a:t>
-            </a:r>
-          </a:p>
-          <a:p>
-            <a:r>
-              <a:rPr sz="2400"/>
-              <a:t>それぞれで 95% 上限を出す</a:t>
-            </a:r>
-          </a:p>
-          <a:p>
-            <a:r>
-              <a:rPr sz="2400"/>
-              <a:t>上限が本物の ⟨σv⟩ より下 =「本物を無いと間違えた」</a:t>
-            </a:r>
-          </a:p>
-          <a:p>
-            <a:r>
-              <a:rPr sz="2400"/>
-              <a:t>95% 上限なら、間違いは 5% 以下のはず</a:t>
+              <a:rPr sz="1800"/>
+              <a:t>L_J ∝ exp[ −(log₁₀J − log₁₀J_obs)² / 2σ_L² ]</a:t>
+            </a:r>
+          </a:p>
+          <a:p>
+            <a:r>
+              <a:rPr sz="2200"/>
+              <a:t>27 個は尤度の積でまとめる（⟨σv⟩ は共通、J は天体ごと）</a:t>
+            </a:r>
+          </a:p>
+          <a:p>
+            <a:r>
+              <a:rPr sz="2200"/>
+              <a:t>2 つの誤差を分けて動かす</a:t>
             </a:r>
           </a:p>
           <a:p>
             <a:pPr lvl="1"/>
             <a:r>
-              <a:rPr sz="2000"/>
-              <a:t>これが守られているか（カバレッジ）を調べる</a:t>
+              <a:rPr sz="1800"/>
+              <a:t>σ：J の本当のばらつき（J_obs を J_true のまわりに σ でばらつかせる）</a:t>
+            </a:r>
+          </a:p>
+          <a:p>
+            <a:pPr lvl="1"/>
+            <a:r>
+              <a:rPr sz="1800"/>
+              <a:t>σ_L：解析で仮定する幅</a:t>
+            </a:r>
+          </a:p>
+          <a:p>
+            <a:r>
+              <a:rPr sz="2200"/>
+              <a:t>95% 上限：TS が最大値から 2.71 下がる点（Wilks の定理を仮定）</a:t>
             </a:r>
           </a:p>
         </p:txBody>
@@ -12293,7 +12438,7 @@
             </a:r>
             <a:r>
               <a:rPr lang="en-US" sz="1400"/>
-              <a:t> Bertólez-Martínez, Hooper &amp; Khatee Zathul (2026), arXiv:2609.20944 §IV</a:t>
+              <a:t> Bertólez-Martínez, Hooper &amp; Khatee Zathul (2026), arXiv:2609.20944 式 (6)–(10)</a:t>
             </a:r>
             <a:endParaRPr lang="en-US"/>
           </a:p>
@@ -12341,7 +12486,7 @@
           <a:p>
             <a:r>
               <a:rPr sz="3400"/>
-              <a:t>論文の結果①：Ursa Minor 1 個</a:t>
+              <a:t>詳細なmethodについて③：何を数えたか</a:t>
             </a:r>
           </a:p>
         </p:txBody>
@@ -12368,47 +12513,39 @@
           <a:p>
             <a:r>
               <a:rPr sz="2400"/>
-              <a:t>σ_L を 0.3 / 0.5 / 1.0 だけ大きくすると</a:t>
+              <a:t>本物の信号を入れた仮想データを何度も作る</a:t>
             </a:r>
           </a:p>
           <a:p>
             <a:pPr lvl="1"/>
             <a:r>
               <a:rPr sz="2000"/>
-              <a:t>上限が 1.5 / 2.5 / 11 倍ゆるくなる</a:t>
+              <a:t>Ursa Minor で 1000 回（基準の設定では 1 万回）</a:t>
             </a:r>
           </a:p>
           <a:p>
             <a:r>
               <a:rPr sz="2400"/>
-              <a:t>本当の誤差 σ だけ大きく、σ_L は小さいままだと</a:t>
+              <a:t>それぞれで 95% 上限を出す</a:t>
+            </a:r>
+          </a:p>
+          <a:p>
+            <a:r>
+              <a:rPr sz="2400"/>
+              <a:t>上限が本物の ⟨σv⟩ より下 =「本物を無いと間違えた」</a:t>
+            </a:r>
+          </a:p>
+          <a:p>
+            <a:r>
+              <a:rPr sz="2400"/>
+              <a:t>95% 上限なら、間違いは 5% 以下のはず</a:t>
             </a:r>
           </a:p>
           <a:p>
             <a:pPr lvl="1"/>
             <a:r>
               <a:rPr sz="2000"/>
-              <a:t>本物を除外する割合 1.7% / 8.0% / 22%</a:t>
-            </a:r>
-          </a:p>
-          <a:p>
-            <a:pPr lvl="1"/>
-            <a:r>
-              <a:rPr sz="2000"/>
-              <a:t>σ_L を σ に合わせれば 5% 以下に戻る</a:t>
-            </a:r>
-          </a:p>
-          <a:p>
-            <a:r>
-              <a:rPr sz="2400"/>
-              <a:t>形の間違い：球対称 NFW で解析 → 上限 2.4 倍厳しく</a:t>
-            </a:r>
-          </a:p>
-          <a:p>
-            <a:pPr lvl="1"/>
-            <a:r>
-              <a:rPr sz="2000"/>
-              <a:t>点として扱う → 1.4 倍厳しく</a:t>
+              <a:t>これが守られているか（カバレッジ）を調べる</a:t>
             </a:r>
           </a:p>
         </p:txBody>
@@ -12447,7 +12584,7 @@
             </a:r>
             <a:r>
               <a:rPr lang="en-US" sz="1400"/>
-              <a:t> Bertólez-Martínez, Hooper &amp; Khatee Zathul (2026), arXiv:2609.20944 §IV, Fig. 2–4</a:t>
+              <a:t> Bertólez-Martínez, Hooper &amp; Khatee Zathul (2026), arXiv:2609.20944 §IV</a:t>
             </a:r>
             <a:endParaRPr lang="en-US"/>
           </a:p>
@@ -12661,7 +12798,7 @@
           <a:p>
             <a:r>
               <a:rPr sz="3400"/>
-              <a:t>論文の結果②：27 個をまとめると</a:t>
+              <a:t>論文の結果①：Ursa Minor 1 個</a:t>
             </a:r>
           </a:p>
         </p:txBody>
@@ -12687,46 +12824,48 @@
           <a:lstStyle/>
           <a:p>
             <a:r>
-              <a:rPr sz="2200"/>
-              <a:t>σ_L を 0.3 / 0.5 / 1.0 → 上限 1.14 / 1.44 / 3.23 倍ゆるく</a:t>
-            </a:r>
-          </a:p>
-          <a:p>
-            <a:r>
-              <a:rPr sz="2200"/>
-              <a:t>誤差を正しく入れても、本物を除外する割合 21%（5% のはず）</a:t>
+              <a:rPr sz="2400"/>
+              <a:t>σ_L を 0.3 / 0.5 / 1.0 だけ大きくすると</a:t>
             </a:r>
           </a:p>
           <a:p>
             <a:pPr lvl="1"/>
             <a:r>
-              <a:rPr sz="1800"/>
-              <a:t>J の数が天体の数と一緒に増え、Wilks の定理の前提が崩れる</a:t>
-            </a:r>
-          </a:p>
-          <a:p>
-            <a:r>
-              <a:rPr sz="2200"/>
-              <a:t>本当の誤差を 0.3 / 0.5 / 1.0 大きくすると 31% / 49% / 88%</a:t>
+              <a:rPr sz="2000"/>
+              <a:t>上限が 1.5 / 2.5 / 11 倍ゆるくなる</a:t>
+            </a:r>
+          </a:p>
+          <a:p>
+            <a:r>
+              <a:rPr sz="2400"/>
+              <a:t>本当の誤差 σ だけ大きく、σ_L は小さいままだと</a:t>
             </a:r>
           </a:p>
           <a:p>
             <a:pPr lvl="1"/>
             <a:r>
-              <a:rPr sz="1800"/>
-              <a:t>σ_L を合わせても 23% / 28% / 38%</a:t>
-            </a:r>
-          </a:p>
-          <a:p>
-            <a:r>
-              <a:rPr sz="2200"/>
-              <a:t>原因：J が上に振れた天体が、上限を決めてしまう</a:t>
-            </a:r>
-          </a:p>
-          <a:p>
-            <a:r>
-              <a:rPr sz="2200"/>
-              <a:t>対策の一つ：何も無い領域で較正する</a:t>
+              <a:rPr sz="2000"/>
+              <a:t>本物を除外する割合 1.7% / 8.0% / 22%</a:t>
+            </a:r>
+          </a:p>
+          <a:p>
+            <a:pPr lvl="1"/>
+            <a:r>
+              <a:rPr sz="2000"/>
+              <a:t>σ_L を σ に合わせれば 5% 以下に戻る</a:t>
+            </a:r>
+          </a:p>
+          <a:p>
+            <a:r>
+              <a:rPr sz="2400"/>
+              <a:t>形の間違い：球対称 NFW で解析 → 上限 2.4 倍厳しく</a:t>
+            </a:r>
+          </a:p>
+          <a:p>
+            <a:pPr lvl="1"/>
+            <a:r>
+              <a:rPr sz="2000"/>
+              <a:t>点として扱う → 1.4 倍厳しく</a:t>
             </a:r>
           </a:p>
         </p:txBody>
@@ -12765,7 +12904,7 @@
             </a:r>
             <a:r>
               <a:rPr lang="en-US" sz="1400"/>
-              <a:t> Bertólez-Martínez, Hooper &amp; Khatee Zathul (2026), arXiv:2609.20944 §V, Fig. 5–7</a:t>
+              <a:t> Bertólez-Martínez, Hooper &amp; Khatee Zathul (2026), arXiv:2609.20944 §IV, Fig. 2–4</a:t>
             </a:r>
             <a:endParaRPr lang="en-US"/>
           </a:p>
@@ -12813,7 +12952,7 @@
           <a:p>
             <a:r>
               <a:rPr sz="3400"/>
-              <a:t>論文のまとめ</a:t>
+              <a:t>論文の結果②：27 個をまとめると</a:t>
             </a:r>
           </a:p>
         </p:txBody>
@@ -12839,20 +12978,46 @@
           <a:lstStyle/>
           <a:p>
             <a:r>
-              <a:rPr sz="2400"/>
-              <a:t>J の誤差や形を雑に扱うと、上限は厳しく出すぎ、本物の信号を除外しやすい</a:t>
-            </a:r>
-          </a:p>
-          <a:p>
-            <a:r>
-              <a:rPr sz="2400"/>
-              <a:t>「銀河中心と矮小銀河が矛盾する」とは、まだ言えない</a:t>
-            </a:r>
-          </a:p>
-          <a:p>
-            <a:r>
-              <a:rPr sz="2400"/>
-              <a:t>Δlog₁₀J ≈ 0.5 程度の誤差を見込むべき</a:t>
+              <a:rPr sz="2200"/>
+              <a:t>σ_L を 0.3 / 0.5 / 1.0 → 上限 1.14 / 1.44 / 3.23 倍ゆるく</a:t>
+            </a:r>
+          </a:p>
+          <a:p>
+            <a:r>
+              <a:rPr sz="2200"/>
+              <a:t>誤差を正しく入れても、本物を除外する割合 21%（5% のはず）</a:t>
+            </a:r>
+          </a:p>
+          <a:p>
+            <a:pPr lvl="1"/>
+            <a:r>
+              <a:rPr sz="1800"/>
+              <a:t>J の数が天体の数と一緒に増え、Wilks の定理の前提が崩れる</a:t>
+            </a:r>
+          </a:p>
+          <a:p>
+            <a:r>
+              <a:rPr sz="2200"/>
+              <a:t>本当の誤差を 0.3 / 0.5 / 1.0 大きくすると 31% / 49% / 88%</a:t>
+            </a:r>
+          </a:p>
+          <a:p>
+            <a:pPr lvl="1"/>
+            <a:r>
+              <a:rPr sz="1800"/>
+              <a:t>σ_L を合わせても 23% / 28% / 38%</a:t>
+            </a:r>
+          </a:p>
+          <a:p>
+            <a:r>
+              <a:rPr sz="2200"/>
+              <a:t>原因：J が上に振れた天体が、上限を決めてしまう</a:t>
+            </a:r>
+          </a:p>
+          <a:p>
+            <a:r>
+              <a:rPr sz="2200"/>
+              <a:t>対策の一つ：何も無い領域で較正する</a:t>
             </a:r>
           </a:p>
         </p:txBody>
@@ -12891,7 +13056,7 @@
             </a:r>
             <a:r>
               <a:rPr lang="en-US" sz="1400"/>
-              <a:t> Bertólez-Martínez, Hooper &amp; Khatee Zathul (2026), arXiv:2609.20944 §VI</a:t>
+              <a:t> Bertólez-Martínez, Hooper &amp; Khatee Zathul (2026), arXiv:2609.20944 §V, Fig. 5–7</a:t>
             </a:r>
             <a:endParaRPr lang="en-US"/>
           </a:p>
@@ -12939,7 +13104,7 @@
           <a:p>
             <a:r>
               <a:rPr sz="3400"/>
-              <a:t>論文の考え方を、僕の結果に当てはめる</a:t>
+              <a:t>論文のまとめ</a:t>
             </a:r>
           </a:p>
         </p:txBody>
@@ -12966,39 +13131,19 @@
           <a:p>
             <a:r>
               <a:rPr sz="2400"/>
-              <a:t>これまで：J の誤差 = 0（J は推定値そのまま）</a:t>
+              <a:t>J の誤差や形を雑に扱うと、上限は厳しく出すぎ、本物の信号を除外しやすい</a:t>
             </a:r>
           </a:p>
           <a:p>
             <a:r>
               <a:rPr sz="2400"/>
-              <a:t>今回：各天体の本当の J = 推定値 × 10^δ_i</a:t>
-            </a:r>
-          </a:p>
-          <a:p>
-            <a:pPr lvl="1"/>
-            <a:r>
-              <a:rPr sz="2000"/>
-              <a:t>δ_i は平均 0、幅 0.5 の正規分布（天体ごとに独立）</a:t>
-            </a:r>
-          </a:p>
-          <a:p>
-            <a:pPr lvl="1"/>
-            <a:r>
-              <a:rPr sz="2000"/>
-              <a:t>→ J がおよそ 1/3 倍〜3 倍の範囲でずれる</a:t>
+              <a:t>「銀河中心と矮小銀河が矛盾する」とは、まだ言えない</a:t>
             </a:r>
           </a:p>
           <a:p>
             <a:r>
               <a:rPr sz="2400"/>
-              <a:t>予測 σ は J に比例 → pred_i × 10^δ_i</a:t>
-            </a:r>
-          </a:p>
-          <a:p>
-            <a:r>
-              <a:rPr sz="2400"/>
-              <a:t>論文と同じく「J をずらした世界」をたくさん作る（20 万回）</a:t>
+              <a:t>Δlog₁₀J ≈ 0.5 程度の誤差を見込むべき</a:t>
             </a:r>
           </a:p>
         </p:txBody>
@@ -13037,7 +13182,7 @@
             </a:r>
             <a:r>
               <a:rPr lang="en-US" sz="1400"/>
-              <a:t> Bertólez-Martínez, Hooper &amp; Khatee Zathul (2026), arXiv:2609.20944 §IV</a:t>
+              <a:t> Bertólez-Martínez, Hooper &amp; Khatee Zathul (2026), arXiv:2609.20944 §VI</a:t>
             </a:r>
             <a:endParaRPr lang="en-US"/>
           </a:p>
@@ -13085,7 +13230,7 @@
           <a:p>
             <a:r>
               <a:rPr sz="3400"/>
-              <a:t>有意度の計算式のどこに誤差が入るか</a:t>
+              <a:t>論文の考え方を、僕の結果に当てはめる</a:t>
             </a:r>
           </a:p>
         </p:txBody>
@@ -13103,7 +13248,7 @@
         <p:spPr>
           <a:xfrm>
             <a:off x="841248" y="1463040"/>
-            <a:ext cx="10515600" cy="4937760"/>
+            <a:ext cx="10515600" cy="4114800"/>
           </a:xfrm>
         </p:spPr>
         <p:txBody>
@@ -13112,47 +13257,80 @@
           <a:p>
             <a:r>
               <a:rPr sz="2400"/>
-              <a:t>暗黒物質ありで期待される T</a:t>
+              <a:t>これまで：J の誤差 = 0（J は推定値そのまま）</a:t>
+            </a:r>
+          </a:p>
+          <a:p>
+            <a:r>
+              <a:rPr sz="2400"/>
+              <a:t>今回：各天体の本当の J = 推定値 × 10^δ_i</a:t>
             </a:r>
           </a:p>
           <a:p>
             <a:pPr lvl="1"/>
             <a:r>
               <a:rPr sz="2000"/>
-              <a:t>誤差なし：E[T] = Σ w_i pred_i / √Σ w_i² = 1.77</a:t>
+              <a:t>δ_i は平均 0、幅 0.5 の正規分布（天体ごとに独立）</a:t>
             </a:r>
           </a:p>
           <a:p>
             <a:pPr lvl="1"/>
             <a:r>
               <a:rPr sz="2000"/>
-              <a:t>誤差あり：E[T] = Σ w_i pred_i 10^δ_i / √Σ w_i²  ← δ でばらつく</a:t>
+              <a:t>→ J がおよそ 1/3 倍〜3 倍の範囲でずれる</a:t>
             </a:r>
           </a:p>
           <a:p>
             <a:r>
               <a:rPr sz="2400"/>
-              <a:t>実測 T にも測定の揺れ s がある（s = 1、または空で測った 1.26）</a:t>
+              <a:t>予測 σ は J に比例 → pred_i × 10^δ_i</a:t>
             </a:r>
           </a:p>
           <a:p>
             <a:r>
               <a:rPr sz="2400"/>
-              <a:t>暗黒物質ありで、実測 0.39 以下になる確率</a:t>
-            </a:r>
-          </a:p>
-          <a:p>
-            <a:pPr lvl="1"/>
-            <a:r>
-              <a:rPr sz="2000"/>
-              <a:t>p = （δ について平均）Φ( (0.39 − E[T]) / s )</a:t>
-            </a:r>
-          </a:p>
-          <a:p>
-            <a:r>
-              <a:rPr sz="2400"/>
-              <a:t>p を σ に直したもの =「ずれ」</a:t>
-            </a:r>
+              <a:t>論文と同じく「J をずらした世界」をたくさん作る（20 万回）</a:t>
+            </a:r>
+          </a:p>
+        </p:txBody>
+      </p:sp>
+      <p:sp>
+        <p:nvSpPr>
+          <p:cNvPr id="8" name="TextBox 7">
+            <a:extLst>
+              <a:ext uri="{FF2B5EF4-FFF2-40B4-BE49-F238E27FC236}">
+                <a16:creationId xmlns:a16="http://schemas.microsoft.com/office/drawing/2014/main" id="{F85CD606-E3CE-F314-B3EE-F3D7028115CB}"/>
+              </a:ext>
+            </a:extLst>
+          </p:cNvPr>
+          <p:cNvSpPr txBox="1"/>
+          <p:nvPr/>
+        </p:nvSpPr>
+        <p:spPr>
+          <a:xfrm>
+            <a:off x="5837182" y="5663239"/>
+            <a:ext cx="6093372" cy="923330"/>
+          </a:xfrm>
+          <a:prstGeom prst="rect">
+            <a:avLst/>
+          </a:prstGeom>
+          <a:noFill/>
+        </p:spPr>
+        <p:txBody>
+          <a:bodyPr wrap="square">
+            <a:spAutoFit/>
+          </a:bodyPr>
+          <a:lstStyle/>
+          <a:p>
+            <a:r>
+              <a:rPr lang="en-US" sz="1400" b="1"/>
+              <a:t>Reference:</a:t>
+            </a:r>
+            <a:r>
+              <a:rPr lang="en-US" sz="1400"/>
+              <a:t> Bertólez-Martínez, Hooper &amp; Khatee Zathul (2026), arXiv:2609.20944 §IV</a:t>
+            </a:r>
+            <a:endParaRPr lang="en-US"/>
           </a:p>
         </p:txBody>
       </p:sp>
@@ -13198,6 +13376,119 @@
           <a:p>
             <a:r>
               <a:rPr sz="3400"/>
+              <a:t>有意度の計算式のどこに誤差が入るか</a:t>
+            </a:r>
+          </a:p>
+        </p:txBody>
+      </p:sp>
+      <p:sp>
+        <p:nvSpPr>
+          <p:cNvPr id="3" name="Content Placeholder 2"/>
+          <p:cNvSpPr>
+            <a:spLocks noGrp="1"/>
+          </p:cNvSpPr>
+          <p:nvPr>
+            <p:ph idx="1"/>
+          </p:nvPr>
+        </p:nvSpPr>
+        <p:spPr>
+          <a:xfrm>
+            <a:off x="841248" y="1463040"/>
+            <a:ext cx="10515600" cy="4937760"/>
+          </a:xfrm>
+        </p:spPr>
+        <p:txBody>
+          <a:bodyPr/>
+          <a:lstStyle/>
+          <a:p>
+            <a:r>
+              <a:rPr sz="2400"/>
+              <a:t>暗黒物質ありで期待される T</a:t>
+            </a:r>
+          </a:p>
+          <a:p>
+            <a:pPr lvl="1"/>
+            <a:r>
+              <a:rPr sz="2000"/>
+              <a:t>誤差なし：E[T] = Σ w_i pred_i / √Σ w_i² = 1.77</a:t>
+            </a:r>
+          </a:p>
+          <a:p>
+            <a:pPr lvl="1"/>
+            <a:r>
+              <a:rPr sz="2000"/>
+              <a:t>誤差あり：E[T] = Σ w_i pred_i 10^δ_i / √Σ w_i²  ← δ でばらつく</a:t>
+            </a:r>
+          </a:p>
+          <a:p>
+            <a:r>
+              <a:rPr sz="2400"/>
+              <a:t>実測 T にも測定の揺れ s がある（s = 1、または空で測った 1.26）</a:t>
+            </a:r>
+          </a:p>
+          <a:p>
+            <a:r>
+              <a:rPr sz="2400"/>
+              <a:t>暗黒物質ありで、実測 0.39 以下になる確率</a:t>
+            </a:r>
+          </a:p>
+          <a:p>
+            <a:pPr lvl="1"/>
+            <a:r>
+              <a:rPr sz="2000"/>
+              <a:t>p = （δ について平均）Φ( (0.39 − E[T]) / s )</a:t>
+            </a:r>
+          </a:p>
+          <a:p>
+            <a:r>
+              <a:rPr sz="2400"/>
+              <a:t>p を σ に直したもの =「ずれ」</a:t>
+            </a:r>
+          </a:p>
+        </p:txBody>
+      </p:sp>
+    </p:spTree>
+  </p:cSld>
+  <p:clrMapOvr>
+    <a:masterClrMapping/>
+  </p:clrMapOvr>
+</p:sld>
+</file>
+
+<file path=ppt/slides/slide45.xml><?xml version="1.0" encoding="utf-8"?>
+<p:sld xmlns:a="http://schemas.openxmlformats.org/drawingml/2006/main" xmlns:r="http://schemas.openxmlformats.org/officeDocument/2006/relationships" xmlns:p="http://schemas.openxmlformats.org/presentationml/2006/main">
+  <p:cSld>
+    <p:spTree>
+      <p:nvGrpSpPr>
+        <p:cNvPr id="1" name=""/>
+        <p:cNvGrpSpPr/>
+        <p:nvPr/>
+      </p:nvGrpSpPr>
+      <p:grpSpPr>
+        <a:xfrm>
+          <a:off x="0" y="0"/>
+          <a:ext cx="0" cy="0"/>
+          <a:chOff x="0" y="0"/>
+          <a:chExt cx="0" cy="0"/>
+        </a:xfrm>
+      </p:grpSpPr>
+      <p:sp>
+        <p:nvSpPr>
+          <p:cNvPr id="2" name="Title 1"/>
+          <p:cNvSpPr>
+            <a:spLocks noGrp="1"/>
+          </p:cNvSpPr>
+          <p:nvPr>
+            <p:ph type="title"/>
+          </p:nvPr>
+        </p:nvSpPr>
+        <p:spPr/>
+        <p:txBody>
+          <a:bodyPr/>
+          <a:lstStyle/>
+          <a:p>
+            <a:r>
+              <a:rPr sz="3400"/>
               <a:t>結果：予測の幅と実測</a:t>
             </a:r>
           </a:p>
@@ -13265,113 +13556,6 @@
 </p:sld>
 </file>
 
-<file path=ppt/slides/slide45.xml><?xml version="1.0" encoding="utf-8"?>
-<p:sld xmlns:a="http://schemas.openxmlformats.org/drawingml/2006/main" xmlns:r="http://schemas.openxmlformats.org/officeDocument/2006/relationships" xmlns:p="http://schemas.openxmlformats.org/presentationml/2006/main">
-  <p:cSld>
-    <p:spTree>
-      <p:nvGrpSpPr>
-        <p:cNvPr id="1" name=""/>
-        <p:cNvGrpSpPr/>
-        <p:nvPr/>
-      </p:nvGrpSpPr>
-      <p:grpSpPr>
-        <a:xfrm>
-          <a:off x="0" y="0"/>
-          <a:ext cx="0" cy="0"/>
-          <a:chOff x="0" y="0"/>
-          <a:chExt cx="0" cy="0"/>
-        </a:xfrm>
-      </p:grpSpPr>
-      <p:sp>
-        <p:nvSpPr>
-          <p:cNvPr id="2" name="Title 1"/>
-          <p:cNvSpPr>
-            <a:spLocks noGrp="1"/>
-          </p:cNvSpPr>
-          <p:nvPr>
-            <p:ph type="title"/>
-          </p:nvPr>
-        </p:nvSpPr>
-        <p:spPr/>
-        <p:txBody>
-          <a:bodyPr/>
-          <a:lstStyle/>
-          <a:p>
-            <a:r>
-              <a:rPr sz="3400"/>
-              <a:t>結果の数字</a:t>
-            </a:r>
-          </a:p>
-        </p:txBody>
-      </p:sp>
-      <p:sp>
-        <p:nvSpPr>
-          <p:cNvPr id="3" name="Content Placeholder 2"/>
-          <p:cNvSpPr>
-            <a:spLocks noGrp="1"/>
-          </p:cNvSpPr>
-          <p:nvPr>
-            <p:ph idx="1"/>
-          </p:nvPr>
-        </p:nvSpPr>
-        <p:spPr>
-          <a:xfrm>
-            <a:off x="841248" y="1463040"/>
-            <a:ext cx="10515600" cy="4937760"/>
-          </a:xfrm>
-        </p:spPr>
-        <p:txBody>
-          <a:bodyPr/>
-          <a:lstStyle/>
-          <a:p>
-            <a:r>
-              <a:rPr sz="2400"/>
-              <a:t>局所密度 0.42 GeV/cm³ の場合（43 天体、20 GeV）</a:t>
-            </a:r>
-          </a:p>
-          <a:p>
-            <a:pPr lvl="1"/>
-            <a:r>
-              <a:rPr sz="2000"/>
-              <a:t>J の誤差なし：期待 1.77、ずれ 1.4σ（s = 1.26 なら 1.1σ）</a:t>
-            </a:r>
-          </a:p>
-          <a:p>
-            <a:pPr lvl="1"/>
-            <a:r>
-              <a:rPr sz="2000"/>
-              <a:t>J の誤差あり：期待 2.5（68% で 1.4–5.1）、ずれ 1.5σ（1.3σ）</a:t>
-            </a:r>
-          </a:p>
-          <a:p>
-            <a:r>
-              <a:rPr sz="2400"/>
-              <a:t>天の川側の局所密度を 0.3〜0.6 GeV/cm³ で動かしても</a:t>
-            </a:r>
-          </a:p>
-          <a:p>
-            <a:pPr lvl="1"/>
-            <a:r>
-              <a:rPr sz="2000"/>
-              <a:t>ずれは較正後 2.4σ 以下</a:t>
-            </a:r>
-          </a:p>
-          <a:p>
-            <a:r>
-              <a:rPr sz="2400"/>
-              <a:t>→ 暗黒物質と矛盾はしないが、確認もできない（判定できない）</a:t>
-            </a:r>
-          </a:p>
-        </p:txBody>
-      </p:sp>
-    </p:spTree>
-  </p:cSld>
-  <p:clrMapOvr>
-    <a:masterClrMapping/>
-  </p:clrMapOvr>
-</p:sld>
-</file>
-
 <file path=ppt/slides/slide46.xml><?xml version="1.0" encoding="utf-8"?>
 <p:sld xmlns:a="http://schemas.openxmlformats.org/drawingml/2006/main" xmlns:r="http://schemas.openxmlformats.org/officeDocument/2006/relationships" xmlns:p="http://schemas.openxmlformats.org/presentationml/2006/main">
   <p:cSld>
@@ -13406,7 +13590,7 @@
           <a:p>
             <a:r>
               <a:rPr sz="3400"/>
-              <a:t>2 つの数字の違い：15σ と 1.3σ</a:t>
+              <a:t>結果の数字</a:t>
             </a:r>
           </a:p>
         </p:txBody>
@@ -13433,40 +13617,40 @@
           <a:p>
             <a:r>
               <a:rPr sz="2400"/>
-              <a:t>約 15σ：天の川のハロー超過の強さ</a:t>
+              <a:t>局所密度 0.42 GeV/cm³ の場合（43 天体、20 GeV）</a:t>
             </a:r>
           </a:p>
           <a:p>
             <a:pPr lvl="1"/>
             <a:r>
               <a:rPr sz="2000"/>
-              <a:t>19.5σ を、何も無い空でのばらつき 1.26 で割ったもの</a:t>
+              <a:t>J の誤差なし：期待 1.77、ずれ 1.4σ（s = 1.26 なら 1.1σ）</a:t>
             </a:r>
           </a:p>
           <a:p>
             <a:pPr lvl="1"/>
             <a:r>
               <a:rPr sz="2000"/>
-              <a:t>「天の川に、背景では説明しにくい何かがある」</a:t>
+              <a:t>J の誤差あり：期待 2.5（68% で 1.4–5.1）、ずれ 1.5σ（1.3σ）</a:t>
             </a:r>
           </a:p>
           <a:p>
             <a:r>
               <a:rPr sz="2400"/>
-              <a:t>1.3σ：矮小銀河での「予測と実測のずれ」</a:t>
+              <a:t>天の川側の局所密度を 0.3〜0.6 GeV/cm³ で動かしても</a:t>
             </a:r>
           </a:p>
           <a:p>
             <a:pPr lvl="1"/>
             <a:r>
               <a:rPr sz="2000"/>
-              <a:t>「天の川の超過が暗黒物質だとしても、矮小銀河の結果と矛盾しない」</a:t>
+              <a:t>ずれは較正後 2.4σ 以下</a:t>
             </a:r>
           </a:p>
           <a:p>
             <a:r>
               <a:rPr sz="2400"/>
-              <a:t>別のものを測った、別の数字</a:t>
+              <a:t>→ 暗黒物質と矛盾はしないが、確認もできない（判定できない）</a:t>
             </a:r>
           </a:p>
         </p:txBody>
@@ -13513,7 +13697,7 @@
           <a:p>
             <a:r>
               <a:rPr sz="3400"/>
-              <a:t>結論</a:t>
+              <a:t>2 つの数字の違い：15σ と 1.3σ</a:t>
             </a:r>
           </a:p>
         </p:txBody>
@@ -13540,33 +13724,40 @@
           <a:p>
             <a:r>
               <a:rPr sz="2400"/>
-              <a:t>Totani の超過を再現（名目 19.5σ、較正後 約 15σ）</a:t>
+              <a:t>約 15σ：天の川のハロー超過の強さ</a:t>
+            </a:r>
+          </a:p>
+          <a:p>
+            <a:pPr lvl="1"/>
+            <a:r>
+              <a:rPr sz="2000"/>
+              <a:t>19.5σ を、何も無い空でのばらつき 1.26 で割ったもの</a:t>
+            </a:r>
+          </a:p>
+          <a:p>
+            <a:pPr lvl="1"/>
+            <a:r>
+              <a:rPr sz="2000"/>
+              <a:t>「天の川に、背景では説明しにくい何かがある」</a:t>
             </a:r>
           </a:p>
           <a:p>
             <a:r>
               <a:rPr sz="2400"/>
-              <a:t>ICS の明るさ・バブル・計算の近似の間違いでは説明できない</a:t>
+              <a:t>1.3σ：矮小銀河での「予測と実測のずれ」</a:t>
             </a:r>
           </a:p>
           <a:p>
             <a:pPr lvl="1"/>
             <a:r>
               <a:rPr sz="2000"/>
-              <a:t>暗黒物質の証拠ではない（ICS の空間の形は未確認）</a:t>
+              <a:t>「天の川の超過が暗黒物質だとしても、矮小銀河の結果と矛盾しない」</a:t>
             </a:r>
           </a:p>
           <a:p>
             <a:r>
               <a:rPr sz="2400"/>
-              <a:t>矮小銀河では非検出</a:t>
-            </a:r>
-          </a:p>
-          <a:p>
-            <a:pPr lvl="1"/>
-            <a:r>
-              <a:rPr sz="2000"/>
-              <a:t>J の誤差（約 3 倍）を入れると、予測とのずれは 1.3σ → 判定できない</a:t>
+              <a:t>別のものを測った、別の数字</a:t>
             </a:r>
           </a:p>
         </p:txBody>
@@ -13613,7 +13804,7 @@
           <a:p>
             <a:r>
               <a:rPr sz="3400"/>
-              <a:t>統計の視点から：この研究に足りなかったもの</a:t>
+              <a:t>結論</a:t>
             </a:r>
           </a:p>
         </p:txBody>
@@ -13631,7 +13822,7 @@
         <p:spPr>
           <a:xfrm>
             <a:off x="841248" y="1463040"/>
-            <a:ext cx="10515600" cy="4114800"/>
+            <a:ext cx="10515600" cy="4937760"/>
           </a:xfrm>
         </p:spPr>
         <p:txBody>
@@ -13640,81 +13831,34 @@
           <a:p>
             <a:r>
               <a:rPr sz="2400"/>
-              <a:t>σ が 1.26 倍に膨らんだ原因</a:t>
+              <a:t>Totani の超過を再現（名目 19.5σ、較正後 約 15σ）</a:t>
+            </a:r>
+          </a:p>
+          <a:p>
+            <a:r>
+              <a:rPr sz="2400"/>
+              <a:t>ICS の明るさ・バブル・計算の近似の間違いでは説明できない</a:t>
             </a:r>
           </a:p>
           <a:p>
             <a:pPr lvl="1"/>
             <a:r>
               <a:rPr sz="2000"/>
-              <a:t>尤度は「型紙（GALPROP）は完璧、誤差は光子の数のばらつきだけ」と仮定</a:t>
+              <a:t>暗黒物質の証拠ではない（ICS の空間の形は未確認）</a:t>
+            </a:r>
+          </a:p>
+          <a:p>
+            <a:r>
+              <a:rPr sz="2400"/>
+              <a:t>矮小銀河では非検出</a:t>
             </a:r>
           </a:p>
           <a:p>
             <a:pPr lvl="1"/>
             <a:r>
               <a:rPr sz="2000"/>
-              <a:t>型紙そのものの誤差が、統計モデルに入っていない</a:t>
-            </a:r>
-          </a:p>
-          <a:p>
-            <a:r>
-              <a:rPr sz="2400"/>
-              <a:t>データ同化：シミュレーションの誤差と観測の誤差を分けて、統計モデルに入れる枠組み</a:t>
-            </a:r>
-          </a:p>
-          <a:p>
-            <a:r>
-              <a:rPr sz="2400"/>
-              <a:t>J をずらして何度も計算したのも、分布をたくさんのサンプルで表すという同じ発想</a:t>
-            </a:r>
-          </a:p>
-          <a:p>
-            <a:pPr lvl="1"/>
-            <a:r>
-              <a:rPr sz="2000"/>
-              <a:t>（アンサンブル・粒子フィルタ）</a:t>
-            </a:r>
-          </a:p>
-        </p:txBody>
-      </p:sp>
-      <p:sp>
-        <p:nvSpPr>
-          <p:cNvPr id="8" name="TextBox 7">
-            <a:extLst>
-              <a:ext uri="{FF2B5EF4-FFF2-40B4-BE49-F238E27FC236}">
-                <a16:creationId xmlns:a16="http://schemas.microsoft.com/office/drawing/2014/main" id="{F85CD606-E3CE-F314-B3EE-F3D7028115CB}"/>
-              </a:ext>
-            </a:extLst>
-          </p:cNvPr>
-          <p:cNvSpPr txBox="1"/>
-          <p:nvPr/>
-        </p:nvSpPr>
-        <p:spPr>
-          <a:xfrm>
-            <a:off x="5837182" y="5663239"/>
-            <a:ext cx="6093372" cy="923330"/>
-          </a:xfrm>
-          <a:prstGeom prst="rect">
-            <a:avLst/>
-          </a:prstGeom>
-          <a:noFill/>
-        </p:spPr>
-        <p:txBody>
-          <a:bodyPr wrap="square">
-            <a:spAutoFit/>
-          </a:bodyPr>
-          <a:lstStyle/>
-          <a:p>
-            <a:r>
-              <a:rPr lang="en-US" sz="1400" b="1"/>
-              <a:t>Reference:</a:t>
-            </a:r>
-            <a:r>
-              <a:rPr lang="en-US" sz="1400"/>
-              <a:t> 中村和幸 (2017), 数理解析研究所講究録 2057, 59–66</a:t>
-            </a:r>
-            <a:endParaRPr lang="en-US"/>
+              <a:t>J の誤差（約 3 倍）を入れると、予測とのずれは 1.3σ → 判定できない</a:t>
+            </a:r>
           </a:p>
         </p:txBody>
       </p:sp>
@@ -13760,7 +13904,7 @@
           <a:p>
             <a:r>
               <a:rPr sz="3400"/>
-              <a:t>参考文献</a:t>
+              <a:t>統計の視点から：この研究に足りなかったもの</a:t>
             </a:r>
           </a:p>
         </p:txBody>
@@ -13778,7 +13922,7 @@
         <p:spPr>
           <a:xfrm>
             <a:off x="841248" y="1463040"/>
-            <a:ext cx="10515600" cy="4937760"/>
+            <a:ext cx="10515600" cy="4114800"/>
           </a:xfrm>
         </p:spPr>
         <p:txBody>
@@ -13786,57 +13930,82 @@
           <a:lstStyle/>
           <a:p>
             <a:r>
-              <a:rPr sz="1800"/>
-              <a:t>T. Totani (2025), arXiv:2507.07209</a:t>
-            </a:r>
-          </a:p>
-          <a:p>
-            <a:r>
-              <a:rPr sz="1800"/>
-              <a:t>Bertólez-Martínez, Hooper &amp; Khatee Zathul (2026), arXiv:2609.20944</a:t>
-            </a:r>
-          </a:p>
-          <a:p>
-            <a:r>
-              <a:rPr sz="1800"/>
-              <a:t>S. S. Wilks (1938), Ann. Math. Stat. 9, 60</a:t>
-            </a:r>
-          </a:p>
-          <a:p>
-            <a:r>
-              <a:rPr sz="1800"/>
-              <a:t>D. Foreman-Mackey et al. (2013), PASP 125, 306</a:t>
-            </a:r>
-          </a:p>
-          <a:p>
-            <a:r>
-              <a:rPr sz="1800"/>
-              <a:t>I. V. Moskalenko &amp; A. W. Strong (2000), ApJ 528, 357</a:t>
-            </a:r>
-          </a:p>
-          <a:p>
-            <a:r>
-              <a:rPr sz="1800"/>
-              <a:t>B. Efron &amp; R. J. Tibshirani (1993), An Introduction to the Bootstrap</a:t>
-            </a:r>
-          </a:p>
-          <a:p>
-            <a:r>
-              <a:rPr sz="1800"/>
-              <a:t>A. B. Pace (2025), Open J. Astrophys. 8, 142</a:t>
-            </a:r>
-          </a:p>
-          <a:p>
-            <a:r>
-              <a:rPr sz="1800"/>
-              <a:t>A. B. Pace &amp; L. E. Strigari (2019), MNRAS 482, 3480</a:t>
-            </a:r>
-          </a:p>
-          <a:p>
-            <a:r>
-              <a:rPr sz="1800"/>
-              <a:t>中村和幸 (2017), 数理解析研究所講究録 2057, 59–66</a:t>
-            </a:r>
+              <a:rPr sz="2400"/>
+              <a:t>σ が 1.26 倍に膨らんだ原因</a:t>
+            </a:r>
+          </a:p>
+          <a:p>
+            <a:pPr lvl="1"/>
+            <a:r>
+              <a:rPr sz="2000"/>
+              <a:t>尤度は「型紙（GALPROP）は完璧、誤差は光子の数のばらつきだけ」と仮定</a:t>
+            </a:r>
+          </a:p>
+          <a:p>
+            <a:pPr lvl="1"/>
+            <a:r>
+              <a:rPr sz="2000"/>
+              <a:t>型紙そのものの誤差が、統計モデルに入っていない</a:t>
+            </a:r>
+          </a:p>
+          <a:p>
+            <a:r>
+              <a:rPr sz="2400"/>
+              <a:t>データ同化：シミュレーションの誤差と観測の誤差を分けて、統計モデルに入れる枠組み</a:t>
+            </a:r>
+          </a:p>
+          <a:p>
+            <a:r>
+              <a:rPr sz="2400"/>
+              <a:t>J をずらして何度も計算したのも、分布をたくさんのサンプルで表すという同じ発想</a:t>
+            </a:r>
+          </a:p>
+          <a:p>
+            <a:pPr lvl="1"/>
+            <a:r>
+              <a:rPr sz="2000"/>
+              <a:t>（アンサンブル・粒子フィルタ）</a:t>
+            </a:r>
+          </a:p>
+        </p:txBody>
+      </p:sp>
+      <p:sp>
+        <p:nvSpPr>
+          <p:cNvPr id="8" name="TextBox 7">
+            <a:extLst>
+              <a:ext uri="{FF2B5EF4-FFF2-40B4-BE49-F238E27FC236}">
+                <a16:creationId xmlns:a16="http://schemas.microsoft.com/office/drawing/2014/main" id="{F85CD606-E3CE-F314-B3EE-F3D7028115CB}"/>
+              </a:ext>
+            </a:extLst>
+          </p:cNvPr>
+          <p:cNvSpPr txBox="1"/>
+          <p:nvPr/>
+        </p:nvSpPr>
+        <p:spPr>
+          <a:xfrm>
+            <a:off x="5837182" y="5663239"/>
+            <a:ext cx="6093372" cy="923330"/>
+          </a:xfrm>
+          <a:prstGeom prst="rect">
+            <a:avLst/>
+          </a:prstGeom>
+          <a:noFill/>
+        </p:spPr>
+        <p:txBody>
+          <a:bodyPr wrap="square">
+            <a:spAutoFit/>
+          </a:bodyPr>
+          <a:lstStyle/>
+          <a:p>
+            <a:r>
+              <a:rPr lang="en-US" sz="1400" b="1"/>
+              <a:t>Reference:</a:t>
+            </a:r>
+            <a:r>
+              <a:rPr lang="en-US" sz="1400"/>
+              <a:t> 中村和幸 (2017), 数理解析研究所講究録 2057, 59–66</a:t>
+            </a:r>
+            <a:endParaRPr lang="en-US"/>
           </a:p>
         </p:txBody>
       </p:sp>
@@ -14011,6 +14180,128 @@
               <a:t> T. Totani (2025), arXiv:2507.07209 §2.3</a:t>
             </a:r>
             <a:endParaRPr lang="en-US"/>
+          </a:p>
+        </p:txBody>
+      </p:sp>
+    </p:spTree>
+  </p:cSld>
+  <p:clrMapOvr>
+    <a:masterClrMapping/>
+  </p:clrMapOvr>
+</p:sld>
+</file>
+
+<file path=ppt/slides/slide50.xml><?xml version="1.0" encoding="utf-8"?>
+<p:sld xmlns:a="http://schemas.openxmlformats.org/drawingml/2006/main" xmlns:r="http://schemas.openxmlformats.org/officeDocument/2006/relationships" xmlns:p="http://schemas.openxmlformats.org/presentationml/2006/main">
+  <p:cSld>
+    <p:spTree>
+      <p:nvGrpSpPr>
+        <p:cNvPr id="1" name=""/>
+        <p:cNvGrpSpPr/>
+        <p:nvPr/>
+      </p:nvGrpSpPr>
+      <p:grpSpPr>
+        <a:xfrm>
+          <a:off x="0" y="0"/>
+          <a:ext cx="0" cy="0"/>
+          <a:chOff x="0" y="0"/>
+          <a:chExt cx="0" cy="0"/>
+        </a:xfrm>
+      </p:grpSpPr>
+      <p:sp>
+        <p:nvSpPr>
+          <p:cNvPr id="2" name="Title 1"/>
+          <p:cNvSpPr>
+            <a:spLocks noGrp="1"/>
+          </p:cNvSpPr>
+          <p:nvPr>
+            <p:ph type="title"/>
+          </p:nvPr>
+        </p:nvSpPr>
+        <p:spPr/>
+        <p:txBody>
+          <a:bodyPr/>
+          <a:lstStyle/>
+          <a:p>
+            <a:r>
+              <a:rPr sz="3400"/>
+              <a:t>参考文献</a:t>
+            </a:r>
+          </a:p>
+        </p:txBody>
+      </p:sp>
+      <p:sp>
+        <p:nvSpPr>
+          <p:cNvPr id="3" name="Content Placeholder 2"/>
+          <p:cNvSpPr>
+            <a:spLocks noGrp="1"/>
+          </p:cNvSpPr>
+          <p:nvPr>
+            <p:ph idx="1"/>
+          </p:nvPr>
+        </p:nvSpPr>
+        <p:spPr>
+          <a:xfrm>
+            <a:off x="841248" y="1463040"/>
+            <a:ext cx="10515600" cy="4937760"/>
+          </a:xfrm>
+        </p:spPr>
+        <p:txBody>
+          <a:bodyPr/>
+          <a:lstStyle/>
+          <a:p>
+            <a:r>
+              <a:rPr sz="1800"/>
+              <a:t>T. Totani (2025), arXiv:2507.07209</a:t>
+            </a:r>
+          </a:p>
+          <a:p>
+            <a:r>
+              <a:rPr sz="1800"/>
+              <a:t>Bertólez-Martínez, Hooper &amp; Khatee Zathul (2026), arXiv:2609.20944</a:t>
+            </a:r>
+          </a:p>
+          <a:p>
+            <a:r>
+              <a:rPr sz="1800"/>
+              <a:t>S. S. Wilks (1938), Ann. Math. Stat. 9, 60</a:t>
+            </a:r>
+          </a:p>
+          <a:p>
+            <a:r>
+              <a:rPr sz="1800"/>
+              <a:t>D. Foreman-Mackey et al. (2013), PASP 125, 306</a:t>
+            </a:r>
+          </a:p>
+          <a:p>
+            <a:r>
+              <a:rPr sz="1800"/>
+              <a:t>I. V. Moskalenko &amp; A. W. Strong (2000), ApJ 528, 357</a:t>
+            </a:r>
+          </a:p>
+          <a:p>
+            <a:r>
+              <a:rPr sz="1800"/>
+              <a:t>B. Efron &amp; R. J. Tibshirani (1993), An Introduction to the Bootstrap</a:t>
+            </a:r>
+          </a:p>
+          <a:p>
+            <a:r>
+              <a:rPr sz="1800"/>
+              <a:t>A. B. Pace (2025), Open J. Astrophys. 8, 142</a:t>
+            </a:r>
+          </a:p>
+          <a:p>
+            <a:r>
+              <a:rPr sz="1800"/>
+              <a:t>A. B. Pace &amp; L. E. Strigari (2019), MNRAS 482, 3480</a:t>
+            </a:r>
+          </a:p>
+          <a:p>
+            <a:r>
+              <a:rPr sz="1800"/>
+              <a:t>中村和幸 (2017), 数理解析研究所講究録 2057, 59–66</a:t>
+            </a:r>
           </a:p>
         </p:txBody>
       </p:sp>

--- a/slides/2026-10-02_研究進捗報告_claude.pptx
+++ b/slides/2026-10-02_研究進捗報告_claude.pptx
@@ -3709,7 +3709,7 @@
           </a:p>
           <a:p>
             <a:r>
-              <a:t>400 歩は本研究のコードで決めた値 (Totani の論文には書かれていない)。自己相関時間 τ ≈ 650 歩より短いので、誤差を出すには捨てる歩数を増やすほうが安全。最良値と有意度には影響しない。</a:t>
+              <a:t>捨てる歩数は本研究で決めた値 (Totani の論文には書かれていない)。最初は 400 歩だったが、歩く人数 (20/32/64)・乱数の種 (3 通り)・歩数 (6000/20000) を変えて確かめたところ、400 歩では誤差の上端が乱数の種によって 1.59〜1.89 とぶれたので、2000 歩に変えた (2000 歩ではどれも 1.56〜1.57。この確認は型紙の作り方が少し違う確認用の計算で、本番の 2000 歩の誤差は 1.42〜1.58)。最良値 1.51 と有意度 19.5σ は捨てる歩数によらず同じ。400 歩のときの誤差は 1.43〜1.61。</a:t>
             </a:r>
           </a:p>
         </p:txBody>
@@ -4309,7 +4309,7 @@
           </a:p>
           <a:p>
             <a:r>
-              <a:t>emcee: Foreman-Mackey et al. (2013) の Python ライブラリ。中身は Goodman &amp; Weare (2010) のアンサンブル法 (ストレッチ移動)。歩く人数・歩数・捨てる歩数は Totani の論文に書かれていないので、本研究で決めた (32 人・6000 歩・400 歩)。</a:t>
+              <a:t>emcee: Foreman-Mackey et al. (2013) の Python ライブラリ。中身は Goodman &amp; Weare (2010) のアンサンブル法 (ストレッチ移動)。歩く人数・歩数・捨てる歩数は Totani の論文に書かれていないので、本研究で決めた (32 人・6000 歩・最初の 2000 歩を捨てる)。</a:t>
             </a:r>
           </a:p>
         </p:txBody>
@@ -10176,14 +10176,14 @@
             <a:pPr lvl="1"/>
             <a:r>
               <a:rPr sz="1500"/>
-              <a:t>最初の 400 歩（ふもとから登っている途中）は捨て、残りの下から 16%〜84%</a:t>
+              <a:t>最初の 2000 歩（ふもとから登っている途中）は捨て、残りの下から 16%〜84%</a:t>
             </a:r>
           </a:p>
           <a:p>
             <a:pPr lvl="1"/>
             <a:r>
               <a:rPr sz="1500"/>
-              <a:t>20.8 GeV：1.43〜1.61</a:t>
+              <a:t>20.8 GeV：1.42〜1.58</a:t>
             </a:r>
           </a:p>
           <a:p>
